--- a/Santander_Project_Record.pptx
+++ b/Santander_Project_Record.pptx
@@ -9941,7 +9941,7 @@
         <p:spPr>
           <a:xfrm>
             <a:off x="384048" y="1024128"/>
-            <a:ext cx="7132320" cy="2148840"/>
+            <a:ext cx="7132320" cy="2834640"/>
           </a:xfrm>
           <a:prstGeom prst="rect">
             <a:avLst/>
@@ -10098,8 +10098,8 @@
         </p:nvSpPr>
         <p:spPr>
           <a:xfrm>
-            <a:off x="566928" y="1755648"/>
-            <a:ext cx="6858000" cy="329184"/>
+            <a:off x="566928" y="1783080"/>
+            <a:ext cx="6858000" cy="301752"/>
           </a:xfrm>
           <a:prstGeom prst="rect">
             <a:avLst/>
@@ -10143,8 +10143,8 @@
         </p:nvSpPr>
         <p:spPr>
           <a:xfrm>
-            <a:off x="676656" y="1810512"/>
-            <a:ext cx="1417320" cy="256031"/>
+            <a:off x="676656" y="1837943"/>
+            <a:ext cx="1417320" cy="228600"/>
           </a:xfrm>
           <a:prstGeom prst="rect">
             <a:avLst/>
@@ -10178,8 +10178,8 @@
         </p:nvSpPr>
         <p:spPr>
           <a:xfrm>
-            <a:off x="2212848" y="1810512"/>
-            <a:ext cx="5166359" cy="256031"/>
+            <a:off x="2212848" y="1837943"/>
+            <a:ext cx="5166359" cy="228600"/>
           </a:xfrm>
           <a:prstGeom prst="rect">
             <a:avLst/>
@@ -10214,7 +10214,7 @@
         <p:spPr>
           <a:xfrm>
             <a:off x="566928" y="2084831"/>
-            <a:ext cx="6858000" cy="329184"/>
+            <a:ext cx="6858000" cy="301752"/>
           </a:xfrm>
           <a:prstGeom prst="rect">
             <a:avLst/>
@@ -10259,7 +10259,7 @@
         <p:spPr>
           <a:xfrm>
             <a:off x="676656" y="2139696"/>
-            <a:ext cx="1417320" cy="256031"/>
+            <a:ext cx="1417320" cy="228600"/>
           </a:xfrm>
           <a:prstGeom prst="rect">
             <a:avLst/>
@@ -10294,7 +10294,7 @@
         <p:spPr>
           <a:xfrm>
             <a:off x="2212848" y="2139696"/>
-            <a:ext cx="5166359" cy="256031"/>
+            <a:ext cx="5166359" cy="228600"/>
           </a:xfrm>
           <a:prstGeom prst="rect">
             <a:avLst/>
@@ -10328,8 +10328,8 @@
         </p:nvSpPr>
         <p:spPr>
           <a:xfrm>
-            <a:off x="566928" y="2414015"/>
-            <a:ext cx="6858000" cy="329184"/>
+            <a:off x="566928" y="2386584"/>
+            <a:ext cx="6858000" cy="301752"/>
           </a:xfrm>
           <a:prstGeom prst="rect">
             <a:avLst/>
@@ -10373,8 +10373,8 @@
         </p:nvSpPr>
         <p:spPr>
           <a:xfrm>
-            <a:off x="676656" y="2468879"/>
-            <a:ext cx="1417320" cy="256031"/>
+            <a:off x="676656" y="2441448"/>
+            <a:ext cx="1417320" cy="228600"/>
           </a:xfrm>
           <a:prstGeom prst="rect">
             <a:avLst/>
@@ -10408,8 +10408,8 @@
         </p:nvSpPr>
         <p:spPr>
           <a:xfrm>
-            <a:off x="2212848" y="2468879"/>
-            <a:ext cx="5166359" cy="256031"/>
+            <a:off x="2212848" y="2441448"/>
+            <a:ext cx="5166359" cy="228600"/>
           </a:xfrm>
           <a:prstGeom prst="rect">
             <a:avLst/>
@@ -10430,7 +10430,7 @@
                 </a:solidFill>
                 <a:latin typeface="Calibri"/>
               </a:rPr>
-              <a:t>Vite 5 + vite-plugin-singlefile → all JS/CSS/fonts inlined</a:t>
+              <a:t>Vite 5 + vite-plugin-singlefile — all JS/CSS/fonts inlined</a:t>
             </a:r>
           </a:p>
         </p:txBody>
@@ -10443,8 +10443,8 @@
         </p:nvSpPr>
         <p:spPr>
           <a:xfrm>
-            <a:off x="566928" y="2743200"/>
-            <a:ext cx="6858000" cy="329184"/>
+            <a:off x="566928" y="2688336"/>
+            <a:ext cx="6858000" cy="301752"/>
           </a:xfrm>
           <a:prstGeom prst="rect">
             <a:avLst/>
@@ -10488,8 +10488,8 @@
         </p:nvSpPr>
         <p:spPr>
           <a:xfrm>
-            <a:off x="676656" y="2798064"/>
-            <a:ext cx="1417320" cy="256031"/>
+            <a:off x="676656" y="2743200"/>
+            <a:ext cx="1417320" cy="228600"/>
           </a:xfrm>
           <a:prstGeom prst="rect">
             <a:avLst/>
@@ -10523,8 +10523,8 @@
         </p:nvSpPr>
         <p:spPr>
           <a:xfrm>
-            <a:off x="2212848" y="2798064"/>
-            <a:ext cx="5166359" cy="256031"/>
+            <a:off x="2212848" y="2743200"/>
+            <a:ext cx="5166359" cy="228600"/>
           </a:xfrm>
           <a:prstGeom prst="rect">
             <a:avLst/>
@@ -10558,8 +10558,8 @@
         </p:nvSpPr>
         <p:spPr>
           <a:xfrm>
-            <a:off x="566928" y="3072384"/>
-            <a:ext cx="6858000" cy="329184"/>
+            <a:off x="566928" y="2990088"/>
+            <a:ext cx="6858000" cy="301752"/>
           </a:xfrm>
           <a:prstGeom prst="rect">
             <a:avLst/>
@@ -10603,8 +10603,8 @@
         </p:nvSpPr>
         <p:spPr>
           <a:xfrm>
-            <a:off x="676656" y="3127248"/>
-            <a:ext cx="1417320" cy="256031"/>
+            <a:off x="676656" y="3044952"/>
+            <a:ext cx="1417320" cy="228600"/>
           </a:xfrm>
           <a:prstGeom prst="rect">
             <a:avLst/>
@@ -10638,8 +10638,8 @@
         </p:nvSpPr>
         <p:spPr>
           <a:xfrm>
-            <a:off x="2212848" y="3127248"/>
-            <a:ext cx="5166359" cy="256031"/>
+            <a:off x="2212848" y="3044952"/>
+            <a:ext cx="5166359" cy="228600"/>
           </a:xfrm>
           <a:prstGeom prst="rect">
             <a:avLst/>
@@ -10660,7 +10660,7 @@
                 </a:solidFill>
                 <a:latin typeface="Calibri"/>
               </a:rPr>
-              <a:t>DOMContentLoaded listener — vite-plugin-singlefile inlines JS into &lt;head&gt; as plain &lt;script&gt; (no defer)</a:t>
+              <a:t>DOMContentLoaded listener — singlefile inlines JS into &lt;head&gt; as plain &lt;script&gt; (no defer)</a:t>
             </a:r>
           </a:p>
         </p:txBody>
@@ -10673,8 +10673,8 @@
         </p:nvSpPr>
         <p:spPr>
           <a:xfrm>
-            <a:off x="566928" y="3401568"/>
-            <a:ext cx="6858000" cy="329184"/>
+            <a:off x="566928" y="3291840"/>
+            <a:ext cx="6858000" cy="301752"/>
           </a:xfrm>
           <a:prstGeom prst="rect">
             <a:avLst/>
@@ -10718,8 +10718,8 @@
         </p:nvSpPr>
         <p:spPr>
           <a:xfrm>
-            <a:off x="676656" y="3456432"/>
-            <a:ext cx="1417320" cy="256031"/>
+            <a:off x="676656" y="3346704"/>
+            <a:ext cx="1417320" cy="228600"/>
           </a:xfrm>
           <a:prstGeom prst="rect">
             <a:avLst/>
@@ -10753,8 +10753,8 @@
         </p:nvSpPr>
         <p:spPr>
           <a:xfrm>
-            <a:off x="2212848" y="3456432"/>
-            <a:ext cx="5166359" cy="256031"/>
+            <a:off x="2212848" y="3346704"/>
+            <a:ext cx="5166359" cy="228600"/>
           </a:xfrm>
           <a:prstGeom prst="rect">
             <a:avLst/>
@@ -10789,7 +10789,7 @@
         <p:spPr>
           <a:xfrm>
             <a:off x="7699248" y="1024128"/>
-            <a:ext cx="4114800" cy="2148840"/>
+            <a:ext cx="4114800" cy="2834640"/>
           </a:xfrm>
           <a:prstGeom prst="rect">
             <a:avLst/>
@@ -10911,8 +10911,8 @@
         </p:nvSpPr>
         <p:spPr>
           <a:xfrm>
-            <a:off x="7882127" y="1408176"/>
-            <a:ext cx="3867912" cy="329184"/>
+            <a:off x="7882127" y="1435608"/>
+            <a:ext cx="3867912" cy="301752"/>
           </a:xfrm>
           <a:prstGeom prst="rect">
             <a:avLst/>
@@ -10956,8 +10956,8 @@
         </p:nvSpPr>
         <p:spPr>
           <a:xfrm>
-            <a:off x="7991855" y="1463040"/>
-            <a:ext cx="1097280" cy="256031"/>
+            <a:off x="7991855" y="1490472"/>
+            <a:ext cx="1143000" cy="228600"/>
           </a:xfrm>
           <a:prstGeom prst="rect">
             <a:avLst/>
@@ -10991,8 +10991,8 @@
         </p:nvSpPr>
         <p:spPr>
           <a:xfrm>
-            <a:off x="9208007" y="1463040"/>
-            <a:ext cx="2496312" cy="256031"/>
+            <a:off x="9253728" y="1490472"/>
+            <a:ext cx="2450592" cy="228600"/>
           </a:xfrm>
           <a:prstGeom prst="rect">
             <a:avLst/>
@@ -11027,7 +11027,7 @@
         <p:spPr>
           <a:xfrm>
             <a:off x="7882127" y="1737360"/>
-            <a:ext cx="3867912" cy="329184"/>
+            <a:ext cx="3867912" cy="301752"/>
           </a:xfrm>
           <a:prstGeom prst="rect">
             <a:avLst/>
@@ -11072,7 +11072,7 @@
         <p:spPr>
           <a:xfrm>
             <a:off x="7991855" y="1792224"/>
-            <a:ext cx="1097280" cy="256031"/>
+            <a:ext cx="1143000" cy="228600"/>
           </a:xfrm>
           <a:prstGeom prst="rect">
             <a:avLst/>
@@ -11106,8 +11106,8 @@
         </p:nvSpPr>
         <p:spPr>
           <a:xfrm>
-            <a:off x="9208007" y="1792224"/>
-            <a:ext cx="2496312" cy="256031"/>
+            <a:off x="9253728" y="1792224"/>
+            <a:ext cx="2450592" cy="228600"/>
           </a:xfrm>
           <a:prstGeom prst="rect">
             <a:avLst/>
@@ -11141,8 +11141,8 @@
         </p:nvSpPr>
         <p:spPr>
           <a:xfrm>
-            <a:off x="7882127" y="2066543"/>
-            <a:ext cx="3867912" cy="329184"/>
+            <a:off x="7882127" y="2039112"/>
+            <a:ext cx="3867912" cy="301752"/>
           </a:xfrm>
           <a:prstGeom prst="rect">
             <a:avLst/>
@@ -11186,8 +11186,8 @@
         </p:nvSpPr>
         <p:spPr>
           <a:xfrm>
-            <a:off x="7991855" y="2121408"/>
-            <a:ext cx="1097280" cy="256031"/>
+            <a:off x="7991855" y="2093976"/>
+            <a:ext cx="1143000" cy="228600"/>
           </a:xfrm>
           <a:prstGeom prst="rect">
             <a:avLst/>
@@ -11221,8 +11221,8 @@
         </p:nvSpPr>
         <p:spPr>
           <a:xfrm>
-            <a:off x="9208007" y="2121408"/>
-            <a:ext cx="2496312" cy="256031"/>
+            <a:off x="9253728" y="2093976"/>
+            <a:ext cx="2450592" cy="228600"/>
           </a:xfrm>
           <a:prstGeom prst="rect">
             <a:avLst/>
@@ -11256,8 +11256,8 @@
         </p:nvSpPr>
         <p:spPr>
           <a:xfrm>
-            <a:off x="7882127" y="2395728"/>
-            <a:ext cx="3867912" cy="329184"/>
+            <a:off x="7882127" y="2340864"/>
+            <a:ext cx="3867912" cy="301752"/>
           </a:xfrm>
           <a:prstGeom prst="rect">
             <a:avLst/>
@@ -11301,8 +11301,8 @@
         </p:nvSpPr>
         <p:spPr>
           <a:xfrm>
-            <a:off x="7991855" y="2450592"/>
-            <a:ext cx="1097280" cy="256031"/>
+            <a:off x="7991855" y="2395728"/>
+            <a:ext cx="1143000" cy="228600"/>
           </a:xfrm>
           <a:prstGeom prst="rect">
             <a:avLst/>
@@ -11336,8 +11336,8 @@
         </p:nvSpPr>
         <p:spPr>
           <a:xfrm>
-            <a:off x="9208007" y="2450592"/>
-            <a:ext cx="2496312" cy="256031"/>
+            <a:off x="9253728" y="2395728"/>
+            <a:ext cx="2450592" cy="228600"/>
           </a:xfrm>
           <a:prstGeom prst="rect">
             <a:avLst/>
@@ -11371,8 +11371,8 @@
         </p:nvSpPr>
         <p:spPr>
           <a:xfrm>
-            <a:off x="7882127" y="2724912"/>
-            <a:ext cx="3867912" cy="329184"/>
+            <a:off x="7882127" y="2642616"/>
+            <a:ext cx="3867912" cy="301752"/>
           </a:xfrm>
           <a:prstGeom prst="rect">
             <a:avLst/>
@@ -11416,8 +11416,8 @@
         </p:nvSpPr>
         <p:spPr>
           <a:xfrm>
-            <a:off x="7991855" y="2779776"/>
-            <a:ext cx="1097280" cy="256031"/>
+            <a:off x="7991855" y="2697480"/>
+            <a:ext cx="1143000" cy="228600"/>
           </a:xfrm>
           <a:prstGeom prst="rect">
             <a:avLst/>
@@ -11451,8 +11451,8 @@
         </p:nvSpPr>
         <p:spPr>
           <a:xfrm>
-            <a:off x="9208007" y="2779776"/>
-            <a:ext cx="2496312" cy="256031"/>
+            <a:off x="9253728" y="2697480"/>
+            <a:ext cx="2450592" cy="228600"/>
           </a:xfrm>
           <a:prstGeom prst="rect">
             <a:avLst/>
@@ -11486,8 +11486,8 @@
         </p:nvSpPr>
         <p:spPr>
           <a:xfrm>
-            <a:off x="7882127" y="3054096"/>
-            <a:ext cx="3867912" cy="329184"/>
+            <a:off x="7882127" y="2944368"/>
+            <a:ext cx="3867912" cy="301752"/>
           </a:xfrm>
           <a:prstGeom prst="rect">
             <a:avLst/>
@@ -11531,8 +11531,8 @@
         </p:nvSpPr>
         <p:spPr>
           <a:xfrm>
-            <a:off x="7991855" y="3108960"/>
-            <a:ext cx="1097280" cy="256031"/>
+            <a:off x="7991855" y="2999232"/>
+            <a:ext cx="1143000" cy="228600"/>
           </a:xfrm>
           <a:prstGeom prst="rect">
             <a:avLst/>
@@ -11566,8 +11566,8 @@
         </p:nvSpPr>
         <p:spPr>
           <a:xfrm>
-            <a:off x="9208007" y="3108960"/>
-            <a:ext cx="2496312" cy="256031"/>
+            <a:off x="9253728" y="2999232"/>
+            <a:ext cx="2450592" cy="228600"/>
           </a:xfrm>
           <a:prstGeom prst="rect">
             <a:avLst/>
@@ -11588,7 +11588,7 @@
                 </a:solidFill>
                 <a:latin typeface="Calibri"/>
               </a:rPr>
-              <a:t>Was stripping module type → exec order bug</a:t>
+              <a:t>Strips module type → script exec order bug</a:t>
             </a:r>
           </a:p>
         </p:txBody>
@@ -11601,8 +11601,8 @@
         </p:nvSpPr>
         <p:spPr>
           <a:xfrm>
-            <a:off x="384048" y="3337560"/>
-            <a:ext cx="5303520" cy="2377440"/>
+            <a:off x="384048" y="4041648"/>
+            <a:ext cx="5303520" cy="2359152"/>
           </a:xfrm>
           <a:prstGeom prst="rect">
             <a:avLst/>
@@ -11646,7 +11646,7 @@
         </p:nvSpPr>
         <p:spPr>
           <a:xfrm>
-            <a:off x="384048" y="3337560"/>
+            <a:off x="384048" y="4041648"/>
             <a:ext cx="5303520" cy="54864"/>
           </a:xfrm>
           <a:prstGeom prst="rect">
@@ -11689,7 +11689,7 @@
         </p:nvSpPr>
         <p:spPr>
           <a:xfrm>
-            <a:off x="566928" y="3429000"/>
+            <a:off x="566928" y="4133087"/>
             <a:ext cx="4937760" cy="274320"/>
           </a:xfrm>
           <a:prstGeom prst="rect">
@@ -11724,8 +11724,8 @@
         </p:nvSpPr>
         <p:spPr>
           <a:xfrm>
-            <a:off x="566928" y="3703320"/>
-            <a:ext cx="4937760" cy="283464"/>
+            <a:off x="566928" y="4425696"/>
+            <a:ext cx="4937760" cy="274320"/>
           </a:xfrm>
           <a:prstGeom prst="rect">
             <a:avLst/>
@@ -11769,8 +11769,8 @@
         </p:nvSpPr>
         <p:spPr>
           <a:xfrm>
-            <a:off x="658368" y="3749039"/>
-            <a:ext cx="1920240" cy="219456"/>
+            <a:off x="658368" y="4462272"/>
+            <a:ext cx="1920240" cy="210312"/>
           </a:xfrm>
           <a:prstGeom prst="rect">
             <a:avLst/>
@@ -11804,8 +11804,8 @@
         </p:nvSpPr>
         <p:spPr>
           <a:xfrm>
-            <a:off x="2606040" y="3749039"/>
-            <a:ext cx="2834640" cy="219456"/>
+            <a:off x="2606040" y="4462272"/>
+            <a:ext cx="2834640" cy="210312"/>
           </a:xfrm>
           <a:prstGeom prst="rect">
             <a:avLst/>
@@ -11839,8 +11839,8 @@
         </p:nvSpPr>
         <p:spPr>
           <a:xfrm>
-            <a:off x="566928" y="3986783"/>
-            <a:ext cx="4937760" cy="283464"/>
+            <a:off x="566928" y="4700016"/>
+            <a:ext cx="4937760" cy="274320"/>
           </a:xfrm>
           <a:prstGeom prst="rect">
             <a:avLst/>
@@ -11884,8 +11884,8 @@
         </p:nvSpPr>
         <p:spPr>
           <a:xfrm>
-            <a:off x="658368" y="4032503"/>
-            <a:ext cx="1920240" cy="219456"/>
+            <a:off x="658368" y="4736592"/>
+            <a:ext cx="1920240" cy="210312"/>
           </a:xfrm>
           <a:prstGeom prst="rect">
             <a:avLst/>
@@ -11919,8 +11919,8 @@
         </p:nvSpPr>
         <p:spPr>
           <a:xfrm>
-            <a:off x="2606040" y="4032503"/>
-            <a:ext cx="2834640" cy="219456"/>
+            <a:off x="2606040" y="4736592"/>
+            <a:ext cx="2834640" cy="210312"/>
           </a:xfrm>
           <a:prstGeom prst="rect">
             <a:avLst/>
@@ -11954,8 +11954,8 @@
         </p:nvSpPr>
         <p:spPr>
           <a:xfrm>
-            <a:off x="566928" y="4270248"/>
-            <a:ext cx="4937760" cy="283464"/>
+            <a:off x="566928" y="4974336"/>
+            <a:ext cx="4937760" cy="274320"/>
           </a:xfrm>
           <a:prstGeom prst="rect">
             <a:avLst/>
@@ -11999,8 +11999,8 @@
         </p:nvSpPr>
         <p:spPr>
           <a:xfrm>
-            <a:off x="658368" y="4315968"/>
-            <a:ext cx="1920240" cy="219456"/>
+            <a:off x="658368" y="5010912"/>
+            <a:ext cx="1920240" cy="210312"/>
           </a:xfrm>
           <a:prstGeom prst="rect">
             <a:avLst/>
@@ -12034,8 +12034,8 @@
         </p:nvSpPr>
         <p:spPr>
           <a:xfrm>
-            <a:off x="2606040" y="4315968"/>
-            <a:ext cx="2834640" cy="219456"/>
+            <a:off x="2606040" y="5010912"/>
+            <a:ext cx="2834640" cy="210312"/>
           </a:xfrm>
           <a:prstGeom prst="rect">
             <a:avLst/>
@@ -12069,8 +12069,8 @@
         </p:nvSpPr>
         <p:spPr>
           <a:xfrm>
-            <a:off x="566928" y="4553712"/>
-            <a:ext cx="4937760" cy="283464"/>
+            <a:off x="566928" y="5248656"/>
+            <a:ext cx="4937760" cy="274320"/>
           </a:xfrm>
           <a:prstGeom prst="rect">
             <a:avLst/>
@@ -12114,8 +12114,8 @@
         </p:nvSpPr>
         <p:spPr>
           <a:xfrm>
-            <a:off x="658368" y="4599431"/>
-            <a:ext cx="1920240" cy="219456"/>
+            <a:off x="658368" y="5285232"/>
+            <a:ext cx="1920240" cy="210312"/>
           </a:xfrm>
           <a:prstGeom prst="rect">
             <a:avLst/>
@@ -12149,8 +12149,8 @@
         </p:nvSpPr>
         <p:spPr>
           <a:xfrm>
-            <a:off x="2606040" y="4599431"/>
-            <a:ext cx="2834640" cy="219456"/>
+            <a:off x="2606040" y="5285232"/>
+            <a:ext cx="2834640" cy="210312"/>
           </a:xfrm>
           <a:prstGeom prst="rect">
             <a:avLst/>
@@ -12184,8 +12184,8 @@
         </p:nvSpPr>
         <p:spPr>
           <a:xfrm>
-            <a:off x="566928" y="4837176"/>
-            <a:ext cx="4937760" cy="283464"/>
+            <a:off x="566928" y="5522976"/>
+            <a:ext cx="4937760" cy="274320"/>
           </a:xfrm>
           <a:prstGeom prst="rect">
             <a:avLst/>
@@ -12229,8 +12229,8 @@
         </p:nvSpPr>
         <p:spPr>
           <a:xfrm>
-            <a:off x="658368" y="4882896"/>
-            <a:ext cx="1920240" cy="219456"/>
+            <a:off x="658368" y="5559552"/>
+            <a:ext cx="1920240" cy="210312"/>
           </a:xfrm>
           <a:prstGeom prst="rect">
             <a:avLst/>
@@ -12264,8 +12264,8 @@
         </p:nvSpPr>
         <p:spPr>
           <a:xfrm>
-            <a:off x="2606040" y="4882896"/>
-            <a:ext cx="2834640" cy="219456"/>
+            <a:off x="2606040" y="5559552"/>
+            <a:ext cx="2834640" cy="210312"/>
           </a:xfrm>
           <a:prstGeom prst="rect">
             <a:avLst/>
@@ -12299,8 +12299,8 @@
         </p:nvSpPr>
         <p:spPr>
           <a:xfrm>
-            <a:off x="566928" y="5120640"/>
-            <a:ext cx="4937760" cy="283464"/>
+            <a:off x="566928" y="5797296"/>
+            <a:ext cx="4937760" cy="274320"/>
           </a:xfrm>
           <a:prstGeom prst="rect">
             <a:avLst/>
@@ -12344,8 +12344,8 @@
         </p:nvSpPr>
         <p:spPr>
           <a:xfrm>
-            <a:off x="658368" y="5166359"/>
-            <a:ext cx="1920240" cy="219456"/>
+            <a:off x="658368" y="5833872"/>
+            <a:ext cx="1920240" cy="210312"/>
           </a:xfrm>
           <a:prstGeom prst="rect">
             <a:avLst/>
@@ -12379,8 +12379,8 @@
         </p:nvSpPr>
         <p:spPr>
           <a:xfrm>
-            <a:off x="2606040" y="5166359"/>
-            <a:ext cx="2834640" cy="219456"/>
+            <a:off x="2606040" y="5833872"/>
+            <a:ext cx="2834640" cy="210312"/>
           </a:xfrm>
           <a:prstGeom prst="rect">
             <a:avLst/>
@@ -12414,8 +12414,8 @@
         </p:nvSpPr>
         <p:spPr>
           <a:xfrm>
-            <a:off x="566928" y="5404104"/>
-            <a:ext cx="4937760" cy="283464"/>
+            <a:off x="566928" y="6071616"/>
+            <a:ext cx="4937760" cy="274320"/>
           </a:xfrm>
           <a:prstGeom prst="rect">
             <a:avLst/>
@@ -12459,8 +12459,8 @@
         </p:nvSpPr>
         <p:spPr>
           <a:xfrm>
-            <a:off x="658368" y="5449824"/>
-            <a:ext cx="1920240" cy="219456"/>
+            <a:off x="658368" y="6108192"/>
+            <a:ext cx="1920240" cy="210312"/>
           </a:xfrm>
           <a:prstGeom prst="rect">
             <a:avLst/>
@@ -12494,8 +12494,8 @@
         </p:nvSpPr>
         <p:spPr>
           <a:xfrm>
-            <a:off x="2606040" y="5449824"/>
-            <a:ext cx="2834640" cy="219456"/>
+            <a:off x="2606040" y="6108192"/>
+            <a:ext cx="2834640" cy="210312"/>
           </a:xfrm>
           <a:prstGeom prst="rect">
             <a:avLst/>
@@ -12516,7 +12516,7 @@
                 </a:solidFill>
                 <a:latin typeface="Calibri"/>
               </a:rPr>
-              <a:t>Regenerate this project record deck (11 slides)</a:t>
+              <a:t>Regenerate this project record (13 slides)</a:t>
             </a:r>
           </a:p>
         </p:txBody>
@@ -12529,8 +12529,8 @@
         </p:nvSpPr>
         <p:spPr>
           <a:xfrm>
-            <a:off x="5870448" y="3337560"/>
-            <a:ext cx="5943600" cy="2377440"/>
+            <a:off x="5870448" y="4041648"/>
+            <a:ext cx="5943600" cy="2359152"/>
           </a:xfrm>
           <a:prstGeom prst="rect">
             <a:avLst/>
@@ -12574,7 +12574,7 @@
         </p:nvSpPr>
         <p:spPr>
           <a:xfrm>
-            <a:off x="5870448" y="3337560"/>
+            <a:off x="5870448" y="4041648"/>
             <a:ext cx="5943600" cy="54864"/>
           </a:xfrm>
           <a:prstGeom prst="rect">
@@ -12617,7 +12617,7 @@
         </p:nvSpPr>
         <p:spPr>
           <a:xfrm>
-            <a:off x="6053328" y="3429000"/>
+            <a:off x="6053328" y="4133087"/>
             <a:ext cx="5577840" cy="274320"/>
           </a:xfrm>
           <a:prstGeom prst="rect">
@@ -12652,8 +12652,8 @@
         </p:nvSpPr>
         <p:spPr>
           <a:xfrm>
-            <a:off x="6053328" y="3749039"/>
-            <a:ext cx="5577840" cy="1828800"/>
+            <a:off x="6053328" y="4462272"/>
+            <a:ext cx="5577840" cy="1783080"/>
           </a:xfrm>
           <a:prstGeom prst="rect">
             <a:avLst/>
@@ -12694,7 +12694,7 @@
                 </a:solidFill>
                 <a:latin typeface="Calibri"/>
               </a:rPr>
-              <a:t>· 5 Standing Security Orders (never outline-none without focus-visible, no dangerouslySetInnerHTML on dynamic content, no secrets in source, no git push --force, run /ship-ready before every push)</a:t>
+              <a:t>· 5 Standing Security Orders: no bare outline-none, no dangerouslySetInnerHTML on dynamic content, no secrets in source, no git push --force, run /ship-ready before every push</a:t>
             </a:r>
           </a:p>
           <a:p>
@@ -12710,7 +12710,7 @@
                 </a:solidFill>
                 <a:latin typeface="Calibri"/>
               </a:rPr>
-              <a:t>· Bosun's Law — spacing scale (4·8·12·16·24·32·48·64·96·128px), stone-* only (never gray-* or zinc-*), one primary CTA per view, num-tab on all monetary amounts</a:t>
+              <a:t>· Bosun's Law — spacing scale (4·8·12·16·24·32·48·64·96·128px), stone-* only, one primary CTA per view, num-tab on all monetary amounts</a:t>
             </a:r>
           </a:p>
           <a:p>
@@ -31647,7 +31647,7 @@
         <p:spPr>
           <a:xfrm>
             <a:off x="384048" y="1024128"/>
-            <a:ext cx="5394960" cy="1060704"/>
+            <a:ext cx="5394960" cy="1024128"/>
           </a:xfrm>
           <a:prstGeom prst="rect">
             <a:avLst/>
@@ -31805,7 +31805,7 @@
         <p:spPr>
           <a:xfrm>
             <a:off x="521207" y="1408176"/>
-            <a:ext cx="5166360" cy="621792"/>
+            <a:ext cx="5166360" cy="594360"/>
           </a:xfrm>
           <a:prstGeom prst="rect">
             <a:avLst/>
@@ -31844,7 +31844,7 @@
         <p:spPr>
           <a:xfrm>
             <a:off x="6007608" y="1024128"/>
-            <a:ext cx="5394960" cy="1060704"/>
+            <a:ext cx="5394960" cy="1024128"/>
           </a:xfrm>
           <a:prstGeom prst="rect">
             <a:avLst/>
@@ -32002,7 +32002,7 @@
         <p:spPr>
           <a:xfrm>
             <a:off x="6144768" y="1408176"/>
-            <a:ext cx="5166360" cy="621792"/>
+            <a:ext cx="5166360" cy="594360"/>
           </a:xfrm>
           <a:prstGeom prst="rect">
             <a:avLst/>
@@ -32040,8 +32040,8 @@
         </p:nvSpPr>
         <p:spPr>
           <a:xfrm>
-            <a:off x="384048" y="2176272"/>
-            <a:ext cx="5394960" cy="1060704"/>
+            <a:off x="384048" y="2139696"/>
+            <a:ext cx="5394960" cy="1024128"/>
           </a:xfrm>
           <a:prstGeom prst="rect">
             <a:avLst/>
@@ -32085,7 +32085,7 @@
         </p:nvSpPr>
         <p:spPr>
           <a:xfrm>
-            <a:off x="384048" y="2176272"/>
+            <a:off x="384048" y="2139696"/>
             <a:ext cx="5394960" cy="50292"/>
           </a:xfrm>
           <a:prstGeom prst="rect">
@@ -32128,7 +32128,7 @@
         </p:nvSpPr>
         <p:spPr>
           <a:xfrm>
-            <a:off x="521207" y="2267712"/>
+            <a:off x="521207" y="2231136"/>
             <a:ext cx="2967228" cy="274320"/>
           </a:xfrm>
           <a:prstGeom prst="rect">
@@ -32163,7 +32163,7 @@
         </p:nvSpPr>
         <p:spPr>
           <a:xfrm>
-            <a:off x="3513124" y="2286000"/>
+            <a:off x="3513124" y="2249424"/>
             <a:ext cx="2157984" cy="228600"/>
           </a:xfrm>
           <a:prstGeom prst="rect">
@@ -32198,8 +32198,8 @@
         </p:nvSpPr>
         <p:spPr>
           <a:xfrm>
-            <a:off x="521207" y="2560320"/>
-            <a:ext cx="5166360" cy="621792"/>
+            <a:off x="521207" y="2523744"/>
+            <a:ext cx="5166360" cy="594360"/>
           </a:xfrm>
           <a:prstGeom prst="rect">
             <a:avLst/>
@@ -32237,8 +32237,8 @@
         </p:nvSpPr>
         <p:spPr>
           <a:xfrm>
-            <a:off x="6007608" y="2176272"/>
-            <a:ext cx="5394960" cy="1060704"/>
+            <a:off x="6007608" y="2139696"/>
+            <a:ext cx="5394960" cy="1024128"/>
           </a:xfrm>
           <a:prstGeom prst="rect">
             <a:avLst/>
@@ -32282,7 +32282,7 @@
         </p:nvSpPr>
         <p:spPr>
           <a:xfrm>
-            <a:off x="6007608" y="2176272"/>
+            <a:off x="6007608" y="2139696"/>
             <a:ext cx="5394960" cy="50292"/>
           </a:xfrm>
           <a:prstGeom prst="rect">
@@ -32325,7 +32325,7 @@
         </p:nvSpPr>
         <p:spPr>
           <a:xfrm>
-            <a:off x="6144768" y="2267712"/>
+            <a:off x="6144768" y="2231136"/>
             <a:ext cx="2967228" cy="274320"/>
           </a:xfrm>
           <a:prstGeom prst="rect">
@@ -32360,7 +32360,7 @@
         </p:nvSpPr>
         <p:spPr>
           <a:xfrm>
-            <a:off x="9136684" y="2286000"/>
+            <a:off x="9136684" y="2249424"/>
             <a:ext cx="2157984" cy="228600"/>
           </a:xfrm>
           <a:prstGeom prst="rect">
@@ -32395,8 +32395,8 @@
         </p:nvSpPr>
         <p:spPr>
           <a:xfrm>
-            <a:off x="6144768" y="2560320"/>
-            <a:ext cx="5166360" cy="621792"/>
+            <a:off x="6144768" y="2523744"/>
+            <a:ext cx="5166360" cy="594360"/>
           </a:xfrm>
           <a:prstGeom prst="rect">
             <a:avLst/>
@@ -32434,8 +32434,8 @@
         </p:nvSpPr>
         <p:spPr>
           <a:xfrm>
-            <a:off x="384048" y="3328416"/>
-            <a:ext cx="5394960" cy="1060704"/>
+            <a:off x="384048" y="3255264"/>
+            <a:ext cx="5394960" cy="1024128"/>
           </a:xfrm>
           <a:prstGeom prst="rect">
             <a:avLst/>
@@ -32479,7 +32479,7 @@
         </p:nvSpPr>
         <p:spPr>
           <a:xfrm>
-            <a:off x="384048" y="3328416"/>
+            <a:off x="384048" y="3255264"/>
             <a:ext cx="5394960" cy="50292"/>
           </a:xfrm>
           <a:prstGeom prst="rect">
@@ -32522,7 +32522,7 @@
         </p:nvSpPr>
         <p:spPr>
           <a:xfrm>
-            <a:off x="521207" y="3419856"/>
+            <a:off x="521207" y="3346704"/>
             <a:ext cx="2967228" cy="274320"/>
           </a:xfrm>
           <a:prstGeom prst="rect">
@@ -32557,7 +32557,7 @@
         </p:nvSpPr>
         <p:spPr>
           <a:xfrm>
-            <a:off x="3513124" y="3438144"/>
+            <a:off x="3513124" y="3364992"/>
             <a:ext cx="2157984" cy="228600"/>
           </a:xfrm>
           <a:prstGeom prst="rect">
@@ -32592,8 +32592,8 @@
         </p:nvSpPr>
         <p:spPr>
           <a:xfrm>
-            <a:off x="521207" y="3712464"/>
-            <a:ext cx="5166360" cy="621792"/>
+            <a:off x="521207" y="3639312"/>
+            <a:ext cx="5166360" cy="594360"/>
           </a:xfrm>
           <a:prstGeom prst="rect">
             <a:avLst/>
@@ -32631,8 +32631,8 @@
         </p:nvSpPr>
         <p:spPr>
           <a:xfrm>
-            <a:off x="6007608" y="3328416"/>
-            <a:ext cx="5394960" cy="1060704"/>
+            <a:off x="6007608" y="3255264"/>
+            <a:ext cx="5394960" cy="1024128"/>
           </a:xfrm>
           <a:prstGeom prst="rect">
             <a:avLst/>
@@ -32676,7 +32676,7 @@
         </p:nvSpPr>
         <p:spPr>
           <a:xfrm>
-            <a:off x="6007608" y="3328416"/>
+            <a:off x="6007608" y="3255264"/>
             <a:ext cx="5394960" cy="50292"/>
           </a:xfrm>
           <a:prstGeom prst="rect">
@@ -32719,7 +32719,7 @@
         </p:nvSpPr>
         <p:spPr>
           <a:xfrm>
-            <a:off x="6144768" y="3419856"/>
+            <a:off x="6144768" y="3346704"/>
             <a:ext cx="2967228" cy="274320"/>
           </a:xfrm>
           <a:prstGeom prst="rect">
@@ -32754,7 +32754,7 @@
         </p:nvSpPr>
         <p:spPr>
           <a:xfrm>
-            <a:off x="9136684" y="3438144"/>
+            <a:off x="9136684" y="3364992"/>
             <a:ext cx="2157984" cy="228600"/>
           </a:xfrm>
           <a:prstGeom prst="rect">
@@ -32789,8 +32789,8 @@
         </p:nvSpPr>
         <p:spPr>
           <a:xfrm>
-            <a:off x="6144768" y="3712464"/>
-            <a:ext cx="5166360" cy="621792"/>
+            <a:off x="6144768" y="3639312"/>
+            <a:ext cx="5166360" cy="594360"/>
           </a:xfrm>
           <a:prstGeom prst="rect">
             <a:avLst/>
@@ -32828,8 +32828,8 @@
         </p:nvSpPr>
         <p:spPr>
           <a:xfrm>
-            <a:off x="384048" y="4480560"/>
-            <a:ext cx="5394960" cy="1060704"/>
+            <a:off x="384048" y="4370832"/>
+            <a:ext cx="5394960" cy="1024128"/>
           </a:xfrm>
           <a:prstGeom prst="rect">
             <a:avLst/>
@@ -32873,7 +32873,7 @@
         </p:nvSpPr>
         <p:spPr>
           <a:xfrm>
-            <a:off x="384048" y="4480560"/>
+            <a:off x="384048" y="4370832"/>
             <a:ext cx="5394960" cy="50292"/>
           </a:xfrm>
           <a:prstGeom prst="rect">
@@ -32916,7 +32916,7 @@
         </p:nvSpPr>
         <p:spPr>
           <a:xfrm>
-            <a:off x="521207" y="4572000"/>
+            <a:off x="521207" y="4462272"/>
             <a:ext cx="2967228" cy="274320"/>
           </a:xfrm>
           <a:prstGeom prst="rect">
@@ -32951,7 +32951,7 @@
         </p:nvSpPr>
         <p:spPr>
           <a:xfrm>
-            <a:off x="3513124" y="4590288"/>
+            <a:off x="3513124" y="4480560"/>
             <a:ext cx="2157984" cy="228600"/>
           </a:xfrm>
           <a:prstGeom prst="rect">
@@ -32986,8 +32986,8 @@
         </p:nvSpPr>
         <p:spPr>
           <a:xfrm>
-            <a:off x="521207" y="4864608"/>
-            <a:ext cx="5166360" cy="621792"/>
+            <a:off x="521207" y="4754880"/>
+            <a:ext cx="5166360" cy="594360"/>
           </a:xfrm>
           <a:prstGeom prst="rect">
             <a:avLst/>
@@ -33025,8 +33025,8 @@
         </p:nvSpPr>
         <p:spPr>
           <a:xfrm>
-            <a:off x="6007608" y="4480560"/>
-            <a:ext cx="5394960" cy="1060704"/>
+            <a:off x="6007608" y="4370832"/>
+            <a:ext cx="5394960" cy="1024128"/>
           </a:xfrm>
           <a:prstGeom prst="rect">
             <a:avLst/>
@@ -33070,7 +33070,7 @@
         </p:nvSpPr>
         <p:spPr>
           <a:xfrm>
-            <a:off x="6007608" y="4480560"/>
+            <a:off x="6007608" y="4370832"/>
             <a:ext cx="5394960" cy="50292"/>
           </a:xfrm>
           <a:prstGeom prst="rect">
@@ -33113,7 +33113,7 @@
         </p:nvSpPr>
         <p:spPr>
           <a:xfrm>
-            <a:off x="6144768" y="4572000"/>
+            <a:off x="6144768" y="4462272"/>
             <a:ext cx="2967228" cy="274320"/>
           </a:xfrm>
           <a:prstGeom prst="rect">
@@ -33148,7 +33148,7 @@
         </p:nvSpPr>
         <p:spPr>
           <a:xfrm>
-            <a:off x="9136684" y="4590288"/>
+            <a:off x="9136684" y="4480560"/>
             <a:ext cx="2157984" cy="228600"/>
           </a:xfrm>
           <a:prstGeom prst="rect">
@@ -33183,8 +33183,8 @@
         </p:nvSpPr>
         <p:spPr>
           <a:xfrm>
-            <a:off x="6144768" y="4864608"/>
-            <a:ext cx="5166360" cy="621792"/>
+            <a:off x="6144768" y="4754880"/>
+            <a:ext cx="5166360" cy="594360"/>
           </a:xfrm>
           <a:prstGeom prst="rect">
             <a:avLst/>
@@ -33222,8 +33222,8 @@
         </p:nvSpPr>
         <p:spPr>
           <a:xfrm>
-            <a:off x="384048" y="5632704"/>
-            <a:ext cx="5394960" cy="1060704"/>
+            <a:off x="3396996" y="5486400"/>
+            <a:ext cx="5394960" cy="1024128"/>
           </a:xfrm>
           <a:prstGeom prst="rect">
             <a:avLst/>
@@ -33267,7 +33267,7 @@
         </p:nvSpPr>
         <p:spPr>
           <a:xfrm>
-            <a:off x="384048" y="5632704"/>
+            <a:off x="3396996" y="5486400"/>
             <a:ext cx="5394960" cy="50292"/>
           </a:xfrm>
           <a:prstGeom prst="rect">
@@ -33310,7 +33310,7 @@
         </p:nvSpPr>
         <p:spPr>
           <a:xfrm>
-            <a:off x="521207" y="5724144"/>
+            <a:off x="3534156" y="5577840"/>
             <a:ext cx="2967228" cy="274320"/>
           </a:xfrm>
           <a:prstGeom prst="rect">
@@ -33345,7 +33345,7 @@
         </p:nvSpPr>
         <p:spPr>
           <a:xfrm>
-            <a:off x="3513124" y="5742432"/>
+            <a:off x="6526072" y="5596128"/>
             <a:ext cx="2157984" cy="228600"/>
           </a:xfrm>
           <a:prstGeom prst="rect">
@@ -33380,8 +33380,8 @@
         </p:nvSpPr>
         <p:spPr>
           <a:xfrm>
-            <a:off x="521207" y="6016752"/>
-            <a:ext cx="5166360" cy="621792"/>
+            <a:off x="3534156" y="5870448"/>
+            <a:ext cx="5166360" cy="594360"/>
           </a:xfrm>
           <a:prstGeom prst="rect">
             <a:avLst/>
@@ -33414,203 +33414,6 @@
       <p:sp>
         <p:nvSpPr>
           <p:cNvPr id="52" name="Rectangle 51"/>
-          <p:cNvSpPr/>
-          <p:nvPr/>
-        </p:nvSpPr>
-        <p:spPr>
-          <a:xfrm>
-            <a:off x="3195828" y="5632704"/>
-            <a:ext cx="5394960" cy="1060704"/>
-          </a:xfrm>
-          <a:prstGeom prst="rect">
-            <a:avLst/>
-          </a:prstGeom>
-          <a:solidFill>
-            <a:srgbClr val="FFFFFF"/>
-          </a:solidFill>
-          <a:ln w="9525">
-            <a:solidFill>
-              <a:srgbClr val="E7E5E4"/>
-            </a:solidFill>
-          </a:ln>
-        </p:spPr>
-        <p:style>
-          <a:lnRef idx="1">
-            <a:schemeClr val="accent1"/>
-          </a:lnRef>
-          <a:fillRef idx="3">
-            <a:schemeClr val="accent1"/>
-          </a:fillRef>
-          <a:effectRef idx="2">
-            <a:schemeClr val="accent1"/>
-          </a:effectRef>
-          <a:fontRef idx="minor">
-            <a:schemeClr val="lt1"/>
-          </a:fontRef>
-        </p:style>
-        <p:txBody>
-          <a:bodyPr rtlCol="0" anchor="ctr"/>
-          <a:lstStyle/>
-          <a:p>
-            <a:pPr algn="ctr"/>
-          </a:p>
-        </p:txBody>
-      </p:sp>
-      <p:sp>
-        <p:nvSpPr>
-          <p:cNvPr id="53" name="Rectangle 52"/>
-          <p:cNvSpPr/>
-          <p:nvPr/>
-        </p:nvSpPr>
-        <p:spPr>
-          <a:xfrm>
-            <a:off x="3195828" y="5632704"/>
-            <a:ext cx="5394960" cy="50292"/>
-          </a:xfrm>
-          <a:prstGeom prst="rect">
-            <a:avLst/>
-          </a:prstGeom>
-          <a:solidFill>
-            <a:srgbClr val="C8102E"/>
-          </a:solidFill>
-          <a:ln>
-            <a:noFill/>
-          </a:ln>
-        </p:spPr>
-        <p:style>
-          <a:lnRef idx="1">
-            <a:schemeClr val="accent1"/>
-          </a:lnRef>
-          <a:fillRef idx="3">
-            <a:schemeClr val="accent1"/>
-          </a:fillRef>
-          <a:effectRef idx="2">
-            <a:schemeClr val="accent1"/>
-          </a:effectRef>
-          <a:fontRef idx="minor">
-            <a:schemeClr val="lt1"/>
-          </a:fontRef>
-        </p:style>
-        <p:txBody>
-          <a:bodyPr rtlCol="0" anchor="ctr"/>
-          <a:lstStyle/>
-          <a:p>
-            <a:pPr algn="ctr"/>
-          </a:p>
-        </p:txBody>
-      </p:sp>
-      <p:sp>
-        <p:nvSpPr>
-          <p:cNvPr id="54" name="TextBox 53"/>
-          <p:cNvSpPr txBox="1"/>
-          <p:nvPr/>
-        </p:nvSpPr>
-        <p:spPr>
-          <a:xfrm>
-            <a:off x="3332988" y="5724144"/>
-            <a:ext cx="2967228" cy="274320"/>
-          </a:xfrm>
-          <a:prstGeom prst="rect">
-            <a:avLst/>
-          </a:prstGeom>
-          <a:noFill/>
-        </p:spPr>
-        <p:txBody>
-          <a:bodyPr wrap="square">
-            <a:spAutoFit/>
-          </a:bodyPr>
-          <a:lstStyle/>
-          <a:p>
-            <a:pPr algn="l"/>
-            <a:r>
-              <a:rPr sz="950" b="1" i="0">
-                <a:solidFill>
-                  <a:srgbClr val="1C1917"/>
-                </a:solidFill>
-                <a:latin typeface="Calibri"/>
-              </a:rPr>
-              <a:t>Live notification bell</a:t>
-            </a:r>
-          </a:p>
-        </p:txBody>
-      </p:sp>
-      <p:sp>
-        <p:nvSpPr>
-          <p:cNvPr id="55" name="TextBox 54"/>
-          <p:cNvSpPr txBox="1"/>
-          <p:nvPr/>
-        </p:nvSpPr>
-        <p:spPr>
-          <a:xfrm>
-            <a:off x="6324904" y="5742432"/>
-            <a:ext cx="2157984" cy="228600"/>
-          </a:xfrm>
-          <a:prstGeom prst="rect">
-            <a:avLst/>
-          </a:prstGeom>
-          <a:noFill/>
-        </p:spPr>
-        <p:txBody>
-          <a:bodyPr wrap="square">
-            <a:spAutoFit/>
-          </a:bodyPr>
-          <a:lstStyle/>
-          <a:p>
-            <a:pPr algn="l"/>
-            <a:r>
-              <a:rPr sz="700" b="1" i="0">
-                <a:solidFill>
-                  <a:srgbClr val="C8102E"/>
-                </a:solidFill>
-                <a:latin typeface="Calibri"/>
-              </a:rPr>
-              <a:t>FCA SYSC 10A · PSD2 RTS Art.2</a:t>
-            </a:r>
-          </a:p>
-        </p:txBody>
-      </p:sp>
-      <p:sp>
-        <p:nvSpPr>
-          <p:cNvPr id="56" name="TextBox 55"/>
-          <p:cNvSpPr txBox="1"/>
-          <p:nvPr/>
-        </p:nvSpPr>
-        <p:spPr>
-          <a:xfrm>
-            <a:off x="3332988" y="6016752"/>
-            <a:ext cx="5166360" cy="621792"/>
-          </a:xfrm>
-          <a:prstGeom prst="rect">
-            <a:avLst/>
-          </a:prstGeom>
-          <a:noFill/>
-        </p:spPr>
-        <p:txBody>
-          <a:bodyPr wrap="square">
-            <a:spAutoFit/>
-          </a:bodyPr>
-          <a:lstStyle/>
-          <a:p>
-            <a:pPr>
-              <a:spcAft>
-                <a:spcPts val="300"/>
-              </a:spcAft>
-            </a:pPr>
-            <a:r>
-              <a:rPr sz="800">
-                <a:solidFill>
-                  <a:srgbClr val="78716C"/>
-                </a:solidFill>
-                <a:latin typeface="Calibri"/>
-              </a:rPr>
-              <a:t>Bell icon (desktop header + mobile header) opens NotificationsSheet. Shows: session anomaly alert with CTAs, unsigned pending approvals with Sign-tab navigation, cooling-off progress bars, stalled co-signer escalations. Badge dot while anomaly or approvals exist.</a:t>
-            </a:r>
-          </a:p>
-        </p:txBody>
-      </p:sp>
-      <p:sp>
-        <p:nvSpPr>
-          <p:cNvPr id="57" name="Rectangle 56"/>
           <p:cNvSpPr/>
           <p:nvPr/>
         </p:nvSpPr>
@@ -33653,7 +33456,7 @@
       </p:sp>
       <p:sp>
         <p:nvSpPr>
-          <p:cNvPr id="58" name="TextBox 57"/>
+          <p:cNvPr id="53" name="TextBox 52"/>
           <p:cNvSpPr txBox="1"/>
           <p:nvPr/>
         </p:nvSpPr>
@@ -33688,7 +33491,7 @@
       </p:sp>
       <p:sp>
         <p:nvSpPr>
-          <p:cNvPr id="59" name="TextBox 58"/>
+          <p:cNvPr id="54" name="TextBox 53"/>
           <p:cNvSpPr txBox="1"/>
           <p:nvPr/>
         </p:nvSpPr>

--- a/Santander_Project_Record.pptx
+++ b/Santander_Project_Record.pptx
@@ -22269,8 +22269,8 @@
         </p:nvSpPr>
         <p:spPr>
           <a:xfrm>
-            <a:off x="411480" y="1051560"/>
-            <a:ext cx="5806440" cy="2377440"/>
+            <a:off x="384048" y="1051560"/>
+            <a:ext cx="3694176" cy="2450592"/>
           </a:xfrm>
           <a:prstGeom prst="rect">
             <a:avLst/>
@@ -22314,8 +22314,8 @@
         </p:nvSpPr>
         <p:spPr>
           <a:xfrm>
-            <a:off x="411480" y="1051560"/>
-            <a:ext cx="5806440" cy="54864"/>
+            <a:off x="384048" y="1051560"/>
+            <a:ext cx="3694176" cy="54864"/>
           </a:xfrm>
           <a:prstGeom prst="rect">
             <a:avLst/>
@@ -22357,8 +22357,8 @@
         </p:nvSpPr>
         <p:spPr>
           <a:xfrm>
-            <a:off x="576072" y="1143000"/>
-            <a:ext cx="5440679" cy="292608"/>
+            <a:off x="521207" y="1143000"/>
+            <a:ext cx="3419856" cy="274320"/>
           </a:xfrm>
           <a:prstGeom prst="rect">
             <a:avLst/>
@@ -22392,8 +22392,8 @@
         </p:nvSpPr>
         <p:spPr>
           <a:xfrm>
-            <a:off x="576072" y="1435607"/>
-            <a:ext cx="5440679" cy="201168"/>
+            <a:off x="521207" y="1417319"/>
+            <a:ext cx="3419856" cy="182880"/>
           </a:xfrm>
           <a:prstGeom prst="rect">
             <a:avLst/>
@@ -22427,8 +22427,8 @@
         </p:nvSpPr>
         <p:spPr>
           <a:xfrm>
-            <a:off x="576072" y="1645919"/>
-            <a:ext cx="5513831" cy="1719072"/>
+            <a:off x="521207" y="1618488"/>
+            <a:ext cx="3438144" cy="1810512"/>
           </a:xfrm>
           <a:prstGeom prst="rect">
             <a:avLst/>
@@ -22610,8 +22610,8 @@
         </p:nvSpPr>
         <p:spPr>
           <a:xfrm>
-            <a:off x="6419088" y="1051560"/>
-            <a:ext cx="5806440" cy="2377440"/>
+            <a:off x="4251960" y="1051560"/>
+            <a:ext cx="3694176" cy="2450592"/>
           </a:xfrm>
           <a:prstGeom prst="rect">
             <a:avLst/>
@@ -22655,8 +22655,8 @@
         </p:nvSpPr>
         <p:spPr>
           <a:xfrm>
-            <a:off x="6419088" y="1051560"/>
-            <a:ext cx="5806440" cy="54864"/>
+            <a:off x="4251960" y="1051560"/>
+            <a:ext cx="3694176" cy="54864"/>
           </a:xfrm>
           <a:prstGeom prst="rect">
             <a:avLst/>
@@ -22698,8 +22698,8 @@
         </p:nvSpPr>
         <p:spPr>
           <a:xfrm>
-            <a:off x="6583679" y="1143000"/>
-            <a:ext cx="5440679" cy="292608"/>
+            <a:off x="4389120" y="1143000"/>
+            <a:ext cx="3419856" cy="274320"/>
           </a:xfrm>
           <a:prstGeom prst="rect">
             <a:avLst/>
@@ -22733,8 +22733,8 @@
         </p:nvSpPr>
         <p:spPr>
           <a:xfrm>
-            <a:off x="6583679" y="1435607"/>
-            <a:ext cx="5440679" cy="201168"/>
+            <a:off x="4389120" y="1417319"/>
+            <a:ext cx="3419856" cy="182880"/>
           </a:xfrm>
           <a:prstGeom prst="rect">
             <a:avLst/>
@@ -22768,8 +22768,8 @@
         </p:nvSpPr>
         <p:spPr>
           <a:xfrm>
-            <a:off x="6583679" y="1645919"/>
-            <a:ext cx="5513831" cy="1719072"/>
+            <a:off x="4389120" y="1618488"/>
+            <a:ext cx="3438144" cy="1810512"/>
           </a:xfrm>
           <a:prstGeom prst="rect">
             <a:avLst/>
@@ -22871,8 +22871,8 @@
         </p:nvSpPr>
         <p:spPr>
           <a:xfrm>
-            <a:off x="411480" y="3593591"/>
-            <a:ext cx="5806440" cy="2377440"/>
+            <a:off x="8119872" y="1051560"/>
+            <a:ext cx="3694176" cy="2450592"/>
           </a:xfrm>
           <a:prstGeom prst="rect">
             <a:avLst/>
@@ -22916,8 +22916,8 @@
         </p:nvSpPr>
         <p:spPr>
           <a:xfrm>
-            <a:off x="411480" y="3593591"/>
-            <a:ext cx="5806440" cy="54864"/>
+            <a:off x="8119872" y="1051560"/>
+            <a:ext cx="3694176" cy="54864"/>
           </a:xfrm>
           <a:prstGeom prst="rect">
             <a:avLst/>
@@ -22959,8 +22959,8 @@
         </p:nvSpPr>
         <p:spPr>
           <a:xfrm>
-            <a:off x="576072" y="3685031"/>
-            <a:ext cx="5440679" cy="292608"/>
+            <a:off x="8257032" y="1143000"/>
+            <a:ext cx="3419856" cy="274320"/>
           </a:xfrm>
           <a:prstGeom prst="rect">
             <a:avLst/>
@@ -22994,8 +22994,8 @@
         </p:nvSpPr>
         <p:spPr>
           <a:xfrm>
-            <a:off x="576072" y="3977639"/>
-            <a:ext cx="5440679" cy="201168"/>
+            <a:off x="8257032" y="1417319"/>
+            <a:ext cx="3419856" cy="182880"/>
           </a:xfrm>
           <a:prstGeom prst="rect">
             <a:avLst/>
@@ -23029,8 +23029,8 @@
         </p:nvSpPr>
         <p:spPr>
           <a:xfrm>
-            <a:off x="576072" y="4187952"/>
-            <a:ext cx="5513831" cy="1719072"/>
+            <a:off x="8257032" y="1618488"/>
+            <a:ext cx="3438144" cy="1810512"/>
           </a:xfrm>
           <a:prstGeom prst="rect">
             <a:avLst/>
@@ -23148,8 +23148,8 @@
         </p:nvSpPr>
         <p:spPr>
           <a:xfrm>
-            <a:off x="6419088" y="3593591"/>
-            <a:ext cx="5806440" cy="2377440"/>
+            <a:off x="2313432" y="3703320"/>
+            <a:ext cx="3694176" cy="2450592"/>
           </a:xfrm>
           <a:prstGeom prst="rect">
             <a:avLst/>
@@ -23193,8 +23193,8 @@
         </p:nvSpPr>
         <p:spPr>
           <a:xfrm>
-            <a:off x="6419088" y="3593591"/>
-            <a:ext cx="5806440" cy="54864"/>
+            <a:off x="2313432" y="3703320"/>
+            <a:ext cx="3694176" cy="54864"/>
           </a:xfrm>
           <a:prstGeom prst="rect">
             <a:avLst/>
@@ -23236,8 +23236,8 @@
         </p:nvSpPr>
         <p:spPr>
           <a:xfrm>
-            <a:off x="6583679" y="3685031"/>
-            <a:ext cx="5440679" cy="292608"/>
+            <a:off x="2450591" y="3794760"/>
+            <a:ext cx="3419856" cy="274320"/>
           </a:xfrm>
           <a:prstGeom prst="rect">
             <a:avLst/>
@@ -23271,8 +23271,8 @@
         </p:nvSpPr>
         <p:spPr>
           <a:xfrm>
-            <a:off x="6583679" y="3977639"/>
-            <a:ext cx="5440679" cy="201168"/>
+            <a:off x="2450591" y="4069080"/>
+            <a:ext cx="3419856" cy="182880"/>
           </a:xfrm>
           <a:prstGeom prst="rect">
             <a:avLst/>
@@ -23306,8 +23306,8 @@
         </p:nvSpPr>
         <p:spPr>
           <a:xfrm>
-            <a:off x="6583679" y="4187952"/>
-            <a:ext cx="5513831" cy="1719072"/>
+            <a:off x="2450591" y="4270248"/>
+            <a:ext cx="3438144" cy="1810512"/>
           </a:xfrm>
           <a:prstGeom prst="rect">
             <a:avLst/>
@@ -23457,8 +23457,8 @@
         </p:nvSpPr>
         <p:spPr>
           <a:xfrm>
-            <a:off x="411480" y="6135623"/>
-            <a:ext cx="5806440" cy="2377440"/>
+            <a:off x="6181344" y="3703320"/>
+            <a:ext cx="3694176" cy="2450592"/>
           </a:xfrm>
           <a:prstGeom prst="rect">
             <a:avLst/>
@@ -23502,8 +23502,8 @@
         </p:nvSpPr>
         <p:spPr>
           <a:xfrm>
-            <a:off x="411480" y="6135623"/>
-            <a:ext cx="5806440" cy="54864"/>
+            <a:off x="6181344" y="3703320"/>
+            <a:ext cx="3694176" cy="54864"/>
           </a:xfrm>
           <a:prstGeom prst="rect">
             <a:avLst/>
@@ -23545,8 +23545,8 @@
         </p:nvSpPr>
         <p:spPr>
           <a:xfrm>
-            <a:off x="576072" y="6227063"/>
-            <a:ext cx="5440679" cy="292608"/>
+            <a:off x="6318504" y="3794760"/>
+            <a:ext cx="3419856" cy="274320"/>
           </a:xfrm>
           <a:prstGeom prst="rect">
             <a:avLst/>
@@ -23580,8 +23580,8 @@
         </p:nvSpPr>
         <p:spPr>
           <a:xfrm>
-            <a:off x="576072" y="6519671"/>
-            <a:ext cx="5440679" cy="201168"/>
+            <a:off x="6318504" y="4069080"/>
+            <a:ext cx="3419856" cy="182880"/>
           </a:xfrm>
           <a:prstGeom prst="rect">
             <a:avLst/>
@@ -23615,8 +23615,8 @@
         </p:nvSpPr>
         <p:spPr>
           <a:xfrm>
-            <a:off x="576072" y="6729983"/>
-            <a:ext cx="5513831" cy="1719072"/>
+            <a:off x="6318504" y="4270248"/>
+            <a:ext cx="3438144" cy="1810512"/>
           </a:xfrm>
           <a:prstGeom prst="rect">
             <a:avLst/>
@@ -23729,283 +23729,6 @@
       <p:sp>
         <p:nvSpPr>
           <p:cNvPr id="32" name="Rectangle 31"/>
-          <p:cNvSpPr/>
-          <p:nvPr/>
-        </p:nvSpPr>
-        <p:spPr>
-          <a:xfrm>
-            <a:off x="3415284" y="6135623"/>
-            <a:ext cx="5806440" cy="2377440"/>
-          </a:xfrm>
-          <a:prstGeom prst="rect">
-            <a:avLst/>
-          </a:prstGeom>
-          <a:solidFill>
-            <a:srgbClr val="FFFFFF"/>
-          </a:solidFill>
-          <a:ln w="9525">
-            <a:solidFill>
-              <a:srgbClr val="D6D3D1"/>
-            </a:solidFill>
-          </a:ln>
-        </p:spPr>
-        <p:style>
-          <a:lnRef idx="1">
-            <a:schemeClr val="accent1"/>
-          </a:lnRef>
-          <a:fillRef idx="3">
-            <a:schemeClr val="accent1"/>
-          </a:fillRef>
-          <a:effectRef idx="2">
-            <a:schemeClr val="accent1"/>
-          </a:effectRef>
-          <a:fontRef idx="minor">
-            <a:schemeClr val="lt1"/>
-          </a:fontRef>
-        </p:style>
-        <p:txBody>
-          <a:bodyPr rtlCol="0" anchor="ctr"/>
-          <a:lstStyle/>
-          <a:p>
-            <a:pPr algn="ctr"/>
-          </a:p>
-        </p:txBody>
-      </p:sp>
-      <p:sp>
-        <p:nvSpPr>
-          <p:cNvPr id="33" name="Rectangle 32"/>
-          <p:cNvSpPr/>
-          <p:nvPr/>
-        </p:nvSpPr>
-        <p:spPr>
-          <a:xfrm>
-            <a:off x="3415284" y="6135623"/>
-            <a:ext cx="5806440" cy="54864"/>
-          </a:xfrm>
-          <a:prstGeom prst="rect">
-            <a:avLst/>
-          </a:prstGeom>
-          <a:solidFill>
-            <a:srgbClr val="C8102E"/>
-          </a:solidFill>
-          <a:ln>
-            <a:noFill/>
-          </a:ln>
-        </p:spPr>
-        <p:style>
-          <a:lnRef idx="1">
-            <a:schemeClr val="accent1"/>
-          </a:lnRef>
-          <a:fillRef idx="3">
-            <a:schemeClr val="accent1"/>
-          </a:fillRef>
-          <a:effectRef idx="2">
-            <a:schemeClr val="accent1"/>
-          </a:effectRef>
-          <a:fontRef idx="minor">
-            <a:schemeClr val="lt1"/>
-          </a:fontRef>
-        </p:style>
-        <p:txBody>
-          <a:bodyPr rtlCol="0" anchor="ctr"/>
-          <a:lstStyle/>
-          <a:p>
-            <a:pPr algn="ctr"/>
-          </a:p>
-        </p:txBody>
-      </p:sp>
-      <p:sp>
-        <p:nvSpPr>
-          <p:cNvPr id="34" name="TextBox 33"/>
-          <p:cNvSpPr txBox="1"/>
-          <p:nvPr/>
-        </p:nvSpPr>
-        <p:spPr>
-          <a:xfrm>
-            <a:off x="3579876" y="6227063"/>
-            <a:ext cx="5440679" cy="292608"/>
-          </a:xfrm>
-          <a:prstGeom prst="rect">
-            <a:avLst/>
-          </a:prstGeom>
-          <a:noFill/>
-        </p:spPr>
-        <p:txBody>
-          <a:bodyPr wrap="square">
-            <a:spAutoFit/>
-          </a:bodyPr>
-          <a:lstStyle/>
-          <a:p>
-            <a:pPr algn="l"/>
-            <a:r>
-              <a:rPr sz="1100" b="1" i="0">
-                <a:solidFill>
-                  <a:srgbClr val="1C1917"/>
-                </a:solidFill>
-                <a:latin typeface="Calibri"/>
-              </a:rPr>
-              <a:t>Audit Trail</a:t>
-            </a:r>
-          </a:p>
-        </p:txBody>
-      </p:sp>
-      <p:sp>
-        <p:nvSpPr>
-          <p:cNvPr id="35" name="TextBox 34"/>
-          <p:cNvSpPr txBox="1"/>
-          <p:nvPr/>
-        </p:nvSpPr>
-        <p:spPr>
-          <a:xfrm>
-            <a:off x="3579876" y="6519671"/>
-            <a:ext cx="5440679" cy="201168"/>
-          </a:xfrm>
-          <a:prstGeom prst="rect">
-            <a:avLst/>
-          </a:prstGeom>
-          <a:noFill/>
-        </p:spPr>
-        <p:txBody>
-          <a:bodyPr wrap="square">
-            <a:spAutoFit/>
-          </a:bodyPr>
-          <a:lstStyle/>
-          <a:p>
-            <a:pPr algn="l"/>
-            <a:r>
-              <a:rPr sz="800" b="0" i="1">
-                <a:solidFill>
-                  <a:srgbClr val="78716C"/>
-                </a:solidFill>
-                <a:latin typeface="Calibri"/>
-              </a:rPr>
-              <a:t>tab: 'audit'</a:t>
-            </a:r>
-          </a:p>
-        </p:txBody>
-      </p:sp>
-      <p:sp>
-        <p:nvSpPr>
-          <p:cNvPr id="36" name="TextBox 35"/>
-          <p:cNvSpPr txBox="1"/>
-          <p:nvPr/>
-        </p:nvSpPr>
-        <p:spPr>
-          <a:xfrm>
-            <a:off x="3579876" y="6729983"/>
-            <a:ext cx="5513831" cy="1719072"/>
-          </a:xfrm>
-          <a:prstGeom prst="rect">
-            <a:avLst/>
-          </a:prstGeom>
-          <a:noFill/>
-        </p:spPr>
-        <p:txBody>
-          <a:bodyPr wrap="square">
-            <a:spAutoFit/>
-          </a:bodyPr>
-          <a:lstStyle/>
-          <a:p>
-            <a:pPr>
-              <a:spcAft>
-                <a:spcPts val="300"/>
-              </a:spcAft>
-            </a:pPr>
-            <a:r>
-              <a:rPr sz="850">
-                <a:solidFill>
-                  <a:srgbClr val="44403C"/>
-                </a:solidFill>
-                <a:latin typeface="Calibri"/>
-              </a:rPr>
-              <a:t>· FCA SYSC 9 compliant — 7-year retention, append-only</a:t>
-            </a:r>
-          </a:p>
-          <a:p>
-            <a:pPr>
-              <a:spcAft>
-                <a:spcPts val="300"/>
-              </a:spcAft>
-            </a:pPr>
-            <a:r>
-              <a:rPr sz="850">
-                <a:solidFill>
-                  <a:srgbClr val="44403C"/>
-                </a:solidFill>
-                <a:latin typeface="Calibri"/>
-              </a:rPr>
-              <a:t>· Every action: workflow steps, sign events, rejections, system alerts</a:t>
-            </a:r>
-          </a:p>
-          <a:p>
-            <a:pPr>
-              <a:spcAft>
-                <a:spcPts val="300"/>
-              </a:spcAft>
-            </a:pPr>
-            <a:r>
-              <a:rPr sz="850">
-                <a:solidFill>
-                  <a:srgbClr val="44403C"/>
-                </a:solidFill>
-                <a:latin typeface="Calibri"/>
-              </a:rPr>
-              <a:t>· Each entry: timestamp, actor name, action type, account/reference</a:t>
-            </a:r>
-          </a:p>
-          <a:p>
-            <a:pPr>
-              <a:spcAft>
-                <a:spcPts val="300"/>
-              </a:spcAft>
-            </a:pPr>
-            <a:r>
-              <a:rPr sz="850">
-                <a:solidFill>
-                  <a:srgbClr val="44403C"/>
-                </a:solidFill>
-                <a:latin typeface="Calibri"/>
-              </a:rPr>
-              <a:t>· Session anomaly events logged with device/location metadata</a:t>
-            </a:r>
-          </a:p>
-          <a:p>
-            <a:pPr>
-              <a:spcAft>
-                <a:spcPts val="300"/>
-              </a:spcAft>
-            </a:pPr>
-            <a:r>
-              <a:rPr sz="850">
-                <a:solidFill>
-                  <a:srgbClr val="44403C"/>
-                </a:solidFill>
-                <a:latin typeface="Calibri"/>
-              </a:rPr>
-              <a:t>· Filter by event type or actor</a:t>
-            </a:r>
-          </a:p>
-          <a:p>
-            <a:pPr>
-              <a:spcAft>
-                <a:spcPts val="300"/>
-              </a:spcAft>
-            </a:pPr>
-            <a:r>
-              <a:rPr sz="850">
-                <a:solidFill>
-                  <a:srgbClr val="44403C"/>
-                </a:solidFill>
-                <a:latin typeface="Calibri"/>
-              </a:rPr>
-              <a:t>· Export for compliance reporting</a:t>
-            </a:r>
-          </a:p>
-        </p:txBody>
-      </p:sp>
-      <p:sp>
-        <p:nvSpPr>
-          <p:cNvPr id="37" name="Rectangle 36"/>
           <p:cNvSpPr/>
           <p:nvPr/>
         </p:nvSpPr>
@@ -24048,7 +23771,7 @@
       </p:sp>
       <p:sp>
         <p:nvSpPr>
-          <p:cNvPr id="38" name="TextBox 37"/>
+          <p:cNvPr id="33" name="TextBox 32"/>
           <p:cNvSpPr txBox="1"/>
           <p:nvPr/>
         </p:nvSpPr>
@@ -24083,7 +23806,7 @@
       </p:sp>
       <p:sp>
         <p:nvSpPr>
-          <p:cNvPr id="39" name="TextBox 38"/>
+          <p:cNvPr id="34" name="TextBox 33"/>
           <p:cNvSpPr txBox="1"/>
           <p:nvPr/>
         </p:nvSpPr>

--- a/Santander_Project_Record.pptx
+++ b/Santander_Project_Record.pptx
@@ -4378,7 +4378,7 @@
                 </a:solidFill>
                 <a:latin typeface="Calibri"/>
               </a:rPr>
-              <a:t>5,024 lines · 26 sections · 41 books synthesised into a single indexed technical reference</a:t>
+              <a:t>12,523 lines · 57 sections · 71 books synthesised into a single indexed technical reference</a:t>
             </a:r>
           </a:p>
         </p:txBody>
@@ -17743,7 +17743,7 @@
                 </a:solidFill>
                 <a:latin typeface="Calibri"/>
               </a:rPr>
-              <a:t>Reference library (26 sections)</a:t>
+              <a:t>Reference library (57 sections)</a:t>
             </a:r>
           </a:p>
         </p:txBody>
@@ -20660,7 +20660,7 @@
                 </a:solidFill>
                 <a:latin typeface="Calibri"/>
               </a:rPr>
-              <a:t>App.jsx — ~5,300 lines · ~300KB source · Single React component</a:t>
+              <a:t>App.jsx — ~5,700-lines · ~300KB source · Single React component</a:t>
             </a:r>
           </a:p>
           <a:p>

--- a/Santander_Project_Record.pptx
+++ b/Santander_Project_Record.pptx
@@ -4378,7 +4378,7 @@
                 </a:solidFill>
                 <a:latin typeface="Calibri"/>
               </a:rPr>
-              <a:t>12,523 lines · 57 sections · 71 books synthesised into a single indexed technical reference</a:t>
+              <a:t>5,024 lines · 26 sections · 41 books synthesised into a single indexed technical reference</a:t>
             </a:r>
           </a:p>
         </p:txBody>
@@ -17743,7 +17743,7 @@
                 </a:solidFill>
                 <a:latin typeface="Calibri"/>
               </a:rPr>
-              <a:t>Reference library (57 sections)</a:t>
+              <a:t>Reference library (26 sections)</a:t>
             </a:r>
           </a:p>
         </p:txBody>
@@ -20660,7 +20660,7 @@
                 </a:solidFill>
                 <a:latin typeface="Calibri"/>
               </a:rPr>
-              <a:t>App.jsx — ~5,700-lines · ~300KB source · Single React component</a:t>
+              <a:t>App.jsx — ~5,300 lines · ~300KB source · Single React component</a:t>
             </a:r>
           </a:p>
           <a:p>

--- a/Santander_Project_Record.pptx
+++ b/Santander_Project_Record.pptx
@@ -3333,7 +3333,7 @@
         </p:spPr>
         <p:txBody>
           <a:bodyPr wrap="square">
-            <a:spAutoFit/>
+            <a:normAutofit/>
           </a:bodyPr>
           <a:lstStyle/>
           <a:p>
@@ -3368,7 +3368,7 @@
         </p:spPr>
         <p:txBody>
           <a:bodyPr wrap="square">
-            <a:spAutoFit/>
+            <a:normAutofit/>
           </a:bodyPr>
           <a:lstStyle/>
           <a:p>
@@ -3403,7 +3403,7 @@
         </p:spPr>
         <p:txBody>
           <a:bodyPr wrap="square">
-            <a:spAutoFit/>
+            <a:normAutofit/>
           </a:bodyPr>
           <a:lstStyle/>
           <a:p>
@@ -3481,7 +3481,7 @@
         </p:spPr>
         <p:txBody>
           <a:bodyPr wrap="square">
-            <a:spAutoFit/>
+            <a:normAutofit/>
           </a:bodyPr>
           <a:lstStyle/>
           <a:p>
@@ -3654,7 +3654,7 @@
         </p:spPr>
         <p:txBody>
           <a:bodyPr wrap="square">
-            <a:spAutoFit/>
+            <a:normAutofit/>
           </a:bodyPr>
           <a:lstStyle/>
           <a:p>
@@ -3689,7 +3689,7 @@
         </p:spPr>
         <p:txBody>
           <a:bodyPr wrap="square">
-            <a:spAutoFit/>
+            <a:normAutofit/>
           </a:bodyPr>
           <a:lstStyle/>
           <a:p>
@@ -3810,7 +3810,7 @@
         </p:spPr>
         <p:txBody>
           <a:bodyPr wrap="square">
-            <a:spAutoFit/>
+            <a:normAutofit/>
           </a:bodyPr>
           <a:lstStyle/>
           <a:p>
@@ -3845,7 +3845,7 @@
         </p:spPr>
         <p:txBody>
           <a:bodyPr wrap="square">
-            <a:spAutoFit/>
+            <a:normAutofit/>
           </a:bodyPr>
           <a:lstStyle/>
           <a:p>
@@ -3966,7 +3966,7 @@
         </p:spPr>
         <p:txBody>
           <a:bodyPr wrap="square">
-            <a:spAutoFit/>
+            <a:normAutofit/>
           </a:bodyPr>
           <a:lstStyle/>
           <a:p>
@@ -4001,7 +4001,7 @@
         </p:spPr>
         <p:txBody>
           <a:bodyPr wrap="square">
-            <a:spAutoFit/>
+            <a:normAutofit/>
           </a:bodyPr>
           <a:lstStyle/>
           <a:p>
@@ -4122,7 +4122,7 @@
         </p:spPr>
         <p:txBody>
           <a:bodyPr wrap="square">
-            <a:spAutoFit/>
+            <a:normAutofit/>
           </a:bodyPr>
           <a:lstStyle/>
           <a:p>
@@ -4157,7 +4157,7 @@
         </p:spPr>
         <p:txBody>
           <a:bodyPr wrap="square">
-            <a:spAutoFit/>
+            <a:normAutofit/>
           </a:bodyPr>
           <a:lstStyle/>
           <a:p>
@@ -4192,7 +4192,7 @@
         </p:spPr>
         <p:txBody>
           <a:bodyPr wrap="square">
-            <a:spAutoFit/>
+            <a:normAutofit/>
           </a:bodyPr>
           <a:lstStyle/>
           <a:p>
@@ -4331,7 +4331,7 @@
         </p:spPr>
         <p:txBody>
           <a:bodyPr wrap="square">
-            <a:spAutoFit/>
+            <a:normAutofit/>
           </a:bodyPr>
           <a:lstStyle/>
           <a:p>
@@ -4366,7 +4366,7 @@
         </p:spPr>
         <p:txBody>
           <a:bodyPr wrap="square">
-            <a:spAutoFit/>
+            <a:normAutofit/>
           </a:bodyPr>
           <a:lstStyle/>
           <a:p>
@@ -4487,7 +4487,7 @@
         </p:spPr>
         <p:txBody>
           <a:bodyPr wrap="square">
-            <a:spAutoFit/>
+            <a:normAutofit/>
           </a:bodyPr>
           <a:lstStyle/>
           <a:p>
@@ -4522,7 +4522,7 @@
         </p:spPr>
         <p:txBody>
           <a:bodyPr wrap="square">
-            <a:spAutoFit/>
+            <a:normAutofit/>
           </a:bodyPr>
           <a:lstStyle/>
           <a:p>
@@ -4557,7 +4557,7 @@
         </p:spPr>
         <p:txBody>
           <a:bodyPr wrap="square">
-            <a:spAutoFit/>
+            <a:normAutofit/>
           </a:bodyPr>
           <a:lstStyle/>
           <a:p>
@@ -4592,7 +4592,7 @@
         </p:spPr>
         <p:txBody>
           <a:bodyPr wrap="square">
-            <a:spAutoFit/>
+            <a:normAutofit/>
           </a:bodyPr>
           <a:lstStyle/>
           <a:p>
@@ -4672,7 +4672,7 @@
         </p:spPr>
         <p:txBody>
           <a:bodyPr wrap="square">
-            <a:spAutoFit/>
+            <a:normAutofit/>
           </a:bodyPr>
           <a:lstStyle/>
           <a:p>
@@ -4707,7 +4707,7 @@
         </p:spPr>
         <p:txBody>
           <a:bodyPr wrap="square">
-            <a:spAutoFit/>
+            <a:normAutofit/>
           </a:bodyPr>
           <a:lstStyle/>
           <a:p>
@@ -4742,7 +4742,7 @@
         </p:spPr>
         <p:txBody>
           <a:bodyPr wrap="square">
-            <a:spAutoFit/>
+            <a:normAutofit/>
           </a:bodyPr>
           <a:lstStyle/>
           <a:p>
@@ -4777,7 +4777,7 @@
         </p:spPr>
         <p:txBody>
           <a:bodyPr wrap="square">
-            <a:spAutoFit/>
+            <a:normAutofit/>
           </a:bodyPr>
           <a:lstStyle/>
           <a:p>
@@ -4857,7 +4857,7 @@
         </p:spPr>
         <p:txBody>
           <a:bodyPr wrap="square">
-            <a:spAutoFit/>
+            <a:normAutofit/>
           </a:bodyPr>
           <a:lstStyle/>
           <a:p>
@@ -4892,7 +4892,7 @@
         </p:spPr>
         <p:txBody>
           <a:bodyPr wrap="square">
-            <a:spAutoFit/>
+            <a:normAutofit/>
           </a:bodyPr>
           <a:lstStyle/>
           <a:p>
@@ -4927,7 +4927,7 @@
         </p:spPr>
         <p:txBody>
           <a:bodyPr wrap="square">
-            <a:spAutoFit/>
+            <a:normAutofit/>
           </a:bodyPr>
           <a:lstStyle/>
           <a:p>
@@ -4962,7 +4962,7 @@
         </p:spPr>
         <p:txBody>
           <a:bodyPr wrap="square">
-            <a:spAutoFit/>
+            <a:normAutofit/>
           </a:bodyPr>
           <a:lstStyle/>
           <a:p>
@@ -5042,7 +5042,7 @@
         </p:spPr>
         <p:txBody>
           <a:bodyPr wrap="square">
-            <a:spAutoFit/>
+            <a:normAutofit/>
           </a:bodyPr>
           <a:lstStyle/>
           <a:p>
@@ -5077,7 +5077,7 @@
         </p:spPr>
         <p:txBody>
           <a:bodyPr wrap="square">
-            <a:spAutoFit/>
+            <a:normAutofit/>
           </a:bodyPr>
           <a:lstStyle/>
           <a:p>
@@ -5112,7 +5112,7 @@
         </p:spPr>
         <p:txBody>
           <a:bodyPr wrap="square">
-            <a:spAutoFit/>
+            <a:normAutofit/>
           </a:bodyPr>
           <a:lstStyle/>
           <a:p>
@@ -5147,7 +5147,7 @@
         </p:spPr>
         <p:txBody>
           <a:bodyPr wrap="square">
-            <a:spAutoFit/>
+            <a:normAutofit/>
           </a:bodyPr>
           <a:lstStyle/>
           <a:p>
@@ -5227,7 +5227,7 @@
         </p:spPr>
         <p:txBody>
           <a:bodyPr wrap="square">
-            <a:spAutoFit/>
+            <a:normAutofit/>
           </a:bodyPr>
           <a:lstStyle/>
           <a:p>
@@ -5262,7 +5262,7 @@
         </p:spPr>
         <p:txBody>
           <a:bodyPr wrap="square">
-            <a:spAutoFit/>
+            <a:normAutofit/>
           </a:bodyPr>
           <a:lstStyle/>
           <a:p>
@@ -5297,7 +5297,7 @@
         </p:spPr>
         <p:txBody>
           <a:bodyPr wrap="square">
-            <a:spAutoFit/>
+            <a:normAutofit/>
           </a:bodyPr>
           <a:lstStyle/>
           <a:p>
@@ -5332,7 +5332,7 @@
         </p:spPr>
         <p:txBody>
           <a:bodyPr wrap="square">
-            <a:spAutoFit/>
+            <a:normAutofit/>
           </a:bodyPr>
           <a:lstStyle/>
           <a:p>
@@ -5412,7 +5412,7 @@
         </p:spPr>
         <p:txBody>
           <a:bodyPr wrap="square">
-            <a:spAutoFit/>
+            <a:normAutofit/>
           </a:bodyPr>
           <a:lstStyle/>
           <a:p>
@@ -5447,7 +5447,7 @@
         </p:spPr>
         <p:txBody>
           <a:bodyPr wrap="square">
-            <a:spAutoFit/>
+            <a:normAutofit/>
           </a:bodyPr>
           <a:lstStyle/>
           <a:p>
@@ -5482,7 +5482,7 @@
         </p:spPr>
         <p:txBody>
           <a:bodyPr wrap="square">
-            <a:spAutoFit/>
+            <a:normAutofit/>
           </a:bodyPr>
           <a:lstStyle/>
           <a:p>
@@ -5517,7 +5517,7 @@
         </p:spPr>
         <p:txBody>
           <a:bodyPr wrap="square">
-            <a:spAutoFit/>
+            <a:normAutofit/>
           </a:bodyPr>
           <a:lstStyle/>
           <a:p>
@@ -5597,7 +5597,7 @@
         </p:spPr>
         <p:txBody>
           <a:bodyPr wrap="square">
-            <a:spAutoFit/>
+            <a:normAutofit/>
           </a:bodyPr>
           <a:lstStyle/>
           <a:p>
@@ -5632,7 +5632,7 @@
         </p:spPr>
         <p:txBody>
           <a:bodyPr wrap="square">
-            <a:spAutoFit/>
+            <a:normAutofit/>
           </a:bodyPr>
           <a:lstStyle/>
           <a:p>
@@ -5667,7 +5667,7 @@
         </p:spPr>
         <p:txBody>
           <a:bodyPr wrap="square">
-            <a:spAutoFit/>
+            <a:normAutofit/>
           </a:bodyPr>
           <a:lstStyle/>
           <a:p>
@@ -5702,7 +5702,7 @@
         </p:spPr>
         <p:txBody>
           <a:bodyPr wrap="square">
-            <a:spAutoFit/>
+            <a:normAutofit/>
           </a:bodyPr>
           <a:lstStyle/>
           <a:p>
@@ -5782,7 +5782,7 @@
         </p:spPr>
         <p:txBody>
           <a:bodyPr wrap="square">
-            <a:spAutoFit/>
+            <a:normAutofit/>
           </a:bodyPr>
           <a:lstStyle/>
           <a:p>
@@ -5817,7 +5817,7 @@
         </p:spPr>
         <p:txBody>
           <a:bodyPr wrap="square">
-            <a:spAutoFit/>
+            <a:normAutofit/>
           </a:bodyPr>
           <a:lstStyle/>
           <a:p>
@@ -5852,7 +5852,7 @@
         </p:spPr>
         <p:txBody>
           <a:bodyPr wrap="square">
-            <a:spAutoFit/>
+            <a:normAutofit/>
           </a:bodyPr>
           <a:lstStyle/>
           <a:p>
@@ -5887,7 +5887,7 @@
         </p:spPr>
         <p:txBody>
           <a:bodyPr wrap="square">
-            <a:spAutoFit/>
+            <a:normAutofit/>
           </a:bodyPr>
           <a:lstStyle/>
           <a:p>
@@ -5967,7 +5967,7 @@
         </p:spPr>
         <p:txBody>
           <a:bodyPr wrap="square">
-            <a:spAutoFit/>
+            <a:normAutofit/>
           </a:bodyPr>
           <a:lstStyle/>
           <a:p>
@@ -6002,7 +6002,7 @@
         </p:spPr>
         <p:txBody>
           <a:bodyPr wrap="square">
-            <a:spAutoFit/>
+            <a:normAutofit/>
           </a:bodyPr>
           <a:lstStyle/>
           <a:p>
@@ -6037,7 +6037,7 @@
         </p:spPr>
         <p:txBody>
           <a:bodyPr wrap="square">
-            <a:spAutoFit/>
+            <a:normAutofit/>
           </a:bodyPr>
           <a:lstStyle/>
           <a:p>
@@ -6072,7 +6072,7 @@
         </p:spPr>
         <p:txBody>
           <a:bodyPr wrap="square">
-            <a:spAutoFit/>
+            <a:normAutofit/>
           </a:bodyPr>
           <a:lstStyle/>
           <a:p>
@@ -6152,7 +6152,7 @@
         </p:spPr>
         <p:txBody>
           <a:bodyPr wrap="square">
-            <a:spAutoFit/>
+            <a:normAutofit/>
           </a:bodyPr>
           <a:lstStyle/>
           <a:p>
@@ -6187,7 +6187,7 @@
         </p:spPr>
         <p:txBody>
           <a:bodyPr wrap="square">
-            <a:spAutoFit/>
+            <a:normAutofit/>
           </a:bodyPr>
           <a:lstStyle/>
           <a:p>
@@ -6222,7 +6222,7 @@
         </p:spPr>
         <p:txBody>
           <a:bodyPr wrap="square">
-            <a:spAutoFit/>
+            <a:normAutofit/>
           </a:bodyPr>
           <a:lstStyle/>
           <a:p>
@@ -6257,7 +6257,7 @@
         </p:spPr>
         <p:txBody>
           <a:bodyPr wrap="square">
-            <a:spAutoFit/>
+            <a:normAutofit/>
           </a:bodyPr>
           <a:lstStyle/>
           <a:p>
@@ -6337,7 +6337,7 @@
         </p:spPr>
         <p:txBody>
           <a:bodyPr wrap="square">
-            <a:spAutoFit/>
+            <a:normAutofit/>
           </a:bodyPr>
           <a:lstStyle/>
           <a:p>
@@ -6372,7 +6372,7 @@
         </p:spPr>
         <p:txBody>
           <a:bodyPr wrap="square">
-            <a:spAutoFit/>
+            <a:normAutofit/>
           </a:bodyPr>
           <a:lstStyle/>
           <a:p>
@@ -6407,7 +6407,7 @@
         </p:spPr>
         <p:txBody>
           <a:bodyPr wrap="square">
-            <a:spAutoFit/>
+            <a:normAutofit/>
           </a:bodyPr>
           <a:lstStyle/>
           <a:p>
@@ -6442,7 +6442,7 @@
         </p:spPr>
         <p:txBody>
           <a:bodyPr wrap="square">
-            <a:spAutoFit/>
+            <a:normAutofit/>
           </a:bodyPr>
           <a:lstStyle/>
           <a:p>
@@ -6522,7 +6522,7 @@
         </p:spPr>
         <p:txBody>
           <a:bodyPr wrap="square">
-            <a:spAutoFit/>
+            <a:normAutofit/>
           </a:bodyPr>
           <a:lstStyle/>
           <a:p>
@@ -6557,7 +6557,7 @@
         </p:spPr>
         <p:txBody>
           <a:bodyPr wrap="square">
-            <a:spAutoFit/>
+            <a:normAutofit/>
           </a:bodyPr>
           <a:lstStyle/>
           <a:p>
@@ -6592,7 +6592,7 @@
         </p:spPr>
         <p:txBody>
           <a:bodyPr wrap="square">
-            <a:spAutoFit/>
+            <a:normAutofit/>
           </a:bodyPr>
           <a:lstStyle/>
           <a:p>
@@ -6627,7 +6627,7 @@
         </p:spPr>
         <p:txBody>
           <a:bodyPr wrap="square">
-            <a:spAutoFit/>
+            <a:normAutofit/>
           </a:bodyPr>
           <a:lstStyle/>
           <a:p>
@@ -6707,7 +6707,7 @@
         </p:spPr>
         <p:txBody>
           <a:bodyPr wrap="square">
-            <a:spAutoFit/>
+            <a:normAutofit/>
           </a:bodyPr>
           <a:lstStyle/>
           <a:p>
@@ -6742,7 +6742,7 @@
         </p:spPr>
         <p:txBody>
           <a:bodyPr wrap="square">
-            <a:spAutoFit/>
+            <a:normAutofit/>
           </a:bodyPr>
           <a:lstStyle/>
           <a:p>
@@ -6777,7 +6777,7 @@
         </p:spPr>
         <p:txBody>
           <a:bodyPr wrap="square">
-            <a:spAutoFit/>
+            <a:normAutofit/>
           </a:bodyPr>
           <a:lstStyle/>
           <a:p>
@@ -6812,7 +6812,7 @@
         </p:spPr>
         <p:txBody>
           <a:bodyPr wrap="square">
-            <a:spAutoFit/>
+            <a:normAutofit/>
           </a:bodyPr>
           <a:lstStyle/>
           <a:p>
@@ -6892,7 +6892,7 @@
         </p:spPr>
         <p:txBody>
           <a:bodyPr wrap="square">
-            <a:spAutoFit/>
+            <a:normAutofit/>
           </a:bodyPr>
           <a:lstStyle/>
           <a:p>
@@ -6927,7 +6927,7 @@
         </p:spPr>
         <p:txBody>
           <a:bodyPr wrap="square">
-            <a:spAutoFit/>
+            <a:normAutofit/>
           </a:bodyPr>
           <a:lstStyle/>
           <a:p>
@@ -6962,7 +6962,7 @@
         </p:spPr>
         <p:txBody>
           <a:bodyPr wrap="square">
-            <a:spAutoFit/>
+            <a:normAutofit/>
           </a:bodyPr>
           <a:lstStyle/>
           <a:p>
@@ -6997,7 +6997,7 @@
         </p:spPr>
         <p:txBody>
           <a:bodyPr wrap="square">
-            <a:spAutoFit/>
+            <a:normAutofit/>
           </a:bodyPr>
           <a:lstStyle/>
           <a:p>
@@ -7075,7 +7075,7 @@
         </p:spPr>
         <p:txBody>
           <a:bodyPr wrap="square">
-            <a:spAutoFit/>
+            <a:normAutofit/>
           </a:bodyPr>
           <a:lstStyle/>
           <a:p>
@@ -7110,7 +7110,7 @@
         </p:spPr>
         <p:txBody>
           <a:bodyPr wrap="square">
-            <a:spAutoFit/>
+            <a:normAutofit/>
           </a:bodyPr>
           <a:lstStyle/>
           <a:p>
@@ -7145,7 +7145,7 @@
         </p:spPr>
         <p:txBody>
           <a:bodyPr wrap="square">
-            <a:spAutoFit/>
+            <a:normAutofit/>
           </a:bodyPr>
           <a:lstStyle/>
           <a:p>
@@ -7180,7 +7180,7 @@
         </p:spPr>
         <p:txBody>
           <a:bodyPr wrap="square">
-            <a:spAutoFit/>
+            <a:normAutofit/>
           </a:bodyPr>
           <a:lstStyle/>
           <a:p>
@@ -7260,7 +7260,7 @@
         </p:spPr>
         <p:txBody>
           <a:bodyPr wrap="square">
-            <a:spAutoFit/>
+            <a:normAutofit/>
           </a:bodyPr>
           <a:lstStyle/>
           <a:p>
@@ -7295,7 +7295,7 @@
         </p:spPr>
         <p:txBody>
           <a:bodyPr wrap="square">
-            <a:spAutoFit/>
+            <a:normAutofit/>
           </a:bodyPr>
           <a:lstStyle/>
           <a:p>
@@ -7330,7 +7330,7 @@
         </p:spPr>
         <p:txBody>
           <a:bodyPr wrap="square">
-            <a:spAutoFit/>
+            <a:normAutofit/>
           </a:bodyPr>
           <a:lstStyle/>
           <a:p>
@@ -7365,7 +7365,7 @@
         </p:spPr>
         <p:txBody>
           <a:bodyPr wrap="square">
-            <a:spAutoFit/>
+            <a:normAutofit/>
           </a:bodyPr>
           <a:lstStyle/>
           <a:p>
@@ -7445,7 +7445,7 @@
         </p:spPr>
         <p:txBody>
           <a:bodyPr wrap="square">
-            <a:spAutoFit/>
+            <a:normAutofit/>
           </a:bodyPr>
           <a:lstStyle/>
           <a:p>
@@ -7480,7 +7480,7 @@
         </p:spPr>
         <p:txBody>
           <a:bodyPr wrap="square">
-            <a:spAutoFit/>
+            <a:normAutofit/>
           </a:bodyPr>
           <a:lstStyle/>
           <a:p>
@@ -7515,7 +7515,7 @@
         </p:spPr>
         <p:txBody>
           <a:bodyPr wrap="square">
-            <a:spAutoFit/>
+            <a:normAutofit/>
           </a:bodyPr>
           <a:lstStyle/>
           <a:p>
@@ -7550,7 +7550,7 @@
         </p:spPr>
         <p:txBody>
           <a:bodyPr wrap="square">
-            <a:spAutoFit/>
+            <a:normAutofit/>
           </a:bodyPr>
           <a:lstStyle/>
           <a:p>
@@ -7630,7 +7630,7 @@
         </p:spPr>
         <p:txBody>
           <a:bodyPr wrap="square">
-            <a:spAutoFit/>
+            <a:normAutofit/>
           </a:bodyPr>
           <a:lstStyle/>
           <a:p>
@@ -7665,7 +7665,7 @@
         </p:spPr>
         <p:txBody>
           <a:bodyPr wrap="square">
-            <a:spAutoFit/>
+            <a:normAutofit/>
           </a:bodyPr>
           <a:lstStyle/>
           <a:p>
@@ -7700,7 +7700,7 @@
         </p:spPr>
         <p:txBody>
           <a:bodyPr wrap="square">
-            <a:spAutoFit/>
+            <a:normAutofit/>
           </a:bodyPr>
           <a:lstStyle/>
           <a:p>
@@ -7735,7 +7735,7 @@
         </p:spPr>
         <p:txBody>
           <a:bodyPr wrap="square">
-            <a:spAutoFit/>
+            <a:normAutofit/>
           </a:bodyPr>
           <a:lstStyle/>
           <a:p>
@@ -7815,7 +7815,7 @@
         </p:spPr>
         <p:txBody>
           <a:bodyPr wrap="square">
-            <a:spAutoFit/>
+            <a:normAutofit/>
           </a:bodyPr>
           <a:lstStyle/>
           <a:p>
@@ -7850,7 +7850,7 @@
         </p:spPr>
         <p:txBody>
           <a:bodyPr wrap="square">
-            <a:spAutoFit/>
+            <a:normAutofit/>
           </a:bodyPr>
           <a:lstStyle/>
           <a:p>
@@ -7885,7 +7885,7 @@
         </p:spPr>
         <p:txBody>
           <a:bodyPr wrap="square">
-            <a:spAutoFit/>
+            <a:normAutofit/>
           </a:bodyPr>
           <a:lstStyle/>
           <a:p>
@@ -7920,7 +7920,7 @@
         </p:spPr>
         <p:txBody>
           <a:bodyPr wrap="square">
-            <a:spAutoFit/>
+            <a:normAutofit/>
           </a:bodyPr>
           <a:lstStyle/>
           <a:p>
@@ -8000,7 +8000,7 @@
         </p:spPr>
         <p:txBody>
           <a:bodyPr wrap="square">
-            <a:spAutoFit/>
+            <a:normAutofit/>
           </a:bodyPr>
           <a:lstStyle/>
           <a:p>
@@ -8035,7 +8035,7 @@
         </p:spPr>
         <p:txBody>
           <a:bodyPr wrap="square">
-            <a:spAutoFit/>
+            <a:normAutofit/>
           </a:bodyPr>
           <a:lstStyle/>
           <a:p>
@@ -8070,7 +8070,7 @@
         </p:spPr>
         <p:txBody>
           <a:bodyPr wrap="square">
-            <a:spAutoFit/>
+            <a:normAutofit/>
           </a:bodyPr>
           <a:lstStyle/>
           <a:p>
@@ -8105,7 +8105,7 @@
         </p:spPr>
         <p:txBody>
           <a:bodyPr wrap="square">
-            <a:spAutoFit/>
+            <a:normAutofit/>
           </a:bodyPr>
           <a:lstStyle/>
           <a:p>
@@ -8185,7 +8185,7 @@
         </p:spPr>
         <p:txBody>
           <a:bodyPr wrap="square">
-            <a:spAutoFit/>
+            <a:normAutofit/>
           </a:bodyPr>
           <a:lstStyle/>
           <a:p>
@@ -8220,7 +8220,7 @@
         </p:spPr>
         <p:txBody>
           <a:bodyPr wrap="square">
-            <a:spAutoFit/>
+            <a:normAutofit/>
           </a:bodyPr>
           <a:lstStyle/>
           <a:p>
@@ -8255,7 +8255,7 @@
         </p:spPr>
         <p:txBody>
           <a:bodyPr wrap="square">
-            <a:spAutoFit/>
+            <a:normAutofit/>
           </a:bodyPr>
           <a:lstStyle/>
           <a:p>
@@ -8290,7 +8290,7 @@
         </p:spPr>
         <p:txBody>
           <a:bodyPr wrap="square">
-            <a:spAutoFit/>
+            <a:normAutofit/>
           </a:bodyPr>
           <a:lstStyle/>
           <a:p>
@@ -8370,7 +8370,7 @@
         </p:spPr>
         <p:txBody>
           <a:bodyPr wrap="square">
-            <a:spAutoFit/>
+            <a:normAutofit/>
           </a:bodyPr>
           <a:lstStyle/>
           <a:p>
@@ -8405,7 +8405,7 @@
         </p:spPr>
         <p:txBody>
           <a:bodyPr wrap="square">
-            <a:spAutoFit/>
+            <a:normAutofit/>
           </a:bodyPr>
           <a:lstStyle/>
           <a:p>
@@ -8440,7 +8440,7 @@
         </p:spPr>
         <p:txBody>
           <a:bodyPr wrap="square">
-            <a:spAutoFit/>
+            <a:normAutofit/>
           </a:bodyPr>
           <a:lstStyle/>
           <a:p>
@@ -8475,7 +8475,7 @@
         </p:spPr>
         <p:txBody>
           <a:bodyPr wrap="square">
-            <a:spAutoFit/>
+            <a:normAutofit/>
           </a:bodyPr>
           <a:lstStyle/>
           <a:p>
@@ -8555,7 +8555,7 @@
         </p:spPr>
         <p:txBody>
           <a:bodyPr wrap="square">
-            <a:spAutoFit/>
+            <a:normAutofit/>
           </a:bodyPr>
           <a:lstStyle/>
           <a:p>
@@ -8590,7 +8590,7 @@
         </p:spPr>
         <p:txBody>
           <a:bodyPr wrap="square">
-            <a:spAutoFit/>
+            <a:normAutofit/>
           </a:bodyPr>
           <a:lstStyle/>
           <a:p>
@@ -8625,7 +8625,7 @@
         </p:spPr>
         <p:txBody>
           <a:bodyPr wrap="square">
-            <a:spAutoFit/>
+            <a:normAutofit/>
           </a:bodyPr>
           <a:lstStyle/>
           <a:p>
@@ -8660,7 +8660,7 @@
         </p:spPr>
         <p:txBody>
           <a:bodyPr wrap="square">
-            <a:spAutoFit/>
+            <a:normAutofit/>
           </a:bodyPr>
           <a:lstStyle/>
           <a:p>
@@ -8740,7 +8740,7 @@
         </p:spPr>
         <p:txBody>
           <a:bodyPr wrap="square">
-            <a:spAutoFit/>
+            <a:normAutofit/>
           </a:bodyPr>
           <a:lstStyle/>
           <a:p>
@@ -8775,7 +8775,7 @@
         </p:spPr>
         <p:txBody>
           <a:bodyPr wrap="square">
-            <a:spAutoFit/>
+            <a:normAutofit/>
           </a:bodyPr>
           <a:lstStyle/>
           <a:p>
@@ -8810,7 +8810,7 @@
         </p:spPr>
         <p:txBody>
           <a:bodyPr wrap="square">
-            <a:spAutoFit/>
+            <a:normAutofit/>
           </a:bodyPr>
           <a:lstStyle/>
           <a:p>
@@ -8845,7 +8845,7 @@
         </p:spPr>
         <p:txBody>
           <a:bodyPr wrap="square">
-            <a:spAutoFit/>
+            <a:normAutofit/>
           </a:bodyPr>
           <a:lstStyle/>
           <a:p>
@@ -8925,7 +8925,7 @@
         </p:spPr>
         <p:txBody>
           <a:bodyPr wrap="square">
-            <a:spAutoFit/>
+            <a:normAutofit/>
           </a:bodyPr>
           <a:lstStyle/>
           <a:p>
@@ -8960,7 +8960,7 @@
         </p:spPr>
         <p:txBody>
           <a:bodyPr wrap="square">
-            <a:spAutoFit/>
+            <a:normAutofit/>
           </a:bodyPr>
           <a:lstStyle/>
           <a:p>
@@ -8995,7 +8995,7 @@
         </p:spPr>
         <p:txBody>
           <a:bodyPr wrap="square">
-            <a:spAutoFit/>
+            <a:normAutofit/>
           </a:bodyPr>
           <a:lstStyle/>
           <a:p>
@@ -9030,7 +9030,7 @@
         </p:spPr>
         <p:txBody>
           <a:bodyPr wrap="square">
-            <a:spAutoFit/>
+            <a:normAutofit/>
           </a:bodyPr>
           <a:lstStyle/>
           <a:p>
@@ -9110,7 +9110,7 @@
         </p:spPr>
         <p:txBody>
           <a:bodyPr wrap="square">
-            <a:spAutoFit/>
+            <a:normAutofit/>
           </a:bodyPr>
           <a:lstStyle/>
           <a:p>
@@ -9145,7 +9145,7 @@
         </p:spPr>
         <p:txBody>
           <a:bodyPr wrap="square">
-            <a:spAutoFit/>
+            <a:normAutofit/>
           </a:bodyPr>
           <a:lstStyle/>
           <a:p>
@@ -9180,7 +9180,7 @@
         </p:spPr>
         <p:txBody>
           <a:bodyPr wrap="square">
-            <a:spAutoFit/>
+            <a:normAutofit/>
           </a:bodyPr>
           <a:lstStyle/>
           <a:p>
@@ -9215,7 +9215,7 @@
         </p:spPr>
         <p:txBody>
           <a:bodyPr wrap="square">
-            <a:spAutoFit/>
+            <a:normAutofit/>
           </a:bodyPr>
           <a:lstStyle/>
           <a:p>
@@ -9295,7 +9295,7 @@
         </p:spPr>
         <p:txBody>
           <a:bodyPr wrap="square">
-            <a:spAutoFit/>
+            <a:normAutofit/>
           </a:bodyPr>
           <a:lstStyle/>
           <a:p>
@@ -9330,7 +9330,7 @@
         </p:spPr>
         <p:txBody>
           <a:bodyPr wrap="square">
-            <a:spAutoFit/>
+            <a:normAutofit/>
           </a:bodyPr>
           <a:lstStyle/>
           <a:p>
@@ -9365,7 +9365,7 @@
         </p:spPr>
         <p:txBody>
           <a:bodyPr wrap="square">
-            <a:spAutoFit/>
+            <a:normAutofit/>
           </a:bodyPr>
           <a:lstStyle/>
           <a:p>
@@ -9400,7 +9400,7 @@
         </p:spPr>
         <p:txBody>
           <a:bodyPr wrap="square">
-            <a:spAutoFit/>
+            <a:normAutofit/>
           </a:bodyPr>
           <a:lstStyle/>
           <a:p>
@@ -9480,7 +9480,7 @@
         </p:spPr>
         <p:txBody>
           <a:bodyPr wrap="square">
-            <a:spAutoFit/>
+            <a:normAutofit/>
           </a:bodyPr>
           <a:lstStyle/>
           <a:p>
@@ -9515,7 +9515,7 @@
         </p:spPr>
         <p:txBody>
           <a:bodyPr wrap="square">
-            <a:spAutoFit/>
+            <a:normAutofit/>
           </a:bodyPr>
           <a:lstStyle/>
           <a:p>
@@ -9550,7 +9550,7 @@
         </p:spPr>
         <p:txBody>
           <a:bodyPr wrap="square">
-            <a:spAutoFit/>
+            <a:normAutofit/>
           </a:bodyPr>
           <a:lstStyle/>
           <a:p>
@@ -9585,7 +9585,7 @@
         </p:spPr>
         <p:txBody>
           <a:bodyPr wrap="square">
-            <a:spAutoFit/>
+            <a:normAutofit/>
           </a:bodyPr>
           <a:lstStyle/>
           <a:p>
@@ -9663,7 +9663,7 @@
         </p:spPr>
         <p:txBody>
           <a:bodyPr wrap="square">
-            <a:spAutoFit/>
+            <a:normAutofit/>
           </a:bodyPr>
           <a:lstStyle/>
           <a:p>
@@ -9698,7 +9698,7 @@
         </p:spPr>
         <p:txBody>
           <a:bodyPr wrap="square">
-            <a:spAutoFit/>
+            <a:normAutofit/>
           </a:bodyPr>
           <a:lstStyle/>
           <a:p>
@@ -9837,7 +9837,7 @@
         </p:spPr>
         <p:txBody>
           <a:bodyPr wrap="square">
-            <a:spAutoFit/>
+            <a:normAutofit/>
           </a:bodyPr>
           <a:lstStyle/>
           <a:p>
@@ -9872,7 +9872,7 @@
         </p:spPr>
         <p:txBody>
           <a:bodyPr wrap="square">
-            <a:spAutoFit/>
+            <a:normAutofit/>
           </a:bodyPr>
           <a:lstStyle/>
           <a:p>
@@ -10038,7 +10038,7 @@
         </p:spPr>
         <p:txBody>
           <a:bodyPr wrap="square">
-            <a:spAutoFit/>
+            <a:normAutofit/>
           </a:bodyPr>
           <a:lstStyle/>
           <a:p>
@@ -10073,7 +10073,7 @@
         </p:spPr>
         <p:txBody>
           <a:bodyPr wrap="square">
-            <a:spAutoFit/>
+            <a:normAutofit/>
           </a:bodyPr>
           <a:lstStyle/>
           <a:p>
@@ -10153,7 +10153,7 @@
         </p:spPr>
         <p:txBody>
           <a:bodyPr wrap="square">
-            <a:spAutoFit/>
+            <a:normAutofit/>
           </a:bodyPr>
           <a:lstStyle/>
           <a:p>
@@ -10188,7 +10188,7 @@
         </p:spPr>
         <p:txBody>
           <a:bodyPr wrap="square">
-            <a:spAutoFit/>
+            <a:normAutofit/>
           </a:bodyPr>
           <a:lstStyle/>
           <a:p>
@@ -10268,7 +10268,7 @@
         </p:spPr>
         <p:txBody>
           <a:bodyPr wrap="square">
-            <a:spAutoFit/>
+            <a:normAutofit/>
           </a:bodyPr>
           <a:lstStyle/>
           <a:p>
@@ -10303,7 +10303,7 @@
         </p:spPr>
         <p:txBody>
           <a:bodyPr wrap="square">
-            <a:spAutoFit/>
+            <a:normAutofit/>
           </a:bodyPr>
           <a:lstStyle/>
           <a:p>
@@ -10383,7 +10383,7 @@
         </p:spPr>
         <p:txBody>
           <a:bodyPr wrap="square">
-            <a:spAutoFit/>
+            <a:normAutofit/>
           </a:bodyPr>
           <a:lstStyle/>
           <a:p>
@@ -10418,7 +10418,7 @@
         </p:spPr>
         <p:txBody>
           <a:bodyPr wrap="square">
-            <a:spAutoFit/>
+            <a:normAutofit/>
           </a:bodyPr>
           <a:lstStyle/>
           <a:p>
@@ -10498,7 +10498,7 @@
         </p:spPr>
         <p:txBody>
           <a:bodyPr wrap="square">
-            <a:spAutoFit/>
+            <a:normAutofit/>
           </a:bodyPr>
           <a:lstStyle/>
           <a:p>
@@ -10533,7 +10533,7 @@
         </p:spPr>
         <p:txBody>
           <a:bodyPr wrap="square">
-            <a:spAutoFit/>
+            <a:normAutofit/>
           </a:bodyPr>
           <a:lstStyle/>
           <a:p>
@@ -10613,7 +10613,7 @@
         </p:spPr>
         <p:txBody>
           <a:bodyPr wrap="square">
-            <a:spAutoFit/>
+            <a:normAutofit/>
           </a:bodyPr>
           <a:lstStyle/>
           <a:p>
@@ -10648,7 +10648,7 @@
         </p:spPr>
         <p:txBody>
           <a:bodyPr wrap="square">
-            <a:spAutoFit/>
+            <a:normAutofit/>
           </a:bodyPr>
           <a:lstStyle/>
           <a:p>
@@ -10728,7 +10728,7 @@
         </p:spPr>
         <p:txBody>
           <a:bodyPr wrap="square">
-            <a:spAutoFit/>
+            <a:normAutofit/>
           </a:bodyPr>
           <a:lstStyle/>
           <a:p>
@@ -10763,7 +10763,7 @@
         </p:spPr>
         <p:txBody>
           <a:bodyPr wrap="square">
-            <a:spAutoFit/>
+            <a:normAutofit/>
           </a:bodyPr>
           <a:lstStyle/>
           <a:p>
@@ -10886,7 +10886,7 @@
         </p:spPr>
         <p:txBody>
           <a:bodyPr wrap="square">
-            <a:spAutoFit/>
+            <a:normAutofit/>
           </a:bodyPr>
           <a:lstStyle/>
           <a:p>
@@ -10966,7 +10966,7 @@
         </p:spPr>
         <p:txBody>
           <a:bodyPr wrap="square">
-            <a:spAutoFit/>
+            <a:normAutofit/>
           </a:bodyPr>
           <a:lstStyle/>
           <a:p>
@@ -11001,7 +11001,7 @@
         </p:spPr>
         <p:txBody>
           <a:bodyPr wrap="square">
-            <a:spAutoFit/>
+            <a:normAutofit/>
           </a:bodyPr>
           <a:lstStyle/>
           <a:p>
@@ -11081,7 +11081,7 @@
         </p:spPr>
         <p:txBody>
           <a:bodyPr wrap="square">
-            <a:spAutoFit/>
+            <a:normAutofit/>
           </a:bodyPr>
           <a:lstStyle/>
           <a:p>
@@ -11116,7 +11116,7 @@
         </p:spPr>
         <p:txBody>
           <a:bodyPr wrap="square">
-            <a:spAutoFit/>
+            <a:normAutofit/>
           </a:bodyPr>
           <a:lstStyle/>
           <a:p>
@@ -11196,7 +11196,7 @@
         </p:spPr>
         <p:txBody>
           <a:bodyPr wrap="square">
-            <a:spAutoFit/>
+            <a:normAutofit/>
           </a:bodyPr>
           <a:lstStyle/>
           <a:p>
@@ -11231,7 +11231,7 @@
         </p:spPr>
         <p:txBody>
           <a:bodyPr wrap="square">
-            <a:spAutoFit/>
+            <a:normAutofit/>
           </a:bodyPr>
           <a:lstStyle/>
           <a:p>
@@ -11311,7 +11311,7 @@
         </p:spPr>
         <p:txBody>
           <a:bodyPr wrap="square">
-            <a:spAutoFit/>
+            <a:normAutofit/>
           </a:bodyPr>
           <a:lstStyle/>
           <a:p>
@@ -11346,7 +11346,7 @@
         </p:spPr>
         <p:txBody>
           <a:bodyPr wrap="square">
-            <a:spAutoFit/>
+            <a:normAutofit/>
           </a:bodyPr>
           <a:lstStyle/>
           <a:p>
@@ -11426,7 +11426,7 @@
         </p:spPr>
         <p:txBody>
           <a:bodyPr wrap="square">
-            <a:spAutoFit/>
+            <a:normAutofit/>
           </a:bodyPr>
           <a:lstStyle/>
           <a:p>
@@ -11461,7 +11461,7 @@
         </p:spPr>
         <p:txBody>
           <a:bodyPr wrap="square">
-            <a:spAutoFit/>
+            <a:normAutofit/>
           </a:bodyPr>
           <a:lstStyle/>
           <a:p>
@@ -11541,7 +11541,7 @@
         </p:spPr>
         <p:txBody>
           <a:bodyPr wrap="square">
-            <a:spAutoFit/>
+            <a:normAutofit/>
           </a:bodyPr>
           <a:lstStyle/>
           <a:p>
@@ -11576,7 +11576,7 @@
         </p:spPr>
         <p:txBody>
           <a:bodyPr wrap="square">
-            <a:spAutoFit/>
+            <a:normAutofit/>
           </a:bodyPr>
           <a:lstStyle/>
           <a:p>
@@ -11699,7 +11699,7 @@
         </p:spPr>
         <p:txBody>
           <a:bodyPr wrap="square">
-            <a:spAutoFit/>
+            <a:normAutofit/>
           </a:bodyPr>
           <a:lstStyle/>
           <a:p>
@@ -11779,7 +11779,7 @@
         </p:spPr>
         <p:txBody>
           <a:bodyPr wrap="square">
-            <a:spAutoFit/>
+            <a:normAutofit/>
           </a:bodyPr>
           <a:lstStyle/>
           <a:p>
@@ -11814,7 +11814,7 @@
         </p:spPr>
         <p:txBody>
           <a:bodyPr wrap="square">
-            <a:spAutoFit/>
+            <a:normAutofit/>
           </a:bodyPr>
           <a:lstStyle/>
           <a:p>
@@ -11894,7 +11894,7 @@
         </p:spPr>
         <p:txBody>
           <a:bodyPr wrap="square">
-            <a:spAutoFit/>
+            <a:normAutofit/>
           </a:bodyPr>
           <a:lstStyle/>
           <a:p>
@@ -11929,7 +11929,7 @@
         </p:spPr>
         <p:txBody>
           <a:bodyPr wrap="square">
-            <a:spAutoFit/>
+            <a:normAutofit/>
           </a:bodyPr>
           <a:lstStyle/>
           <a:p>
@@ -12009,7 +12009,7 @@
         </p:spPr>
         <p:txBody>
           <a:bodyPr wrap="square">
-            <a:spAutoFit/>
+            <a:normAutofit/>
           </a:bodyPr>
           <a:lstStyle/>
           <a:p>
@@ -12044,7 +12044,7 @@
         </p:spPr>
         <p:txBody>
           <a:bodyPr wrap="square">
-            <a:spAutoFit/>
+            <a:normAutofit/>
           </a:bodyPr>
           <a:lstStyle/>
           <a:p>
@@ -12124,7 +12124,7 @@
         </p:spPr>
         <p:txBody>
           <a:bodyPr wrap="square">
-            <a:spAutoFit/>
+            <a:normAutofit/>
           </a:bodyPr>
           <a:lstStyle/>
           <a:p>
@@ -12159,7 +12159,7 @@
         </p:spPr>
         <p:txBody>
           <a:bodyPr wrap="square">
-            <a:spAutoFit/>
+            <a:normAutofit/>
           </a:bodyPr>
           <a:lstStyle/>
           <a:p>
@@ -12239,7 +12239,7 @@
         </p:spPr>
         <p:txBody>
           <a:bodyPr wrap="square">
-            <a:spAutoFit/>
+            <a:normAutofit/>
           </a:bodyPr>
           <a:lstStyle/>
           <a:p>
@@ -12274,7 +12274,7 @@
         </p:spPr>
         <p:txBody>
           <a:bodyPr wrap="square">
-            <a:spAutoFit/>
+            <a:normAutofit/>
           </a:bodyPr>
           <a:lstStyle/>
           <a:p>
@@ -12354,7 +12354,7 @@
         </p:spPr>
         <p:txBody>
           <a:bodyPr wrap="square">
-            <a:spAutoFit/>
+            <a:normAutofit/>
           </a:bodyPr>
           <a:lstStyle/>
           <a:p>
@@ -12389,7 +12389,7 @@
         </p:spPr>
         <p:txBody>
           <a:bodyPr wrap="square">
-            <a:spAutoFit/>
+            <a:normAutofit/>
           </a:bodyPr>
           <a:lstStyle/>
           <a:p>
@@ -12469,7 +12469,7 @@
         </p:spPr>
         <p:txBody>
           <a:bodyPr wrap="square">
-            <a:spAutoFit/>
+            <a:normAutofit/>
           </a:bodyPr>
           <a:lstStyle/>
           <a:p>
@@ -12504,7 +12504,7 @@
         </p:spPr>
         <p:txBody>
           <a:bodyPr wrap="square">
-            <a:spAutoFit/>
+            <a:normAutofit/>
           </a:bodyPr>
           <a:lstStyle/>
           <a:p>
@@ -12627,7 +12627,7 @@
         </p:spPr>
         <p:txBody>
           <a:bodyPr wrap="square">
-            <a:spAutoFit/>
+            <a:normAutofit/>
           </a:bodyPr>
           <a:lstStyle/>
           <a:p>
@@ -12662,7 +12662,7 @@
         </p:spPr>
         <p:txBody>
           <a:bodyPr wrap="square">
-            <a:spAutoFit/>
+            <a:normAutofit/>
           </a:bodyPr>
           <a:lstStyle/>
           <a:p>
@@ -12808,7 +12808,7 @@
         </p:spPr>
         <p:txBody>
           <a:bodyPr wrap="square">
-            <a:spAutoFit/>
+            <a:normAutofit/>
           </a:bodyPr>
           <a:lstStyle/>
           <a:p>
@@ -12843,7 +12843,7 @@
         </p:spPr>
         <p:txBody>
           <a:bodyPr wrap="square">
-            <a:spAutoFit/>
+            <a:normAutofit/>
           </a:bodyPr>
           <a:lstStyle/>
           <a:p>
@@ -12982,7 +12982,7 @@
         </p:spPr>
         <p:txBody>
           <a:bodyPr wrap="square">
-            <a:spAutoFit/>
+            <a:normAutofit/>
           </a:bodyPr>
           <a:lstStyle/>
           <a:p>
@@ -13017,7 +13017,7 @@
         </p:spPr>
         <p:txBody>
           <a:bodyPr wrap="square">
-            <a:spAutoFit/>
+            <a:normAutofit/>
           </a:bodyPr>
           <a:lstStyle/>
           <a:p>
@@ -13183,7 +13183,7 @@
         </p:spPr>
         <p:txBody>
           <a:bodyPr wrap="square">
-            <a:spAutoFit/>
+            <a:normAutofit/>
           </a:bodyPr>
           <a:lstStyle/>
           <a:p>
@@ -13218,7 +13218,7 @@
         </p:spPr>
         <p:txBody>
           <a:bodyPr wrap="square">
-            <a:spAutoFit/>
+            <a:normAutofit/>
           </a:bodyPr>
           <a:lstStyle/>
           <a:p>
@@ -13339,7 +13339,7 @@
         </p:spPr>
         <p:txBody>
           <a:bodyPr wrap="square">
-            <a:spAutoFit/>
+            <a:normAutofit/>
           </a:bodyPr>
           <a:lstStyle/>
           <a:p>
@@ -13374,7 +13374,7 @@
         </p:spPr>
         <p:txBody>
           <a:bodyPr wrap="square">
-            <a:spAutoFit/>
+            <a:normAutofit/>
           </a:bodyPr>
           <a:lstStyle/>
           <a:p>
@@ -13452,7 +13452,7 @@
         </p:spPr>
         <p:txBody>
           <a:bodyPr wrap="square">
-            <a:spAutoFit/>
+            <a:normAutofit/>
           </a:bodyPr>
           <a:lstStyle/>
           <a:p>
@@ -13487,7 +13487,7 @@
         </p:spPr>
         <p:txBody>
           <a:bodyPr wrap="square">
-            <a:spAutoFit/>
+            <a:normAutofit/>
           </a:bodyPr>
           <a:lstStyle/>
           <a:p>
@@ -13565,7 +13565,7 @@
         </p:spPr>
         <p:txBody>
           <a:bodyPr wrap="square">
-            <a:spAutoFit/>
+            <a:normAutofit/>
           </a:bodyPr>
           <a:lstStyle/>
           <a:p>
@@ -13600,7 +13600,7 @@
         </p:spPr>
         <p:txBody>
           <a:bodyPr wrap="square">
-            <a:spAutoFit/>
+            <a:normAutofit/>
           </a:bodyPr>
           <a:lstStyle/>
           <a:p>
@@ -13678,7 +13678,7 @@
         </p:spPr>
         <p:txBody>
           <a:bodyPr wrap="square">
-            <a:spAutoFit/>
+            <a:normAutofit/>
           </a:bodyPr>
           <a:lstStyle/>
           <a:p>
@@ -13713,7 +13713,7 @@
         </p:spPr>
         <p:txBody>
           <a:bodyPr wrap="square">
-            <a:spAutoFit/>
+            <a:normAutofit/>
           </a:bodyPr>
           <a:lstStyle/>
           <a:p>
@@ -13791,7 +13791,7 @@
         </p:spPr>
         <p:txBody>
           <a:bodyPr wrap="square">
-            <a:spAutoFit/>
+            <a:normAutofit/>
           </a:bodyPr>
           <a:lstStyle/>
           <a:p>
@@ -13826,7 +13826,7 @@
         </p:spPr>
         <p:txBody>
           <a:bodyPr wrap="square">
-            <a:spAutoFit/>
+            <a:normAutofit/>
           </a:bodyPr>
           <a:lstStyle/>
           <a:p>
@@ -13904,7 +13904,7 @@
         </p:spPr>
         <p:txBody>
           <a:bodyPr wrap="square">
-            <a:spAutoFit/>
+            <a:normAutofit/>
           </a:bodyPr>
           <a:lstStyle/>
           <a:p>
@@ -13939,7 +13939,7 @@
         </p:spPr>
         <p:txBody>
           <a:bodyPr wrap="square">
-            <a:spAutoFit/>
+            <a:normAutofit/>
           </a:bodyPr>
           <a:lstStyle/>
           <a:p>
@@ -14017,7 +14017,7 @@
         </p:spPr>
         <p:txBody>
           <a:bodyPr wrap="square">
-            <a:spAutoFit/>
+            <a:normAutofit/>
           </a:bodyPr>
           <a:lstStyle/>
           <a:p>
@@ -14052,7 +14052,7 @@
         </p:spPr>
         <p:txBody>
           <a:bodyPr wrap="square">
-            <a:spAutoFit/>
+            <a:normAutofit/>
           </a:bodyPr>
           <a:lstStyle/>
           <a:p>
@@ -14130,7 +14130,7 @@
         </p:spPr>
         <p:txBody>
           <a:bodyPr wrap="square">
-            <a:spAutoFit/>
+            <a:normAutofit/>
           </a:bodyPr>
           <a:lstStyle/>
           <a:p>
@@ -14165,7 +14165,7 @@
         </p:spPr>
         <p:txBody>
           <a:bodyPr wrap="square">
-            <a:spAutoFit/>
+            <a:normAutofit/>
           </a:bodyPr>
           <a:lstStyle/>
           <a:p>
@@ -14243,7 +14243,7 @@
         </p:spPr>
         <p:txBody>
           <a:bodyPr wrap="square">
-            <a:spAutoFit/>
+            <a:normAutofit/>
           </a:bodyPr>
           <a:lstStyle/>
           <a:p>
@@ -14278,7 +14278,7 @@
         </p:spPr>
         <p:txBody>
           <a:bodyPr wrap="square">
-            <a:spAutoFit/>
+            <a:normAutofit/>
           </a:bodyPr>
           <a:lstStyle/>
           <a:p>
@@ -14356,7 +14356,7 @@
         </p:spPr>
         <p:txBody>
           <a:bodyPr wrap="square">
-            <a:spAutoFit/>
+            <a:normAutofit/>
           </a:bodyPr>
           <a:lstStyle/>
           <a:p>
@@ -14391,7 +14391,7 @@
         </p:spPr>
         <p:txBody>
           <a:bodyPr wrap="square">
-            <a:spAutoFit/>
+            <a:normAutofit/>
           </a:bodyPr>
           <a:lstStyle/>
           <a:p>
@@ -14469,7 +14469,7 @@
         </p:spPr>
         <p:txBody>
           <a:bodyPr wrap="square">
-            <a:spAutoFit/>
+            <a:normAutofit/>
           </a:bodyPr>
           <a:lstStyle/>
           <a:p>
@@ -14504,7 +14504,7 @@
         </p:spPr>
         <p:txBody>
           <a:bodyPr wrap="square">
-            <a:spAutoFit/>
+            <a:normAutofit/>
           </a:bodyPr>
           <a:lstStyle/>
           <a:p>
@@ -14582,7 +14582,7 @@
         </p:spPr>
         <p:txBody>
           <a:bodyPr wrap="square">
-            <a:spAutoFit/>
+            <a:normAutofit/>
           </a:bodyPr>
           <a:lstStyle/>
           <a:p>
@@ -14617,7 +14617,7 @@
         </p:spPr>
         <p:txBody>
           <a:bodyPr wrap="square">
-            <a:spAutoFit/>
+            <a:normAutofit/>
           </a:bodyPr>
           <a:lstStyle/>
           <a:p>
@@ -14695,7 +14695,7 @@
         </p:spPr>
         <p:txBody>
           <a:bodyPr wrap="square">
-            <a:spAutoFit/>
+            <a:normAutofit/>
           </a:bodyPr>
           <a:lstStyle/>
           <a:p>
@@ -14730,7 +14730,7 @@
         </p:spPr>
         <p:txBody>
           <a:bodyPr wrap="square">
-            <a:spAutoFit/>
+            <a:normAutofit/>
           </a:bodyPr>
           <a:lstStyle/>
           <a:p>
@@ -14808,7 +14808,7 @@
         </p:spPr>
         <p:txBody>
           <a:bodyPr wrap="square">
-            <a:spAutoFit/>
+            <a:normAutofit/>
           </a:bodyPr>
           <a:lstStyle/>
           <a:p>
@@ -14843,7 +14843,7 @@
         </p:spPr>
         <p:txBody>
           <a:bodyPr wrap="square">
-            <a:spAutoFit/>
+            <a:normAutofit/>
           </a:bodyPr>
           <a:lstStyle/>
           <a:p>
@@ -14921,7 +14921,7 @@
         </p:spPr>
         <p:txBody>
           <a:bodyPr wrap="square">
-            <a:spAutoFit/>
+            <a:normAutofit/>
           </a:bodyPr>
           <a:lstStyle/>
           <a:p>
@@ -14956,7 +14956,7 @@
         </p:spPr>
         <p:txBody>
           <a:bodyPr wrap="square">
-            <a:spAutoFit/>
+            <a:normAutofit/>
           </a:bodyPr>
           <a:lstStyle/>
           <a:p>
@@ -15034,7 +15034,7 @@
         </p:spPr>
         <p:txBody>
           <a:bodyPr wrap="square">
-            <a:spAutoFit/>
+            <a:normAutofit/>
           </a:bodyPr>
           <a:lstStyle/>
           <a:p>
@@ -15069,7 +15069,7 @@
         </p:spPr>
         <p:txBody>
           <a:bodyPr wrap="square">
-            <a:spAutoFit/>
+            <a:normAutofit/>
           </a:bodyPr>
           <a:lstStyle/>
           <a:p>
@@ -15192,7 +15192,7 @@
         </p:spPr>
         <p:txBody>
           <a:bodyPr wrap="square">
-            <a:spAutoFit/>
+            <a:normAutofit/>
           </a:bodyPr>
           <a:lstStyle/>
           <a:p>
@@ -15227,7 +15227,7 @@
         </p:spPr>
         <p:txBody>
           <a:bodyPr wrap="square">
-            <a:spAutoFit/>
+            <a:normAutofit/>
           </a:bodyPr>
           <a:lstStyle/>
           <a:p>
@@ -15348,7 +15348,7 @@
         </p:spPr>
         <p:txBody>
           <a:bodyPr wrap="square">
-            <a:spAutoFit/>
+            <a:normAutofit/>
           </a:bodyPr>
           <a:lstStyle/>
           <a:p>
@@ -15383,7 +15383,7 @@
         </p:spPr>
         <p:txBody>
           <a:bodyPr wrap="square">
-            <a:spAutoFit/>
+            <a:normAutofit/>
           </a:bodyPr>
           <a:lstStyle/>
           <a:p>
@@ -15461,7 +15461,7 @@
         </p:spPr>
         <p:txBody>
           <a:bodyPr wrap="square">
-            <a:spAutoFit/>
+            <a:normAutofit/>
           </a:bodyPr>
           <a:lstStyle/>
           <a:p>
@@ -15496,7 +15496,7 @@
         </p:spPr>
         <p:txBody>
           <a:bodyPr wrap="square">
-            <a:spAutoFit/>
+            <a:normAutofit/>
           </a:bodyPr>
           <a:lstStyle/>
           <a:p>
@@ -15574,7 +15574,7 @@
         </p:spPr>
         <p:txBody>
           <a:bodyPr wrap="square">
-            <a:spAutoFit/>
+            <a:normAutofit/>
           </a:bodyPr>
           <a:lstStyle/>
           <a:p>
@@ -15609,7 +15609,7 @@
         </p:spPr>
         <p:txBody>
           <a:bodyPr wrap="square">
-            <a:spAutoFit/>
+            <a:normAutofit/>
           </a:bodyPr>
           <a:lstStyle/>
           <a:p>
@@ -15687,7 +15687,7 @@
         </p:spPr>
         <p:txBody>
           <a:bodyPr wrap="square">
-            <a:spAutoFit/>
+            <a:normAutofit/>
           </a:bodyPr>
           <a:lstStyle/>
           <a:p>
@@ -15722,7 +15722,7 @@
         </p:spPr>
         <p:txBody>
           <a:bodyPr wrap="square">
-            <a:spAutoFit/>
+            <a:normAutofit/>
           </a:bodyPr>
           <a:lstStyle/>
           <a:p>
@@ -15800,7 +15800,7 @@
         </p:spPr>
         <p:txBody>
           <a:bodyPr wrap="square">
-            <a:spAutoFit/>
+            <a:normAutofit/>
           </a:bodyPr>
           <a:lstStyle/>
           <a:p>
@@ -15835,7 +15835,7 @@
         </p:spPr>
         <p:txBody>
           <a:bodyPr wrap="square">
-            <a:spAutoFit/>
+            <a:normAutofit/>
           </a:bodyPr>
           <a:lstStyle/>
           <a:p>
@@ -15913,7 +15913,7 @@
         </p:spPr>
         <p:txBody>
           <a:bodyPr wrap="square">
-            <a:spAutoFit/>
+            <a:normAutofit/>
           </a:bodyPr>
           <a:lstStyle/>
           <a:p>
@@ -15948,7 +15948,7 @@
         </p:spPr>
         <p:txBody>
           <a:bodyPr wrap="square">
-            <a:spAutoFit/>
+            <a:normAutofit/>
           </a:bodyPr>
           <a:lstStyle/>
           <a:p>
@@ -16026,7 +16026,7 @@
         </p:spPr>
         <p:txBody>
           <a:bodyPr wrap="square">
-            <a:spAutoFit/>
+            <a:normAutofit/>
           </a:bodyPr>
           <a:lstStyle/>
           <a:p>
@@ -16061,7 +16061,7 @@
         </p:spPr>
         <p:txBody>
           <a:bodyPr wrap="square">
-            <a:spAutoFit/>
+            <a:normAutofit/>
           </a:bodyPr>
           <a:lstStyle/>
           <a:p>
@@ -16139,7 +16139,7 @@
         </p:spPr>
         <p:txBody>
           <a:bodyPr wrap="square">
-            <a:spAutoFit/>
+            <a:normAutofit/>
           </a:bodyPr>
           <a:lstStyle/>
           <a:p>
@@ -16174,7 +16174,7 @@
         </p:spPr>
         <p:txBody>
           <a:bodyPr wrap="square">
-            <a:spAutoFit/>
+            <a:normAutofit/>
           </a:bodyPr>
           <a:lstStyle/>
           <a:p>
@@ -16252,7 +16252,7 @@
         </p:spPr>
         <p:txBody>
           <a:bodyPr wrap="square">
-            <a:spAutoFit/>
+            <a:normAutofit/>
           </a:bodyPr>
           <a:lstStyle/>
           <a:p>
@@ -16287,7 +16287,7 @@
         </p:spPr>
         <p:txBody>
           <a:bodyPr wrap="square">
-            <a:spAutoFit/>
+            <a:normAutofit/>
           </a:bodyPr>
           <a:lstStyle/>
           <a:p>
@@ -16365,7 +16365,7 @@
         </p:spPr>
         <p:txBody>
           <a:bodyPr wrap="square">
-            <a:spAutoFit/>
+            <a:normAutofit/>
           </a:bodyPr>
           <a:lstStyle/>
           <a:p>
@@ -16400,7 +16400,7 @@
         </p:spPr>
         <p:txBody>
           <a:bodyPr wrap="square">
-            <a:spAutoFit/>
+            <a:normAutofit/>
           </a:bodyPr>
           <a:lstStyle/>
           <a:p>
@@ -16523,7 +16523,7 @@
         </p:spPr>
         <p:txBody>
           <a:bodyPr wrap="square">
-            <a:spAutoFit/>
+            <a:normAutofit/>
           </a:bodyPr>
           <a:lstStyle/>
           <a:p>
@@ -16558,7 +16558,7 @@
         </p:spPr>
         <p:txBody>
           <a:bodyPr wrap="square">
-            <a:spAutoFit/>
+            <a:normAutofit/>
           </a:bodyPr>
           <a:lstStyle/>
           <a:p>
@@ -16679,7 +16679,7 @@
         </p:spPr>
         <p:txBody>
           <a:bodyPr wrap="square">
-            <a:spAutoFit/>
+            <a:normAutofit/>
           </a:bodyPr>
           <a:lstStyle/>
           <a:p>
@@ -16714,7 +16714,7 @@
         </p:spPr>
         <p:txBody>
           <a:bodyPr wrap="square">
-            <a:spAutoFit/>
+            <a:normAutofit/>
           </a:bodyPr>
           <a:lstStyle/>
           <a:p>
@@ -16792,7 +16792,7 @@
         </p:spPr>
         <p:txBody>
           <a:bodyPr wrap="square">
-            <a:spAutoFit/>
+            <a:normAutofit/>
           </a:bodyPr>
           <a:lstStyle/>
           <a:p>
@@ -16827,7 +16827,7 @@
         </p:spPr>
         <p:txBody>
           <a:bodyPr wrap="square">
-            <a:spAutoFit/>
+            <a:normAutofit/>
           </a:bodyPr>
           <a:lstStyle/>
           <a:p>
@@ -16905,7 +16905,7 @@
         </p:spPr>
         <p:txBody>
           <a:bodyPr wrap="square">
-            <a:spAutoFit/>
+            <a:normAutofit/>
           </a:bodyPr>
           <a:lstStyle/>
           <a:p>
@@ -16940,7 +16940,7 @@
         </p:spPr>
         <p:txBody>
           <a:bodyPr wrap="square">
-            <a:spAutoFit/>
+            <a:normAutofit/>
           </a:bodyPr>
           <a:lstStyle/>
           <a:p>
@@ -17018,7 +17018,7 @@
         </p:spPr>
         <p:txBody>
           <a:bodyPr wrap="square">
-            <a:spAutoFit/>
+            <a:normAutofit/>
           </a:bodyPr>
           <a:lstStyle/>
           <a:p>
@@ -17053,7 +17053,7 @@
         </p:spPr>
         <p:txBody>
           <a:bodyPr wrap="square">
-            <a:spAutoFit/>
+            <a:normAutofit/>
           </a:bodyPr>
           <a:lstStyle/>
           <a:p>
@@ -17131,7 +17131,7 @@
         </p:spPr>
         <p:txBody>
           <a:bodyPr wrap="square">
-            <a:spAutoFit/>
+            <a:normAutofit/>
           </a:bodyPr>
           <a:lstStyle/>
           <a:p>
@@ -17166,7 +17166,7 @@
         </p:spPr>
         <p:txBody>
           <a:bodyPr wrap="square">
-            <a:spAutoFit/>
+            <a:normAutofit/>
           </a:bodyPr>
           <a:lstStyle/>
           <a:p>
@@ -17244,7 +17244,7 @@
         </p:spPr>
         <p:txBody>
           <a:bodyPr wrap="square">
-            <a:spAutoFit/>
+            <a:normAutofit/>
           </a:bodyPr>
           <a:lstStyle/>
           <a:p>
@@ -17279,7 +17279,7 @@
         </p:spPr>
         <p:txBody>
           <a:bodyPr wrap="square">
-            <a:spAutoFit/>
+            <a:normAutofit/>
           </a:bodyPr>
           <a:lstStyle/>
           <a:p>
@@ -17357,7 +17357,7 @@
         </p:spPr>
         <p:txBody>
           <a:bodyPr wrap="square">
-            <a:spAutoFit/>
+            <a:normAutofit/>
           </a:bodyPr>
           <a:lstStyle/>
           <a:p>
@@ -17392,7 +17392,7 @@
         </p:spPr>
         <p:txBody>
           <a:bodyPr wrap="square">
-            <a:spAutoFit/>
+            <a:normAutofit/>
           </a:bodyPr>
           <a:lstStyle/>
           <a:p>
@@ -17470,7 +17470,7 @@
         </p:spPr>
         <p:txBody>
           <a:bodyPr wrap="square">
-            <a:spAutoFit/>
+            <a:normAutofit/>
           </a:bodyPr>
           <a:lstStyle/>
           <a:p>
@@ -17505,7 +17505,7 @@
         </p:spPr>
         <p:txBody>
           <a:bodyPr wrap="square">
-            <a:spAutoFit/>
+            <a:normAutofit/>
           </a:bodyPr>
           <a:lstStyle/>
           <a:p>
@@ -17583,7 +17583,7 @@
         </p:spPr>
         <p:txBody>
           <a:bodyPr wrap="square">
-            <a:spAutoFit/>
+            <a:normAutofit/>
           </a:bodyPr>
           <a:lstStyle/>
           <a:p>
@@ -17618,7 +17618,7 @@
         </p:spPr>
         <p:txBody>
           <a:bodyPr wrap="square">
-            <a:spAutoFit/>
+            <a:normAutofit/>
           </a:bodyPr>
           <a:lstStyle/>
           <a:p>
@@ -17696,7 +17696,7 @@
         </p:spPr>
         <p:txBody>
           <a:bodyPr wrap="square">
-            <a:spAutoFit/>
+            <a:normAutofit/>
           </a:bodyPr>
           <a:lstStyle/>
           <a:p>
@@ -17731,7 +17731,7 @@
         </p:spPr>
         <p:txBody>
           <a:bodyPr wrap="square">
-            <a:spAutoFit/>
+            <a:normAutofit/>
           </a:bodyPr>
           <a:lstStyle/>
           <a:p>
@@ -17809,7 +17809,7 @@
         </p:spPr>
         <p:txBody>
           <a:bodyPr wrap="square">
-            <a:spAutoFit/>
+            <a:normAutofit/>
           </a:bodyPr>
           <a:lstStyle/>
           <a:p>
@@ -17844,7 +17844,7 @@
         </p:spPr>
         <p:txBody>
           <a:bodyPr wrap="square">
-            <a:spAutoFit/>
+            <a:normAutofit/>
           </a:bodyPr>
           <a:lstStyle/>
           <a:p>
@@ -17922,7 +17922,7 @@
         </p:spPr>
         <p:txBody>
           <a:bodyPr wrap="square">
-            <a:spAutoFit/>
+            <a:normAutofit/>
           </a:bodyPr>
           <a:lstStyle/>
           <a:p>
@@ -17957,7 +17957,7 @@
         </p:spPr>
         <p:txBody>
           <a:bodyPr wrap="square">
-            <a:spAutoFit/>
+            <a:normAutofit/>
           </a:bodyPr>
           <a:lstStyle/>
           <a:p>
@@ -17992,7 +17992,7 @@
         </p:spPr>
         <p:txBody>
           <a:bodyPr wrap="square">
-            <a:spAutoFit/>
+            <a:normAutofit/>
           </a:bodyPr>
           <a:lstStyle/>
           <a:p>
@@ -18070,7 +18070,7 @@
         </p:spPr>
         <p:txBody>
           <a:bodyPr wrap="square">
-            <a:spAutoFit/>
+            <a:normAutofit/>
           </a:bodyPr>
           <a:lstStyle/>
           <a:p>
@@ -18105,7 +18105,7 @@
         </p:spPr>
         <p:txBody>
           <a:bodyPr wrap="square">
-            <a:spAutoFit/>
+            <a:normAutofit/>
           </a:bodyPr>
           <a:lstStyle/>
           <a:p>
@@ -18244,7 +18244,7 @@
         </p:spPr>
         <p:txBody>
           <a:bodyPr wrap="square">
-            <a:spAutoFit/>
+            <a:normAutofit/>
           </a:bodyPr>
           <a:lstStyle/>
           <a:p>
@@ -18279,7 +18279,7 @@
         </p:spPr>
         <p:txBody>
           <a:bodyPr wrap="square">
-            <a:spAutoFit/>
+            <a:normAutofit/>
           </a:bodyPr>
           <a:lstStyle/>
           <a:p>
@@ -18443,7 +18443,7 @@
         </p:spPr>
         <p:txBody>
           <a:bodyPr wrap="square">
-            <a:spAutoFit/>
+            <a:normAutofit/>
           </a:bodyPr>
           <a:lstStyle/>
           <a:p>
@@ -18478,7 +18478,7 @@
         </p:spPr>
         <p:txBody>
           <a:bodyPr wrap="square">
-            <a:spAutoFit/>
+            <a:normAutofit/>
           </a:bodyPr>
           <a:lstStyle/>
           <a:p>
@@ -18600,7 +18600,7 @@
         </p:spPr>
         <p:txBody>
           <a:bodyPr wrap="square">
-            <a:spAutoFit/>
+            <a:normAutofit/>
           </a:bodyPr>
           <a:lstStyle/>
           <a:p>
@@ -18635,7 +18635,7 @@
         </p:spPr>
         <p:txBody>
           <a:bodyPr wrap="square">
-            <a:spAutoFit/>
+            <a:normAutofit/>
           </a:bodyPr>
           <a:lstStyle/>
           <a:p>
@@ -18757,7 +18757,7 @@
         </p:spPr>
         <p:txBody>
           <a:bodyPr wrap="square">
-            <a:spAutoFit/>
+            <a:normAutofit/>
           </a:bodyPr>
           <a:lstStyle/>
           <a:p>
@@ -18792,7 +18792,7 @@
         </p:spPr>
         <p:txBody>
           <a:bodyPr wrap="square">
-            <a:spAutoFit/>
+            <a:normAutofit/>
           </a:bodyPr>
           <a:lstStyle/>
           <a:p>
@@ -18914,7 +18914,7 @@
         </p:spPr>
         <p:txBody>
           <a:bodyPr wrap="square">
-            <a:spAutoFit/>
+            <a:normAutofit/>
           </a:bodyPr>
           <a:lstStyle/>
           <a:p>
@@ -18949,7 +18949,7 @@
         </p:spPr>
         <p:txBody>
           <a:bodyPr wrap="square">
-            <a:spAutoFit/>
+            <a:normAutofit/>
           </a:bodyPr>
           <a:lstStyle/>
           <a:p>
@@ -19071,7 +19071,7 @@
         </p:spPr>
         <p:txBody>
           <a:bodyPr wrap="square">
-            <a:spAutoFit/>
+            <a:normAutofit/>
           </a:bodyPr>
           <a:lstStyle/>
           <a:p>
@@ -19106,7 +19106,7 @@
         </p:spPr>
         <p:txBody>
           <a:bodyPr wrap="square">
-            <a:spAutoFit/>
+            <a:normAutofit/>
           </a:bodyPr>
           <a:lstStyle/>
           <a:p>
@@ -19228,7 +19228,7 @@
         </p:spPr>
         <p:txBody>
           <a:bodyPr wrap="square">
-            <a:spAutoFit/>
+            <a:normAutofit/>
           </a:bodyPr>
           <a:lstStyle/>
           <a:p>
@@ -19263,7 +19263,7 @@
         </p:spPr>
         <p:txBody>
           <a:bodyPr wrap="square">
-            <a:spAutoFit/>
+            <a:normAutofit/>
           </a:bodyPr>
           <a:lstStyle/>
           <a:p>
@@ -19342,7 +19342,7 @@
         </p:spPr>
         <p:txBody>
           <a:bodyPr wrap="square">
-            <a:spAutoFit/>
+            <a:normAutofit/>
           </a:bodyPr>
           <a:lstStyle/>
           <a:p>
@@ -19420,7 +19420,7 @@
         </p:spPr>
         <p:txBody>
           <a:bodyPr wrap="square">
-            <a:spAutoFit/>
+            <a:normAutofit/>
           </a:bodyPr>
           <a:lstStyle/>
           <a:p>
@@ -19498,7 +19498,7 @@
         </p:spPr>
         <p:txBody>
           <a:bodyPr wrap="square">
-            <a:spAutoFit/>
+            <a:normAutofit/>
           </a:bodyPr>
           <a:lstStyle/>
           <a:p>
@@ -19576,7 +19576,7 @@
         </p:spPr>
         <p:txBody>
           <a:bodyPr wrap="square">
-            <a:spAutoFit/>
+            <a:normAutofit/>
           </a:bodyPr>
           <a:lstStyle/>
           <a:p>
@@ -19654,7 +19654,7 @@
         </p:spPr>
         <p:txBody>
           <a:bodyPr wrap="square">
-            <a:spAutoFit/>
+            <a:normAutofit/>
           </a:bodyPr>
           <a:lstStyle/>
           <a:p>
@@ -19732,7 +19732,7 @@
         </p:spPr>
         <p:txBody>
           <a:bodyPr wrap="square">
-            <a:spAutoFit/>
+            <a:normAutofit/>
           </a:bodyPr>
           <a:lstStyle/>
           <a:p>
@@ -19810,7 +19810,7 @@
         </p:spPr>
         <p:txBody>
           <a:bodyPr wrap="square">
-            <a:spAutoFit/>
+            <a:normAutofit/>
           </a:bodyPr>
           <a:lstStyle/>
           <a:p>
@@ -19845,7 +19845,7 @@
         </p:spPr>
         <p:txBody>
           <a:bodyPr wrap="square">
-            <a:spAutoFit/>
+            <a:normAutofit/>
           </a:bodyPr>
           <a:lstStyle/>
           <a:p>
@@ -19991,7 +19991,7 @@
         </p:spPr>
         <p:txBody>
           <a:bodyPr wrap="square">
-            <a:spAutoFit/>
+            <a:normAutofit/>
           </a:bodyPr>
           <a:lstStyle/>
           <a:p>
@@ -20026,7 +20026,7 @@
         </p:spPr>
         <p:txBody>
           <a:bodyPr wrap="square">
-            <a:spAutoFit/>
+            <a:normAutofit/>
           </a:bodyPr>
           <a:lstStyle/>
           <a:p>
@@ -20104,7 +20104,7 @@
         </p:spPr>
         <p:txBody>
           <a:bodyPr wrap="square">
-            <a:spAutoFit/>
+            <a:normAutofit/>
           </a:bodyPr>
           <a:lstStyle/>
           <a:p>
@@ -20139,7 +20139,7 @@
         </p:spPr>
         <p:txBody>
           <a:bodyPr wrap="square">
-            <a:spAutoFit/>
+            <a:normAutofit/>
           </a:bodyPr>
           <a:lstStyle/>
           <a:p>
@@ -20217,7 +20217,7 @@
         </p:spPr>
         <p:txBody>
           <a:bodyPr wrap="square">
-            <a:spAutoFit/>
+            <a:normAutofit/>
           </a:bodyPr>
           <a:lstStyle/>
           <a:p>
@@ -20252,7 +20252,7 @@
         </p:spPr>
         <p:txBody>
           <a:bodyPr wrap="square">
-            <a:spAutoFit/>
+            <a:normAutofit/>
           </a:bodyPr>
           <a:lstStyle/>
           <a:p>
@@ -20287,7 +20287,7 @@
         </p:spPr>
         <p:txBody>
           <a:bodyPr wrap="square">
-            <a:spAutoFit/>
+            <a:normAutofit/>
           </a:bodyPr>
           <a:lstStyle/>
           <a:p>
@@ -20322,7 +20322,7 @@
         </p:spPr>
         <p:txBody>
           <a:bodyPr wrap="square">
-            <a:spAutoFit/>
+            <a:normAutofit/>
           </a:bodyPr>
           <a:lstStyle/>
           <a:p>
@@ -20357,7 +20357,7 @@
         </p:spPr>
         <p:txBody>
           <a:bodyPr wrap="square">
-            <a:spAutoFit/>
+            <a:normAutofit/>
           </a:bodyPr>
           <a:lstStyle/>
           <a:p>
@@ -20496,7 +20496,7 @@
         </p:spPr>
         <p:txBody>
           <a:bodyPr wrap="square">
-            <a:spAutoFit/>
+            <a:normAutofit/>
           </a:bodyPr>
           <a:lstStyle/>
           <a:p>
@@ -20531,7 +20531,7 @@
         </p:spPr>
         <p:txBody>
           <a:bodyPr wrap="square">
-            <a:spAutoFit/>
+            <a:normAutofit/>
           </a:bodyPr>
           <a:lstStyle/>
           <a:p>
@@ -20609,7 +20609,7 @@
         </p:spPr>
         <p:txBody>
           <a:bodyPr wrap="square">
-            <a:spAutoFit/>
+            <a:normAutofit/>
           </a:bodyPr>
           <a:lstStyle/>
           <a:p>
@@ -20644,7 +20644,7 @@
         </p:spPr>
         <p:txBody>
           <a:bodyPr wrap="square">
-            <a:spAutoFit/>
+            <a:normAutofit/>
           </a:bodyPr>
           <a:lstStyle/>
           <a:p>
@@ -20811,7 +20811,7 @@
         </p:spPr>
         <p:txBody>
           <a:bodyPr wrap="square">
-            <a:spAutoFit/>
+            <a:normAutofit/>
           </a:bodyPr>
           <a:lstStyle/>
           <a:p>
@@ -20891,7 +20891,7 @@
         </p:spPr>
         <p:txBody>
           <a:bodyPr wrap="square">
-            <a:spAutoFit/>
+            <a:normAutofit/>
           </a:bodyPr>
           <a:lstStyle/>
           <a:p>
@@ -20926,7 +20926,7 @@
         </p:spPr>
         <p:txBody>
           <a:bodyPr wrap="square">
-            <a:spAutoFit/>
+            <a:normAutofit/>
           </a:bodyPr>
           <a:lstStyle/>
           <a:p>
@@ -21006,7 +21006,7 @@
         </p:spPr>
         <p:txBody>
           <a:bodyPr wrap="square">
-            <a:spAutoFit/>
+            <a:normAutofit/>
           </a:bodyPr>
           <a:lstStyle/>
           <a:p>
@@ -21041,7 +21041,7 @@
         </p:spPr>
         <p:txBody>
           <a:bodyPr wrap="square">
-            <a:spAutoFit/>
+            <a:normAutofit/>
           </a:bodyPr>
           <a:lstStyle/>
           <a:p>
@@ -21121,7 +21121,7 @@
         </p:spPr>
         <p:txBody>
           <a:bodyPr wrap="square">
-            <a:spAutoFit/>
+            <a:normAutofit/>
           </a:bodyPr>
           <a:lstStyle/>
           <a:p>
@@ -21156,7 +21156,7 @@
         </p:spPr>
         <p:txBody>
           <a:bodyPr wrap="square">
-            <a:spAutoFit/>
+            <a:normAutofit/>
           </a:bodyPr>
           <a:lstStyle/>
           <a:p>
@@ -21236,7 +21236,7 @@
         </p:spPr>
         <p:txBody>
           <a:bodyPr wrap="square">
-            <a:spAutoFit/>
+            <a:normAutofit/>
           </a:bodyPr>
           <a:lstStyle/>
           <a:p>
@@ -21271,7 +21271,7 @@
         </p:spPr>
         <p:txBody>
           <a:bodyPr wrap="square">
-            <a:spAutoFit/>
+            <a:normAutofit/>
           </a:bodyPr>
           <a:lstStyle/>
           <a:p>
@@ -21351,7 +21351,7 @@
         </p:spPr>
         <p:txBody>
           <a:bodyPr wrap="square">
-            <a:spAutoFit/>
+            <a:normAutofit/>
           </a:bodyPr>
           <a:lstStyle/>
           <a:p>
@@ -21386,7 +21386,7 @@
         </p:spPr>
         <p:txBody>
           <a:bodyPr wrap="square">
-            <a:spAutoFit/>
+            <a:normAutofit/>
           </a:bodyPr>
           <a:lstStyle/>
           <a:p>
@@ -21466,7 +21466,7 @@
         </p:spPr>
         <p:txBody>
           <a:bodyPr wrap="square">
-            <a:spAutoFit/>
+            <a:normAutofit/>
           </a:bodyPr>
           <a:lstStyle/>
           <a:p>
@@ -21501,7 +21501,7 @@
         </p:spPr>
         <p:txBody>
           <a:bodyPr wrap="square">
-            <a:spAutoFit/>
+            <a:normAutofit/>
           </a:bodyPr>
           <a:lstStyle/>
           <a:p>
@@ -21581,7 +21581,7 @@
         </p:spPr>
         <p:txBody>
           <a:bodyPr wrap="square">
-            <a:spAutoFit/>
+            <a:normAutofit/>
           </a:bodyPr>
           <a:lstStyle/>
           <a:p>
@@ -21616,7 +21616,7 @@
         </p:spPr>
         <p:txBody>
           <a:bodyPr wrap="square">
-            <a:spAutoFit/>
+            <a:normAutofit/>
           </a:bodyPr>
           <a:lstStyle/>
           <a:p>
@@ -21696,7 +21696,7 @@
         </p:spPr>
         <p:txBody>
           <a:bodyPr wrap="square">
-            <a:spAutoFit/>
+            <a:normAutofit/>
           </a:bodyPr>
           <a:lstStyle/>
           <a:p>
@@ -21731,7 +21731,7 @@
         </p:spPr>
         <p:txBody>
           <a:bodyPr wrap="square">
-            <a:spAutoFit/>
+            <a:normAutofit/>
           </a:bodyPr>
           <a:lstStyle/>
           <a:p>
@@ -21809,7 +21809,7 @@
         </p:spPr>
         <p:txBody>
           <a:bodyPr wrap="square">
-            <a:spAutoFit/>
+            <a:normAutofit/>
           </a:bodyPr>
           <a:lstStyle/>
           <a:p>
@@ -21844,7 +21844,7 @@
         </p:spPr>
         <p:txBody>
           <a:bodyPr wrap="square">
-            <a:spAutoFit/>
+            <a:normAutofit/>
           </a:bodyPr>
           <a:lstStyle/>
           <a:p>
@@ -21879,7 +21879,7 @@
         </p:spPr>
         <p:txBody>
           <a:bodyPr wrap="square">
-            <a:spAutoFit/>
+            <a:normAutofit/>
           </a:bodyPr>
           <a:lstStyle/>
           <a:p>
@@ -21914,7 +21914,7 @@
         </p:spPr>
         <p:txBody>
           <a:bodyPr wrap="square">
-            <a:spAutoFit/>
+            <a:normAutofit/>
           </a:bodyPr>
           <a:lstStyle/>
           <a:p>
@@ -21992,7 +21992,7 @@
         </p:spPr>
         <p:txBody>
           <a:bodyPr wrap="square">
-            <a:spAutoFit/>
+            <a:normAutofit/>
           </a:bodyPr>
           <a:lstStyle/>
           <a:p>
@@ -22027,7 +22027,7 @@
         </p:spPr>
         <p:txBody>
           <a:bodyPr wrap="square">
-            <a:spAutoFit/>
+            <a:normAutofit/>
           </a:bodyPr>
           <a:lstStyle/>
           <a:p>
@@ -22166,7 +22166,7 @@
         </p:spPr>
         <p:txBody>
           <a:bodyPr wrap="square">
-            <a:spAutoFit/>
+            <a:normAutofit/>
           </a:bodyPr>
           <a:lstStyle/>
           <a:p>
@@ -22201,7 +22201,7 @@
         </p:spPr>
         <p:txBody>
           <a:bodyPr wrap="square">
-            <a:spAutoFit/>
+            <a:normAutofit/>
           </a:bodyPr>
           <a:lstStyle/>
           <a:p>
@@ -22367,7 +22367,7 @@
         </p:spPr>
         <p:txBody>
           <a:bodyPr wrap="square">
-            <a:spAutoFit/>
+            <a:normAutofit/>
           </a:bodyPr>
           <a:lstStyle/>
           <a:p>
@@ -22402,7 +22402,7 @@
         </p:spPr>
         <p:txBody>
           <a:bodyPr wrap="square">
-            <a:spAutoFit/>
+            <a:normAutofit/>
           </a:bodyPr>
           <a:lstStyle/>
           <a:p>
@@ -22437,7 +22437,7 @@
         </p:spPr>
         <p:txBody>
           <a:bodyPr wrap="square">
-            <a:spAutoFit/>
+            <a:normAutofit/>
           </a:bodyPr>
           <a:lstStyle/>
           <a:p>
@@ -22708,7 +22708,7 @@
         </p:spPr>
         <p:txBody>
           <a:bodyPr wrap="square">
-            <a:spAutoFit/>
+            <a:normAutofit/>
           </a:bodyPr>
           <a:lstStyle/>
           <a:p>
@@ -22743,7 +22743,7 @@
         </p:spPr>
         <p:txBody>
           <a:bodyPr wrap="square">
-            <a:spAutoFit/>
+            <a:normAutofit/>
           </a:bodyPr>
           <a:lstStyle/>
           <a:p>
@@ -22778,7 +22778,7 @@
         </p:spPr>
         <p:txBody>
           <a:bodyPr wrap="square">
-            <a:spAutoFit/>
+            <a:normAutofit/>
           </a:bodyPr>
           <a:lstStyle/>
           <a:p>
@@ -22969,7 +22969,7 @@
         </p:spPr>
         <p:txBody>
           <a:bodyPr wrap="square">
-            <a:spAutoFit/>
+            <a:normAutofit/>
           </a:bodyPr>
           <a:lstStyle/>
           <a:p>
@@ -23004,7 +23004,7 @@
         </p:spPr>
         <p:txBody>
           <a:bodyPr wrap="square">
-            <a:spAutoFit/>
+            <a:normAutofit/>
           </a:bodyPr>
           <a:lstStyle/>
           <a:p>
@@ -23039,7 +23039,7 @@
         </p:spPr>
         <p:txBody>
           <a:bodyPr wrap="square">
-            <a:spAutoFit/>
+            <a:normAutofit/>
           </a:bodyPr>
           <a:lstStyle/>
           <a:p>
@@ -23246,7 +23246,7 @@
         </p:spPr>
         <p:txBody>
           <a:bodyPr wrap="square">
-            <a:spAutoFit/>
+            <a:normAutofit/>
           </a:bodyPr>
           <a:lstStyle/>
           <a:p>
@@ -23281,7 +23281,7 @@
         </p:spPr>
         <p:txBody>
           <a:bodyPr wrap="square">
-            <a:spAutoFit/>
+            <a:normAutofit/>
           </a:bodyPr>
           <a:lstStyle/>
           <a:p>
@@ -23316,7 +23316,7 @@
         </p:spPr>
         <p:txBody>
           <a:bodyPr wrap="square">
-            <a:spAutoFit/>
+            <a:normAutofit/>
           </a:bodyPr>
           <a:lstStyle/>
           <a:p>
@@ -23555,7 +23555,7 @@
         </p:spPr>
         <p:txBody>
           <a:bodyPr wrap="square">
-            <a:spAutoFit/>
+            <a:normAutofit/>
           </a:bodyPr>
           <a:lstStyle/>
           <a:p>
@@ -23590,7 +23590,7 @@
         </p:spPr>
         <p:txBody>
           <a:bodyPr wrap="square">
-            <a:spAutoFit/>
+            <a:normAutofit/>
           </a:bodyPr>
           <a:lstStyle/>
           <a:p>
@@ -23625,7 +23625,7 @@
         </p:spPr>
         <p:txBody>
           <a:bodyPr wrap="square">
-            <a:spAutoFit/>
+            <a:normAutofit/>
           </a:bodyPr>
           <a:lstStyle/>
           <a:p>
@@ -23787,7 +23787,7 @@
         </p:spPr>
         <p:txBody>
           <a:bodyPr wrap="square">
-            <a:spAutoFit/>
+            <a:normAutofit/>
           </a:bodyPr>
           <a:lstStyle/>
           <a:p>
@@ -23822,7 +23822,7 @@
         </p:spPr>
         <p:txBody>
           <a:bodyPr wrap="square">
-            <a:spAutoFit/>
+            <a:normAutofit/>
           </a:bodyPr>
           <a:lstStyle/>
           <a:p>
@@ -23961,7 +23961,7 @@
         </p:spPr>
         <p:txBody>
           <a:bodyPr wrap="square">
-            <a:spAutoFit/>
+            <a:normAutofit/>
           </a:bodyPr>
           <a:lstStyle/>
           <a:p>
@@ -23996,7 +23996,7 @@
         </p:spPr>
         <p:txBody>
           <a:bodyPr wrap="square">
-            <a:spAutoFit/>
+            <a:normAutofit/>
           </a:bodyPr>
           <a:lstStyle/>
           <a:p>
@@ -24162,7 +24162,7 @@
         </p:spPr>
         <p:txBody>
           <a:bodyPr wrap="square">
-            <a:spAutoFit/>
+            <a:normAutofit/>
           </a:bodyPr>
           <a:lstStyle/>
           <a:p>
@@ -24197,7 +24197,7 @@
         </p:spPr>
         <p:txBody>
           <a:bodyPr wrap="square">
-            <a:spAutoFit/>
+            <a:normAutofit/>
           </a:bodyPr>
           <a:lstStyle/>
           <a:p>
@@ -24232,7 +24232,7 @@
         </p:spPr>
         <p:txBody>
           <a:bodyPr wrap="square">
-            <a:spAutoFit/>
+            <a:normAutofit/>
           </a:bodyPr>
           <a:lstStyle/>
           <a:p>
@@ -24359,7 +24359,7 @@
         </p:spPr>
         <p:txBody>
           <a:bodyPr wrap="square">
-            <a:spAutoFit/>
+            <a:normAutofit/>
           </a:bodyPr>
           <a:lstStyle/>
           <a:p>
@@ -24394,7 +24394,7 @@
         </p:spPr>
         <p:txBody>
           <a:bodyPr wrap="square">
-            <a:spAutoFit/>
+            <a:normAutofit/>
           </a:bodyPr>
           <a:lstStyle/>
           <a:p>
@@ -24429,7 +24429,7 @@
         </p:spPr>
         <p:txBody>
           <a:bodyPr wrap="square">
-            <a:spAutoFit/>
+            <a:normAutofit/>
           </a:bodyPr>
           <a:lstStyle/>
           <a:p>
@@ -24556,7 +24556,7 @@
         </p:spPr>
         <p:txBody>
           <a:bodyPr wrap="square">
-            <a:spAutoFit/>
+            <a:normAutofit/>
           </a:bodyPr>
           <a:lstStyle/>
           <a:p>
@@ -24591,7 +24591,7 @@
         </p:spPr>
         <p:txBody>
           <a:bodyPr wrap="square">
-            <a:spAutoFit/>
+            <a:normAutofit/>
           </a:bodyPr>
           <a:lstStyle/>
           <a:p>
@@ -24626,7 +24626,7 @@
         </p:spPr>
         <p:txBody>
           <a:bodyPr wrap="square">
-            <a:spAutoFit/>
+            <a:normAutofit/>
           </a:bodyPr>
           <a:lstStyle/>
           <a:p>
@@ -24753,7 +24753,7 @@
         </p:spPr>
         <p:txBody>
           <a:bodyPr wrap="square">
-            <a:spAutoFit/>
+            <a:normAutofit/>
           </a:bodyPr>
           <a:lstStyle/>
           <a:p>
@@ -24788,7 +24788,7 @@
         </p:spPr>
         <p:txBody>
           <a:bodyPr wrap="square">
-            <a:spAutoFit/>
+            <a:normAutofit/>
           </a:bodyPr>
           <a:lstStyle/>
           <a:p>
@@ -24823,7 +24823,7 @@
         </p:spPr>
         <p:txBody>
           <a:bodyPr wrap="square">
-            <a:spAutoFit/>
+            <a:normAutofit/>
           </a:bodyPr>
           <a:lstStyle/>
           <a:p>
@@ -24950,7 +24950,7 @@
         </p:spPr>
         <p:txBody>
           <a:bodyPr wrap="square">
-            <a:spAutoFit/>
+            <a:normAutofit/>
           </a:bodyPr>
           <a:lstStyle/>
           <a:p>
@@ -24985,7 +24985,7 @@
         </p:spPr>
         <p:txBody>
           <a:bodyPr wrap="square">
-            <a:spAutoFit/>
+            <a:normAutofit/>
           </a:bodyPr>
           <a:lstStyle/>
           <a:p>
@@ -25020,7 +25020,7 @@
         </p:spPr>
         <p:txBody>
           <a:bodyPr wrap="square">
-            <a:spAutoFit/>
+            <a:normAutofit/>
           </a:bodyPr>
           <a:lstStyle/>
           <a:p>
@@ -25147,7 +25147,7 @@
         </p:spPr>
         <p:txBody>
           <a:bodyPr wrap="square">
-            <a:spAutoFit/>
+            <a:normAutofit/>
           </a:bodyPr>
           <a:lstStyle/>
           <a:p>
@@ -25182,7 +25182,7 @@
         </p:spPr>
         <p:txBody>
           <a:bodyPr wrap="square">
-            <a:spAutoFit/>
+            <a:normAutofit/>
           </a:bodyPr>
           <a:lstStyle/>
           <a:p>
@@ -25217,7 +25217,7 @@
         </p:spPr>
         <p:txBody>
           <a:bodyPr wrap="square">
-            <a:spAutoFit/>
+            <a:normAutofit/>
           </a:bodyPr>
           <a:lstStyle/>
           <a:p>
@@ -25344,7 +25344,7 @@
         </p:spPr>
         <p:txBody>
           <a:bodyPr wrap="square">
-            <a:spAutoFit/>
+            <a:normAutofit/>
           </a:bodyPr>
           <a:lstStyle/>
           <a:p>
@@ -25379,7 +25379,7 @@
         </p:spPr>
         <p:txBody>
           <a:bodyPr wrap="square">
-            <a:spAutoFit/>
+            <a:normAutofit/>
           </a:bodyPr>
           <a:lstStyle/>
           <a:p>
@@ -25414,7 +25414,7 @@
         </p:spPr>
         <p:txBody>
           <a:bodyPr wrap="square">
-            <a:spAutoFit/>
+            <a:normAutofit/>
           </a:bodyPr>
           <a:lstStyle/>
           <a:p>
@@ -25541,7 +25541,7 @@
         </p:spPr>
         <p:txBody>
           <a:bodyPr wrap="square">
-            <a:spAutoFit/>
+            <a:normAutofit/>
           </a:bodyPr>
           <a:lstStyle/>
           <a:p>
@@ -25576,7 +25576,7 @@
         </p:spPr>
         <p:txBody>
           <a:bodyPr wrap="square">
-            <a:spAutoFit/>
+            <a:normAutofit/>
           </a:bodyPr>
           <a:lstStyle/>
           <a:p>
@@ -25611,7 +25611,7 @@
         </p:spPr>
         <p:txBody>
           <a:bodyPr wrap="square">
-            <a:spAutoFit/>
+            <a:normAutofit/>
           </a:bodyPr>
           <a:lstStyle/>
           <a:p>
@@ -25738,7 +25738,7 @@
         </p:spPr>
         <p:txBody>
           <a:bodyPr wrap="square">
-            <a:spAutoFit/>
+            <a:normAutofit/>
           </a:bodyPr>
           <a:lstStyle/>
           <a:p>
@@ -25773,7 +25773,7 @@
         </p:spPr>
         <p:txBody>
           <a:bodyPr wrap="square">
-            <a:spAutoFit/>
+            <a:normAutofit/>
           </a:bodyPr>
           <a:lstStyle/>
           <a:p>
@@ -25808,7 +25808,7 @@
         </p:spPr>
         <p:txBody>
           <a:bodyPr wrap="square">
-            <a:spAutoFit/>
+            <a:normAutofit/>
           </a:bodyPr>
           <a:lstStyle/>
           <a:p>
@@ -25935,7 +25935,7 @@
         </p:spPr>
         <p:txBody>
           <a:bodyPr wrap="square">
-            <a:spAutoFit/>
+            <a:normAutofit/>
           </a:bodyPr>
           <a:lstStyle/>
           <a:p>
@@ -25970,7 +25970,7 @@
         </p:spPr>
         <p:txBody>
           <a:bodyPr wrap="square">
-            <a:spAutoFit/>
+            <a:normAutofit/>
           </a:bodyPr>
           <a:lstStyle/>
           <a:p>
@@ -26005,7 +26005,7 @@
         </p:spPr>
         <p:txBody>
           <a:bodyPr wrap="square">
-            <a:spAutoFit/>
+            <a:normAutofit/>
           </a:bodyPr>
           <a:lstStyle/>
           <a:p>
@@ -26132,7 +26132,7 @@
         </p:spPr>
         <p:txBody>
           <a:bodyPr wrap="square">
-            <a:spAutoFit/>
+            <a:normAutofit/>
           </a:bodyPr>
           <a:lstStyle/>
           <a:p>
@@ -26167,7 +26167,7 @@
         </p:spPr>
         <p:txBody>
           <a:bodyPr wrap="square">
-            <a:spAutoFit/>
+            <a:normAutofit/>
           </a:bodyPr>
           <a:lstStyle/>
           <a:p>
@@ -26202,7 +26202,7 @@
         </p:spPr>
         <p:txBody>
           <a:bodyPr wrap="square">
-            <a:spAutoFit/>
+            <a:normAutofit/>
           </a:bodyPr>
           <a:lstStyle/>
           <a:p>
@@ -26284,7 +26284,7 @@
         </p:spPr>
         <p:txBody>
           <a:bodyPr wrap="square">
-            <a:spAutoFit/>
+            <a:normAutofit/>
           </a:bodyPr>
           <a:lstStyle/>
           <a:p>
@@ -26319,7 +26319,7 @@
         </p:spPr>
         <p:txBody>
           <a:bodyPr wrap="square">
-            <a:spAutoFit/>
+            <a:normAutofit/>
           </a:bodyPr>
           <a:lstStyle/>
           <a:p>
@@ -26458,7 +26458,7 @@
         </p:spPr>
         <p:txBody>
           <a:bodyPr wrap="square">
-            <a:spAutoFit/>
+            <a:normAutofit/>
           </a:bodyPr>
           <a:lstStyle/>
           <a:p>
@@ -26493,7 +26493,7 @@
         </p:spPr>
         <p:txBody>
           <a:bodyPr wrap="square">
-            <a:spAutoFit/>
+            <a:normAutofit/>
           </a:bodyPr>
           <a:lstStyle/>
           <a:p>
@@ -26614,7 +26614,7 @@
         </p:spPr>
         <p:txBody>
           <a:bodyPr wrap="square">
-            <a:spAutoFit/>
+            <a:normAutofit/>
           </a:bodyPr>
           <a:lstStyle/>
           <a:p>
@@ -26649,7 +26649,7 @@
         </p:spPr>
         <p:txBody>
           <a:bodyPr wrap="square">
-            <a:spAutoFit/>
+            <a:normAutofit/>
           </a:bodyPr>
           <a:lstStyle/>
           <a:p>
@@ -26684,7 +26684,7 @@
         </p:spPr>
         <p:txBody>
           <a:bodyPr wrap="square">
-            <a:spAutoFit/>
+            <a:normAutofit/>
           </a:bodyPr>
           <a:lstStyle/>
           <a:p>
@@ -26719,7 +26719,7 @@
         </p:spPr>
         <p:txBody>
           <a:bodyPr wrap="square">
-            <a:spAutoFit/>
+            <a:normAutofit/>
           </a:bodyPr>
           <a:lstStyle/>
           <a:p>
@@ -26754,7 +26754,7 @@
         </p:spPr>
         <p:txBody>
           <a:bodyPr wrap="square">
-            <a:spAutoFit/>
+            <a:normAutofit/>
           </a:bodyPr>
           <a:lstStyle/>
           <a:p>
@@ -26789,7 +26789,7 @@
         </p:spPr>
         <p:txBody>
           <a:bodyPr wrap="square">
-            <a:spAutoFit/>
+            <a:normAutofit/>
           </a:bodyPr>
           <a:lstStyle/>
           <a:p>
@@ -26869,7 +26869,7 @@
         </p:spPr>
         <p:txBody>
           <a:bodyPr wrap="square">
-            <a:spAutoFit/>
+            <a:normAutofit/>
           </a:bodyPr>
           <a:lstStyle/>
           <a:p>
@@ -26904,7 +26904,7 @@
         </p:spPr>
         <p:txBody>
           <a:bodyPr wrap="square">
-            <a:spAutoFit/>
+            <a:normAutofit/>
           </a:bodyPr>
           <a:lstStyle/>
           <a:p>
@@ -26939,7 +26939,7 @@
         </p:spPr>
         <p:txBody>
           <a:bodyPr wrap="square">
-            <a:spAutoFit/>
+            <a:normAutofit/>
           </a:bodyPr>
           <a:lstStyle/>
           <a:p>
@@ -26974,7 +26974,7 @@
         </p:spPr>
         <p:txBody>
           <a:bodyPr wrap="square">
-            <a:spAutoFit/>
+            <a:normAutofit/>
           </a:bodyPr>
           <a:lstStyle/>
           <a:p>
@@ -27009,7 +27009,7 @@
         </p:spPr>
         <p:txBody>
           <a:bodyPr wrap="square">
-            <a:spAutoFit/>
+            <a:normAutofit/>
           </a:bodyPr>
           <a:lstStyle/>
           <a:p>
@@ -27044,7 +27044,7 @@
         </p:spPr>
         <p:txBody>
           <a:bodyPr wrap="square">
-            <a:spAutoFit/>
+            <a:normAutofit/>
           </a:bodyPr>
           <a:lstStyle/>
           <a:p>
@@ -27124,7 +27124,7 @@
         </p:spPr>
         <p:txBody>
           <a:bodyPr wrap="square">
-            <a:spAutoFit/>
+            <a:normAutofit/>
           </a:bodyPr>
           <a:lstStyle/>
           <a:p>
@@ -27159,7 +27159,7 @@
         </p:spPr>
         <p:txBody>
           <a:bodyPr wrap="square">
-            <a:spAutoFit/>
+            <a:normAutofit/>
           </a:bodyPr>
           <a:lstStyle/>
           <a:p>
@@ -27194,7 +27194,7 @@
         </p:spPr>
         <p:txBody>
           <a:bodyPr wrap="square">
-            <a:spAutoFit/>
+            <a:normAutofit/>
           </a:bodyPr>
           <a:lstStyle/>
           <a:p>
@@ -27229,7 +27229,7 @@
         </p:spPr>
         <p:txBody>
           <a:bodyPr wrap="square">
-            <a:spAutoFit/>
+            <a:normAutofit/>
           </a:bodyPr>
           <a:lstStyle/>
           <a:p>
@@ -27264,7 +27264,7 @@
         </p:spPr>
         <p:txBody>
           <a:bodyPr wrap="square">
-            <a:spAutoFit/>
+            <a:normAutofit/>
           </a:bodyPr>
           <a:lstStyle/>
           <a:p>
@@ -27299,7 +27299,7 @@
         </p:spPr>
         <p:txBody>
           <a:bodyPr wrap="square">
-            <a:spAutoFit/>
+            <a:normAutofit/>
           </a:bodyPr>
           <a:lstStyle/>
           <a:p>
@@ -27379,7 +27379,7 @@
         </p:spPr>
         <p:txBody>
           <a:bodyPr wrap="square">
-            <a:spAutoFit/>
+            <a:normAutofit/>
           </a:bodyPr>
           <a:lstStyle/>
           <a:p>
@@ -27414,7 +27414,7 @@
         </p:spPr>
         <p:txBody>
           <a:bodyPr wrap="square">
-            <a:spAutoFit/>
+            <a:normAutofit/>
           </a:bodyPr>
           <a:lstStyle/>
           <a:p>
@@ -27449,7 +27449,7 @@
         </p:spPr>
         <p:txBody>
           <a:bodyPr wrap="square">
-            <a:spAutoFit/>
+            <a:normAutofit/>
           </a:bodyPr>
           <a:lstStyle/>
           <a:p>
@@ -27484,7 +27484,7 @@
         </p:spPr>
         <p:txBody>
           <a:bodyPr wrap="square">
-            <a:spAutoFit/>
+            <a:normAutofit/>
           </a:bodyPr>
           <a:lstStyle/>
           <a:p>
@@ -27519,7 +27519,7 @@
         </p:spPr>
         <p:txBody>
           <a:bodyPr wrap="square">
-            <a:spAutoFit/>
+            <a:normAutofit/>
           </a:bodyPr>
           <a:lstStyle/>
           <a:p>
@@ -27554,7 +27554,7 @@
         </p:spPr>
         <p:txBody>
           <a:bodyPr wrap="square">
-            <a:spAutoFit/>
+            <a:normAutofit/>
           </a:bodyPr>
           <a:lstStyle/>
           <a:p>
@@ -27634,7 +27634,7 @@
         </p:spPr>
         <p:txBody>
           <a:bodyPr wrap="square">
-            <a:spAutoFit/>
+            <a:normAutofit/>
           </a:bodyPr>
           <a:lstStyle/>
           <a:p>
@@ -27669,7 +27669,7 @@
         </p:spPr>
         <p:txBody>
           <a:bodyPr wrap="square">
-            <a:spAutoFit/>
+            <a:normAutofit/>
           </a:bodyPr>
           <a:lstStyle/>
           <a:p>
@@ -27704,7 +27704,7 @@
         </p:spPr>
         <p:txBody>
           <a:bodyPr wrap="square">
-            <a:spAutoFit/>
+            <a:normAutofit/>
           </a:bodyPr>
           <a:lstStyle/>
           <a:p>
@@ -27739,7 +27739,7 @@
         </p:spPr>
         <p:txBody>
           <a:bodyPr wrap="square">
-            <a:spAutoFit/>
+            <a:normAutofit/>
           </a:bodyPr>
           <a:lstStyle/>
           <a:p>
@@ -27774,7 +27774,7 @@
         </p:spPr>
         <p:txBody>
           <a:bodyPr wrap="square">
-            <a:spAutoFit/>
+            <a:normAutofit/>
           </a:bodyPr>
           <a:lstStyle/>
           <a:p>
@@ -27809,7 +27809,7 @@
         </p:spPr>
         <p:txBody>
           <a:bodyPr wrap="square">
-            <a:spAutoFit/>
+            <a:normAutofit/>
           </a:bodyPr>
           <a:lstStyle/>
           <a:p>
@@ -27889,7 +27889,7 @@
         </p:spPr>
         <p:txBody>
           <a:bodyPr wrap="square">
-            <a:spAutoFit/>
+            <a:normAutofit/>
           </a:bodyPr>
           <a:lstStyle/>
           <a:p>
@@ -27924,7 +27924,7 @@
         </p:spPr>
         <p:txBody>
           <a:bodyPr wrap="square">
-            <a:spAutoFit/>
+            <a:normAutofit/>
           </a:bodyPr>
           <a:lstStyle/>
           <a:p>
@@ -27959,7 +27959,7 @@
         </p:spPr>
         <p:txBody>
           <a:bodyPr wrap="square">
-            <a:spAutoFit/>
+            <a:normAutofit/>
           </a:bodyPr>
           <a:lstStyle/>
           <a:p>
@@ -27994,7 +27994,7 @@
         </p:spPr>
         <p:txBody>
           <a:bodyPr wrap="square">
-            <a:spAutoFit/>
+            <a:normAutofit/>
           </a:bodyPr>
           <a:lstStyle/>
           <a:p>
@@ -28029,7 +28029,7 @@
         </p:spPr>
         <p:txBody>
           <a:bodyPr wrap="square">
-            <a:spAutoFit/>
+            <a:normAutofit/>
           </a:bodyPr>
           <a:lstStyle/>
           <a:p>
@@ -28064,7 +28064,7 @@
         </p:spPr>
         <p:txBody>
           <a:bodyPr wrap="square">
-            <a:spAutoFit/>
+            <a:normAutofit/>
           </a:bodyPr>
           <a:lstStyle/>
           <a:p>
@@ -28144,7 +28144,7 @@
         </p:spPr>
         <p:txBody>
           <a:bodyPr wrap="square">
-            <a:spAutoFit/>
+            <a:normAutofit/>
           </a:bodyPr>
           <a:lstStyle/>
           <a:p>
@@ -28179,7 +28179,7 @@
         </p:spPr>
         <p:txBody>
           <a:bodyPr wrap="square">
-            <a:spAutoFit/>
+            <a:normAutofit/>
           </a:bodyPr>
           <a:lstStyle/>
           <a:p>
@@ -28214,7 +28214,7 @@
         </p:spPr>
         <p:txBody>
           <a:bodyPr wrap="square">
-            <a:spAutoFit/>
+            <a:normAutofit/>
           </a:bodyPr>
           <a:lstStyle/>
           <a:p>
@@ -28249,7 +28249,7 @@
         </p:spPr>
         <p:txBody>
           <a:bodyPr wrap="square">
-            <a:spAutoFit/>
+            <a:normAutofit/>
           </a:bodyPr>
           <a:lstStyle/>
           <a:p>
@@ -28284,7 +28284,7 @@
         </p:spPr>
         <p:txBody>
           <a:bodyPr wrap="square">
-            <a:spAutoFit/>
+            <a:normAutofit/>
           </a:bodyPr>
           <a:lstStyle/>
           <a:p>
@@ -28319,7 +28319,7 @@
         </p:spPr>
         <p:txBody>
           <a:bodyPr wrap="square">
-            <a:spAutoFit/>
+            <a:normAutofit/>
           </a:bodyPr>
           <a:lstStyle/>
           <a:p>
@@ -28399,7 +28399,7 @@
         </p:spPr>
         <p:txBody>
           <a:bodyPr wrap="square">
-            <a:spAutoFit/>
+            <a:normAutofit/>
           </a:bodyPr>
           <a:lstStyle/>
           <a:p>
@@ -28434,7 +28434,7 @@
         </p:spPr>
         <p:txBody>
           <a:bodyPr wrap="square">
-            <a:spAutoFit/>
+            <a:normAutofit/>
           </a:bodyPr>
           <a:lstStyle/>
           <a:p>
@@ -28469,7 +28469,7 @@
         </p:spPr>
         <p:txBody>
           <a:bodyPr wrap="square">
-            <a:spAutoFit/>
+            <a:normAutofit/>
           </a:bodyPr>
           <a:lstStyle/>
           <a:p>
@@ -28504,7 +28504,7 @@
         </p:spPr>
         <p:txBody>
           <a:bodyPr wrap="square">
-            <a:spAutoFit/>
+            <a:normAutofit/>
           </a:bodyPr>
           <a:lstStyle/>
           <a:p>
@@ -28539,7 +28539,7 @@
         </p:spPr>
         <p:txBody>
           <a:bodyPr wrap="square">
-            <a:spAutoFit/>
+            <a:normAutofit/>
           </a:bodyPr>
           <a:lstStyle/>
           <a:p>
@@ -28574,7 +28574,7 @@
         </p:spPr>
         <p:txBody>
           <a:bodyPr wrap="square">
-            <a:spAutoFit/>
+            <a:normAutofit/>
           </a:bodyPr>
           <a:lstStyle/>
           <a:p>
@@ -28609,7 +28609,7 @@
         </p:spPr>
         <p:txBody>
           <a:bodyPr wrap="square">
-            <a:spAutoFit/>
+            <a:normAutofit/>
           </a:bodyPr>
           <a:lstStyle/>
           <a:p>
@@ -28644,7 +28644,7 @@
         </p:spPr>
         <p:txBody>
           <a:bodyPr wrap="square">
-            <a:spAutoFit/>
+            <a:normAutofit/>
           </a:bodyPr>
           <a:lstStyle/>
           <a:p>
@@ -28679,7 +28679,7 @@
         </p:spPr>
         <p:txBody>
           <a:bodyPr wrap="square">
-            <a:spAutoFit/>
+            <a:normAutofit/>
           </a:bodyPr>
           <a:lstStyle/>
           <a:p>
@@ -28714,7 +28714,7 @@
         </p:spPr>
         <p:txBody>
           <a:bodyPr wrap="square">
-            <a:spAutoFit/>
+            <a:normAutofit/>
           </a:bodyPr>
           <a:lstStyle/>
           <a:p>
@@ -28792,7 +28792,7 @@
         </p:spPr>
         <p:txBody>
           <a:bodyPr wrap="square">
-            <a:spAutoFit/>
+            <a:normAutofit/>
           </a:bodyPr>
           <a:lstStyle/>
           <a:p>
@@ -28827,7 +28827,7 @@
         </p:spPr>
         <p:txBody>
           <a:bodyPr wrap="square">
-            <a:spAutoFit/>
+            <a:normAutofit/>
           </a:bodyPr>
           <a:lstStyle/>
           <a:p>
@@ -28966,7 +28966,7 @@
         </p:spPr>
         <p:txBody>
           <a:bodyPr wrap="square">
-            <a:spAutoFit/>
+            <a:normAutofit/>
           </a:bodyPr>
           <a:lstStyle/>
           <a:p>
@@ -29001,7 +29001,7 @@
         </p:spPr>
         <p:txBody>
           <a:bodyPr wrap="square">
-            <a:spAutoFit/>
+            <a:normAutofit/>
           </a:bodyPr>
           <a:lstStyle/>
           <a:p>
@@ -29167,7 +29167,7 @@
         </p:spPr>
         <p:txBody>
           <a:bodyPr wrap="square">
-            <a:spAutoFit/>
+            <a:normAutofit/>
           </a:bodyPr>
           <a:lstStyle/>
           <a:p>
@@ -29202,7 +29202,7 @@
         </p:spPr>
         <p:txBody>
           <a:bodyPr wrap="square">
-            <a:spAutoFit/>
+            <a:normAutofit/>
           </a:bodyPr>
           <a:lstStyle/>
           <a:p>
@@ -29237,7 +29237,7 @@
         </p:spPr>
         <p:txBody>
           <a:bodyPr wrap="square">
-            <a:spAutoFit/>
+            <a:normAutofit/>
           </a:bodyPr>
           <a:lstStyle/>
           <a:p>
@@ -29364,7 +29364,7 @@
         </p:spPr>
         <p:txBody>
           <a:bodyPr wrap="square">
-            <a:spAutoFit/>
+            <a:normAutofit/>
           </a:bodyPr>
           <a:lstStyle/>
           <a:p>
@@ -29399,7 +29399,7 @@
         </p:spPr>
         <p:txBody>
           <a:bodyPr wrap="square">
-            <a:spAutoFit/>
+            <a:normAutofit/>
           </a:bodyPr>
           <a:lstStyle/>
           <a:p>
@@ -29434,7 +29434,7 @@
         </p:spPr>
         <p:txBody>
           <a:bodyPr wrap="square">
-            <a:spAutoFit/>
+            <a:normAutofit/>
           </a:bodyPr>
           <a:lstStyle/>
           <a:p>
@@ -29561,7 +29561,7 @@
         </p:spPr>
         <p:txBody>
           <a:bodyPr wrap="square">
-            <a:spAutoFit/>
+            <a:normAutofit/>
           </a:bodyPr>
           <a:lstStyle/>
           <a:p>
@@ -29596,7 +29596,7 @@
         </p:spPr>
         <p:txBody>
           <a:bodyPr wrap="square">
-            <a:spAutoFit/>
+            <a:normAutofit/>
           </a:bodyPr>
           <a:lstStyle/>
           <a:p>
@@ -29631,7 +29631,7 @@
         </p:spPr>
         <p:txBody>
           <a:bodyPr wrap="square">
-            <a:spAutoFit/>
+            <a:normAutofit/>
           </a:bodyPr>
           <a:lstStyle/>
           <a:p>
@@ -29758,7 +29758,7 @@
         </p:spPr>
         <p:txBody>
           <a:bodyPr wrap="square">
-            <a:spAutoFit/>
+            <a:normAutofit/>
           </a:bodyPr>
           <a:lstStyle/>
           <a:p>
@@ -29793,7 +29793,7 @@
         </p:spPr>
         <p:txBody>
           <a:bodyPr wrap="square">
-            <a:spAutoFit/>
+            <a:normAutofit/>
           </a:bodyPr>
           <a:lstStyle/>
           <a:p>
@@ -29828,7 +29828,7 @@
         </p:spPr>
         <p:txBody>
           <a:bodyPr wrap="square">
-            <a:spAutoFit/>
+            <a:normAutofit/>
           </a:bodyPr>
           <a:lstStyle/>
           <a:p>
@@ -29955,7 +29955,7 @@
         </p:spPr>
         <p:txBody>
           <a:bodyPr wrap="square">
-            <a:spAutoFit/>
+            <a:normAutofit/>
           </a:bodyPr>
           <a:lstStyle/>
           <a:p>
@@ -29990,7 +29990,7 @@
         </p:spPr>
         <p:txBody>
           <a:bodyPr wrap="square">
-            <a:spAutoFit/>
+            <a:normAutofit/>
           </a:bodyPr>
           <a:lstStyle/>
           <a:p>
@@ -30025,7 +30025,7 @@
         </p:spPr>
         <p:txBody>
           <a:bodyPr wrap="square">
-            <a:spAutoFit/>
+            <a:normAutofit/>
           </a:bodyPr>
           <a:lstStyle/>
           <a:p>
@@ -30152,7 +30152,7 @@
         </p:spPr>
         <p:txBody>
           <a:bodyPr wrap="square">
-            <a:spAutoFit/>
+            <a:normAutofit/>
           </a:bodyPr>
           <a:lstStyle/>
           <a:p>
@@ -30187,7 +30187,7 @@
         </p:spPr>
         <p:txBody>
           <a:bodyPr wrap="square">
-            <a:spAutoFit/>
+            <a:normAutofit/>
           </a:bodyPr>
           <a:lstStyle/>
           <a:p>
@@ -30222,7 +30222,7 @@
         </p:spPr>
         <p:txBody>
           <a:bodyPr wrap="square">
-            <a:spAutoFit/>
+            <a:normAutofit/>
           </a:bodyPr>
           <a:lstStyle/>
           <a:p>
@@ -30349,7 +30349,7 @@
         </p:spPr>
         <p:txBody>
           <a:bodyPr wrap="square">
-            <a:spAutoFit/>
+            <a:normAutofit/>
           </a:bodyPr>
           <a:lstStyle/>
           <a:p>
@@ -30384,7 +30384,7 @@
         </p:spPr>
         <p:txBody>
           <a:bodyPr wrap="square">
-            <a:spAutoFit/>
+            <a:normAutofit/>
           </a:bodyPr>
           <a:lstStyle/>
           <a:p>
@@ -30419,7 +30419,7 @@
         </p:spPr>
         <p:txBody>
           <a:bodyPr wrap="square">
-            <a:spAutoFit/>
+            <a:normAutofit/>
           </a:bodyPr>
           <a:lstStyle/>
           <a:p>
@@ -30546,7 +30546,7 @@
         </p:spPr>
         <p:txBody>
           <a:bodyPr wrap="square">
-            <a:spAutoFit/>
+            <a:normAutofit/>
           </a:bodyPr>
           <a:lstStyle/>
           <a:p>
@@ -30581,7 +30581,7 @@
         </p:spPr>
         <p:txBody>
           <a:bodyPr wrap="square">
-            <a:spAutoFit/>
+            <a:normAutofit/>
           </a:bodyPr>
           <a:lstStyle/>
           <a:p>
@@ -30616,7 +30616,7 @@
         </p:spPr>
         <p:txBody>
           <a:bodyPr wrap="square">
-            <a:spAutoFit/>
+            <a:normAutofit/>
           </a:bodyPr>
           <a:lstStyle/>
           <a:p>
@@ -30743,7 +30743,7 @@
         </p:spPr>
         <p:txBody>
           <a:bodyPr wrap="square">
-            <a:spAutoFit/>
+            <a:normAutofit/>
           </a:bodyPr>
           <a:lstStyle/>
           <a:p>
@@ -30778,7 +30778,7 @@
         </p:spPr>
         <p:txBody>
           <a:bodyPr wrap="square">
-            <a:spAutoFit/>
+            <a:normAutofit/>
           </a:bodyPr>
           <a:lstStyle/>
           <a:p>
@@ -30813,7 +30813,7 @@
         </p:spPr>
         <p:txBody>
           <a:bodyPr wrap="square">
-            <a:spAutoFit/>
+            <a:normAutofit/>
           </a:bodyPr>
           <a:lstStyle/>
           <a:p>
@@ -30940,7 +30940,7 @@
         </p:spPr>
         <p:txBody>
           <a:bodyPr wrap="square">
-            <a:spAutoFit/>
+            <a:normAutofit/>
           </a:bodyPr>
           <a:lstStyle/>
           <a:p>
@@ -30975,7 +30975,7 @@
         </p:spPr>
         <p:txBody>
           <a:bodyPr wrap="square">
-            <a:spAutoFit/>
+            <a:normAutofit/>
           </a:bodyPr>
           <a:lstStyle/>
           <a:p>
@@ -31010,7 +31010,7 @@
         </p:spPr>
         <p:txBody>
           <a:bodyPr wrap="square">
-            <a:spAutoFit/>
+            <a:normAutofit/>
           </a:bodyPr>
           <a:lstStyle/>
           <a:p>
@@ -31092,7 +31092,7 @@
         </p:spPr>
         <p:txBody>
           <a:bodyPr wrap="square">
-            <a:spAutoFit/>
+            <a:normAutofit/>
           </a:bodyPr>
           <a:lstStyle/>
           <a:p>
@@ -31127,7 +31127,7 @@
         </p:spPr>
         <p:txBody>
           <a:bodyPr wrap="square">
-            <a:spAutoFit/>
+            <a:normAutofit/>
           </a:bodyPr>
           <a:lstStyle/>
           <a:p>
@@ -31266,7 +31266,7 @@
         </p:spPr>
         <p:txBody>
           <a:bodyPr wrap="square">
-            <a:spAutoFit/>
+            <a:normAutofit/>
           </a:bodyPr>
           <a:lstStyle/>
           <a:p>
@@ -31301,7 +31301,7 @@
         </p:spPr>
         <p:txBody>
           <a:bodyPr wrap="square">
-            <a:spAutoFit/>
+            <a:normAutofit/>
           </a:bodyPr>
           <a:lstStyle/>
           <a:p>
@@ -31467,7 +31467,7 @@
         </p:spPr>
         <p:txBody>
           <a:bodyPr wrap="square">
-            <a:spAutoFit/>
+            <a:normAutofit/>
           </a:bodyPr>
           <a:lstStyle/>
           <a:p>
@@ -31502,7 +31502,7 @@
         </p:spPr>
         <p:txBody>
           <a:bodyPr wrap="square">
-            <a:spAutoFit/>
+            <a:normAutofit/>
           </a:bodyPr>
           <a:lstStyle/>
           <a:p>
@@ -31537,7 +31537,7 @@
         </p:spPr>
         <p:txBody>
           <a:bodyPr wrap="square">
-            <a:spAutoFit/>
+            <a:normAutofit/>
           </a:bodyPr>
           <a:lstStyle/>
           <a:p>
@@ -31664,7 +31664,7 @@
         </p:spPr>
         <p:txBody>
           <a:bodyPr wrap="square">
-            <a:spAutoFit/>
+            <a:normAutofit/>
           </a:bodyPr>
           <a:lstStyle/>
           <a:p>
@@ -31699,7 +31699,7 @@
         </p:spPr>
         <p:txBody>
           <a:bodyPr wrap="square">
-            <a:spAutoFit/>
+            <a:normAutofit/>
           </a:bodyPr>
           <a:lstStyle/>
           <a:p>
@@ -31734,7 +31734,7 @@
         </p:spPr>
         <p:txBody>
           <a:bodyPr wrap="square">
-            <a:spAutoFit/>
+            <a:normAutofit/>
           </a:bodyPr>
           <a:lstStyle/>
           <a:p>
@@ -31861,7 +31861,7 @@
         </p:spPr>
         <p:txBody>
           <a:bodyPr wrap="square">
-            <a:spAutoFit/>
+            <a:normAutofit/>
           </a:bodyPr>
           <a:lstStyle/>
           <a:p>
@@ -31896,7 +31896,7 @@
         </p:spPr>
         <p:txBody>
           <a:bodyPr wrap="square">
-            <a:spAutoFit/>
+            <a:normAutofit/>
           </a:bodyPr>
           <a:lstStyle/>
           <a:p>
@@ -31931,7 +31931,7 @@
         </p:spPr>
         <p:txBody>
           <a:bodyPr wrap="square">
-            <a:spAutoFit/>
+            <a:normAutofit/>
           </a:bodyPr>
           <a:lstStyle/>
           <a:p>
@@ -32058,7 +32058,7 @@
         </p:spPr>
         <p:txBody>
           <a:bodyPr wrap="square">
-            <a:spAutoFit/>
+            <a:normAutofit/>
           </a:bodyPr>
           <a:lstStyle/>
           <a:p>
@@ -32093,7 +32093,7 @@
         </p:spPr>
         <p:txBody>
           <a:bodyPr wrap="square">
-            <a:spAutoFit/>
+            <a:normAutofit/>
           </a:bodyPr>
           <a:lstStyle/>
           <a:p>
@@ -32128,7 +32128,7 @@
         </p:spPr>
         <p:txBody>
           <a:bodyPr wrap="square">
-            <a:spAutoFit/>
+            <a:normAutofit/>
           </a:bodyPr>
           <a:lstStyle/>
           <a:p>
@@ -32255,7 +32255,7 @@
         </p:spPr>
         <p:txBody>
           <a:bodyPr wrap="square">
-            <a:spAutoFit/>
+            <a:normAutofit/>
           </a:bodyPr>
           <a:lstStyle/>
           <a:p>
@@ -32290,7 +32290,7 @@
         </p:spPr>
         <p:txBody>
           <a:bodyPr wrap="square">
-            <a:spAutoFit/>
+            <a:normAutofit/>
           </a:bodyPr>
           <a:lstStyle/>
           <a:p>
@@ -32325,7 +32325,7 @@
         </p:spPr>
         <p:txBody>
           <a:bodyPr wrap="square">
-            <a:spAutoFit/>
+            <a:normAutofit/>
           </a:bodyPr>
           <a:lstStyle/>
           <a:p>
@@ -32452,7 +32452,7 @@
         </p:spPr>
         <p:txBody>
           <a:bodyPr wrap="square">
-            <a:spAutoFit/>
+            <a:normAutofit/>
           </a:bodyPr>
           <a:lstStyle/>
           <a:p>
@@ -32487,7 +32487,7 @@
         </p:spPr>
         <p:txBody>
           <a:bodyPr wrap="square">
-            <a:spAutoFit/>
+            <a:normAutofit/>
           </a:bodyPr>
           <a:lstStyle/>
           <a:p>
@@ -32522,7 +32522,7 @@
         </p:spPr>
         <p:txBody>
           <a:bodyPr wrap="square">
-            <a:spAutoFit/>
+            <a:normAutofit/>
           </a:bodyPr>
           <a:lstStyle/>
           <a:p>
@@ -32649,7 +32649,7 @@
         </p:spPr>
         <p:txBody>
           <a:bodyPr wrap="square">
-            <a:spAutoFit/>
+            <a:normAutofit/>
           </a:bodyPr>
           <a:lstStyle/>
           <a:p>
@@ -32684,7 +32684,7 @@
         </p:spPr>
         <p:txBody>
           <a:bodyPr wrap="square">
-            <a:spAutoFit/>
+            <a:normAutofit/>
           </a:bodyPr>
           <a:lstStyle/>
           <a:p>
@@ -32719,7 +32719,7 @@
         </p:spPr>
         <p:txBody>
           <a:bodyPr wrap="square">
-            <a:spAutoFit/>
+            <a:normAutofit/>
           </a:bodyPr>
           <a:lstStyle/>
           <a:p>
@@ -32846,7 +32846,7 @@
         </p:spPr>
         <p:txBody>
           <a:bodyPr wrap="square">
-            <a:spAutoFit/>
+            <a:normAutofit/>
           </a:bodyPr>
           <a:lstStyle/>
           <a:p>
@@ -32881,7 +32881,7 @@
         </p:spPr>
         <p:txBody>
           <a:bodyPr wrap="square">
-            <a:spAutoFit/>
+            <a:normAutofit/>
           </a:bodyPr>
           <a:lstStyle/>
           <a:p>
@@ -32916,7 +32916,7 @@
         </p:spPr>
         <p:txBody>
           <a:bodyPr wrap="square">
-            <a:spAutoFit/>
+            <a:normAutofit/>
           </a:bodyPr>
           <a:lstStyle/>
           <a:p>
@@ -33043,7 +33043,7 @@
         </p:spPr>
         <p:txBody>
           <a:bodyPr wrap="square">
-            <a:spAutoFit/>
+            <a:normAutofit/>
           </a:bodyPr>
           <a:lstStyle/>
           <a:p>
@@ -33078,7 +33078,7 @@
         </p:spPr>
         <p:txBody>
           <a:bodyPr wrap="square">
-            <a:spAutoFit/>
+            <a:normAutofit/>
           </a:bodyPr>
           <a:lstStyle/>
           <a:p>
@@ -33113,7 +33113,7 @@
         </p:spPr>
         <p:txBody>
           <a:bodyPr wrap="square">
-            <a:spAutoFit/>
+            <a:normAutofit/>
           </a:bodyPr>
           <a:lstStyle/>
           <a:p>
@@ -33195,7 +33195,7 @@
         </p:spPr>
         <p:txBody>
           <a:bodyPr wrap="square">
-            <a:spAutoFit/>
+            <a:normAutofit/>
           </a:bodyPr>
           <a:lstStyle/>
           <a:p>
@@ -33230,7 +33230,7 @@
         </p:spPr>
         <p:txBody>
           <a:bodyPr wrap="square">
-            <a:spAutoFit/>
+            <a:normAutofit/>
           </a:bodyPr>
           <a:lstStyle/>
           <a:p>
@@ -33369,7 +33369,7 @@
         </p:spPr>
         <p:txBody>
           <a:bodyPr wrap="square">
-            <a:spAutoFit/>
+            <a:normAutofit/>
           </a:bodyPr>
           <a:lstStyle/>
           <a:p>
@@ -33404,7 +33404,7 @@
         </p:spPr>
         <p:txBody>
           <a:bodyPr wrap="square">
-            <a:spAutoFit/>
+            <a:normAutofit/>
           </a:bodyPr>
           <a:lstStyle/>
           <a:p>
@@ -33570,7 +33570,7 @@
         </p:spPr>
         <p:txBody>
           <a:bodyPr wrap="square">
-            <a:spAutoFit/>
+            <a:normAutofit/>
           </a:bodyPr>
           <a:lstStyle/>
           <a:p>
@@ -33605,7 +33605,7 @@
         </p:spPr>
         <p:txBody>
           <a:bodyPr wrap="square">
-            <a:spAutoFit/>
+            <a:normAutofit/>
           </a:bodyPr>
           <a:lstStyle/>
           <a:p>
@@ -33732,7 +33732,7 @@
         </p:spPr>
         <p:txBody>
           <a:bodyPr wrap="square">
-            <a:spAutoFit/>
+            <a:normAutofit/>
           </a:bodyPr>
           <a:lstStyle/>
           <a:p>
@@ -33767,7 +33767,7 @@
         </p:spPr>
         <p:txBody>
           <a:bodyPr wrap="square">
-            <a:spAutoFit/>
+            <a:normAutofit/>
           </a:bodyPr>
           <a:lstStyle/>
           <a:p>
@@ -33894,7 +33894,7 @@
         </p:spPr>
         <p:txBody>
           <a:bodyPr wrap="square">
-            <a:spAutoFit/>
+            <a:normAutofit/>
           </a:bodyPr>
           <a:lstStyle/>
           <a:p>
@@ -33929,7 +33929,7 @@
         </p:spPr>
         <p:txBody>
           <a:bodyPr wrap="square">
-            <a:spAutoFit/>
+            <a:normAutofit/>
           </a:bodyPr>
           <a:lstStyle/>
           <a:p>
@@ -34056,7 +34056,7 @@
         </p:spPr>
         <p:txBody>
           <a:bodyPr wrap="square">
-            <a:spAutoFit/>
+            <a:normAutofit/>
           </a:bodyPr>
           <a:lstStyle/>
           <a:p>
@@ -34091,7 +34091,7 @@
         </p:spPr>
         <p:txBody>
           <a:bodyPr wrap="square">
-            <a:spAutoFit/>
+            <a:normAutofit/>
           </a:bodyPr>
           <a:lstStyle/>
           <a:p>
@@ -34218,7 +34218,7 @@
         </p:spPr>
         <p:txBody>
           <a:bodyPr wrap="square">
-            <a:spAutoFit/>
+            <a:normAutofit/>
           </a:bodyPr>
           <a:lstStyle/>
           <a:p>
@@ -34253,7 +34253,7 @@
         </p:spPr>
         <p:txBody>
           <a:bodyPr wrap="square">
-            <a:spAutoFit/>
+            <a:normAutofit/>
           </a:bodyPr>
           <a:lstStyle/>
           <a:p>
@@ -34380,7 +34380,7 @@
         </p:spPr>
         <p:txBody>
           <a:bodyPr wrap="square">
-            <a:spAutoFit/>
+            <a:normAutofit/>
           </a:bodyPr>
           <a:lstStyle/>
           <a:p>
@@ -34415,7 +34415,7 @@
         </p:spPr>
         <p:txBody>
           <a:bodyPr wrap="square">
-            <a:spAutoFit/>
+            <a:normAutofit/>
           </a:bodyPr>
           <a:lstStyle/>
           <a:p>
@@ -34542,7 +34542,7 @@
         </p:spPr>
         <p:txBody>
           <a:bodyPr wrap="square">
-            <a:spAutoFit/>
+            <a:normAutofit/>
           </a:bodyPr>
           <a:lstStyle/>
           <a:p>
@@ -34577,7 +34577,7 @@
         </p:spPr>
         <p:txBody>
           <a:bodyPr wrap="square">
-            <a:spAutoFit/>
+            <a:normAutofit/>
           </a:bodyPr>
           <a:lstStyle/>
           <a:p>
@@ -34704,7 +34704,7 @@
         </p:spPr>
         <p:txBody>
           <a:bodyPr wrap="square">
-            <a:spAutoFit/>
+            <a:normAutofit/>
           </a:bodyPr>
           <a:lstStyle/>
           <a:p>
@@ -34739,7 +34739,7 @@
         </p:spPr>
         <p:txBody>
           <a:bodyPr wrap="square">
-            <a:spAutoFit/>
+            <a:normAutofit/>
           </a:bodyPr>
           <a:lstStyle/>
           <a:p>
@@ -34821,7 +34821,7 @@
         </p:spPr>
         <p:txBody>
           <a:bodyPr wrap="square">
-            <a:spAutoFit/>
+            <a:normAutofit/>
           </a:bodyPr>
           <a:lstStyle/>
           <a:p>
@@ -34856,7 +34856,7 @@
         </p:spPr>
         <p:txBody>
           <a:bodyPr wrap="square">
-            <a:spAutoFit/>
+            <a:normAutofit/>
           </a:bodyPr>
           <a:lstStyle/>
           <a:p>
@@ -34995,7 +34995,7 @@
         </p:spPr>
         <p:txBody>
           <a:bodyPr wrap="square">
-            <a:spAutoFit/>
+            <a:normAutofit/>
           </a:bodyPr>
           <a:lstStyle/>
           <a:p>
@@ -35030,7 +35030,7 @@
         </p:spPr>
         <p:txBody>
           <a:bodyPr wrap="square">
-            <a:spAutoFit/>
+            <a:normAutofit/>
           </a:bodyPr>
           <a:lstStyle/>
           <a:p>
@@ -35239,7 +35239,7 @@
         </p:spPr>
         <p:txBody>
           <a:bodyPr wrap="square">
-            <a:spAutoFit/>
+            <a:normAutofit/>
           </a:bodyPr>
           <a:lstStyle/>
           <a:p>
@@ -35274,7 +35274,7 @@
         </p:spPr>
         <p:txBody>
           <a:bodyPr wrap="square">
-            <a:spAutoFit/>
+            <a:normAutofit/>
           </a:bodyPr>
           <a:lstStyle/>
           <a:p>
@@ -35309,7 +35309,7 @@
         </p:spPr>
         <p:txBody>
           <a:bodyPr wrap="square">
-            <a:spAutoFit/>
+            <a:normAutofit/>
           </a:bodyPr>
           <a:lstStyle/>
           <a:p>
@@ -35344,7 +35344,7 @@
         </p:spPr>
         <p:txBody>
           <a:bodyPr wrap="square">
-            <a:spAutoFit/>
+            <a:normAutofit/>
           </a:bodyPr>
           <a:lstStyle/>
           <a:p>
@@ -35578,7 +35578,7 @@
         </p:spPr>
         <p:txBody>
           <a:bodyPr wrap="square">
-            <a:spAutoFit/>
+            <a:normAutofit/>
           </a:bodyPr>
           <a:lstStyle/>
           <a:p>
@@ -35613,7 +35613,7 @@
         </p:spPr>
         <p:txBody>
           <a:bodyPr wrap="square">
-            <a:spAutoFit/>
+            <a:normAutofit/>
           </a:bodyPr>
           <a:lstStyle/>
           <a:p>
@@ -35648,7 +35648,7 @@
         </p:spPr>
         <p:txBody>
           <a:bodyPr wrap="square">
-            <a:spAutoFit/>
+            <a:normAutofit/>
           </a:bodyPr>
           <a:lstStyle/>
           <a:p>
@@ -35683,7 +35683,7 @@
         </p:spPr>
         <p:txBody>
           <a:bodyPr wrap="square">
-            <a:spAutoFit/>
+            <a:normAutofit/>
           </a:bodyPr>
           <a:lstStyle/>
           <a:p>
@@ -35917,7 +35917,7 @@
         </p:spPr>
         <p:txBody>
           <a:bodyPr wrap="square">
-            <a:spAutoFit/>
+            <a:normAutofit/>
           </a:bodyPr>
           <a:lstStyle/>
           <a:p>
@@ -35952,7 +35952,7 @@
         </p:spPr>
         <p:txBody>
           <a:bodyPr wrap="square">
-            <a:spAutoFit/>
+            <a:normAutofit/>
           </a:bodyPr>
           <a:lstStyle/>
           <a:p>
@@ -35987,7 +35987,7 @@
         </p:spPr>
         <p:txBody>
           <a:bodyPr wrap="square">
-            <a:spAutoFit/>
+            <a:normAutofit/>
           </a:bodyPr>
           <a:lstStyle/>
           <a:p>
@@ -36022,7 +36022,7 @@
         </p:spPr>
         <p:txBody>
           <a:bodyPr wrap="square">
-            <a:spAutoFit/>
+            <a:normAutofit/>
           </a:bodyPr>
           <a:lstStyle/>
           <a:p>
@@ -36272,7 +36272,7 @@
         </p:spPr>
         <p:txBody>
           <a:bodyPr wrap="square">
-            <a:spAutoFit/>
+            <a:normAutofit/>
           </a:bodyPr>
           <a:lstStyle/>
           <a:p>
@@ -36307,7 +36307,7 @@
         </p:spPr>
         <p:txBody>
           <a:bodyPr wrap="square">
-            <a:spAutoFit/>
+            <a:normAutofit/>
           </a:bodyPr>
           <a:lstStyle/>
           <a:p>
@@ -36342,7 +36342,7 @@
         </p:spPr>
         <p:txBody>
           <a:bodyPr wrap="square">
-            <a:spAutoFit/>
+            <a:normAutofit/>
           </a:bodyPr>
           <a:lstStyle/>
           <a:p>
@@ -36377,7 +36377,7 @@
         </p:spPr>
         <p:txBody>
           <a:bodyPr wrap="square">
-            <a:spAutoFit/>
+            <a:normAutofit/>
           </a:bodyPr>
           <a:lstStyle/>
           <a:p>
@@ -36611,7 +36611,7 @@
         </p:spPr>
         <p:txBody>
           <a:bodyPr wrap="square">
-            <a:spAutoFit/>
+            <a:normAutofit/>
           </a:bodyPr>
           <a:lstStyle/>
           <a:p>
@@ -36646,7 +36646,7 @@
         </p:spPr>
         <p:txBody>
           <a:bodyPr wrap="square">
-            <a:spAutoFit/>
+            <a:normAutofit/>
           </a:bodyPr>
           <a:lstStyle/>
           <a:p>
@@ -36681,7 +36681,7 @@
         </p:spPr>
         <p:txBody>
           <a:bodyPr wrap="square">
-            <a:spAutoFit/>
+            <a:normAutofit/>
           </a:bodyPr>
           <a:lstStyle/>
           <a:p>
@@ -36716,7 +36716,7 @@
         </p:spPr>
         <p:txBody>
           <a:bodyPr wrap="square">
-            <a:spAutoFit/>
+            <a:normAutofit/>
           </a:bodyPr>
           <a:lstStyle/>
           <a:p>
@@ -36950,7 +36950,7 @@
         </p:spPr>
         <p:txBody>
           <a:bodyPr wrap="square">
-            <a:spAutoFit/>
+            <a:normAutofit/>
           </a:bodyPr>
           <a:lstStyle/>
           <a:p>
@@ -36985,7 +36985,7 @@
         </p:spPr>
         <p:txBody>
           <a:bodyPr wrap="square">
-            <a:spAutoFit/>
+            <a:normAutofit/>
           </a:bodyPr>
           <a:lstStyle/>
           <a:p>
@@ -37020,7 +37020,7 @@
         </p:spPr>
         <p:txBody>
           <a:bodyPr wrap="square">
-            <a:spAutoFit/>
+            <a:normAutofit/>
           </a:bodyPr>
           <a:lstStyle/>
           <a:p>
@@ -37055,7 +37055,7 @@
         </p:spPr>
         <p:txBody>
           <a:bodyPr wrap="square">
-            <a:spAutoFit/>
+            <a:normAutofit/>
           </a:bodyPr>
           <a:lstStyle/>
           <a:p>
@@ -37137,7 +37137,7 @@
         </p:spPr>
         <p:txBody>
           <a:bodyPr wrap="square">
-            <a:spAutoFit/>
+            <a:normAutofit/>
           </a:bodyPr>
           <a:lstStyle/>
           <a:p>
@@ -37172,7 +37172,7 @@
         </p:spPr>
         <p:txBody>
           <a:bodyPr wrap="square">
-            <a:spAutoFit/>
+            <a:normAutofit/>
           </a:bodyPr>
           <a:lstStyle/>
           <a:p>
@@ -37207,7 +37207,7 @@
         </p:spPr>
         <p:txBody>
           <a:bodyPr wrap="square">
-            <a:spAutoFit/>
+            <a:normAutofit/>
           </a:bodyPr>
           <a:lstStyle/>
           <a:p>
@@ -37285,7 +37285,7 @@
         </p:spPr>
         <p:txBody>
           <a:bodyPr wrap="square">
-            <a:spAutoFit/>
+            <a:normAutofit/>
           </a:bodyPr>
           <a:lstStyle/>
           <a:p>
@@ -37320,7 +37320,7 @@
         </p:spPr>
         <p:txBody>
           <a:bodyPr wrap="square">
-            <a:spAutoFit/>
+            <a:normAutofit/>
           </a:bodyPr>
           <a:lstStyle/>
           <a:p>

--- a/Santander_Project_Record.pptx
+++ b/Santander_Project_Record.pptx
@@ -3333,7 +3333,7 @@
         </p:spPr>
         <p:txBody>
           <a:bodyPr wrap="square">
-            <a:normAutofit/>
+            <a:noAutofit/>
           </a:bodyPr>
           <a:lstStyle/>
           <a:p>
@@ -3368,7 +3368,7 @@
         </p:spPr>
         <p:txBody>
           <a:bodyPr wrap="square">
-            <a:normAutofit/>
+            <a:noAutofit/>
           </a:bodyPr>
           <a:lstStyle/>
           <a:p>
@@ -3403,7 +3403,7 @@
         </p:spPr>
         <p:txBody>
           <a:bodyPr wrap="square">
-            <a:normAutofit/>
+            <a:noAutofit/>
           </a:bodyPr>
           <a:lstStyle/>
           <a:p>
@@ -3481,7 +3481,7 @@
         </p:spPr>
         <p:txBody>
           <a:bodyPr wrap="square">
-            <a:normAutofit/>
+            <a:noAutofit/>
           </a:bodyPr>
           <a:lstStyle/>
           <a:p>
@@ -3654,7 +3654,7 @@
         </p:spPr>
         <p:txBody>
           <a:bodyPr wrap="square">
-            <a:normAutofit/>
+            <a:noAutofit/>
           </a:bodyPr>
           <a:lstStyle/>
           <a:p>
@@ -3689,7 +3689,7 @@
         </p:spPr>
         <p:txBody>
           <a:bodyPr wrap="square">
-            <a:normAutofit/>
+            <a:noAutofit/>
           </a:bodyPr>
           <a:lstStyle/>
           <a:p>
@@ -3810,7 +3810,7 @@
         </p:spPr>
         <p:txBody>
           <a:bodyPr wrap="square">
-            <a:normAutofit/>
+            <a:noAutofit/>
           </a:bodyPr>
           <a:lstStyle/>
           <a:p>
@@ -3845,7 +3845,7 @@
         </p:spPr>
         <p:txBody>
           <a:bodyPr wrap="square">
-            <a:normAutofit/>
+            <a:noAutofit/>
           </a:bodyPr>
           <a:lstStyle/>
           <a:p>
@@ -3966,7 +3966,7 @@
         </p:spPr>
         <p:txBody>
           <a:bodyPr wrap="square">
-            <a:normAutofit/>
+            <a:noAutofit/>
           </a:bodyPr>
           <a:lstStyle/>
           <a:p>
@@ -4001,7 +4001,7 @@
         </p:spPr>
         <p:txBody>
           <a:bodyPr wrap="square">
-            <a:normAutofit/>
+            <a:noAutofit/>
           </a:bodyPr>
           <a:lstStyle/>
           <a:p>
@@ -4122,7 +4122,7 @@
         </p:spPr>
         <p:txBody>
           <a:bodyPr wrap="square">
-            <a:normAutofit/>
+            <a:noAutofit/>
           </a:bodyPr>
           <a:lstStyle/>
           <a:p>
@@ -4157,7 +4157,7 @@
         </p:spPr>
         <p:txBody>
           <a:bodyPr wrap="square">
-            <a:normAutofit/>
+            <a:noAutofit/>
           </a:bodyPr>
           <a:lstStyle/>
           <a:p>
@@ -4192,7 +4192,7 @@
         </p:spPr>
         <p:txBody>
           <a:bodyPr wrap="square">
-            <a:normAutofit/>
+            <a:noAutofit/>
           </a:bodyPr>
           <a:lstStyle/>
           <a:p>
@@ -4331,7 +4331,7 @@
         </p:spPr>
         <p:txBody>
           <a:bodyPr wrap="square">
-            <a:normAutofit/>
+            <a:noAutofit/>
           </a:bodyPr>
           <a:lstStyle/>
           <a:p>
@@ -4366,7 +4366,7 @@
         </p:spPr>
         <p:txBody>
           <a:bodyPr wrap="square">
-            <a:normAutofit/>
+            <a:noAutofit/>
           </a:bodyPr>
           <a:lstStyle/>
           <a:p>
@@ -4487,7 +4487,7 @@
         </p:spPr>
         <p:txBody>
           <a:bodyPr wrap="square">
-            <a:normAutofit/>
+            <a:noAutofit/>
           </a:bodyPr>
           <a:lstStyle/>
           <a:p>
@@ -4522,7 +4522,7 @@
         </p:spPr>
         <p:txBody>
           <a:bodyPr wrap="square">
-            <a:normAutofit/>
+            <a:noAutofit/>
           </a:bodyPr>
           <a:lstStyle/>
           <a:p>
@@ -4557,7 +4557,7 @@
         </p:spPr>
         <p:txBody>
           <a:bodyPr wrap="square">
-            <a:normAutofit/>
+            <a:noAutofit/>
           </a:bodyPr>
           <a:lstStyle/>
           <a:p>
@@ -4592,7 +4592,7 @@
         </p:spPr>
         <p:txBody>
           <a:bodyPr wrap="square">
-            <a:normAutofit/>
+            <a:noAutofit/>
           </a:bodyPr>
           <a:lstStyle/>
           <a:p>
@@ -4672,7 +4672,7 @@
         </p:spPr>
         <p:txBody>
           <a:bodyPr wrap="square">
-            <a:normAutofit/>
+            <a:noAutofit/>
           </a:bodyPr>
           <a:lstStyle/>
           <a:p>
@@ -4707,7 +4707,7 @@
         </p:spPr>
         <p:txBody>
           <a:bodyPr wrap="square">
-            <a:normAutofit/>
+            <a:noAutofit/>
           </a:bodyPr>
           <a:lstStyle/>
           <a:p>
@@ -4742,7 +4742,7 @@
         </p:spPr>
         <p:txBody>
           <a:bodyPr wrap="square">
-            <a:normAutofit/>
+            <a:noAutofit/>
           </a:bodyPr>
           <a:lstStyle/>
           <a:p>
@@ -4777,7 +4777,7 @@
         </p:spPr>
         <p:txBody>
           <a:bodyPr wrap="square">
-            <a:normAutofit/>
+            <a:noAutofit/>
           </a:bodyPr>
           <a:lstStyle/>
           <a:p>
@@ -4857,7 +4857,7 @@
         </p:spPr>
         <p:txBody>
           <a:bodyPr wrap="square">
-            <a:normAutofit/>
+            <a:noAutofit/>
           </a:bodyPr>
           <a:lstStyle/>
           <a:p>
@@ -4892,7 +4892,7 @@
         </p:spPr>
         <p:txBody>
           <a:bodyPr wrap="square">
-            <a:normAutofit/>
+            <a:noAutofit/>
           </a:bodyPr>
           <a:lstStyle/>
           <a:p>
@@ -4927,7 +4927,7 @@
         </p:spPr>
         <p:txBody>
           <a:bodyPr wrap="square">
-            <a:normAutofit/>
+            <a:noAutofit/>
           </a:bodyPr>
           <a:lstStyle/>
           <a:p>
@@ -4962,7 +4962,7 @@
         </p:spPr>
         <p:txBody>
           <a:bodyPr wrap="square">
-            <a:normAutofit/>
+            <a:noAutofit/>
           </a:bodyPr>
           <a:lstStyle/>
           <a:p>
@@ -5042,7 +5042,7 @@
         </p:spPr>
         <p:txBody>
           <a:bodyPr wrap="square">
-            <a:normAutofit/>
+            <a:noAutofit/>
           </a:bodyPr>
           <a:lstStyle/>
           <a:p>
@@ -5077,7 +5077,7 @@
         </p:spPr>
         <p:txBody>
           <a:bodyPr wrap="square">
-            <a:normAutofit/>
+            <a:noAutofit/>
           </a:bodyPr>
           <a:lstStyle/>
           <a:p>
@@ -5112,7 +5112,7 @@
         </p:spPr>
         <p:txBody>
           <a:bodyPr wrap="square">
-            <a:normAutofit/>
+            <a:noAutofit/>
           </a:bodyPr>
           <a:lstStyle/>
           <a:p>
@@ -5147,7 +5147,7 @@
         </p:spPr>
         <p:txBody>
           <a:bodyPr wrap="square">
-            <a:normAutofit/>
+            <a:noAutofit/>
           </a:bodyPr>
           <a:lstStyle/>
           <a:p>
@@ -5227,7 +5227,7 @@
         </p:spPr>
         <p:txBody>
           <a:bodyPr wrap="square">
-            <a:normAutofit/>
+            <a:noAutofit/>
           </a:bodyPr>
           <a:lstStyle/>
           <a:p>
@@ -5262,7 +5262,7 @@
         </p:spPr>
         <p:txBody>
           <a:bodyPr wrap="square">
-            <a:normAutofit/>
+            <a:noAutofit/>
           </a:bodyPr>
           <a:lstStyle/>
           <a:p>
@@ -5297,7 +5297,7 @@
         </p:spPr>
         <p:txBody>
           <a:bodyPr wrap="square">
-            <a:normAutofit/>
+            <a:noAutofit/>
           </a:bodyPr>
           <a:lstStyle/>
           <a:p>
@@ -5332,7 +5332,7 @@
         </p:spPr>
         <p:txBody>
           <a:bodyPr wrap="square">
-            <a:normAutofit/>
+            <a:noAutofit/>
           </a:bodyPr>
           <a:lstStyle/>
           <a:p>
@@ -5412,7 +5412,7 @@
         </p:spPr>
         <p:txBody>
           <a:bodyPr wrap="square">
-            <a:normAutofit/>
+            <a:noAutofit/>
           </a:bodyPr>
           <a:lstStyle/>
           <a:p>
@@ -5447,7 +5447,7 @@
         </p:spPr>
         <p:txBody>
           <a:bodyPr wrap="square">
-            <a:normAutofit/>
+            <a:noAutofit/>
           </a:bodyPr>
           <a:lstStyle/>
           <a:p>
@@ -5482,7 +5482,7 @@
         </p:spPr>
         <p:txBody>
           <a:bodyPr wrap="square">
-            <a:normAutofit/>
+            <a:noAutofit/>
           </a:bodyPr>
           <a:lstStyle/>
           <a:p>
@@ -5517,7 +5517,7 @@
         </p:spPr>
         <p:txBody>
           <a:bodyPr wrap="square">
-            <a:normAutofit/>
+            <a:noAutofit/>
           </a:bodyPr>
           <a:lstStyle/>
           <a:p>
@@ -5597,7 +5597,7 @@
         </p:spPr>
         <p:txBody>
           <a:bodyPr wrap="square">
-            <a:normAutofit/>
+            <a:noAutofit/>
           </a:bodyPr>
           <a:lstStyle/>
           <a:p>
@@ -5632,7 +5632,7 @@
         </p:spPr>
         <p:txBody>
           <a:bodyPr wrap="square">
-            <a:normAutofit/>
+            <a:noAutofit/>
           </a:bodyPr>
           <a:lstStyle/>
           <a:p>
@@ -5667,7 +5667,7 @@
         </p:spPr>
         <p:txBody>
           <a:bodyPr wrap="square">
-            <a:normAutofit/>
+            <a:noAutofit/>
           </a:bodyPr>
           <a:lstStyle/>
           <a:p>
@@ -5702,7 +5702,7 @@
         </p:spPr>
         <p:txBody>
           <a:bodyPr wrap="square">
-            <a:normAutofit/>
+            <a:noAutofit/>
           </a:bodyPr>
           <a:lstStyle/>
           <a:p>
@@ -5782,7 +5782,7 @@
         </p:spPr>
         <p:txBody>
           <a:bodyPr wrap="square">
-            <a:normAutofit/>
+            <a:noAutofit/>
           </a:bodyPr>
           <a:lstStyle/>
           <a:p>
@@ -5817,7 +5817,7 @@
         </p:spPr>
         <p:txBody>
           <a:bodyPr wrap="square">
-            <a:normAutofit/>
+            <a:noAutofit/>
           </a:bodyPr>
           <a:lstStyle/>
           <a:p>
@@ -5852,7 +5852,7 @@
         </p:spPr>
         <p:txBody>
           <a:bodyPr wrap="square">
-            <a:normAutofit/>
+            <a:noAutofit/>
           </a:bodyPr>
           <a:lstStyle/>
           <a:p>
@@ -5887,7 +5887,7 @@
         </p:spPr>
         <p:txBody>
           <a:bodyPr wrap="square">
-            <a:normAutofit/>
+            <a:noAutofit/>
           </a:bodyPr>
           <a:lstStyle/>
           <a:p>
@@ -5967,7 +5967,7 @@
         </p:spPr>
         <p:txBody>
           <a:bodyPr wrap="square">
-            <a:normAutofit/>
+            <a:noAutofit/>
           </a:bodyPr>
           <a:lstStyle/>
           <a:p>
@@ -6002,7 +6002,7 @@
         </p:spPr>
         <p:txBody>
           <a:bodyPr wrap="square">
-            <a:normAutofit/>
+            <a:noAutofit/>
           </a:bodyPr>
           <a:lstStyle/>
           <a:p>
@@ -6037,7 +6037,7 @@
         </p:spPr>
         <p:txBody>
           <a:bodyPr wrap="square">
-            <a:normAutofit/>
+            <a:noAutofit/>
           </a:bodyPr>
           <a:lstStyle/>
           <a:p>
@@ -6072,7 +6072,7 @@
         </p:spPr>
         <p:txBody>
           <a:bodyPr wrap="square">
-            <a:normAutofit/>
+            <a:noAutofit/>
           </a:bodyPr>
           <a:lstStyle/>
           <a:p>
@@ -6152,7 +6152,7 @@
         </p:spPr>
         <p:txBody>
           <a:bodyPr wrap="square">
-            <a:normAutofit/>
+            <a:noAutofit/>
           </a:bodyPr>
           <a:lstStyle/>
           <a:p>
@@ -6187,7 +6187,7 @@
         </p:spPr>
         <p:txBody>
           <a:bodyPr wrap="square">
-            <a:normAutofit/>
+            <a:noAutofit/>
           </a:bodyPr>
           <a:lstStyle/>
           <a:p>
@@ -6222,7 +6222,7 @@
         </p:spPr>
         <p:txBody>
           <a:bodyPr wrap="square">
-            <a:normAutofit/>
+            <a:noAutofit/>
           </a:bodyPr>
           <a:lstStyle/>
           <a:p>
@@ -6257,7 +6257,7 @@
         </p:spPr>
         <p:txBody>
           <a:bodyPr wrap="square">
-            <a:normAutofit/>
+            <a:noAutofit/>
           </a:bodyPr>
           <a:lstStyle/>
           <a:p>
@@ -6337,7 +6337,7 @@
         </p:spPr>
         <p:txBody>
           <a:bodyPr wrap="square">
-            <a:normAutofit/>
+            <a:noAutofit/>
           </a:bodyPr>
           <a:lstStyle/>
           <a:p>
@@ -6372,7 +6372,7 @@
         </p:spPr>
         <p:txBody>
           <a:bodyPr wrap="square">
-            <a:normAutofit/>
+            <a:noAutofit/>
           </a:bodyPr>
           <a:lstStyle/>
           <a:p>
@@ -6407,7 +6407,7 @@
         </p:spPr>
         <p:txBody>
           <a:bodyPr wrap="square">
-            <a:normAutofit/>
+            <a:noAutofit/>
           </a:bodyPr>
           <a:lstStyle/>
           <a:p>
@@ -6442,7 +6442,7 @@
         </p:spPr>
         <p:txBody>
           <a:bodyPr wrap="square">
-            <a:normAutofit/>
+            <a:noAutofit/>
           </a:bodyPr>
           <a:lstStyle/>
           <a:p>
@@ -6522,7 +6522,7 @@
         </p:spPr>
         <p:txBody>
           <a:bodyPr wrap="square">
-            <a:normAutofit/>
+            <a:noAutofit/>
           </a:bodyPr>
           <a:lstStyle/>
           <a:p>
@@ -6557,7 +6557,7 @@
         </p:spPr>
         <p:txBody>
           <a:bodyPr wrap="square">
-            <a:normAutofit/>
+            <a:noAutofit/>
           </a:bodyPr>
           <a:lstStyle/>
           <a:p>
@@ -6592,7 +6592,7 @@
         </p:spPr>
         <p:txBody>
           <a:bodyPr wrap="square">
-            <a:normAutofit/>
+            <a:noAutofit/>
           </a:bodyPr>
           <a:lstStyle/>
           <a:p>
@@ -6627,7 +6627,7 @@
         </p:spPr>
         <p:txBody>
           <a:bodyPr wrap="square">
-            <a:normAutofit/>
+            <a:noAutofit/>
           </a:bodyPr>
           <a:lstStyle/>
           <a:p>
@@ -6707,7 +6707,7 @@
         </p:spPr>
         <p:txBody>
           <a:bodyPr wrap="square">
-            <a:normAutofit/>
+            <a:noAutofit/>
           </a:bodyPr>
           <a:lstStyle/>
           <a:p>
@@ -6742,7 +6742,7 @@
         </p:spPr>
         <p:txBody>
           <a:bodyPr wrap="square">
-            <a:normAutofit/>
+            <a:noAutofit/>
           </a:bodyPr>
           <a:lstStyle/>
           <a:p>
@@ -6777,7 +6777,7 @@
         </p:spPr>
         <p:txBody>
           <a:bodyPr wrap="square">
-            <a:normAutofit/>
+            <a:noAutofit/>
           </a:bodyPr>
           <a:lstStyle/>
           <a:p>
@@ -6812,7 +6812,7 @@
         </p:spPr>
         <p:txBody>
           <a:bodyPr wrap="square">
-            <a:normAutofit/>
+            <a:noAutofit/>
           </a:bodyPr>
           <a:lstStyle/>
           <a:p>
@@ -6892,7 +6892,7 @@
         </p:spPr>
         <p:txBody>
           <a:bodyPr wrap="square">
-            <a:normAutofit/>
+            <a:noAutofit/>
           </a:bodyPr>
           <a:lstStyle/>
           <a:p>
@@ -6927,7 +6927,7 @@
         </p:spPr>
         <p:txBody>
           <a:bodyPr wrap="square">
-            <a:normAutofit/>
+            <a:noAutofit/>
           </a:bodyPr>
           <a:lstStyle/>
           <a:p>
@@ -6962,7 +6962,7 @@
         </p:spPr>
         <p:txBody>
           <a:bodyPr wrap="square">
-            <a:normAutofit/>
+            <a:noAutofit/>
           </a:bodyPr>
           <a:lstStyle/>
           <a:p>
@@ -6997,7 +6997,7 @@
         </p:spPr>
         <p:txBody>
           <a:bodyPr wrap="square">
-            <a:normAutofit/>
+            <a:noAutofit/>
           </a:bodyPr>
           <a:lstStyle/>
           <a:p>
@@ -7075,7 +7075,7 @@
         </p:spPr>
         <p:txBody>
           <a:bodyPr wrap="square">
-            <a:normAutofit/>
+            <a:noAutofit/>
           </a:bodyPr>
           <a:lstStyle/>
           <a:p>
@@ -7110,7 +7110,7 @@
         </p:spPr>
         <p:txBody>
           <a:bodyPr wrap="square">
-            <a:normAutofit/>
+            <a:noAutofit/>
           </a:bodyPr>
           <a:lstStyle/>
           <a:p>
@@ -7145,7 +7145,7 @@
         </p:spPr>
         <p:txBody>
           <a:bodyPr wrap="square">
-            <a:normAutofit/>
+            <a:noAutofit/>
           </a:bodyPr>
           <a:lstStyle/>
           <a:p>
@@ -7180,7 +7180,7 @@
         </p:spPr>
         <p:txBody>
           <a:bodyPr wrap="square">
-            <a:normAutofit/>
+            <a:noAutofit/>
           </a:bodyPr>
           <a:lstStyle/>
           <a:p>
@@ -7260,7 +7260,7 @@
         </p:spPr>
         <p:txBody>
           <a:bodyPr wrap="square">
-            <a:normAutofit/>
+            <a:noAutofit/>
           </a:bodyPr>
           <a:lstStyle/>
           <a:p>
@@ -7295,7 +7295,7 @@
         </p:spPr>
         <p:txBody>
           <a:bodyPr wrap="square">
-            <a:normAutofit/>
+            <a:noAutofit/>
           </a:bodyPr>
           <a:lstStyle/>
           <a:p>
@@ -7330,7 +7330,7 @@
         </p:spPr>
         <p:txBody>
           <a:bodyPr wrap="square">
-            <a:normAutofit/>
+            <a:noAutofit/>
           </a:bodyPr>
           <a:lstStyle/>
           <a:p>
@@ -7365,7 +7365,7 @@
         </p:spPr>
         <p:txBody>
           <a:bodyPr wrap="square">
-            <a:normAutofit/>
+            <a:noAutofit/>
           </a:bodyPr>
           <a:lstStyle/>
           <a:p>
@@ -7445,7 +7445,7 @@
         </p:spPr>
         <p:txBody>
           <a:bodyPr wrap="square">
-            <a:normAutofit/>
+            <a:noAutofit/>
           </a:bodyPr>
           <a:lstStyle/>
           <a:p>
@@ -7480,7 +7480,7 @@
         </p:spPr>
         <p:txBody>
           <a:bodyPr wrap="square">
-            <a:normAutofit/>
+            <a:noAutofit/>
           </a:bodyPr>
           <a:lstStyle/>
           <a:p>
@@ -7515,7 +7515,7 @@
         </p:spPr>
         <p:txBody>
           <a:bodyPr wrap="square">
-            <a:normAutofit/>
+            <a:noAutofit/>
           </a:bodyPr>
           <a:lstStyle/>
           <a:p>
@@ -7550,7 +7550,7 @@
         </p:spPr>
         <p:txBody>
           <a:bodyPr wrap="square">
-            <a:normAutofit/>
+            <a:noAutofit/>
           </a:bodyPr>
           <a:lstStyle/>
           <a:p>
@@ -7630,7 +7630,7 @@
         </p:spPr>
         <p:txBody>
           <a:bodyPr wrap="square">
-            <a:normAutofit/>
+            <a:noAutofit/>
           </a:bodyPr>
           <a:lstStyle/>
           <a:p>
@@ -7665,7 +7665,7 @@
         </p:spPr>
         <p:txBody>
           <a:bodyPr wrap="square">
-            <a:normAutofit/>
+            <a:noAutofit/>
           </a:bodyPr>
           <a:lstStyle/>
           <a:p>
@@ -7700,7 +7700,7 @@
         </p:spPr>
         <p:txBody>
           <a:bodyPr wrap="square">
-            <a:normAutofit/>
+            <a:noAutofit/>
           </a:bodyPr>
           <a:lstStyle/>
           <a:p>
@@ -7735,7 +7735,7 @@
         </p:spPr>
         <p:txBody>
           <a:bodyPr wrap="square">
-            <a:normAutofit/>
+            <a:noAutofit/>
           </a:bodyPr>
           <a:lstStyle/>
           <a:p>
@@ -7815,7 +7815,7 @@
         </p:spPr>
         <p:txBody>
           <a:bodyPr wrap="square">
-            <a:normAutofit/>
+            <a:noAutofit/>
           </a:bodyPr>
           <a:lstStyle/>
           <a:p>
@@ -7850,7 +7850,7 @@
         </p:spPr>
         <p:txBody>
           <a:bodyPr wrap="square">
-            <a:normAutofit/>
+            <a:noAutofit/>
           </a:bodyPr>
           <a:lstStyle/>
           <a:p>
@@ -7885,7 +7885,7 @@
         </p:spPr>
         <p:txBody>
           <a:bodyPr wrap="square">
-            <a:normAutofit/>
+            <a:noAutofit/>
           </a:bodyPr>
           <a:lstStyle/>
           <a:p>
@@ -7920,7 +7920,7 @@
         </p:spPr>
         <p:txBody>
           <a:bodyPr wrap="square">
-            <a:normAutofit/>
+            <a:noAutofit/>
           </a:bodyPr>
           <a:lstStyle/>
           <a:p>
@@ -8000,7 +8000,7 @@
         </p:spPr>
         <p:txBody>
           <a:bodyPr wrap="square">
-            <a:normAutofit/>
+            <a:noAutofit/>
           </a:bodyPr>
           <a:lstStyle/>
           <a:p>
@@ -8035,7 +8035,7 @@
         </p:spPr>
         <p:txBody>
           <a:bodyPr wrap="square">
-            <a:normAutofit/>
+            <a:noAutofit/>
           </a:bodyPr>
           <a:lstStyle/>
           <a:p>
@@ -8070,7 +8070,7 @@
         </p:spPr>
         <p:txBody>
           <a:bodyPr wrap="square">
-            <a:normAutofit/>
+            <a:noAutofit/>
           </a:bodyPr>
           <a:lstStyle/>
           <a:p>
@@ -8105,7 +8105,7 @@
         </p:spPr>
         <p:txBody>
           <a:bodyPr wrap="square">
-            <a:normAutofit/>
+            <a:noAutofit/>
           </a:bodyPr>
           <a:lstStyle/>
           <a:p>
@@ -8185,7 +8185,7 @@
         </p:spPr>
         <p:txBody>
           <a:bodyPr wrap="square">
-            <a:normAutofit/>
+            <a:noAutofit/>
           </a:bodyPr>
           <a:lstStyle/>
           <a:p>
@@ -8220,7 +8220,7 @@
         </p:spPr>
         <p:txBody>
           <a:bodyPr wrap="square">
-            <a:normAutofit/>
+            <a:noAutofit/>
           </a:bodyPr>
           <a:lstStyle/>
           <a:p>
@@ -8255,7 +8255,7 @@
         </p:spPr>
         <p:txBody>
           <a:bodyPr wrap="square">
-            <a:normAutofit/>
+            <a:noAutofit/>
           </a:bodyPr>
           <a:lstStyle/>
           <a:p>
@@ -8290,7 +8290,7 @@
         </p:spPr>
         <p:txBody>
           <a:bodyPr wrap="square">
-            <a:normAutofit/>
+            <a:noAutofit/>
           </a:bodyPr>
           <a:lstStyle/>
           <a:p>
@@ -8370,7 +8370,7 @@
         </p:spPr>
         <p:txBody>
           <a:bodyPr wrap="square">
-            <a:normAutofit/>
+            <a:noAutofit/>
           </a:bodyPr>
           <a:lstStyle/>
           <a:p>
@@ -8405,7 +8405,7 @@
         </p:spPr>
         <p:txBody>
           <a:bodyPr wrap="square">
-            <a:normAutofit/>
+            <a:noAutofit/>
           </a:bodyPr>
           <a:lstStyle/>
           <a:p>
@@ -8440,7 +8440,7 @@
         </p:spPr>
         <p:txBody>
           <a:bodyPr wrap="square">
-            <a:normAutofit/>
+            <a:noAutofit/>
           </a:bodyPr>
           <a:lstStyle/>
           <a:p>
@@ -8475,7 +8475,7 @@
         </p:spPr>
         <p:txBody>
           <a:bodyPr wrap="square">
-            <a:normAutofit/>
+            <a:noAutofit/>
           </a:bodyPr>
           <a:lstStyle/>
           <a:p>
@@ -8555,7 +8555,7 @@
         </p:spPr>
         <p:txBody>
           <a:bodyPr wrap="square">
-            <a:normAutofit/>
+            <a:noAutofit/>
           </a:bodyPr>
           <a:lstStyle/>
           <a:p>
@@ -8590,7 +8590,7 @@
         </p:spPr>
         <p:txBody>
           <a:bodyPr wrap="square">
-            <a:normAutofit/>
+            <a:noAutofit/>
           </a:bodyPr>
           <a:lstStyle/>
           <a:p>
@@ -8625,7 +8625,7 @@
         </p:spPr>
         <p:txBody>
           <a:bodyPr wrap="square">
-            <a:normAutofit/>
+            <a:noAutofit/>
           </a:bodyPr>
           <a:lstStyle/>
           <a:p>
@@ -8660,7 +8660,7 @@
         </p:spPr>
         <p:txBody>
           <a:bodyPr wrap="square">
-            <a:normAutofit/>
+            <a:noAutofit/>
           </a:bodyPr>
           <a:lstStyle/>
           <a:p>
@@ -8740,7 +8740,7 @@
         </p:spPr>
         <p:txBody>
           <a:bodyPr wrap="square">
-            <a:normAutofit/>
+            <a:noAutofit/>
           </a:bodyPr>
           <a:lstStyle/>
           <a:p>
@@ -8775,7 +8775,7 @@
         </p:spPr>
         <p:txBody>
           <a:bodyPr wrap="square">
-            <a:normAutofit/>
+            <a:noAutofit/>
           </a:bodyPr>
           <a:lstStyle/>
           <a:p>
@@ -8810,7 +8810,7 @@
         </p:spPr>
         <p:txBody>
           <a:bodyPr wrap="square">
-            <a:normAutofit/>
+            <a:noAutofit/>
           </a:bodyPr>
           <a:lstStyle/>
           <a:p>
@@ -8845,7 +8845,7 @@
         </p:spPr>
         <p:txBody>
           <a:bodyPr wrap="square">
-            <a:normAutofit/>
+            <a:noAutofit/>
           </a:bodyPr>
           <a:lstStyle/>
           <a:p>
@@ -8925,7 +8925,7 @@
         </p:spPr>
         <p:txBody>
           <a:bodyPr wrap="square">
-            <a:normAutofit/>
+            <a:noAutofit/>
           </a:bodyPr>
           <a:lstStyle/>
           <a:p>
@@ -8960,7 +8960,7 @@
         </p:spPr>
         <p:txBody>
           <a:bodyPr wrap="square">
-            <a:normAutofit/>
+            <a:noAutofit/>
           </a:bodyPr>
           <a:lstStyle/>
           <a:p>
@@ -8995,7 +8995,7 @@
         </p:spPr>
         <p:txBody>
           <a:bodyPr wrap="square">
-            <a:normAutofit/>
+            <a:noAutofit/>
           </a:bodyPr>
           <a:lstStyle/>
           <a:p>
@@ -9030,7 +9030,7 @@
         </p:spPr>
         <p:txBody>
           <a:bodyPr wrap="square">
-            <a:normAutofit/>
+            <a:noAutofit/>
           </a:bodyPr>
           <a:lstStyle/>
           <a:p>
@@ -9110,7 +9110,7 @@
         </p:spPr>
         <p:txBody>
           <a:bodyPr wrap="square">
-            <a:normAutofit/>
+            <a:noAutofit/>
           </a:bodyPr>
           <a:lstStyle/>
           <a:p>
@@ -9145,7 +9145,7 @@
         </p:spPr>
         <p:txBody>
           <a:bodyPr wrap="square">
-            <a:normAutofit/>
+            <a:noAutofit/>
           </a:bodyPr>
           <a:lstStyle/>
           <a:p>
@@ -9180,7 +9180,7 @@
         </p:spPr>
         <p:txBody>
           <a:bodyPr wrap="square">
-            <a:normAutofit/>
+            <a:noAutofit/>
           </a:bodyPr>
           <a:lstStyle/>
           <a:p>
@@ -9215,7 +9215,7 @@
         </p:spPr>
         <p:txBody>
           <a:bodyPr wrap="square">
-            <a:normAutofit/>
+            <a:noAutofit/>
           </a:bodyPr>
           <a:lstStyle/>
           <a:p>
@@ -9295,7 +9295,7 @@
         </p:spPr>
         <p:txBody>
           <a:bodyPr wrap="square">
-            <a:normAutofit/>
+            <a:noAutofit/>
           </a:bodyPr>
           <a:lstStyle/>
           <a:p>
@@ -9330,7 +9330,7 @@
         </p:spPr>
         <p:txBody>
           <a:bodyPr wrap="square">
-            <a:normAutofit/>
+            <a:noAutofit/>
           </a:bodyPr>
           <a:lstStyle/>
           <a:p>
@@ -9365,7 +9365,7 @@
         </p:spPr>
         <p:txBody>
           <a:bodyPr wrap="square">
-            <a:normAutofit/>
+            <a:noAutofit/>
           </a:bodyPr>
           <a:lstStyle/>
           <a:p>
@@ -9400,7 +9400,7 @@
         </p:spPr>
         <p:txBody>
           <a:bodyPr wrap="square">
-            <a:normAutofit/>
+            <a:noAutofit/>
           </a:bodyPr>
           <a:lstStyle/>
           <a:p>
@@ -9480,7 +9480,7 @@
         </p:spPr>
         <p:txBody>
           <a:bodyPr wrap="square">
-            <a:normAutofit/>
+            <a:noAutofit/>
           </a:bodyPr>
           <a:lstStyle/>
           <a:p>
@@ -9515,7 +9515,7 @@
         </p:spPr>
         <p:txBody>
           <a:bodyPr wrap="square">
-            <a:normAutofit/>
+            <a:noAutofit/>
           </a:bodyPr>
           <a:lstStyle/>
           <a:p>
@@ -9550,7 +9550,7 @@
         </p:spPr>
         <p:txBody>
           <a:bodyPr wrap="square">
-            <a:normAutofit/>
+            <a:noAutofit/>
           </a:bodyPr>
           <a:lstStyle/>
           <a:p>
@@ -9585,7 +9585,7 @@
         </p:spPr>
         <p:txBody>
           <a:bodyPr wrap="square">
-            <a:normAutofit/>
+            <a:noAutofit/>
           </a:bodyPr>
           <a:lstStyle/>
           <a:p>
@@ -9663,7 +9663,7 @@
         </p:spPr>
         <p:txBody>
           <a:bodyPr wrap="square">
-            <a:normAutofit/>
+            <a:noAutofit/>
           </a:bodyPr>
           <a:lstStyle/>
           <a:p>
@@ -9698,7 +9698,7 @@
         </p:spPr>
         <p:txBody>
           <a:bodyPr wrap="square">
-            <a:normAutofit/>
+            <a:noAutofit/>
           </a:bodyPr>
           <a:lstStyle/>
           <a:p>
@@ -9837,7 +9837,7 @@
         </p:spPr>
         <p:txBody>
           <a:bodyPr wrap="square">
-            <a:normAutofit/>
+            <a:noAutofit/>
           </a:bodyPr>
           <a:lstStyle/>
           <a:p>
@@ -9872,7 +9872,7 @@
         </p:spPr>
         <p:txBody>
           <a:bodyPr wrap="square">
-            <a:normAutofit/>
+            <a:noAutofit/>
           </a:bodyPr>
           <a:lstStyle/>
           <a:p>
@@ -10038,7 +10038,7 @@
         </p:spPr>
         <p:txBody>
           <a:bodyPr wrap="square">
-            <a:normAutofit/>
+            <a:noAutofit/>
           </a:bodyPr>
           <a:lstStyle/>
           <a:p>
@@ -10073,7 +10073,7 @@
         </p:spPr>
         <p:txBody>
           <a:bodyPr wrap="square">
-            <a:normAutofit/>
+            <a:noAutofit/>
           </a:bodyPr>
           <a:lstStyle/>
           <a:p>
@@ -10153,7 +10153,7 @@
         </p:spPr>
         <p:txBody>
           <a:bodyPr wrap="square">
-            <a:normAutofit/>
+            <a:noAutofit/>
           </a:bodyPr>
           <a:lstStyle/>
           <a:p>
@@ -10188,7 +10188,7 @@
         </p:spPr>
         <p:txBody>
           <a:bodyPr wrap="square">
-            <a:normAutofit/>
+            <a:noAutofit/>
           </a:bodyPr>
           <a:lstStyle/>
           <a:p>
@@ -10268,7 +10268,7 @@
         </p:spPr>
         <p:txBody>
           <a:bodyPr wrap="square">
-            <a:normAutofit/>
+            <a:noAutofit/>
           </a:bodyPr>
           <a:lstStyle/>
           <a:p>
@@ -10303,7 +10303,7 @@
         </p:spPr>
         <p:txBody>
           <a:bodyPr wrap="square">
-            <a:normAutofit/>
+            <a:noAutofit/>
           </a:bodyPr>
           <a:lstStyle/>
           <a:p>
@@ -10383,7 +10383,7 @@
         </p:spPr>
         <p:txBody>
           <a:bodyPr wrap="square">
-            <a:normAutofit/>
+            <a:noAutofit/>
           </a:bodyPr>
           <a:lstStyle/>
           <a:p>
@@ -10418,7 +10418,7 @@
         </p:spPr>
         <p:txBody>
           <a:bodyPr wrap="square">
-            <a:normAutofit/>
+            <a:noAutofit/>
           </a:bodyPr>
           <a:lstStyle/>
           <a:p>
@@ -10498,7 +10498,7 @@
         </p:spPr>
         <p:txBody>
           <a:bodyPr wrap="square">
-            <a:normAutofit/>
+            <a:noAutofit/>
           </a:bodyPr>
           <a:lstStyle/>
           <a:p>
@@ -10533,7 +10533,7 @@
         </p:spPr>
         <p:txBody>
           <a:bodyPr wrap="square">
-            <a:normAutofit/>
+            <a:noAutofit/>
           </a:bodyPr>
           <a:lstStyle/>
           <a:p>
@@ -10613,7 +10613,7 @@
         </p:spPr>
         <p:txBody>
           <a:bodyPr wrap="square">
-            <a:normAutofit/>
+            <a:noAutofit/>
           </a:bodyPr>
           <a:lstStyle/>
           <a:p>
@@ -10648,7 +10648,7 @@
         </p:spPr>
         <p:txBody>
           <a:bodyPr wrap="square">
-            <a:normAutofit/>
+            <a:noAutofit/>
           </a:bodyPr>
           <a:lstStyle/>
           <a:p>
@@ -10728,7 +10728,7 @@
         </p:spPr>
         <p:txBody>
           <a:bodyPr wrap="square">
-            <a:normAutofit/>
+            <a:noAutofit/>
           </a:bodyPr>
           <a:lstStyle/>
           <a:p>
@@ -10763,7 +10763,7 @@
         </p:spPr>
         <p:txBody>
           <a:bodyPr wrap="square">
-            <a:normAutofit/>
+            <a:noAutofit/>
           </a:bodyPr>
           <a:lstStyle/>
           <a:p>
@@ -10886,7 +10886,7 @@
         </p:spPr>
         <p:txBody>
           <a:bodyPr wrap="square">
-            <a:normAutofit/>
+            <a:noAutofit/>
           </a:bodyPr>
           <a:lstStyle/>
           <a:p>
@@ -10966,7 +10966,7 @@
         </p:spPr>
         <p:txBody>
           <a:bodyPr wrap="square">
-            <a:normAutofit/>
+            <a:noAutofit/>
           </a:bodyPr>
           <a:lstStyle/>
           <a:p>
@@ -11001,7 +11001,7 @@
         </p:spPr>
         <p:txBody>
           <a:bodyPr wrap="square">
-            <a:normAutofit/>
+            <a:noAutofit/>
           </a:bodyPr>
           <a:lstStyle/>
           <a:p>
@@ -11081,7 +11081,7 @@
         </p:spPr>
         <p:txBody>
           <a:bodyPr wrap="square">
-            <a:normAutofit/>
+            <a:noAutofit/>
           </a:bodyPr>
           <a:lstStyle/>
           <a:p>
@@ -11116,7 +11116,7 @@
         </p:spPr>
         <p:txBody>
           <a:bodyPr wrap="square">
-            <a:normAutofit/>
+            <a:noAutofit/>
           </a:bodyPr>
           <a:lstStyle/>
           <a:p>
@@ -11196,7 +11196,7 @@
         </p:spPr>
         <p:txBody>
           <a:bodyPr wrap="square">
-            <a:normAutofit/>
+            <a:noAutofit/>
           </a:bodyPr>
           <a:lstStyle/>
           <a:p>
@@ -11231,7 +11231,7 @@
         </p:spPr>
         <p:txBody>
           <a:bodyPr wrap="square">
-            <a:normAutofit/>
+            <a:noAutofit/>
           </a:bodyPr>
           <a:lstStyle/>
           <a:p>
@@ -11311,7 +11311,7 @@
         </p:spPr>
         <p:txBody>
           <a:bodyPr wrap="square">
-            <a:normAutofit/>
+            <a:noAutofit/>
           </a:bodyPr>
           <a:lstStyle/>
           <a:p>
@@ -11346,7 +11346,7 @@
         </p:spPr>
         <p:txBody>
           <a:bodyPr wrap="square">
-            <a:normAutofit/>
+            <a:noAutofit/>
           </a:bodyPr>
           <a:lstStyle/>
           <a:p>
@@ -11426,7 +11426,7 @@
         </p:spPr>
         <p:txBody>
           <a:bodyPr wrap="square">
-            <a:normAutofit/>
+            <a:noAutofit/>
           </a:bodyPr>
           <a:lstStyle/>
           <a:p>
@@ -11461,7 +11461,7 @@
         </p:spPr>
         <p:txBody>
           <a:bodyPr wrap="square">
-            <a:normAutofit/>
+            <a:noAutofit/>
           </a:bodyPr>
           <a:lstStyle/>
           <a:p>
@@ -11541,7 +11541,7 @@
         </p:spPr>
         <p:txBody>
           <a:bodyPr wrap="square">
-            <a:normAutofit/>
+            <a:noAutofit/>
           </a:bodyPr>
           <a:lstStyle/>
           <a:p>
@@ -11576,7 +11576,7 @@
         </p:spPr>
         <p:txBody>
           <a:bodyPr wrap="square">
-            <a:normAutofit/>
+            <a:noAutofit/>
           </a:bodyPr>
           <a:lstStyle/>
           <a:p>
@@ -11699,7 +11699,7 @@
         </p:spPr>
         <p:txBody>
           <a:bodyPr wrap="square">
-            <a:normAutofit/>
+            <a:noAutofit/>
           </a:bodyPr>
           <a:lstStyle/>
           <a:p>
@@ -11779,7 +11779,7 @@
         </p:spPr>
         <p:txBody>
           <a:bodyPr wrap="square">
-            <a:normAutofit/>
+            <a:noAutofit/>
           </a:bodyPr>
           <a:lstStyle/>
           <a:p>
@@ -11814,7 +11814,7 @@
         </p:spPr>
         <p:txBody>
           <a:bodyPr wrap="square">
-            <a:normAutofit/>
+            <a:noAutofit/>
           </a:bodyPr>
           <a:lstStyle/>
           <a:p>
@@ -11894,7 +11894,7 @@
         </p:spPr>
         <p:txBody>
           <a:bodyPr wrap="square">
-            <a:normAutofit/>
+            <a:noAutofit/>
           </a:bodyPr>
           <a:lstStyle/>
           <a:p>
@@ -11929,7 +11929,7 @@
         </p:spPr>
         <p:txBody>
           <a:bodyPr wrap="square">
-            <a:normAutofit/>
+            <a:noAutofit/>
           </a:bodyPr>
           <a:lstStyle/>
           <a:p>
@@ -12009,7 +12009,7 @@
         </p:spPr>
         <p:txBody>
           <a:bodyPr wrap="square">
-            <a:normAutofit/>
+            <a:noAutofit/>
           </a:bodyPr>
           <a:lstStyle/>
           <a:p>
@@ -12044,7 +12044,7 @@
         </p:spPr>
         <p:txBody>
           <a:bodyPr wrap="square">
-            <a:normAutofit/>
+            <a:noAutofit/>
           </a:bodyPr>
           <a:lstStyle/>
           <a:p>
@@ -12124,7 +12124,7 @@
         </p:spPr>
         <p:txBody>
           <a:bodyPr wrap="square">
-            <a:normAutofit/>
+            <a:noAutofit/>
           </a:bodyPr>
           <a:lstStyle/>
           <a:p>
@@ -12159,7 +12159,7 @@
         </p:spPr>
         <p:txBody>
           <a:bodyPr wrap="square">
-            <a:normAutofit/>
+            <a:noAutofit/>
           </a:bodyPr>
           <a:lstStyle/>
           <a:p>
@@ -12239,7 +12239,7 @@
         </p:spPr>
         <p:txBody>
           <a:bodyPr wrap="square">
-            <a:normAutofit/>
+            <a:noAutofit/>
           </a:bodyPr>
           <a:lstStyle/>
           <a:p>
@@ -12274,7 +12274,7 @@
         </p:spPr>
         <p:txBody>
           <a:bodyPr wrap="square">
-            <a:normAutofit/>
+            <a:noAutofit/>
           </a:bodyPr>
           <a:lstStyle/>
           <a:p>
@@ -12354,7 +12354,7 @@
         </p:spPr>
         <p:txBody>
           <a:bodyPr wrap="square">
-            <a:normAutofit/>
+            <a:noAutofit/>
           </a:bodyPr>
           <a:lstStyle/>
           <a:p>
@@ -12389,7 +12389,7 @@
         </p:spPr>
         <p:txBody>
           <a:bodyPr wrap="square">
-            <a:normAutofit/>
+            <a:noAutofit/>
           </a:bodyPr>
           <a:lstStyle/>
           <a:p>
@@ -12469,7 +12469,7 @@
         </p:spPr>
         <p:txBody>
           <a:bodyPr wrap="square">
-            <a:normAutofit/>
+            <a:noAutofit/>
           </a:bodyPr>
           <a:lstStyle/>
           <a:p>
@@ -12504,7 +12504,7 @@
         </p:spPr>
         <p:txBody>
           <a:bodyPr wrap="square">
-            <a:normAutofit/>
+            <a:noAutofit/>
           </a:bodyPr>
           <a:lstStyle/>
           <a:p>
@@ -12627,7 +12627,7 @@
         </p:spPr>
         <p:txBody>
           <a:bodyPr wrap="square">
-            <a:normAutofit/>
+            <a:noAutofit/>
           </a:bodyPr>
           <a:lstStyle/>
           <a:p>
@@ -12662,7 +12662,7 @@
         </p:spPr>
         <p:txBody>
           <a:bodyPr wrap="square">
-            <a:normAutofit/>
+            <a:noAutofit/>
           </a:bodyPr>
           <a:lstStyle/>
           <a:p>
@@ -12808,7 +12808,7 @@
         </p:spPr>
         <p:txBody>
           <a:bodyPr wrap="square">
-            <a:normAutofit/>
+            <a:noAutofit/>
           </a:bodyPr>
           <a:lstStyle/>
           <a:p>
@@ -12843,7 +12843,7 @@
         </p:spPr>
         <p:txBody>
           <a:bodyPr wrap="square">
-            <a:normAutofit/>
+            <a:noAutofit/>
           </a:bodyPr>
           <a:lstStyle/>
           <a:p>
@@ -12982,7 +12982,7 @@
         </p:spPr>
         <p:txBody>
           <a:bodyPr wrap="square">
-            <a:normAutofit/>
+            <a:noAutofit/>
           </a:bodyPr>
           <a:lstStyle/>
           <a:p>
@@ -13017,7 +13017,7 @@
         </p:spPr>
         <p:txBody>
           <a:bodyPr wrap="square">
-            <a:normAutofit/>
+            <a:noAutofit/>
           </a:bodyPr>
           <a:lstStyle/>
           <a:p>
@@ -13183,7 +13183,7 @@
         </p:spPr>
         <p:txBody>
           <a:bodyPr wrap="square">
-            <a:normAutofit/>
+            <a:noAutofit/>
           </a:bodyPr>
           <a:lstStyle/>
           <a:p>
@@ -13218,7 +13218,7 @@
         </p:spPr>
         <p:txBody>
           <a:bodyPr wrap="square">
-            <a:normAutofit/>
+            <a:noAutofit/>
           </a:bodyPr>
           <a:lstStyle/>
           <a:p>
@@ -13339,7 +13339,7 @@
         </p:spPr>
         <p:txBody>
           <a:bodyPr wrap="square">
-            <a:normAutofit/>
+            <a:noAutofit/>
           </a:bodyPr>
           <a:lstStyle/>
           <a:p>
@@ -13374,7 +13374,7 @@
         </p:spPr>
         <p:txBody>
           <a:bodyPr wrap="square">
-            <a:normAutofit/>
+            <a:noAutofit/>
           </a:bodyPr>
           <a:lstStyle/>
           <a:p>
@@ -13452,7 +13452,7 @@
         </p:spPr>
         <p:txBody>
           <a:bodyPr wrap="square">
-            <a:normAutofit/>
+            <a:noAutofit/>
           </a:bodyPr>
           <a:lstStyle/>
           <a:p>
@@ -13487,7 +13487,7 @@
         </p:spPr>
         <p:txBody>
           <a:bodyPr wrap="square">
-            <a:normAutofit/>
+            <a:noAutofit/>
           </a:bodyPr>
           <a:lstStyle/>
           <a:p>
@@ -13565,7 +13565,7 @@
         </p:spPr>
         <p:txBody>
           <a:bodyPr wrap="square">
-            <a:normAutofit/>
+            <a:noAutofit/>
           </a:bodyPr>
           <a:lstStyle/>
           <a:p>
@@ -13600,7 +13600,7 @@
         </p:spPr>
         <p:txBody>
           <a:bodyPr wrap="square">
-            <a:normAutofit/>
+            <a:noAutofit/>
           </a:bodyPr>
           <a:lstStyle/>
           <a:p>
@@ -13678,7 +13678,7 @@
         </p:spPr>
         <p:txBody>
           <a:bodyPr wrap="square">
-            <a:normAutofit/>
+            <a:noAutofit/>
           </a:bodyPr>
           <a:lstStyle/>
           <a:p>
@@ -13713,7 +13713,7 @@
         </p:spPr>
         <p:txBody>
           <a:bodyPr wrap="square">
-            <a:normAutofit/>
+            <a:noAutofit/>
           </a:bodyPr>
           <a:lstStyle/>
           <a:p>
@@ -13791,7 +13791,7 @@
         </p:spPr>
         <p:txBody>
           <a:bodyPr wrap="square">
-            <a:normAutofit/>
+            <a:noAutofit/>
           </a:bodyPr>
           <a:lstStyle/>
           <a:p>
@@ -13826,7 +13826,7 @@
         </p:spPr>
         <p:txBody>
           <a:bodyPr wrap="square">
-            <a:normAutofit/>
+            <a:noAutofit/>
           </a:bodyPr>
           <a:lstStyle/>
           <a:p>
@@ -13904,7 +13904,7 @@
         </p:spPr>
         <p:txBody>
           <a:bodyPr wrap="square">
-            <a:normAutofit/>
+            <a:noAutofit/>
           </a:bodyPr>
           <a:lstStyle/>
           <a:p>
@@ -13939,7 +13939,7 @@
         </p:spPr>
         <p:txBody>
           <a:bodyPr wrap="square">
-            <a:normAutofit/>
+            <a:noAutofit/>
           </a:bodyPr>
           <a:lstStyle/>
           <a:p>
@@ -14017,7 +14017,7 @@
         </p:spPr>
         <p:txBody>
           <a:bodyPr wrap="square">
-            <a:normAutofit/>
+            <a:noAutofit/>
           </a:bodyPr>
           <a:lstStyle/>
           <a:p>
@@ -14052,7 +14052,7 @@
         </p:spPr>
         <p:txBody>
           <a:bodyPr wrap="square">
-            <a:normAutofit/>
+            <a:noAutofit/>
           </a:bodyPr>
           <a:lstStyle/>
           <a:p>
@@ -14130,7 +14130,7 @@
         </p:spPr>
         <p:txBody>
           <a:bodyPr wrap="square">
-            <a:normAutofit/>
+            <a:noAutofit/>
           </a:bodyPr>
           <a:lstStyle/>
           <a:p>
@@ -14165,7 +14165,7 @@
         </p:spPr>
         <p:txBody>
           <a:bodyPr wrap="square">
-            <a:normAutofit/>
+            <a:noAutofit/>
           </a:bodyPr>
           <a:lstStyle/>
           <a:p>
@@ -14243,7 +14243,7 @@
         </p:spPr>
         <p:txBody>
           <a:bodyPr wrap="square">
-            <a:normAutofit/>
+            <a:noAutofit/>
           </a:bodyPr>
           <a:lstStyle/>
           <a:p>
@@ -14278,7 +14278,7 @@
         </p:spPr>
         <p:txBody>
           <a:bodyPr wrap="square">
-            <a:normAutofit/>
+            <a:noAutofit/>
           </a:bodyPr>
           <a:lstStyle/>
           <a:p>
@@ -14356,7 +14356,7 @@
         </p:spPr>
         <p:txBody>
           <a:bodyPr wrap="square">
-            <a:normAutofit/>
+            <a:noAutofit/>
           </a:bodyPr>
           <a:lstStyle/>
           <a:p>
@@ -14391,7 +14391,7 @@
         </p:spPr>
         <p:txBody>
           <a:bodyPr wrap="square">
-            <a:normAutofit/>
+            <a:noAutofit/>
           </a:bodyPr>
           <a:lstStyle/>
           <a:p>
@@ -14469,7 +14469,7 @@
         </p:spPr>
         <p:txBody>
           <a:bodyPr wrap="square">
-            <a:normAutofit/>
+            <a:noAutofit/>
           </a:bodyPr>
           <a:lstStyle/>
           <a:p>
@@ -14504,7 +14504,7 @@
         </p:spPr>
         <p:txBody>
           <a:bodyPr wrap="square">
-            <a:normAutofit/>
+            <a:noAutofit/>
           </a:bodyPr>
           <a:lstStyle/>
           <a:p>
@@ -14582,7 +14582,7 @@
         </p:spPr>
         <p:txBody>
           <a:bodyPr wrap="square">
-            <a:normAutofit/>
+            <a:noAutofit/>
           </a:bodyPr>
           <a:lstStyle/>
           <a:p>
@@ -14617,7 +14617,7 @@
         </p:spPr>
         <p:txBody>
           <a:bodyPr wrap="square">
-            <a:normAutofit/>
+            <a:noAutofit/>
           </a:bodyPr>
           <a:lstStyle/>
           <a:p>
@@ -14695,7 +14695,7 @@
         </p:spPr>
         <p:txBody>
           <a:bodyPr wrap="square">
-            <a:normAutofit/>
+            <a:noAutofit/>
           </a:bodyPr>
           <a:lstStyle/>
           <a:p>
@@ -14730,7 +14730,7 @@
         </p:spPr>
         <p:txBody>
           <a:bodyPr wrap="square">
-            <a:normAutofit/>
+            <a:noAutofit/>
           </a:bodyPr>
           <a:lstStyle/>
           <a:p>
@@ -14808,7 +14808,7 @@
         </p:spPr>
         <p:txBody>
           <a:bodyPr wrap="square">
-            <a:normAutofit/>
+            <a:noAutofit/>
           </a:bodyPr>
           <a:lstStyle/>
           <a:p>
@@ -14843,7 +14843,7 @@
         </p:spPr>
         <p:txBody>
           <a:bodyPr wrap="square">
-            <a:normAutofit/>
+            <a:noAutofit/>
           </a:bodyPr>
           <a:lstStyle/>
           <a:p>
@@ -14921,7 +14921,7 @@
         </p:spPr>
         <p:txBody>
           <a:bodyPr wrap="square">
-            <a:normAutofit/>
+            <a:noAutofit/>
           </a:bodyPr>
           <a:lstStyle/>
           <a:p>
@@ -14956,7 +14956,7 @@
         </p:spPr>
         <p:txBody>
           <a:bodyPr wrap="square">
-            <a:normAutofit/>
+            <a:noAutofit/>
           </a:bodyPr>
           <a:lstStyle/>
           <a:p>
@@ -15034,7 +15034,7 @@
         </p:spPr>
         <p:txBody>
           <a:bodyPr wrap="square">
-            <a:normAutofit/>
+            <a:noAutofit/>
           </a:bodyPr>
           <a:lstStyle/>
           <a:p>
@@ -15069,7 +15069,7 @@
         </p:spPr>
         <p:txBody>
           <a:bodyPr wrap="square">
-            <a:normAutofit/>
+            <a:noAutofit/>
           </a:bodyPr>
           <a:lstStyle/>
           <a:p>
@@ -15192,7 +15192,7 @@
         </p:spPr>
         <p:txBody>
           <a:bodyPr wrap="square">
-            <a:normAutofit/>
+            <a:noAutofit/>
           </a:bodyPr>
           <a:lstStyle/>
           <a:p>
@@ -15227,7 +15227,7 @@
         </p:spPr>
         <p:txBody>
           <a:bodyPr wrap="square">
-            <a:normAutofit/>
+            <a:noAutofit/>
           </a:bodyPr>
           <a:lstStyle/>
           <a:p>
@@ -15348,7 +15348,7 @@
         </p:spPr>
         <p:txBody>
           <a:bodyPr wrap="square">
-            <a:normAutofit/>
+            <a:noAutofit/>
           </a:bodyPr>
           <a:lstStyle/>
           <a:p>
@@ -15383,7 +15383,7 @@
         </p:spPr>
         <p:txBody>
           <a:bodyPr wrap="square">
-            <a:normAutofit/>
+            <a:noAutofit/>
           </a:bodyPr>
           <a:lstStyle/>
           <a:p>
@@ -15461,7 +15461,7 @@
         </p:spPr>
         <p:txBody>
           <a:bodyPr wrap="square">
-            <a:normAutofit/>
+            <a:noAutofit/>
           </a:bodyPr>
           <a:lstStyle/>
           <a:p>
@@ -15496,7 +15496,7 @@
         </p:spPr>
         <p:txBody>
           <a:bodyPr wrap="square">
-            <a:normAutofit/>
+            <a:noAutofit/>
           </a:bodyPr>
           <a:lstStyle/>
           <a:p>
@@ -15574,7 +15574,7 @@
         </p:spPr>
         <p:txBody>
           <a:bodyPr wrap="square">
-            <a:normAutofit/>
+            <a:noAutofit/>
           </a:bodyPr>
           <a:lstStyle/>
           <a:p>
@@ -15609,7 +15609,7 @@
         </p:spPr>
         <p:txBody>
           <a:bodyPr wrap="square">
-            <a:normAutofit/>
+            <a:noAutofit/>
           </a:bodyPr>
           <a:lstStyle/>
           <a:p>
@@ -15687,7 +15687,7 @@
         </p:spPr>
         <p:txBody>
           <a:bodyPr wrap="square">
-            <a:normAutofit/>
+            <a:noAutofit/>
           </a:bodyPr>
           <a:lstStyle/>
           <a:p>
@@ -15722,7 +15722,7 @@
         </p:spPr>
         <p:txBody>
           <a:bodyPr wrap="square">
-            <a:normAutofit/>
+            <a:noAutofit/>
           </a:bodyPr>
           <a:lstStyle/>
           <a:p>
@@ -15800,7 +15800,7 @@
         </p:spPr>
         <p:txBody>
           <a:bodyPr wrap="square">
-            <a:normAutofit/>
+            <a:noAutofit/>
           </a:bodyPr>
           <a:lstStyle/>
           <a:p>
@@ -15835,7 +15835,7 @@
         </p:spPr>
         <p:txBody>
           <a:bodyPr wrap="square">
-            <a:normAutofit/>
+            <a:noAutofit/>
           </a:bodyPr>
           <a:lstStyle/>
           <a:p>
@@ -15913,7 +15913,7 @@
         </p:spPr>
         <p:txBody>
           <a:bodyPr wrap="square">
-            <a:normAutofit/>
+            <a:noAutofit/>
           </a:bodyPr>
           <a:lstStyle/>
           <a:p>
@@ -15948,7 +15948,7 @@
         </p:spPr>
         <p:txBody>
           <a:bodyPr wrap="square">
-            <a:normAutofit/>
+            <a:noAutofit/>
           </a:bodyPr>
           <a:lstStyle/>
           <a:p>
@@ -16026,7 +16026,7 @@
         </p:spPr>
         <p:txBody>
           <a:bodyPr wrap="square">
-            <a:normAutofit/>
+            <a:noAutofit/>
           </a:bodyPr>
           <a:lstStyle/>
           <a:p>
@@ -16061,7 +16061,7 @@
         </p:spPr>
         <p:txBody>
           <a:bodyPr wrap="square">
-            <a:normAutofit/>
+            <a:noAutofit/>
           </a:bodyPr>
           <a:lstStyle/>
           <a:p>
@@ -16139,7 +16139,7 @@
         </p:spPr>
         <p:txBody>
           <a:bodyPr wrap="square">
-            <a:normAutofit/>
+            <a:noAutofit/>
           </a:bodyPr>
           <a:lstStyle/>
           <a:p>
@@ -16174,7 +16174,7 @@
         </p:spPr>
         <p:txBody>
           <a:bodyPr wrap="square">
-            <a:normAutofit/>
+            <a:noAutofit/>
           </a:bodyPr>
           <a:lstStyle/>
           <a:p>
@@ -16252,7 +16252,7 @@
         </p:spPr>
         <p:txBody>
           <a:bodyPr wrap="square">
-            <a:normAutofit/>
+            <a:noAutofit/>
           </a:bodyPr>
           <a:lstStyle/>
           <a:p>
@@ -16287,7 +16287,7 @@
         </p:spPr>
         <p:txBody>
           <a:bodyPr wrap="square">
-            <a:normAutofit/>
+            <a:noAutofit/>
           </a:bodyPr>
           <a:lstStyle/>
           <a:p>
@@ -16365,7 +16365,7 @@
         </p:spPr>
         <p:txBody>
           <a:bodyPr wrap="square">
-            <a:normAutofit/>
+            <a:noAutofit/>
           </a:bodyPr>
           <a:lstStyle/>
           <a:p>
@@ -16400,7 +16400,7 @@
         </p:spPr>
         <p:txBody>
           <a:bodyPr wrap="square">
-            <a:normAutofit/>
+            <a:noAutofit/>
           </a:bodyPr>
           <a:lstStyle/>
           <a:p>
@@ -16523,7 +16523,7 @@
         </p:spPr>
         <p:txBody>
           <a:bodyPr wrap="square">
-            <a:normAutofit/>
+            <a:noAutofit/>
           </a:bodyPr>
           <a:lstStyle/>
           <a:p>
@@ -16558,7 +16558,7 @@
         </p:spPr>
         <p:txBody>
           <a:bodyPr wrap="square">
-            <a:normAutofit/>
+            <a:noAutofit/>
           </a:bodyPr>
           <a:lstStyle/>
           <a:p>
@@ -16679,7 +16679,7 @@
         </p:spPr>
         <p:txBody>
           <a:bodyPr wrap="square">
-            <a:normAutofit/>
+            <a:noAutofit/>
           </a:bodyPr>
           <a:lstStyle/>
           <a:p>
@@ -16714,7 +16714,7 @@
         </p:spPr>
         <p:txBody>
           <a:bodyPr wrap="square">
-            <a:normAutofit/>
+            <a:noAutofit/>
           </a:bodyPr>
           <a:lstStyle/>
           <a:p>
@@ -16792,7 +16792,7 @@
         </p:spPr>
         <p:txBody>
           <a:bodyPr wrap="square">
-            <a:normAutofit/>
+            <a:noAutofit/>
           </a:bodyPr>
           <a:lstStyle/>
           <a:p>
@@ -16827,7 +16827,7 @@
         </p:spPr>
         <p:txBody>
           <a:bodyPr wrap="square">
-            <a:normAutofit/>
+            <a:noAutofit/>
           </a:bodyPr>
           <a:lstStyle/>
           <a:p>
@@ -16905,7 +16905,7 @@
         </p:spPr>
         <p:txBody>
           <a:bodyPr wrap="square">
-            <a:normAutofit/>
+            <a:noAutofit/>
           </a:bodyPr>
           <a:lstStyle/>
           <a:p>
@@ -16940,7 +16940,7 @@
         </p:spPr>
         <p:txBody>
           <a:bodyPr wrap="square">
-            <a:normAutofit/>
+            <a:noAutofit/>
           </a:bodyPr>
           <a:lstStyle/>
           <a:p>
@@ -17018,7 +17018,7 @@
         </p:spPr>
         <p:txBody>
           <a:bodyPr wrap="square">
-            <a:normAutofit/>
+            <a:noAutofit/>
           </a:bodyPr>
           <a:lstStyle/>
           <a:p>
@@ -17053,7 +17053,7 @@
         </p:spPr>
         <p:txBody>
           <a:bodyPr wrap="square">
-            <a:normAutofit/>
+            <a:noAutofit/>
           </a:bodyPr>
           <a:lstStyle/>
           <a:p>
@@ -17131,7 +17131,7 @@
         </p:spPr>
         <p:txBody>
           <a:bodyPr wrap="square">
-            <a:normAutofit/>
+            <a:noAutofit/>
           </a:bodyPr>
           <a:lstStyle/>
           <a:p>
@@ -17166,7 +17166,7 @@
         </p:spPr>
         <p:txBody>
           <a:bodyPr wrap="square">
-            <a:normAutofit/>
+            <a:noAutofit/>
           </a:bodyPr>
           <a:lstStyle/>
           <a:p>
@@ -17244,7 +17244,7 @@
         </p:spPr>
         <p:txBody>
           <a:bodyPr wrap="square">
-            <a:normAutofit/>
+            <a:noAutofit/>
           </a:bodyPr>
           <a:lstStyle/>
           <a:p>
@@ -17279,7 +17279,7 @@
         </p:spPr>
         <p:txBody>
           <a:bodyPr wrap="square">
-            <a:normAutofit/>
+            <a:noAutofit/>
           </a:bodyPr>
           <a:lstStyle/>
           <a:p>
@@ -17357,7 +17357,7 @@
         </p:spPr>
         <p:txBody>
           <a:bodyPr wrap="square">
-            <a:normAutofit/>
+            <a:noAutofit/>
           </a:bodyPr>
           <a:lstStyle/>
           <a:p>
@@ -17392,7 +17392,7 @@
         </p:spPr>
         <p:txBody>
           <a:bodyPr wrap="square">
-            <a:normAutofit/>
+            <a:noAutofit/>
           </a:bodyPr>
           <a:lstStyle/>
           <a:p>
@@ -17470,7 +17470,7 @@
         </p:spPr>
         <p:txBody>
           <a:bodyPr wrap="square">
-            <a:normAutofit/>
+            <a:noAutofit/>
           </a:bodyPr>
           <a:lstStyle/>
           <a:p>
@@ -17505,7 +17505,7 @@
         </p:spPr>
         <p:txBody>
           <a:bodyPr wrap="square">
-            <a:normAutofit/>
+            <a:noAutofit/>
           </a:bodyPr>
           <a:lstStyle/>
           <a:p>
@@ -17583,7 +17583,7 @@
         </p:spPr>
         <p:txBody>
           <a:bodyPr wrap="square">
-            <a:normAutofit/>
+            <a:noAutofit/>
           </a:bodyPr>
           <a:lstStyle/>
           <a:p>
@@ -17618,7 +17618,7 @@
         </p:spPr>
         <p:txBody>
           <a:bodyPr wrap="square">
-            <a:normAutofit/>
+            <a:noAutofit/>
           </a:bodyPr>
           <a:lstStyle/>
           <a:p>
@@ -17696,7 +17696,7 @@
         </p:spPr>
         <p:txBody>
           <a:bodyPr wrap="square">
-            <a:normAutofit/>
+            <a:noAutofit/>
           </a:bodyPr>
           <a:lstStyle/>
           <a:p>
@@ -17731,7 +17731,7 @@
         </p:spPr>
         <p:txBody>
           <a:bodyPr wrap="square">
-            <a:normAutofit/>
+            <a:noAutofit/>
           </a:bodyPr>
           <a:lstStyle/>
           <a:p>
@@ -17809,7 +17809,7 @@
         </p:spPr>
         <p:txBody>
           <a:bodyPr wrap="square">
-            <a:normAutofit/>
+            <a:noAutofit/>
           </a:bodyPr>
           <a:lstStyle/>
           <a:p>
@@ -17844,7 +17844,7 @@
         </p:spPr>
         <p:txBody>
           <a:bodyPr wrap="square">
-            <a:normAutofit/>
+            <a:noAutofit/>
           </a:bodyPr>
           <a:lstStyle/>
           <a:p>
@@ -17922,7 +17922,7 @@
         </p:spPr>
         <p:txBody>
           <a:bodyPr wrap="square">
-            <a:normAutofit/>
+            <a:noAutofit/>
           </a:bodyPr>
           <a:lstStyle/>
           <a:p>
@@ -17957,7 +17957,7 @@
         </p:spPr>
         <p:txBody>
           <a:bodyPr wrap="square">
-            <a:normAutofit/>
+            <a:noAutofit/>
           </a:bodyPr>
           <a:lstStyle/>
           <a:p>
@@ -17992,7 +17992,7 @@
         </p:spPr>
         <p:txBody>
           <a:bodyPr wrap="square">
-            <a:normAutofit/>
+            <a:noAutofit/>
           </a:bodyPr>
           <a:lstStyle/>
           <a:p>
@@ -18070,7 +18070,7 @@
         </p:spPr>
         <p:txBody>
           <a:bodyPr wrap="square">
-            <a:normAutofit/>
+            <a:noAutofit/>
           </a:bodyPr>
           <a:lstStyle/>
           <a:p>
@@ -18105,7 +18105,7 @@
         </p:spPr>
         <p:txBody>
           <a:bodyPr wrap="square">
-            <a:normAutofit/>
+            <a:noAutofit/>
           </a:bodyPr>
           <a:lstStyle/>
           <a:p>
@@ -18244,7 +18244,7 @@
         </p:spPr>
         <p:txBody>
           <a:bodyPr wrap="square">
-            <a:normAutofit/>
+            <a:noAutofit/>
           </a:bodyPr>
           <a:lstStyle/>
           <a:p>
@@ -18279,7 +18279,7 @@
         </p:spPr>
         <p:txBody>
           <a:bodyPr wrap="square">
-            <a:normAutofit/>
+            <a:noAutofit/>
           </a:bodyPr>
           <a:lstStyle/>
           <a:p>
@@ -18443,7 +18443,7 @@
         </p:spPr>
         <p:txBody>
           <a:bodyPr wrap="square">
-            <a:normAutofit/>
+            <a:noAutofit/>
           </a:bodyPr>
           <a:lstStyle/>
           <a:p>
@@ -18478,7 +18478,7 @@
         </p:spPr>
         <p:txBody>
           <a:bodyPr wrap="square">
-            <a:normAutofit/>
+            <a:noAutofit/>
           </a:bodyPr>
           <a:lstStyle/>
           <a:p>
@@ -18600,7 +18600,7 @@
         </p:spPr>
         <p:txBody>
           <a:bodyPr wrap="square">
-            <a:normAutofit/>
+            <a:noAutofit/>
           </a:bodyPr>
           <a:lstStyle/>
           <a:p>
@@ -18635,7 +18635,7 @@
         </p:spPr>
         <p:txBody>
           <a:bodyPr wrap="square">
-            <a:normAutofit/>
+            <a:noAutofit/>
           </a:bodyPr>
           <a:lstStyle/>
           <a:p>
@@ -18757,7 +18757,7 @@
         </p:spPr>
         <p:txBody>
           <a:bodyPr wrap="square">
-            <a:normAutofit/>
+            <a:noAutofit/>
           </a:bodyPr>
           <a:lstStyle/>
           <a:p>
@@ -18792,7 +18792,7 @@
         </p:spPr>
         <p:txBody>
           <a:bodyPr wrap="square">
-            <a:normAutofit/>
+            <a:noAutofit/>
           </a:bodyPr>
           <a:lstStyle/>
           <a:p>
@@ -18914,7 +18914,7 @@
         </p:spPr>
         <p:txBody>
           <a:bodyPr wrap="square">
-            <a:normAutofit/>
+            <a:noAutofit/>
           </a:bodyPr>
           <a:lstStyle/>
           <a:p>
@@ -18949,7 +18949,7 @@
         </p:spPr>
         <p:txBody>
           <a:bodyPr wrap="square">
-            <a:normAutofit/>
+            <a:noAutofit/>
           </a:bodyPr>
           <a:lstStyle/>
           <a:p>
@@ -19071,7 +19071,7 @@
         </p:spPr>
         <p:txBody>
           <a:bodyPr wrap="square">
-            <a:normAutofit/>
+            <a:noAutofit/>
           </a:bodyPr>
           <a:lstStyle/>
           <a:p>
@@ -19106,7 +19106,7 @@
         </p:spPr>
         <p:txBody>
           <a:bodyPr wrap="square">
-            <a:normAutofit/>
+            <a:noAutofit/>
           </a:bodyPr>
           <a:lstStyle/>
           <a:p>
@@ -19228,7 +19228,7 @@
         </p:spPr>
         <p:txBody>
           <a:bodyPr wrap="square">
-            <a:normAutofit/>
+            <a:noAutofit/>
           </a:bodyPr>
           <a:lstStyle/>
           <a:p>
@@ -19263,7 +19263,7 @@
         </p:spPr>
         <p:txBody>
           <a:bodyPr wrap="square">
-            <a:normAutofit/>
+            <a:noAutofit/>
           </a:bodyPr>
           <a:lstStyle/>
           <a:p>
@@ -19342,7 +19342,7 @@
         </p:spPr>
         <p:txBody>
           <a:bodyPr wrap="square">
-            <a:normAutofit/>
+            <a:noAutofit/>
           </a:bodyPr>
           <a:lstStyle/>
           <a:p>
@@ -19420,7 +19420,7 @@
         </p:spPr>
         <p:txBody>
           <a:bodyPr wrap="square">
-            <a:normAutofit/>
+            <a:noAutofit/>
           </a:bodyPr>
           <a:lstStyle/>
           <a:p>
@@ -19498,7 +19498,7 @@
         </p:spPr>
         <p:txBody>
           <a:bodyPr wrap="square">
-            <a:normAutofit/>
+            <a:noAutofit/>
           </a:bodyPr>
           <a:lstStyle/>
           <a:p>
@@ -19576,7 +19576,7 @@
         </p:spPr>
         <p:txBody>
           <a:bodyPr wrap="square">
-            <a:normAutofit/>
+            <a:noAutofit/>
           </a:bodyPr>
           <a:lstStyle/>
           <a:p>
@@ -19654,7 +19654,7 @@
         </p:spPr>
         <p:txBody>
           <a:bodyPr wrap="square">
-            <a:normAutofit/>
+            <a:noAutofit/>
           </a:bodyPr>
           <a:lstStyle/>
           <a:p>
@@ -19732,7 +19732,7 @@
         </p:spPr>
         <p:txBody>
           <a:bodyPr wrap="square">
-            <a:normAutofit/>
+            <a:noAutofit/>
           </a:bodyPr>
           <a:lstStyle/>
           <a:p>
@@ -19810,7 +19810,7 @@
         </p:spPr>
         <p:txBody>
           <a:bodyPr wrap="square">
-            <a:normAutofit/>
+            <a:noAutofit/>
           </a:bodyPr>
           <a:lstStyle/>
           <a:p>
@@ -19845,7 +19845,7 @@
         </p:spPr>
         <p:txBody>
           <a:bodyPr wrap="square">
-            <a:normAutofit/>
+            <a:noAutofit/>
           </a:bodyPr>
           <a:lstStyle/>
           <a:p>
@@ -19991,7 +19991,7 @@
         </p:spPr>
         <p:txBody>
           <a:bodyPr wrap="square">
-            <a:normAutofit/>
+            <a:noAutofit/>
           </a:bodyPr>
           <a:lstStyle/>
           <a:p>
@@ -20026,7 +20026,7 @@
         </p:spPr>
         <p:txBody>
           <a:bodyPr wrap="square">
-            <a:normAutofit/>
+            <a:noAutofit/>
           </a:bodyPr>
           <a:lstStyle/>
           <a:p>
@@ -20104,7 +20104,7 @@
         </p:spPr>
         <p:txBody>
           <a:bodyPr wrap="square">
-            <a:normAutofit/>
+            <a:noAutofit/>
           </a:bodyPr>
           <a:lstStyle/>
           <a:p>
@@ -20139,7 +20139,7 @@
         </p:spPr>
         <p:txBody>
           <a:bodyPr wrap="square">
-            <a:normAutofit/>
+            <a:noAutofit/>
           </a:bodyPr>
           <a:lstStyle/>
           <a:p>
@@ -20217,7 +20217,7 @@
         </p:spPr>
         <p:txBody>
           <a:bodyPr wrap="square">
-            <a:normAutofit/>
+            <a:noAutofit/>
           </a:bodyPr>
           <a:lstStyle/>
           <a:p>
@@ -20252,7 +20252,7 @@
         </p:spPr>
         <p:txBody>
           <a:bodyPr wrap="square">
-            <a:normAutofit/>
+            <a:noAutofit/>
           </a:bodyPr>
           <a:lstStyle/>
           <a:p>
@@ -20287,7 +20287,7 @@
         </p:spPr>
         <p:txBody>
           <a:bodyPr wrap="square">
-            <a:normAutofit/>
+            <a:noAutofit/>
           </a:bodyPr>
           <a:lstStyle/>
           <a:p>
@@ -20322,7 +20322,7 @@
         </p:spPr>
         <p:txBody>
           <a:bodyPr wrap="square">
-            <a:normAutofit/>
+            <a:noAutofit/>
           </a:bodyPr>
           <a:lstStyle/>
           <a:p>
@@ -20357,7 +20357,7 @@
         </p:spPr>
         <p:txBody>
           <a:bodyPr wrap="square">
-            <a:normAutofit/>
+            <a:noAutofit/>
           </a:bodyPr>
           <a:lstStyle/>
           <a:p>
@@ -20496,7 +20496,7 @@
         </p:spPr>
         <p:txBody>
           <a:bodyPr wrap="square">
-            <a:normAutofit/>
+            <a:noAutofit/>
           </a:bodyPr>
           <a:lstStyle/>
           <a:p>
@@ -20531,7 +20531,7 @@
         </p:spPr>
         <p:txBody>
           <a:bodyPr wrap="square">
-            <a:normAutofit/>
+            <a:noAutofit/>
           </a:bodyPr>
           <a:lstStyle/>
           <a:p>
@@ -20609,7 +20609,7 @@
         </p:spPr>
         <p:txBody>
           <a:bodyPr wrap="square">
-            <a:normAutofit/>
+            <a:noAutofit/>
           </a:bodyPr>
           <a:lstStyle/>
           <a:p>
@@ -20644,7 +20644,7 @@
         </p:spPr>
         <p:txBody>
           <a:bodyPr wrap="square">
-            <a:normAutofit/>
+            <a:noAutofit/>
           </a:bodyPr>
           <a:lstStyle/>
           <a:p>
@@ -20811,7 +20811,7 @@
         </p:spPr>
         <p:txBody>
           <a:bodyPr wrap="square">
-            <a:normAutofit/>
+            <a:noAutofit/>
           </a:bodyPr>
           <a:lstStyle/>
           <a:p>
@@ -20891,7 +20891,7 @@
         </p:spPr>
         <p:txBody>
           <a:bodyPr wrap="square">
-            <a:normAutofit/>
+            <a:noAutofit/>
           </a:bodyPr>
           <a:lstStyle/>
           <a:p>
@@ -20926,7 +20926,7 @@
         </p:spPr>
         <p:txBody>
           <a:bodyPr wrap="square">
-            <a:normAutofit/>
+            <a:noAutofit/>
           </a:bodyPr>
           <a:lstStyle/>
           <a:p>
@@ -21006,7 +21006,7 @@
         </p:spPr>
         <p:txBody>
           <a:bodyPr wrap="square">
-            <a:normAutofit/>
+            <a:noAutofit/>
           </a:bodyPr>
           <a:lstStyle/>
           <a:p>
@@ -21041,7 +21041,7 @@
         </p:spPr>
         <p:txBody>
           <a:bodyPr wrap="square">
-            <a:normAutofit/>
+            <a:noAutofit/>
           </a:bodyPr>
           <a:lstStyle/>
           <a:p>
@@ -21121,7 +21121,7 @@
         </p:spPr>
         <p:txBody>
           <a:bodyPr wrap="square">
-            <a:normAutofit/>
+            <a:noAutofit/>
           </a:bodyPr>
           <a:lstStyle/>
           <a:p>
@@ -21156,7 +21156,7 @@
         </p:spPr>
         <p:txBody>
           <a:bodyPr wrap="square">
-            <a:normAutofit/>
+            <a:noAutofit/>
           </a:bodyPr>
           <a:lstStyle/>
           <a:p>
@@ -21236,7 +21236,7 @@
         </p:spPr>
         <p:txBody>
           <a:bodyPr wrap="square">
-            <a:normAutofit/>
+            <a:noAutofit/>
           </a:bodyPr>
           <a:lstStyle/>
           <a:p>
@@ -21271,7 +21271,7 @@
         </p:spPr>
         <p:txBody>
           <a:bodyPr wrap="square">
-            <a:normAutofit/>
+            <a:noAutofit/>
           </a:bodyPr>
           <a:lstStyle/>
           <a:p>
@@ -21351,7 +21351,7 @@
         </p:spPr>
         <p:txBody>
           <a:bodyPr wrap="square">
-            <a:normAutofit/>
+            <a:noAutofit/>
           </a:bodyPr>
           <a:lstStyle/>
           <a:p>
@@ -21386,7 +21386,7 @@
         </p:spPr>
         <p:txBody>
           <a:bodyPr wrap="square">
-            <a:normAutofit/>
+            <a:noAutofit/>
           </a:bodyPr>
           <a:lstStyle/>
           <a:p>
@@ -21466,7 +21466,7 @@
         </p:spPr>
         <p:txBody>
           <a:bodyPr wrap="square">
-            <a:normAutofit/>
+            <a:noAutofit/>
           </a:bodyPr>
           <a:lstStyle/>
           <a:p>
@@ -21501,7 +21501,7 @@
         </p:spPr>
         <p:txBody>
           <a:bodyPr wrap="square">
-            <a:normAutofit/>
+            <a:noAutofit/>
           </a:bodyPr>
           <a:lstStyle/>
           <a:p>
@@ -21581,7 +21581,7 @@
         </p:spPr>
         <p:txBody>
           <a:bodyPr wrap="square">
-            <a:normAutofit/>
+            <a:noAutofit/>
           </a:bodyPr>
           <a:lstStyle/>
           <a:p>
@@ -21616,7 +21616,7 @@
         </p:spPr>
         <p:txBody>
           <a:bodyPr wrap="square">
-            <a:normAutofit/>
+            <a:noAutofit/>
           </a:bodyPr>
           <a:lstStyle/>
           <a:p>
@@ -21696,7 +21696,7 @@
         </p:spPr>
         <p:txBody>
           <a:bodyPr wrap="square">
-            <a:normAutofit/>
+            <a:noAutofit/>
           </a:bodyPr>
           <a:lstStyle/>
           <a:p>
@@ -21731,7 +21731,7 @@
         </p:spPr>
         <p:txBody>
           <a:bodyPr wrap="square">
-            <a:normAutofit/>
+            <a:noAutofit/>
           </a:bodyPr>
           <a:lstStyle/>
           <a:p>
@@ -21809,7 +21809,7 @@
         </p:spPr>
         <p:txBody>
           <a:bodyPr wrap="square">
-            <a:normAutofit/>
+            <a:noAutofit/>
           </a:bodyPr>
           <a:lstStyle/>
           <a:p>
@@ -21844,7 +21844,7 @@
         </p:spPr>
         <p:txBody>
           <a:bodyPr wrap="square">
-            <a:normAutofit/>
+            <a:noAutofit/>
           </a:bodyPr>
           <a:lstStyle/>
           <a:p>
@@ -21879,7 +21879,7 @@
         </p:spPr>
         <p:txBody>
           <a:bodyPr wrap="square">
-            <a:normAutofit/>
+            <a:noAutofit/>
           </a:bodyPr>
           <a:lstStyle/>
           <a:p>
@@ -21914,7 +21914,7 @@
         </p:spPr>
         <p:txBody>
           <a:bodyPr wrap="square">
-            <a:normAutofit/>
+            <a:noAutofit/>
           </a:bodyPr>
           <a:lstStyle/>
           <a:p>
@@ -21992,7 +21992,7 @@
         </p:spPr>
         <p:txBody>
           <a:bodyPr wrap="square">
-            <a:normAutofit/>
+            <a:noAutofit/>
           </a:bodyPr>
           <a:lstStyle/>
           <a:p>
@@ -22027,7 +22027,7 @@
         </p:spPr>
         <p:txBody>
           <a:bodyPr wrap="square">
-            <a:normAutofit/>
+            <a:noAutofit/>
           </a:bodyPr>
           <a:lstStyle/>
           <a:p>
@@ -22166,7 +22166,7 @@
         </p:spPr>
         <p:txBody>
           <a:bodyPr wrap="square">
-            <a:normAutofit/>
+            <a:noAutofit/>
           </a:bodyPr>
           <a:lstStyle/>
           <a:p>
@@ -22201,7 +22201,7 @@
         </p:spPr>
         <p:txBody>
           <a:bodyPr wrap="square">
-            <a:normAutofit/>
+            <a:noAutofit/>
           </a:bodyPr>
           <a:lstStyle/>
           <a:p>
@@ -22367,7 +22367,7 @@
         </p:spPr>
         <p:txBody>
           <a:bodyPr wrap="square">
-            <a:normAutofit/>
+            <a:noAutofit/>
           </a:bodyPr>
           <a:lstStyle/>
           <a:p>
@@ -22402,7 +22402,7 @@
         </p:spPr>
         <p:txBody>
           <a:bodyPr wrap="square">
-            <a:normAutofit/>
+            <a:noAutofit/>
           </a:bodyPr>
           <a:lstStyle/>
           <a:p>
@@ -22437,7 +22437,7 @@
         </p:spPr>
         <p:txBody>
           <a:bodyPr wrap="square">
-            <a:normAutofit/>
+            <a:noAutofit/>
           </a:bodyPr>
           <a:lstStyle/>
           <a:p>
@@ -22708,7 +22708,7 @@
         </p:spPr>
         <p:txBody>
           <a:bodyPr wrap="square">
-            <a:normAutofit/>
+            <a:noAutofit/>
           </a:bodyPr>
           <a:lstStyle/>
           <a:p>
@@ -22743,7 +22743,7 @@
         </p:spPr>
         <p:txBody>
           <a:bodyPr wrap="square">
-            <a:normAutofit/>
+            <a:noAutofit/>
           </a:bodyPr>
           <a:lstStyle/>
           <a:p>
@@ -22778,7 +22778,7 @@
         </p:spPr>
         <p:txBody>
           <a:bodyPr wrap="square">
-            <a:normAutofit/>
+            <a:noAutofit/>
           </a:bodyPr>
           <a:lstStyle/>
           <a:p>
@@ -22969,7 +22969,7 @@
         </p:spPr>
         <p:txBody>
           <a:bodyPr wrap="square">
-            <a:normAutofit/>
+            <a:noAutofit/>
           </a:bodyPr>
           <a:lstStyle/>
           <a:p>
@@ -23004,7 +23004,7 @@
         </p:spPr>
         <p:txBody>
           <a:bodyPr wrap="square">
-            <a:normAutofit/>
+            <a:noAutofit/>
           </a:bodyPr>
           <a:lstStyle/>
           <a:p>
@@ -23039,7 +23039,7 @@
         </p:spPr>
         <p:txBody>
           <a:bodyPr wrap="square">
-            <a:normAutofit/>
+            <a:noAutofit/>
           </a:bodyPr>
           <a:lstStyle/>
           <a:p>
@@ -23246,7 +23246,7 @@
         </p:spPr>
         <p:txBody>
           <a:bodyPr wrap="square">
-            <a:normAutofit/>
+            <a:noAutofit/>
           </a:bodyPr>
           <a:lstStyle/>
           <a:p>
@@ -23281,7 +23281,7 @@
         </p:spPr>
         <p:txBody>
           <a:bodyPr wrap="square">
-            <a:normAutofit/>
+            <a:noAutofit/>
           </a:bodyPr>
           <a:lstStyle/>
           <a:p>
@@ -23316,7 +23316,7 @@
         </p:spPr>
         <p:txBody>
           <a:bodyPr wrap="square">
-            <a:normAutofit/>
+            <a:noAutofit/>
           </a:bodyPr>
           <a:lstStyle/>
           <a:p>
@@ -23555,7 +23555,7 @@
         </p:spPr>
         <p:txBody>
           <a:bodyPr wrap="square">
-            <a:normAutofit/>
+            <a:noAutofit/>
           </a:bodyPr>
           <a:lstStyle/>
           <a:p>
@@ -23590,7 +23590,7 @@
         </p:spPr>
         <p:txBody>
           <a:bodyPr wrap="square">
-            <a:normAutofit/>
+            <a:noAutofit/>
           </a:bodyPr>
           <a:lstStyle/>
           <a:p>
@@ -23625,7 +23625,7 @@
         </p:spPr>
         <p:txBody>
           <a:bodyPr wrap="square">
-            <a:normAutofit/>
+            <a:noAutofit/>
           </a:bodyPr>
           <a:lstStyle/>
           <a:p>
@@ -23787,7 +23787,7 @@
         </p:spPr>
         <p:txBody>
           <a:bodyPr wrap="square">
-            <a:normAutofit/>
+            <a:noAutofit/>
           </a:bodyPr>
           <a:lstStyle/>
           <a:p>
@@ -23822,7 +23822,7 @@
         </p:spPr>
         <p:txBody>
           <a:bodyPr wrap="square">
-            <a:normAutofit/>
+            <a:noAutofit/>
           </a:bodyPr>
           <a:lstStyle/>
           <a:p>
@@ -23961,7 +23961,7 @@
         </p:spPr>
         <p:txBody>
           <a:bodyPr wrap="square">
-            <a:normAutofit/>
+            <a:noAutofit/>
           </a:bodyPr>
           <a:lstStyle/>
           <a:p>
@@ -23996,7 +23996,7 @@
         </p:spPr>
         <p:txBody>
           <a:bodyPr wrap="square">
-            <a:normAutofit/>
+            <a:noAutofit/>
           </a:bodyPr>
           <a:lstStyle/>
           <a:p>
@@ -24162,7 +24162,7 @@
         </p:spPr>
         <p:txBody>
           <a:bodyPr wrap="square">
-            <a:normAutofit/>
+            <a:noAutofit/>
           </a:bodyPr>
           <a:lstStyle/>
           <a:p>
@@ -24197,7 +24197,7 @@
         </p:spPr>
         <p:txBody>
           <a:bodyPr wrap="square">
-            <a:normAutofit/>
+            <a:noAutofit/>
           </a:bodyPr>
           <a:lstStyle/>
           <a:p>
@@ -24232,7 +24232,7 @@
         </p:spPr>
         <p:txBody>
           <a:bodyPr wrap="square">
-            <a:normAutofit/>
+            <a:noAutofit/>
           </a:bodyPr>
           <a:lstStyle/>
           <a:p>
@@ -24359,7 +24359,7 @@
         </p:spPr>
         <p:txBody>
           <a:bodyPr wrap="square">
-            <a:normAutofit/>
+            <a:noAutofit/>
           </a:bodyPr>
           <a:lstStyle/>
           <a:p>
@@ -24394,7 +24394,7 @@
         </p:spPr>
         <p:txBody>
           <a:bodyPr wrap="square">
-            <a:normAutofit/>
+            <a:noAutofit/>
           </a:bodyPr>
           <a:lstStyle/>
           <a:p>
@@ -24429,7 +24429,7 @@
         </p:spPr>
         <p:txBody>
           <a:bodyPr wrap="square">
-            <a:normAutofit/>
+            <a:noAutofit/>
           </a:bodyPr>
           <a:lstStyle/>
           <a:p>
@@ -24556,7 +24556,7 @@
         </p:spPr>
         <p:txBody>
           <a:bodyPr wrap="square">
-            <a:normAutofit/>
+            <a:noAutofit/>
           </a:bodyPr>
           <a:lstStyle/>
           <a:p>
@@ -24591,7 +24591,7 @@
         </p:spPr>
         <p:txBody>
           <a:bodyPr wrap="square">
-            <a:normAutofit/>
+            <a:noAutofit/>
           </a:bodyPr>
           <a:lstStyle/>
           <a:p>
@@ -24626,7 +24626,7 @@
         </p:spPr>
         <p:txBody>
           <a:bodyPr wrap="square">
-            <a:normAutofit/>
+            <a:noAutofit/>
           </a:bodyPr>
           <a:lstStyle/>
           <a:p>
@@ -24753,7 +24753,7 @@
         </p:spPr>
         <p:txBody>
           <a:bodyPr wrap="square">
-            <a:normAutofit/>
+            <a:noAutofit/>
           </a:bodyPr>
           <a:lstStyle/>
           <a:p>
@@ -24788,7 +24788,7 @@
         </p:spPr>
         <p:txBody>
           <a:bodyPr wrap="square">
-            <a:normAutofit/>
+            <a:noAutofit/>
           </a:bodyPr>
           <a:lstStyle/>
           <a:p>
@@ -24823,7 +24823,7 @@
         </p:spPr>
         <p:txBody>
           <a:bodyPr wrap="square">
-            <a:normAutofit/>
+            <a:noAutofit/>
           </a:bodyPr>
           <a:lstStyle/>
           <a:p>
@@ -24950,7 +24950,7 @@
         </p:spPr>
         <p:txBody>
           <a:bodyPr wrap="square">
-            <a:normAutofit/>
+            <a:noAutofit/>
           </a:bodyPr>
           <a:lstStyle/>
           <a:p>
@@ -24985,7 +24985,7 @@
         </p:spPr>
         <p:txBody>
           <a:bodyPr wrap="square">
-            <a:normAutofit/>
+            <a:noAutofit/>
           </a:bodyPr>
           <a:lstStyle/>
           <a:p>
@@ -25020,7 +25020,7 @@
         </p:spPr>
         <p:txBody>
           <a:bodyPr wrap="square">
-            <a:normAutofit/>
+            <a:noAutofit/>
           </a:bodyPr>
           <a:lstStyle/>
           <a:p>
@@ -25147,7 +25147,7 @@
         </p:spPr>
         <p:txBody>
           <a:bodyPr wrap="square">
-            <a:normAutofit/>
+            <a:noAutofit/>
           </a:bodyPr>
           <a:lstStyle/>
           <a:p>
@@ -25182,7 +25182,7 @@
         </p:spPr>
         <p:txBody>
           <a:bodyPr wrap="square">
-            <a:normAutofit/>
+            <a:noAutofit/>
           </a:bodyPr>
           <a:lstStyle/>
           <a:p>
@@ -25217,7 +25217,7 @@
         </p:spPr>
         <p:txBody>
           <a:bodyPr wrap="square">
-            <a:normAutofit/>
+            <a:noAutofit/>
           </a:bodyPr>
           <a:lstStyle/>
           <a:p>
@@ -25344,7 +25344,7 @@
         </p:spPr>
         <p:txBody>
           <a:bodyPr wrap="square">
-            <a:normAutofit/>
+            <a:noAutofit/>
           </a:bodyPr>
           <a:lstStyle/>
           <a:p>
@@ -25379,7 +25379,7 @@
         </p:spPr>
         <p:txBody>
           <a:bodyPr wrap="square">
-            <a:normAutofit/>
+            <a:noAutofit/>
           </a:bodyPr>
           <a:lstStyle/>
           <a:p>
@@ -25414,7 +25414,7 @@
         </p:spPr>
         <p:txBody>
           <a:bodyPr wrap="square">
-            <a:normAutofit/>
+            <a:noAutofit/>
           </a:bodyPr>
           <a:lstStyle/>
           <a:p>
@@ -25541,7 +25541,7 @@
         </p:spPr>
         <p:txBody>
           <a:bodyPr wrap="square">
-            <a:normAutofit/>
+            <a:noAutofit/>
           </a:bodyPr>
           <a:lstStyle/>
           <a:p>
@@ -25576,7 +25576,7 @@
         </p:spPr>
         <p:txBody>
           <a:bodyPr wrap="square">
-            <a:normAutofit/>
+            <a:noAutofit/>
           </a:bodyPr>
           <a:lstStyle/>
           <a:p>
@@ -25611,7 +25611,7 @@
         </p:spPr>
         <p:txBody>
           <a:bodyPr wrap="square">
-            <a:normAutofit/>
+            <a:noAutofit/>
           </a:bodyPr>
           <a:lstStyle/>
           <a:p>
@@ -25738,7 +25738,7 @@
         </p:spPr>
         <p:txBody>
           <a:bodyPr wrap="square">
-            <a:normAutofit/>
+            <a:noAutofit/>
           </a:bodyPr>
           <a:lstStyle/>
           <a:p>
@@ -25773,7 +25773,7 @@
         </p:spPr>
         <p:txBody>
           <a:bodyPr wrap="square">
-            <a:normAutofit/>
+            <a:noAutofit/>
           </a:bodyPr>
           <a:lstStyle/>
           <a:p>
@@ -25808,7 +25808,7 @@
         </p:spPr>
         <p:txBody>
           <a:bodyPr wrap="square">
-            <a:normAutofit/>
+            <a:noAutofit/>
           </a:bodyPr>
           <a:lstStyle/>
           <a:p>
@@ -25935,7 +25935,7 @@
         </p:spPr>
         <p:txBody>
           <a:bodyPr wrap="square">
-            <a:normAutofit/>
+            <a:noAutofit/>
           </a:bodyPr>
           <a:lstStyle/>
           <a:p>
@@ -25970,7 +25970,7 @@
         </p:spPr>
         <p:txBody>
           <a:bodyPr wrap="square">
-            <a:normAutofit/>
+            <a:noAutofit/>
           </a:bodyPr>
           <a:lstStyle/>
           <a:p>
@@ -26005,7 +26005,7 @@
         </p:spPr>
         <p:txBody>
           <a:bodyPr wrap="square">
-            <a:normAutofit/>
+            <a:noAutofit/>
           </a:bodyPr>
           <a:lstStyle/>
           <a:p>
@@ -26132,7 +26132,7 @@
         </p:spPr>
         <p:txBody>
           <a:bodyPr wrap="square">
-            <a:normAutofit/>
+            <a:noAutofit/>
           </a:bodyPr>
           <a:lstStyle/>
           <a:p>
@@ -26167,7 +26167,7 @@
         </p:spPr>
         <p:txBody>
           <a:bodyPr wrap="square">
-            <a:normAutofit/>
+            <a:noAutofit/>
           </a:bodyPr>
           <a:lstStyle/>
           <a:p>
@@ -26202,7 +26202,7 @@
         </p:spPr>
         <p:txBody>
           <a:bodyPr wrap="square">
-            <a:normAutofit/>
+            <a:noAutofit/>
           </a:bodyPr>
           <a:lstStyle/>
           <a:p>
@@ -26284,7 +26284,7 @@
         </p:spPr>
         <p:txBody>
           <a:bodyPr wrap="square">
-            <a:normAutofit/>
+            <a:noAutofit/>
           </a:bodyPr>
           <a:lstStyle/>
           <a:p>
@@ -26319,7 +26319,7 @@
         </p:spPr>
         <p:txBody>
           <a:bodyPr wrap="square">
-            <a:normAutofit/>
+            <a:noAutofit/>
           </a:bodyPr>
           <a:lstStyle/>
           <a:p>
@@ -26458,7 +26458,7 @@
         </p:spPr>
         <p:txBody>
           <a:bodyPr wrap="square">
-            <a:normAutofit/>
+            <a:noAutofit/>
           </a:bodyPr>
           <a:lstStyle/>
           <a:p>
@@ -26493,7 +26493,7 @@
         </p:spPr>
         <p:txBody>
           <a:bodyPr wrap="square">
-            <a:normAutofit/>
+            <a:noAutofit/>
           </a:bodyPr>
           <a:lstStyle/>
           <a:p>
@@ -26614,7 +26614,7 @@
         </p:spPr>
         <p:txBody>
           <a:bodyPr wrap="square">
-            <a:normAutofit/>
+            <a:noAutofit/>
           </a:bodyPr>
           <a:lstStyle/>
           <a:p>
@@ -26649,7 +26649,7 @@
         </p:spPr>
         <p:txBody>
           <a:bodyPr wrap="square">
-            <a:normAutofit/>
+            <a:noAutofit/>
           </a:bodyPr>
           <a:lstStyle/>
           <a:p>
@@ -26684,7 +26684,7 @@
         </p:spPr>
         <p:txBody>
           <a:bodyPr wrap="square">
-            <a:normAutofit/>
+            <a:noAutofit/>
           </a:bodyPr>
           <a:lstStyle/>
           <a:p>
@@ -26719,7 +26719,7 @@
         </p:spPr>
         <p:txBody>
           <a:bodyPr wrap="square">
-            <a:normAutofit/>
+            <a:noAutofit/>
           </a:bodyPr>
           <a:lstStyle/>
           <a:p>
@@ -26754,7 +26754,7 @@
         </p:spPr>
         <p:txBody>
           <a:bodyPr wrap="square">
-            <a:normAutofit/>
+            <a:noAutofit/>
           </a:bodyPr>
           <a:lstStyle/>
           <a:p>
@@ -26789,7 +26789,7 @@
         </p:spPr>
         <p:txBody>
           <a:bodyPr wrap="square">
-            <a:normAutofit/>
+            <a:noAutofit/>
           </a:bodyPr>
           <a:lstStyle/>
           <a:p>
@@ -26869,7 +26869,7 @@
         </p:spPr>
         <p:txBody>
           <a:bodyPr wrap="square">
-            <a:normAutofit/>
+            <a:noAutofit/>
           </a:bodyPr>
           <a:lstStyle/>
           <a:p>
@@ -26904,7 +26904,7 @@
         </p:spPr>
         <p:txBody>
           <a:bodyPr wrap="square">
-            <a:normAutofit/>
+            <a:noAutofit/>
           </a:bodyPr>
           <a:lstStyle/>
           <a:p>
@@ -26939,7 +26939,7 @@
         </p:spPr>
         <p:txBody>
           <a:bodyPr wrap="square">
-            <a:normAutofit/>
+            <a:noAutofit/>
           </a:bodyPr>
           <a:lstStyle/>
           <a:p>
@@ -26974,7 +26974,7 @@
         </p:spPr>
         <p:txBody>
           <a:bodyPr wrap="square">
-            <a:normAutofit/>
+            <a:noAutofit/>
           </a:bodyPr>
           <a:lstStyle/>
           <a:p>
@@ -27009,7 +27009,7 @@
         </p:spPr>
         <p:txBody>
           <a:bodyPr wrap="square">
-            <a:normAutofit/>
+            <a:noAutofit/>
           </a:bodyPr>
           <a:lstStyle/>
           <a:p>
@@ -27044,7 +27044,7 @@
         </p:spPr>
         <p:txBody>
           <a:bodyPr wrap="square">
-            <a:normAutofit/>
+            <a:noAutofit/>
           </a:bodyPr>
           <a:lstStyle/>
           <a:p>
@@ -27124,7 +27124,7 @@
         </p:spPr>
         <p:txBody>
           <a:bodyPr wrap="square">
-            <a:normAutofit/>
+            <a:noAutofit/>
           </a:bodyPr>
           <a:lstStyle/>
           <a:p>
@@ -27159,7 +27159,7 @@
         </p:spPr>
         <p:txBody>
           <a:bodyPr wrap="square">
-            <a:normAutofit/>
+            <a:noAutofit/>
           </a:bodyPr>
           <a:lstStyle/>
           <a:p>
@@ -27194,7 +27194,7 @@
         </p:spPr>
         <p:txBody>
           <a:bodyPr wrap="square">
-            <a:normAutofit/>
+            <a:noAutofit/>
           </a:bodyPr>
           <a:lstStyle/>
           <a:p>
@@ -27229,7 +27229,7 @@
         </p:spPr>
         <p:txBody>
           <a:bodyPr wrap="square">
-            <a:normAutofit/>
+            <a:noAutofit/>
           </a:bodyPr>
           <a:lstStyle/>
           <a:p>
@@ -27264,7 +27264,7 @@
         </p:spPr>
         <p:txBody>
           <a:bodyPr wrap="square">
-            <a:normAutofit/>
+            <a:noAutofit/>
           </a:bodyPr>
           <a:lstStyle/>
           <a:p>
@@ -27299,7 +27299,7 @@
         </p:spPr>
         <p:txBody>
           <a:bodyPr wrap="square">
-            <a:normAutofit/>
+            <a:noAutofit/>
           </a:bodyPr>
           <a:lstStyle/>
           <a:p>
@@ -27379,7 +27379,7 @@
         </p:spPr>
         <p:txBody>
           <a:bodyPr wrap="square">
-            <a:normAutofit/>
+            <a:noAutofit/>
           </a:bodyPr>
           <a:lstStyle/>
           <a:p>
@@ -27414,7 +27414,7 @@
         </p:spPr>
         <p:txBody>
           <a:bodyPr wrap="square">
-            <a:normAutofit/>
+            <a:noAutofit/>
           </a:bodyPr>
           <a:lstStyle/>
           <a:p>
@@ -27449,7 +27449,7 @@
         </p:spPr>
         <p:txBody>
           <a:bodyPr wrap="square">
-            <a:normAutofit/>
+            <a:noAutofit/>
           </a:bodyPr>
           <a:lstStyle/>
           <a:p>
@@ -27484,7 +27484,7 @@
         </p:spPr>
         <p:txBody>
           <a:bodyPr wrap="square">
-            <a:normAutofit/>
+            <a:noAutofit/>
           </a:bodyPr>
           <a:lstStyle/>
           <a:p>
@@ -27519,7 +27519,7 @@
         </p:spPr>
         <p:txBody>
           <a:bodyPr wrap="square">
-            <a:normAutofit/>
+            <a:noAutofit/>
           </a:bodyPr>
           <a:lstStyle/>
           <a:p>
@@ -27554,7 +27554,7 @@
         </p:spPr>
         <p:txBody>
           <a:bodyPr wrap="square">
-            <a:normAutofit/>
+            <a:noAutofit/>
           </a:bodyPr>
           <a:lstStyle/>
           <a:p>
@@ -27634,7 +27634,7 @@
         </p:spPr>
         <p:txBody>
           <a:bodyPr wrap="square">
-            <a:normAutofit/>
+            <a:noAutofit/>
           </a:bodyPr>
           <a:lstStyle/>
           <a:p>
@@ -27669,7 +27669,7 @@
         </p:spPr>
         <p:txBody>
           <a:bodyPr wrap="square">
-            <a:normAutofit/>
+            <a:noAutofit/>
           </a:bodyPr>
           <a:lstStyle/>
           <a:p>
@@ -27704,7 +27704,7 @@
         </p:spPr>
         <p:txBody>
           <a:bodyPr wrap="square">
-            <a:normAutofit/>
+            <a:noAutofit/>
           </a:bodyPr>
           <a:lstStyle/>
           <a:p>
@@ -27739,7 +27739,7 @@
         </p:spPr>
         <p:txBody>
           <a:bodyPr wrap="square">
-            <a:normAutofit/>
+            <a:noAutofit/>
           </a:bodyPr>
           <a:lstStyle/>
           <a:p>
@@ -27774,7 +27774,7 @@
         </p:spPr>
         <p:txBody>
           <a:bodyPr wrap="square">
-            <a:normAutofit/>
+            <a:noAutofit/>
           </a:bodyPr>
           <a:lstStyle/>
           <a:p>
@@ -27809,7 +27809,7 @@
         </p:spPr>
         <p:txBody>
           <a:bodyPr wrap="square">
-            <a:normAutofit/>
+            <a:noAutofit/>
           </a:bodyPr>
           <a:lstStyle/>
           <a:p>
@@ -27889,7 +27889,7 @@
         </p:spPr>
         <p:txBody>
           <a:bodyPr wrap="square">
-            <a:normAutofit/>
+            <a:noAutofit/>
           </a:bodyPr>
           <a:lstStyle/>
           <a:p>
@@ -27924,7 +27924,7 @@
         </p:spPr>
         <p:txBody>
           <a:bodyPr wrap="square">
-            <a:normAutofit/>
+            <a:noAutofit/>
           </a:bodyPr>
           <a:lstStyle/>
           <a:p>
@@ -27959,7 +27959,7 @@
         </p:spPr>
         <p:txBody>
           <a:bodyPr wrap="square">
-            <a:normAutofit/>
+            <a:noAutofit/>
           </a:bodyPr>
           <a:lstStyle/>
           <a:p>
@@ -27994,7 +27994,7 @@
         </p:spPr>
         <p:txBody>
           <a:bodyPr wrap="square">
-            <a:normAutofit/>
+            <a:noAutofit/>
           </a:bodyPr>
           <a:lstStyle/>
           <a:p>
@@ -28029,7 +28029,7 @@
         </p:spPr>
         <p:txBody>
           <a:bodyPr wrap="square">
-            <a:normAutofit/>
+            <a:noAutofit/>
           </a:bodyPr>
           <a:lstStyle/>
           <a:p>
@@ -28064,7 +28064,7 @@
         </p:spPr>
         <p:txBody>
           <a:bodyPr wrap="square">
-            <a:normAutofit/>
+            <a:noAutofit/>
           </a:bodyPr>
           <a:lstStyle/>
           <a:p>
@@ -28144,7 +28144,7 @@
         </p:spPr>
         <p:txBody>
           <a:bodyPr wrap="square">
-            <a:normAutofit/>
+            <a:noAutofit/>
           </a:bodyPr>
           <a:lstStyle/>
           <a:p>
@@ -28179,7 +28179,7 @@
         </p:spPr>
         <p:txBody>
           <a:bodyPr wrap="square">
-            <a:normAutofit/>
+            <a:noAutofit/>
           </a:bodyPr>
           <a:lstStyle/>
           <a:p>
@@ -28214,7 +28214,7 @@
         </p:spPr>
         <p:txBody>
           <a:bodyPr wrap="square">
-            <a:normAutofit/>
+            <a:noAutofit/>
           </a:bodyPr>
           <a:lstStyle/>
           <a:p>
@@ -28249,7 +28249,7 @@
         </p:spPr>
         <p:txBody>
           <a:bodyPr wrap="square">
-            <a:normAutofit/>
+            <a:noAutofit/>
           </a:bodyPr>
           <a:lstStyle/>
           <a:p>
@@ -28284,7 +28284,7 @@
         </p:spPr>
         <p:txBody>
           <a:bodyPr wrap="square">
-            <a:normAutofit/>
+            <a:noAutofit/>
           </a:bodyPr>
           <a:lstStyle/>
           <a:p>
@@ -28319,7 +28319,7 @@
         </p:spPr>
         <p:txBody>
           <a:bodyPr wrap="square">
-            <a:normAutofit/>
+            <a:noAutofit/>
           </a:bodyPr>
           <a:lstStyle/>
           <a:p>
@@ -28399,7 +28399,7 @@
         </p:spPr>
         <p:txBody>
           <a:bodyPr wrap="square">
-            <a:normAutofit/>
+            <a:noAutofit/>
           </a:bodyPr>
           <a:lstStyle/>
           <a:p>
@@ -28434,7 +28434,7 @@
         </p:spPr>
         <p:txBody>
           <a:bodyPr wrap="square">
-            <a:normAutofit/>
+            <a:noAutofit/>
           </a:bodyPr>
           <a:lstStyle/>
           <a:p>
@@ -28469,7 +28469,7 @@
         </p:spPr>
         <p:txBody>
           <a:bodyPr wrap="square">
-            <a:normAutofit/>
+            <a:noAutofit/>
           </a:bodyPr>
           <a:lstStyle/>
           <a:p>
@@ -28504,7 +28504,7 @@
         </p:spPr>
         <p:txBody>
           <a:bodyPr wrap="square">
-            <a:normAutofit/>
+            <a:noAutofit/>
           </a:bodyPr>
           <a:lstStyle/>
           <a:p>
@@ -28539,7 +28539,7 @@
         </p:spPr>
         <p:txBody>
           <a:bodyPr wrap="square">
-            <a:normAutofit/>
+            <a:noAutofit/>
           </a:bodyPr>
           <a:lstStyle/>
           <a:p>
@@ -28574,7 +28574,7 @@
         </p:spPr>
         <p:txBody>
           <a:bodyPr wrap="square">
-            <a:normAutofit/>
+            <a:noAutofit/>
           </a:bodyPr>
           <a:lstStyle/>
           <a:p>
@@ -28609,7 +28609,7 @@
         </p:spPr>
         <p:txBody>
           <a:bodyPr wrap="square">
-            <a:normAutofit/>
+            <a:noAutofit/>
           </a:bodyPr>
           <a:lstStyle/>
           <a:p>
@@ -28644,7 +28644,7 @@
         </p:spPr>
         <p:txBody>
           <a:bodyPr wrap="square">
-            <a:normAutofit/>
+            <a:noAutofit/>
           </a:bodyPr>
           <a:lstStyle/>
           <a:p>
@@ -28679,7 +28679,7 @@
         </p:spPr>
         <p:txBody>
           <a:bodyPr wrap="square">
-            <a:normAutofit/>
+            <a:noAutofit/>
           </a:bodyPr>
           <a:lstStyle/>
           <a:p>
@@ -28714,7 +28714,7 @@
         </p:spPr>
         <p:txBody>
           <a:bodyPr wrap="square">
-            <a:normAutofit/>
+            <a:noAutofit/>
           </a:bodyPr>
           <a:lstStyle/>
           <a:p>
@@ -28792,7 +28792,7 @@
         </p:spPr>
         <p:txBody>
           <a:bodyPr wrap="square">
-            <a:normAutofit/>
+            <a:noAutofit/>
           </a:bodyPr>
           <a:lstStyle/>
           <a:p>
@@ -28827,7 +28827,7 @@
         </p:spPr>
         <p:txBody>
           <a:bodyPr wrap="square">
-            <a:normAutofit/>
+            <a:noAutofit/>
           </a:bodyPr>
           <a:lstStyle/>
           <a:p>
@@ -28966,7 +28966,7 @@
         </p:spPr>
         <p:txBody>
           <a:bodyPr wrap="square">
-            <a:normAutofit/>
+            <a:noAutofit/>
           </a:bodyPr>
           <a:lstStyle/>
           <a:p>
@@ -29001,7 +29001,7 @@
         </p:spPr>
         <p:txBody>
           <a:bodyPr wrap="square">
-            <a:normAutofit/>
+            <a:noAutofit/>
           </a:bodyPr>
           <a:lstStyle/>
           <a:p>
@@ -29167,7 +29167,7 @@
         </p:spPr>
         <p:txBody>
           <a:bodyPr wrap="square">
-            <a:normAutofit/>
+            <a:noAutofit/>
           </a:bodyPr>
           <a:lstStyle/>
           <a:p>
@@ -29202,7 +29202,7 @@
         </p:spPr>
         <p:txBody>
           <a:bodyPr wrap="square">
-            <a:normAutofit/>
+            <a:noAutofit/>
           </a:bodyPr>
           <a:lstStyle/>
           <a:p>
@@ -29237,7 +29237,7 @@
         </p:spPr>
         <p:txBody>
           <a:bodyPr wrap="square">
-            <a:normAutofit/>
+            <a:noAutofit/>
           </a:bodyPr>
           <a:lstStyle/>
           <a:p>
@@ -29364,7 +29364,7 @@
         </p:spPr>
         <p:txBody>
           <a:bodyPr wrap="square">
-            <a:normAutofit/>
+            <a:noAutofit/>
           </a:bodyPr>
           <a:lstStyle/>
           <a:p>
@@ -29399,7 +29399,7 @@
         </p:spPr>
         <p:txBody>
           <a:bodyPr wrap="square">
-            <a:normAutofit/>
+            <a:noAutofit/>
           </a:bodyPr>
           <a:lstStyle/>
           <a:p>
@@ -29434,7 +29434,7 @@
         </p:spPr>
         <p:txBody>
           <a:bodyPr wrap="square">
-            <a:normAutofit/>
+            <a:noAutofit/>
           </a:bodyPr>
           <a:lstStyle/>
           <a:p>
@@ -29561,7 +29561,7 @@
         </p:spPr>
         <p:txBody>
           <a:bodyPr wrap="square">
-            <a:normAutofit/>
+            <a:noAutofit/>
           </a:bodyPr>
           <a:lstStyle/>
           <a:p>
@@ -29596,7 +29596,7 @@
         </p:spPr>
         <p:txBody>
           <a:bodyPr wrap="square">
-            <a:normAutofit/>
+            <a:noAutofit/>
           </a:bodyPr>
           <a:lstStyle/>
           <a:p>
@@ -29631,7 +29631,7 @@
         </p:spPr>
         <p:txBody>
           <a:bodyPr wrap="square">
-            <a:normAutofit/>
+            <a:noAutofit/>
           </a:bodyPr>
           <a:lstStyle/>
           <a:p>
@@ -29758,7 +29758,7 @@
         </p:spPr>
         <p:txBody>
           <a:bodyPr wrap="square">
-            <a:normAutofit/>
+            <a:noAutofit/>
           </a:bodyPr>
           <a:lstStyle/>
           <a:p>
@@ -29793,7 +29793,7 @@
         </p:spPr>
         <p:txBody>
           <a:bodyPr wrap="square">
-            <a:normAutofit/>
+            <a:noAutofit/>
           </a:bodyPr>
           <a:lstStyle/>
           <a:p>
@@ -29828,7 +29828,7 @@
         </p:spPr>
         <p:txBody>
           <a:bodyPr wrap="square">
-            <a:normAutofit/>
+            <a:noAutofit/>
           </a:bodyPr>
           <a:lstStyle/>
           <a:p>
@@ -29955,7 +29955,7 @@
         </p:spPr>
         <p:txBody>
           <a:bodyPr wrap="square">
-            <a:normAutofit/>
+            <a:noAutofit/>
           </a:bodyPr>
           <a:lstStyle/>
           <a:p>
@@ -29990,7 +29990,7 @@
         </p:spPr>
         <p:txBody>
           <a:bodyPr wrap="square">
-            <a:normAutofit/>
+            <a:noAutofit/>
           </a:bodyPr>
           <a:lstStyle/>
           <a:p>
@@ -30025,7 +30025,7 @@
         </p:spPr>
         <p:txBody>
           <a:bodyPr wrap="square">
-            <a:normAutofit/>
+            <a:noAutofit/>
           </a:bodyPr>
           <a:lstStyle/>
           <a:p>
@@ -30152,7 +30152,7 @@
         </p:spPr>
         <p:txBody>
           <a:bodyPr wrap="square">
-            <a:normAutofit/>
+            <a:noAutofit/>
           </a:bodyPr>
           <a:lstStyle/>
           <a:p>
@@ -30187,7 +30187,7 @@
         </p:spPr>
         <p:txBody>
           <a:bodyPr wrap="square">
-            <a:normAutofit/>
+            <a:noAutofit/>
           </a:bodyPr>
           <a:lstStyle/>
           <a:p>
@@ -30222,7 +30222,7 @@
         </p:spPr>
         <p:txBody>
           <a:bodyPr wrap="square">
-            <a:normAutofit/>
+            <a:noAutofit/>
           </a:bodyPr>
           <a:lstStyle/>
           <a:p>
@@ -30349,7 +30349,7 @@
         </p:spPr>
         <p:txBody>
           <a:bodyPr wrap="square">
-            <a:normAutofit/>
+            <a:noAutofit/>
           </a:bodyPr>
           <a:lstStyle/>
           <a:p>
@@ -30384,7 +30384,7 @@
         </p:spPr>
         <p:txBody>
           <a:bodyPr wrap="square">
-            <a:normAutofit/>
+            <a:noAutofit/>
           </a:bodyPr>
           <a:lstStyle/>
           <a:p>
@@ -30419,7 +30419,7 @@
         </p:spPr>
         <p:txBody>
           <a:bodyPr wrap="square">
-            <a:normAutofit/>
+            <a:noAutofit/>
           </a:bodyPr>
           <a:lstStyle/>
           <a:p>
@@ -30546,7 +30546,7 @@
         </p:spPr>
         <p:txBody>
           <a:bodyPr wrap="square">
-            <a:normAutofit/>
+            <a:noAutofit/>
           </a:bodyPr>
           <a:lstStyle/>
           <a:p>
@@ -30581,7 +30581,7 @@
         </p:spPr>
         <p:txBody>
           <a:bodyPr wrap="square">
-            <a:normAutofit/>
+            <a:noAutofit/>
           </a:bodyPr>
           <a:lstStyle/>
           <a:p>
@@ -30616,7 +30616,7 @@
         </p:spPr>
         <p:txBody>
           <a:bodyPr wrap="square">
-            <a:normAutofit/>
+            <a:noAutofit/>
           </a:bodyPr>
           <a:lstStyle/>
           <a:p>
@@ -30743,7 +30743,7 @@
         </p:spPr>
         <p:txBody>
           <a:bodyPr wrap="square">
-            <a:normAutofit/>
+            <a:noAutofit/>
           </a:bodyPr>
           <a:lstStyle/>
           <a:p>
@@ -30778,7 +30778,7 @@
         </p:spPr>
         <p:txBody>
           <a:bodyPr wrap="square">
-            <a:normAutofit/>
+            <a:noAutofit/>
           </a:bodyPr>
           <a:lstStyle/>
           <a:p>
@@ -30813,7 +30813,7 @@
         </p:spPr>
         <p:txBody>
           <a:bodyPr wrap="square">
-            <a:normAutofit/>
+            <a:noAutofit/>
           </a:bodyPr>
           <a:lstStyle/>
           <a:p>
@@ -30940,7 +30940,7 @@
         </p:spPr>
         <p:txBody>
           <a:bodyPr wrap="square">
-            <a:normAutofit/>
+            <a:noAutofit/>
           </a:bodyPr>
           <a:lstStyle/>
           <a:p>
@@ -30975,7 +30975,7 @@
         </p:spPr>
         <p:txBody>
           <a:bodyPr wrap="square">
-            <a:normAutofit/>
+            <a:noAutofit/>
           </a:bodyPr>
           <a:lstStyle/>
           <a:p>
@@ -31010,7 +31010,7 @@
         </p:spPr>
         <p:txBody>
           <a:bodyPr wrap="square">
-            <a:normAutofit/>
+            <a:noAutofit/>
           </a:bodyPr>
           <a:lstStyle/>
           <a:p>
@@ -31092,7 +31092,7 @@
         </p:spPr>
         <p:txBody>
           <a:bodyPr wrap="square">
-            <a:normAutofit/>
+            <a:noAutofit/>
           </a:bodyPr>
           <a:lstStyle/>
           <a:p>
@@ -31127,7 +31127,7 @@
         </p:spPr>
         <p:txBody>
           <a:bodyPr wrap="square">
-            <a:normAutofit/>
+            <a:noAutofit/>
           </a:bodyPr>
           <a:lstStyle/>
           <a:p>
@@ -31266,7 +31266,7 @@
         </p:spPr>
         <p:txBody>
           <a:bodyPr wrap="square">
-            <a:normAutofit/>
+            <a:noAutofit/>
           </a:bodyPr>
           <a:lstStyle/>
           <a:p>
@@ -31301,7 +31301,7 @@
         </p:spPr>
         <p:txBody>
           <a:bodyPr wrap="square">
-            <a:normAutofit/>
+            <a:noAutofit/>
           </a:bodyPr>
           <a:lstStyle/>
           <a:p>
@@ -31467,7 +31467,7 @@
         </p:spPr>
         <p:txBody>
           <a:bodyPr wrap="square">
-            <a:normAutofit/>
+            <a:noAutofit/>
           </a:bodyPr>
           <a:lstStyle/>
           <a:p>
@@ -31502,7 +31502,7 @@
         </p:spPr>
         <p:txBody>
           <a:bodyPr wrap="square">
-            <a:normAutofit/>
+            <a:noAutofit/>
           </a:bodyPr>
           <a:lstStyle/>
           <a:p>
@@ -31537,7 +31537,7 @@
         </p:spPr>
         <p:txBody>
           <a:bodyPr wrap="square">
-            <a:normAutofit/>
+            <a:noAutofit/>
           </a:bodyPr>
           <a:lstStyle/>
           <a:p>
@@ -31664,7 +31664,7 @@
         </p:spPr>
         <p:txBody>
           <a:bodyPr wrap="square">
-            <a:normAutofit/>
+            <a:noAutofit/>
           </a:bodyPr>
           <a:lstStyle/>
           <a:p>
@@ -31699,7 +31699,7 @@
         </p:spPr>
         <p:txBody>
           <a:bodyPr wrap="square">
-            <a:normAutofit/>
+            <a:noAutofit/>
           </a:bodyPr>
           <a:lstStyle/>
           <a:p>
@@ -31734,7 +31734,7 @@
         </p:spPr>
         <p:txBody>
           <a:bodyPr wrap="square">
-            <a:normAutofit/>
+            <a:noAutofit/>
           </a:bodyPr>
           <a:lstStyle/>
           <a:p>
@@ -31861,7 +31861,7 @@
         </p:spPr>
         <p:txBody>
           <a:bodyPr wrap="square">
-            <a:normAutofit/>
+            <a:noAutofit/>
           </a:bodyPr>
           <a:lstStyle/>
           <a:p>
@@ -31896,7 +31896,7 @@
         </p:spPr>
         <p:txBody>
           <a:bodyPr wrap="square">
-            <a:normAutofit/>
+            <a:noAutofit/>
           </a:bodyPr>
           <a:lstStyle/>
           <a:p>
@@ -31931,7 +31931,7 @@
         </p:spPr>
         <p:txBody>
           <a:bodyPr wrap="square">
-            <a:normAutofit/>
+            <a:noAutofit/>
           </a:bodyPr>
           <a:lstStyle/>
           <a:p>
@@ -32058,7 +32058,7 @@
         </p:spPr>
         <p:txBody>
           <a:bodyPr wrap="square">
-            <a:normAutofit/>
+            <a:noAutofit/>
           </a:bodyPr>
           <a:lstStyle/>
           <a:p>
@@ -32093,7 +32093,7 @@
         </p:spPr>
         <p:txBody>
           <a:bodyPr wrap="square">
-            <a:normAutofit/>
+            <a:noAutofit/>
           </a:bodyPr>
           <a:lstStyle/>
           <a:p>
@@ -32128,7 +32128,7 @@
         </p:spPr>
         <p:txBody>
           <a:bodyPr wrap="square">
-            <a:normAutofit/>
+            <a:noAutofit/>
           </a:bodyPr>
           <a:lstStyle/>
           <a:p>
@@ -32255,7 +32255,7 @@
         </p:spPr>
         <p:txBody>
           <a:bodyPr wrap="square">
-            <a:normAutofit/>
+            <a:noAutofit/>
           </a:bodyPr>
           <a:lstStyle/>
           <a:p>
@@ -32290,7 +32290,7 @@
         </p:spPr>
         <p:txBody>
           <a:bodyPr wrap="square">
-            <a:normAutofit/>
+            <a:noAutofit/>
           </a:bodyPr>
           <a:lstStyle/>
           <a:p>
@@ -32325,7 +32325,7 @@
         </p:spPr>
         <p:txBody>
           <a:bodyPr wrap="square">
-            <a:normAutofit/>
+            <a:noAutofit/>
           </a:bodyPr>
           <a:lstStyle/>
           <a:p>
@@ -32452,7 +32452,7 @@
         </p:spPr>
         <p:txBody>
           <a:bodyPr wrap="square">
-            <a:normAutofit/>
+            <a:noAutofit/>
           </a:bodyPr>
           <a:lstStyle/>
           <a:p>
@@ -32487,7 +32487,7 @@
         </p:spPr>
         <p:txBody>
           <a:bodyPr wrap="square">
-            <a:normAutofit/>
+            <a:noAutofit/>
           </a:bodyPr>
           <a:lstStyle/>
           <a:p>
@@ -32522,7 +32522,7 @@
         </p:spPr>
         <p:txBody>
           <a:bodyPr wrap="square">
-            <a:normAutofit/>
+            <a:noAutofit/>
           </a:bodyPr>
           <a:lstStyle/>
           <a:p>
@@ -32649,7 +32649,7 @@
         </p:spPr>
         <p:txBody>
           <a:bodyPr wrap="square">
-            <a:normAutofit/>
+            <a:noAutofit/>
           </a:bodyPr>
           <a:lstStyle/>
           <a:p>
@@ -32684,7 +32684,7 @@
         </p:spPr>
         <p:txBody>
           <a:bodyPr wrap="square">
-            <a:normAutofit/>
+            <a:noAutofit/>
           </a:bodyPr>
           <a:lstStyle/>
           <a:p>
@@ -32719,7 +32719,7 @@
         </p:spPr>
         <p:txBody>
           <a:bodyPr wrap="square">
-            <a:normAutofit/>
+            <a:noAutofit/>
           </a:bodyPr>
           <a:lstStyle/>
           <a:p>
@@ -32846,7 +32846,7 @@
         </p:spPr>
         <p:txBody>
           <a:bodyPr wrap="square">
-            <a:normAutofit/>
+            <a:noAutofit/>
           </a:bodyPr>
           <a:lstStyle/>
           <a:p>
@@ -32881,7 +32881,7 @@
         </p:spPr>
         <p:txBody>
           <a:bodyPr wrap="square">
-            <a:normAutofit/>
+            <a:noAutofit/>
           </a:bodyPr>
           <a:lstStyle/>
           <a:p>
@@ -32916,7 +32916,7 @@
         </p:spPr>
         <p:txBody>
           <a:bodyPr wrap="square">
-            <a:normAutofit/>
+            <a:noAutofit/>
           </a:bodyPr>
           <a:lstStyle/>
           <a:p>
@@ -33043,7 +33043,7 @@
         </p:spPr>
         <p:txBody>
           <a:bodyPr wrap="square">
-            <a:normAutofit/>
+            <a:noAutofit/>
           </a:bodyPr>
           <a:lstStyle/>
           <a:p>
@@ -33078,7 +33078,7 @@
         </p:spPr>
         <p:txBody>
           <a:bodyPr wrap="square">
-            <a:normAutofit/>
+            <a:noAutofit/>
           </a:bodyPr>
           <a:lstStyle/>
           <a:p>
@@ -33113,7 +33113,7 @@
         </p:spPr>
         <p:txBody>
           <a:bodyPr wrap="square">
-            <a:normAutofit/>
+            <a:noAutofit/>
           </a:bodyPr>
           <a:lstStyle/>
           <a:p>
@@ -33195,7 +33195,7 @@
         </p:spPr>
         <p:txBody>
           <a:bodyPr wrap="square">
-            <a:normAutofit/>
+            <a:noAutofit/>
           </a:bodyPr>
           <a:lstStyle/>
           <a:p>
@@ -33230,7 +33230,7 @@
         </p:spPr>
         <p:txBody>
           <a:bodyPr wrap="square">
-            <a:normAutofit/>
+            <a:noAutofit/>
           </a:bodyPr>
           <a:lstStyle/>
           <a:p>
@@ -33369,7 +33369,7 @@
         </p:spPr>
         <p:txBody>
           <a:bodyPr wrap="square">
-            <a:normAutofit/>
+            <a:noAutofit/>
           </a:bodyPr>
           <a:lstStyle/>
           <a:p>
@@ -33404,7 +33404,7 @@
         </p:spPr>
         <p:txBody>
           <a:bodyPr wrap="square">
-            <a:normAutofit/>
+            <a:noAutofit/>
           </a:bodyPr>
           <a:lstStyle/>
           <a:p>
@@ -33570,7 +33570,7 @@
         </p:spPr>
         <p:txBody>
           <a:bodyPr wrap="square">
-            <a:normAutofit/>
+            <a:noAutofit/>
           </a:bodyPr>
           <a:lstStyle/>
           <a:p>
@@ -33605,7 +33605,7 @@
         </p:spPr>
         <p:txBody>
           <a:bodyPr wrap="square">
-            <a:normAutofit/>
+            <a:noAutofit/>
           </a:bodyPr>
           <a:lstStyle/>
           <a:p>
@@ -33732,7 +33732,7 @@
         </p:spPr>
         <p:txBody>
           <a:bodyPr wrap="square">
-            <a:normAutofit/>
+            <a:noAutofit/>
           </a:bodyPr>
           <a:lstStyle/>
           <a:p>
@@ -33767,7 +33767,7 @@
         </p:spPr>
         <p:txBody>
           <a:bodyPr wrap="square">
-            <a:normAutofit/>
+            <a:noAutofit/>
           </a:bodyPr>
           <a:lstStyle/>
           <a:p>
@@ -33894,7 +33894,7 @@
         </p:spPr>
         <p:txBody>
           <a:bodyPr wrap="square">
-            <a:normAutofit/>
+            <a:noAutofit/>
           </a:bodyPr>
           <a:lstStyle/>
           <a:p>
@@ -33929,7 +33929,7 @@
         </p:spPr>
         <p:txBody>
           <a:bodyPr wrap="square">
-            <a:normAutofit/>
+            <a:noAutofit/>
           </a:bodyPr>
           <a:lstStyle/>
           <a:p>
@@ -34056,7 +34056,7 @@
         </p:spPr>
         <p:txBody>
           <a:bodyPr wrap="square">
-            <a:normAutofit/>
+            <a:noAutofit/>
           </a:bodyPr>
           <a:lstStyle/>
           <a:p>
@@ -34091,7 +34091,7 @@
         </p:spPr>
         <p:txBody>
           <a:bodyPr wrap="square">
-            <a:normAutofit/>
+            <a:noAutofit/>
           </a:bodyPr>
           <a:lstStyle/>
           <a:p>
@@ -34218,7 +34218,7 @@
         </p:spPr>
         <p:txBody>
           <a:bodyPr wrap="square">
-            <a:normAutofit/>
+            <a:noAutofit/>
           </a:bodyPr>
           <a:lstStyle/>
           <a:p>
@@ -34253,7 +34253,7 @@
         </p:spPr>
         <p:txBody>
           <a:bodyPr wrap="square">
-            <a:normAutofit/>
+            <a:noAutofit/>
           </a:bodyPr>
           <a:lstStyle/>
           <a:p>
@@ -34380,7 +34380,7 @@
         </p:spPr>
         <p:txBody>
           <a:bodyPr wrap="square">
-            <a:normAutofit/>
+            <a:noAutofit/>
           </a:bodyPr>
           <a:lstStyle/>
           <a:p>
@@ -34415,7 +34415,7 @@
         </p:spPr>
         <p:txBody>
           <a:bodyPr wrap="square">
-            <a:normAutofit/>
+            <a:noAutofit/>
           </a:bodyPr>
           <a:lstStyle/>
           <a:p>
@@ -34542,7 +34542,7 @@
         </p:spPr>
         <p:txBody>
           <a:bodyPr wrap="square">
-            <a:normAutofit/>
+            <a:noAutofit/>
           </a:bodyPr>
           <a:lstStyle/>
           <a:p>
@@ -34577,7 +34577,7 @@
         </p:spPr>
         <p:txBody>
           <a:bodyPr wrap="square">
-            <a:normAutofit/>
+            <a:noAutofit/>
           </a:bodyPr>
           <a:lstStyle/>
           <a:p>
@@ -34704,7 +34704,7 @@
         </p:spPr>
         <p:txBody>
           <a:bodyPr wrap="square">
-            <a:normAutofit/>
+            <a:noAutofit/>
           </a:bodyPr>
           <a:lstStyle/>
           <a:p>
@@ -34739,7 +34739,7 @@
         </p:spPr>
         <p:txBody>
           <a:bodyPr wrap="square">
-            <a:normAutofit/>
+            <a:noAutofit/>
           </a:bodyPr>
           <a:lstStyle/>
           <a:p>
@@ -34821,7 +34821,7 @@
         </p:spPr>
         <p:txBody>
           <a:bodyPr wrap="square">
-            <a:normAutofit/>
+            <a:noAutofit/>
           </a:bodyPr>
           <a:lstStyle/>
           <a:p>
@@ -34856,7 +34856,7 @@
         </p:spPr>
         <p:txBody>
           <a:bodyPr wrap="square">
-            <a:normAutofit/>
+            <a:noAutofit/>
           </a:bodyPr>
           <a:lstStyle/>
           <a:p>
@@ -34995,7 +34995,7 @@
         </p:spPr>
         <p:txBody>
           <a:bodyPr wrap="square">
-            <a:normAutofit/>
+            <a:noAutofit/>
           </a:bodyPr>
           <a:lstStyle/>
           <a:p>
@@ -35030,7 +35030,7 @@
         </p:spPr>
         <p:txBody>
           <a:bodyPr wrap="square">
-            <a:normAutofit/>
+            <a:noAutofit/>
           </a:bodyPr>
           <a:lstStyle/>
           <a:p>
@@ -35239,7 +35239,7 @@
         </p:spPr>
         <p:txBody>
           <a:bodyPr wrap="square">
-            <a:normAutofit/>
+            <a:noAutofit/>
           </a:bodyPr>
           <a:lstStyle/>
           <a:p>
@@ -35274,7 +35274,7 @@
         </p:spPr>
         <p:txBody>
           <a:bodyPr wrap="square">
-            <a:normAutofit/>
+            <a:noAutofit/>
           </a:bodyPr>
           <a:lstStyle/>
           <a:p>
@@ -35309,7 +35309,7 @@
         </p:spPr>
         <p:txBody>
           <a:bodyPr wrap="square">
-            <a:normAutofit/>
+            <a:noAutofit/>
           </a:bodyPr>
           <a:lstStyle/>
           <a:p>
@@ -35344,7 +35344,7 @@
         </p:spPr>
         <p:txBody>
           <a:bodyPr wrap="square">
-            <a:normAutofit/>
+            <a:noAutofit/>
           </a:bodyPr>
           <a:lstStyle/>
           <a:p>
@@ -35578,7 +35578,7 @@
         </p:spPr>
         <p:txBody>
           <a:bodyPr wrap="square">
-            <a:normAutofit/>
+            <a:noAutofit/>
           </a:bodyPr>
           <a:lstStyle/>
           <a:p>
@@ -35613,7 +35613,7 @@
         </p:spPr>
         <p:txBody>
           <a:bodyPr wrap="square">
-            <a:normAutofit/>
+            <a:noAutofit/>
           </a:bodyPr>
           <a:lstStyle/>
           <a:p>
@@ -35648,7 +35648,7 @@
         </p:spPr>
         <p:txBody>
           <a:bodyPr wrap="square">
-            <a:normAutofit/>
+            <a:noAutofit/>
           </a:bodyPr>
           <a:lstStyle/>
           <a:p>
@@ -35683,7 +35683,7 @@
         </p:spPr>
         <p:txBody>
           <a:bodyPr wrap="square">
-            <a:normAutofit/>
+            <a:noAutofit/>
           </a:bodyPr>
           <a:lstStyle/>
           <a:p>
@@ -35917,7 +35917,7 @@
         </p:spPr>
         <p:txBody>
           <a:bodyPr wrap="square">
-            <a:normAutofit/>
+            <a:noAutofit/>
           </a:bodyPr>
           <a:lstStyle/>
           <a:p>
@@ -35952,7 +35952,7 @@
         </p:spPr>
         <p:txBody>
           <a:bodyPr wrap="square">
-            <a:normAutofit/>
+            <a:noAutofit/>
           </a:bodyPr>
           <a:lstStyle/>
           <a:p>
@@ -35987,7 +35987,7 @@
         </p:spPr>
         <p:txBody>
           <a:bodyPr wrap="square">
-            <a:normAutofit/>
+            <a:noAutofit/>
           </a:bodyPr>
           <a:lstStyle/>
           <a:p>
@@ -36022,7 +36022,7 @@
         </p:spPr>
         <p:txBody>
           <a:bodyPr wrap="square">
-            <a:normAutofit/>
+            <a:noAutofit/>
           </a:bodyPr>
           <a:lstStyle/>
           <a:p>
@@ -36272,7 +36272,7 @@
         </p:spPr>
         <p:txBody>
           <a:bodyPr wrap="square">
-            <a:normAutofit/>
+            <a:noAutofit/>
           </a:bodyPr>
           <a:lstStyle/>
           <a:p>
@@ -36307,7 +36307,7 @@
         </p:spPr>
         <p:txBody>
           <a:bodyPr wrap="square">
-            <a:normAutofit/>
+            <a:noAutofit/>
           </a:bodyPr>
           <a:lstStyle/>
           <a:p>
@@ -36342,7 +36342,7 @@
         </p:spPr>
         <p:txBody>
           <a:bodyPr wrap="square">
-            <a:normAutofit/>
+            <a:noAutofit/>
           </a:bodyPr>
           <a:lstStyle/>
           <a:p>
@@ -36377,7 +36377,7 @@
         </p:spPr>
         <p:txBody>
           <a:bodyPr wrap="square">
-            <a:normAutofit/>
+            <a:noAutofit/>
           </a:bodyPr>
           <a:lstStyle/>
           <a:p>
@@ -36611,7 +36611,7 @@
         </p:spPr>
         <p:txBody>
           <a:bodyPr wrap="square">
-            <a:normAutofit/>
+            <a:noAutofit/>
           </a:bodyPr>
           <a:lstStyle/>
           <a:p>
@@ -36646,7 +36646,7 @@
         </p:spPr>
         <p:txBody>
           <a:bodyPr wrap="square">
-            <a:normAutofit/>
+            <a:noAutofit/>
           </a:bodyPr>
           <a:lstStyle/>
           <a:p>
@@ -36681,7 +36681,7 @@
         </p:spPr>
         <p:txBody>
           <a:bodyPr wrap="square">
-            <a:normAutofit/>
+            <a:noAutofit/>
           </a:bodyPr>
           <a:lstStyle/>
           <a:p>
@@ -36716,7 +36716,7 @@
         </p:spPr>
         <p:txBody>
           <a:bodyPr wrap="square">
-            <a:normAutofit/>
+            <a:noAutofit/>
           </a:bodyPr>
           <a:lstStyle/>
           <a:p>
@@ -36950,7 +36950,7 @@
         </p:spPr>
         <p:txBody>
           <a:bodyPr wrap="square">
-            <a:normAutofit/>
+            <a:noAutofit/>
           </a:bodyPr>
           <a:lstStyle/>
           <a:p>
@@ -36985,7 +36985,7 @@
         </p:spPr>
         <p:txBody>
           <a:bodyPr wrap="square">
-            <a:normAutofit/>
+            <a:noAutofit/>
           </a:bodyPr>
           <a:lstStyle/>
           <a:p>
@@ -37020,7 +37020,7 @@
         </p:spPr>
         <p:txBody>
           <a:bodyPr wrap="square">
-            <a:normAutofit/>
+            <a:noAutofit/>
           </a:bodyPr>
           <a:lstStyle/>
           <a:p>
@@ -37055,7 +37055,7 @@
         </p:spPr>
         <p:txBody>
           <a:bodyPr wrap="square">
-            <a:normAutofit/>
+            <a:noAutofit/>
           </a:bodyPr>
           <a:lstStyle/>
           <a:p>
@@ -37137,7 +37137,7 @@
         </p:spPr>
         <p:txBody>
           <a:bodyPr wrap="square">
-            <a:normAutofit/>
+            <a:noAutofit/>
           </a:bodyPr>
           <a:lstStyle/>
           <a:p>
@@ -37172,7 +37172,7 @@
         </p:spPr>
         <p:txBody>
           <a:bodyPr wrap="square">
-            <a:normAutofit/>
+            <a:noAutofit/>
           </a:bodyPr>
           <a:lstStyle/>
           <a:p>
@@ -37207,7 +37207,7 @@
         </p:spPr>
         <p:txBody>
           <a:bodyPr wrap="square">
-            <a:normAutofit/>
+            <a:noAutofit/>
           </a:bodyPr>
           <a:lstStyle/>
           <a:p>
@@ -37285,7 +37285,7 @@
         </p:spPr>
         <p:txBody>
           <a:bodyPr wrap="square">
-            <a:normAutofit/>
+            <a:noAutofit/>
           </a:bodyPr>
           <a:lstStyle/>
           <a:p>
@@ -37320,7 +37320,7 @@
         </p:spPr>
         <p:txBody>
           <a:bodyPr wrap="square">
-            <a:normAutofit/>
+            <a:noAutofit/>
           </a:bodyPr>
           <a:lstStyle/>
           <a:p>

--- a/Santander_Project_Record.pptx
+++ b/Santander_Project_Record.pptx
@@ -4378,7 +4378,7 @@
                 </a:solidFill>
                 <a:latin typeface="Calibri"/>
               </a:rPr>
-              <a:t>5,024 lines · 26 sections · 41 books synthesised into a single indexed technical reference</a:t>
+              <a:t>15,552 lines · 77 sections · 86 books &amp; regulatory documents · Quick Lookup decision index</a:t>
             </a:r>
           </a:p>
         </p:txBody>
@@ -4435,13 +4435,13 @@
         <p:spPr>
           <a:xfrm>
             <a:off x="384048" y="1024128"/>
-            <a:ext cx="5532120" cy="256032"/>
+            <a:ext cx="2788920" cy="530352"/>
           </a:xfrm>
           <a:prstGeom prst="rect">
             <a:avLst/>
           </a:prstGeom>
           <a:solidFill>
-            <a:srgbClr val="1C1917"/>
+            <a:srgbClr val="C8102E"/>
           </a:solidFill>
           <a:ln>
             <a:noFill/>
@@ -4477,29 +4477,29 @@
         </p:nvSpPr>
         <p:spPr>
           <a:xfrm>
-            <a:off x="457200" y="1042415"/>
-            <a:ext cx="274320" cy="201168"/>
-          </a:xfrm>
-          <a:prstGeom prst="rect">
-            <a:avLst/>
-          </a:prstGeom>
-          <a:noFill/>
-        </p:spPr>
-        <p:txBody>
-          <a:bodyPr wrap="square">
-            <a:noAutofit/>
-          </a:bodyPr>
-          <a:lstStyle/>
-          <a:p>
-            <a:pPr algn="l"/>
-            <a:r>
-              <a:rPr sz="800" b="1" i="0">
-                <a:solidFill>
-                  <a:srgbClr val="D6D3D1"/>
-                </a:solidFill>
-                <a:latin typeface="Calibri"/>
-              </a:rPr>
-              <a:t>§</a:t>
+            <a:off x="384048" y="1042415"/>
+            <a:ext cx="2788920" cy="329184"/>
+          </a:xfrm>
+          <a:prstGeom prst="rect">
+            <a:avLst/>
+          </a:prstGeom>
+          <a:noFill/>
+        </p:spPr>
+        <p:txBody>
+          <a:bodyPr wrap="square">
+            <a:noAutofit/>
+          </a:bodyPr>
+          <a:lstStyle/>
+          <a:p>
+            <a:pPr algn="ctr"/>
+            <a:r>
+              <a:rPr sz="2200" b="1" i="0">
+                <a:solidFill>
+                  <a:srgbClr val="FFFFFF"/>
+                </a:solidFill>
+                <a:latin typeface="Calibri"/>
+              </a:rPr>
+              <a:t>15,552</a:t>
             </a:r>
           </a:p>
         </p:txBody>
@@ -4512,65 +4512,73 @@
         </p:nvSpPr>
         <p:spPr>
           <a:xfrm>
-            <a:off x="731520" y="1042415"/>
-            <a:ext cx="2011680" cy="201168"/>
-          </a:xfrm>
-          <a:prstGeom prst="rect">
-            <a:avLst/>
-          </a:prstGeom>
-          <a:noFill/>
-        </p:spPr>
-        <p:txBody>
-          <a:bodyPr wrap="square">
-            <a:noAutofit/>
-          </a:bodyPr>
-          <a:lstStyle/>
-          <a:p>
-            <a:pPr algn="l"/>
-            <a:r>
-              <a:rPr sz="800" b="1" i="0">
-                <a:solidFill>
-                  <a:srgbClr val="D6D3D1"/>
-                </a:solidFill>
-                <a:latin typeface="Calibri"/>
-              </a:rPr>
-              <a:t>Section</a:t>
-            </a:r>
-          </a:p>
-        </p:txBody>
-      </p:sp>
-      <p:sp>
-        <p:nvSpPr>
-          <p:cNvPr id="10" name="TextBox 9"/>
-          <p:cNvSpPr txBox="1"/>
-          <p:nvPr/>
-        </p:nvSpPr>
-        <p:spPr>
-          <a:xfrm>
-            <a:off x="2779776" y="1042415"/>
-            <a:ext cx="2560320" cy="201168"/>
-          </a:xfrm>
-          <a:prstGeom prst="rect">
-            <a:avLst/>
-          </a:prstGeom>
-          <a:noFill/>
-        </p:spPr>
-        <p:txBody>
-          <a:bodyPr wrap="square">
-            <a:noAutofit/>
-          </a:bodyPr>
-          <a:lstStyle/>
-          <a:p>
-            <a:pPr algn="l"/>
-            <a:r>
-              <a:rPr sz="800" b="1" i="0">
-                <a:solidFill>
-                  <a:srgbClr val="D6D3D1"/>
-                </a:solidFill>
-                <a:latin typeface="Calibri"/>
-              </a:rPr>
-              <a:t>Source material</a:t>
-            </a:r>
+            <a:off x="384048" y="1371600"/>
+            <a:ext cx="2788920" cy="182880"/>
+          </a:xfrm>
+          <a:prstGeom prst="rect">
+            <a:avLst/>
+          </a:prstGeom>
+          <a:noFill/>
+        </p:spPr>
+        <p:txBody>
+          <a:bodyPr wrap="square">
+            <a:noAutofit/>
+          </a:bodyPr>
+          <a:lstStyle/>
+          <a:p>
+            <a:pPr algn="ctr"/>
+            <a:r>
+              <a:rPr sz="800" b="0" i="0">
+                <a:solidFill>
+                  <a:srgbClr val="FEF2F2"/>
+                </a:solidFill>
+                <a:latin typeface="Calibri"/>
+              </a:rPr>
+              <a:t>lines</a:t>
+            </a:r>
+          </a:p>
+        </p:txBody>
+      </p:sp>
+      <p:sp>
+        <p:nvSpPr>
+          <p:cNvPr id="10" name="Rectangle 9"/>
+          <p:cNvSpPr/>
+          <p:nvPr/>
+        </p:nvSpPr>
+        <p:spPr>
+          <a:xfrm>
+            <a:off x="3328416" y="1024128"/>
+            <a:ext cx="2788920" cy="530352"/>
+          </a:xfrm>
+          <a:prstGeom prst="rect">
+            <a:avLst/>
+          </a:prstGeom>
+          <a:solidFill>
+            <a:srgbClr val="C8102E"/>
+          </a:solidFill>
+          <a:ln>
+            <a:noFill/>
+          </a:ln>
+        </p:spPr>
+        <p:style>
+          <a:lnRef idx="1">
+            <a:schemeClr val="accent1"/>
+          </a:lnRef>
+          <a:fillRef idx="3">
+            <a:schemeClr val="accent1"/>
+          </a:fillRef>
+          <a:effectRef idx="2">
+            <a:schemeClr val="accent1"/>
+          </a:effectRef>
+          <a:fontRef idx="minor">
+            <a:schemeClr val="lt1"/>
+          </a:fontRef>
+        </p:style>
+        <p:txBody>
+          <a:bodyPr rtlCol="0" anchor="ctr"/>
+          <a:lstStyle/>
+          <a:p>
+            <a:pPr algn="ctr"/>
           </a:p>
         </p:txBody>
       </p:sp>
@@ -4582,8 +4590,382 @@
         </p:nvSpPr>
         <p:spPr>
           <a:xfrm>
-            <a:off x="5458968" y="1042415"/>
-            <a:ext cx="457200" cy="201168"/>
+            <a:off x="3328416" y="1042415"/>
+            <a:ext cx="2788920" cy="329184"/>
+          </a:xfrm>
+          <a:prstGeom prst="rect">
+            <a:avLst/>
+          </a:prstGeom>
+          <a:noFill/>
+        </p:spPr>
+        <p:txBody>
+          <a:bodyPr wrap="square">
+            <a:noAutofit/>
+          </a:bodyPr>
+          <a:lstStyle/>
+          <a:p>
+            <a:pPr algn="ctr"/>
+            <a:r>
+              <a:rPr sz="2200" b="1" i="0">
+                <a:solidFill>
+                  <a:srgbClr val="FFFFFF"/>
+                </a:solidFill>
+                <a:latin typeface="Calibri"/>
+              </a:rPr>
+              <a:t>77</a:t>
+            </a:r>
+          </a:p>
+        </p:txBody>
+      </p:sp>
+      <p:sp>
+        <p:nvSpPr>
+          <p:cNvPr id="12" name="TextBox 11"/>
+          <p:cNvSpPr txBox="1"/>
+          <p:nvPr/>
+        </p:nvSpPr>
+        <p:spPr>
+          <a:xfrm>
+            <a:off x="3328416" y="1371600"/>
+            <a:ext cx="2788920" cy="182880"/>
+          </a:xfrm>
+          <a:prstGeom prst="rect">
+            <a:avLst/>
+          </a:prstGeom>
+          <a:noFill/>
+        </p:spPr>
+        <p:txBody>
+          <a:bodyPr wrap="square">
+            <a:noAutofit/>
+          </a:bodyPr>
+          <a:lstStyle/>
+          <a:p>
+            <a:pPr algn="ctr"/>
+            <a:r>
+              <a:rPr sz="800" b="0" i="0">
+                <a:solidFill>
+                  <a:srgbClr val="FEF2F2"/>
+                </a:solidFill>
+                <a:latin typeface="Calibri"/>
+              </a:rPr>
+              <a:t>sections</a:t>
+            </a:r>
+          </a:p>
+        </p:txBody>
+      </p:sp>
+      <p:sp>
+        <p:nvSpPr>
+          <p:cNvPr id="13" name="Rectangle 12"/>
+          <p:cNvSpPr/>
+          <p:nvPr/>
+        </p:nvSpPr>
+        <p:spPr>
+          <a:xfrm>
+            <a:off x="6272784" y="1024128"/>
+            <a:ext cx="2788920" cy="530352"/>
+          </a:xfrm>
+          <a:prstGeom prst="rect">
+            <a:avLst/>
+          </a:prstGeom>
+          <a:solidFill>
+            <a:srgbClr val="C8102E"/>
+          </a:solidFill>
+          <a:ln>
+            <a:noFill/>
+          </a:ln>
+        </p:spPr>
+        <p:style>
+          <a:lnRef idx="1">
+            <a:schemeClr val="accent1"/>
+          </a:lnRef>
+          <a:fillRef idx="3">
+            <a:schemeClr val="accent1"/>
+          </a:fillRef>
+          <a:effectRef idx="2">
+            <a:schemeClr val="accent1"/>
+          </a:effectRef>
+          <a:fontRef idx="minor">
+            <a:schemeClr val="lt1"/>
+          </a:fontRef>
+        </p:style>
+        <p:txBody>
+          <a:bodyPr rtlCol="0" anchor="ctr"/>
+          <a:lstStyle/>
+          <a:p>
+            <a:pPr algn="ctr"/>
+          </a:p>
+        </p:txBody>
+      </p:sp>
+      <p:sp>
+        <p:nvSpPr>
+          <p:cNvPr id="14" name="TextBox 13"/>
+          <p:cNvSpPr txBox="1"/>
+          <p:nvPr/>
+        </p:nvSpPr>
+        <p:spPr>
+          <a:xfrm>
+            <a:off x="6272784" y="1042415"/>
+            <a:ext cx="2788920" cy="329184"/>
+          </a:xfrm>
+          <a:prstGeom prst="rect">
+            <a:avLst/>
+          </a:prstGeom>
+          <a:noFill/>
+        </p:spPr>
+        <p:txBody>
+          <a:bodyPr wrap="square">
+            <a:noAutofit/>
+          </a:bodyPr>
+          <a:lstStyle/>
+          <a:p>
+            <a:pPr algn="ctr"/>
+            <a:r>
+              <a:rPr sz="2200" b="1" i="0">
+                <a:solidFill>
+                  <a:srgbClr val="FFFFFF"/>
+                </a:solidFill>
+                <a:latin typeface="Calibri"/>
+              </a:rPr>
+              <a:t>86</a:t>
+            </a:r>
+          </a:p>
+        </p:txBody>
+      </p:sp>
+      <p:sp>
+        <p:nvSpPr>
+          <p:cNvPr id="15" name="TextBox 14"/>
+          <p:cNvSpPr txBox="1"/>
+          <p:nvPr/>
+        </p:nvSpPr>
+        <p:spPr>
+          <a:xfrm>
+            <a:off x="6272784" y="1371600"/>
+            <a:ext cx="2788920" cy="182880"/>
+          </a:xfrm>
+          <a:prstGeom prst="rect">
+            <a:avLst/>
+          </a:prstGeom>
+          <a:noFill/>
+        </p:spPr>
+        <p:txBody>
+          <a:bodyPr wrap="square">
+            <a:noAutofit/>
+          </a:bodyPr>
+          <a:lstStyle/>
+          <a:p>
+            <a:pPr algn="ctr"/>
+            <a:r>
+              <a:rPr sz="800" b="0" i="0">
+                <a:solidFill>
+                  <a:srgbClr val="FEF2F2"/>
+                </a:solidFill>
+                <a:latin typeface="Calibri"/>
+              </a:rPr>
+              <a:t>books &amp; docs</a:t>
+            </a:r>
+          </a:p>
+        </p:txBody>
+      </p:sp>
+      <p:sp>
+        <p:nvSpPr>
+          <p:cNvPr id="16" name="Rectangle 15"/>
+          <p:cNvSpPr/>
+          <p:nvPr/>
+        </p:nvSpPr>
+        <p:spPr>
+          <a:xfrm>
+            <a:off x="9217152" y="1024128"/>
+            <a:ext cx="2788920" cy="530352"/>
+          </a:xfrm>
+          <a:prstGeom prst="rect">
+            <a:avLst/>
+          </a:prstGeom>
+          <a:solidFill>
+            <a:srgbClr val="C8102E"/>
+          </a:solidFill>
+          <a:ln>
+            <a:noFill/>
+          </a:ln>
+        </p:spPr>
+        <p:style>
+          <a:lnRef idx="1">
+            <a:schemeClr val="accent1"/>
+          </a:lnRef>
+          <a:fillRef idx="3">
+            <a:schemeClr val="accent1"/>
+          </a:fillRef>
+          <a:effectRef idx="2">
+            <a:schemeClr val="accent1"/>
+          </a:effectRef>
+          <a:fontRef idx="minor">
+            <a:schemeClr val="lt1"/>
+          </a:fontRef>
+        </p:style>
+        <p:txBody>
+          <a:bodyPr rtlCol="0" anchor="ctr"/>
+          <a:lstStyle/>
+          <a:p>
+            <a:pPr algn="ctr"/>
+          </a:p>
+        </p:txBody>
+      </p:sp>
+      <p:sp>
+        <p:nvSpPr>
+          <p:cNvPr id="17" name="TextBox 16"/>
+          <p:cNvSpPr txBox="1"/>
+          <p:nvPr/>
+        </p:nvSpPr>
+        <p:spPr>
+          <a:xfrm>
+            <a:off x="9217152" y="1042415"/>
+            <a:ext cx="2788920" cy="329184"/>
+          </a:xfrm>
+          <a:prstGeom prst="rect">
+            <a:avLst/>
+          </a:prstGeom>
+          <a:noFill/>
+        </p:spPr>
+        <p:txBody>
+          <a:bodyPr wrap="square">
+            <a:noAutofit/>
+          </a:bodyPr>
+          <a:lstStyle/>
+          <a:p>
+            <a:pPr algn="ctr"/>
+            <a:r>
+              <a:rPr sz="2200" b="1" i="0">
+                <a:solidFill>
+                  <a:srgbClr val="FFFFFF"/>
+                </a:solidFill>
+                <a:latin typeface="Calibri"/>
+              </a:rPr>
+              <a:t>70+</a:t>
+            </a:r>
+          </a:p>
+        </p:txBody>
+      </p:sp>
+      <p:sp>
+        <p:nvSpPr>
+          <p:cNvPr id="18" name="TextBox 17"/>
+          <p:cNvSpPr txBox="1"/>
+          <p:nvPr/>
+        </p:nvSpPr>
+        <p:spPr>
+          <a:xfrm>
+            <a:off x="9217152" y="1371600"/>
+            <a:ext cx="2788920" cy="182880"/>
+          </a:xfrm>
+          <a:prstGeom prst="rect">
+            <a:avLst/>
+          </a:prstGeom>
+          <a:noFill/>
+        </p:spPr>
+        <p:txBody>
+          <a:bodyPr wrap="square">
+            <a:noAutofit/>
+          </a:bodyPr>
+          <a:lstStyle/>
+          <a:p>
+            <a:pPr algn="ctr"/>
+            <a:r>
+              <a:rPr sz="800" b="0" i="0">
+                <a:solidFill>
+                  <a:srgbClr val="FEF2F2"/>
+                </a:solidFill>
+                <a:latin typeface="Calibri"/>
+              </a:rPr>
+              <a:t>quick answers</a:t>
+            </a:r>
+          </a:p>
+        </p:txBody>
+      </p:sp>
+      <p:sp>
+        <p:nvSpPr>
+          <p:cNvPr id="19" name="Rectangle 18"/>
+          <p:cNvSpPr/>
+          <p:nvPr/>
+        </p:nvSpPr>
+        <p:spPr>
+          <a:xfrm>
+            <a:off x="384048" y="1664208"/>
+            <a:ext cx="5532120" cy="237744"/>
+          </a:xfrm>
+          <a:prstGeom prst="rect">
+            <a:avLst/>
+          </a:prstGeom>
+          <a:solidFill>
+            <a:srgbClr val="C8102E"/>
+          </a:solidFill>
+          <a:ln>
+            <a:noFill/>
+          </a:ln>
+        </p:spPr>
+        <p:style>
+          <a:lnRef idx="1">
+            <a:schemeClr val="accent1"/>
+          </a:lnRef>
+          <a:fillRef idx="3">
+            <a:schemeClr val="accent1"/>
+          </a:fillRef>
+          <a:effectRef idx="2">
+            <a:schemeClr val="accent1"/>
+          </a:effectRef>
+          <a:fontRef idx="minor">
+            <a:schemeClr val="lt1"/>
+          </a:fontRef>
+        </p:style>
+        <p:txBody>
+          <a:bodyPr rtlCol="0" anchor="ctr"/>
+          <a:lstStyle/>
+          <a:p>
+            <a:pPr algn="ctr"/>
+          </a:p>
+        </p:txBody>
+      </p:sp>
+      <p:sp>
+        <p:nvSpPr>
+          <p:cNvPr id="20" name="TextBox 19"/>
+          <p:cNvSpPr txBox="1"/>
+          <p:nvPr/>
+        </p:nvSpPr>
+        <p:spPr>
+          <a:xfrm>
+            <a:off x="475488" y="1691640"/>
+            <a:ext cx="4873752" cy="201168"/>
+          </a:xfrm>
+          <a:prstGeom prst="rect">
+            <a:avLst/>
+          </a:prstGeom>
+          <a:noFill/>
+        </p:spPr>
+        <p:txBody>
+          <a:bodyPr wrap="square">
+            <a:noAutofit/>
+          </a:bodyPr>
+          <a:lstStyle/>
+          <a:p>
+            <a:pPr algn="l"/>
+            <a:r>
+              <a:rPr sz="850" b="1" i="0">
+                <a:solidFill>
+                  <a:srgbClr val="FFFFFF"/>
+                </a:solidFill>
+                <a:latin typeface="Calibri"/>
+              </a:rPr>
+              <a:t>Core Development</a:t>
+            </a:r>
+          </a:p>
+        </p:txBody>
+      </p:sp>
+      <p:sp>
+        <p:nvSpPr>
+          <p:cNvPr id="21" name="TextBox 20"/>
+          <p:cNvSpPr txBox="1"/>
+          <p:nvPr/>
+        </p:nvSpPr>
+        <p:spPr>
+          <a:xfrm>
+            <a:off x="5367528" y="1700784"/>
+            <a:ext cx="530352" cy="182880"/>
           </a:xfrm>
           <a:prstGeom prst="rect">
             <a:avLst/>
@@ -4598,27 +4980,27 @@
           <a:p>
             <a:pPr algn="r"/>
             <a:r>
-              <a:rPr sz="800" b="1" i="0">
-                <a:solidFill>
-                  <a:srgbClr val="D6D3D1"/>
-                </a:solidFill>
-                <a:latin typeface="Calibri"/>
-              </a:rPr>
-              <a:t>Lines</a:t>
-            </a:r>
-          </a:p>
-        </p:txBody>
-      </p:sp>
-      <p:sp>
-        <p:nvSpPr>
-          <p:cNvPr id="12" name="Rectangle 11"/>
+              <a:rPr sz="700" b="1" i="0">
+                <a:solidFill>
+                  <a:srgbClr val="FEF2F2"/>
+                </a:solidFill>
+                <a:latin typeface="Calibri"/>
+              </a:rPr>
+              <a:t>§1–22</a:t>
+            </a:r>
+          </a:p>
+        </p:txBody>
+      </p:sp>
+      <p:sp>
+        <p:nvSpPr>
+          <p:cNvPr id="22" name="Rectangle 21"/>
           <p:cNvSpPr/>
           <p:nvPr/>
         </p:nvSpPr>
         <p:spPr>
           <a:xfrm>
-            <a:off x="384048" y="1280160"/>
-            <a:ext cx="5532120" cy="338328"/>
+            <a:off x="384048" y="1901952"/>
+            <a:ext cx="5532120" cy="621792"/>
           </a:xfrm>
           <a:prstGeom prst="rect">
             <a:avLst/>
@@ -4656,84 +5038,14 @@
       </p:sp>
       <p:sp>
         <p:nvSpPr>
-          <p:cNvPr id="13" name="TextBox 12"/>
-          <p:cNvSpPr txBox="1"/>
-          <p:nvPr/>
-        </p:nvSpPr>
-        <p:spPr>
-          <a:xfrm>
-            <a:off x="457200" y="1344168"/>
-            <a:ext cx="256032" cy="228600"/>
-          </a:xfrm>
-          <a:prstGeom prst="rect">
-            <a:avLst/>
-          </a:prstGeom>
-          <a:noFill/>
-        </p:spPr>
-        <p:txBody>
-          <a:bodyPr wrap="square">
-            <a:noAutofit/>
-          </a:bodyPr>
-          <a:lstStyle/>
-          <a:p>
-            <a:pPr algn="l"/>
-            <a:r>
-              <a:rPr sz="800" b="1" i="0">
-                <a:solidFill>
-                  <a:srgbClr val="C8102E"/>
-                </a:solidFill>
-                <a:latin typeface="Calibri"/>
-              </a:rPr>
-              <a:t>1</a:t>
-            </a:r>
-          </a:p>
-        </p:txBody>
-      </p:sp>
-      <p:sp>
-        <p:nvSpPr>
-          <p:cNvPr id="14" name="TextBox 13"/>
-          <p:cNvSpPr txBox="1"/>
-          <p:nvPr/>
-        </p:nvSpPr>
-        <p:spPr>
-          <a:xfrm>
-            <a:off x="731520" y="1344168"/>
-            <a:ext cx="1993392" cy="228600"/>
-          </a:xfrm>
-          <a:prstGeom prst="rect">
-            <a:avLst/>
-          </a:prstGeom>
-          <a:noFill/>
-        </p:spPr>
-        <p:txBody>
-          <a:bodyPr wrap="square">
-            <a:noAutofit/>
-          </a:bodyPr>
-          <a:lstStyle/>
-          <a:p>
-            <a:pPr algn="l"/>
-            <a:r>
-              <a:rPr sz="800" b="1" i="0">
-                <a:solidFill>
-                  <a:srgbClr val="1C1917"/>
-                </a:solidFill>
-                <a:latin typeface="Calibri"/>
-              </a:rPr>
-              <a:t>FastAPI &amp; SQLAlchemy</a:t>
-            </a:r>
-          </a:p>
-        </p:txBody>
-      </p:sp>
-      <p:sp>
-        <p:nvSpPr>
-          <p:cNvPr id="15" name="TextBox 14"/>
-          <p:cNvSpPr txBox="1"/>
-          <p:nvPr/>
-        </p:nvSpPr>
-        <p:spPr>
-          <a:xfrm>
-            <a:off x="2779776" y="1344168"/>
-            <a:ext cx="2514600" cy="228600"/>
+          <p:cNvPr id="23" name="TextBox 22"/>
+          <p:cNvSpPr txBox="1"/>
+          <p:nvPr/>
+        </p:nvSpPr>
+        <p:spPr>
+          <a:xfrm>
+            <a:off x="475488" y="1938528"/>
+            <a:ext cx="5349240" cy="548640"/>
           </a:xfrm>
           <a:prstGeom prst="rect">
             <a:avLst/>
@@ -4750,25 +5062,103 @@
             <a:r>
               <a:rPr sz="750" b="0" i="0">
                 <a:solidFill>
-                  <a:srgbClr val="78716C"/>
-                </a:solidFill>
-                <a:latin typeface="Calibri"/>
-              </a:rPr>
-              <a:t>FastAPI docs, SQLAlchemy docs</a:t>
-            </a:r>
-          </a:p>
-        </p:txBody>
-      </p:sp>
-      <p:sp>
-        <p:nvSpPr>
-          <p:cNvPr id="16" name="TextBox 15"/>
-          <p:cNvSpPr txBox="1"/>
-          <p:nvPr/>
-        </p:nvSpPr>
-        <p:spPr>
-          <a:xfrm>
-            <a:off x="5458968" y="1344168"/>
-            <a:ext cx="411480" cy="228600"/>
+                  <a:srgbClr val="44403C"/>
+                </a:solidFill>
+                <a:latin typeface="Calibri"/>
+              </a:rPr>
+              <a:t>Python · SQL · FastAPI · Docker · Git · React/JS · JWT · HTTP · Linux · Security · Pydantic · async · pytest</a:t>
+            </a:r>
+          </a:p>
+        </p:txBody>
+      </p:sp>
+      <p:sp>
+        <p:nvSpPr>
+          <p:cNvPr id="24" name="Rectangle 23"/>
+          <p:cNvSpPr/>
+          <p:nvPr/>
+        </p:nvSpPr>
+        <p:spPr>
+          <a:xfrm>
+            <a:off x="384048" y="2560320"/>
+            <a:ext cx="5532120" cy="237744"/>
+          </a:xfrm>
+          <a:prstGeom prst="rect">
+            <a:avLst/>
+          </a:prstGeom>
+          <a:solidFill>
+            <a:srgbClr val="C8102E"/>
+          </a:solidFill>
+          <a:ln>
+            <a:noFill/>
+          </a:ln>
+        </p:spPr>
+        <p:style>
+          <a:lnRef idx="1">
+            <a:schemeClr val="accent1"/>
+          </a:lnRef>
+          <a:fillRef idx="3">
+            <a:schemeClr val="accent1"/>
+          </a:fillRef>
+          <a:effectRef idx="2">
+            <a:schemeClr val="accent1"/>
+          </a:effectRef>
+          <a:fontRef idx="minor">
+            <a:schemeClr val="lt1"/>
+          </a:fontRef>
+        </p:style>
+        <p:txBody>
+          <a:bodyPr rtlCol="0" anchor="ctr"/>
+          <a:lstStyle/>
+          <a:p>
+            <a:pPr algn="ctr"/>
+          </a:p>
+        </p:txBody>
+      </p:sp>
+      <p:sp>
+        <p:nvSpPr>
+          <p:cNvPr id="25" name="TextBox 24"/>
+          <p:cNvSpPr txBox="1"/>
+          <p:nvPr/>
+        </p:nvSpPr>
+        <p:spPr>
+          <a:xfrm>
+            <a:off x="475488" y="2587751"/>
+            <a:ext cx="4873752" cy="201168"/>
+          </a:xfrm>
+          <a:prstGeom prst="rect">
+            <a:avLst/>
+          </a:prstGeom>
+          <a:noFill/>
+        </p:spPr>
+        <p:txBody>
+          <a:bodyPr wrap="square">
+            <a:noAutofit/>
+          </a:bodyPr>
+          <a:lstStyle/>
+          <a:p>
+            <a:pPr algn="l"/>
+            <a:r>
+              <a:rPr sz="850" b="1" i="0">
+                <a:solidFill>
+                  <a:srgbClr val="FFFFFF"/>
+                </a:solidFill>
+                <a:latin typeface="Calibri"/>
+              </a:rPr>
+              <a:t>AI &amp; Prompt Engineering</a:t>
+            </a:r>
+          </a:p>
+        </p:txBody>
+      </p:sp>
+      <p:sp>
+        <p:nvSpPr>
+          <p:cNvPr id="26" name="TextBox 25"/>
+          <p:cNvSpPr txBox="1"/>
+          <p:nvPr/>
+        </p:nvSpPr>
+        <p:spPr>
+          <a:xfrm>
+            <a:off x="5367528" y="2596896"/>
+            <a:ext cx="530352" cy="182880"/>
           </a:xfrm>
           <a:prstGeom prst="rect">
             <a:avLst/>
@@ -4783,27 +5173,27 @@
           <a:p>
             <a:pPr algn="r"/>
             <a:r>
-              <a:rPr sz="800" b="0" i="0">
-                <a:solidFill>
-                  <a:srgbClr val="44403C"/>
-                </a:solidFill>
-                <a:latin typeface="Calibri"/>
-              </a:rPr>
-              <a:t>~180</a:t>
-            </a:r>
-          </a:p>
-        </p:txBody>
-      </p:sp>
-      <p:sp>
-        <p:nvSpPr>
-          <p:cNvPr id="17" name="Rectangle 16"/>
+              <a:rPr sz="700" b="1" i="0">
+                <a:solidFill>
+                  <a:srgbClr val="FEF2F2"/>
+                </a:solidFill>
+                <a:latin typeface="Calibri"/>
+              </a:rPr>
+              <a:t>§20, §23–25, §58–65, §72–74</a:t>
+            </a:r>
+          </a:p>
+        </p:txBody>
+      </p:sp>
+      <p:sp>
+        <p:nvSpPr>
+          <p:cNvPr id="27" name="Rectangle 26"/>
           <p:cNvSpPr/>
           <p:nvPr/>
         </p:nvSpPr>
         <p:spPr>
           <a:xfrm>
-            <a:off x="384048" y="1618488"/>
-            <a:ext cx="5532120" cy="338328"/>
+            <a:off x="384048" y="2798063"/>
+            <a:ext cx="5532120" cy="621792"/>
           </a:xfrm>
           <a:prstGeom prst="rect">
             <a:avLst/>
@@ -4841,84 +5231,14 @@
       </p:sp>
       <p:sp>
         <p:nvSpPr>
-          <p:cNvPr id="18" name="TextBox 17"/>
-          <p:cNvSpPr txBox="1"/>
-          <p:nvPr/>
-        </p:nvSpPr>
-        <p:spPr>
-          <a:xfrm>
-            <a:off x="457200" y="1682496"/>
-            <a:ext cx="256032" cy="228600"/>
-          </a:xfrm>
-          <a:prstGeom prst="rect">
-            <a:avLst/>
-          </a:prstGeom>
-          <a:noFill/>
-        </p:spPr>
-        <p:txBody>
-          <a:bodyPr wrap="square">
-            <a:noAutofit/>
-          </a:bodyPr>
-          <a:lstStyle/>
-          <a:p>
-            <a:pPr algn="l"/>
-            <a:r>
-              <a:rPr sz="800" b="1" i="0">
-                <a:solidFill>
-                  <a:srgbClr val="C8102E"/>
-                </a:solidFill>
-                <a:latin typeface="Calibri"/>
-              </a:rPr>
-              <a:t>2</a:t>
-            </a:r>
-          </a:p>
-        </p:txBody>
-      </p:sp>
-      <p:sp>
-        <p:nvSpPr>
-          <p:cNvPr id="19" name="TextBox 18"/>
-          <p:cNvSpPr txBox="1"/>
-          <p:nvPr/>
-        </p:nvSpPr>
-        <p:spPr>
-          <a:xfrm>
-            <a:off x="731520" y="1682496"/>
-            <a:ext cx="1993392" cy="228600"/>
-          </a:xfrm>
-          <a:prstGeom prst="rect">
-            <a:avLst/>
-          </a:prstGeom>
-          <a:noFill/>
-        </p:spPr>
-        <p:txBody>
-          <a:bodyPr wrap="square">
-            <a:noAutofit/>
-          </a:bodyPr>
-          <a:lstStyle/>
-          <a:p>
-            <a:pPr algn="l"/>
-            <a:r>
-              <a:rPr sz="800" b="1" i="0">
-                <a:solidFill>
-                  <a:srgbClr val="1C1917"/>
-                </a:solidFill>
-                <a:latin typeface="Calibri"/>
-              </a:rPr>
-              <a:t>React Fundamentals</a:t>
-            </a:r>
-          </a:p>
-        </p:txBody>
-      </p:sp>
-      <p:sp>
-        <p:nvSpPr>
-          <p:cNvPr id="20" name="TextBox 19"/>
-          <p:cNvSpPr txBox="1"/>
-          <p:nvPr/>
-        </p:nvSpPr>
-        <p:spPr>
-          <a:xfrm>
-            <a:off x="2779776" y="1682496"/>
-            <a:ext cx="2514600" cy="228600"/>
+          <p:cNvPr id="28" name="TextBox 27"/>
+          <p:cNvSpPr txBox="1"/>
+          <p:nvPr/>
+        </p:nvSpPr>
+        <p:spPr>
+          <a:xfrm>
+            <a:off x="475488" y="2834639"/>
+            <a:ext cx="5349240" cy="548640"/>
           </a:xfrm>
           <a:prstGeom prst="rect">
             <a:avLst/>
@@ -4935,25 +5255,103 @@
             <a:r>
               <a:rPr sz="750" b="0" i="0">
                 <a:solidFill>
-                  <a:srgbClr val="78716C"/>
-                </a:solidFill>
-                <a:latin typeface="Calibri"/>
-              </a:rPr>
-              <a:t>React docs</a:t>
-            </a:r>
-          </a:p>
-        </p:txBody>
-      </p:sp>
-      <p:sp>
-        <p:nvSpPr>
-          <p:cNvPr id="21" name="TextBox 20"/>
-          <p:cNvSpPr txBox="1"/>
-          <p:nvPr/>
-        </p:nvSpPr>
-        <p:spPr>
-          <a:xfrm>
-            <a:off x="5458968" y="1682496"/>
-            <a:ext cx="411480" cy="228600"/>
+                  <a:srgbClr val="44403C"/>
+                </a:solidFill>
+                <a:latin typeface="Calibri"/>
+              </a:rPr>
+              <a:t>Claude · AI Agents · Copilot · ChatGPT · AI Content Creation · Surveillance AI · Dynamics 365 AI · 600+ prompts</a:t>
+            </a:r>
+          </a:p>
+        </p:txBody>
+      </p:sp>
+      <p:sp>
+        <p:nvSpPr>
+          <p:cNvPr id="29" name="Rectangle 28"/>
+          <p:cNvSpPr/>
+          <p:nvPr/>
+        </p:nvSpPr>
+        <p:spPr>
+          <a:xfrm>
+            <a:off x="384048" y="3456432"/>
+            <a:ext cx="5532120" cy="237744"/>
+          </a:xfrm>
+          <a:prstGeom prst="rect">
+            <a:avLst/>
+          </a:prstGeom>
+          <a:solidFill>
+            <a:srgbClr val="C8102E"/>
+          </a:solidFill>
+          <a:ln>
+            <a:noFill/>
+          </a:ln>
+        </p:spPr>
+        <p:style>
+          <a:lnRef idx="1">
+            <a:schemeClr val="accent1"/>
+          </a:lnRef>
+          <a:fillRef idx="3">
+            <a:schemeClr val="accent1"/>
+          </a:fillRef>
+          <a:effectRef idx="2">
+            <a:schemeClr val="accent1"/>
+          </a:effectRef>
+          <a:fontRef idx="minor">
+            <a:schemeClr val="lt1"/>
+          </a:fontRef>
+        </p:style>
+        <p:txBody>
+          <a:bodyPr rtlCol="0" anchor="ctr"/>
+          <a:lstStyle/>
+          <a:p>
+            <a:pPr algn="ctr"/>
+          </a:p>
+        </p:txBody>
+      </p:sp>
+      <p:sp>
+        <p:nvSpPr>
+          <p:cNvPr id="30" name="TextBox 29"/>
+          <p:cNvSpPr txBox="1"/>
+          <p:nvPr/>
+        </p:nvSpPr>
+        <p:spPr>
+          <a:xfrm>
+            <a:off x="475488" y="3483864"/>
+            <a:ext cx="4873752" cy="201168"/>
+          </a:xfrm>
+          <a:prstGeom prst="rect">
+            <a:avLst/>
+          </a:prstGeom>
+          <a:noFill/>
+        </p:spPr>
+        <p:txBody>
+          <a:bodyPr wrap="square">
+            <a:noAutofit/>
+          </a:bodyPr>
+          <a:lstStyle/>
+          <a:p>
+            <a:pPr algn="l"/>
+            <a:r>
+              <a:rPr sz="850" b="1" i="0">
+                <a:solidFill>
+                  <a:srgbClr val="FFFFFF"/>
+                </a:solidFill>
+                <a:latin typeface="Calibri"/>
+              </a:rPr>
+              <a:t>Banking · Payments · Open Banking</a:t>
+            </a:r>
+          </a:p>
+        </p:txBody>
+      </p:sp>
+      <p:sp>
+        <p:nvSpPr>
+          <p:cNvPr id="31" name="TextBox 30"/>
+          <p:cNvSpPr txBox="1"/>
+          <p:nvPr/>
+        </p:nvSpPr>
+        <p:spPr>
+          <a:xfrm>
+            <a:off x="5367528" y="3493008"/>
+            <a:ext cx="530352" cy="182880"/>
           </a:xfrm>
           <a:prstGeom prst="rect">
             <a:avLst/>
@@ -4968,27 +5366,27 @@
           <a:p>
             <a:pPr algn="r"/>
             <a:r>
-              <a:rPr sz="800" b="0" i="0">
-                <a:solidFill>
-                  <a:srgbClr val="44403C"/>
-                </a:solidFill>
-                <a:latin typeface="Calibri"/>
-              </a:rPr>
-              <a:t>~150</a:t>
-            </a:r>
-          </a:p>
-        </p:txBody>
-      </p:sp>
-      <p:sp>
-        <p:nvSpPr>
-          <p:cNvPr id="22" name="Rectangle 21"/>
+              <a:rPr sz="700" b="1" i="0">
+                <a:solidFill>
+                  <a:srgbClr val="FEF2F2"/>
+                </a:solidFill>
+                <a:latin typeface="Calibri"/>
+              </a:rPr>
+              <a:t>§35–41, §70–71</a:t>
+            </a:r>
+          </a:p>
+        </p:txBody>
+      </p:sp>
+      <p:sp>
+        <p:nvSpPr>
+          <p:cNvPr id="32" name="Rectangle 31"/>
           <p:cNvSpPr/>
           <p:nvPr/>
         </p:nvSpPr>
         <p:spPr>
           <a:xfrm>
-            <a:off x="384048" y="1956815"/>
-            <a:ext cx="5532120" cy="338328"/>
+            <a:off x="384048" y="3694176"/>
+            <a:ext cx="5532120" cy="621792"/>
           </a:xfrm>
           <a:prstGeom prst="rect">
             <a:avLst/>
@@ -5026,84 +5424,14 @@
       </p:sp>
       <p:sp>
         <p:nvSpPr>
-          <p:cNvPr id="23" name="TextBox 22"/>
-          <p:cNvSpPr txBox="1"/>
-          <p:nvPr/>
-        </p:nvSpPr>
-        <p:spPr>
-          <a:xfrm>
-            <a:off x="457200" y="2020823"/>
-            <a:ext cx="256032" cy="228600"/>
-          </a:xfrm>
-          <a:prstGeom prst="rect">
-            <a:avLst/>
-          </a:prstGeom>
-          <a:noFill/>
-        </p:spPr>
-        <p:txBody>
-          <a:bodyPr wrap="square">
-            <a:noAutofit/>
-          </a:bodyPr>
-          <a:lstStyle/>
-          <a:p>
-            <a:pPr algn="l"/>
-            <a:r>
-              <a:rPr sz="800" b="1" i="0">
-                <a:solidFill>
-                  <a:srgbClr val="C8102E"/>
-                </a:solidFill>
-                <a:latin typeface="Calibri"/>
-              </a:rPr>
-              <a:t>3</a:t>
-            </a:r>
-          </a:p>
-        </p:txBody>
-      </p:sp>
-      <p:sp>
-        <p:nvSpPr>
-          <p:cNvPr id="24" name="TextBox 23"/>
-          <p:cNvSpPr txBox="1"/>
-          <p:nvPr/>
-        </p:nvSpPr>
-        <p:spPr>
-          <a:xfrm>
-            <a:off x="731520" y="2020823"/>
-            <a:ext cx="1993392" cy="228600"/>
-          </a:xfrm>
-          <a:prstGeom prst="rect">
-            <a:avLst/>
-          </a:prstGeom>
-          <a:noFill/>
-        </p:spPr>
-        <p:txBody>
-          <a:bodyPr wrap="square">
-            <a:noAutofit/>
-          </a:bodyPr>
-          <a:lstStyle/>
-          <a:p>
-            <a:pPr algn="l"/>
-            <a:r>
-              <a:rPr sz="800" b="1" i="0">
-                <a:solidFill>
-                  <a:srgbClr val="1C1917"/>
-                </a:solidFill>
-                <a:latin typeface="Calibri"/>
-              </a:rPr>
-              <a:t>Tailwind CSS</a:t>
-            </a:r>
-          </a:p>
-        </p:txBody>
-      </p:sp>
-      <p:sp>
-        <p:nvSpPr>
-          <p:cNvPr id="25" name="TextBox 24"/>
-          <p:cNvSpPr txBox="1"/>
-          <p:nvPr/>
-        </p:nvSpPr>
-        <p:spPr>
-          <a:xfrm>
-            <a:off x="2779776" y="2020823"/>
-            <a:ext cx="2514600" cy="228600"/>
+          <p:cNvPr id="33" name="TextBox 32"/>
+          <p:cNvSpPr txBox="1"/>
+          <p:nvPr/>
+        </p:nvSpPr>
+        <p:spPr>
+          <a:xfrm>
+            <a:off x="475488" y="3730752"/>
+            <a:ext cx="5349240" cy="548640"/>
           </a:xfrm>
           <a:prstGeom prst="rect">
             <a:avLst/>
@@ -5120,25 +5448,103 @@
             <a:r>
               <a:rPr sz="750" b="0" i="0">
                 <a:solidFill>
-                  <a:srgbClr val="78716C"/>
-                </a:solidFill>
-                <a:latin typeface="Calibri"/>
-              </a:rPr>
-              <a:t>Tailwind docs</a:t>
-            </a:r>
-          </a:p>
-        </p:txBody>
-      </p:sp>
-      <p:sp>
-        <p:nvSpPr>
-          <p:cNvPr id="26" name="TextBox 25"/>
-          <p:cNvSpPr txBox="1"/>
-          <p:nvPr/>
-        </p:nvSpPr>
-        <p:spPr>
-          <a:xfrm>
-            <a:off x="5458968" y="2020823"/>
-            <a:ext cx="411480" cy="228600"/>
+                  <a:srgbClr val="44403C"/>
+                </a:solidFill>
+                <a:latin typeface="Calibri"/>
+              </a:rPr>
+              <a:t>PSD2 · MTD HMRC · WCAG · FPS/BACS/CHAPS/SWIFT · KYC/AML · Companies House · Financial Inclusion</a:t>
+            </a:r>
+          </a:p>
+        </p:txBody>
+      </p:sp>
+      <p:sp>
+        <p:nvSpPr>
+          <p:cNvPr id="34" name="Rectangle 33"/>
+          <p:cNvSpPr/>
+          <p:nvPr/>
+        </p:nvSpPr>
+        <p:spPr>
+          <a:xfrm>
+            <a:off x="384048" y="4352544"/>
+            <a:ext cx="5532120" cy="237744"/>
+          </a:xfrm>
+          <a:prstGeom prst="rect">
+            <a:avLst/>
+          </a:prstGeom>
+          <a:solidFill>
+            <a:srgbClr val="C8102E"/>
+          </a:solidFill>
+          <a:ln>
+            <a:noFill/>
+          </a:ln>
+        </p:spPr>
+        <p:style>
+          <a:lnRef idx="1">
+            <a:schemeClr val="accent1"/>
+          </a:lnRef>
+          <a:fillRef idx="3">
+            <a:schemeClr val="accent1"/>
+          </a:fillRef>
+          <a:effectRef idx="2">
+            <a:schemeClr val="accent1"/>
+          </a:effectRef>
+          <a:fontRef idx="minor">
+            <a:schemeClr val="lt1"/>
+          </a:fontRef>
+        </p:style>
+        <p:txBody>
+          <a:bodyPr rtlCol="0" anchor="ctr"/>
+          <a:lstStyle/>
+          <a:p>
+            <a:pPr algn="ctr"/>
+          </a:p>
+        </p:txBody>
+      </p:sp>
+      <p:sp>
+        <p:nvSpPr>
+          <p:cNvPr id="35" name="TextBox 34"/>
+          <p:cNvSpPr txBox="1"/>
+          <p:nvPr/>
+        </p:nvSpPr>
+        <p:spPr>
+          <a:xfrm>
+            <a:off x="475488" y="4379976"/>
+            <a:ext cx="4873752" cy="201168"/>
+          </a:xfrm>
+          <a:prstGeom prst="rect">
+            <a:avLst/>
+          </a:prstGeom>
+          <a:noFill/>
+        </p:spPr>
+        <p:txBody>
+          <a:bodyPr wrap="square">
+            <a:noAutofit/>
+          </a:bodyPr>
+          <a:lstStyle/>
+          <a:p>
+            <a:pPr algn="l"/>
+            <a:r>
+              <a:rPr sz="850" b="1" i="0">
+                <a:solidFill>
+                  <a:srgbClr val="FFFFFF"/>
+                </a:solidFill>
+                <a:latin typeface="Calibri"/>
+              </a:rPr>
+              <a:t>FCA Regulation</a:t>
+            </a:r>
+          </a:p>
+        </p:txBody>
+      </p:sp>
+      <p:sp>
+        <p:nvSpPr>
+          <p:cNvPr id="36" name="TextBox 35"/>
+          <p:cNvSpPr txBox="1"/>
+          <p:nvPr/>
+        </p:nvSpPr>
+        <p:spPr>
+          <a:xfrm>
+            <a:off x="5367528" y="4389120"/>
+            <a:ext cx="530352" cy="182880"/>
           </a:xfrm>
           <a:prstGeom prst="rect">
             <a:avLst/>
@@ -5153,27 +5559,27 @@
           <a:p>
             <a:pPr algn="r"/>
             <a:r>
-              <a:rPr sz="800" b="0" i="0">
-                <a:solidFill>
-                  <a:srgbClr val="44403C"/>
-                </a:solidFill>
-                <a:latin typeface="Calibri"/>
-              </a:rPr>
-              <a:t>~120</a:t>
-            </a:r>
-          </a:p>
-        </p:txBody>
-      </p:sp>
-      <p:sp>
-        <p:nvSpPr>
-          <p:cNvPr id="27" name="Rectangle 26"/>
+              <a:rPr sz="700" b="1" i="0">
+                <a:solidFill>
+                  <a:srgbClr val="FEF2F2"/>
+                </a:solidFill>
+                <a:latin typeface="Calibri"/>
+              </a:rPr>
+              <a:t>§66–70</a:t>
+            </a:r>
+          </a:p>
+        </p:txBody>
+      </p:sp>
+      <p:sp>
+        <p:nvSpPr>
+          <p:cNvPr id="37" name="Rectangle 36"/>
           <p:cNvSpPr/>
           <p:nvPr/>
         </p:nvSpPr>
         <p:spPr>
           <a:xfrm>
-            <a:off x="384048" y="2295144"/>
-            <a:ext cx="5532120" cy="338328"/>
+            <a:off x="384048" y="4590288"/>
+            <a:ext cx="5532120" cy="621792"/>
           </a:xfrm>
           <a:prstGeom prst="rect">
             <a:avLst/>
@@ -5211,84 +5617,14 @@
       </p:sp>
       <p:sp>
         <p:nvSpPr>
-          <p:cNvPr id="28" name="TextBox 27"/>
-          <p:cNvSpPr txBox="1"/>
-          <p:nvPr/>
-        </p:nvSpPr>
-        <p:spPr>
-          <a:xfrm>
-            <a:off x="457200" y="2359151"/>
-            <a:ext cx="256032" cy="228600"/>
-          </a:xfrm>
-          <a:prstGeom prst="rect">
-            <a:avLst/>
-          </a:prstGeom>
-          <a:noFill/>
-        </p:spPr>
-        <p:txBody>
-          <a:bodyPr wrap="square">
-            <a:noAutofit/>
-          </a:bodyPr>
-          <a:lstStyle/>
-          <a:p>
-            <a:pPr algn="l"/>
-            <a:r>
-              <a:rPr sz="800" b="1" i="0">
-                <a:solidFill>
-                  <a:srgbClr val="C8102E"/>
-                </a:solidFill>
-                <a:latin typeface="Calibri"/>
-              </a:rPr>
-              <a:t>4</a:t>
-            </a:r>
-          </a:p>
-        </p:txBody>
-      </p:sp>
-      <p:sp>
-        <p:nvSpPr>
-          <p:cNvPr id="29" name="TextBox 28"/>
-          <p:cNvSpPr txBox="1"/>
-          <p:nvPr/>
-        </p:nvSpPr>
-        <p:spPr>
-          <a:xfrm>
-            <a:off x="731520" y="2359151"/>
-            <a:ext cx="1993392" cy="228600"/>
-          </a:xfrm>
-          <a:prstGeom prst="rect">
-            <a:avLst/>
-          </a:prstGeom>
-          <a:noFill/>
-        </p:spPr>
-        <p:txBody>
-          <a:bodyPr wrap="square">
-            <a:noAutofit/>
-          </a:bodyPr>
-          <a:lstStyle/>
-          <a:p>
-            <a:pPr algn="l"/>
-            <a:r>
-              <a:rPr sz="800" b="1" i="0">
-                <a:solidFill>
-                  <a:srgbClr val="1C1917"/>
-                </a:solidFill>
-                <a:latin typeface="Calibri"/>
-              </a:rPr>
-              <a:t>Git &amp; Version Control</a:t>
-            </a:r>
-          </a:p>
-        </p:txBody>
-      </p:sp>
-      <p:sp>
-        <p:nvSpPr>
-          <p:cNvPr id="30" name="TextBox 29"/>
-          <p:cNvSpPr txBox="1"/>
-          <p:nvPr/>
-        </p:nvSpPr>
-        <p:spPr>
-          <a:xfrm>
-            <a:off x="2779776" y="2359151"/>
-            <a:ext cx="2514600" cy="228600"/>
+          <p:cNvPr id="38" name="TextBox 37"/>
+          <p:cNvSpPr txBox="1"/>
+          <p:nvPr/>
+        </p:nvSpPr>
+        <p:spPr>
+          <a:xfrm>
+            <a:off x="475488" y="4626864"/>
+            <a:ext cx="5349240" cy="548640"/>
           </a:xfrm>
           <a:prstGeom prst="rect">
             <a:avLst/>
@@ -5305,25 +5641,103 @@
             <a:r>
               <a:rPr sz="750" b="0" i="0">
                 <a:solidFill>
-                  <a:srgbClr val="78716C"/>
-                </a:solidFill>
-                <a:latin typeface="Calibri"/>
-              </a:rPr>
-              <a:t>Pro Git</a:t>
-            </a:r>
-          </a:p>
-        </p:txBody>
-      </p:sp>
-      <p:sp>
-        <p:nvSpPr>
-          <p:cNvPr id="31" name="TextBox 30"/>
-          <p:cNvSpPr txBox="1"/>
-          <p:nvPr/>
-        </p:nvSpPr>
-        <p:spPr>
-          <a:xfrm>
-            <a:off x="5458968" y="2359151"/>
-            <a:ext cx="411480" cy="228600"/>
+                  <a:srgbClr val="44403C"/>
+                </a:solidFill>
+                <a:latin typeface="Calibri"/>
+              </a:rPr>
+              <a:t>Consumer Duty PS22/9 · AML MLR 2017 · Ring-Fencing FSMA · BCOBS/CASS · SCA/UK-RTS exemptions</a:t>
+            </a:r>
+          </a:p>
+        </p:txBody>
+      </p:sp>
+      <p:sp>
+        <p:nvSpPr>
+          <p:cNvPr id="39" name="Rectangle 38"/>
+          <p:cNvSpPr/>
+          <p:nvPr/>
+        </p:nvSpPr>
+        <p:spPr>
+          <a:xfrm>
+            <a:off x="384048" y="5248656"/>
+            <a:ext cx="5532120" cy="237744"/>
+          </a:xfrm>
+          <a:prstGeom prst="rect">
+            <a:avLst/>
+          </a:prstGeom>
+          <a:solidFill>
+            <a:srgbClr val="C8102E"/>
+          </a:solidFill>
+          <a:ln>
+            <a:noFill/>
+          </a:ln>
+        </p:spPr>
+        <p:style>
+          <a:lnRef idx="1">
+            <a:schemeClr val="accent1"/>
+          </a:lnRef>
+          <a:fillRef idx="3">
+            <a:schemeClr val="accent1"/>
+          </a:fillRef>
+          <a:effectRef idx="2">
+            <a:schemeClr val="accent1"/>
+          </a:effectRef>
+          <a:fontRef idx="minor">
+            <a:schemeClr val="lt1"/>
+          </a:fontRef>
+        </p:style>
+        <p:txBody>
+          <a:bodyPr rtlCol="0" anchor="ctr"/>
+          <a:lstStyle/>
+          <a:p>
+            <a:pPr algn="ctr"/>
+          </a:p>
+        </p:txBody>
+      </p:sp>
+      <p:sp>
+        <p:nvSpPr>
+          <p:cNvPr id="40" name="TextBox 39"/>
+          <p:cNvSpPr txBox="1"/>
+          <p:nvPr/>
+        </p:nvSpPr>
+        <p:spPr>
+          <a:xfrm>
+            <a:off x="475488" y="5276088"/>
+            <a:ext cx="4873752" cy="201168"/>
+          </a:xfrm>
+          <a:prstGeom prst="rect">
+            <a:avLst/>
+          </a:prstGeom>
+          <a:noFill/>
+        </p:spPr>
+        <p:txBody>
+          <a:bodyPr wrap="square">
+            <a:noAutofit/>
+          </a:bodyPr>
+          <a:lstStyle/>
+          <a:p>
+            <a:pPr algn="l"/>
+            <a:r>
+              <a:rPr sz="850" b="1" i="0">
+                <a:solidFill>
+                  <a:srgbClr val="FFFFFF"/>
+                </a:solidFill>
+                <a:latin typeface="Calibri"/>
+              </a:rPr>
+              <a:t>Data Protection</a:t>
+            </a:r>
+          </a:p>
+        </p:txBody>
+      </p:sp>
+      <p:sp>
+        <p:nvSpPr>
+          <p:cNvPr id="41" name="TextBox 40"/>
+          <p:cNvSpPr txBox="1"/>
+          <p:nvPr/>
+        </p:nvSpPr>
+        <p:spPr>
+          <a:xfrm>
+            <a:off x="5367528" y="5285232"/>
+            <a:ext cx="530352" cy="182880"/>
           </a:xfrm>
           <a:prstGeom prst="rect">
             <a:avLst/>
@@ -5338,27 +5752,27 @@
           <a:p>
             <a:pPr algn="r"/>
             <a:r>
-              <a:rPr sz="800" b="0" i="0">
-                <a:solidFill>
-                  <a:srgbClr val="44403C"/>
-                </a:solidFill>
-                <a:latin typeface="Calibri"/>
-              </a:rPr>
-              <a:t>~200</a:t>
-            </a:r>
-          </a:p>
-        </p:txBody>
-      </p:sp>
-      <p:sp>
-        <p:nvSpPr>
-          <p:cNvPr id="32" name="Rectangle 31"/>
+              <a:rPr sz="700" b="1" i="0">
+                <a:solidFill>
+                  <a:srgbClr val="FEF2F2"/>
+                </a:solidFill>
+                <a:latin typeface="Calibri"/>
+              </a:rPr>
+              <a:t>§75, §77</a:t>
+            </a:r>
+          </a:p>
+        </p:txBody>
+      </p:sp>
+      <p:sp>
+        <p:nvSpPr>
+          <p:cNvPr id="42" name="Rectangle 41"/>
           <p:cNvSpPr/>
           <p:nvPr/>
         </p:nvSpPr>
         <p:spPr>
           <a:xfrm>
-            <a:off x="384048" y="2633472"/>
-            <a:ext cx="5532120" cy="338328"/>
+            <a:off x="384048" y="5486400"/>
+            <a:ext cx="5532120" cy="621792"/>
           </a:xfrm>
           <a:prstGeom prst="rect">
             <a:avLst/>
@@ -5396,84 +5810,14 @@
       </p:sp>
       <p:sp>
         <p:nvSpPr>
-          <p:cNvPr id="33" name="TextBox 32"/>
-          <p:cNvSpPr txBox="1"/>
-          <p:nvPr/>
-        </p:nvSpPr>
-        <p:spPr>
-          <a:xfrm>
-            <a:off x="457200" y="2697479"/>
-            <a:ext cx="256032" cy="228600"/>
-          </a:xfrm>
-          <a:prstGeom prst="rect">
-            <a:avLst/>
-          </a:prstGeom>
-          <a:noFill/>
-        </p:spPr>
-        <p:txBody>
-          <a:bodyPr wrap="square">
-            <a:noAutofit/>
-          </a:bodyPr>
-          <a:lstStyle/>
-          <a:p>
-            <a:pPr algn="l"/>
-            <a:r>
-              <a:rPr sz="800" b="1" i="0">
-                <a:solidFill>
-                  <a:srgbClr val="C8102E"/>
-                </a:solidFill>
-                <a:latin typeface="Calibri"/>
-              </a:rPr>
-              <a:t>5</a:t>
-            </a:r>
-          </a:p>
-        </p:txBody>
-      </p:sp>
-      <p:sp>
-        <p:nvSpPr>
-          <p:cNvPr id="34" name="TextBox 33"/>
-          <p:cNvSpPr txBox="1"/>
-          <p:nvPr/>
-        </p:nvSpPr>
-        <p:spPr>
-          <a:xfrm>
-            <a:off x="731520" y="2697479"/>
-            <a:ext cx="1993392" cy="228600"/>
-          </a:xfrm>
-          <a:prstGeom prst="rect">
-            <a:avLst/>
-          </a:prstGeom>
-          <a:noFill/>
-        </p:spPr>
-        <p:txBody>
-          <a:bodyPr wrap="square">
-            <a:noAutofit/>
-          </a:bodyPr>
-          <a:lstStyle/>
-          <a:p>
-            <a:pPr algn="l"/>
-            <a:r>
-              <a:rPr sz="800" b="1" i="0">
-                <a:solidFill>
-                  <a:srgbClr val="1C1917"/>
-                </a:solidFill>
-                <a:latin typeface="Calibri"/>
-              </a:rPr>
-              <a:t>Docker &amp; Containers</a:t>
-            </a:r>
-          </a:p>
-        </p:txBody>
-      </p:sp>
-      <p:sp>
-        <p:nvSpPr>
-          <p:cNvPr id="35" name="TextBox 34"/>
-          <p:cNvSpPr txBox="1"/>
-          <p:nvPr/>
-        </p:nvSpPr>
-        <p:spPr>
-          <a:xfrm>
-            <a:off x="2779776" y="2697479"/>
-            <a:ext cx="2514600" cy="228600"/>
+          <p:cNvPr id="43" name="TextBox 42"/>
+          <p:cNvSpPr txBox="1"/>
+          <p:nvPr/>
+        </p:nvSpPr>
+        <p:spPr>
+          <a:xfrm>
+            <a:off x="475488" y="5522976"/>
+            <a:ext cx="5349240" cy="548640"/>
           </a:xfrm>
           <a:prstGeom prst="rect">
             <a:avLst/>
@@ -5490,25 +5834,103 @@
             <a:r>
               <a:rPr sz="750" b="0" i="0">
                 <a:solidFill>
-                  <a:srgbClr val="78716C"/>
-                </a:solidFill>
-                <a:latin typeface="Calibri"/>
-              </a:rPr>
-              <a:t>Docker docs</a:t>
-            </a:r>
-          </a:p>
-        </p:txBody>
-      </p:sp>
-      <p:sp>
-        <p:nvSpPr>
-          <p:cNvPr id="36" name="TextBox 35"/>
-          <p:cNvSpPr txBox="1"/>
-          <p:nvPr/>
-        </p:nvSpPr>
-        <p:spPr>
-          <a:xfrm>
-            <a:off x="5458968" y="2697479"/>
-            <a:ext cx="411480" cy="228600"/>
+                  <a:srgbClr val="44403C"/>
+                </a:solidFill>
+                <a:latin typeface="Calibri"/>
+              </a:rPr>
+              <a:t>GDPR/DPDI/Marketing AI (Scheuing, Kogan Page 2024) · GDPR for Startups (Martin, Edward Elgar 2023)</a:t>
+            </a:r>
+          </a:p>
+        </p:txBody>
+      </p:sp>
+      <p:sp>
+        <p:nvSpPr>
+          <p:cNvPr id="44" name="Rectangle 43"/>
+          <p:cNvSpPr/>
+          <p:nvPr/>
+        </p:nvSpPr>
+        <p:spPr>
+          <a:xfrm>
+            <a:off x="6108192" y="1664208"/>
+            <a:ext cx="5532120" cy="237744"/>
+          </a:xfrm>
+          <a:prstGeom prst="rect">
+            <a:avLst/>
+          </a:prstGeom>
+          <a:solidFill>
+            <a:srgbClr val="1C1917"/>
+          </a:solidFill>
+          <a:ln>
+            <a:noFill/>
+          </a:ln>
+        </p:spPr>
+        <p:style>
+          <a:lnRef idx="1">
+            <a:schemeClr val="accent1"/>
+          </a:lnRef>
+          <a:fillRef idx="3">
+            <a:schemeClr val="accent1"/>
+          </a:fillRef>
+          <a:effectRef idx="2">
+            <a:schemeClr val="accent1"/>
+          </a:effectRef>
+          <a:fontRef idx="minor">
+            <a:schemeClr val="lt1"/>
+          </a:fontRef>
+        </p:style>
+        <p:txBody>
+          <a:bodyPr rtlCol="0" anchor="ctr"/>
+          <a:lstStyle/>
+          <a:p>
+            <a:pPr algn="ctr"/>
+          </a:p>
+        </p:txBody>
+      </p:sp>
+      <p:sp>
+        <p:nvSpPr>
+          <p:cNvPr id="45" name="TextBox 44"/>
+          <p:cNvSpPr txBox="1"/>
+          <p:nvPr/>
+        </p:nvSpPr>
+        <p:spPr>
+          <a:xfrm>
+            <a:off x="6199631" y="1691640"/>
+            <a:ext cx="4873752" cy="201168"/>
+          </a:xfrm>
+          <a:prstGeom prst="rect">
+            <a:avLst/>
+          </a:prstGeom>
+          <a:noFill/>
+        </p:spPr>
+        <p:txBody>
+          <a:bodyPr wrap="square">
+            <a:noAutofit/>
+          </a:bodyPr>
+          <a:lstStyle/>
+          <a:p>
+            <a:pPr algn="l"/>
+            <a:r>
+              <a:rPr sz="850" b="1" i="0">
+                <a:solidFill>
+                  <a:srgbClr val="FFFFFF"/>
+                </a:solidFill>
+                <a:latin typeface="Calibri"/>
+              </a:rPr>
+              <a:t>UI · Frontend · Design</a:t>
+            </a:r>
+          </a:p>
+        </p:txBody>
+      </p:sp>
+      <p:sp>
+        <p:nvSpPr>
+          <p:cNvPr id="46" name="TextBox 45"/>
+          <p:cNvSpPr txBox="1"/>
+          <p:nvPr/>
+        </p:nvSpPr>
+        <p:spPr>
+          <a:xfrm>
+            <a:off x="11091672" y="1700784"/>
+            <a:ext cx="530352" cy="182880"/>
           </a:xfrm>
           <a:prstGeom prst="rect">
             <a:avLst/>
@@ -5523,27 +5945,220 @@
           <a:p>
             <a:pPr algn="r"/>
             <a:r>
-              <a:rPr sz="800" b="0" i="0">
+              <a:rPr sz="700" b="1" i="0">
+                <a:solidFill>
+                  <a:srgbClr val="FEF2F2"/>
+                </a:solidFill>
+                <a:latin typeface="Calibri"/>
+              </a:rPr>
+              <a:t>§11, §26, §42, §50–56</a:t>
+            </a:r>
+          </a:p>
+        </p:txBody>
+      </p:sp>
+      <p:sp>
+        <p:nvSpPr>
+          <p:cNvPr id="47" name="Rectangle 46"/>
+          <p:cNvSpPr/>
+          <p:nvPr/>
+        </p:nvSpPr>
+        <p:spPr>
+          <a:xfrm>
+            <a:off x="6108192" y="1901952"/>
+            <a:ext cx="5532120" cy="621792"/>
+          </a:xfrm>
+          <a:prstGeom prst="rect">
+            <a:avLst/>
+          </a:prstGeom>
+          <a:solidFill>
+            <a:srgbClr val="F5F5F4"/>
+          </a:solidFill>
+          <a:ln w="9525">
+            <a:solidFill>
+              <a:srgbClr val="E7E5E4"/>
+            </a:solidFill>
+          </a:ln>
+        </p:spPr>
+        <p:style>
+          <a:lnRef idx="1">
+            <a:schemeClr val="accent1"/>
+          </a:lnRef>
+          <a:fillRef idx="3">
+            <a:schemeClr val="accent1"/>
+          </a:fillRef>
+          <a:effectRef idx="2">
+            <a:schemeClr val="accent1"/>
+          </a:effectRef>
+          <a:fontRef idx="minor">
+            <a:schemeClr val="lt1"/>
+          </a:fontRef>
+        </p:style>
+        <p:txBody>
+          <a:bodyPr rtlCol="0" anchor="ctr"/>
+          <a:lstStyle/>
+          <a:p>
+            <a:pPr algn="ctr"/>
+          </a:p>
+        </p:txBody>
+      </p:sp>
+      <p:sp>
+        <p:nvSpPr>
+          <p:cNvPr id="48" name="TextBox 47"/>
+          <p:cNvSpPr txBox="1"/>
+          <p:nvPr/>
+        </p:nvSpPr>
+        <p:spPr>
+          <a:xfrm>
+            <a:off x="6199631" y="1938528"/>
+            <a:ext cx="5349240" cy="548640"/>
+          </a:xfrm>
+          <a:prstGeom prst="rect">
+            <a:avLst/>
+          </a:prstGeom>
+          <a:noFill/>
+        </p:spPr>
+        <p:txBody>
+          <a:bodyPr wrap="square">
+            <a:noAutofit/>
+          </a:bodyPr>
+          <a:lstStyle/>
+          <a:p>
+            <a:pPr algn="l"/>
+            <a:r>
+              <a:rPr sz="750" b="0" i="0">
                 <a:solidFill>
                   <a:srgbClr val="44403C"/>
                 </a:solidFill>
                 <a:latin typeface="Calibri"/>
               </a:rPr>
-              <a:t>~150</a:t>
-            </a:r>
-          </a:p>
-        </p:txBody>
-      </p:sp>
-      <p:sp>
-        <p:nvSpPr>
-          <p:cNvPr id="37" name="Rectangle 36"/>
+              <a:t>React/JS patterns · Refactoring UI · Tailwind CSS v3 · CSS Animation · Vite/TS · React 19 · UX · Photoshop · KiCad</a:t>
+            </a:r>
+          </a:p>
+        </p:txBody>
+      </p:sp>
+      <p:sp>
+        <p:nvSpPr>
+          <p:cNvPr id="49" name="Rectangle 48"/>
           <p:cNvSpPr/>
           <p:nvPr/>
         </p:nvSpPr>
         <p:spPr>
           <a:xfrm>
-            <a:off x="384048" y="2971800"/>
-            <a:ext cx="5532120" cy="338328"/>
+            <a:off x="6108192" y="2560320"/>
+            <a:ext cx="5532120" cy="237744"/>
+          </a:xfrm>
+          <a:prstGeom prst="rect">
+            <a:avLst/>
+          </a:prstGeom>
+          <a:solidFill>
+            <a:srgbClr val="1C1917"/>
+          </a:solidFill>
+          <a:ln>
+            <a:noFill/>
+          </a:ln>
+        </p:spPr>
+        <p:style>
+          <a:lnRef idx="1">
+            <a:schemeClr val="accent1"/>
+          </a:lnRef>
+          <a:fillRef idx="3">
+            <a:schemeClr val="accent1"/>
+          </a:fillRef>
+          <a:effectRef idx="2">
+            <a:schemeClr val="accent1"/>
+          </a:effectRef>
+          <a:fontRef idx="minor">
+            <a:schemeClr val="lt1"/>
+          </a:fontRef>
+        </p:style>
+        <p:txBody>
+          <a:bodyPr rtlCol="0" anchor="ctr"/>
+          <a:lstStyle/>
+          <a:p>
+            <a:pPr algn="ctr"/>
+          </a:p>
+        </p:txBody>
+      </p:sp>
+      <p:sp>
+        <p:nvSpPr>
+          <p:cNvPr id="50" name="TextBox 49"/>
+          <p:cNvSpPr txBox="1"/>
+          <p:nvPr/>
+        </p:nvSpPr>
+        <p:spPr>
+          <a:xfrm>
+            <a:off x="6199631" y="2587751"/>
+            <a:ext cx="4873752" cy="201168"/>
+          </a:xfrm>
+          <a:prstGeom prst="rect">
+            <a:avLst/>
+          </a:prstGeom>
+          <a:noFill/>
+        </p:spPr>
+        <p:txBody>
+          <a:bodyPr wrap="square">
+            <a:noAutofit/>
+          </a:bodyPr>
+          <a:lstStyle/>
+          <a:p>
+            <a:pPr algn="l"/>
+            <a:r>
+              <a:rPr sz="850" b="1" i="0">
+                <a:solidFill>
+                  <a:srgbClr val="FFFFFF"/>
+                </a:solidFill>
+                <a:latin typeface="Calibri"/>
+              </a:rPr>
+              <a:t>Microsoft Ecosystem</a:t>
+            </a:r>
+          </a:p>
+        </p:txBody>
+      </p:sp>
+      <p:sp>
+        <p:nvSpPr>
+          <p:cNvPr id="51" name="TextBox 50"/>
+          <p:cNvSpPr txBox="1"/>
+          <p:nvPr/>
+        </p:nvSpPr>
+        <p:spPr>
+          <a:xfrm>
+            <a:off x="11091672" y="2596896"/>
+            <a:ext cx="530352" cy="182880"/>
+          </a:xfrm>
+          <a:prstGeom prst="rect">
+            <a:avLst/>
+          </a:prstGeom>
+          <a:noFill/>
+        </p:spPr>
+        <p:txBody>
+          <a:bodyPr wrap="square">
+            <a:noAutofit/>
+          </a:bodyPr>
+          <a:lstStyle/>
+          <a:p>
+            <a:pPr algn="r"/>
+            <a:r>
+              <a:rPr sz="700" b="1" i="0">
+                <a:solidFill>
+                  <a:srgbClr val="FEF2F2"/>
+                </a:solidFill>
+                <a:latin typeface="Calibri"/>
+              </a:rPr>
+              <a:t>§27–33, §64–65, §76</a:t>
+            </a:r>
+          </a:p>
+        </p:txBody>
+      </p:sp>
+      <p:sp>
+        <p:nvSpPr>
+          <p:cNvPr id="52" name="Rectangle 51"/>
+          <p:cNvSpPr/>
+          <p:nvPr/>
+        </p:nvSpPr>
+        <p:spPr>
+          <a:xfrm>
+            <a:off x="6108192" y="2798063"/>
+            <a:ext cx="5532120" cy="621792"/>
           </a:xfrm>
           <a:prstGeom prst="rect">
             <a:avLst/>
@@ -5581,84 +6196,14 @@
       </p:sp>
       <p:sp>
         <p:nvSpPr>
-          <p:cNvPr id="38" name="TextBox 37"/>
-          <p:cNvSpPr txBox="1"/>
-          <p:nvPr/>
-        </p:nvSpPr>
-        <p:spPr>
-          <a:xfrm>
-            <a:off x="457200" y="3035808"/>
-            <a:ext cx="256032" cy="228600"/>
-          </a:xfrm>
-          <a:prstGeom prst="rect">
-            <a:avLst/>
-          </a:prstGeom>
-          <a:noFill/>
-        </p:spPr>
-        <p:txBody>
-          <a:bodyPr wrap="square">
-            <a:noAutofit/>
-          </a:bodyPr>
-          <a:lstStyle/>
-          <a:p>
-            <a:pPr algn="l"/>
-            <a:r>
-              <a:rPr sz="800" b="1" i="0">
-                <a:solidFill>
-                  <a:srgbClr val="C8102E"/>
-                </a:solidFill>
-                <a:latin typeface="Calibri"/>
-              </a:rPr>
-              <a:t>6</a:t>
-            </a:r>
-          </a:p>
-        </p:txBody>
-      </p:sp>
-      <p:sp>
-        <p:nvSpPr>
-          <p:cNvPr id="39" name="TextBox 38"/>
-          <p:cNvSpPr txBox="1"/>
-          <p:nvPr/>
-        </p:nvSpPr>
-        <p:spPr>
-          <a:xfrm>
-            <a:off x="731520" y="3035808"/>
-            <a:ext cx="1993392" cy="228600"/>
-          </a:xfrm>
-          <a:prstGeom prst="rect">
-            <a:avLst/>
-          </a:prstGeom>
-          <a:noFill/>
-        </p:spPr>
-        <p:txBody>
-          <a:bodyPr wrap="square">
-            <a:noAutofit/>
-          </a:bodyPr>
-          <a:lstStyle/>
-          <a:p>
-            <a:pPr algn="l"/>
-            <a:r>
-              <a:rPr sz="800" b="1" i="0">
-                <a:solidFill>
-                  <a:srgbClr val="1C1917"/>
-                </a:solidFill>
-                <a:latin typeface="Calibri"/>
-              </a:rPr>
-              <a:t>Python Best Practices</a:t>
-            </a:r>
-          </a:p>
-        </p:txBody>
-      </p:sp>
-      <p:sp>
-        <p:nvSpPr>
-          <p:cNvPr id="40" name="TextBox 39"/>
-          <p:cNvSpPr txBox="1"/>
-          <p:nvPr/>
-        </p:nvSpPr>
-        <p:spPr>
-          <a:xfrm>
-            <a:off x="2779776" y="3035808"/>
-            <a:ext cx="2514600" cy="228600"/>
+          <p:cNvPr id="53" name="TextBox 52"/>
+          <p:cNvSpPr txBox="1"/>
+          <p:nvPr/>
+        </p:nvSpPr>
+        <p:spPr>
+          <a:xfrm>
+            <a:off x="6199631" y="2834639"/>
+            <a:ext cx="5349240" cy="548640"/>
           </a:xfrm>
           <a:prstGeom prst="rect">
             <a:avLst/>
@@ -5675,25 +6220,103 @@
             <a:r>
               <a:rPr sz="750" b="0" i="0">
                 <a:solidFill>
-                  <a:srgbClr val="78716C"/>
-                </a:solidFill>
-                <a:latin typeface="Calibri"/>
-              </a:rPr>
-              <a:t>Fluent Python</a:t>
-            </a:r>
-          </a:p>
-        </p:txBody>
-      </p:sp>
-      <p:sp>
-        <p:nvSpPr>
-          <p:cNvPr id="41" name="TextBox 40"/>
-          <p:cNvSpPr txBox="1"/>
-          <p:nvPr/>
-        </p:nvSpPr>
-        <p:spPr>
-          <a:xfrm>
-            <a:off x="5458968" y="3035808"/>
-            <a:ext cx="411480" cy="228600"/>
+                  <a:srgbClr val="44403C"/>
+                </a:solidFill>
+                <a:latin typeface="Calibri"/>
+              </a:rPr>
+              <a:t>Power Teams · Power BI (×2) · PowerPoint (×2) · SharePoint · Dynamics 365 BC AL · Azure AI Engineer AI-102</a:t>
+            </a:r>
+          </a:p>
+        </p:txBody>
+      </p:sp>
+      <p:sp>
+        <p:nvSpPr>
+          <p:cNvPr id="54" name="Rectangle 53"/>
+          <p:cNvSpPr/>
+          <p:nvPr/>
+        </p:nvSpPr>
+        <p:spPr>
+          <a:xfrm>
+            <a:off x="6108192" y="3456432"/>
+            <a:ext cx="5532120" cy="237744"/>
+          </a:xfrm>
+          <a:prstGeom prst="rect">
+            <a:avLst/>
+          </a:prstGeom>
+          <a:solidFill>
+            <a:srgbClr val="1C1917"/>
+          </a:solidFill>
+          <a:ln>
+            <a:noFill/>
+          </a:ln>
+        </p:spPr>
+        <p:style>
+          <a:lnRef idx="1">
+            <a:schemeClr val="accent1"/>
+          </a:lnRef>
+          <a:fillRef idx="3">
+            <a:schemeClr val="accent1"/>
+          </a:fillRef>
+          <a:effectRef idx="2">
+            <a:schemeClr val="accent1"/>
+          </a:effectRef>
+          <a:fontRef idx="minor">
+            <a:schemeClr val="lt1"/>
+          </a:fontRef>
+        </p:style>
+        <p:txBody>
+          <a:bodyPr rtlCol="0" anchor="ctr"/>
+          <a:lstStyle/>
+          <a:p>
+            <a:pPr algn="ctr"/>
+          </a:p>
+        </p:txBody>
+      </p:sp>
+      <p:sp>
+        <p:nvSpPr>
+          <p:cNvPr id="55" name="TextBox 54"/>
+          <p:cNvSpPr txBox="1"/>
+          <p:nvPr/>
+        </p:nvSpPr>
+        <p:spPr>
+          <a:xfrm>
+            <a:off x="6199631" y="3483864"/>
+            <a:ext cx="4873752" cy="201168"/>
+          </a:xfrm>
+          <a:prstGeom prst="rect">
+            <a:avLst/>
+          </a:prstGeom>
+          <a:noFill/>
+        </p:spPr>
+        <p:txBody>
+          <a:bodyPr wrap="square">
+            <a:noAutofit/>
+          </a:bodyPr>
+          <a:lstStyle/>
+          <a:p>
+            <a:pPr algn="l"/>
+            <a:r>
+              <a:rPr sz="850" b="1" i="0">
+                <a:solidFill>
+                  <a:srgbClr val="FFFFFF"/>
+                </a:solidFill>
+                <a:latin typeface="Calibri"/>
+              </a:rPr>
+              <a:t>Employment &amp; Equality Law</a:t>
+            </a:r>
+          </a:p>
+        </p:txBody>
+      </p:sp>
+      <p:sp>
+        <p:nvSpPr>
+          <p:cNvPr id="56" name="TextBox 55"/>
+          <p:cNvSpPr txBox="1"/>
+          <p:nvPr/>
+        </p:nvSpPr>
+        <p:spPr>
+          <a:xfrm>
+            <a:off x="11091672" y="3493008"/>
+            <a:ext cx="530352" cy="182880"/>
           </a:xfrm>
           <a:prstGeom prst="rect">
             <a:avLst/>
@@ -5708,27 +6331,27 @@
           <a:p>
             <a:pPr algn="r"/>
             <a:r>
-              <a:rPr sz="800" b="0" i="0">
-                <a:solidFill>
-                  <a:srgbClr val="44403C"/>
-                </a:solidFill>
-                <a:latin typeface="Calibri"/>
-              </a:rPr>
-              <a:t>~180</a:t>
-            </a:r>
-          </a:p>
-        </p:txBody>
-      </p:sp>
-      <p:sp>
-        <p:nvSpPr>
-          <p:cNvPr id="42" name="Rectangle 41"/>
+              <a:rPr sz="700" b="1" i="0">
+                <a:solidFill>
+                  <a:srgbClr val="FEF2F2"/>
+                </a:solidFill>
+                <a:latin typeface="Calibri"/>
+              </a:rPr>
+              <a:t>§34</a:t>
+            </a:r>
+          </a:p>
+        </p:txBody>
+      </p:sp>
+      <p:sp>
+        <p:nvSpPr>
+          <p:cNvPr id="57" name="Rectangle 56"/>
           <p:cNvSpPr/>
           <p:nvPr/>
         </p:nvSpPr>
         <p:spPr>
           <a:xfrm>
-            <a:off x="384048" y="3310127"/>
-            <a:ext cx="5532120" cy="338328"/>
+            <a:off x="6108192" y="3694176"/>
+            <a:ext cx="5532120" cy="621792"/>
           </a:xfrm>
           <a:prstGeom prst="rect">
             <a:avLst/>
@@ -5766,84 +6389,14 @@
       </p:sp>
       <p:sp>
         <p:nvSpPr>
-          <p:cNvPr id="43" name="TextBox 42"/>
-          <p:cNvSpPr txBox="1"/>
-          <p:nvPr/>
-        </p:nvSpPr>
-        <p:spPr>
-          <a:xfrm>
-            <a:off x="457200" y="3374135"/>
-            <a:ext cx="256032" cy="228600"/>
-          </a:xfrm>
-          <a:prstGeom prst="rect">
-            <a:avLst/>
-          </a:prstGeom>
-          <a:noFill/>
-        </p:spPr>
-        <p:txBody>
-          <a:bodyPr wrap="square">
-            <a:noAutofit/>
-          </a:bodyPr>
-          <a:lstStyle/>
-          <a:p>
-            <a:pPr algn="l"/>
-            <a:r>
-              <a:rPr sz="800" b="1" i="0">
-                <a:solidFill>
-                  <a:srgbClr val="C8102E"/>
-                </a:solidFill>
-                <a:latin typeface="Calibri"/>
-              </a:rPr>
-              <a:t>7</a:t>
-            </a:r>
-          </a:p>
-        </p:txBody>
-      </p:sp>
-      <p:sp>
-        <p:nvSpPr>
-          <p:cNvPr id="44" name="TextBox 43"/>
-          <p:cNvSpPr txBox="1"/>
-          <p:nvPr/>
-        </p:nvSpPr>
-        <p:spPr>
-          <a:xfrm>
-            <a:off x="731520" y="3374135"/>
-            <a:ext cx="1993392" cy="228600"/>
-          </a:xfrm>
-          <a:prstGeom prst="rect">
-            <a:avLst/>
-          </a:prstGeom>
-          <a:noFill/>
-        </p:spPr>
-        <p:txBody>
-          <a:bodyPr wrap="square">
-            <a:noAutofit/>
-          </a:bodyPr>
-          <a:lstStyle/>
-          <a:p>
-            <a:pPr algn="l"/>
-            <a:r>
-              <a:rPr sz="800" b="1" i="0">
-                <a:solidFill>
-                  <a:srgbClr val="1C1917"/>
-                </a:solidFill>
-                <a:latin typeface="Calibri"/>
-              </a:rPr>
-              <a:t>TypeScript</a:t>
-            </a:r>
-          </a:p>
-        </p:txBody>
-      </p:sp>
-      <p:sp>
-        <p:nvSpPr>
-          <p:cNvPr id="45" name="TextBox 44"/>
-          <p:cNvSpPr txBox="1"/>
-          <p:nvPr/>
-        </p:nvSpPr>
-        <p:spPr>
-          <a:xfrm>
-            <a:off x="2779776" y="3374135"/>
-            <a:ext cx="2514600" cy="228600"/>
+          <p:cNvPr id="58" name="TextBox 57"/>
+          <p:cNvSpPr txBox="1"/>
+          <p:nvPr/>
+        </p:nvSpPr>
+        <p:spPr>
+          <a:xfrm>
+            <a:off x="6199631" y="3730752"/>
+            <a:ext cx="5349240" cy="548640"/>
           </a:xfrm>
           <a:prstGeom prst="rect">
             <a:avLst/>
@@ -5860,25 +6413,103 @@
             <a:r>
               <a:rPr sz="750" b="0" i="0">
                 <a:solidFill>
-                  <a:srgbClr val="78716C"/>
-                </a:solidFill>
-                <a:latin typeface="Calibri"/>
-              </a:rPr>
-              <a:t>TypeScript Handbook</a:t>
-            </a:r>
-          </a:p>
-        </p:txBody>
-      </p:sp>
-      <p:sp>
-        <p:nvSpPr>
-          <p:cNvPr id="46" name="TextBox 45"/>
-          <p:cNvSpPr txBox="1"/>
-          <p:nvPr/>
-        </p:nvSpPr>
-        <p:spPr>
-          <a:xfrm>
-            <a:off x="5458968" y="3374135"/>
-            <a:ext cx="411480" cy="228600"/>
+                  <a:srgbClr val="44403C"/>
+                </a:solidFill>
+                <a:latin typeface="Calibri"/>
+              </a:rPr>
+              <a:t>Equality Act 2010 · Nine protected characteristics · WCAG accessibility legal duty · Reasonable adjustments</a:t>
+            </a:r>
+          </a:p>
+        </p:txBody>
+      </p:sp>
+      <p:sp>
+        <p:nvSpPr>
+          <p:cNvPr id="59" name="Rectangle 58"/>
+          <p:cNvSpPr/>
+          <p:nvPr/>
+        </p:nvSpPr>
+        <p:spPr>
+          <a:xfrm>
+            <a:off x="6108192" y="4352544"/>
+            <a:ext cx="5532120" cy="237744"/>
+          </a:xfrm>
+          <a:prstGeom prst="rect">
+            <a:avLst/>
+          </a:prstGeom>
+          <a:solidFill>
+            <a:srgbClr val="1C1917"/>
+          </a:solidFill>
+          <a:ln>
+            <a:noFill/>
+          </a:ln>
+        </p:spPr>
+        <p:style>
+          <a:lnRef idx="1">
+            <a:schemeClr val="accent1"/>
+          </a:lnRef>
+          <a:fillRef idx="3">
+            <a:schemeClr val="accent1"/>
+          </a:fillRef>
+          <a:effectRef idx="2">
+            <a:schemeClr val="accent1"/>
+          </a:effectRef>
+          <a:fontRef idx="minor">
+            <a:schemeClr val="lt1"/>
+          </a:fontRef>
+        </p:style>
+        <p:txBody>
+          <a:bodyPr rtlCol="0" anchor="ctr"/>
+          <a:lstStyle/>
+          <a:p>
+            <a:pPr algn="ctr"/>
+          </a:p>
+        </p:txBody>
+      </p:sp>
+      <p:sp>
+        <p:nvSpPr>
+          <p:cNvPr id="60" name="TextBox 59"/>
+          <p:cNvSpPr txBox="1"/>
+          <p:nvPr/>
+        </p:nvSpPr>
+        <p:spPr>
+          <a:xfrm>
+            <a:off x="6199631" y="4379976"/>
+            <a:ext cx="4873752" cy="201168"/>
+          </a:xfrm>
+          <a:prstGeom prst="rect">
+            <a:avLst/>
+          </a:prstGeom>
+          <a:noFill/>
+        </p:spPr>
+        <p:txBody>
+          <a:bodyPr wrap="square">
+            <a:noAutofit/>
+          </a:bodyPr>
+          <a:lstStyle/>
+          <a:p>
+            <a:pPr algn="l"/>
+            <a:r>
+              <a:rPr sz="850" b="1" i="0">
+                <a:solidFill>
+                  <a:srgbClr val="FFFFFF"/>
+                </a:solidFill>
+                <a:latin typeface="Calibri"/>
+              </a:rPr>
+              <a:t>Electronics · Hardware · IoT</a:t>
+            </a:r>
+          </a:p>
+        </p:txBody>
+      </p:sp>
+      <p:sp>
+        <p:nvSpPr>
+          <p:cNvPr id="61" name="TextBox 60"/>
+          <p:cNvSpPr txBox="1"/>
+          <p:nvPr/>
+        </p:nvSpPr>
+        <p:spPr>
+          <a:xfrm>
+            <a:off x="11091672" y="4389120"/>
+            <a:ext cx="530352" cy="182880"/>
           </a:xfrm>
           <a:prstGeom prst="rect">
             <a:avLst/>
@@ -5893,27 +6524,27 @@
           <a:p>
             <a:pPr algn="r"/>
             <a:r>
-              <a:rPr sz="800" b="0" i="0">
-                <a:solidFill>
-                  <a:srgbClr val="44403C"/>
-                </a:solidFill>
-                <a:latin typeface="Calibri"/>
-              </a:rPr>
-              <a:t>~160</a:t>
-            </a:r>
-          </a:p>
-        </p:txBody>
-      </p:sp>
-      <p:sp>
-        <p:nvSpPr>
-          <p:cNvPr id="47" name="Rectangle 46"/>
+              <a:rPr sz="700" b="1" i="0">
+                <a:solidFill>
+                  <a:srgbClr val="FEF2F2"/>
+                </a:solidFill>
+                <a:latin typeface="Calibri"/>
+              </a:rPr>
+              <a:t>§43–49, §54, §57</a:t>
+            </a:r>
+          </a:p>
+        </p:txBody>
+      </p:sp>
+      <p:sp>
+        <p:nvSpPr>
+          <p:cNvPr id="62" name="Rectangle 61"/>
           <p:cNvSpPr/>
           <p:nvPr/>
         </p:nvSpPr>
         <p:spPr>
           <a:xfrm>
-            <a:off x="384048" y="3648456"/>
-            <a:ext cx="5532120" cy="338328"/>
+            <a:off x="6108192" y="4590288"/>
+            <a:ext cx="5532120" cy="621792"/>
           </a:xfrm>
           <a:prstGeom prst="rect">
             <a:avLst/>
@@ -5951,84 +6582,14 @@
       </p:sp>
       <p:sp>
         <p:nvSpPr>
-          <p:cNvPr id="48" name="TextBox 47"/>
-          <p:cNvSpPr txBox="1"/>
-          <p:nvPr/>
-        </p:nvSpPr>
-        <p:spPr>
-          <a:xfrm>
-            <a:off x="457200" y="3712463"/>
-            <a:ext cx="256032" cy="228600"/>
-          </a:xfrm>
-          <a:prstGeom prst="rect">
-            <a:avLst/>
-          </a:prstGeom>
-          <a:noFill/>
-        </p:spPr>
-        <p:txBody>
-          <a:bodyPr wrap="square">
-            <a:noAutofit/>
-          </a:bodyPr>
-          <a:lstStyle/>
-          <a:p>
-            <a:pPr algn="l"/>
-            <a:r>
-              <a:rPr sz="800" b="1" i="0">
-                <a:solidFill>
-                  <a:srgbClr val="C8102E"/>
-                </a:solidFill>
-                <a:latin typeface="Calibri"/>
-              </a:rPr>
-              <a:t>8</a:t>
-            </a:r>
-          </a:p>
-        </p:txBody>
-      </p:sp>
-      <p:sp>
-        <p:nvSpPr>
-          <p:cNvPr id="49" name="TextBox 48"/>
-          <p:cNvSpPr txBox="1"/>
-          <p:nvPr/>
-        </p:nvSpPr>
-        <p:spPr>
-          <a:xfrm>
-            <a:off x="731520" y="3712463"/>
-            <a:ext cx="1993392" cy="228600"/>
-          </a:xfrm>
-          <a:prstGeom prst="rect">
-            <a:avLst/>
-          </a:prstGeom>
-          <a:noFill/>
-        </p:spPr>
-        <p:txBody>
-          <a:bodyPr wrap="square">
-            <a:noAutofit/>
-          </a:bodyPr>
-          <a:lstStyle/>
-          <a:p>
-            <a:pPr algn="l"/>
-            <a:r>
-              <a:rPr sz="800" b="1" i="0">
-                <a:solidFill>
-                  <a:srgbClr val="1C1917"/>
-                </a:solidFill>
-                <a:latin typeface="Calibri"/>
-              </a:rPr>
-              <a:t>Testing</a:t>
-            </a:r>
-          </a:p>
-        </p:txBody>
-      </p:sp>
-      <p:sp>
-        <p:nvSpPr>
-          <p:cNvPr id="50" name="TextBox 49"/>
-          <p:cNvSpPr txBox="1"/>
-          <p:nvPr/>
-        </p:nvSpPr>
-        <p:spPr>
-          <a:xfrm>
-            <a:off x="2779776" y="3712463"/>
-            <a:ext cx="2514600" cy="228600"/>
+          <p:cNvPr id="63" name="TextBox 62"/>
+          <p:cNvSpPr txBox="1"/>
+          <p:nvPr/>
+        </p:nvSpPr>
+        <p:spPr>
+          <a:xfrm>
+            <a:off x="6199631" y="4626864"/>
+            <a:ext cx="5349240" cy="548640"/>
           </a:xfrm>
           <a:prstGeom prst="rect">
             <a:avLst/>
@@ -6045,25 +6606,103 @@
             <a:r>
               <a:rPr sz="750" b="0" i="0">
                 <a:solidFill>
-                  <a:srgbClr val="78716C"/>
-                </a:solidFill>
-                <a:latin typeface="Calibri"/>
-              </a:rPr>
-              <a:t>Testing library docs</a:t>
-            </a:r>
-          </a:p>
-        </p:txBody>
-      </p:sp>
-      <p:sp>
-        <p:nvSpPr>
-          <p:cNvPr id="51" name="TextBox 50"/>
-          <p:cNvSpPr txBox="1"/>
-          <p:nvPr/>
-        </p:nvSpPr>
-        <p:spPr>
-          <a:xfrm>
-            <a:off x="5458968" y="3712463"/>
-            <a:ext cx="411480" cy="228600"/>
+                  <a:srgbClr val="44403C"/>
+                </a:solidFill>
+                <a:latin typeface="Calibri"/>
+              </a:rPr>
+              <a:t>MakerSpace · Electronics · Mechatronics · Digital Logic · Devices &amp; Circuits · Arduino/IoT · Embedded Linux</a:t>
+            </a:r>
+          </a:p>
+        </p:txBody>
+      </p:sp>
+      <p:sp>
+        <p:nvSpPr>
+          <p:cNvPr id="64" name="Rectangle 63"/>
+          <p:cNvSpPr/>
+          <p:nvPr/>
+        </p:nvSpPr>
+        <p:spPr>
+          <a:xfrm>
+            <a:off x="6108192" y="5248656"/>
+            <a:ext cx="5532120" cy="237744"/>
+          </a:xfrm>
+          <a:prstGeom prst="rect">
+            <a:avLst/>
+          </a:prstGeom>
+          <a:solidFill>
+            <a:srgbClr val="059669"/>
+          </a:solidFill>
+          <a:ln>
+            <a:noFill/>
+          </a:ln>
+        </p:spPr>
+        <p:style>
+          <a:lnRef idx="1">
+            <a:schemeClr val="accent1"/>
+          </a:lnRef>
+          <a:fillRef idx="3">
+            <a:schemeClr val="accent1"/>
+          </a:fillRef>
+          <a:effectRef idx="2">
+            <a:schemeClr val="accent1"/>
+          </a:effectRef>
+          <a:fontRef idx="minor">
+            <a:schemeClr val="lt1"/>
+          </a:fontRef>
+        </p:style>
+        <p:txBody>
+          <a:bodyPr rtlCol="0" anchor="ctr"/>
+          <a:lstStyle/>
+          <a:p>
+            <a:pPr algn="ctr"/>
+          </a:p>
+        </p:txBody>
+      </p:sp>
+      <p:sp>
+        <p:nvSpPr>
+          <p:cNvPr id="65" name="TextBox 64"/>
+          <p:cNvSpPr txBox="1"/>
+          <p:nvPr/>
+        </p:nvSpPr>
+        <p:spPr>
+          <a:xfrm>
+            <a:off x="6199631" y="5276088"/>
+            <a:ext cx="4873752" cy="201168"/>
+          </a:xfrm>
+          <a:prstGeom prst="rect">
+            <a:avLst/>
+          </a:prstGeom>
+          <a:noFill/>
+        </p:spPr>
+        <p:txBody>
+          <a:bodyPr wrap="square">
+            <a:noAutofit/>
+          </a:bodyPr>
+          <a:lstStyle/>
+          <a:p>
+            <a:pPr algn="l"/>
+            <a:r>
+              <a:rPr sz="850" b="1" i="0">
+                <a:solidFill>
+                  <a:srgbClr val="FFFFFF"/>
+                </a:solidFill>
+                <a:latin typeface="Calibri"/>
+              </a:rPr>
+              <a:t>Quick Lookup Decision Index</a:t>
+            </a:r>
+          </a:p>
+        </p:txBody>
+      </p:sp>
+      <p:sp>
+        <p:nvSpPr>
+          <p:cNvPr id="66" name="TextBox 65"/>
+          <p:cNvSpPr txBox="1"/>
+          <p:nvPr/>
+        </p:nvSpPr>
+        <p:spPr>
+          <a:xfrm>
+            <a:off x="11091672" y="5285232"/>
+            <a:ext cx="530352" cy="182880"/>
           </a:xfrm>
           <a:prstGeom prst="rect">
             <a:avLst/>
@@ -6078,27 +6717,27 @@
           <a:p>
             <a:pPr algn="r"/>
             <a:r>
-              <a:rPr sz="800" b="0" i="0">
-                <a:solidFill>
-                  <a:srgbClr val="44403C"/>
-                </a:solidFill>
-                <a:latin typeface="Calibri"/>
-              </a:rPr>
-              <a:t>~140</a:t>
-            </a:r>
-          </a:p>
-        </p:txBody>
-      </p:sp>
-      <p:sp>
-        <p:nvSpPr>
-          <p:cNvPr id="52" name="Rectangle 51"/>
+              <a:rPr sz="700" b="1" i="0">
+                <a:solidFill>
+                  <a:srgbClr val="FEF2F2"/>
+                </a:solidFill>
+                <a:latin typeface="Calibri"/>
+              </a:rPr>
+              <a:t>NEW — Jun 2026</a:t>
+            </a:r>
+          </a:p>
+        </p:txBody>
+      </p:sp>
+      <p:sp>
+        <p:nvSpPr>
+          <p:cNvPr id="67" name="Rectangle 66"/>
           <p:cNvSpPr/>
           <p:nvPr/>
         </p:nvSpPr>
         <p:spPr>
           <a:xfrm>
-            <a:off x="384048" y="3986783"/>
-            <a:ext cx="5532120" cy="338328"/>
+            <a:off x="6108192" y="5486400"/>
+            <a:ext cx="5532120" cy="621792"/>
           </a:xfrm>
           <a:prstGeom prst="rect">
             <a:avLst/>
@@ -6136,84 +6775,14 @@
       </p:sp>
       <p:sp>
         <p:nvSpPr>
-          <p:cNvPr id="53" name="TextBox 52"/>
-          <p:cNvSpPr txBox="1"/>
-          <p:nvPr/>
-        </p:nvSpPr>
-        <p:spPr>
-          <a:xfrm>
-            <a:off x="457200" y="4050791"/>
-            <a:ext cx="256032" cy="228600"/>
-          </a:xfrm>
-          <a:prstGeom prst="rect">
-            <a:avLst/>
-          </a:prstGeom>
-          <a:noFill/>
-        </p:spPr>
-        <p:txBody>
-          <a:bodyPr wrap="square">
-            <a:noAutofit/>
-          </a:bodyPr>
-          <a:lstStyle/>
-          <a:p>
-            <a:pPr algn="l"/>
-            <a:r>
-              <a:rPr sz="800" b="1" i="0">
-                <a:solidFill>
-                  <a:srgbClr val="C8102E"/>
-                </a:solidFill>
-                <a:latin typeface="Calibri"/>
-              </a:rPr>
-              <a:t>9</a:t>
-            </a:r>
-          </a:p>
-        </p:txBody>
-      </p:sp>
-      <p:sp>
-        <p:nvSpPr>
-          <p:cNvPr id="54" name="TextBox 53"/>
-          <p:cNvSpPr txBox="1"/>
-          <p:nvPr/>
-        </p:nvSpPr>
-        <p:spPr>
-          <a:xfrm>
-            <a:off x="731520" y="4050791"/>
-            <a:ext cx="1993392" cy="228600"/>
-          </a:xfrm>
-          <a:prstGeom prst="rect">
-            <a:avLst/>
-          </a:prstGeom>
-          <a:noFill/>
-        </p:spPr>
-        <p:txBody>
-          <a:bodyPr wrap="square">
-            <a:noAutofit/>
-          </a:bodyPr>
-          <a:lstStyle/>
-          <a:p>
-            <a:pPr algn="l"/>
-            <a:r>
-              <a:rPr sz="800" b="1" i="0">
-                <a:solidFill>
-                  <a:srgbClr val="1C1917"/>
-                </a:solidFill>
-                <a:latin typeface="Calibri"/>
-              </a:rPr>
-              <a:t>AWS &amp; Cloud</a:t>
-            </a:r>
-          </a:p>
-        </p:txBody>
-      </p:sp>
-      <p:sp>
-        <p:nvSpPr>
-          <p:cNvPr id="55" name="TextBox 54"/>
-          <p:cNvSpPr txBox="1"/>
-          <p:nvPr/>
-        </p:nvSpPr>
-        <p:spPr>
-          <a:xfrm>
-            <a:off x="2779776" y="4050791"/>
-            <a:ext cx="2514600" cy="228600"/>
+          <p:cNvPr id="68" name="TextBox 67"/>
+          <p:cNvSpPr txBox="1"/>
+          <p:nvPr/>
+        </p:nvSpPr>
+        <p:spPr>
+          <a:xfrm>
+            <a:off x="6199631" y="5522976"/>
+            <a:ext cx="5349240" cy="548640"/>
           </a:xfrm>
           <a:prstGeom prst="rect">
             <a:avLst/>
@@ -6230,800 +6799,25 @@
             <a:r>
               <a:rPr sz="750" b="0" i="0">
                 <a:solidFill>
-                  <a:srgbClr val="78716C"/>
-                </a:solidFill>
-                <a:latin typeface="Calibri"/>
-              </a:rPr>
-              <a:t>AWS docs</a:t>
-            </a:r>
-          </a:p>
-        </p:txBody>
-      </p:sp>
-      <p:sp>
-        <p:nvSpPr>
-          <p:cNvPr id="56" name="TextBox 55"/>
-          <p:cNvSpPr txBox="1"/>
-          <p:nvPr/>
-        </p:nvSpPr>
-        <p:spPr>
-          <a:xfrm>
-            <a:off x="5458968" y="4050791"/>
-            <a:ext cx="411480" cy="228600"/>
-          </a:xfrm>
-          <a:prstGeom prst="rect">
-            <a:avLst/>
-          </a:prstGeom>
-          <a:noFill/>
-        </p:spPr>
-        <p:txBody>
-          <a:bodyPr wrap="square">
-            <a:noAutofit/>
-          </a:bodyPr>
-          <a:lstStyle/>
-          <a:p>
-            <a:pPr algn="r"/>
-            <a:r>
-              <a:rPr sz="800" b="0" i="0">
-                <a:solidFill>
                   <a:srgbClr val="44403C"/>
                 </a:solidFill>
                 <a:latin typeface="Calibri"/>
               </a:rPr>
-              <a:t>~200</a:t>
-            </a:r>
-          </a:p>
-        </p:txBody>
-      </p:sp>
-      <p:sp>
-        <p:nvSpPr>
-          <p:cNvPr id="57" name="Rectangle 56"/>
+              <a:t>70+ answers · 8 themed tables · Design rules · Payment rails · GDPR deadlines · FCA rules · SCA · AI prompt modes</a:t>
+            </a:r>
+          </a:p>
+        </p:txBody>
+      </p:sp>
+      <p:sp>
+        <p:nvSpPr>
+          <p:cNvPr id="69" name="Rectangle 68"/>
           <p:cNvSpPr/>
           <p:nvPr/>
         </p:nvSpPr>
         <p:spPr>
           <a:xfrm>
-            <a:off x="384048" y="4325112"/>
-            <a:ext cx="5532120" cy="338328"/>
-          </a:xfrm>
-          <a:prstGeom prst="rect">
-            <a:avLst/>
-          </a:prstGeom>
-          <a:solidFill>
-            <a:srgbClr val="FFFFFF"/>
-          </a:solidFill>
-          <a:ln w="9525">
-            <a:solidFill>
-              <a:srgbClr val="E7E5E4"/>
-            </a:solidFill>
-          </a:ln>
-        </p:spPr>
-        <p:style>
-          <a:lnRef idx="1">
-            <a:schemeClr val="accent1"/>
-          </a:lnRef>
-          <a:fillRef idx="3">
-            <a:schemeClr val="accent1"/>
-          </a:fillRef>
-          <a:effectRef idx="2">
-            <a:schemeClr val="accent1"/>
-          </a:effectRef>
-          <a:fontRef idx="minor">
-            <a:schemeClr val="lt1"/>
-          </a:fontRef>
-        </p:style>
-        <p:txBody>
-          <a:bodyPr rtlCol="0" anchor="ctr"/>
-          <a:lstStyle/>
-          <a:p>
-            <a:pPr algn="ctr"/>
-          </a:p>
-        </p:txBody>
-      </p:sp>
-      <p:sp>
-        <p:nvSpPr>
-          <p:cNvPr id="58" name="TextBox 57"/>
-          <p:cNvSpPr txBox="1"/>
-          <p:nvPr/>
-        </p:nvSpPr>
-        <p:spPr>
-          <a:xfrm>
-            <a:off x="457200" y="4389120"/>
-            <a:ext cx="256032" cy="228600"/>
-          </a:xfrm>
-          <a:prstGeom prst="rect">
-            <a:avLst/>
-          </a:prstGeom>
-          <a:noFill/>
-        </p:spPr>
-        <p:txBody>
-          <a:bodyPr wrap="square">
-            <a:noAutofit/>
-          </a:bodyPr>
-          <a:lstStyle/>
-          <a:p>
-            <a:pPr algn="l"/>
-            <a:r>
-              <a:rPr sz="800" b="1" i="0">
-                <a:solidFill>
-                  <a:srgbClr val="C8102E"/>
-                </a:solidFill>
-                <a:latin typeface="Calibri"/>
-              </a:rPr>
-              <a:t>10</a:t>
-            </a:r>
-          </a:p>
-        </p:txBody>
-      </p:sp>
-      <p:sp>
-        <p:nvSpPr>
-          <p:cNvPr id="59" name="TextBox 58"/>
-          <p:cNvSpPr txBox="1"/>
-          <p:nvPr/>
-        </p:nvSpPr>
-        <p:spPr>
-          <a:xfrm>
-            <a:off x="731520" y="4389120"/>
-            <a:ext cx="1993392" cy="228600"/>
-          </a:xfrm>
-          <a:prstGeom prst="rect">
-            <a:avLst/>
-          </a:prstGeom>
-          <a:noFill/>
-        </p:spPr>
-        <p:txBody>
-          <a:bodyPr wrap="square">
-            <a:noAutofit/>
-          </a:bodyPr>
-          <a:lstStyle/>
-          <a:p>
-            <a:pPr algn="l"/>
-            <a:r>
-              <a:rPr sz="800" b="1" i="0">
-                <a:solidFill>
-                  <a:srgbClr val="1C1917"/>
-                </a:solidFill>
-                <a:latin typeface="Calibri"/>
-              </a:rPr>
-              <a:t>Security Fundamentals</a:t>
-            </a:r>
-          </a:p>
-        </p:txBody>
-      </p:sp>
-      <p:sp>
-        <p:nvSpPr>
-          <p:cNvPr id="60" name="TextBox 59"/>
-          <p:cNvSpPr txBox="1"/>
-          <p:nvPr/>
-        </p:nvSpPr>
-        <p:spPr>
-          <a:xfrm>
-            <a:off x="2779776" y="4389120"/>
-            <a:ext cx="2514600" cy="228600"/>
-          </a:xfrm>
-          <a:prstGeom prst="rect">
-            <a:avLst/>
-          </a:prstGeom>
-          <a:noFill/>
-        </p:spPr>
-        <p:txBody>
-          <a:bodyPr wrap="square">
-            <a:noAutofit/>
-          </a:bodyPr>
-          <a:lstStyle/>
-          <a:p>
-            <a:pPr algn="l"/>
-            <a:r>
-              <a:rPr sz="750" b="0" i="0">
-                <a:solidFill>
-                  <a:srgbClr val="78716C"/>
-                </a:solidFill>
-                <a:latin typeface="Calibri"/>
-              </a:rPr>
-              <a:t>OWASP</a:t>
-            </a:r>
-          </a:p>
-        </p:txBody>
-      </p:sp>
-      <p:sp>
-        <p:nvSpPr>
-          <p:cNvPr id="61" name="TextBox 60"/>
-          <p:cNvSpPr txBox="1"/>
-          <p:nvPr/>
-        </p:nvSpPr>
-        <p:spPr>
-          <a:xfrm>
-            <a:off x="5458968" y="4389120"/>
-            <a:ext cx="411480" cy="228600"/>
-          </a:xfrm>
-          <a:prstGeom prst="rect">
-            <a:avLst/>
-          </a:prstGeom>
-          <a:noFill/>
-        </p:spPr>
-        <p:txBody>
-          <a:bodyPr wrap="square">
-            <a:noAutofit/>
-          </a:bodyPr>
-          <a:lstStyle/>
-          <a:p>
-            <a:pPr algn="r"/>
-            <a:r>
-              <a:rPr sz="800" b="0" i="0">
-                <a:solidFill>
-                  <a:srgbClr val="44403C"/>
-                </a:solidFill>
-                <a:latin typeface="Calibri"/>
-              </a:rPr>
-              <a:t>~180</a:t>
-            </a:r>
-          </a:p>
-        </p:txBody>
-      </p:sp>
-      <p:sp>
-        <p:nvSpPr>
-          <p:cNvPr id="62" name="Rectangle 61"/>
-          <p:cNvSpPr/>
-          <p:nvPr/>
-        </p:nvSpPr>
-        <p:spPr>
-          <a:xfrm>
-            <a:off x="384048" y="4663440"/>
-            <a:ext cx="5532120" cy="338328"/>
-          </a:xfrm>
-          <a:prstGeom prst="rect">
-            <a:avLst/>
-          </a:prstGeom>
-          <a:solidFill>
-            <a:srgbClr val="F5F5F4"/>
-          </a:solidFill>
-          <a:ln w="9525">
-            <a:solidFill>
-              <a:srgbClr val="E7E5E4"/>
-            </a:solidFill>
-          </a:ln>
-        </p:spPr>
-        <p:style>
-          <a:lnRef idx="1">
-            <a:schemeClr val="accent1"/>
-          </a:lnRef>
-          <a:fillRef idx="3">
-            <a:schemeClr val="accent1"/>
-          </a:fillRef>
-          <a:effectRef idx="2">
-            <a:schemeClr val="accent1"/>
-          </a:effectRef>
-          <a:fontRef idx="minor">
-            <a:schemeClr val="lt1"/>
-          </a:fontRef>
-        </p:style>
-        <p:txBody>
-          <a:bodyPr rtlCol="0" anchor="ctr"/>
-          <a:lstStyle/>
-          <a:p>
-            <a:pPr algn="ctr"/>
-          </a:p>
-        </p:txBody>
-      </p:sp>
-      <p:sp>
-        <p:nvSpPr>
-          <p:cNvPr id="63" name="TextBox 62"/>
-          <p:cNvSpPr txBox="1"/>
-          <p:nvPr/>
-        </p:nvSpPr>
-        <p:spPr>
-          <a:xfrm>
-            <a:off x="457200" y="4727448"/>
-            <a:ext cx="256032" cy="228600"/>
-          </a:xfrm>
-          <a:prstGeom prst="rect">
-            <a:avLst/>
-          </a:prstGeom>
-          <a:noFill/>
-        </p:spPr>
-        <p:txBody>
-          <a:bodyPr wrap="square">
-            <a:noAutofit/>
-          </a:bodyPr>
-          <a:lstStyle/>
-          <a:p>
-            <a:pPr algn="l"/>
-            <a:r>
-              <a:rPr sz="800" b="1" i="0">
-                <a:solidFill>
-                  <a:srgbClr val="C8102E"/>
-                </a:solidFill>
-                <a:latin typeface="Calibri"/>
-              </a:rPr>
-              <a:t>11</a:t>
-            </a:r>
-          </a:p>
-        </p:txBody>
-      </p:sp>
-      <p:sp>
-        <p:nvSpPr>
-          <p:cNvPr id="64" name="TextBox 63"/>
-          <p:cNvSpPr txBox="1"/>
-          <p:nvPr/>
-        </p:nvSpPr>
-        <p:spPr>
-          <a:xfrm>
-            <a:off x="731520" y="4727448"/>
-            <a:ext cx="1993392" cy="228600"/>
-          </a:xfrm>
-          <a:prstGeom prst="rect">
-            <a:avLst/>
-          </a:prstGeom>
-          <a:noFill/>
-        </p:spPr>
-        <p:txBody>
-          <a:bodyPr wrap="square">
-            <a:noAutofit/>
-          </a:bodyPr>
-          <a:lstStyle/>
-          <a:p>
-            <a:pPr algn="l"/>
-            <a:r>
-              <a:rPr sz="800" b="1" i="0">
-                <a:solidFill>
-                  <a:srgbClr val="1C1917"/>
-                </a:solidFill>
-                <a:latin typeface="Calibri"/>
-              </a:rPr>
-              <a:t>React &amp; JS Frontend Patterns</a:t>
-            </a:r>
-          </a:p>
-        </p:txBody>
-      </p:sp>
-      <p:sp>
-        <p:nvSpPr>
-          <p:cNvPr id="65" name="TextBox 64"/>
-          <p:cNvSpPr txBox="1"/>
-          <p:nvPr/>
-        </p:nvSpPr>
-        <p:spPr>
-          <a:xfrm>
-            <a:off x="2779776" y="4727448"/>
-            <a:ext cx="2514600" cy="228600"/>
-          </a:xfrm>
-          <a:prstGeom prst="rect">
-            <a:avLst/>
-          </a:prstGeom>
-          <a:noFill/>
-        </p:spPr>
-        <p:txBody>
-          <a:bodyPr wrap="square">
-            <a:noAutofit/>
-          </a:bodyPr>
-          <a:lstStyle/>
-          <a:p>
-            <a:pPr algn="l"/>
-            <a:r>
-              <a:rPr sz="750" b="0" i="0">
-                <a:solidFill>
-                  <a:srgbClr val="78716C"/>
-                </a:solidFill>
-                <a:latin typeface="Calibri"/>
-              </a:rPr>
-              <a:t>You Don't Know JS · JS Good Parts · Eloquent JS · JS Patterns</a:t>
-            </a:r>
-          </a:p>
-        </p:txBody>
-      </p:sp>
-      <p:sp>
-        <p:nvSpPr>
-          <p:cNvPr id="66" name="TextBox 65"/>
-          <p:cNvSpPr txBox="1"/>
-          <p:nvPr/>
-        </p:nvSpPr>
-        <p:spPr>
-          <a:xfrm>
-            <a:off x="5458968" y="4727448"/>
-            <a:ext cx="411480" cy="228600"/>
-          </a:xfrm>
-          <a:prstGeom prst="rect">
-            <a:avLst/>
-          </a:prstGeom>
-          <a:noFill/>
-        </p:spPr>
-        <p:txBody>
-          <a:bodyPr wrap="square">
-            <a:noAutofit/>
-          </a:bodyPr>
-          <a:lstStyle/>
-          <a:p>
-            <a:pPr algn="r"/>
-            <a:r>
-              <a:rPr sz="800" b="0" i="0">
-                <a:solidFill>
-                  <a:srgbClr val="44403C"/>
-                </a:solidFill>
-                <a:latin typeface="Calibri"/>
-              </a:rPr>
-              <a:t>~350</a:t>
-            </a:r>
-          </a:p>
-        </p:txBody>
-      </p:sp>
-      <p:sp>
-        <p:nvSpPr>
-          <p:cNvPr id="67" name="Rectangle 66"/>
-          <p:cNvSpPr/>
-          <p:nvPr/>
-        </p:nvSpPr>
-        <p:spPr>
-          <a:xfrm>
-            <a:off x="384048" y="5001768"/>
-            <a:ext cx="5532120" cy="338328"/>
-          </a:xfrm>
-          <a:prstGeom prst="rect">
-            <a:avLst/>
-          </a:prstGeom>
-          <a:solidFill>
-            <a:srgbClr val="FFFFFF"/>
-          </a:solidFill>
-          <a:ln w="9525">
-            <a:solidFill>
-              <a:srgbClr val="E7E5E4"/>
-            </a:solidFill>
-          </a:ln>
-        </p:spPr>
-        <p:style>
-          <a:lnRef idx="1">
-            <a:schemeClr val="accent1"/>
-          </a:lnRef>
-          <a:fillRef idx="3">
-            <a:schemeClr val="accent1"/>
-          </a:fillRef>
-          <a:effectRef idx="2">
-            <a:schemeClr val="accent1"/>
-          </a:effectRef>
-          <a:fontRef idx="minor">
-            <a:schemeClr val="lt1"/>
-          </a:fontRef>
-        </p:style>
-        <p:txBody>
-          <a:bodyPr rtlCol="0" anchor="ctr"/>
-          <a:lstStyle/>
-          <a:p>
-            <a:pPr algn="ctr"/>
-          </a:p>
-        </p:txBody>
-      </p:sp>
-      <p:sp>
-        <p:nvSpPr>
-          <p:cNvPr id="68" name="TextBox 67"/>
-          <p:cNvSpPr txBox="1"/>
-          <p:nvPr/>
-        </p:nvSpPr>
-        <p:spPr>
-          <a:xfrm>
-            <a:off x="457200" y="5065776"/>
-            <a:ext cx="256032" cy="228600"/>
-          </a:xfrm>
-          <a:prstGeom prst="rect">
-            <a:avLst/>
-          </a:prstGeom>
-          <a:noFill/>
-        </p:spPr>
-        <p:txBody>
-          <a:bodyPr wrap="square">
-            <a:noAutofit/>
-          </a:bodyPr>
-          <a:lstStyle/>
-          <a:p>
-            <a:pPr algn="l"/>
-            <a:r>
-              <a:rPr sz="800" b="1" i="0">
-                <a:solidFill>
-                  <a:srgbClr val="C8102E"/>
-                </a:solidFill>
-                <a:latin typeface="Calibri"/>
-              </a:rPr>
-              <a:t>12</a:t>
-            </a:r>
-          </a:p>
-        </p:txBody>
-      </p:sp>
-      <p:sp>
-        <p:nvSpPr>
-          <p:cNvPr id="69" name="TextBox 68"/>
-          <p:cNvSpPr txBox="1"/>
-          <p:nvPr/>
-        </p:nvSpPr>
-        <p:spPr>
-          <a:xfrm>
-            <a:off x="731520" y="5065776"/>
-            <a:ext cx="1993392" cy="228600"/>
-          </a:xfrm>
-          <a:prstGeom prst="rect">
-            <a:avLst/>
-          </a:prstGeom>
-          <a:noFill/>
-        </p:spPr>
-        <p:txBody>
-          <a:bodyPr wrap="square">
-            <a:noAutofit/>
-          </a:bodyPr>
-          <a:lstStyle/>
-          <a:p>
-            <a:pPr algn="l"/>
-            <a:r>
-              <a:rPr sz="800" b="1" i="0">
-                <a:solidFill>
-                  <a:srgbClr val="1C1917"/>
-                </a:solidFill>
-                <a:latin typeface="Calibri"/>
-              </a:rPr>
-              <a:t>Python Data Science</a:t>
-            </a:r>
-          </a:p>
-        </p:txBody>
-      </p:sp>
-      <p:sp>
-        <p:nvSpPr>
-          <p:cNvPr id="70" name="TextBox 69"/>
-          <p:cNvSpPr txBox="1"/>
-          <p:nvPr/>
-        </p:nvSpPr>
-        <p:spPr>
-          <a:xfrm>
-            <a:off x="2779776" y="5065776"/>
-            <a:ext cx="2514600" cy="228600"/>
-          </a:xfrm>
-          <a:prstGeom prst="rect">
-            <a:avLst/>
-          </a:prstGeom>
-          <a:noFill/>
-        </p:spPr>
-        <p:txBody>
-          <a:bodyPr wrap="square">
-            <a:noAutofit/>
-          </a:bodyPr>
-          <a:lstStyle/>
-          <a:p>
-            <a:pPr algn="l"/>
-            <a:r>
-              <a:rPr sz="750" b="0" i="0">
-                <a:solidFill>
-                  <a:srgbClr val="78716C"/>
-                </a:solidFill>
-                <a:latin typeface="Calibri"/>
-              </a:rPr>
-              <a:t>Python for Data Analysis</a:t>
-            </a:r>
-          </a:p>
-        </p:txBody>
-      </p:sp>
-      <p:sp>
-        <p:nvSpPr>
-          <p:cNvPr id="71" name="TextBox 70"/>
-          <p:cNvSpPr txBox="1"/>
-          <p:nvPr/>
-        </p:nvSpPr>
-        <p:spPr>
-          <a:xfrm>
-            <a:off x="5458968" y="5065776"/>
-            <a:ext cx="411480" cy="228600"/>
-          </a:xfrm>
-          <a:prstGeom prst="rect">
-            <a:avLst/>
-          </a:prstGeom>
-          <a:noFill/>
-        </p:spPr>
-        <p:txBody>
-          <a:bodyPr wrap="square">
-            <a:noAutofit/>
-          </a:bodyPr>
-          <a:lstStyle/>
-          <a:p>
-            <a:pPr algn="r"/>
-            <a:r>
-              <a:rPr sz="800" b="0" i="0">
-                <a:solidFill>
-                  <a:srgbClr val="44403C"/>
-                </a:solidFill>
-                <a:latin typeface="Calibri"/>
-              </a:rPr>
-              <a:t>~150</a:t>
-            </a:r>
-          </a:p>
-        </p:txBody>
-      </p:sp>
-      <p:sp>
-        <p:nvSpPr>
-          <p:cNvPr id="72" name="Rectangle 71"/>
-          <p:cNvSpPr/>
-          <p:nvPr/>
-        </p:nvSpPr>
-        <p:spPr>
-          <a:xfrm>
-            <a:off x="384048" y="5340096"/>
-            <a:ext cx="5532120" cy="338328"/>
-          </a:xfrm>
-          <a:prstGeom prst="rect">
-            <a:avLst/>
-          </a:prstGeom>
-          <a:solidFill>
-            <a:srgbClr val="F5F5F4"/>
-          </a:solidFill>
-          <a:ln w="9525">
-            <a:solidFill>
-              <a:srgbClr val="E7E5E4"/>
-            </a:solidFill>
-          </a:ln>
-        </p:spPr>
-        <p:style>
-          <a:lnRef idx="1">
-            <a:schemeClr val="accent1"/>
-          </a:lnRef>
-          <a:fillRef idx="3">
-            <a:schemeClr val="accent1"/>
-          </a:fillRef>
-          <a:effectRef idx="2">
-            <a:schemeClr val="accent1"/>
-          </a:effectRef>
-          <a:fontRef idx="minor">
-            <a:schemeClr val="lt1"/>
-          </a:fontRef>
-        </p:style>
-        <p:txBody>
-          <a:bodyPr rtlCol="0" anchor="ctr"/>
-          <a:lstStyle/>
-          <a:p>
-            <a:pPr algn="ctr"/>
-          </a:p>
-        </p:txBody>
-      </p:sp>
-      <p:sp>
-        <p:nvSpPr>
-          <p:cNvPr id="73" name="TextBox 72"/>
-          <p:cNvSpPr txBox="1"/>
-          <p:nvPr/>
-        </p:nvSpPr>
-        <p:spPr>
-          <a:xfrm>
-            <a:off x="457200" y="5404104"/>
-            <a:ext cx="256032" cy="228600"/>
-          </a:xfrm>
-          <a:prstGeom prst="rect">
-            <a:avLst/>
-          </a:prstGeom>
-          <a:noFill/>
-        </p:spPr>
-        <p:txBody>
-          <a:bodyPr wrap="square">
-            <a:noAutofit/>
-          </a:bodyPr>
-          <a:lstStyle/>
-          <a:p>
-            <a:pPr algn="l"/>
-            <a:r>
-              <a:rPr sz="800" b="1" i="0">
-                <a:solidFill>
-                  <a:srgbClr val="C8102E"/>
-                </a:solidFill>
-                <a:latin typeface="Calibri"/>
-              </a:rPr>
-              <a:t>13</a:t>
-            </a:r>
-          </a:p>
-        </p:txBody>
-      </p:sp>
-      <p:sp>
-        <p:nvSpPr>
-          <p:cNvPr id="74" name="TextBox 73"/>
-          <p:cNvSpPr txBox="1"/>
-          <p:nvPr/>
-        </p:nvSpPr>
-        <p:spPr>
-          <a:xfrm>
-            <a:off x="731520" y="5404104"/>
-            <a:ext cx="1993392" cy="228600"/>
-          </a:xfrm>
-          <a:prstGeom prst="rect">
-            <a:avLst/>
-          </a:prstGeom>
-          <a:noFill/>
-        </p:spPr>
-        <p:txBody>
-          <a:bodyPr wrap="square">
-            <a:noAutofit/>
-          </a:bodyPr>
-          <a:lstStyle/>
-          <a:p>
-            <a:pPr algn="l"/>
-            <a:r>
-              <a:rPr sz="800" b="1" i="0">
-                <a:solidFill>
-                  <a:srgbClr val="1C1917"/>
-                </a:solidFill>
-                <a:latin typeface="Calibri"/>
-              </a:rPr>
-              <a:t>JWT &amp; Authentication</a:t>
-            </a:r>
-          </a:p>
-        </p:txBody>
-      </p:sp>
-      <p:sp>
-        <p:nvSpPr>
-          <p:cNvPr id="75" name="TextBox 74"/>
-          <p:cNvSpPr txBox="1"/>
-          <p:nvPr/>
-        </p:nvSpPr>
-        <p:spPr>
-          <a:xfrm>
-            <a:off x="2779776" y="5404104"/>
-            <a:ext cx="2514600" cy="228600"/>
-          </a:xfrm>
-          <a:prstGeom prst="rect">
-            <a:avLst/>
-          </a:prstGeom>
-          <a:noFill/>
-        </p:spPr>
-        <p:txBody>
-          <a:bodyPr wrap="square">
-            <a:noAutofit/>
-          </a:bodyPr>
-          <a:lstStyle/>
-          <a:p>
-            <a:pPr algn="l"/>
-            <a:r>
-              <a:rPr sz="750" b="0" i="0">
-                <a:solidFill>
-                  <a:srgbClr val="78716C"/>
-                </a:solidFill>
-                <a:latin typeface="Calibri"/>
-              </a:rPr>
-              <a:t>OAuth2 specs, JWT RFC</a:t>
-            </a:r>
-          </a:p>
-        </p:txBody>
-      </p:sp>
-      <p:sp>
-        <p:nvSpPr>
-          <p:cNvPr id="76" name="TextBox 75"/>
-          <p:cNvSpPr txBox="1"/>
-          <p:nvPr/>
-        </p:nvSpPr>
-        <p:spPr>
-          <a:xfrm>
-            <a:off x="5458968" y="5404104"/>
-            <a:ext cx="411480" cy="228600"/>
-          </a:xfrm>
-          <a:prstGeom prst="rect">
-            <a:avLst/>
-          </a:prstGeom>
-          <a:noFill/>
-        </p:spPr>
-        <p:txBody>
-          <a:bodyPr wrap="square">
-            <a:noAutofit/>
-          </a:bodyPr>
-          <a:lstStyle/>
-          <a:p>
-            <a:pPr algn="r"/>
-            <a:r>
-              <a:rPr sz="800" b="0" i="0">
-                <a:solidFill>
-                  <a:srgbClr val="44403C"/>
-                </a:solidFill>
-                <a:latin typeface="Calibri"/>
-              </a:rPr>
-              <a:t>~220</a:t>
-            </a:r>
-          </a:p>
-        </p:txBody>
-      </p:sp>
-      <p:sp>
-        <p:nvSpPr>
-          <p:cNvPr id="77" name="Rectangle 76"/>
-          <p:cNvSpPr/>
-          <p:nvPr/>
-        </p:nvSpPr>
-        <p:spPr>
-          <a:xfrm>
-            <a:off x="6108192" y="1024128"/>
-            <a:ext cx="5532120" cy="256032"/>
+            <a:off x="0" y="6601968"/>
+            <a:ext cx="12188952" cy="256032"/>
           </a:xfrm>
           <a:prstGeom prst="rect">
             <a:avLst/>
@@ -7059,2595 +6853,7 @@
       </p:sp>
       <p:sp>
         <p:nvSpPr>
-          <p:cNvPr id="78" name="TextBox 77"/>
-          <p:cNvSpPr txBox="1"/>
-          <p:nvPr/>
-        </p:nvSpPr>
-        <p:spPr>
-          <a:xfrm>
-            <a:off x="6181344" y="1042415"/>
-            <a:ext cx="274320" cy="201168"/>
-          </a:xfrm>
-          <a:prstGeom prst="rect">
-            <a:avLst/>
-          </a:prstGeom>
-          <a:noFill/>
-        </p:spPr>
-        <p:txBody>
-          <a:bodyPr wrap="square">
-            <a:noAutofit/>
-          </a:bodyPr>
-          <a:lstStyle/>
-          <a:p>
-            <a:pPr algn="l"/>
-            <a:r>
-              <a:rPr sz="800" b="1" i="0">
-                <a:solidFill>
-                  <a:srgbClr val="D6D3D1"/>
-                </a:solidFill>
-                <a:latin typeface="Calibri"/>
-              </a:rPr>
-              <a:t>§</a:t>
-            </a:r>
-          </a:p>
-        </p:txBody>
-      </p:sp>
-      <p:sp>
-        <p:nvSpPr>
-          <p:cNvPr id="79" name="TextBox 78"/>
-          <p:cNvSpPr txBox="1"/>
-          <p:nvPr/>
-        </p:nvSpPr>
-        <p:spPr>
-          <a:xfrm>
-            <a:off x="6455664" y="1042415"/>
-            <a:ext cx="2011680" cy="201168"/>
-          </a:xfrm>
-          <a:prstGeom prst="rect">
-            <a:avLst/>
-          </a:prstGeom>
-          <a:noFill/>
-        </p:spPr>
-        <p:txBody>
-          <a:bodyPr wrap="square">
-            <a:noAutofit/>
-          </a:bodyPr>
-          <a:lstStyle/>
-          <a:p>
-            <a:pPr algn="l"/>
-            <a:r>
-              <a:rPr sz="800" b="1" i="0">
-                <a:solidFill>
-                  <a:srgbClr val="D6D3D1"/>
-                </a:solidFill>
-                <a:latin typeface="Calibri"/>
-              </a:rPr>
-              <a:t>Section</a:t>
-            </a:r>
-          </a:p>
-        </p:txBody>
-      </p:sp>
-      <p:sp>
-        <p:nvSpPr>
-          <p:cNvPr id="80" name="TextBox 79"/>
-          <p:cNvSpPr txBox="1"/>
-          <p:nvPr/>
-        </p:nvSpPr>
-        <p:spPr>
-          <a:xfrm>
-            <a:off x="8503920" y="1042415"/>
-            <a:ext cx="2560320" cy="201168"/>
-          </a:xfrm>
-          <a:prstGeom prst="rect">
-            <a:avLst/>
-          </a:prstGeom>
-          <a:noFill/>
-        </p:spPr>
-        <p:txBody>
-          <a:bodyPr wrap="square">
-            <a:noAutofit/>
-          </a:bodyPr>
-          <a:lstStyle/>
-          <a:p>
-            <a:pPr algn="l"/>
-            <a:r>
-              <a:rPr sz="800" b="1" i="0">
-                <a:solidFill>
-                  <a:srgbClr val="D6D3D1"/>
-                </a:solidFill>
-                <a:latin typeface="Calibri"/>
-              </a:rPr>
-              <a:t>Source material</a:t>
-            </a:r>
-          </a:p>
-        </p:txBody>
-      </p:sp>
-      <p:sp>
-        <p:nvSpPr>
-          <p:cNvPr id="81" name="TextBox 80"/>
-          <p:cNvSpPr txBox="1"/>
-          <p:nvPr/>
-        </p:nvSpPr>
-        <p:spPr>
-          <a:xfrm>
-            <a:off x="11183112" y="1042415"/>
-            <a:ext cx="457200" cy="201168"/>
-          </a:xfrm>
-          <a:prstGeom prst="rect">
-            <a:avLst/>
-          </a:prstGeom>
-          <a:noFill/>
-        </p:spPr>
-        <p:txBody>
-          <a:bodyPr wrap="square">
-            <a:noAutofit/>
-          </a:bodyPr>
-          <a:lstStyle/>
-          <a:p>
-            <a:pPr algn="r"/>
-            <a:r>
-              <a:rPr sz="800" b="1" i="0">
-                <a:solidFill>
-                  <a:srgbClr val="D6D3D1"/>
-                </a:solidFill>
-                <a:latin typeface="Calibri"/>
-              </a:rPr>
-              <a:t>Lines</a:t>
-            </a:r>
-          </a:p>
-        </p:txBody>
-      </p:sp>
-      <p:sp>
-        <p:nvSpPr>
-          <p:cNvPr id="82" name="Rectangle 81"/>
-          <p:cNvSpPr/>
-          <p:nvPr/>
-        </p:nvSpPr>
-        <p:spPr>
-          <a:xfrm>
-            <a:off x="6108192" y="1280160"/>
-            <a:ext cx="5532120" cy="338328"/>
-          </a:xfrm>
-          <a:prstGeom prst="rect">
-            <a:avLst/>
-          </a:prstGeom>
-          <a:solidFill>
-            <a:srgbClr val="F5F5F4"/>
-          </a:solidFill>
-          <a:ln w="9525">
-            <a:solidFill>
-              <a:srgbClr val="E7E5E4"/>
-            </a:solidFill>
-          </a:ln>
-        </p:spPr>
-        <p:style>
-          <a:lnRef idx="1">
-            <a:schemeClr val="accent1"/>
-          </a:lnRef>
-          <a:fillRef idx="3">
-            <a:schemeClr val="accent1"/>
-          </a:fillRef>
-          <a:effectRef idx="2">
-            <a:schemeClr val="accent1"/>
-          </a:effectRef>
-          <a:fontRef idx="minor">
-            <a:schemeClr val="lt1"/>
-          </a:fontRef>
-        </p:style>
-        <p:txBody>
-          <a:bodyPr rtlCol="0" anchor="ctr"/>
-          <a:lstStyle/>
-          <a:p>
-            <a:pPr algn="ctr"/>
-          </a:p>
-        </p:txBody>
-      </p:sp>
-      <p:sp>
-        <p:nvSpPr>
-          <p:cNvPr id="83" name="TextBox 82"/>
-          <p:cNvSpPr txBox="1"/>
-          <p:nvPr/>
-        </p:nvSpPr>
-        <p:spPr>
-          <a:xfrm>
-            <a:off x="6181344" y="1344168"/>
-            <a:ext cx="256032" cy="228600"/>
-          </a:xfrm>
-          <a:prstGeom prst="rect">
-            <a:avLst/>
-          </a:prstGeom>
-          <a:noFill/>
-        </p:spPr>
-        <p:txBody>
-          <a:bodyPr wrap="square">
-            <a:noAutofit/>
-          </a:bodyPr>
-          <a:lstStyle/>
-          <a:p>
-            <a:pPr algn="l"/>
-            <a:r>
-              <a:rPr sz="800" b="1" i="0">
-                <a:solidFill>
-                  <a:srgbClr val="C8102E"/>
-                </a:solidFill>
-                <a:latin typeface="Calibri"/>
-              </a:rPr>
-              <a:t>14</a:t>
-            </a:r>
-          </a:p>
-        </p:txBody>
-      </p:sp>
-      <p:sp>
-        <p:nvSpPr>
-          <p:cNvPr id="84" name="TextBox 83"/>
-          <p:cNvSpPr txBox="1"/>
-          <p:nvPr/>
-        </p:nvSpPr>
-        <p:spPr>
-          <a:xfrm>
-            <a:off x="6455664" y="1344168"/>
-            <a:ext cx="1993392" cy="228600"/>
-          </a:xfrm>
-          <a:prstGeom prst="rect">
-            <a:avLst/>
-          </a:prstGeom>
-          <a:noFill/>
-        </p:spPr>
-        <p:txBody>
-          <a:bodyPr wrap="square">
-            <a:noAutofit/>
-          </a:bodyPr>
-          <a:lstStyle/>
-          <a:p>
-            <a:pPr algn="l"/>
-            <a:r>
-              <a:rPr sz="800" b="1" i="0">
-                <a:solidFill>
-                  <a:srgbClr val="1C1917"/>
-                </a:solidFill>
-                <a:latin typeface="Calibri"/>
-              </a:rPr>
-              <a:t>REST API Conventions</a:t>
-            </a:r>
-          </a:p>
-        </p:txBody>
-      </p:sp>
-      <p:sp>
-        <p:nvSpPr>
-          <p:cNvPr id="85" name="TextBox 84"/>
-          <p:cNvSpPr txBox="1"/>
-          <p:nvPr/>
-        </p:nvSpPr>
-        <p:spPr>
-          <a:xfrm>
-            <a:off x="8503920" y="1344168"/>
-            <a:ext cx="2514600" cy="228600"/>
-          </a:xfrm>
-          <a:prstGeom prst="rect">
-            <a:avLst/>
-          </a:prstGeom>
-          <a:noFill/>
-        </p:spPr>
-        <p:txBody>
-          <a:bodyPr wrap="square">
-            <a:noAutofit/>
-          </a:bodyPr>
-          <a:lstStyle/>
-          <a:p>
-            <a:pPr algn="l"/>
-            <a:r>
-              <a:rPr sz="750" b="0" i="0">
-                <a:solidFill>
-                  <a:srgbClr val="78716C"/>
-                </a:solidFill>
-                <a:latin typeface="Calibri"/>
-              </a:rPr>
-              <a:t>RESTful Web APIs</a:t>
-            </a:r>
-          </a:p>
-        </p:txBody>
-      </p:sp>
-      <p:sp>
-        <p:nvSpPr>
-          <p:cNvPr id="86" name="TextBox 85"/>
-          <p:cNvSpPr txBox="1"/>
-          <p:nvPr/>
-        </p:nvSpPr>
-        <p:spPr>
-          <a:xfrm>
-            <a:off x="11183112" y="1344168"/>
-            <a:ext cx="411480" cy="228600"/>
-          </a:xfrm>
-          <a:prstGeom prst="rect">
-            <a:avLst/>
-          </a:prstGeom>
-          <a:noFill/>
-        </p:spPr>
-        <p:txBody>
-          <a:bodyPr wrap="square">
-            <a:noAutofit/>
-          </a:bodyPr>
-          <a:lstStyle/>
-          <a:p>
-            <a:pPr algn="r"/>
-            <a:r>
-              <a:rPr sz="800" b="0" i="0">
-                <a:solidFill>
-                  <a:srgbClr val="44403C"/>
-                </a:solidFill>
-                <a:latin typeface="Calibri"/>
-              </a:rPr>
-              <a:t>~180</a:t>
-            </a:r>
-          </a:p>
-        </p:txBody>
-      </p:sp>
-      <p:sp>
-        <p:nvSpPr>
-          <p:cNvPr id="87" name="Rectangle 86"/>
-          <p:cNvSpPr/>
-          <p:nvPr/>
-        </p:nvSpPr>
-        <p:spPr>
-          <a:xfrm>
-            <a:off x="6108192" y="1618488"/>
-            <a:ext cx="5532120" cy="338328"/>
-          </a:xfrm>
-          <a:prstGeom prst="rect">
-            <a:avLst/>
-          </a:prstGeom>
-          <a:solidFill>
-            <a:srgbClr val="FFFFFF"/>
-          </a:solidFill>
-          <a:ln w="9525">
-            <a:solidFill>
-              <a:srgbClr val="E7E5E4"/>
-            </a:solidFill>
-          </a:ln>
-        </p:spPr>
-        <p:style>
-          <a:lnRef idx="1">
-            <a:schemeClr val="accent1"/>
-          </a:lnRef>
-          <a:fillRef idx="3">
-            <a:schemeClr val="accent1"/>
-          </a:fillRef>
-          <a:effectRef idx="2">
-            <a:schemeClr val="accent1"/>
-          </a:effectRef>
-          <a:fontRef idx="minor">
-            <a:schemeClr val="lt1"/>
-          </a:fontRef>
-        </p:style>
-        <p:txBody>
-          <a:bodyPr rtlCol="0" anchor="ctr"/>
-          <a:lstStyle/>
-          <a:p>
-            <a:pPr algn="ctr"/>
-          </a:p>
-        </p:txBody>
-      </p:sp>
-      <p:sp>
-        <p:nvSpPr>
-          <p:cNvPr id="88" name="TextBox 87"/>
-          <p:cNvSpPr txBox="1"/>
-          <p:nvPr/>
-        </p:nvSpPr>
-        <p:spPr>
-          <a:xfrm>
-            <a:off x="6181344" y="1682496"/>
-            <a:ext cx="256032" cy="228600"/>
-          </a:xfrm>
-          <a:prstGeom prst="rect">
-            <a:avLst/>
-          </a:prstGeom>
-          <a:noFill/>
-        </p:spPr>
-        <p:txBody>
-          <a:bodyPr wrap="square">
-            <a:noAutofit/>
-          </a:bodyPr>
-          <a:lstStyle/>
-          <a:p>
-            <a:pPr algn="l"/>
-            <a:r>
-              <a:rPr sz="800" b="1" i="0">
-                <a:solidFill>
-                  <a:srgbClr val="C8102E"/>
-                </a:solidFill>
-                <a:latin typeface="Calibri"/>
-              </a:rPr>
-              <a:t>15</a:t>
-            </a:r>
-          </a:p>
-        </p:txBody>
-      </p:sp>
-      <p:sp>
-        <p:nvSpPr>
-          <p:cNvPr id="89" name="TextBox 88"/>
-          <p:cNvSpPr txBox="1"/>
-          <p:nvPr/>
-        </p:nvSpPr>
-        <p:spPr>
-          <a:xfrm>
-            <a:off x="6455664" y="1682496"/>
-            <a:ext cx="1993392" cy="228600"/>
-          </a:xfrm>
-          <a:prstGeom prst="rect">
-            <a:avLst/>
-          </a:prstGeom>
-          <a:noFill/>
-        </p:spPr>
-        <p:txBody>
-          <a:bodyPr wrap="square">
-            <a:noAutofit/>
-          </a:bodyPr>
-          <a:lstStyle/>
-          <a:p>
-            <a:pPr algn="l"/>
-            <a:r>
-              <a:rPr sz="800" b="1" i="0">
-                <a:solidFill>
-                  <a:srgbClr val="1C1917"/>
-                </a:solidFill>
-                <a:latin typeface="Calibri"/>
-              </a:rPr>
-              <a:t>GraphQL</a:t>
-            </a:r>
-          </a:p>
-        </p:txBody>
-      </p:sp>
-      <p:sp>
-        <p:nvSpPr>
-          <p:cNvPr id="90" name="TextBox 89"/>
-          <p:cNvSpPr txBox="1"/>
-          <p:nvPr/>
-        </p:nvSpPr>
-        <p:spPr>
-          <a:xfrm>
-            <a:off x="8503920" y="1682496"/>
-            <a:ext cx="2514600" cy="228600"/>
-          </a:xfrm>
-          <a:prstGeom prst="rect">
-            <a:avLst/>
-          </a:prstGeom>
-          <a:noFill/>
-        </p:spPr>
-        <p:txBody>
-          <a:bodyPr wrap="square">
-            <a:noAutofit/>
-          </a:bodyPr>
-          <a:lstStyle/>
-          <a:p>
-            <a:pPr algn="l"/>
-            <a:r>
-              <a:rPr sz="750" b="0" i="0">
-                <a:solidFill>
-                  <a:srgbClr val="78716C"/>
-                </a:solidFill>
-                <a:latin typeface="Calibri"/>
-              </a:rPr>
-              <a:t>GraphQL docs</a:t>
-            </a:r>
-          </a:p>
-        </p:txBody>
-      </p:sp>
-      <p:sp>
-        <p:nvSpPr>
-          <p:cNvPr id="91" name="TextBox 90"/>
-          <p:cNvSpPr txBox="1"/>
-          <p:nvPr/>
-        </p:nvSpPr>
-        <p:spPr>
-          <a:xfrm>
-            <a:off x="11183112" y="1682496"/>
-            <a:ext cx="411480" cy="228600"/>
-          </a:xfrm>
-          <a:prstGeom prst="rect">
-            <a:avLst/>
-          </a:prstGeom>
-          <a:noFill/>
-        </p:spPr>
-        <p:txBody>
-          <a:bodyPr wrap="square">
-            <a:noAutofit/>
-          </a:bodyPr>
-          <a:lstStyle/>
-          <a:p>
-            <a:pPr algn="r"/>
-            <a:r>
-              <a:rPr sz="800" b="0" i="0">
-                <a:solidFill>
-                  <a:srgbClr val="44403C"/>
-                </a:solidFill>
-                <a:latin typeface="Calibri"/>
-              </a:rPr>
-              <a:t>~150</a:t>
-            </a:r>
-          </a:p>
-        </p:txBody>
-      </p:sp>
-      <p:sp>
-        <p:nvSpPr>
-          <p:cNvPr id="92" name="Rectangle 91"/>
-          <p:cNvSpPr/>
-          <p:nvPr/>
-        </p:nvSpPr>
-        <p:spPr>
-          <a:xfrm>
-            <a:off x="6108192" y="1956815"/>
-            <a:ext cx="5532120" cy="338328"/>
-          </a:xfrm>
-          <a:prstGeom prst="rect">
-            <a:avLst/>
-          </a:prstGeom>
-          <a:solidFill>
-            <a:srgbClr val="F5F5F4"/>
-          </a:solidFill>
-          <a:ln w="9525">
-            <a:solidFill>
-              <a:srgbClr val="E7E5E4"/>
-            </a:solidFill>
-          </a:ln>
-        </p:spPr>
-        <p:style>
-          <a:lnRef idx="1">
-            <a:schemeClr val="accent1"/>
-          </a:lnRef>
-          <a:fillRef idx="3">
-            <a:schemeClr val="accent1"/>
-          </a:fillRef>
-          <a:effectRef idx="2">
-            <a:schemeClr val="accent1"/>
-          </a:effectRef>
-          <a:fontRef idx="minor">
-            <a:schemeClr val="lt1"/>
-          </a:fontRef>
-        </p:style>
-        <p:txBody>
-          <a:bodyPr rtlCol="0" anchor="ctr"/>
-          <a:lstStyle/>
-          <a:p>
-            <a:pPr algn="ctr"/>
-          </a:p>
-        </p:txBody>
-      </p:sp>
-      <p:sp>
-        <p:nvSpPr>
-          <p:cNvPr id="93" name="TextBox 92"/>
-          <p:cNvSpPr txBox="1"/>
-          <p:nvPr/>
-        </p:nvSpPr>
-        <p:spPr>
-          <a:xfrm>
-            <a:off x="6181344" y="2020823"/>
-            <a:ext cx="256032" cy="228600"/>
-          </a:xfrm>
-          <a:prstGeom prst="rect">
-            <a:avLst/>
-          </a:prstGeom>
-          <a:noFill/>
-        </p:spPr>
-        <p:txBody>
-          <a:bodyPr wrap="square">
-            <a:noAutofit/>
-          </a:bodyPr>
-          <a:lstStyle/>
-          <a:p>
-            <a:pPr algn="l"/>
-            <a:r>
-              <a:rPr sz="800" b="1" i="0">
-                <a:solidFill>
-                  <a:srgbClr val="C8102E"/>
-                </a:solidFill>
-                <a:latin typeface="Calibri"/>
-              </a:rPr>
-              <a:t>16</a:t>
-            </a:r>
-          </a:p>
-        </p:txBody>
-      </p:sp>
-      <p:sp>
-        <p:nvSpPr>
-          <p:cNvPr id="94" name="TextBox 93"/>
-          <p:cNvSpPr txBox="1"/>
-          <p:nvPr/>
-        </p:nvSpPr>
-        <p:spPr>
-          <a:xfrm>
-            <a:off x="6455664" y="2020823"/>
-            <a:ext cx="1993392" cy="228600"/>
-          </a:xfrm>
-          <a:prstGeom prst="rect">
-            <a:avLst/>
-          </a:prstGeom>
-          <a:noFill/>
-        </p:spPr>
-        <p:txBody>
-          <a:bodyPr wrap="square">
-            <a:noAutofit/>
-          </a:bodyPr>
-          <a:lstStyle/>
-          <a:p>
-            <a:pPr algn="l"/>
-            <a:r>
-              <a:rPr sz="800" b="1" i="0">
-                <a:solidFill>
-                  <a:srgbClr val="1C1917"/>
-                </a:solidFill>
-                <a:latin typeface="Calibri"/>
-              </a:rPr>
-              <a:t>PostgreSQL</a:t>
-            </a:r>
-          </a:p>
-        </p:txBody>
-      </p:sp>
-      <p:sp>
-        <p:nvSpPr>
-          <p:cNvPr id="95" name="TextBox 94"/>
-          <p:cNvSpPr txBox="1"/>
-          <p:nvPr/>
-        </p:nvSpPr>
-        <p:spPr>
-          <a:xfrm>
-            <a:off x="8503920" y="2020823"/>
-            <a:ext cx="2514600" cy="228600"/>
-          </a:xfrm>
-          <a:prstGeom prst="rect">
-            <a:avLst/>
-          </a:prstGeom>
-          <a:noFill/>
-        </p:spPr>
-        <p:txBody>
-          <a:bodyPr wrap="square">
-            <a:noAutofit/>
-          </a:bodyPr>
-          <a:lstStyle/>
-          <a:p>
-            <a:pPr algn="l"/>
-            <a:r>
-              <a:rPr sz="750" b="0" i="0">
-                <a:solidFill>
-                  <a:srgbClr val="78716C"/>
-                </a:solidFill>
-                <a:latin typeface="Calibri"/>
-              </a:rPr>
-              <a:t>PostgreSQL docs</a:t>
-            </a:r>
-          </a:p>
-        </p:txBody>
-      </p:sp>
-      <p:sp>
-        <p:nvSpPr>
-          <p:cNvPr id="96" name="TextBox 95"/>
-          <p:cNvSpPr txBox="1"/>
-          <p:nvPr/>
-        </p:nvSpPr>
-        <p:spPr>
-          <a:xfrm>
-            <a:off x="11183112" y="2020823"/>
-            <a:ext cx="411480" cy="228600"/>
-          </a:xfrm>
-          <a:prstGeom prst="rect">
-            <a:avLst/>
-          </a:prstGeom>
-          <a:noFill/>
-        </p:spPr>
-        <p:txBody>
-          <a:bodyPr wrap="square">
-            <a:noAutofit/>
-          </a:bodyPr>
-          <a:lstStyle/>
-          <a:p>
-            <a:pPr algn="r"/>
-            <a:r>
-              <a:rPr sz="800" b="0" i="0">
-                <a:solidFill>
-                  <a:srgbClr val="44403C"/>
-                </a:solidFill>
-                <a:latin typeface="Calibri"/>
-              </a:rPr>
-              <a:t>~200</a:t>
-            </a:r>
-          </a:p>
-        </p:txBody>
-      </p:sp>
-      <p:sp>
-        <p:nvSpPr>
-          <p:cNvPr id="97" name="Rectangle 96"/>
-          <p:cNvSpPr/>
-          <p:nvPr/>
-        </p:nvSpPr>
-        <p:spPr>
-          <a:xfrm>
-            <a:off x="6108192" y="2295144"/>
-            <a:ext cx="5532120" cy="338328"/>
-          </a:xfrm>
-          <a:prstGeom prst="rect">
-            <a:avLst/>
-          </a:prstGeom>
-          <a:solidFill>
-            <a:srgbClr val="FFFFFF"/>
-          </a:solidFill>
-          <a:ln w="9525">
-            <a:solidFill>
-              <a:srgbClr val="E7E5E4"/>
-            </a:solidFill>
-          </a:ln>
-        </p:spPr>
-        <p:style>
-          <a:lnRef idx="1">
-            <a:schemeClr val="accent1"/>
-          </a:lnRef>
-          <a:fillRef idx="3">
-            <a:schemeClr val="accent1"/>
-          </a:fillRef>
-          <a:effectRef idx="2">
-            <a:schemeClr val="accent1"/>
-          </a:effectRef>
-          <a:fontRef idx="minor">
-            <a:schemeClr val="lt1"/>
-          </a:fontRef>
-        </p:style>
-        <p:txBody>
-          <a:bodyPr rtlCol="0" anchor="ctr"/>
-          <a:lstStyle/>
-          <a:p>
-            <a:pPr algn="ctr"/>
-          </a:p>
-        </p:txBody>
-      </p:sp>
-      <p:sp>
-        <p:nvSpPr>
-          <p:cNvPr id="98" name="TextBox 97"/>
-          <p:cNvSpPr txBox="1"/>
-          <p:nvPr/>
-        </p:nvSpPr>
-        <p:spPr>
-          <a:xfrm>
-            <a:off x="6181344" y="2359151"/>
-            <a:ext cx="256032" cy="228600"/>
-          </a:xfrm>
-          <a:prstGeom prst="rect">
-            <a:avLst/>
-          </a:prstGeom>
-          <a:noFill/>
-        </p:spPr>
-        <p:txBody>
-          <a:bodyPr wrap="square">
-            <a:noAutofit/>
-          </a:bodyPr>
-          <a:lstStyle/>
-          <a:p>
-            <a:pPr algn="l"/>
-            <a:r>
-              <a:rPr sz="800" b="1" i="0">
-                <a:solidFill>
-                  <a:srgbClr val="C8102E"/>
-                </a:solidFill>
-                <a:latin typeface="Calibri"/>
-              </a:rPr>
-              <a:t>17</a:t>
-            </a:r>
-          </a:p>
-        </p:txBody>
-      </p:sp>
-      <p:sp>
-        <p:nvSpPr>
-          <p:cNvPr id="99" name="TextBox 98"/>
-          <p:cNvSpPr txBox="1"/>
-          <p:nvPr/>
-        </p:nvSpPr>
-        <p:spPr>
-          <a:xfrm>
-            <a:off x="6455664" y="2359151"/>
-            <a:ext cx="1993392" cy="228600"/>
-          </a:xfrm>
-          <a:prstGeom prst="rect">
-            <a:avLst/>
-          </a:prstGeom>
-          <a:noFill/>
-        </p:spPr>
-        <p:txBody>
-          <a:bodyPr wrap="square">
-            <a:noAutofit/>
-          </a:bodyPr>
-          <a:lstStyle/>
-          <a:p>
-            <a:pPr algn="l"/>
-            <a:r>
-              <a:rPr sz="800" b="1" i="0">
-                <a:solidFill>
-                  <a:srgbClr val="1C1917"/>
-                </a:solidFill>
-                <a:latin typeface="Calibri"/>
-              </a:rPr>
-              <a:t>Redis</a:t>
-            </a:r>
-          </a:p>
-        </p:txBody>
-      </p:sp>
-      <p:sp>
-        <p:nvSpPr>
-          <p:cNvPr id="100" name="TextBox 99"/>
-          <p:cNvSpPr txBox="1"/>
-          <p:nvPr/>
-        </p:nvSpPr>
-        <p:spPr>
-          <a:xfrm>
-            <a:off x="8503920" y="2359151"/>
-            <a:ext cx="2514600" cy="228600"/>
-          </a:xfrm>
-          <a:prstGeom prst="rect">
-            <a:avLst/>
-          </a:prstGeom>
-          <a:noFill/>
-        </p:spPr>
-        <p:txBody>
-          <a:bodyPr wrap="square">
-            <a:noAutofit/>
-          </a:bodyPr>
-          <a:lstStyle/>
-          <a:p>
-            <a:pPr algn="l"/>
-            <a:r>
-              <a:rPr sz="750" b="0" i="0">
-                <a:solidFill>
-                  <a:srgbClr val="78716C"/>
-                </a:solidFill>
-                <a:latin typeface="Calibri"/>
-              </a:rPr>
-              <a:t>Redis docs</a:t>
-            </a:r>
-          </a:p>
-        </p:txBody>
-      </p:sp>
-      <p:sp>
-        <p:nvSpPr>
-          <p:cNvPr id="101" name="TextBox 100"/>
-          <p:cNvSpPr txBox="1"/>
-          <p:nvPr/>
-        </p:nvSpPr>
-        <p:spPr>
-          <a:xfrm>
-            <a:off x="11183112" y="2359151"/>
-            <a:ext cx="411480" cy="228600"/>
-          </a:xfrm>
-          <a:prstGeom prst="rect">
-            <a:avLst/>
-          </a:prstGeom>
-          <a:noFill/>
-        </p:spPr>
-        <p:txBody>
-          <a:bodyPr wrap="square">
-            <a:noAutofit/>
-          </a:bodyPr>
-          <a:lstStyle/>
-          <a:p>
-            <a:pPr algn="r"/>
-            <a:r>
-              <a:rPr sz="800" b="0" i="0">
-                <a:solidFill>
-                  <a:srgbClr val="44403C"/>
-                </a:solidFill>
-                <a:latin typeface="Calibri"/>
-              </a:rPr>
-              <a:t>~140</a:t>
-            </a:r>
-          </a:p>
-        </p:txBody>
-      </p:sp>
-      <p:sp>
-        <p:nvSpPr>
-          <p:cNvPr id="102" name="Rectangle 101"/>
-          <p:cNvSpPr/>
-          <p:nvPr/>
-        </p:nvSpPr>
-        <p:spPr>
-          <a:xfrm>
-            <a:off x="6108192" y="2633472"/>
-            <a:ext cx="5532120" cy="338328"/>
-          </a:xfrm>
-          <a:prstGeom prst="rect">
-            <a:avLst/>
-          </a:prstGeom>
-          <a:solidFill>
-            <a:srgbClr val="F5F5F4"/>
-          </a:solidFill>
-          <a:ln w="9525">
-            <a:solidFill>
-              <a:srgbClr val="E7E5E4"/>
-            </a:solidFill>
-          </a:ln>
-        </p:spPr>
-        <p:style>
-          <a:lnRef idx="1">
-            <a:schemeClr val="accent1"/>
-          </a:lnRef>
-          <a:fillRef idx="3">
-            <a:schemeClr val="accent1"/>
-          </a:fillRef>
-          <a:effectRef idx="2">
-            <a:schemeClr val="accent1"/>
-          </a:effectRef>
-          <a:fontRef idx="minor">
-            <a:schemeClr val="lt1"/>
-          </a:fontRef>
-        </p:style>
-        <p:txBody>
-          <a:bodyPr rtlCol="0" anchor="ctr"/>
-          <a:lstStyle/>
-          <a:p>
-            <a:pPr algn="ctr"/>
-          </a:p>
-        </p:txBody>
-      </p:sp>
-      <p:sp>
-        <p:nvSpPr>
-          <p:cNvPr id="103" name="TextBox 102"/>
-          <p:cNvSpPr txBox="1"/>
-          <p:nvPr/>
-        </p:nvSpPr>
-        <p:spPr>
-          <a:xfrm>
-            <a:off x="6181344" y="2697479"/>
-            <a:ext cx="256032" cy="228600"/>
-          </a:xfrm>
-          <a:prstGeom prst="rect">
-            <a:avLst/>
-          </a:prstGeom>
-          <a:noFill/>
-        </p:spPr>
-        <p:txBody>
-          <a:bodyPr wrap="square">
-            <a:noAutofit/>
-          </a:bodyPr>
-          <a:lstStyle/>
-          <a:p>
-            <a:pPr algn="l"/>
-            <a:r>
-              <a:rPr sz="800" b="1" i="0">
-                <a:solidFill>
-                  <a:srgbClr val="C8102E"/>
-                </a:solidFill>
-                <a:latin typeface="Calibri"/>
-              </a:rPr>
-              <a:t>18</a:t>
-            </a:r>
-          </a:p>
-        </p:txBody>
-      </p:sp>
-      <p:sp>
-        <p:nvSpPr>
-          <p:cNvPr id="104" name="TextBox 103"/>
-          <p:cNvSpPr txBox="1"/>
-          <p:nvPr/>
-        </p:nvSpPr>
-        <p:spPr>
-          <a:xfrm>
-            <a:off x="6455664" y="2697479"/>
-            <a:ext cx="1993392" cy="228600"/>
-          </a:xfrm>
-          <a:prstGeom prst="rect">
-            <a:avLst/>
-          </a:prstGeom>
-          <a:noFill/>
-        </p:spPr>
-        <p:txBody>
-          <a:bodyPr wrap="square">
-            <a:noAutofit/>
-          </a:bodyPr>
-          <a:lstStyle/>
-          <a:p>
-            <a:pPr algn="l"/>
-            <a:r>
-              <a:rPr sz="800" b="1" i="0">
-                <a:solidFill>
-                  <a:srgbClr val="1C1917"/>
-                </a:solidFill>
-                <a:latin typeface="Calibri"/>
-              </a:rPr>
-              <a:t>Kubernetes</a:t>
-            </a:r>
-          </a:p>
-        </p:txBody>
-      </p:sp>
-      <p:sp>
-        <p:nvSpPr>
-          <p:cNvPr id="105" name="TextBox 104"/>
-          <p:cNvSpPr txBox="1"/>
-          <p:nvPr/>
-        </p:nvSpPr>
-        <p:spPr>
-          <a:xfrm>
-            <a:off x="8503920" y="2697479"/>
-            <a:ext cx="2514600" cy="228600"/>
-          </a:xfrm>
-          <a:prstGeom prst="rect">
-            <a:avLst/>
-          </a:prstGeom>
-          <a:noFill/>
-        </p:spPr>
-        <p:txBody>
-          <a:bodyPr wrap="square">
-            <a:noAutofit/>
-          </a:bodyPr>
-          <a:lstStyle/>
-          <a:p>
-            <a:pPr algn="l"/>
-            <a:r>
-              <a:rPr sz="750" b="0" i="0">
-                <a:solidFill>
-                  <a:srgbClr val="78716C"/>
-                </a:solidFill>
-                <a:latin typeface="Calibri"/>
-              </a:rPr>
-              <a:t>Kubernetes docs</a:t>
-            </a:r>
-          </a:p>
-        </p:txBody>
-      </p:sp>
-      <p:sp>
-        <p:nvSpPr>
-          <p:cNvPr id="106" name="TextBox 105"/>
-          <p:cNvSpPr txBox="1"/>
-          <p:nvPr/>
-        </p:nvSpPr>
-        <p:spPr>
-          <a:xfrm>
-            <a:off x="11183112" y="2697479"/>
-            <a:ext cx="411480" cy="228600"/>
-          </a:xfrm>
-          <a:prstGeom prst="rect">
-            <a:avLst/>
-          </a:prstGeom>
-          <a:noFill/>
-        </p:spPr>
-        <p:txBody>
-          <a:bodyPr wrap="square">
-            <a:noAutofit/>
-          </a:bodyPr>
-          <a:lstStyle/>
-          <a:p>
-            <a:pPr algn="r"/>
-            <a:r>
-              <a:rPr sz="800" b="0" i="0">
-                <a:solidFill>
-                  <a:srgbClr val="44403C"/>
-                </a:solidFill>
-                <a:latin typeface="Calibri"/>
-              </a:rPr>
-              <a:t>~180</a:t>
-            </a:r>
-          </a:p>
-        </p:txBody>
-      </p:sp>
-      <p:sp>
-        <p:nvSpPr>
-          <p:cNvPr id="107" name="Rectangle 106"/>
-          <p:cNvSpPr/>
-          <p:nvPr/>
-        </p:nvSpPr>
-        <p:spPr>
-          <a:xfrm>
-            <a:off x="6108192" y="2971800"/>
-            <a:ext cx="5532120" cy="338328"/>
-          </a:xfrm>
-          <a:prstGeom prst="rect">
-            <a:avLst/>
-          </a:prstGeom>
-          <a:solidFill>
-            <a:srgbClr val="FFFFFF"/>
-          </a:solidFill>
-          <a:ln w="9525">
-            <a:solidFill>
-              <a:srgbClr val="E7E5E4"/>
-            </a:solidFill>
-          </a:ln>
-        </p:spPr>
-        <p:style>
-          <a:lnRef idx="1">
-            <a:schemeClr val="accent1"/>
-          </a:lnRef>
-          <a:fillRef idx="3">
-            <a:schemeClr val="accent1"/>
-          </a:fillRef>
-          <a:effectRef idx="2">
-            <a:schemeClr val="accent1"/>
-          </a:effectRef>
-          <a:fontRef idx="minor">
-            <a:schemeClr val="lt1"/>
-          </a:fontRef>
-        </p:style>
-        <p:txBody>
-          <a:bodyPr rtlCol="0" anchor="ctr"/>
-          <a:lstStyle/>
-          <a:p>
-            <a:pPr algn="ctr"/>
-          </a:p>
-        </p:txBody>
-      </p:sp>
-      <p:sp>
-        <p:nvSpPr>
-          <p:cNvPr id="108" name="TextBox 107"/>
-          <p:cNvSpPr txBox="1"/>
-          <p:nvPr/>
-        </p:nvSpPr>
-        <p:spPr>
-          <a:xfrm>
-            <a:off x="6181344" y="3035808"/>
-            <a:ext cx="256032" cy="228600"/>
-          </a:xfrm>
-          <a:prstGeom prst="rect">
-            <a:avLst/>
-          </a:prstGeom>
-          <a:noFill/>
-        </p:spPr>
-        <p:txBody>
-          <a:bodyPr wrap="square">
-            <a:noAutofit/>
-          </a:bodyPr>
-          <a:lstStyle/>
-          <a:p>
-            <a:pPr algn="l"/>
-            <a:r>
-              <a:rPr sz="800" b="1" i="0">
-                <a:solidFill>
-                  <a:srgbClr val="C8102E"/>
-                </a:solidFill>
-                <a:latin typeface="Calibri"/>
-              </a:rPr>
-              <a:t>19</a:t>
-            </a:r>
-          </a:p>
-        </p:txBody>
-      </p:sp>
-      <p:sp>
-        <p:nvSpPr>
-          <p:cNvPr id="109" name="TextBox 108"/>
-          <p:cNvSpPr txBox="1"/>
-          <p:nvPr/>
-        </p:nvSpPr>
-        <p:spPr>
-          <a:xfrm>
-            <a:off x="6455664" y="3035808"/>
-            <a:ext cx="1993392" cy="228600"/>
-          </a:xfrm>
-          <a:prstGeom prst="rect">
-            <a:avLst/>
-          </a:prstGeom>
-          <a:noFill/>
-        </p:spPr>
-        <p:txBody>
-          <a:bodyPr wrap="square">
-            <a:noAutofit/>
-          </a:bodyPr>
-          <a:lstStyle/>
-          <a:p>
-            <a:pPr algn="l"/>
-            <a:r>
-              <a:rPr sz="800" b="1" i="0">
-                <a:solidFill>
-                  <a:srgbClr val="1C1917"/>
-                </a:solidFill>
-                <a:latin typeface="Calibri"/>
-              </a:rPr>
-              <a:t>CI/CD</a:t>
-            </a:r>
-          </a:p>
-        </p:txBody>
-      </p:sp>
-      <p:sp>
-        <p:nvSpPr>
-          <p:cNvPr id="110" name="TextBox 109"/>
-          <p:cNvSpPr txBox="1"/>
-          <p:nvPr/>
-        </p:nvSpPr>
-        <p:spPr>
-          <a:xfrm>
-            <a:off x="8503920" y="3035808"/>
-            <a:ext cx="2514600" cy="228600"/>
-          </a:xfrm>
-          <a:prstGeom prst="rect">
-            <a:avLst/>
-          </a:prstGeom>
-          <a:noFill/>
-        </p:spPr>
-        <p:txBody>
-          <a:bodyPr wrap="square">
-            <a:noAutofit/>
-          </a:bodyPr>
-          <a:lstStyle/>
-          <a:p>
-            <a:pPr algn="l"/>
-            <a:r>
-              <a:rPr sz="750" b="0" i="0">
-                <a:solidFill>
-                  <a:srgbClr val="78716C"/>
-                </a:solidFill>
-                <a:latin typeface="Calibri"/>
-              </a:rPr>
-              <a:t>GitHub Actions docs</a:t>
-            </a:r>
-          </a:p>
-        </p:txBody>
-      </p:sp>
-      <p:sp>
-        <p:nvSpPr>
-          <p:cNvPr id="111" name="TextBox 110"/>
-          <p:cNvSpPr txBox="1"/>
-          <p:nvPr/>
-        </p:nvSpPr>
-        <p:spPr>
-          <a:xfrm>
-            <a:off x="11183112" y="3035808"/>
-            <a:ext cx="411480" cy="228600"/>
-          </a:xfrm>
-          <a:prstGeom prst="rect">
-            <a:avLst/>
-          </a:prstGeom>
-          <a:noFill/>
-        </p:spPr>
-        <p:txBody>
-          <a:bodyPr wrap="square">
-            <a:noAutofit/>
-          </a:bodyPr>
-          <a:lstStyle/>
-          <a:p>
-            <a:pPr algn="r"/>
-            <a:r>
-              <a:rPr sz="800" b="0" i="0">
-                <a:solidFill>
-                  <a:srgbClr val="44403C"/>
-                </a:solidFill>
-                <a:latin typeface="Calibri"/>
-              </a:rPr>
-              <a:t>~160</a:t>
-            </a:r>
-          </a:p>
-        </p:txBody>
-      </p:sp>
-      <p:sp>
-        <p:nvSpPr>
-          <p:cNvPr id="112" name="Rectangle 111"/>
-          <p:cNvSpPr/>
-          <p:nvPr/>
-        </p:nvSpPr>
-        <p:spPr>
-          <a:xfrm>
-            <a:off x="6108192" y="3310127"/>
-            <a:ext cx="5532120" cy="338328"/>
-          </a:xfrm>
-          <a:prstGeom prst="rect">
-            <a:avLst/>
-          </a:prstGeom>
-          <a:solidFill>
-            <a:srgbClr val="F5F5F4"/>
-          </a:solidFill>
-          <a:ln w="9525">
-            <a:solidFill>
-              <a:srgbClr val="E7E5E4"/>
-            </a:solidFill>
-          </a:ln>
-        </p:spPr>
-        <p:style>
-          <a:lnRef idx="1">
-            <a:schemeClr val="accent1"/>
-          </a:lnRef>
-          <a:fillRef idx="3">
-            <a:schemeClr val="accent1"/>
-          </a:fillRef>
-          <a:effectRef idx="2">
-            <a:schemeClr val="accent1"/>
-          </a:effectRef>
-          <a:fontRef idx="minor">
-            <a:schemeClr val="lt1"/>
-          </a:fontRef>
-        </p:style>
-        <p:txBody>
-          <a:bodyPr rtlCol="0" anchor="ctr"/>
-          <a:lstStyle/>
-          <a:p>
-            <a:pPr algn="ctr"/>
-          </a:p>
-        </p:txBody>
-      </p:sp>
-      <p:sp>
-        <p:nvSpPr>
-          <p:cNvPr id="113" name="TextBox 112"/>
-          <p:cNvSpPr txBox="1"/>
-          <p:nvPr/>
-        </p:nvSpPr>
-        <p:spPr>
-          <a:xfrm>
-            <a:off x="6181344" y="3374135"/>
-            <a:ext cx="256032" cy="228600"/>
-          </a:xfrm>
-          <a:prstGeom prst="rect">
-            <a:avLst/>
-          </a:prstGeom>
-          <a:noFill/>
-        </p:spPr>
-        <p:txBody>
-          <a:bodyPr wrap="square">
-            <a:noAutofit/>
-          </a:bodyPr>
-          <a:lstStyle/>
-          <a:p>
-            <a:pPr algn="l"/>
-            <a:r>
-              <a:rPr sz="800" b="1" i="0">
-                <a:solidFill>
-                  <a:srgbClr val="C8102E"/>
-                </a:solidFill>
-                <a:latin typeface="Calibri"/>
-              </a:rPr>
-              <a:t>20</a:t>
-            </a:r>
-          </a:p>
-        </p:txBody>
-      </p:sp>
-      <p:sp>
-        <p:nvSpPr>
-          <p:cNvPr id="114" name="TextBox 113"/>
-          <p:cNvSpPr txBox="1"/>
-          <p:nvPr/>
-        </p:nvSpPr>
-        <p:spPr>
-          <a:xfrm>
-            <a:off x="6455664" y="3374135"/>
-            <a:ext cx="1993392" cy="228600"/>
-          </a:xfrm>
-          <a:prstGeom prst="rect">
-            <a:avLst/>
-          </a:prstGeom>
-          <a:noFill/>
-        </p:spPr>
-        <p:txBody>
-          <a:bodyPr wrap="square">
-            <a:noAutofit/>
-          </a:bodyPr>
-          <a:lstStyle/>
-          <a:p>
-            <a:pPr algn="l"/>
-            <a:r>
-              <a:rPr sz="800" b="1" i="0">
-                <a:solidFill>
-                  <a:srgbClr val="1C1917"/>
-                </a:solidFill>
-                <a:latin typeface="Calibri"/>
-              </a:rPr>
-              <a:t>Monitoring &amp; Observability</a:t>
-            </a:r>
-          </a:p>
-        </p:txBody>
-      </p:sp>
-      <p:sp>
-        <p:nvSpPr>
-          <p:cNvPr id="115" name="TextBox 114"/>
-          <p:cNvSpPr txBox="1"/>
-          <p:nvPr/>
-        </p:nvSpPr>
-        <p:spPr>
-          <a:xfrm>
-            <a:off x="8503920" y="3374135"/>
-            <a:ext cx="2514600" cy="228600"/>
-          </a:xfrm>
-          <a:prstGeom prst="rect">
-            <a:avLst/>
-          </a:prstGeom>
-          <a:noFill/>
-        </p:spPr>
-        <p:txBody>
-          <a:bodyPr wrap="square">
-            <a:noAutofit/>
-          </a:bodyPr>
-          <a:lstStyle/>
-          <a:p>
-            <a:pPr algn="l"/>
-            <a:r>
-              <a:rPr sz="750" b="0" i="0">
-                <a:solidFill>
-                  <a:srgbClr val="78716C"/>
-                </a:solidFill>
-                <a:latin typeface="Calibri"/>
-              </a:rPr>
-              <a:t>SRE Book</a:t>
-            </a:r>
-          </a:p>
-        </p:txBody>
-      </p:sp>
-      <p:sp>
-        <p:nvSpPr>
-          <p:cNvPr id="116" name="TextBox 115"/>
-          <p:cNvSpPr txBox="1"/>
-          <p:nvPr/>
-        </p:nvSpPr>
-        <p:spPr>
-          <a:xfrm>
-            <a:off x="11183112" y="3374135"/>
-            <a:ext cx="411480" cy="228600"/>
-          </a:xfrm>
-          <a:prstGeom prst="rect">
-            <a:avLst/>
-          </a:prstGeom>
-          <a:noFill/>
-        </p:spPr>
-        <p:txBody>
-          <a:bodyPr wrap="square">
-            <a:noAutofit/>
-          </a:bodyPr>
-          <a:lstStyle/>
-          <a:p>
-            <a:pPr algn="r"/>
-            <a:r>
-              <a:rPr sz="800" b="0" i="0">
-                <a:solidFill>
-                  <a:srgbClr val="44403C"/>
-                </a:solidFill>
-                <a:latin typeface="Calibri"/>
-              </a:rPr>
-              <a:t>~180</a:t>
-            </a:r>
-          </a:p>
-        </p:txBody>
-      </p:sp>
-      <p:sp>
-        <p:nvSpPr>
-          <p:cNvPr id="117" name="Rectangle 116"/>
-          <p:cNvSpPr/>
-          <p:nvPr/>
-        </p:nvSpPr>
-        <p:spPr>
-          <a:xfrm>
-            <a:off x="6108192" y="3648456"/>
-            <a:ext cx="5532120" cy="338328"/>
-          </a:xfrm>
-          <a:prstGeom prst="rect">
-            <a:avLst/>
-          </a:prstGeom>
-          <a:solidFill>
-            <a:srgbClr val="FFFFFF"/>
-          </a:solidFill>
-          <a:ln w="9525">
-            <a:solidFill>
-              <a:srgbClr val="E7E5E4"/>
-            </a:solidFill>
-          </a:ln>
-        </p:spPr>
-        <p:style>
-          <a:lnRef idx="1">
-            <a:schemeClr val="accent1"/>
-          </a:lnRef>
-          <a:fillRef idx="3">
-            <a:schemeClr val="accent1"/>
-          </a:fillRef>
-          <a:effectRef idx="2">
-            <a:schemeClr val="accent1"/>
-          </a:effectRef>
-          <a:fontRef idx="minor">
-            <a:schemeClr val="lt1"/>
-          </a:fontRef>
-        </p:style>
-        <p:txBody>
-          <a:bodyPr rtlCol="0" anchor="ctr"/>
-          <a:lstStyle/>
-          <a:p>
-            <a:pPr algn="ctr"/>
-          </a:p>
-        </p:txBody>
-      </p:sp>
-      <p:sp>
-        <p:nvSpPr>
-          <p:cNvPr id="118" name="TextBox 117"/>
-          <p:cNvSpPr txBox="1"/>
-          <p:nvPr/>
-        </p:nvSpPr>
-        <p:spPr>
-          <a:xfrm>
-            <a:off x="6181344" y="3712463"/>
-            <a:ext cx="256032" cy="228600"/>
-          </a:xfrm>
-          <a:prstGeom prst="rect">
-            <a:avLst/>
-          </a:prstGeom>
-          <a:noFill/>
-        </p:spPr>
-        <p:txBody>
-          <a:bodyPr wrap="square">
-            <a:noAutofit/>
-          </a:bodyPr>
-          <a:lstStyle/>
-          <a:p>
-            <a:pPr algn="l"/>
-            <a:r>
-              <a:rPr sz="800" b="1" i="0">
-                <a:solidFill>
-                  <a:srgbClr val="C8102E"/>
-                </a:solidFill>
-                <a:latin typeface="Calibri"/>
-              </a:rPr>
-              <a:t>21</a:t>
-            </a:r>
-          </a:p>
-        </p:txBody>
-      </p:sp>
-      <p:sp>
-        <p:nvSpPr>
-          <p:cNvPr id="119" name="TextBox 118"/>
-          <p:cNvSpPr txBox="1"/>
-          <p:nvPr/>
-        </p:nvSpPr>
-        <p:spPr>
-          <a:xfrm>
-            <a:off x="6455664" y="3712463"/>
-            <a:ext cx="1993392" cy="228600"/>
-          </a:xfrm>
-          <a:prstGeom prst="rect">
-            <a:avLst/>
-          </a:prstGeom>
-          <a:noFill/>
-        </p:spPr>
-        <p:txBody>
-          <a:bodyPr wrap="square">
-            <a:noAutofit/>
-          </a:bodyPr>
-          <a:lstStyle/>
-          <a:p>
-            <a:pPr algn="l"/>
-            <a:r>
-              <a:rPr sz="800" b="1" i="0">
-                <a:solidFill>
-                  <a:srgbClr val="1C1917"/>
-                </a:solidFill>
-                <a:latin typeface="Calibri"/>
-              </a:rPr>
-              <a:t>HTTP Fundamentals</a:t>
-            </a:r>
-          </a:p>
-        </p:txBody>
-      </p:sp>
-      <p:sp>
-        <p:nvSpPr>
-          <p:cNvPr id="120" name="TextBox 119"/>
-          <p:cNvSpPr txBox="1"/>
-          <p:nvPr/>
-        </p:nvSpPr>
-        <p:spPr>
-          <a:xfrm>
-            <a:off x="8503920" y="3712463"/>
-            <a:ext cx="2514600" cy="228600"/>
-          </a:xfrm>
-          <a:prstGeom prst="rect">
-            <a:avLst/>
-          </a:prstGeom>
-          <a:noFill/>
-        </p:spPr>
-        <p:txBody>
-          <a:bodyPr wrap="square">
-            <a:noAutofit/>
-          </a:bodyPr>
-          <a:lstStyle/>
-          <a:p>
-            <a:pPr algn="l"/>
-            <a:r>
-              <a:rPr sz="750" b="0" i="0">
-                <a:solidFill>
-                  <a:srgbClr val="78716C"/>
-                </a:solidFill>
-                <a:latin typeface="Calibri"/>
-              </a:rPr>
-              <a:t>HTTP: The Definitive Guide (Gourley &amp; Totty)</a:t>
-            </a:r>
-          </a:p>
-        </p:txBody>
-      </p:sp>
-      <p:sp>
-        <p:nvSpPr>
-          <p:cNvPr id="121" name="TextBox 120"/>
-          <p:cNvSpPr txBox="1"/>
-          <p:nvPr/>
-        </p:nvSpPr>
-        <p:spPr>
-          <a:xfrm>
-            <a:off x="11183112" y="3712463"/>
-            <a:ext cx="411480" cy="228600"/>
-          </a:xfrm>
-          <a:prstGeom prst="rect">
-            <a:avLst/>
-          </a:prstGeom>
-          <a:noFill/>
-        </p:spPr>
-        <p:txBody>
-          <a:bodyPr wrap="square">
-            <a:noAutofit/>
-          </a:bodyPr>
-          <a:lstStyle/>
-          <a:p>
-            <a:pPr algn="r"/>
-            <a:r>
-              <a:rPr sz="800" b="0" i="0">
-                <a:solidFill>
-                  <a:srgbClr val="44403C"/>
-                </a:solidFill>
-                <a:latin typeface="Calibri"/>
-              </a:rPr>
-              <a:t>~380</a:t>
-            </a:r>
-          </a:p>
-        </p:txBody>
-      </p:sp>
-      <p:sp>
-        <p:nvSpPr>
-          <p:cNvPr id="122" name="Rectangle 121"/>
-          <p:cNvSpPr/>
-          <p:nvPr/>
-        </p:nvSpPr>
-        <p:spPr>
-          <a:xfrm>
-            <a:off x="6108192" y="3986783"/>
-            <a:ext cx="5532120" cy="338328"/>
-          </a:xfrm>
-          <a:prstGeom prst="rect">
-            <a:avLst/>
-          </a:prstGeom>
-          <a:solidFill>
-            <a:srgbClr val="F5F5F4"/>
-          </a:solidFill>
-          <a:ln w="9525">
-            <a:solidFill>
-              <a:srgbClr val="E7E5E4"/>
-            </a:solidFill>
-          </a:ln>
-        </p:spPr>
-        <p:style>
-          <a:lnRef idx="1">
-            <a:schemeClr val="accent1"/>
-          </a:lnRef>
-          <a:fillRef idx="3">
-            <a:schemeClr val="accent1"/>
-          </a:fillRef>
-          <a:effectRef idx="2">
-            <a:schemeClr val="accent1"/>
-          </a:effectRef>
-          <a:fontRef idx="minor">
-            <a:schemeClr val="lt1"/>
-          </a:fontRef>
-        </p:style>
-        <p:txBody>
-          <a:bodyPr rtlCol="0" anchor="ctr"/>
-          <a:lstStyle/>
-          <a:p>
-            <a:pPr algn="ctr"/>
-          </a:p>
-        </p:txBody>
-      </p:sp>
-      <p:sp>
-        <p:nvSpPr>
-          <p:cNvPr id="123" name="TextBox 122"/>
-          <p:cNvSpPr txBox="1"/>
-          <p:nvPr/>
-        </p:nvSpPr>
-        <p:spPr>
-          <a:xfrm>
-            <a:off x="6181344" y="4050791"/>
-            <a:ext cx="256032" cy="228600"/>
-          </a:xfrm>
-          <a:prstGeom prst="rect">
-            <a:avLst/>
-          </a:prstGeom>
-          <a:noFill/>
-        </p:spPr>
-        <p:txBody>
-          <a:bodyPr wrap="square">
-            <a:noAutofit/>
-          </a:bodyPr>
-          <a:lstStyle/>
-          <a:p>
-            <a:pPr algn="l"/>
-            <a:r>
-              <a:rPr sz="800" b="1" i="0">
-                <a:solidFill>
-                  <a:srgbClr val="C8102E"/>
-                </a:solidFill>
-                <a:latin typeface="Calibri"/>
-              </a:rPr>
-              <a:t>22</a:t>
-            </a:r>
-          </a:p>
-        </p:txBody>
-      </p:sp>
-      <p:sp>
-        <p:nvSpPr>
-          <p:cNvPr id="124" name="TextBox 123"/>
-          <p:cNvSpPr txBox="1"/>
-          <p:nvPr/>
-        </p:nvSpPr>
-        <p:spPr>
-          <a:xfrm>
-            <a:off x="6455664" y="4050791"/>
-            <a:ext cx="1993392" cy="228600"/>
-          </a:xfrm>
-          <a:prstGeom prst="rect">
-            <a:avLst/>
-          </a:prstGeom>
-          <a:noFill/>
-        </p:spPr>
-        <p:txBody>
-          <a:bodyPr wrap="square">
-            <a:noAutofit/>
-          </a:bodyPr>
-          <a:lstStyle/>
-          <a:p>
-            <a:pPr algn="l"/>
-            <a:r>
-              <a:rPr sz="800" b="1" i="0">
-                <a:solidFill>
-                  <a:srgbClr val="1C1917"/>
-                </a:solidFill>
-                <a:latin typeface="Calibri"/>
-              </a:rPr>
-              <a:t>SQL Performance &amp; Indexing</a:t>
-            </a:r>
-          </a:p>
-        </p:txBody>
-      </p:sp>
-      <p:sp>
-        <p:nvSpPr>
-          <p:cNvPr id="125" name="TextBox 124"/>
-          <p:cNvSpPr txBox="1"/>
-          <p:nvPr/>
-        </p:nvSpPr>
-        <p:spPr>
-          <a:xfrm>
-            <a:off x="8503920" y="4050791"/>
-            <a:ext cx="2514600" cy="228600"/>
-          </a:xfrm>
-          <a:prstGeom prst="rect">
-            <a:avLst/>
-          </a:prstGeom>
-          <a:noFill/>
-        </p:spPr>
-        <p:txBody>
-          <a:bodyPr wrap="square">
-            <a:noAutofit/>
-          </a:bodyPr>
-          <a:lstStyle/>
-          <a:p>
-            <a:pPr algn="l"/>
-            <a:r>
-              <a:rPr sz="750" b="0" i="0">
-                <a:solidFill>
-                  <a:srgbClr val="78716C"/>
-                </a:solidFill>
-                <a:latin typeface="Calibri"/>
-              </a:rPr>
-              <a:t>SQL Performance Explained (Winand)</a:t>
-            </a:r>
-          </a:p>
-        </p:txBody>
-      </p:sp>
-      <p:sp>
-        <p:nvSpPr>
-          <p:cNvPr id="126" name="TextBox 125"/>
-          <p:cNvSpPr txBox="1"/>
-          <p:nvPr/>
-        </p:nvSpPr>
-        <p:spPr>
-          <a:xfrm>
-            <a:off x="11183112" y="4050791"/>
-            <a:ext cx="411480" cy="228600"/>
-          </a:xfrm>
-          <a:prstGeom prst="rect">
-            <a:avLst/>
-          </a:prstGeom>
-          <a:noFill/>
-        </p:spPr>
-        <p:txBody>
-          <a:bodyPr wrap="square">
-            <a:noAutofit/>
-          </a:bodyPr>
-          <a:lstStyle/>
-          <a:p>
-            <a:pPr algn="r"/>
-            <a:r>
-              <a:rPr sz="800" b="0" i="0">
-                <a:solidFill>
-                  <a:srgbClr val="44403C"/>
-                </a:solidFill>
-                <a:latin typeface="Calibri"/>
-              </a:rPr>
-              <a:t>~350</a:t>
-            </a:r>
-          </a:p>
-        </p:txBody>
-      </p:sp>
-      <p:sp>
-        <p:nvSpPr>
-          <p:cNvPr id="127" name="Rectangle 126"/>
-          <p:cNvSpPr/>
-          <p:nvPr/>
-        </p:nvSpPr>
-        <p:spPr>
-          <a:xfrm>
-            <a:off x="6108192" y="4325112"/>
-            <a:ext cx="5532120" cy="338328"/>
-          </a:xfrm>
-          <a:prstGeom prst="rect">
-            <a:avLst/>
-          </a:prstGeom>
-          <a:solidFill>
-            <a:srgbClr val="FFFFFF"/>
-          </a:solidFill>
-          <a:ln w="9525">
-            <a:solidFill>
-              <a:srgbClr val="E7E5E4"/>
-            </a:solidFill>
-          </a:ln>
-        </p:spPr>
-        <p:style>
-          <a:lnRef idx="1">
-            <a:schemeClr val="accent1"/>
-          </a:lnRef>
-          <a:fillRef idx="3">
-            <a:schemeClr val="accent1"/>
-          </a:fillRef>
-          <a:effectRef idx="2">
-            <a:schemeClr val="accent1"/>
-          </a:effectRef>
-          <a:fontRef idx="minor">
-            <a:schemeClr val="lt1"/>
-          </a:fontRef>
-        </p:style>
-        <p:txBody>
-          <a:bodyPr rtlCol="0" anchor="ctr"/>
-          <a:lstStyle/>
-          <a:p>
-            <a:pPr algn="ctr"/>
-          </a:p>
-        </p:txBody>
-      </p:sp>
-      <p:sp>
-        <p:nvSpPr>
-          <p:cNvPr id="128" name="TextBox 127"/>
-          <p:cNvSpPr txBox="1"/>
-          <p:nvPr/>
-        </p:nvSpPr>
-        <p:spPr>
-          <a:xfrm>
-            <a:off x="6181344" y="4389120"/>
-            <a:ext cx="256032" cy="228600"/>
-          </a:xfrm>
-          <a:prstGeom prst="rect">
-            <a:avLst/>
-          </a:prstGeom>
-          <a:noFill/>
-        </p:spPr>
-        <p:txBody>
-          <a:bodyPr wrap="square">
-            <a:noAutofit/>
-          </a:bodyPr>
-          <a:lstStyle/>
-          <a:p>
-            <a:pPr algn="l"/>
-            <a:r>
-              <a:rPr sz="800" b="1" i="0">
-                <a:solidFill>
-                  <a:srgbClr val="C8102E"/>
-                </a:solidFill>
-                <a:latin typeface="Calibri"/>
-              </a:rPr>
-              <a:t>23</a:t>
-            </a:r>
-          </a:p>
-        </p:txBody>
-      </p:sp>
-      <p:sp>
-        <p:nvSpPr>
-          <p:cNvPr id="129" name="TextBox 128"/>
-          <p:cNvSpPr txBox="1"/>
-          <p:nvPr/>
-        </p:nvSpPr>
-        <p:spPr>
-          <a:xfrm>
-            <a:off x="6455664" y="4389120"/>
-            <a:ext cx="1993392" cy="228600"/>
-          </a:xfrm>
-          <a:prstGeom prst="rect">
-            <a:avLst/>
-          </a:prstGeom>
-          <a:noFill/>
-        </p:spPr>
-        <p:txBody>
-          <a:bodyPr wrap="square">
-            <a:noAutofit/>
-          </a:bodyPr>
-          <a:lstStyle/>
-          <a:p>
-            <a:pPr algn="l"/>
-            <a:r>
-              <a:rPr sz="800" b="1" i="0">
-                <a:solidFill>
-                  <a:srgbClr val="1C1917"/>
-                </a:solidFill>
-                <a:latin typeface="Calibri"/>
-              </a:rPr>
-              <a:t>Advanced Prompt Engineering</a:t>
-            </a:r>
-          </a:p>
-        </p:txBody>
-      </p:sp>
-      <p:sp>
-        <p:nvSpPr>
-          <p:cNvPr id="130" name="TextBox 129"/>
-          <p:cNvSpPr txBox="1"/>
-          <p:nvPr/>
-        </p:nvSpPr>
-        <p:spPr>
-          <a:xfrm>
-            <a:off x="8503920" y="4389120"/>
-            <a:ext cx="2514600" cy="228600"/>
-          </a:xfrm>
-          <a:prstGeom prst="rect">
-            <a:avLst/>
-          </a:prstGeom>
-          <a:noFill/>
-        </p:spPr>
-        <p:txBody>
-          <a:bodyPr wrap="square">
-            <a:noAutofit/>
-          </a:bodyPr>
-          <a:lstStyle/>
-          <a:p>
-            <a:pPr algn="l"/>
-            <a:r>
-              <a:rPr sz="750" b="0" i="0">
-                <a:solidFill>
-                  <a:srgbClr val="78716C"/>
-                </a:solidFill>
-                <a:latin typeface="Calibri"/>
-              </a:rPr>
-              <a:t>Prompt Engineering for LLMs (Al-Shamey, Venn, Vael)</a:t>
-            </a:r>
-          </a:p>
-        </p:txBody>
-      </p:sp>
-      <p:sp>
-        <p:nvSpPr>
-          <p:cNvPr id="131" name="TextBox 130"/>
-          <p:cNvSpPr txBox="1"/>
-          <p:nvPr/>
-        </p:nvSpPr>
-        <p:spPr>
-          <a:xfrm>
-            <a:off x="11183112" y="4389120"/>
-            <a:ext cx="411480" cy="228600"/>
-          </a:xfrm>
-          <a:prstGeom prst="rect">
-            <a:avLst/>
-          </a:prstGeom>
-          <a:noFill/>
-        </p:spPr>
-        <p:txBody>
-          <a:bodyPr wrap="square">
-            <a:noAutofit/>
-          </a:bodyPr>
-          <a:lstStyle/>
-          <a:p>
-            <a:pPr algn="r"/>
-            <a:r>
-              <a:rPr sz="800" b="0" i="0">
-                <a:solidFill>
-                  <a:srgbClr val="44403C"/>
-                </a:solidFill>
-                <a:latin typeface="Calibri"/>
-              </a:rPr>
-              <a:t>~420</a:t>
-            </a:r>
-          </a:p>
-        </p:txBody>
-      </p:sp>
-      <p:sp>
-        <p:nvSpPr>
-          <p:cNvPr id="132" name="Rectangle 131"/>
-          <p:cNvSpPr/>
-          <p:nvPr/>
-        </p:nvSpPr>
-        <p:spPr>
-          <a:xfrm>
-            <a:off x="6108192" y="4663440"/>
-            <a:ext cx="5532120" cy="338328"/>
-          </a:xfrm>
-          <a:prstGeom prst="rect">
-            <a:avLst/>
-          </a:prstGeom>
-          <a:solidFill>
-            <a:srgbClr val="F5F5F4"/>
-          </a:solidFill>
-          <a:ln w="9525">
-            <a:solidFill>
-              <a:srgbClr val="E7E5E4"/>
-            </a:solidFill>
-          </a:ln>
-        </p:spPr>
-        <p:style>
-          <a:lnRef idx="1">
-            <a:schemeClr val="accent1"/>
-          </a:lnRef>
-          <a:fillRef idx="3">
-            <a:schemeClr val="accent1"/>
-          </a:fillRef>
-          <a:effectRef idx="2">
-            <a:schemeClr val="accent1"/>
-          </a:effectRef>
-          <a:fontRef idx="minor">
-            <a:schemeClr val="lt1"/>
-          </a:fontRef>
-        </p:style>
-        <p:txBody>
-          <a:bodyPr rtlCol="0" anchor="ctr"/>
-          <a:lstStyle/>
-          <a:p>
-            <a:pPr algn="ctr"/>
-          </a:p>
-        </p:txBody>
-      </p:sp>
-      <p:sp>
-        <p:nvSpPr>
-          <p:cNvPr id="133" name="TextBox 132"/>
-          <p:cNvSpPr txBox="1"/>
-          <p:nvPr/>
-        </p:nvSpPr>
-        <p:spPr>
-          <a:xfrm>
-            <a:off x="6181344" y="4727448"/>
-            <a:ext cx="256032" cy="228600"/>
-          </a:xfrm>
-          <a:prstGeom prst="rect">
-            <a:avLst/>
-          </a:prstGeom>
-          <a:noFill/>
-        </p:spPr>
-        <p:txBody>
-          <a:bodyPr wrap="square">
-            <a:noAutofit/>
-          </a:bodyPr>
-          <a:lstStyle/>
-          <a:p>
-            <a:pPr algn="l"/>
-            <a:r>
-              <a:rPr sz="800" b="1" i="0">
-                <a:solidFill>
-                  <a:srgbClr val="C8102E"/>
-                </a:solidFill>
-                <a:latin typeface="Calibri"/>
-              </a:rPr>
-              <a:t>24</a:t>
-            </a:r>
-          </a:p>
-        </p:txBody>
-      </p:sp>
-      <p:sp>
-        <p:nvSpPr>
-          <p:cNvPr id="134" name="TextBox 133"/>
-          <p:cNvSpPr txBox="1"/>
-          <p:nvPr/>
-        </p:nvSpPr>
-        <p:spPr>
-          <a:xfrm>
-            <a:off x="6455664" y="4727448"/>
-            <a:ext cx="1993392" cy="228600"/>
-          </a:xfrm>
-          <a:prstGeom prst="rect">
-            <a:avLst/>
-          </a:prstGeom>
-          <a:noFill/>
-        </p:spPr>
-        <p:txBody>
-          <a:bodyPr wrap="square">
-            <a:noAutofit/>
-          </a:bodyPr>
-          <a:lstStyle/>
-          <a:p>
-            <a:pPr algn="l"/>
-            <a:r>
-              <a:rPr sz="800" b="1" i="0">
-                <a:solidFill>
-                  <a:srgbClr val="1C1917"/>
-                </a:solidFill>
-                <a:latin typeface="Calibri"/>
-              </a:rPr>
-              <a:t>AI Agent Architecture</a:t>
-            </a:r>
-          </a:p>
-        </p:txBody>
-      </p:sp>
-      <p:sp>
-        <p:nvSpPr>
-          <p:cNvPr id="135" name="TextBox 134"/>
-          <p:cNvSpPr txBox="1"/>
-          <p:nvPr/>
-        </p:nvSpPr>
-        <p:spPr>
-          <a:xfrm>
-            <a:off x="8503920" y="4727448"/>
-            <a:ext cx="2514600" cy="228600"/>
-          </a:xfrm>
-          <a:prstGeom prst="rect">
-            <a:avLst/>
-          </a:prstGeom>
-          <a:noFill/>
-        </p:spPr>
-        <p:txBody>
-          <a:bodyPr wrap="square">
-            <a:noAutofit/>
-          </a:bodyPr>
-          <a:lstStyle/>
-          <a:p>
-            <a:pPr algn="l"/>
-            <a:r>
-              <a:rPr sz="750" b="0" i="0">
-                <a:solidFill>
-                  <a:srgbClr val="78716C"/>
-                </a:solidFill>
-                <a:latin typeface="Calibri"/>
-              </a:rPr>
-              <a:t>Building AI Agents + Mastering AI Tools</a:t>
-            </a:r>
-          </a:p>
-        </p:txBody>
-      </p:sp>
-      <p:sp>
-        <p:nvSpPr>
-          <p:cNvPr id="136" name="TextBox 135"/>
-          <p:cNvSpPr txBox="1"/>
-          <p:nvPr/>
-        </p:nvSpPr>
-        <p:spPr>
-          <a:xfrm>
-            <a:off x="11183112" y="4727448"/>
-            <a:ext cx="411480" cy="228600"/>
-          </a:xfrm>
-          <a:prstGeom prst="rect">
-            <a:avLst/>
-          </a:prstGeom>
-          <a:noFill/>
-        </p:spPr>
-        <p:txBody>
-          <a:bodyPr wrap="square">
-            <a:noAutofit/>
-          </a:bodyPr>
-          <a:lstStyle/>
-          <a:p>
-            <a:pPr algn="r"/>
-            <a:r>
-              <a:rPr sz="800" b="0" i="0">
-                <a:solidFill>
-                  <a:srgbClr val="44403C"/>
-                </a:solidFill>
-                <a:latin typeface="Calibri"/>
-              </a:rPr>
-              <a:t>~380</a:t>
-            </a:r>
-          </a:p>
-        </p:txBody>
-      </p:sp>
-      <p:sp>
-        <p:nvSpPr>
-          <p:cNvPr id="137" name="Rectangle 136"/>
-          <p:cNvSpPr/>
-          <p:nvPr/>
-        </p:nvSpPr>
-        <p:spPr>
-          <a:xfrm>
-            <a:off x="6108192" y="5001768"/>
-            <a:ext cx="5532120" cy="338328"/>
-          </a:xfrm>
-          <a:prstGeom prst="rect">
-            <a:avLst/>
-          </a:prstGeom>
-          <a:solidFill>
-            <a:srgbClr val="FFFFFF"/>
-          </a:solidFill>
-          <a:ln w="9525">
-            <a:solidFill>
-              <a:srgbClr val="E7E5E4"/>
-            </a:solidFill>
-          </a:ln>
-        </p:spPr>
-        <p:style>
-          <a:lnRef idx="1">
-            <a:schemeClr val="accent1"/>
-          </a:lnRef>
-          <a:fillRef idx="3">
-            <a:schemeClr val="accent1"/>
-          </a:fillRef>
-          <a:effectRef idx="2">
-            <a:schemeClr val="accent1"/>
-          </a:effectRef>
-          <a:fontRef idx="minor">
-            <a:schemeClr val="lt1"/>
-          </a:fontRef>
-        </p:style>
-        <p:txBody>
-          <a:bodyPr rtlCol="0" anchor="ctr"/>
-          <a:lstStyle/>
-          <a:p>
-            <a:pPr algn="ctr"/>
-          </a:p>
-        </p:txBody>
-      </p:sp>
-      <p:sp>
-        <p:nvSpPr>
-          <p:cNvPr id="138" name="TextBox 137"/>
-          <p:cNvSpPr txBox="1"/>
-          <p:nvPr/>
-        </p:nvSpPr>
-        <p:spPr>
-          <a:xfrm>
-            <a:off x="6181344" y="5065776"/>
-            <a:ext cx="256032" cy="228600"/>
-          </a:xfrm>
-          <a:prstGeom prst="rect">
-            <a:avLst/>
-          </a:prstGeom>
-          <a:noFill/>
-        </p:spPr>
-        <p:txBody>
-          <a:bodyPr wrap="square">
-            <a:noAutofit/>
-          </a:bodyPr>
-          <a:lstStyle/>
-          <a:p>
-            <a:pPr algn="l"/>
-            <a:r>
-              <a:rPr sz="800" b="1" i="0">
-                <a:solidFill>
-                  <a:srgbClr val="C8102E"/>
-                </a:solidFill>
-                <a:latin typeface="Calibri"/>
-              </a:rPr>
-              <a:t>25</a:t>
-            </a:r>
-          </a:p>
-        </p:txBody>
-      </p:sp>
-      <p:sp>
-        <p:nvSpPr>
-          <p:cNvPr id="139" name="TextBox 138"/>
-          <p:cNvSpPr txBox="1"/>
-          <p:nvPr/>
-        </p:nvSpPr>
-        <p:spPr>
-          <a:xfrm>
-            <a:off x="6455664" y="5065776"/>
-            <a:ext cx="1993392" cy="228600"/>
-          </a:xfrm>
-          <a:prstGeom prst="rect">
-            <a:avLst/>
-          </a:prstGeom>
-          <a:noFill/>
-        </p:spPr>
-        <p:txBody>
-          <a:bodyPr wrap="square">
-            <a:noAutofit/>
-          </a:bodyPr>
-          <a:lstStyle/>
-          <a:p>
-            <a:pPr algn="l"/>
-            <a:r>
-              <a:rPr sz="800" b="1" i="0">
-                <a:solidFill>
-                  <a:srgbClr val="1C1917"/>
-                </a:solidFill>
-                <a:latin typeface="Calibri"/>
-              </a:rPr>
-              <a:t>Claude Code Workflow</a:t>
-            </a:r>
-          </a:p>
-        </p:txBody>
-      </p:sp>
-      <p:sp>
-        <p:nvSpPr>
-          <p:cNvPr id="140" name="TextBox 139"/>
-          <p:cNvSpPr txBox="1"/>
-          <p:nvPr/>
-        </p:nvSpPr>
-        <p:spPr>
-          <a:xfrm>
-            <a:off x="8503920" y="5065776"/>
-            <a:ext cx="2514600" cy="228600"/>
-          </a:xfrm>
-          <a:prstGeom prst="rect">
-            <a:avLst/>
-          </a:prstGeom>
-          <a:noFill/>
-        </p:spPr>
-        <p:txBody>
-          <a:bodyPr wrap="square">
-            <a:noAutofit/>
-          </a:bodyPr>
-          <a:lstStyle/>
-          <a:p>
-            <a:pPr algn="l"/>
-            <a:r>
-              <a:rPr sz="750" b="0" i="0">
-                <a:solidFill>
-                  <a:srgbClr val="78716C"/>
-                </a:solidFill>
-                <a:latin typeface="Calibri"/>
-              </a:rPr>
-              <a:t>Claude Code Mastery + Claude Myths &amp; Realities + AI Tools Guide</a:t>
-            </a:r>
-          </a:p>
-        </p:txBody>
-      </p:sp>
-      <p:sp>
-        <p:nvSpPr>
-          <p:cNvPr id="141" name="TextBox 140"/>
-          <p:cNvSpPr txBox="1"/>
-          <p:nvPr/>
-        </p:nvSpPr>
-        <p:spPr>
-          <a:xfrm>
-            <a:off x="11183112" y="5065776"/>
-            <a:ext cx="411480" cy="228600"/>
-          </a:xfrm>
-          <a:prstGeom prst="rect">
-            <a:avLst/>
-          </a:prstGeom>
-          <a:noFill/>
-        </p:spPr>
-        <p:txBody>
-          <a:bodyPr wrap="square">
-            <a:noAutofit/>
-          </a:bodyPr>
-          <a:lstStyle/>
-          <a:p>
-            <a:pPr algn="r"/>
-            <a:r>
-              <a:rPr sz="800" b="0" i="0">
-                <a:solidFill>
-                  <a:srgbClr val="44403C"/>
-                </a:solidFill>
-                <a:latin typeface="Calibri"/>
-              </a:rPr>
-              <a:t>~360</a:t>
-            </a:r>
-          </a:p>
-        </p:txBody>
-      </p:sp>
-      <p:sp>
-        <p:nvSpPr>
-          <p:cNvPr id="142" name="Rectangle 141"/>
-          <p:cNvSpPr/>
-          <p:nvPr/>
-        </p:nvSpPr>
-        <p:spPr>
-          <a:xfrm>
-            <a:off x="6108192" y="5340096"/>
-            <a:ext cx="5532120" cy="338328"/>
-          </a:xfrm>
-          <a:prstGeom prst="rect">
-            <a:avLst/>
-          </a:prstGeom>
-          <a:solidFill>
-            <a:srgbClr val="F5F5F4"/>
-          </a:solidFill>
-          <a:ln w="9525">
-            <a:solidFill>
-              <a:srgbClr val="E7E5E4"/>
-            </a:solidFill>
-          </a:ln>
-        </p:spPr>
-        <p:style>
-          <a:lnRef idx="1">
-            <a:schemeClr val="accent1"/>
-          </a:lnRef>
-          <a:fillRef idx="3">
-            <a:schemeClr val="accent1"/>
-          </a:fillRef>
-          <a:effectRef idx="2">
-            <a:schemeClr val="accent1"/>
-          </a:effectRef>
-          <a:fontRef idx="minor">
-            <a:schemeClr val="lt1"/>
-          </a:fontRef>
-        </p:style>
-        <p:txBody>
-          <a:bodyPr rtlCol="0" anchor="ctr"/>
-          <a:lstStyle/>
-          <a:p>
-            <a:pPr algn="ctr"/>
-          </a:p>
-        </p:txBody>
-      </p:sp>
-      <p:sp>
-        <p:nvSpPr>
-          <p:cNvPr id="143" name="TextBox 142"/>
-          <p:cNvSpPr txBox="1"/>
-          <p:nvPr/>
-        </p:nvSpPr>
-        <p:spPr>
-          <a:xfrm>
-            <a:off x="6181344" y="5404104"/>
-            <a:ext cx="256032" cy="228600"/>
-          </a:xfrm>
-          <a:prstGeom prst="rect">
-            <a:avLst/>
-          </a:prstGeom>
-          <a:noFill/>
-        </p:spPr>
-        <p:txBody>
-          <a:bodyPr wrap="square">
-            <a:noAutofit/>
-          </a:bodyPr>
-          <a:lstStyle/>
-          <a:p>
-            <a:pPr algn="l"/>
-            <a:r>
-              <a:rPr sz="800" b="1" i="0">
-                <a:solidFill>
-                  <a:srgbClr val="C8102E"/>
-                </a:solidFill>
-                <a:latin typeface="Calibri"/>
-              </a:rPr>
-              <a:t>26</a:t>
-            </a:r>
-          </a:p>
-        </p:txBody>
-      </p:sp>
-      <p:sp>
-        <p:nvSpPr>
-          <p:cNvPr id="144" name="TextBox 143"/>
-          <p:cNvSpPr txBox="1"/>
-          <p:nvPr/>
-        </p:nvSpPr>
-        <p:spPr>
-          <a:xfrm>
-            <a:off x="6455664" y="5404104"/>
-            <a:ext cx="1993392" cy="228600"/>
-          </a:xfrm>
-          <a:prstGeom prst="rect">
-            <a:avLst/>
-          </a:prstGeom>
-          <a:noFill/>
-        </p:spPr>
-        <p:txBody>
-          <a:bodyPr wrap="square">
-            <a:noAutofit/>
-          </a:bodyPr>
-          <a:lstStyle/>
-          <a:p>
-            <a:pPr algn="l"/>
-            <a:r>
-              <a:rPr sz="800" b="1" i="0">
-                <a:solidFill>
-                  <a:srgbClr val="1C1917"/>
-                </a:solidFill>
-                <a:latin typeface="Calibri"/>
-              </a:rPr>
-              <a:t>UI Design Principles</a:t>
-            </a:r>
-          </a:p>
-        </p:txBody>
-      </p:sp>
-      <p:sp>
-        <p:nvSpPr>
-          <p:cNvPr id="145" name="TextBox 144"/>
-          <p:cNvSpPr txBox="1"/>
-          <p:nvPr/>
-        </p:nvSpPr>
-        <p:spPr>
-          <a:xfrm>
-            <a:off x="8503920" y="5404104"/>
-            <a:ext cx="2514600" cy="228600"/>
-          </a:xfrm>
-          <a:prstGeom prst="rect">
-            <a:avLst/>
-          </a:prstGeom>
-          <a:noFill/>
-        </p:spPr>
-        <p:txBody>
-          <a:bodyPr wrap="square">
-            <a:noAutofit/>
-          </a:bodyPr>
-          <a:lstStyle/>
-          <a:p>
-            <a:pPr algn="l"/>
-            <a:r>
-              <a:rPr sz="750" b="0" i="0">
-                <a:solidFill>
-                  <a:srgbClr val="78716C"/>
-                </a:solidFill>
-                <a:latin typeface="Calibri"/>
-              </a:rPr>
-              <a:t>Refactoring UI (Wathan &amp; Schoger)</a:t>
-            </a:r>
-          </a:p>
-        </p:txBody>
-      </p:sp>
-      <p:sp>
-        <p:nvSpPr>
-          <p:cNvPr id="146" name="TextBox 145"/>
-          <p:cNvSpPr txBox="1"/>
-          <p:nvPr/>
-        </p:nvSpPr>
-        <p:spPr>
-          <a:xfrm>
-            <a:off x="11183112" y="5404104"/>
-            <a:ext cx="411480" cy="228600"/>
-          </a:xfrm>
-          <a:prstGeom prst="rect">
-            <a:avLst/>
-          </a:prstGeom>
-          <a:noFill/>
-        </p:spPr>
-        <p:txBody>
-          <a:bodyPr wrap="square">
-            <a:noAutofit/>
-          </a:bodyPr>
-          <a:lstStyle/>
-          <a:p>
-            <a:pPr algn="r"/>
-            <a:r>
-              <a:rPr sz="800" b="0" i="0">
-                <a:solidFill>
-                  <a:srgbClr val="44403C"/>
-                </a:solidFill>
-                <a:latin typeface="Calibri"/>
-              </a:rPr>
-              <a:t>~420</a:t>
-            </a:r>
-          </a:p>
-        </p:txBody>
-      </p:sp>
-      <p:sp>
-        <p:nvSpPr>
-          <p:cNvPr id="147" name="Rectangle 146"/>
-          <p:cNvSpPr/>
-          <p:nvPr/>
-        </p:nvSpPr>
-        <p:spPr>
-          <a:xfrm>
-            <a:off x="0" y="6601968"/>
-            <a:ext cx="12188952" cy="256032"/>
-          </a:xfrm>
-          <a:prstGeom prst="rect">
-            <a:avLst/>
-          </a:prstGeom>
-          <a:solidFill>
-            <a:srgbClr val="1C1917"/>
-          </a:solidFill>
-          <a:ln>
-            <a:noFill/>
-          </a:ln>
-        </p:spPr>
-        <p:style>
-          <a:lnRef idx="1">
-            <a:schemeClr val="accent1"/>
-          </a:lnRef>
-          <a:fillRef idx="3">
-            <a:schemeClr val="accent1"/>
-          </a:fillRef>
-          <a:effectRef idx="2">
-            <a:schemeClr val="accent1"/>
-          </a:effectRef>
-          <a:fontRef idx="minor">
-            <a:schemeClr val="lt1"/>
-          </a:fontRef>
-        </p:style>
-        <p:txBody>
-          <a:bodyPr rtlCol="0" anchor="ctr"/>
-          <a:lstStyle/>
-          <a:p>
-            <a:pPr algn="ctr"/>
-          </a:p>
-        </p:txBody>
-      </p:sp>
-      <p:sp>
-        <p:nvSpPr>
-          <p:cNvPr id="148" name="TextBox 147"/>
+          <p:cNvPr id="70" name="TextBox 69"/>
           <p:cNvSpPr txBox="1"/>
           <p:nvPr/>
         </p:nvSpPr>
@@ -9682,7 +6888,7 @@
       </p:sp>
       <p:sp>
         <p:nvSpPr>
-          <p:cNvPr id="149" name="TextBox 148"/>
+          <p:cNvPr id="71" name="TextBox 70"/>
           <p:cNvSpPr txBox="1"/>
           <p:nvPr/>
         </p:nvSpPr>
@@ -16535,7 +13741,7 @@
                 </a:solidFill>
                 <a:latin typeface="Calibri"/>
               </a:rPr>
-              <a:t>Project Record · 12 slides (this deck)</a:t>
+              <a:t>Project Record · 13 slides (this deck)</a:t>
             </a:r>
           </a:p>
         </p:txBody>
@@ -17743,7 +14949,7 @@
                 </a:solidFill>
                 <a:latin typeface="Calibri"/>
               </a:rPr>
-              <a:t>Reference library (26 sections)</a:t>
+              <a:t>Reference library (77 sections · Quick Lookup index)</a:t>
             </a:r>
           </a:p>
         </p:txBody>

--- a/Santander_Project_Record.pptx
+++ b/Santander_Project_Record.pptx
@@ -4378,7 +4378,7 @@
                 </a:solidFill>
                 <a:latin typeface="Calibri"/>
               </a:rPr>
-              <a:t>15,552 lines · 77 sections · 86 books &amp; regulatory documents · Quick Lookup decision index</a:t>
+              <a:t>21,689 lines · 88 sections · 97 books &amp; regulatory documents · Quick Lookup decision index</a:t>
             </a:r>
           </a:p>
         </p:txBody>
@@ -4499,7 +4499,7 @@
                 </a:solidFill>
                 <a:latin typeface="Calibri"/>
               </a:rPr>
-              <a:t>15,552</a:t>
+              <a:t>21,689</a:t>
             </a:r>
           </a:p>
         </p:txBody>
@@ -4612,7 +4612,7 @@
                 </a:solidFill>
                 <a:latin typeface="Calibri"/>
               </a:rPr>
-              <a:t>77</a:t>
+              <a:t>88</a:t>
             </a:r>
           </a:p>
         </p:txBody>
@@ -4725,7 +4725,7 @@
                 </a:solidFill>
                 <a:latin typeface="Calibri"/>
               </a:rPr>
-              <a:t>86</a:t>
+              <a:t>97</a:t>
             </a:r>
           </a:p>
         </p:txBody>
@@ -5337,7 +5337,7 @@
                 </a:solidFill>
                 <a:latin typeface="Calibri"/>
               </a:rPr>
-              <a:t>Banking · Payments · Open Banking</a:t>
+              <a:t>Banking · Payments · Regulation</a:t>
             </a:r>
           </a:p>
         </p:txBody>
@@ -5372,7 +5372,7 @@
                 </a:solidFill>
                 <a:latin typeface="Calibri"/>
               </a:rPr>
-              <a:t>§35–41, §70–71</a:t>
+              <a:t>§35–41, §66–70, §84, §86–88</a:t>
             </a:r>
           </a:p>
         </p:txBody>
@@ -5452,7 +5452,7 @@
                 </a:solidFill>
                 <a:latin typeface="Calibri"/>
               </a:rPr>
-              <a:t>PSD2 · MTD HMRC · WCAG · FPS/BACS/CHAPS/SWIFT · KYC/AML · Companies House · Financial Inclusion</a:t>
+              <a:t>PSD2 · FPS/BACS/CHAPS/SWIFT · PSR · FCA Consumer Duty · AML · Ring-Fencing · SCA · BCOBS · FCA Compliance · UK Resolution · Post-Trade</a:t>
             </a:r>
           </a:p>
         </p:txBody>
@@ -5530,7 +5530,7 @@
                 </a:solidFill>
                 <a:latin typeface="Calibri"/>
               </a:rPr>
-              <a:t>FCA Regulation</a:t>
+              <a:t>Prudential &amp; Market Regulation</a:t>
             </a:r>
           </a:p>
         </p:txBody>
@@ -5565,7 +5565,7 @@
                 </a:solidFill>
                 <a:latin typeface="Calibri"/>
               </a:rPr>
-              <a:t>§66–70</a:t>
+              <a:t>§36–40, §87–88</a:t>
             </a:r>
           </a:p>
         </p:txBody>
@@ -5645,7 +5645,7 @@
                 </a:solidFill>
                 <a:latin typeface="Calibri"/>
               </a:rPr>
-              <a:t>Consumer Duty PS22/9 · AML MLR 2017 · Ring-Fencing FSMA · BCOBS/CASS · SCA/UK-RTS exemptions</a:t>
+              <a:t>PRA/PRC · Basel 3.1 · SS19/13 Resolution Planning · MREL · CNRF · Deposit Aggregators · LEI/SSI · KYC Passporting · Post-Trade Task Force</a:t>
             </a:r>
           </a:p>
         </p:txBody>
@@ -5951,7 +5951,7 @@
                 </a:solidFill>
                 <a:latin typeface="Calibri"/>
               </a:rPr>
-              <a:t>§11, §26, §42, §50–56</a:t>
+              <a:t>§11, §26, §42, §50–56, §78–81</a:t>
             </a:r>
           </a:p>
         </p:txBody>
@@ -6031,7 +6031,7 @@
                 </a:solidFill>
                 <a:latin typeface="Calibri"/>
               </a:rPr>
-              <a:t>React/JS patterns · Refactoring UI · Tailwind CSS v3 · CSS Animation · Vite/TS · React 19 · UX · Photoshop · KiCad</a:t>
+              <a:t>React/JS patterns · Refactoring UI · Tailwind CSS v3 (×3 books) · CSS Animation · Vite/TS · React 19 · React Hooks (Larsen) · UX · Photoshop · KiCad</a:t>
             </a:r>
           </a:p>
         </p:txBody>
@@ -6688,7 +6688,7 @@
                 </a:solidFill>
                 <a:latin typeface="Calibri"/>
               </a:rPr>
-              <a:t>Quick Lookup Decision Index</a:t>
+              <a:t>Digital Banking Transformation</a:t>
             </a:r>
           </a:p>
         </p:txBody>
@@ -6723,7 +6723,7 @@
                 </a:solidFill>
                 <a:latin typeface="Calibri"/>
               </a:rPr>
-              <a:t>NEW — Jun 2026</a:t>
+              <a:t>§82, §83, §85</a:t>
             </a:r>
           </a:p>
         </p:txBody>
@@ -6803,7 +6803,7 @@
                 </a:solidFill>
                 <a:latin typeface="Calibri"/>
               </a:rPr>
-              <a:t>70+ answers · 8 themed tables · Design rules · Payment rails · GDPR deadlines · FCA rules · SCA · AI prompt modes</a:t>
+              <a:t>DBS World's Best Bank (Speculand) · The Autonomous Bank AI/ML (Dhillon) · TMRW Digital Bank Build (Khoo/UOB) · Quick Lookup Decision Index</a:t>
             </a:r>
           </a:p>
         </p:txBody>
@@ -14949,7 +14949,7 @@
                 </a:solidFill>
                 <a:latin typeface="Calibri"/>
               </a:rPr>
-              <a:t>Reference library (77 sections · Quick Lookup index)</a:t>
+              <a:t>Reference library (88 sections · Quick Lookup index)</a:t>
             </a:r>
           </a:p>
         </p:txBody>

--- a/Santander_Project_Record.pptx
+++ b/Santander_Project_Record.pptx
@@ -4378,7 +4378,7 @@
                 </a:solidFill>
                 <a:latin typeface="Calibri"/>
               </a:rPr>
-              <a:t>21,689 lines · 88 sections · 97 books &amp; regulatory documents · Quick Lookup decision index</a:t>
+              <a:t>22,128 lines · 89 sections · 98 books &amp; regulatory documents · Quick Lookup decision index</a:t>
             </a:r>
           </a:p>
         </p:txBody>
@@ -4499,7 +4499,7 @@
                 </a:solidFill>
                 <a:latin typeface="Calibri"/>
               </a:rPr>
-              <a:t>21,689</a:t>
+              <a:t>22,128</a:t>
             </a:r>
           </a:p>
         </p:txBody>
@@ -4612,7 +4612,7 @@
                 </a:solidFill>
                 <a:latin typeface="Calibri"/>
               </a:rPr>
-              <a:t>88</a:t>
+              <a:t>89</a:t>
             </a:r>
           </a:p>
         </p:txBody>
@@ -4725,7 +4725,7 @@
                 </a:solidFill>
                 <a:latin typeface="Calibri"/>
               </a:rPr>
-              <a:t>97</a:t>
+              <a:t>98</a:t>
             </a:r>
           </a:p>
         </p:txBody>
@@ -6530,7 +6530,7 @@
                 </a:solidFill>
                 <a:latin typeface="Calibri"/>
               </a:rPr>
-              <a:t>§43–49, §54, §57</a:t>
+              <a:t>§43–49, §54, §57, §89</a:t>
             </a:r>
           </a:p>
         </p:txBody>
@@ -6610,7 +6610,7 @@
                 </a:solidFill>
                 <a:latin typeface="Calibri"/>
               </a:rPr>
-              <a:t>MakerSpace · Electronics · Mechatronics · Digital Logic · Devices &amp; Circuits · Arduino/IoT · Embedded Linux</a:t>
+              <a:t>MakerSpace · Electronics · Mechatronics · Digital Logic · Devices &amp; Circuits · Arduino/IoT · Embedded Linux · ISO GD&amp;T (Green)</a:t>
             </a:r>
           </a:p>
         </p:txBody>
@@ -14949,7 +14949,7 @@
                 </a:solidFill>
                 <a:latin typeface="Calibri"/>
               </a:rPr>
-              <a:t>Reference library (88 sections · Quick Lookup index)</a:t>
+              <a:t>Reference library (89 sections · Quick Lookup index)</a:t>
             </a:r>
           </a:p>
         </p:txBody>

--- a/Santander_Project_Record.pptx
+++ b/Santander_Project_Record.pptx
@@ -4378,7 +4378,7 @@
                 </a:solidFill>
                 <a:latin typeface="Calibri"/>
               </a:rPr>
-              <a:t>22,128 lines · 89 sections · 98 books &amp; regulatory documents · Quick Lookup decision index</a:t>
+              <a:t>22,590 lines · 89 sections · 98 books &amp; regulatory documents · Quick Lookup decision index</a:t>
             </a:r>
           </a:p>
         </p:txBody>
@@ -4499,7 +4499,7 @@
                 </a:solidFill>
                 <a:latin typeface="Calibri"/>
               </a:rPr>
-              <a:t>22,128</a:t>
+              <a:t>22,590</a:t>
             </a:r>
           </a:p>
         </p:txBody>

--- a/Santander_Project_Record.pptx
+++ b/Santander_Project_Record.pptx
@@ -4378,7 +4378,7 @@
                 </a:solidFill>
                 <a:latin typeface="Calibri"/>
               </a:rPr>
-              <a:t>22,590 lines · 89 sections · 98 books &amp; regulatory documents · Quick Lookup decision index</a:t>
+              <a:t>22,692 lines · 89 sections · 98 books &amp; regulatory documents · Quick Lookup decision index</a:t>
             </a:r>
           </a:p>
         </p:txBody>
@@ -4499,7 +4499,7 @@
                 </a:solidFill>
                 <a:latin typeface="Calibri"/>
               </a:rPr>
-              <a:t>22,590</a:t>
+              <a:t>22,692</a:t>
             </a:r>
           </a:p>
         </p:txBody>

--- a/Santander_Project_Record.pptx
+++ b/Santander_Project_Record.pptx
@@ -4378,7 +4378,7 @@
                 </a:solidFill>
                 <a:latin typeface="Calibri"/>
               </a:rPr>
-              <a:t>22,692 lines · 89 sections · 98 books &amp; regulatory documents · Quick Lookup decision index</a:t>
+              <a:t>22,935 lines · 90 sections · 99 books &amp; regulatory documents · Quick Lookup decision index</a:t>
             </a:r>
           </a:p>
         </p:txBody>
@@ -4499,7 +4499,7 @@
                 </a:solidFill>
                 <a:latin typeface="Calibri"/>
               </a:rPr>
-              <a:t>22,692</a:t>
+              <a:t>22,935</a:t>
             </a:r>
           </a:p>
         </p:txBody>
@@ -14949,7 +14949,7 @@
                 </a:solidFill>
                 <a:latin typeface="Calibri"/>
               </a:rPr>
-              <a:t>Reference library (89 sections · Quick Lookup index)</a:t>
+              <a:t>Reference library (90 sections · Quick Lookup index)</a:t>
             </a:r>
           </a:p>
         </p:txBody>

--- a/Santander_Project_Record.pptx
+++ b/Santander_Project_Record.pptx
@@ -18,6 +18,7 @@
     <p:sldId id="266" r:id="rId17"/>
     <p:sldId id="267" r:id="rId18"/>
     <p:sldId id="268" r:id="rId19"/>
+    <p:sldId id="269" r:id="rId20"/>
   </p:sldIdLst>
   <p:sldSz cx="12188952" cy="6858000" type="screen4x3"/>
   <p:notesSz cx="6858000" cy="9144000"/>
@@ -3822,7 +3823,7 @@
                 </a:solidFill>
                 <a:latin typeface="Calibri"/>
               </a:rPr>
-              <a:t>11</a:t>
+              <a:t>12</a:t>
             </a:r>
           </a:p>
         </p:txBody>
@@ -4378,7 +4379,7 @@
                 </a:solidFill>
                 <a:latin typeface="Calibri"/>
               </a:rPr>
-              <a:t>22,935 lines · 90 sections · 99 books &amp; regulatory documents · Quick Lookup decision index</a:t>
+              <a:t>22,935 lines · 90 sections · 99 books &amp; regulatory documents · §90 complaint handling framework</a:t>
             </a:r>
           </a:p>
         </p:txBody>
@@ -4612,7 +4613,7 @@
                 </a:solidFill>
                 <a:latin typeface="Calibri"/>
               </a:rPr>
-              <a:t>89</a:t>
+              <a:t>90</a:t>
             </a:r>
           </a:p>
         </p:txBody>
@@ -4725,7 +4726,7 @@
                 </a:solidFill>
                 <a:latin typeface="Calibri"/>
               </a:rPr>
-              <a:t>98</a:t>
+              <a:t>99</a:t>
             </a:r>
           </a:p>
         </p:txBody>
@@ -9722,7 +9723,7 @@
                 </a:solidFill>
                 <a:latin typeface="Calibri"/>
               </a:rPr>
-              <a:t>Regenerate this project record (13 slides)</a:t>
+              <a:t>Regenerate this project record (14 slides)</a:t>
             </a:r>
           </a:p>
         </p:txBody>
@@ -9730,6 +9731,236 @@
       <p:sp>
         <p:nvSpPr>
           <p:cNvPr id="74" name="Rectangle 73"/>
+          <p:cNvSpPr/>
+          <p:nvPr/>
+        </p:nvSpPr>
+        <p:spPr>
+          <a:xfrm>
+            <a:off x="566928" y="6345936"/>
+            <a:ext cx="4937760" cy="274320"/>
+          </a:xfrm>
+          <a:prstGeom prst="rect">
+            <a:avLst/>
+          </a:prstGeom>
+          <a:solidFill>
+            <a:srgbClr val="FFFFFF"/>
+          </a:solidFill>
+          <a:ln w="9525">
+            <a:solidFill>
+              <a:srgbClr val="E7E5E4"/>
+            </a:solidFill>
+          </a:ln>
+        </p:spPr>
+        <p:style>
+          <a:lnRef idx="1">
+            <a:schemeClr val="accent1"/>
+          </a:lnRef>
+          <a:fillRef idx="3">
+            <a:schemeClr val="accent1"/>
+          </a:fillRef>
+          <a:effectRef idx="2">
+            <a:schemeClr val="accent1"/>
+          </a:effectRef>
+          <a:fontRef idx="minor">
+            <a:schemeClr val="lt1"/>
+          </a:fontRef>
+        </p:style>
+        <p:txBody>
+          <a:bodyPr rtlCol="0" anchor="ctr"/>
+          <a:lstStyle/>
+          <a:p>
+            <a:pPr algn="ctr"/>
+          </a:p>
+        </p:txBody>
+      </p:sp>
+      <p:sp>
+        <p:nvSpPr>
+          <p:cNvPr id="75" name="TextBox 74"/>
+          <p:cNvSpPr txBox="1"/>
+          <p:nvPr/>
+        </p:nvSpPr>
+        <p:spPr>
+          <a:xfrm>
+            <a:off x="658368" y="6382512"/>
+            <a:ext cx="1920240" cy="210312"/>
+          </a:xfrm>
+          <a:prstGeom prst="rect">
+            <a:avLst/>
+          </a:prstGeom>
+          <a:noFill/>
+        </p:spPr>
+        <p:txBody>
+          <a:bodyPr wrap="square">
+            <a:noAutofit/>
+          </a:bodyPr>
+          <a:lstStyle/>
+          <a:p>
+            <a:pPr algn="l"/>
+            <a:r>
+              <a:rPr sz="800" b="1" i="0">
+                <a:solidFill>
+                  <a:srgbClr val="1C1917"/>
+                </a:solidFill>
+                <a:latin typeface="Calibri"/>
+              </a:rPr>
+              <a:t>python3 build_complaint_guide.py</a:t>
+            </a:r>
+          </a:p>
+        </p:txBody>
+      </p:sp>
+      <p:sp>
+        <p:nvSpPr>
+          <p:cNvPr id="76" name="TextBox 75"/>
+          <p:cNvSpPr txBox="1"/>
+          <p:nvPr/>
+        </p:nvSpPr>
+        <p:spPr>
+          <a:xfrm>
+            <a:off x="2606040" y="6382512"/>
+            <a:ext cx="2834640" cy="210312"/>
+          </a:xfrm>
+          <a:prstGeom prst="rect">
+            <a:avLst/>
+          </a:prstGeom>
+          <a:noFill/>
+        </p:spPr>
+        <p:txBody>
+          <a:bodyPr wrap="square">
+            <a:noAutofit/>
+          </a:bodyPr>
+          <a:lstStyle/>
+          <a:p>
+            <a:pPr algn="l"/>
+            <a:r>
+              <a:rPr sz="800" b="0" i="0">
+                <a:solidFill>
+                  <a:srgbClr val="78716C"/>
+                </a:solidFill>
+                <a:latin typeface="Calibri"/>
+              </a:rPr>
+              <a:t>Regenerate Santander_Complaint_Guide.docx</a:t>
+            </a:r>
+          </a:p>
+        </p:txBody>
+      </p:sp>
+      <p:sp>
+        <p:nvSpPr>
+          <p:cNvPr id="77" name="Rectangle 76"/>
+          <p:cNvSpPr/>
+          <p:nvPr/>
+        </p:nvSpPr>
+        <p:spPr>
+          <a:xfrm>
+            <a:off x="566928" y="6620256"/>
+            <a:ext cx="4937760" cy="274320"/>
+          </a:xfrm>
+          <a:prstGeom prst="rect">
+            <a:avLst/>
+          </a:prstGeom>
+          <a:solidFill>
+            <a:srgbClr val="F5F5F4"/>
+          </a:solidFill>
+          <a:ln w="9525">
+            <a:solidFill>
+              <a:srgbClr val="E7E5E4"/>
+            </a:solidFill>
+          </a:ln>
+        </p:spPr>
+        <p:style>
+          <a:lnRef idx="1">
+            <a:schemeClr val="accent1"/>
+          </a:lnRef>
+          <a:fillRef idx="3">
+            <a:schemeClr val="accent1"/>
+          </a:fillRef>
+          <a:effectRef idx="2">
+            <a:schemeClr val="accent1"/>
+          </a:effectRef>
+          <a:fontRef idx="minor">
+            <a:schemeClr val="lt1"/>
+          </a:fontRef>
+        </p:style>
+        <p:txBody>
+          <a:bodyPr rtlCol="0" anchor="ctr"/>
+          <a:lstStyle/>
+          <a:p>
+            <a:pPr algn="ctr"/>
+          </a:p>
+        </p:txBody>
+      </p:sp>
+      <p:sp>
+        <p:nvSpPr>
+          <p:cNvPr id="78" name="TextBox 77"/>
+          <p:cNvSpPr txBox="1"/>
+          <p:nvPr/>
+        </p:nvSpPr>
+        <p:spPr>
+          <a:xfrm>
+            <a:off x="658368" y="6656832"/>
+            <a:ext cx="1920240" cy="210312"/>
+          </a:xfrm>
+          <a:prstGeom prst="rect">
+            <a:avLst/>
+          </a:prstGeom>
+          <a:noFill/>
+        </p:spPr>
+        <p:txBody>
+          <a:bodyPr wrap="square">
+            <a:noAutofit/>
+          </a:bodyPr>
+          <a:lstStyle/>
+          <a:p>
+            <a:pPr algn="l"/>
+            <a:r>
+              <a:rPr sz="800" b="1" i="0">
+                <a:solidFill>
+                  <a:srgbClr val="1C1917"/>
+                </a:solidFill>
+                <a:latin typeface="Calibri"/>
+              </a:rPr>
+              <a:t>python3 complaint_letter_writer.py</a:t>
+            </a:r>
+          </a:p>
+        </p:txBody>
+      </p:sp>
+      <p:sp>
+        <p:nvSpPr>
+          <p:cNvPr id="79" name="TextBox 78"/>
+          <p:cNvSpPr txBox="1"/>
+          <p:nvPr/>
+        </p:nvSpPr>
+        <p:spPr>
+          <a:xfrm>
+            <a:off x="2606040" y="6656832"/>
+            <a:ext cx="2834640" cy="210312"/>
+          </a:xfrm>
+          <a:prstGeom prst="rect">
+            <a:avLst/>
+          </a:prstGeom>
+          <a:noFill/>
+        </p:spPr>
+        <p:txBody>
+          <a:bodyPr wrap="square">
+            <a:noAutofit/>
+          </a:bodyPr>
+          <a:lstStyle/>
+          <a:p>
+            <a:pPr algn="l"/>
+            <a:r>
+              <a:rPr sz="800" b="0" i="0">
+                <a:solidFill>
+                  <a:srgbClr val="78716C"/>
+                </a:solidFill>
+                <a:latin typeface="Calibri"/>
+              </a:rPr>
+              <a:t>Interactive FCA DISP letter writer (Evelyn/Angus)</a:t>
+            </a:r>
+          </a:p>
+        </p:txBody>
+      </p:sp>
+      <p:sp>
+        <p:nvSpPr>
+          <p:cNvPr id="80" name="Rectangle 79"/>
           <p:cNvSpPr/>
           <p:nvPr/>
         </p:nvSpPr>
@@ -9774,7 +10005,7 @@
       </p:sp>
       <p:sp>
         <p:nvSpPr>
-          <p:cNvPr id="75" name="Rectangle 74"/>
+          <p:cNvPr id="81" name="Rectangle 80"/>
           <p:cNvSpPr/>
           <p:nvPr/>
         </p:nvSpPr>
@@ -9817,7 +10048,7 @@
       </p:sp>
       <p:sp>
         <p:nvSpPr>
-          <p:cNvPr id="76" name="TextBox 75"/>
+          <p:cNvPr id="82" name="TextBox 81"/>
           <p:cNvSpPr txBox="1"/>
           <p:nvPr/>
         </p:nvSpPr>
@@ -9852,7 +10083,7 @@
       </p:sp>
       <p:sp>
         <p:nvSpPr>
-          <p:cNvPr id="77" name="TextBox 76"/>
+          <p:cNvPr id="83" name="TextBox 82"/>
           <p:cNvSpPr txBox="1"/>
           <p:nvPr/>
         </p:nvSpPr>
@@ -9955,7 +10186,7 @@
       </p:sp>
       <p:sp>
         <p:nvSpPr>
-          <p:cNvPr id="78" name="Rectangle 77"/>
+          <p:cNvPr id="84" name="Rectangle 83"/>
           <p:cNvSpPr/>
           <p:nvPr/>
         </p:nvSpPr>
@@ -9998,7 +10229,7 @@
       </p:sp>
       <p:sp>
         <p:nvSpPr>
-          <p:cNvPr id="79" name="TextBox 78"/>
+          <p:cNvPr id="85" name="TextBox 84"/>
           <p:cNvSpPr txBox="1"/>
           <p:nvPr/>
         </p:nvSpPr>
@@ -10033,7 +10264,7 @@
       </p:sp>
       <p:sp>
         <p:nvSpPr>
-          <p:cNvPr id="80" name="TextBox 79"/>
+          <p:cNvPr id="86" name="TextBox 85"/>
           <p:cNvSpPr txBox="1"/>
           <p:nvPr/>
         </p:nvSpPr>
@@ -13741,7 +13972,7 @@
                 </a:solidFill>
                 <a:latin typeface="Calibri"/>
               </a:rPr>
-              <a:t>Project Record · 13 slides (this deck)</a:t>
+              <a:t>Project Record · 14 slides (this deck)</a:t>
             </a:r>
           </a:p>
         </p:txBody>
@@ -14271,7 +14502,7 @@
                 </a:solidFill>
                 <a:latin typeface="Calibri"/>
               </a:rPr>
-              <a:t>Eleven workflows</a:t>
+              <a:t>Twelve workflows</a:t>
             </a:r>
           </a:p>
         </p:txBody>
@@ -14949,7 +15180,7 @@
                 </a:solidFill>
                 <a:latin typeface="Calibri"/>
               </a:rPr>
-              <a:t>Reference library (90 sections · Quick Lookup index)</a:t>
+              <a:t>Reference library (90 sections · §90 complaints)</a:t>
             </a:r>
           </a:p>
         </p:txBody>
@@ -15175,6 +15406,232 @@
                 </a:solidFill>
                 <a:latin typeface="Calibri"/>
               </a:rPr>
+              <a:t>Presentation deliverables</a:t>
+            </a:r>
+          </a:p>
+        </p:txBody>
+      </p:sp>
+      <p:sp>
+        <p:nvSpPr>
+          <p:cNvPr id="136" name="Rectangle 135"/>
+          <p:cNvSpPr/>
+          <p:nvPr/>
+        </p:nvSpPr>
+        <p:spPr>
+          <a:xfrm>
+            <a:off x="8449056" y="4937759"/>
+            <a:ext cx="475488" cy="237744"/>
+          </a:xfrm>
+          <a:prstGeom prst="rect">
+            <a:avLst/>
+          </a:prstGeom>
+          <a:solidFill>
+            <a:srgbClr val="F5F5F4"/>
+          </a:solidFill>
+          <a:ln>
+            <a:noFill/>
+          </a:ln>
+        </p:spPr>
+        <p:style>
+          <a:lnRef idx="1">
+            <a:schemeClr val="accent1"/>
+          </a:lnRef>
+          <a:fillRef idx="3">
+            <a:schemeClr val="accent1"/>
+          </a:fillRef>
+          <a:effectRef idx="2">
+            <a:schemeClr val="accent1"/>
+          </a:effectRef>
+          <a:fontRef idx="minor">
+            <a:schemeClr val="lt1"/>
+          </a:fontRef>
+        </p:style>
+        <p:txBody>
+          <a:bodyPr rtlCol="0" anchor="ctr"/>
+          <a:lstStyle/>
+          <a:p>
+            <a:pPr algn="ctr"/>
+          </a:p>
+        </p:txBody>
+      </p:sp>
+      <p:sp>
+        <p:nvSpPr>
+          <p:cNvPr id="137" name="TextBox 136"/>
+          <p:cNvSpPr txBox="1"/>
+          <p:nvPr/>
+        </p:nvSpPr>
+        <p:spPr>
+          <a:xfrm>
+            <a:off x="8467344" y="4965192"/>
+            <a:ext cx="457200" cy="201168"/>
+          </a:xfrm>
+          <a:prstGeom prst="rect">
+            <a:avLst/>
+          </a:prstGeom>
+          <a:noFill/>
+        </p:spPr>
+        <p:txBody>
+          <a:bodyPr wrap="square">
+            <a:noAutofit/>
+          </a:bodyPr>
+          <a:lstStyle/>
+          <a:p>
+            <a:pPr algn="l"/>
+            <a:r>
+              <a:rPr sz="750" b="1" i="0">
+                <a:solidFill>
+                  <a:srgbClr val="44403C"/>
+                </a:solidFill>
+                <a:latin typeface="Calibri"/>
+              </a:rPr>
+              <a:t>Slide 13</a:t>
+            </a:r>
+          </a:p>
+        </p:txBody>
+      </p:sp>
+      <p:sp>
+        <p:nvSpPr>
+          <p:cNvPr id="138" name="TextBox 137"/>
+          <p:cNvSpPr txBox="1"/>
+          <p:nvPr/>
+        </p:nvSpPr>
+        <p:spPr>
+          <a:xfrm>
+            <a:off x="8970264" y="4965192"/>
+            <a:ext cx="3017520" cy="201168"/>
+          </a:xfrm>
+          <a:prstGeom prst="rect">
+            <a:avLst/>
+          </a:prstGeom>
+          <a:noFill/>
+        </p:spPr>
+        <p:txBody>
+          <a:bodyPr wrap="square">
+            <a:noAutofit/>
+          </a:bodyPr>
+          <a:lstStyle/>
+          <a:p>
+            <a:pPr algn="l"/>
+            <a:r>
+              <a:rPr sz="800" b="0" i="0">
+                <a:solidFill>
+                  <a:srgbClr val="1C1917"/>
+                </a:solidFill>
+                <a:latin typeface="Calibri"/>
+              </a:rPr>
+              <a:t>Complaint handling tools (Evelyn/Angus)</a:t>
+            </a:r>
+          </a:p>
+        </p:txBody>
+      </p:sp>
+      <p:sp>
+        <p:nvSpPr>
+          <p:cNvPr id="139" name="Rectangle 138"/>
+          <p:cNvSpPr/>
+          <p:nvPr/>
+        </p:nvSpPr>
+        <p:spPr>
+          <a:xfrm>
+            <a:off x="8449056" y="5202936"/>
+            <a:ext cx="475488" cy="237744"/>
+          </a:xfrm>
+          <a:prstGeom prst="rect">
+            <a:avLst/>
+          </a:prstGeom>
+          <a:solidFill>
+            <a:srgbClr val="F5F5F4"/>
+          </a:solidFill>
+          <a:ln>
+            <a:noFill/>
+          </a:ln>
+        </p:spPr>
+        <p:style>
+          <a:lnRef idx="1">
+            <a:schemeClr val="accent1"/>
+          </a:lnRef>
+          <a:fillRef idx="3">
+            <a:schemeClr val="accent1"/>
+          </a:fillRef>
+          <a:effectRef idx="2">
+            <a:schemeClr val="accent1"/>
+          </a:effectRef>
+          <a:fontRef idx="minor">
+            <a:schemeClr val="lt1"/>
+          </a:fontRef>
+        </p:style>
+        <p:txBody>
+          <a:bodyPr rtlCol="0" anchor="ctr"/>
+          <a:lstStyle/>
+          <a:p>
+            <a:pPr algn="ctr"/>
+          </a:p>
+        </p:txBody>
+      </p:sp>
+      <p:sp>
+        <p:nvSpPr>
+          <p:cNvPr id="140" name="TextBox 139"/>
+          <p:cNvSpPr txBox="1"/>
+          <p:nvPr/>
+        </p:nvSpPr>
+        <p:spPr>
+          <a:xfrm>
+            <a:off x="8467344" y="5230368"/>
+            <a:ext cx="457200" cy="201168"/>
+          </a:xfrm>
+          <a:prstGeom prst="rect">
+            <a:avLst/>
+          </a:prstGeom>
+          <a:noFill/>
+        </p:spPr>
+        <p:txBody>
+          <a:bodyPr wrap="square">
+            <a:noAutofit/>
+          </a:bodyPr>
+          <a:lstStyle/>
+          <a:p>
+            <a:pPr algn="l"/>
+            <a:r>
+              <a:rPr sz="750" b="1" i="0">
+                <a:solidFill>
+                  <a:srgbClr val="44403C"/>
+                </a:solidFill>
+                <a:latin typeface="Calibri"/>
+              </a:rPr>
+              <a:t>Slide 14</a:t>
+            </a:r>
+          </a:p>
+        </p:txBody>
+      </p:sp>
+      <p:sp>
+        <p:nvSpPr>
+          <p:cNvPr id="141" name="TextBox 140"/>
+          <p:cNvSpPr txBox="1"/>
+          <p:nvPr/>
+        </p:nvSpPr>
+        <p:spPr>
+          <a:xfrm>
+            <a:off x="8970264" y="5230368"/>
+            <a:ext cx="3017520" cy="201168"/>
+          </a:xfrm>
+          <a:prstGeom prst="rect">
+            <a:avLst/>
+          </a:prstGeom>
+          <a:noFill/>
+        </p:spPr>
+        <p:txBody>
+          <a:bodyPr wrap="square">
+            <a:noAutofit/>
+          </a:bodyPr>
+          <a:lstStyle/>
+          <a:p>
+            <a:pPr algn="l"/>
+            <a:r>
+              <a:rPr sz="800" b="0" i="0">
+                <a:solidFill>
+                  <a:srgbClr val="1C1917"/>
+                </a:solidFill>
+                <a:latin typeface="Calibri"/>
+              </a:rPr>
               <a:t>Business case summary</a:t>
             </a:r>
           </a:p>
@@ -15182,7 +15639,7 @@
       </p:sp>
       <p:sp>
         <p:nvSpPr>
-          <p:cNvPr id="136" name="TextBox 135"/>
+          <p:cNvPr id="142" name="TextBox 141"/>
           <p:cNvSpPr txBox="1"/>
           <p:nvPr/>
         </p:nvSpPr>
@@ -15217,7 +15674,7 @@
       </p:sp>
       <p:sp>
         <p:nvSpPr>
-          <p:cNvPr id="137" name="Rectangle 136"/>
+          <p:cNvPr id="143" name="Rectangle 142"/>
           <p:cNvSpPr/>
           <p:nvPr/>
         </p:nvSpPr>
@@ -15260,7 +15717,7 @@
       </p:sp>
       <p:sp>
         <p:nvSpPr>
-          <p:cNvPr id="138" name="TextBox 137"/>
+          <p:cNvPr id="144" name="TextBox 143"/>
           <p:cNvSpPr txBox="1"/>
           <p:nvPr/>
         </p:nvSpPr>
@@ -15295,7 +15752,7 @@
       </p:sp>
       <p:sp>
         <p:nvSpPr>
-          <p:cNvPr id="139" name="TextBox 138"/>
+          <p:cNvPr id="145" name="TextBox 144"/>
           <p:cNvSpPr txBox="1"/>
           <p:nvPr/>
         </p:nvSpPr>
@@ -15361,7 +15818,7 @@
             <a:avLst/>
           </a:prstGeom>
           <a:solidFill>
-            <a:srgbClr val="1C1917"/>
+            <a:srgbClr val="FAF6EF"/>
           </a:solidFill>
           <a:ln>
             <a:noFill/>
@@ -15398,7 +15855,7 @@
         <p:spPr>
           <a:xfrm>
             <a:off x="0" y="0"/>
-            <a:ext cx="12188952" cy="64008"/>
+            <a:ext cx="12188952" cy="54864"/>
           </a:xfrm>
           <a:prstGeom prst="rect">
             <a:avLst/>
@@ -15440,8 +15897,8 @@
         </p:nvSpPr>
         <p:spPr>
           <a:xfrm>
-            <a:off x="548640" y="201168"/>
-            <a:ext cx="9144000" cy="411480"/>
+            <a:off x="457200" y="137160"/>
+            <a:ext cx="10972800" cy="475488"/>
           </a:xfrm>
           <a:prstGeom prst="rect">
             <a:avLst/>
@@ -15458,11 +15915,11 @@
             <a:r>
               <a:rPr sz="2200" b="1" i="0">
                 <a:solidFill>
-                  <a:srgbClr val="FFFFFF"/>
-                </a:solidFill>
-                <a:latin typeface="Calibri"/>
-              </a:rPr>
-              <a:t>Business Case Summary</a:t>
+                  <a:srgbClr val="1C1917"/>
+                </a:solidFill>
+                <a:latin typeface="Calibri"/>
+              </a:rPr>
+              <a:t>Complaint Handling Tools — Evelyn Workflow (Angus)</a:t>
             </a:r>
           </a:p>
         </p:txBody>
@@ -15475,7 +15932,7 @@
         </p:nvSpPr>
         <p:spPr>
           <a:xfrm>
-            <a:off x="548640" y="640080"/>
+            <a:off x="457200" y="621792"/>
             <a:ext cx="10972800" cy="274320"/>
           </a:xfrm>
           <a:prstGeom prst="rect">
@@ -15491,13 +15948,13 @@
           <a:p>
             <a:pPr algn="l"/>
             <a:r>
-              <a:rPr sz="1200" b="0" i="1">
+              <a:rPr sz="1100" b="0" i="0">
                 <a:solidFill>
                   <a:srgbClr val="78716C"/>
                 </a:solidFill>
                 <a:latin typeface="Calibri"/>
               </a:rPr>
-              <a:t>Phase 1 complete. Phase 2 awaiting stakeholder approval. Zero days to readiness.</a:t>
+              <a:t>FCA DISP-compliant complaint record, letter writing, and Copilot agent — built alongside the in-app workflow</a:t>
             </a:r>
           </a:p>
         </p:txBody>
@@ -15510,8 +15967,96 @@
         </p:nvSpPr>
         <p:spPr>
           <a:xfrm>
-            <a:off x="548640" y="960120"/>
-            <a:ext cx="11064240" cy="18288"/>
+            <a:off x="457200" y="896112"/>
+            <a:ext cx="11274552" cy="16459"/>
+          </a:xfrm>
+          <a:prstGeom prst="rect">
+            <a:avLst/>
+          </a:prstGeom>
+          <a:solidFill>
+            <a:srgbClr val="D6D3D1"/>
+          </a:solidFill>
+          <a:ln>
+            <a:noFill/>
+          </a:ln>
+        </p:spPr>
+        <p:style>
+          <a:lnRef idx="1">
+            <a:schemeClr val="accent1"/>
+          </a:lnRef>
+          <a:fillRef idx="3">
+            <a:schemeClr val="accent1"/>
+          </a:fillRef>
+          <a:effectRef idx="2">
+            <a:schemeClr val="accent1"/>
+          </a:effectRef>
+          <a:fontRef idx="minor">
+            <a:schemeClr val="lt1"/>
+          </a:fontRef>
+        </p:style>
+        <p:txBody>
+          <a:bodyPr rtlCol="0" anchor="ctr"/>
+          <a:lstStyle/>
+          <a:p>
+            <a:pPr algn="ctr"/>
+          </a:p>
+        </p:txBody>
+      </p:sp>
+      <p:sp>
+        <p:nvSpPr>
+          <p:cNvPr id="7" name="Rectangle 6"/>
+          <p:cNvSpPr/>
+          <p:nvPr/>
+        </p:nvSpPr>
+        <p:spPr>
+          <a:xfrm>
+            <a:off x="274320" y="1024128"/>
+            <a:ext cx="2816352" cy="4919472"/>
+          </a:xfrm>
+          <a:prstGeom prst="rect">
+            <a:avLst/>
+          </a:prstGeom>
+          <a:solidFill>
+            <a:srgbClr val="FFFFFF"/>
+          </a:solidFill>
+          <a:ln w="9525">
+            <a:solidFill>
+              <a:srgbClr val="E7E5E4"/>
+            </a:solidFill>
+          </a:ln>
+        </p:spPr>
+        <p:style>
+          <a:lnRef idx="1">
+            <a:schemeClr val="accent1"/>
+          </a:lnRef>
+          <a:fillRef idx="3">
+            <a:schemeClr val="accent1"/>
+          </a:fillRef>
+          <a:effectRef idx="2">
+            <a:schemeClr val="accent1"/>
+          </a:effectRef>
+          <a:fontRef idx="minor">
+            <a:schemeClr val="lt1"/>
+          </a:fontRef>
+        </p:style>
+        <p:txBody>
+          <a:bodyPr rtlCol="0" anchor="ctr"/>
+          <a:lstStyle/>
+          <a:p>
+            <a:pPr algn="ctr"/>
+          </a:p>
+        </p:txBody>
+      </p:sp>
+      <p:sp>
+        <p:nvSpPr>
+          <p:cNvPr id="8" name="Rectangle 7"/>
+          <p:cNvSpPr/>
+          <p:nvPr/>
+        </p:nvSpPr>
+        <p:spPr>
+          <a:xfrm>
+            <a:off x="274320" y="1024128"/>
+            <a:ext cx="2816352" cy="64008"/>
           </a:xfrm>
           <a:prstGeom prst="rect">
             <a:avLst/>
@@ -15547,6 +16092,1707 @@
       </p:sp>
       <p:sp>
         <p:nvSpPr>
+          <p:cNvPr id="9" name="TextBox 8"/>
+          <p:cNvSpPr txBox="1"/>
+          <p:nvPr/>
+        </p:nvSpPr>
+        <p:spPr>
+          <a:xfrm>
+            <a:off x="384048" y="1115568"/>
+            <a:ext cx="2633472" cy="274320"/>
+          </a:xfrm>
+          <a:prstGeom prst="rect">
+            <a:avLst/>
+          </a:prstGeom>
+          <a:noFill/>
+        </p:spPr>
+        <p:txBody>
+          <a:bodyPr wrap="square">
+            <a:noAutofit/>
+          </a:bodyPr>
+          <a:lstStyle/>
+          <a:p>
+            <a:pPr algn="l"/>
+            <a:r>
+              <a:rPr sz="1000" b="1" i="0">
+                <a:solidFill>
+                  <a:srgbClr val="C8102E"/>
+                </a:solidFill>
+                <a:latin typeface="Calibri"/>
+              </a:rPr>
+              <a:t>Interactive Letter Writer</a:t>
+            </a:r>
+          </a:p>
+        </p:txBody>
+      </p:sp>
+      <p:sp>
+        <p:nvSpPr>
+          <p:cNvPr id="10" name="TextBox 9"/>
+          <p:cNvSpPr txBox="1"/>
+          <p:nvPr/>
+        </p:nvSpPr>
+        <p:spPr>
+          <a:xfrm>
+            <a:off x="384048" y="1408176"/>
+            <a:ext cx="2633472" cy="201168"/>
+          </a:xfrm>
+          <a:prstGeom prst="rect">
+            <a:avLst/>
+          </a:prstGeom>
+          <a:noFill/>
+        </p:spPr>
+        <p:txBody>
+          <a:bodyPr wrap="square">
+            <a:noAutofit/>
+          </a:bodyPr>
+          <a:lstStyle/>
+          <a:p>
+            <a:pPr algn="l"/>
+            <a:r>
+              <a:rPr sz="750" b="0" i="1">
+                <a:solidFill>
+                  <a:srgbClr val="78716C"/>
+                </a:solidFill>
+                <a:latin typeface="Calibri"/>
+              </a:rPr>
+              <a:t>complaint_letter_writer.py</a:t>
+            </a:r>
+          </a:p>
+        </p:txBody>
+      </p:sp>
+      <p:sp>
+        <p:nvSpPr>
+          <p:cNvPr id="11" name="Rectangle 10"/>
+          <p:cNvSpPr/>
+          <p:nvPr/>
+        </p:nvSpPr>
+        <p:spPr>
+          <a:xfrm>
+            <a:off x="384048" y="1627632"/>
+            <a:ext cx="2615184" cy="14630"/>
+          </a:xfrm>
+          <a:prstGeom prst="rect">
+            <a:avLst/>
+          </a:prstGeom>
+          <a:solidFill>
+            <a:srgbClr val="D6D3D1"/>
+          </a:solidFill>
+          <a:ln>
+            <a:noFill/>
+          </a:ln>
+        </p:spPr>
+        <p:style>
+          <a:lnRef idx="1">
+            <a:schemeClr val="accent1"/>
+          </a:lnRef>
+          <a:fillRef idx="3">
+            <a:schemeClr val="accent1"/>
+          </a:fillRef>
+          <a:effectRef idx="2">
+            <a:schemeClr val="accent1"/>
+          </a:effectRef>
+          <a:fontRef idx="minor">
+            <a:schemeClr val="lt1"/>
+          </a:fontRef>
+        </p:style>
+        <p:txBody>
+          <a:bodyPr rtlCol="0" anchor="ctr"/>
+          <a:lstStyle/>
+          <a:p>
+            <a:pPr algn="ctr"/>
+          </a:p>
+        </p:txBody>
+      </p:sp>
+      <p:sp>
+        <p:nvSpPr>
+          <p:cNvPr id="12" name="TextBox 11"/>
+          <p:cNvSpPr txBox="1"/>
+          <p:nvPr/>
+        </p:nvSpPr>
+        <p:spPr>
+          <a:xfrm>
+            <a:off x="384048" y="1682496"/>
+            <a:ext cx="2615184" cy="4133087"/>
+          </a:xfrm>
+          <a:prstGeom prst="rect">
+            <a:avLst/>
+          </a:prstGeom>
+          <a:noFill/>
+        </p:spPr>
+        <p:txBody>
+          <a:bodyPr wrap="square">
+            <a:noAutofit/>
+          </a:bodyPr>
+          <a:lstStyle/>
+          <a:p>
+            <a:pPr>
+              <a:spcAft>
+                <a:spcPts val="400"/>
+              </a:spcAft>
+            </a:pPr>
+            <a:r>
+              <a:rPr sz="800">
+                <a:solidFill>
+                  <a:srgbClr val="44403C"/>
+                </a:solidFill>
+                <a:latin typeface="Calibri"/>
+              </a:rPr>
+              <a:t>· Trigger-phrase driven — Evelyn's exact workflow</a:t>
+            </a:r>
+          </a:p>
+          <a:p>
+            <a:pPr>
+              <a:spcAft>
+                <a:spcPts val="400"/>
+              </a:spcAft>
+            </a:pPr>
+            <a:r>
+              <a:rPr sz="800">
+                <a:solidFill>
+                  <a:srgbClr val="44403C"/>
+                </a:solidFill>
+                <a:latin typeface="Calibri"/>
+              </a:rPr>
+              <a:t>· Stage 1 record: 5 verbatim questions</a:t>
+            </a:r>
+          </a:p>
+          <a:p>
+            <a:pPr>
+              <a:spcAft>
+                <a:spcPts val="400"/>
+              </a:spcAft>
+            </a:pPr>
+            <a:r>
+              <a:rPr sz="800">
+                <a:solidFill>
+                  <a:srgbClr val="44403C"/>
+                </a:solidFill>
+                <a:latin typeface="Calibri"/>
+              </a:rPr>
+              <a:t>· Escalation record: 4 verbatim questions</a:t>
+            </a:r>
+          </a:p>
+          <a:p>
+            <a:pPr>
+              <a:spcAft>
+                <a:spcPts val="400"/>
+              </a:spcAft>
+            </a:pPr>
+            <a:r>
+              <a:rPr sz="800">
+                <a:solidFill>
+                  <a:srgbClr val="44403C"/>
+                </a:solidFill>
+                <a:latin typeface="Calibri"/>
+              </a:rPr>
+              <a:t>· Uphold letter: Sorry → Cause → Impact → Fix → Payment</a:t>
+            </a:r>
+          </a:p>
+          <a:p>
+            <a:pPr>
+              <a:spcAft>
+                <a:spcPts val="400"/>
+              </a:spcAft>
+            </a:pPr>
+            <a:r>
+              <a:rPr sz="800">
+                <a:solidFill>
+                  <a:srgbClr val="44403C"/>
+                </a:solidFill>
+                <a:latin typeface="Calibri"/>
+              </a:rPr>
+              <a:t>· Declined letter: Sorry → Not our fault → Reason → Explanation</a:t>
+            </a:r>
+          </a:p>
+          <a:p>
+            <a:pPr>
+              <a:spcAft>
+                <a:spcPts val="400"/>
+              </a:spcAft>
+            </a:pPr>
+            <a:r>
+              <a:rPr sz="800">
+                <a:solidFill>
+                  <a:srgbClr val="44403C"/>
+                </a:solidFill>
+                <a:latin typeface="Calibri"/>
+              </a:rPr>
+              <a:t>· Escalation: resolution changed / no change</a:t>
+            </a:r>
+          </a:p>
+          <a:p>
+            <a:pPr>
+              <a:spcAft>
+                <a:spcPts val="400"/>
+              </a:spcAft>
+            </a:pPr>
+            <a:r>
+              <a:rPr sz="800">
+                <a:solidFill>
+                  <a:srgbClr val="44403C"/>
+                </a:solidFill>
+                <a:latin typeface="Calibri"/>
+              </a:rPr>
+              <a:t>· Dual mode: complaint record + letter in one doc</a:t>
+            </a:r>
+          </a:p>
+          <a:p>
+            <a:pPr>
+              <a:spcAft>
+                <a:spcPts val="400"/>
+              </a:spcAft>
+            </a:pPr>
+            <a:r>
+              <a:rPr sz="800">
+                <a:solidFill>
+                  <a:srgbClr val="44403C"/>
+                </a:solidFill>
+                <a:latin typeface="Calibri"/>
+              </a:rPr>
+              <a:t>· Output: [REF]_[SURNAME]_[TRIGGER]_[DATE].docx</a:t>
+            </a:r>
+          </a:p>
+        </p:txBody>
+      </p:sp>
+      <p:sp>
+        <p:nvSpPr>
+          <p:cNvPr id="13" name="Rectangle 12"/>
+          <p:cNvSpPr/>
+          <p:nvPr/>
+        </p:nvSpPr>
+        <p:spPr>
+          <a:xfrm>
+            <a:off x="3264408" y="1024128"/>
+            <a:ext cx="2816352" cy="4919472"/>
+          </a:xfrm>
+          <a:prstGeom prst="rect">
+            <a:avLst/>
+          </a:prstGeom>
+          <a:solidFill>
+            <a:srgbClr val="FFFFFF"/>
+          </a:solidFill>
+          <a:ln w="9525">
+            <a:solidFill>
+              <a:srgbClr val="E7E5E4"/>
+            </a:solidFill>
+          </a:ln>
+        </p:spPr>
+        <p:style>
+          <a:lnRef idx="1">
+            <a:schemeClr val="accent1"/>
+          </a:lnRef>
+          <a:fillRef idx="3">
+            <a:schemeClr val="accent1"/>
+          </a:fillRef>
+          <a:effectRef idx="2">
+            <a:schemeClr val="accent1"/>
+          </a:effectRef>
+          <a:fontRef idx="minor">
+            <a:schemeClr val="lt1"/>
+          </a:fontRef>
+        </p:style>
+        <p:txBody>
+          <a:bodyPr rtlCol="0" anchor="ctr"/>
+          <a:lstStyle/>
+          <a:p>
+            <a:pPr algn="ctr"/>
+          </a:p>
+        </p:txBody>
+      </p:sp>
+      <p:sp>
+        <p:nvSpPr>
+          <p:cNvPr id="14" name="Rectangle 13"/>
+          <p:cNvSpPr/>
+          <p:nvPr/>
+        </p:nvSpPr>
+        <p:spPr>
+          <a:xfrm>
+            <a:off x="3264408" y="1024128"/>
+            <a:ext cx="2816352" cy="64008"/>
+          </a:xfrm>
+          <a:prstGeom prst="rect">
+            <a:avLst/>
+          </a:prstGeom>
+          <a:solidFill>
+            <a:srgbClr val="1D4ED8"/>
+          </a:solidFill>
+          <a:ln>
+            <a:noFill/>
+          </a:ln>
+        </p:spPr>
+        <p:style>
+          <a:lnRef idx="1">
+            <a:schemeClr val="accent1"/>
+          </a:lnRef>
+          <a:fillRef idx="3">
+            <a:schemeClr val="accent1"/>
+          </a:fillRef>
+          <a:effectRef idx="2">
+            <a:schemeClr val="accent1"/>
+          </a:effectRef>
+          <a:fontRef idx="minor">
+            <a:schemeClr val="lt1"/>
+          </a:fontRef>
+        </p:style>
+        <p:txBody>
+          <a:bodyPr rtlCol="0" anchor="ctr"/>
+          <a:lstStyle/>
+          <a:p>
+            <a:pPr algn="ctr"/>
+          </a:p>
+        </p:txBody>
+      </p:sp>
+      <p:sp>
+        <p:nvSpPr>
+          <p:cNvPr id="15" name="TextBox 14"/>
+          <p:cNvSpPr txBox="1"/>
+          <p:nvPr/>
+        </p:nvSpPr>
+        <p:spPr>
+          <a:xfrm>
+            <a:off x="3374136" y="1115568"/>
+            <a:ext cx="2633472" cy="274320"/>
+          </a:xfrm>
+          <a:prstGeom prst="rect">
+            <a:avLst/>
+          </a:prstGeom>
+          <a:noFill/>
+        </p:spPr>
+        <p:txBody>
+          <a:bodyPr wrap="square">
+            <a:noAutofit/>
+          </a:bodyPr>
+          <a:lstStyle/>
+          <a:p>
+            <a:pPr algn="l"/>
+            <a:r>
+              <a:rPr sz="1000" b="1" i="0">
+                <a:solidFill>
+                  <a:srgbClr val="1D4ED8"/>
+                </a:solidFill>
+                <a:latin typeface="Calibri"/>
+              </a:rPr>
+              <a:t>Complaint Reference Guide</a:t>
+            </a:r>
+          </a:p>
+        </p:txBody>
+      </p:sp>
+      <p:sp>
+        <p:nvSpPr>
+          <p:cNvPr id="16" name="TextBox 15"/>
+          <p:cNvSpPr txBox="1"/>
+          <p:nvPr/>
+        </p:nvSpPr>
+        <p:spPr>
+          <a:xfrm>
+            <a:off x="3374136" y="1408176"/>
+            <a:ext cx="2633472" cy="201168"/>
+          </a:xfrm>
+          <a:prstGeom prst="rect">
+            <a:avLst/>
+          </a:prstGeom>
+          <a:noFill/>
+        </p:spPr>
+        <p:txBody>
+          <a:bodyPr wrap="square">
+            <a:noAutofit/>
+          </a:bodyPr>
+          <a:lstStyle/>
+          <a:p>
+            <a:pPr algn="l"/>
+            <a:r>
+              <a:rPr sz="750" b="0" i="1">
+                <a:solidFill>
+                  <a:srgbClr val="78716C"/>
+                </a:solidFill>
+                <a:latin typeface="Calibri"/>
+              </a:rPr>
+              <a:t>Santander_Complaint_Guide.docx</a:t>
+            </a:r>
+          </a:p>
+        </p:txBody>
+      </p:sp>
+      <p:sp>
+        <p:nvSpPr>
+          <p:cNvPr id="17" name="Rectangle 16"/>
+          <p:cNvSpPr/>
+          <p:nvPr/>
+        </p:nvSpPr>
+        <p:spPr>
+          <a:xfrm>
+            <a:off x="3374136" y="1627632"/>
+            <a:ext cx="2615184" cy="14630"/>
+          </a:xfrm>
+          <a:prstGeom prst="rect">
+            <a:avLst/>
+          </a:prstGeom>
+          <a:solidFill>
+            <a:srgbClr val="D6D3D1"/>
+          </a:solidFill>
+          <a:ln>
+            <a:noFill/>
+          </a:ln>
+        </p:spPr>
+        <p:style>
+          <a:lnRef idx="1">
+            <a:schemeClr val="accent1"/>
+          </a:lnRef>
+          <a:fillRef idx="3">
+            <a:schemeClr val="accent1"/>
+          </a:fillRef>
+          <a:effectRef idx="2">
+            <a:schemeClr val="accent1"/>
+          </a:effectRef>
+          <a:fontRef idx="minor">
+            <a:schemeClr val="lt1"/>
+          </a:fontRef>
+        </p:style>
+        <p:txBody>
+          <a:bodyPr rtlCol="0" anchor="ctr"/>
+          <a:lstStyle/>
+          <a:p>
+            <a:pPr algn="ctr"/>
+          </a:p>
+        </p:txBody>
+      </p:sp>
+      <p:sp>
+        <p:nvSpPr>
+          <p:cNvPr id="18" name="TextBox 17"/>
+          <p:cNvSpPr txBox="1"/>
+          <p:nvPr/>
+        </p:nvSpPr>
+        <p:spPr>
+          <a:xfrm>
+            <a:off x="3374136" y="1682496"/>
+            <a:ext cx="2615184" cy="4133087"/>
+          </a:xfrm>
+          <a:prstGeom prst="rect">
+            <a:avLst/>
+          </a:prstGeom>
+          <a:noFill/>
+        </p:spPr>
+        <p:txBody>
+          <a:bodyPr wrap="square">
+            <a:noAutofit/>
+          </a:bodyPr>
+          <a:lstStyle/>
+          <a:p>
+            <a:pPr>
+              <a:spcAft>
+                <a:spcPts val="400"/>
+              </a:spcAft>
+            </a:pPr>
+            <a:r>
+              <a:rPr sz="800">
+                <a:solidFill>
+                  <a:srgbClr val="44403C"/>
+                </a:solidFill>
+                <a:latin typeface="Calibri"/>
+              </a:rPr>
+              <a:t>· 7 complaint types × Stage 1 + escalation scenarios</a:t>
+            </a:r>
+          </a:p>
+          <a:p>
+            <a:pPr>
+              <a:spcAft>
+                <a:spcPts val="400"/>
+              </a:spcAft>
+            </a:pPr>
+            <a:r>
+              <a:rPr sz="800">
+                <a:solidFill>
+                  <a:srgbClr val="44403C"/>
+                </a:solidFill>
+                <a:latin typeface="Calibri"/>
+              </a:rPr>
+              <a:t>· ISA Transfer Delay — 3 scenarios (upheld/declined/escalation)</a:t>
+            </a:r>
+          </a:p>
+          <a:p>
+            <a:pPr>
+              <a:spcAft>
+                <a:spcPts val="400"/>
+              </a:spcAft>
+            </a:pPr>
+            <a:r>
+              <a:rPr sz="800">
+                <a:solidFill>
+                  <a:srgbClr val="44403C"/>
+                </a:solidFill>
+                <a:latin typeface="Calibri"/>
+              </a:rPr>
+              <a:t>· Incorrect Charge / Fee</a:t>
+            </a:r>
+          </a:p>
+          <a:p>
+            <a:pPr>
+              <a:spcAft>
+                <a:spcPts val="400"/>
+              </a:spcAft>
+            </a:pPr>
+            <a:r>
+              <a:rPr sz="800">
+                <a:solidFill>
+                  <a:srgbClr val="44403C"/>
+                </a:solidFill>
+                <a:latin typeface="Calibri"/>
+              </a:rPr>
+              <a:t>· Payment Error</a:t>
+            </a:r>
+          </a:p>
+          <a:p>
+            <a:pPr>
+              <a:spcAft>
+                <a:spcPts val="400"/>
+              </a:spcAft>
+            </a:pPr>
+            <a:r>
+              <a:rPr sz="800">
+                <a:solidFill>
+                  <a:srgbClr val="44403C"/>
+                </a:solidFill>
+                <a:latin typeface="Calibri"/>
+              </a:rPr>
+              <a:t>· APP Fraud — PSR PS23/3 reimbursement</a:t>
+            </a:r>
+          </a:p>
+          <a:p>
+            <a:pPr>
+              <a:spcAft>
+                <a:spcPts val="400"/>
+              </a:spcAft>
+            </a:pPr>
+            <a:r>
+              <a:rPr sz="800">
+                <a:solidFill>
+                  <a:srgbClr val="44403C"/>
+                </a:solidFill>
+                <a:latin typeface="Calibri"/>
+              </a:rPr>
+              <a:t>· Mandate Change Error</a:t>
+            </a:r>
+          </a:p>
+          <a:p>
+            <a:pPr>
+              <a:spcAft>
+                <a:spcPts val="400"/>
+              </a:spcAft>
+            </a:pPr>
+            <a:r>
+              <a:rPr sz="800">
+                <a:solidFill>
+                  <a:srgbClr val="44403C"/>
+                </a:solidFill>
+                <a:latin typeface="Calibri"/>
+              </a:rPr>
+              <a:t>· Poor Service / Communication</a:t>
+            </a:r>
+          </a:p>
+          <a:p>
+            <a:pPr>
+              <a:spcAft>
+                <a:spcPts val="400"/>
+              </a:spcAft>
+            </a:pPr>
+            <a:r>
+              <a:rPr sz="800">
+                <a:solidFill>
+                  <a:srgbClr val="44403C"/>
+                </a:solidFill>
+                <a:latin typeface="Calibri"/>
+              </a:rPr>
+              <a:t>· Account Closure Delay</a:t>
+            </a:r>
+          </a:p>
+          <a:p>
+            <a:pPr>
+              <a:spcAft>
+                <a:spcPts val="400"/>
+              </a:spcAft>
+            </a:pPr>
+            <a:r>
+              <a:rPr sz="800">
+                <a:solidFill>
+                  <a:srgbClr val="44403C"/>
+                </a:solidFill>
+                <a:latin typeface="Calibri"/>
+              </a:rPr>
+              <a:t>· Full letter templates, interest formula, DISP table</a:t>
+            </a:r>
+          </a:p>
+        </p:txBody>
+      </p:sp>
+      <p:sp>
+        <p:nvSpPr>
+          <p:cNvPr id="19" name="Rectangle 18"/>
+          <p:cNvSpPr/>
+          <p:nvPr/>
+        </p:nvSpPr>
+        <p:spPr>
+          <a:xfrm>
+            <a:off x="6254496" y="1024128"/>
+            <a:ext cx="2816352" cy="4919472"/>
+          </a:xfrm>
+          <a:prstGeom prst="rect">
+            <a:avLst/>
+          </a:prstGeom>
+          <a:solidFill>
+            <a:srgbClr val="FFFFFF"/>
+          </a:solidFill>
+          <a:ln w="9525">
+            <a:solidFill>
+              <a:srgbClr val="E7E5E4"/>
+            </a:solidFill>
+          </a:ln>
+        </p:spPr>
+        <p:style>
+          <a:lnRef idx="1">
+            <a:schemeClr val="accent1"/>
+          </a:lnRef>
+          <a:fillRef idx="3">
+            <a:schemeClr val="accent1"/>
+          </a:fillRef>
+          <a:effectRef idx="2">
+            <a:schemeClr val="accent1"/>
+          </a:effectRef>
+          <a:fontRef idx="minor">
+            <a:schemeClr val="lt1"/>
+          </a:fontRef>
+        </p:style>
+        <p:txBody>
+          <a:bodyPr rtlCol="0" anchor="ctr"/>
+          <a:lstStyle/>
+          <a:p>
+            <a:pPr algn="ctr"/>
+          </a:p>
+        </p:txBody>
+      </p:sp>
+      <p:sp>
+        <p:nvSpPr>
+          <p:cNvPr id="20" name="Rectangle 19"/>
+          <p:cNvSpPr/>
+          <p:nvPr/>
+        </p:nvSpPr>
+        <p:spPr>
+          <a:xfrm>
+            <a:off x="6254496" y="1024128"/>
+            <a:ext cx="2816352" cy="64008"/>
+          </a:xfrm>
+          <a:prstGeom prst="rect">
+            <a:avLst/>
+          </a:prstGeom>
+          <a:solidFill>
+            <a:srgbClr val="059669"/>
+          </a:solidFill>
+          <a:ln>
+            <a:noFill/>
+          </a:ln>
+        </p:spPr>
+        <p:style>
+          <a:lnRef idx="1">
+            <a:schemeClr val="accent1"/>
+          </a:lnRef>
+          <a:fillRef idx="3">
+            <a:schemeClr val="accent1"/>
+          </a:fillRef>
+          <a:effectRef idx="2">
+            <a:schemeClr val="accent1"/>
+          </a:effectRef>
+          <a:fontRef idx="minor">
+            <a:schemeClr val="lt1"/>
+          </a:fontRef>
+        </p:style>
+        <p:txBody>
+          <a:bodyPr rtlCol="0" anchor="ctr"/>
+          <a:lstStyle/>
+          <a:p>
+            <a:pPr algn="ctr"/>
+          </a:p>
+        </p:txBody>
+      </p:sp>
+      <p:sp>
+        <p:nvSpPr>
+          <p:cNvPr id="21" name="TextBox 20"/>
+          <p:cNvSpPr txBox="1"/>
+          <p:nvPr/>
+        </p:nvSpPr>
+        <p:spPr>
+          <a:xfrm>
+            <a:off x="6364224" y="1115568"/>
+            <a:ext cx="2633472" cy="274320"/>
+          </a:xfrm>
+          <a:prstGeom prst="rect">
+            <a:avLst/>
+          </a:prstGeom>
+          <a:noFill/>
+        </p:spPr>
+        <p:txBody>
+          <a:bodyPr wrap="square">
+            <a:noAutofit/>
+          </a:bodyPr>
+          <a:lstStyle/>
+          <a:p>
+            <a:pPr algn="l"/>
+            <a:r>
+              <a:rPr sz="1000" b="1" i="0">
+                <a:solidFill>
+                  <a:srgbClr val="059669"/>
+                </a:solidFill>
+                <a:latin typeface="Calibri"/>
+              </a:rPr>
+              <a:t>Microsoft Copilot Agent</a:t>
+            </a:r>
+          </a:p>
+        </p:txBody>
+      </p:sp>
+      <p:sp>
+        <p:nvSpPr>
+          <p:cNvPr id="22" name="TextBox 21"/>
+          <p:cNvSpPr txBox="1"/>
+          <p:nvPr/>
+        </p:nvSpPr>
+        <p:spPr>
+          <a:xfrm>
+            <a:off x="6364224" y="1408176"/>
+            <a:ext cx="2633472" cy="201168"/>
+          </a:xfrm>
+          <a:prstGeom prst="rect">
+            <a:avLst/>
+          </a:prstGeom>
+          <a:noFill/>
+        </p:spPr>
+        <p:txBody>
+          <a:bodyPr wrap="square">
+            <a:noAutofit/>
+          </a:bodyPr>
+          <a:lstStyle/>
+          <a:p>
+            <a:pPr algn="l"/>
+            <a:r>
+              <a:rPr sz="750" b="0" i="1">
+                <a:solidFill>
+                  <a:srgbClr val="78716C"/>
+                </a:solidFill>
+                <a:latin typeface="Calibri"/>
+              </a:rPr>
+              <a:t>Evelyn_Complaint_Agent_Angus.md</a:t>
+            </a:r>
+          </a:p>
+        </p:txBody>
+      </p:sp>
+      <p:sp>
+        <p:nvSpPr>
+          <p:cNvPr id="23" name="Rectangle 22"/>
+          <p:cNvSpPr/>
+          <p:nvPr/>
+        </p:nvSpPr>
+        <p:spPr>
+          <a:xfrm>
+            <a:off x="6364224" y="1627632"/>
+            <a:ext cx="2615184" cy="14630"/>
+          </a:xfrm>
+          <a:prstGeom prst="rect">
+            <a:avLst/>
+          </a:prstGeom>
+          <a:solidFill>
+            <a:srgbClr val="D6D3D1"/>
+          </a:solidFill>
+          <a:ln>
+            <a:noFill/>
+          </a:ln>
+        </p:spPr>
+        <p:style>
+          <a:lnRef idx="1">
+            <a:schemeClr val="accent1"/>
+          </a:lnRef>
+          <a:fillRef idx="3">
+            <a:schemeClr val="accent1"/>
+          </a:fillRef>
+          <a:effectRef idx="2">
+            <a:schemeClr val="accent1"/>
+          </a:effectRef>
+          <a:fontRef idx="minor">
+            <a:schemeClr val="lt1"/>
+          </a:fontRef>
+        </p:style>
+        <p:txBody>
+          <a:bodyPr rtlCol="0" anchor="ctr"/>
+          <a:lstStyle/>
+          <a:p>
+            <a:pPr algn="ctr"/>
+          </a:p>
+        </p:txBody>
+      </p:sp>
+      <p:sp>
+        <p:nvSpPr>
+          <p:cNvPr id="24" name="TextBox 23"/>
+          <p:cNvSpPr txBox="1"/>
+          <p:nvPr/>
+        </p:nvSpPr>
+        <p:spPr>
+          <a:xfrm>
+            <a:off x="6364224" y="1682496"/>
+            <a:ext cx="2615184" cy="4133087"/>
+          </a:xfrm>
+          <a:prstGeom prst="rect">
+            <a:avLst/>
+          </a:prstGeom>
+          <a:noFill/>
+        </p:spPr>
+        <p:txBody>
+          <a:bodyPr wrap="square">
+            <a:noAutofit/>
+          </a:bodyPr>
+          <a:lstStyle/>
+          <a:p>
+            <a:pPr>
+              <a:spcAft>
+                <a:spcPts val="400"/>
+              </a:spcAft>
+            </a:pPr>
+            <a:r>
+              <a:rPr sz="800">
+                <a:solidFill>
+                  <a:srgbClr val="44403C"/>
+                </a:solidFill>
+                <a:latin typeface="Calibri"/>
+              </a:rPr>
+              <a:t>· Complete system prompt for Copilot / Copilot Studio</a:t>
+            </a:r>
+          </a:p>
+          <a:p>
+            <a:pPr>
+              <a:spcAft>
+                <a:spcPts val="400"/>
+              </a:spcAft>
+            </a:pPr>
+            <a:r>
+              <a:rPr sz="800">
+                <a:solidFill>
+                  <a:srgbClr val="44403C"/>
+                </a:solidFill>
+                <a:latin typeface="Calibri"/>
+              </a:rPr>
+              <a:t>· All 9 trigger phrases with output definitions</a:t>
+            </a:r>
+          </a:p>
+          <a:p>
+            <a:pPr>
+              <a:spcAft>
+                <a:spcPts val="400"/>
+              </a:spcAft>
+            </a:pPr>
+            <a:r>
+              <a:rPr sz="800">
+                <a:solidFill>
+                  <a:srgbClr val="44403C"/>
+                </a:solidFill>
+                <a:latin typeface="Calibri"/>
+              </a:rPr>
+              <a:t>· Verbatim Stage 1 (5Q) and escalation (4Q) headings</a:t>
+            </a:r>
+          </a:p>
+          <a:p>
+            <a:pPr>
+              <a:spcAft>
+                <a:spcPts val="400"/>
+              </a:spcAft>
+            </a:pPr>
+            <a:r>
+              <a:rPr sz="800">
+                <a:solidFill>
+                  <a:srgbClr val="44403C"/>
+                </a:solidFill>
+                <a:latin typeface="Calibri"/>
+              </a:rPr>
+              <a:t>· Upheld and declined letter templates with exact language</a:t>
+            </a:r>
+          </a:p>
+          <a:p>
+            <a:pPr>
+              <a:spcAft>
+                <a:spcPts val="400"/>
+              </a:spcAft>
+            </a:pPr>
+            <a:r>
+              <a:rPr sz="800">
+                <a:solidFill>
+                  <a:srgbClr val="44403C"/>
+                </a:solidFill>
+                <a:latin typeface="Calibri"/>
+              </a:rPr>
+              <a:t>· FOS referral block — copy-exact text</a:t>
+            </a:r>
+          </a:p>
+          <a:p>
+            <a:pPr>
+              <a:spcAft>
+                <a:spcPts val="400"/>
+              </a:spcAft>
+            </a:pPr>
+            <a:r>
+              <a:rPr sz="800">
+                <a:solidFill>
+                  <a:srgbClr val="44403C"/>
+                </a:solidFill>
+                <a:latin typeface="Calibri"/>
+              </a:rPr>
+              <a:t>· Standard sign-off block</a:t>
+            </a:r>
+          </a:p>
+          <a:p>
+            <a:pPr>
+              <a:spcAft>
+                <a:spcPts val="400"/>
+              </a:spcAft>
+            </a:pPr>
+            <a:r>
+              <a:rPr sz="800">
+                <a:solidFill>
+                  <a:srgbClr val="44403C"/>
+                </a:solidFill>
+                <a:latin typeface="Calibri"/>
+              </a:rPr>
+              <a:t>· System behaviour rules (vault-ready, consistency)</a:t>
+            </a:r>
+          </a:p>
+          <a:p>
+            <a:pPr>
+              <a:spcAft>
+                <a:spcPts val="400"/>
+              </a:spcAft>
+            </a:pPr>
+            <a:r>
+              <a:rPr sz="800">
+                <a:solidFill>
+                  <a:srgbClr val="44403C"/>
+                </a:solidFill>
+                <a:latin typeface="Calibri"/>
+              </a:rPr>
+              <a:t>· Paste into Copilot custom instructions or Copilot Studio</a:t>
+            </a:r>
+          </a:p>
+        </p:txBody>
+      </p:sp>
+      <p:sp>
+        <p:nvSpPr>
+          <p:cNvPr id="25" name="Rectangle 24"/>
+          <p:cNvSpPr/>
+          <p:nvPr/>
+        </p:nvSpPr>
+        <p:spPr>
+          <a:xfrm>
+            <a:off x="9244584" y="1024128"/>
+            <a:ext cx="2816352" cy="4919472"/>
+          </a:xfrm>
+          <a:prstGeom prst="rect">
+            <a:avLst/>
+          </a:prstGeom>
+          <a:solidFill>
+            <a:srgbClr val="FFFFFF"/>
+          </a:solidFill>
+          <a:ln w="9525">
+            <a:solidFill>
+              <a:srgbClr val="E7E5E4"/>
+            </a:solidFill>
+          </a:ln>
+        </p:spPr>
+        <p:style>
+          <a:lnRef idx="1">
+            <a:schemeClr val="accent1"/>
+          </a:lnRef>
+          <a:fillRef idx="3">
+            <a:schemeClr val="accent1"/>
+          </a:fillRef>
+          <a:effectRef idx="2">
+            <a:schemeClr val="accent1"/>
+          </a:effectRef>
+          <a:fontRef idx="minor">
+            <a:schemeClr val="lt1"/>
+          </a:fontRef>
+        </p:style>
+        <p:txBody>
+          <a:bodyPr rtlCol="0" anchor="ctr"/>
+          <a:lstStyle/>
+          <a:p>
+            <a:pPr algn="ctr"/>
+          </a:p>
+        </p:txBody>
+      </p:sp>
+      <p:sp>
+        <p:nvSpPr>
+          <p:cNvPr id="26" name="Rectangle 25"/>
+          <p:cNvSpPr/>
+          <p:nvPr/>
+        </p:nvSpPr>
+        <p:spPr>
+          <a:xfrm>
+            <a:off x="9244584" y="1024128"/>
+            <a:ext cx="2816352" cy="64008"/>
+          </a:xfrm>
+          <a:prstGeom prst="rect">
+            <a:avLst/>
+          </a:prstGeom>
+          <a:solidFill>
+            <a:srgbClr val="44403C"/>
+          </a:solidFill>
+          <a:ln>
+            <a:noFill/>
+          </a:ln>
+        </p:spPr>
+        <p:style>
+          <a:lnRef idx="1">
+            <a:schemeClr val="accent1"/>
+          </a:lnRef>
+          <a:fillRef idx="3">
+            <a:schemeClr val="accent1"/>
+          </a:fillRef>
+          <a:effectRef idx="2">
+            <a:schemeClr val="accent1"/>
+          </a:effectRef>
+          <a:fontRef idx="minor">
+            <a:schemeClr val="lt1"/>
+          </a:fontRef>
+        </p:style>
+        <p:txBody>
+          <a:bodyPr rtlCol="0" anchor="ctr"/>
+          <a:lstStyle/>
+          <a:p>
+            <a:pPr algn="ctr"/>
+          </a:p>
+        </p:txBody>
+      </p:sp>
+      <p:sp>
+        <p:nvSpPr>
+          <p:cNvPr id="27" name="TextBox 26"/>
+          <p:cNvSpPr txBox="1"/>
+          <p:nvPr/>
+        </p:nvSpPr>
+        <p:spPr>
+          <a:xfrm>
+            <a:off x="9354312" y="1115568"/>
+            <a:ext cx="2633472" cy="274320"/>
+          </a:xfrm>
+          <a:prstGeom prst="rect">
+            <a:avLst/>
+          </a:prstGeom>
+          <a:noFill/>
+        </p:spPr>
+        <p:txBody>
+          <a:bodyPr wrap="square">
+            <a:noAutofit/>
+          </a:bodyPr>
+          <a:lstStyle/>
+          <a:p>
+            <a:pPr algn="l"/>
+            <a:r>
+              <a:rPr sz="1000" b="1" i="0">
+                <a:solidFill>
+                  <a:srgbClr val="44403C"/>
+                </a:solidFill>
+                <a:latin typeface="Calibri"/>
+              </a:rPr>
+              <a:t>App.jsx Workflow</a:t>
+            </a:r>
+          </a:p>
+        </p:txBody>
+      </p:sp>
+      <p:sp>
+        <p:nvSpPr>
+          <p:cNvPr id="28" name="TextBox 27"/>
+          <p:cNvSpPr txBox="1"/>
+          <p:nvPr/>
+        </p:nvSpPr>
+        <p:spPr>
+          <a:xfrm>
+            <a:off x="9354312" y="1408176"/>
+            <a:ext cx="2633472" cy="201168"/>
+          </a:xfrm>
+          <a:prstGeom prst="rect">
+            <a:avLst/>
+          </a:prstGeom>
+          <a:noFill/>
+        </p:spPr>
+        <p:txBody>
+          <a:bodyPr wrap="square">
+            <a:noAutofit/>
+          </a:bodyPr>
+          <a:lstStyle/>
+          <a:p>
+            <a:pPr algn="l"/>
+            <a:r>
+              <a:rPr sz="750" b="0" i="1">
+                <a:solidFill>
+                  <a:srgbClr val="78716C"/>
+                </a:solidFill>
+                <a:latin typeface="Calibri"/>
+              </a:rPr>
+              <a:t>In-app: renderComplaint()</a:t>
+            </a:r>
+          </a:p>
+        </p:txBody>
+      </p:sp>
+      <p:sp>
+        <p:nvSpPr>
+          <p:cNvPr id="29" name="Rectangle 28"/>
+          <p:cNvSpPr/>
+          <p:nvPr/>
+        </p:nvSpPr>
+        <p:spPr>
+          <a:xfrm>
+            <a:off x="9354312" y="1627632"/>
+            <a:ext cx="2615184" cy="14630"/>
+          </a:xfrm>
+          <a:prstGeom prst="rect">
+            <a:avLst/>
+          </a:prstGeom>
+          <a:solidFill>
+            <a:srgbClr val="D6D3D1"/>
+          </a:solidFill>
+          <a:ln>
+            <a:noFill/>
+          </a:ln>
+        </p:spPr>
+        <p:style>
+          <a:lnRef idx="1">
+            <a:schemeClr val="accent1"/>
+          </a:lnRef>
+          <a:fillRef idx="3">
+            <a:schemeClr val="accent1"/>
+          </a:fillRef>
+          <a:effectRef idx="2">
+            <a:schemeClr val="accent1"/>
+          </a:effectRef>
+          <a:fontRef idx="minor">
+            <a:schemeClr val="lt1"/>
+          </a:fontRef>
+        </p:style>
+        <p:txBody>
+          <a:bodyPr rtlCol="0" anchor="ctr"/>
+          <a:lstStyle/>
+          <a:p>
+            <a:pPr algn="ctr"/>
+          </a:p>
+        </p:txBody>
+      </p:sp>
+      <p:sp>
+        <p:nvSpPr>
+          <p:cNvPr id="30" name="TextBox 29"/>
+          <p:cNvSpPr txBox="1"/>
+          <p:nvPr/>
+        </p:nvSpPr>
+        <p:spPr>
+          <a:xfrm>
+            <a:off x="9354312" y="1682496"/>
+            <a:ext cx="2615184" cy="4133087"/>
+          </a:xfrm>
+          <a:prstGeom prst="rect">
+            <a:avLst/>
+          </a:prstGeom>
+          <a:noFill/>
+        </p:spPr>
+        <p:txBody>
+          <a:bodyPr wrap="square">
+            <a:noAutofit/>
+          </a:bodyPr>
+          <a:lstStyle/>
+          <a:p>
+            <a:pPr>
+              <a:spcAft>
+                <a:spcPts val="400"/>
+              </a:spcAft>
+            </a:pPr>
+            <a:r>
+              <a:rPr sz="800">
+                <a:solidFill>
+                  <a:srgbClr val="44403C"/>
+                </a:solidFill>
+                <a:latin typeface="Calibri"/>
+              </a:rPr>
+              <a:t>· 4-step workflow wizard built into the prototype</a:t>
+            </a:r>
+          </a:p>
+          <a:p>
+            <a:pPr>
+              <a:spcAft>
+                <a:spcPts val="400"/>
+              </a:spcAft>
+            </a:pPr>
+            <a:r>
+              <a:rPr sz="800">
+                <a:solidFill>
+                  <a:srgbClr val="44403C"/>
+                </a:solidFill>
+                <a:latin typeface="Calibri"/>
+              </a:rPr>
+              <a:t>· Step 1: Intake — category, date, eligible complainant check</a:t>
+            </a:r>
+          </a:p>
+          <a:p>
+            <a:pPr>
+              <a:spcAft>
+                <a:spcPts val="400"/>
+              </a:spcAft>
+            </a:pPr>
+            <a:r>
+              <a:rPr sz="800">
+                <a:solidFill>
+                  <a:srgbClr val="44403C"/>
+                </a:solidFill>
+                <a:latin typeface="Calibri"/>
+              </a:rPr>
+              <a:t>· Step 2: Escalation triage — flag selection</a:t>
+            </a:r>
+          </a:p>
+          <a:p>
+            <a:pPr>
+              <a:spcAft>
+                <a:spcPts val="400"/>
+              </a:spcAft>
+            </a:pPr>
+            <a:r>
+              <a:rPr sz="800">
+                <a:solidFill>
+                  <a:srgbClr val="44403C"/>
+                </a:solidFill>
+                <a:latin typeface="Calibri"/>
+              </a:rPr>
+              <a:t>· Step 3: Denial reason (if not upheld)</a:t>
+            </a:r>
+          </a:p>
+          <a:p>
+            <a:pPr>
+              <a:spcAft>
+                <a:spcPts val="400"/>
+              </a:spcAft>
+            </a:pPr>
+            <a:r>
+              <a:rPr sz="800">
+                <a:solidFill>
+                  <a:srgbClr val="44403C"/>
+                </a:solidFill>
+                <a:latin typeface="Calibri"/>
+              </a:rPr>
+              <a:t>· Step 4: Case outcome — goodwill gesture option</a:t>
+            </a:r>
+          </a:p>
+          <a:p>
+            <a:pPr>
+              <a:spcAft>
+                <a:spcPts val="400"/>
+              </a:spcAft>
+            </a:pPr>
+            <a:r>
+              <a:rPr sz="800">
+                <a:solidFill>
+                  <a:srgbClr val="44403C"/>
+                </a:solidFill>
+                <a:latin typeface="Calibri"/>
+              </a:rPr>
+              <a:t>· Triggered from Home screen 'Log complaint' action tile</a:t>
+            </a:r>
+          </a:p>
+          <a:p>
+            <a:pPr>
+              <a:spcAft>
+                <a:spcPts val="400"/>
+              </a:spcAft>
+            </a:pPr>
+            <a:r>
+              <a:rPr sz="800">
+                <a:solidFill>
+                  <a:srgbClr val="44403C"/>
+                </a:solidFill>
+                <a:latin typeface="Calibri"/>
+              </a:rPr>
+              <a:t>· FCA DISP-compliant flow throughout</a:t>
+            </a:r>
+          </a:p>
+          <a:p>
+            <a:pPr>
+              <a:spcAft>
+                <a:spcPts val="400"/>
+              </a:spcAft>
+            </a:pPr>
+            <a:r>
+              <a:rPr sz="800">
+                <a:solidFill>
+                  <a:srgbClr val="44403C"/>
+                </a:solidFill>
+                <a:latin typeface="Calibri"/>
+              </a:rPr>
+              <a:t>· State reset in closeWorkflow() — no ghost state</a:t>
+            </a:r>
+          </a:p>
+        </p:txBody>
+      </p:sp>
+      <p:sp>
+        <p:nvSpPr>
+          <p:cNvPr id="31" name="TextBox 30"/>
+          <p:cNvSpPr txBox="1"/>
+          <p:nvPr/>
+        </p:nvSpPr>
+        <p:spPr>
+          <a:xfrm>
+            <a:off x="274320" y="6108192"/>
+            <a:ext cx="11612880" cy="228600"/>
+          </a:xfrm>
+          <a:prstGeom prst="rect">
+            <a:avLst/>
+          </a:prstGeom>
+          <a:noFill/>
+        </p:spPr>
+        <p:txBody>
+          <a:bodyPr wrap="square">
+            <a:noAutofit/>
+          </a:bodyPr>
+          <a:lstStyle/>
+          <a:p>
+            <a:pPr algn="l"/>
+            <a:r>
+              <a:rPr sz="750" b="0" i="1">
+                <a:solidFill>
+                  <a:srgbClr val="78716C"/>
+                </a:solidFill>
+                <a:latin typeface="Calibri"/>
+              </a:rPr>
+              <a:t>Trigger phrases: 'evidence to support complaint stage 1' · 'Uphold - stage 1 letter' · 'Declined - stage 1 letter' · 'Escalation - resolution changed' and 5 more</a:t>
+            </a:r>
+          </a:p>
+        </p:txBody>
+      </p:sp>
+      <p:sp>
+        <p:nvSpPr>
+          <p:cNvPr id="32" name="Rectangle 31"/>
+          <p:cNvSpPr/>
+          <p:nvPr/>
+        </p:nvSpPr>
+        <p:spPr>
+          <a:xfrm>
+            <a:off x="0" y="6601968"/>
+            <a:ext cx="12188952" cy="256032"/>
+          </a:xfrm>
+          <a:prstGeom prst="rect">
+            <a:avLst/>
+          </a:prstGeom>
+          <a:solidFill>
+            <a:srgbClr val="1C1917"/>
+          </a:solidFill>
+          <a:ln>
+            <a:noFill/>
+          </a:ln>
+        </p:spPr>
+        <p:style>
+          <a:lnRef idx="1">
+            <a:schemeClr val="accent1"/>
+          </a:lnRef>
+          <a:fillRef idx="3">
+            <a:schemeClr val="accent1"/>
+          </a:fillRef>
+          <a:effectRef idx="2">
+            <a:schemeClr val="accent1"/>
+          </a:effectRef>
+          <a:fontRef idx="minor">
+            <a:schemeClr val="lt1"/>
+          </a:fontRef>
+        </p:style>
+        <p:txBody>
+          <a:bodyPr rtlCol="0" anchor="ctr"/>
+          <a:lstStyle/>
+          <a:p>
+            <a:pPr algn="ctr"/>
+          </a:p>
+        </p:txBody>
+      </p:sp>
+      <p:sp>
+        <p:nvSpPr>
+          <p:cNvPr id="33" name="TextBox 32"/>
+          <p:cNvSpPr txBox="1"/>
+          <p:nvPr/>
+        </p:nvSpPr>
+        <p:spPr>
+          <a:xfrm>
+            <a:off x="457200" y="6620256"/>
+            <a:ext cx="11274552" cy="201168"/>
+          </a:xfrm>
+          <a:prstGeom prst="rect">
+            <a:avLst/>
+          </a:prstGeom>
+          <a:noFill/>
+        </p:spPr>
+        <p:txBody>
+          <a:bodyPr wrap="square">
+            <a:noAutofit/>
+          </a:bodyPr>
+          <a:lstStyle/>
+          <a:p>
+            <a:pPr algn="ctr"/>
+            <a:r>
+              <a:rPr sz="800" b="0" i="0">
+                <a:solidFill>
+                  <a:srgbClr val="D6D3D1"/>
+                </a:solidFill>
+                <a:latin typeface="Calibri"/>
+              </a:rPr>
+              <a:t>Alan Davidson · Business Banking Advisor · Self-initiated · Completed out of hours in own time · June 2026</a:t>
+            </a:r>
+          </a:p>
+        </p:txBody>
+      </p:sp>
+      <p:sp>
+        <p:nvSpPr>
+          <p:cNvPr id="34" name="TextBox 33"/>
+          <p:cNvSpPr txBox="1"/>
+          <p:nvPr/>
+        </p:nvSpPr>
+        <p:spPr>
+          <a:xfrm>
+            <a:off x="11795760" y="6583680"/>
+            <a:ext cx="320040" cy="228600"/>
+          </a:xfrm>
+          <a:prstGeom prst="rect">
+            <a:avLst/>
+          </a:prstGeom>
+          <a:noFill/>
+        </p:spPr>
+        <p:txBody>
+          <a:bodyPr wrap="square">
+            <a:noAutofit/>
+          </a:bodyPr>
+          <a:lstStyle/>
+          <a:p>
+            <a:pPr algn="r"/>
+            <a:r>
+              <a:rPr sz="800" b="0" i="0">
+                <a:solidFill>
+                  <a:srgbClr val="78716C"/>
+                </a:solidFill>
+                <a:latin typeface="Calibri"/>
+              </a:rPr>
+              <a:t>13</a:t>
+            </a:r>
+          </a:p>
+        </p:txBody>
+      </p:sp>
+    </p:spTree>
+  </p:cSld>
+  <p:clrMapOvr>
+    <a:masterClrMapping/>
+  </p:clrMapOvr>
+</p:sld>
+</file>
+
+<file path=ppt/slides/slide14.xml><?xml version="1.0" encoding="utf-8"?>
+<p:sld xmlns:a="http://schemas.openxmlformats.org/drawingml/2006/main" xmlns:p="http://schemas.openxmlformats.org/presentationml/2006/main" xmlns:r="http://schemas.openxmlformats.org/officeDocument/2006/relationships">
+  <p:cSld>
+    <p:spTree>
+      <p:nvGrpSpPr>
+        <p:cNvPr id="1" name=""/>
+        <p:cNvGrpSpPr/>
+        <p:nvPr/>
+      </p:nvGrpSpPr>
+      <p:grpSpPr/>
+      <p:sp>
+        <p:nvSpPr>
+          <p:cNvPr id="2" name="Rectangle 1"/>
+          <p:cNvSpPr/>
+          <p:nvPr/>
+        </p:nvSpPr>
+        <p:spPr>
+          <a:xfrm>
+            <a:off x="0" y="0"/>
+            <a:ext cx="12188952" cy="6858000"/>
+          </a:xfrm>
+          <a:prstGeom prst="rect">
+            <a:avLst/>
+          </a:prstGeom>
+          <a:solidFill>
+            <a:srgbClr val="1C1917"/>
+          </a:solidFill>
+          <a:ln>
+            <a:noFill/>
+          </a:ln>
+        </p:spPr>
+        <p:style>
+          <a:lnRef idx="1">
+            <a:schemeClr val="accent1"/>
+          </a:lnRef>
+          <a:fillRef idx="3">
+            <a:schemeClr val="accent1"/>
+          </a:fillRef>
+          <a:effectRef idx="2">
+            <a:schemeClr val="accent1"/>
+          </a:effectRef>
+          <a:fontRef idx="minor">
+            <a:schemeClr val="lt1"/>
+          </a:fontRef>
+        </p:style>
+        <p:txBody>
+          <a:bodyPr rtlCol="0" anchor="ctr"/>
+          <a:lstStyle/>
+          <a:p>
+            <a:pPr algn="ctr"/>
+          </a:p>
+        </p:txBody>
+      </p:sp>
+      <p:sp>
+        <p:nvSpPr>
+          <p:cNvPr id="3" name="Rectangle 2"/>
+          <p:cNvSpPr/>
+          <p:nvPr/>
+        </p:nvSpPr>
+        <p:spPr>
+          <a:xfrm>
+            <a:off x="0" y="0"/>
+            <a:ext cx="12188952" cy="64008"/>
+          </a:xfrm>
+          <a:prstGeom prst="rect">
+            <a:avLst/>
+          </a:prstGeom>
+          <a:solidFill>
+            <a:srgbClr val="C8102E"/>
+          </a:solidFill>
+          <a:ln>
+            <a:noFill/>
+          </a:ln>
+        </p:spPr>
+        <p:style>
+          <a:lnRef idx="1">
+            <a:schemeClr val="accent1"/>
+          </a:lnRef>
+          <a:fillRef idx="3">
+            <a:schemeClr val="accent1"/>
+          </a:fillRef>
+          <a:effectRef idx="2">
+            <a:schemeClr val="accent1"/>
+          </a:effectRef>
+          <a:fontRef idx="minor">
+            <a:schemeClr val="lt1"/>
+          </a:fontRef>
+        </p:style>
+        <p:txBody>
+          <a:bodyPr rtlCol="0" anchor="ctr"/>
+          <a:lstStyle/>
+          <a:p>
+            <a:pPr algn="ctr"/>
+          </a:p>
+        </p:txBody>
+      </p:sp>
+      <p:sp>
+        <p:nvSpPr>
+          <p:cNvPr id="4" name="TextBox 3"/>
+          <p:cNvSpPr txBox="1"/>
+          <p:nvPr/>
+        </p:nvSpPr>
+        <p:spPr>
+          <a:xfrm>
+            <a:off x="548640" y="201168"/>
+            <a:ext cx="9144000" cy="411480"/>
+          </a:xfrm>
+          <a:prstGeom prst="rect">
+            <a:avLst/>
+          </a:prstGeom>
+          <a:noFill/>
+        </p:spPr>
+        <p:txBody>
+          <a:bodyPr wrap="square">
+            <a:noAutofit/>
+          </a:bodyPr>
+          <a:lstStyle/>
+          <a:p>
+            <a:pPr algn="l"/>
+            <a:r>
+              <a:rPr sz="2200" b="1" i="0">
+                <a:solidFill>
+                  <a:srgbClr val="FFFFFF"/>
+                </a:solidFill>
+                <a:latin typeface="Calibri"/>
+              </a:rPr>
+              <a:t>Business Case Summary</a:t>
+            </a:r>
+          </a:p>
+        </p:txBody>
+      </p:sp>
+      <p:sp>
+        <p:nvSpPr>
+          <p:cNvPr id="5" name="TextBox 4"/>
+          <p:cNvSpPr txBox="1"/>
+          <p:nvPr/>
+        </p:nvSpPr>
+        <p:spPr>
+          <a:xfrm>
+            <a:off x="548640" y="640080"/>
+            <a:ext cx="10972800" cy="274320"/>
+          </a:xfrm>
+          <a:prstGeom prst="rect">
+            <a:avLst/>
+          </a:prstGeom>
+          <a:noFill/>
+        </p:spPr>
+        <p:txBody>
+          <a:bodyPr wrap="square">
+            <a:noAutofit/>
+          </a:bodyPr>
+          <a:lstStyle/>
+          <a:p>
+            <a:pPr algn="l"/>
+            <a:r>
+              <a:rPr sz="1200" b="0" i="1">
+                <a:solidFill>
+                  <a:srgbClr val="78716C"/>
+                </a:solidFill>
+                <a:latin typeface="Calibri"/>
+              </a:rPr>
+              <a:t>Phase 1 complete. Phase 2 awaiting stakeholder approval. Zero days to readiness.</a:t>
+            </a:r>
+          </a:p>
+        </p:txBody>
+      </p:sp>
+      <p:sp>
+        <p:nvSpPr>
+          <p:cNvPr id="6" name="Rectangle 5"/>
+          <p:cNvSpPr/>
+          <p:nvPr/>
+        </p:nvSpPr>
+        <p:spPr>
+          <a:xfrm>
+            <a:off x="548640" y="960120"/>
+            <a:ext cx="11064240" cy="18288"/>
+          </a:xfrm>
+          <a:prstGeom prst="rect">
+            <a:avLst/>
+          </a:prstGeom>
+          <a:solidFill>
+            <a:srgbClr val="C8102E"/>
+          </a:solidFill>
+          <a:ln>
+            <a:noFill/>
+          </a:ln>
+        </p:spPr>
+        <p:style>
+          <a:lnRef idx="1">
+            <a:schemeClr val="accent1"/>
+          </a:lnRef>
+          <a:fillRef idx="3">
+            <a:schemeClr val="accent1"/>
+          </a:fillRef>
+          <a:effectRef idx="2">
+            <a:schemeClr val="accent1"/>
+          </a:effectRef>
+          <a:fontRef idx="minor">
+            <a:schemeClr val="lt1"/>
+          </a:fontRef>
+        </p:style>
+        <p:txBody>
+          <a:bodyPr rtlCol="0" anchor="ctr"/>
+          <a:lstStyle/>
+          <a:p>
+            <a:pPr algn="ctr"/>
+          </a:p>
+        </p:txBody>
+      </p:sp>
+      <p:sp>
+        <p:nvSpPr>
           <p:cNvPr id="7" name="Rectangle 6"/>
           <p:cNvSpPr/>
           <p:nvPr/>
@@ -16132,7 +18378,7 @@
                 </a:solidFill>
                 <a:latin typeface="Calibri"/>
               </a:rPr>
-              <a:t>11</a:t>
+              <a:t>12</a:t>
             </a:r>
           </a:p>
         </p:txBody>
@@ -17575,7 +19821,7 @@
                 </a:solidFill>
                 <a:latin typeface="Calibri"/>
               </a:rPr>
-              <a:t>13</a:t>
+              <a:t>14</a:t>
             </a:r>
           </a:p>
         </p:txBody>
@@ -17898,7 +20144,7 @@
                 </a:solidFill>
                 <a:latin typeface="Calibri"/>
               </a:rPr>
-              <a:t>11 step-based workflow wizards covering every key banking operation</a:t>
+              <a:t>12 step-based workflow wizards covering every key banking operation</a:t>
             </a:r>
           </a:p>
           <a:p>
@@ -21179,7 +23425,7 @@
                 </a:solidFill>
                 <a:latin typeface="Calibri"/>
               </a:rPr>
-              <a:t>Eleven Workflow Wizards</a:t>
+              <a:t>Twelve Workflow Wizards</a:t>
             </a:r>
           </a:p>
         </p:txBody>
@@ -23437,6 +25683,203 @@
         </p:nvSpPr>
         <p:spPr>
           <a:xfrm>
+            <a:off x="7863840" y="5248655"/>
+            <a:ext cx="3566160" cy="1261872"/>
+          </a:xfrm>
+          <a:prstGeom prst="rect">
+            <a:avLst/>
+          </a:prstGeom>
+          <a:solidFill>
+            <a:srgbClr val="FFFFFF"/>
+          </a:solidFill>
+          <a:ln w="9525">
+            <a:solidFill>
+              <a:srgbClr val="E7E5E4"/>
+            </a:solidFill>
+          </a:ln>
+        </p:spPr>
+        <p:style>
+          <a:lnRef idx="1">
+            <a:schemeClr val="accent1"/>
+          </a:lnRef>
+          <a:fillRef idx="3">
+            <a:schemeClr val="accent1"/>
+          </a:fillRef>
+          <a:effectRef idx="2">
+            <a:schemeClr val="accent1"/>
+          </a:effectRef>
+          <a:fontRef idx="minor">
+            <a:schemeClr val="lt1"/>
+          </a:fontRef>
+        </p:style>
+        <p:txBody>
+          <a:bodyPr rtlCol="0" anchor="ctr"/>
+          <a:lstStyle/>
+          <a:p>
+            <a:pPr algn="ctr"/>
+          </a:p>
+        </p:txBody>
+      </p:sp>
+      <p:sp>
+        <p:nvSpPr>
+          <p:cNvPr id="63" name="Rectangle 62"/>
+          <p:cNvSpPr/>
+          <p:nvPr/>
+        </p:nvSpPr>
+        <p:spPr>
+          <a:xfrm>
+            <a:off x="7863840" y="5248655"/>
+            <a:ext cx="50292" cy="1261872"/>
+          </a:xfrm>
+          <a:prstGeom prst="rect">
+            <a:avLst/>
+          </a:prstGeom>
+          <a:solidFill>
+            <a:srgbClr val="C8102E"/>
+          </a:solidFill>
+          <a:ln>
+            <a:noFill/>
+          </a:ln>
+        </p:spPr>
+        <p:style>
+          <a:lnRef idx="1">
+            <a:schemeClr val="accent1"/>
+          </a:lnRef>
+          <a:fillRef idx="3">
+            <a:schemeClr val="accent1"/>
+          </a:fillRef>
+          <a:effectRef idx="2">
+            <a:schemeClr val="accent1"/>
+          </a:effectRef>
+          <a:fontRef idx="minor">
+            <a:schemeClr val="lt1"/>
+          </a:fontRef>
+        </p:style>
+        <p:txBody>
+          <a:bodyPr rtlCol="0" anchor="ctr"/>
+          <a:lstStyle/>
+          <a:p>
+            <a:pPr algn="ctr"/>
+          </a:p>
+        </p:txBody>
+      </p:sp>
+      <p:sp>
+        <p:nvSpPr>
+          <p:cNvPr id="64" name="TextBox 63"/>
+          <p:cNvSpPr txBox="1"/>
+          <p:nvPr/>
+        </p:nvSpPr>
+        <p:spPr>
+          <a:xfrm>
+            <a:off x="8028431" y="5340095"/>
+            <a:ext cx="3310128" cy="256032"/>
+          </a:xfrm>
+          <a:prstGeom prst="rect">
+            <a:avLst/>
+          </a:prstGeom>
+          <a:noFill/>
+        </p:spPr>
+        <p:txBody>
+          <a:bodyPr wrap="square">
+            <a:noAutofit/>
+          </a:bodyPr>
+          <a:lstStyle/>
+          <a:p>
+            <a:pPr algn="l"/>
+            <a:r>
+              <a:rPr sz="950" b="1" i="0">
+                <a:solidFill>
+                  <a:srgbClr val="1C1917"/>
+                </a:solidFill>
+                <a:latin typeface="Calibri"/>
+              </a:rPr>
+              <a:t>Complaint Handling</a:t>
+            </a:r>
+          </a:p>
+        </p:txBody>
+      </p:sp>
+      <p:sp>
+        <p:nvSpPr>
+          <p:cNvPr id="65" name="TextBox 64"/>
+          <p:cNvSpPr txBox="1"/>
+          <p:nvPr/>
+        </p:nvSpPr>
+        <p:spPr>
+          <a:xfrm>
+            <a:off x="8028431" y="5577840"/>
+            <a:ext cx="1097280" cy="182880"/>
+          </a:xfrm>
+          <a:prstGeom prst="rect">
+            <a:avLst/>
+          </a:prstGeom>
+          <a:noFill/>
+        </p:spPr>
+        <p:txBody>
+          <a:bodyPr wrap="square">
+            <a:noAutofit/>
+          </a:bodyPr>
+          <a:lstStyle/>
+          <a:p>
+            <a:pPr algn="l"/>
+            <a:r>
+              <a:rPr sz="750" b="1" i="0">
+                <a:solidFill>
+                  <a:srgbClr val="C8102E"/>
+                </a:solidFill>
+                <a:latin typeface="Calibri"/>
+              </a:rPr>
+              <a:t>4 steps</a:t>
+            </a:r>
+          </a:p>
+        </p:txBody>
+      </p:sp>
+      <p:sp>
+        <p:nvSpPr>
+          <p:cNvPr id="66" name="TextBox 65"/>
+          <p:cNvSpPr txBox="1"/>
+          <p:nvPr/>
+        </p:nvSpPr>
+        <p:spPr>
+          <a:xfrm>
+            <a:off x="8028431" y="5751575"/>
+            <a:ext cx="3291840" cy="713232"/>
+          </a:xfrm>
+          <a:prstGeom prst="rect">
+            <a:avLst/>
+          </a:prstGeom>
+          <a:noFill/>
+        </p:spPr>
+        <p:txBody>
+          <a:bodyPr wrap="square">
+            <a:noAutofit/>
+          </a:bodyPr>
+          <a:lstStyle/>
+          <a:p>
+            <a:pPr>
+              <a:spcAft>
+                <a:spcPts val="300"/>
+              </a:spcAft>
+            </a:pPr>
+            <a:r>
+              <a:rPr sz="800">
+                <a:solidFill>
+                  <a:srgbClr val="78716C"/>
+                </a:solidFill>
+                <a:latin typeface="Calibri"/>
+              </a:rPr>
+              <a:t>Intake → escalation triage → denial → case outcome. FCA DISP-compliant. Eligible complainant check (DISP 2.7), escalation flag selection, denial reason, optional goodwill gesture. Triggers from Home screen Log complaint tile.</a:t>
+            </a:r>
+          </a:p>
+        </p:txBody>
+      </p:sp>
+      <p:sp>
+        <p:nvSpPr>
+          <p:cNvPr id="67" name="Rectangle 66"/>
+          <p:cNvSpPr/>
+          <p:nvPr/>
+        </p:nvSpPr>
+        <p:spPr>
+          <a:xfrm>
             <a:off x="0" y="6601968"/>
             <a:ext cx="12188952" cy="256032"/>
           </a:xfrm>
@@ -23474,7 +25917,7 @@
       </p:sp>
       <p:sp>
         <p:nvSpPr>
-          <p:cNvPr id="63" name="TextBox 62"/>
+          <p:cNvPr id="68" name="TextBox 67"/>
           <p:cNvSpPr txBox="1"/>
           <p:nvPr/>
         </p:nvSpPr>
@@ -23509,7 +25952,7 @@
       </p:sp>
       <p:sp>
         <p:nvSpPr>
-          <p:cNvPr id="64" name="TextBox 63"/>
+          <p:cNvPr id="69" name="TextBox 68"/>
           <p:cNvSpPr txBox="1"/>
           <p:nvPr/>
         </p:nvSpPr>

--- a/Santander_Project_Record.pptx
+++ b/Santander_Project_Record.pptx
@@ -4379,7 +4379,7 @@
                 </a:solidFill>
                 <a:latin typeface="Calibri"/>
               </a:rPr>
-              <a:t>22,935 lines · 90 sections · 99 books &amp; regulatory documents · §90 complaint handling framework</a:t>
+              <a:t>23,112 lines · 93 sections · 102 books &amp; regulatory documents · §91–93 system design, PowerPoint, materials</a:t>
             </a:r>
           </a:p>
         </p:txBody>
@@ -4500,7 +4500,7 @@
                 </a:solidFill>
                 <a:latin typeface="Calibri"/>
               </a:rPr>
-              <a:t>22,935</a:t>
+              <a:t>23,112</a:t>
             </a:r>
           </a:p>
         </p:txBody>
@@ -4613,7 +4613,7 @@
                 </a:solidFill>
                 <a:latin typeface="Calibri"/>
               </a:rPr>
-              <a:t>90</a:t>
+              <a:t>93</a:t>
             </a:r>
           </a:p>
         </p:txBody>
@@ -4726,7 +4726,7 @@
                 </a:solidFill>
                 <a:latin typeface="Calibri"/>
               </a:rPr>
-              <a:t>99</a:t>
+              <a:t>102</a:t>
             </a:r>
           </a:p>
         </p:txBody>
@@ -4987,7 +4987,7 @@
                 </a:solidFill>
                 <a:latin typeface="Calibri"/>
               </a:rPr>
-              <a:t>§1–22</a:t>
+              <a:t>§1–22, §91</a:t>
             </a:r>
           </a:p>
         </p:txBody>
@@ -5067,7 +5067,7 @@
                 </a:solidFill>
                 <a:latin typeface="Calibri"/>
               </a:rPr>
-              <a:t>Python · SQL · FastAPI · Docker · Git · React/JS · JWT · HTTP · Linux · Security · Pydantic · async · pytest</a:t>
+              <a:t>Python · SQL · FastAPI · Docker · Git · React/JS · JWT · HTTP · Linux · Security · Pydantic · async · pytest · System Design Interview (King)</a:t>
             </a:r>
           </a:p>
         </p:txBody>
@@ -6145,7 +6145,7 @@
                 </a:solidFill>
                 <a:latin typeface="Calibri"/>
               </a:rPr>
-              <a:t>§27–33, §64–65, §76</a:t>
+              <a:t>§27–33, §64–65, §76, §92</a:t>
             </a:r>
           </a:p>
         </p:txBody>
@@ -6225,7 +6225,7 @@
                 </a:solidFill>
                 <a:latin typeface="Calibri"/>
               </a:rPr>
-              <a:t>Power Teams · Power BI (×2) · PowerPoint (×2) · SharePoint · Dynamics 365 BC AL · Azure AI Engineer AI-102</a:t>
+              <a:t>Power Teams · Power BI (×2) · PowerPoint (×3 — incl. 365 Pro/Lemmings) · SharePoint · Dynamics 365 BC AL · Azure AI Engineer AI-102</a:t>
             </a:r>
           </a:p>
         </p:txBody>
@@ -6496,7 +6496,7 @@
                 </a:solidFill>
                 <a:latin typeface="Calibri"/>
               </a:rPr>
-              <a:t>Electronics · Hardware · IoT</a:t>
+              <a:t>Electronics · Hardware · Engineering Design</a:t>
             </a:r>
           </a:p>
         </p:txBody>
@@ -6531,7 +6531,7 @@
                 </a:solidFill>
                 <a:latin typeface="Calibri"/>
               </a:rPr>
-              <a:t>§43–49, §54, §57, §89</a:t>
+              <a:t>§43–49, §54, §57, §89, §93</a:t>
             </a:r>
           </a:p>
         </p:txBody>
@@ -6611,7 +6611,7 @@
                 </a:solidFill>
                 <a:latin typeface="Calibri"/>
               </a:rPr>
-              <a:t>MakerSpace · Electronics · Mechatronics · Digital Logic · Devices &amp; Circuits · Arduino/IoT · Embedded Linux · ISO GD&amp;T (Green)</a:t>
+              <a:t>MakerSpace · Electronics · Mechatronics · Digital Logic · Arduino/IoT · Embedded Linux · ISO GD&amp;T (Green) · CAMSS Materials Selection (NMAB-467)</a:t>
             </a:r>
           </a:p>
         </p:txBody>
@@ -15180,7 +15180,7 @@
                 </a:solidFill>
                 <a:latin typeface="Calibri"/>
               </a:rPr>
-              <a:t>Reference library (90 sections · §90 complaints)</a:t>
+              <a:t>Reference library (93 sections · 102 books)</a:t>
             </a:r>
           </a:p>
         </p:txBody>

--- a/Santander_Project_Record.pptx
+++ b/Santander_Project_Record.pptx
@@ -3238,8 +3238,8 @@
         </p:nvSpPr>
         <p:spPr>
           <a:xfrm>
-            <a:off x="548640" y="1463040"/>
-            <a:ext cx="502920" cy="502920"/>
+            <a:off x="10012680" y="274320"/>
+            <a:ext cx="1783080" cy="310896"/>
           </a:xfrm>
           <a:prstGeom prst="rect">
             <a:avLst/>
@@ -3275,7 +3275,42 @@
       </p:sp>
       <p:sp>
         <p:nvSpPr>
-          <p:cNvPr id="6" name="Rectangle 5"/>
+          <p:cNvPr id="6" name="TextBox 5"/>
+          <p:cNvSpPr txBox="1"/>
+          <p:nvPr/>
+        </p:nvSpPr>
+        <p:spPr>
+          <a:xfrm>
+            <a:off x="10012680" y="310896"/>
+            <a:ext cx="1783080" cy="237744"/>
+          </a:xfrm>
+          <a:prstGeom prst="rect">
+            <a:avLst/>
+          </a:prstGeom>
+          <a:noFill/>
+        </p:spPr>
+        <p:txBody>
+          <a:bodyPr wrap="square">
+            <a:noAutofit/>
+          </a:bodyPr>
+          <a:lstStyle/>
+          <a:p>
+            <a:pPr algn="ctr"/>
+            <a:r>
+              <a:rPr sz="750" b="1" i="0">
+                <a:solidFill>
+                  <a:srgbClr val="FFFFFF"/>
+                </a:solidFill>
+                <a:latin typeface="Calibri"/>
+              </a:rPr>
+              <a:t>INTERNAL · CONFIDENTIAL</a:t>
+            </a:r>
+          </a:p>
+        </p:txBody>
+      </p:sp>
+      <p:sp>
+        <p:nvSpPr>
+          <p:cNvPr id="7" name="Rectangle 6"/>
           <p:cNvSpPr/>
           <p:nvPr/>
         </p:nvSpPr>
@@ -3318,119 +3353,14 @@
       </p:sp>
       <p:sp>
         <p:nvSpPr>
-          <p:cNvPr id="7" name="TextBox 6"/>
-          <p:cNvSpPr txBox="1"/>
-          <p:nvPr/>
-        </p:nvSpPr>
-        <p:spPr>
-          <a:xfrm>
-            <a:off x="548640" y="2194560"/>
-            <a:ext cx="9144000" cy="502920"/>
-          </a:xfrm>
-          <a:prstGeom prst="rect">
-            <a:avLst/>
-          </a:prstGeom>
-          <a:noFill/>
-        </p:spPr>
-        <p:txBody>
-          <a:bodyPr wrap="square">
-            <a:noAutofit/>
-          </a:bodyPr>
-          <a:lstStyle/>
-          <a:p>
-            <a:pPr algn="l"/>
-            <a:r>
-              <a:rPr sz="1300" b="0" i="0">
-                <a:solidFill>
-                  <a:srgbClr val="78716C"/>
-                </a:solidFill>
-                <a:latin typeface="Calibri"/>
-              </a:rPr>
-              <a:t>Project Record</a:t>
-            </a:r>
-          </a:p>
-        </p:txBody>
-      </p:sp>
-      <p:sp>
-        <p:nvSpPr>
-          <p:cNvPr id="8" name="TextBox 7"/>
-          <p:cNvSpPr txBox="1"/>
-          <p:nvPr/>
-        </p:nvSpPr>
-        <p:spPr>
-          <a:xfrm>
-            <a:off x="548640" y="2651760"/>
-            <a:ext cx="10058400" cy="914400"/>
-          </a:xfrm>
-          <a:prstGeom prst="rect">
-            <a:avLst/>
-          </a:prstGeom>
-          <a:noFill/>
-        </p:spPr>
-        <p:txBody>
-          <a:bodyPr wrap="square">
-            <a:noAutofit/>
-          </a:bodyPr>
-          <a:lstStyle/>
-          <a:p>
-            <a:pPr algn="l"/>
-            <a:r>
-              <a:rPr sz="4400" b="1" i="0">
-                <a:solidFill>
-                  <a:srgbClr val="FFFFFF"/>
-                </a:solidFill>
-                <a:latin typeface="Calibri"/>
-              </a:rPr>
-              <a:t>Santander Business Banking</a:t>
-            </a:r>
-          </a:p>
-        </p:txBody>
-      </p:sp>
-      <p:sp>
-        <p:nvSpPr>
-          <p:cNvPr id="9" name="TextBox 8"/>
-          <p:cNvSpPr txBox="1"/>
-          <p:nvPr/>
-        </p:nvSpPr>
-        <p:spPr>
-          <a:xfrm>
-            <a:off x="548640" y="3520440"/>
-            <a:ext cx="10058400" cy="640080"/>
-          </a:xfrm>
-          <a:prstGeom prst="rect">
-            <a:avLst/>
-          </a:prstGeom>
-          <a:noFill/>
-        </p:spPr>
-        <p:txBody>
-          <a:bodyPr wrap="square">
-            <a:noAutofit/>
-          </a:bodyPr>
-          <a:lstStyle/>
-          <a:p>
-            <a:pPr algn="l"/>
-            <a:r>
-              <a:rPr sz="3600" b="0" i="1">
-                <a:solidFill>
-                  <a:srgbClr val="FEF2F2"/>
-                </a:solidFill>
-                <a:latin typeface="Calibri"/>
-              </a:rPr>
-              <a:t>Digital Prototype</a:t>
-            </a:r>
-          </a:p>
-        </p:txBody>
-      </p:sp>
-      <p:sp>
-        <p:nvSpPr>
-          <p:cNvPr id="10" name="Rectangle 9"/>
+          <p:cNvPr id="8" name="Rectangle 7"/>
           <p:cNvSpPr/>
           <p:nvPr/>
         </p:nvSpPr>
         <p:spPr>
           <a:xfrm>
-            <a:off x="548640" y="4315968"/>
-            <a:ext cx="4114800" cy="18288"/>
+            <a:off x="548640" y="1463040"/>
+            <a:ext cx="502920" cy="502920"/>
           </a:xfrm>
           <a:prstGeom prst="rect">
             <a:avLst/>
@@ -3466,7 +3396,155 @@
       </p:sp>
       <p:sp>
         <p:nvSpPr>
+          <p:cNvPr id="9" name="TextBox 8"/>
+          <p:cNvSpPr txBox="1"/>
+          <p:nvPr/>
+        </p:nvSpPr>
+        <p:spPr>
+          <a:xfrm>
+            <a:off x="548640" y="2194560"/>
+            <a:ext cx="9144000" cy="502920"/>
+          </a:xfrm>
+          <a:prstGeom prst="rect">
+            <a:avLst/>
+          </a:prstGeom>
+          <a:noFill/>
+        </p:spPr>
+        <p:txBody>
+          <a:bodyPr wrap="square">
+            <a:noAutofit/>
+          </a:bodyPr>
+          <a:lstStyle/>
+          <a:p>
+            <a:pPr algn="l"/>
+            <a:r>
+              <a:rPr sz="1300" b="0" i="0">
+                <a:solidFill>
+                  <a:srgbClr val="78716C"/>
+                </a:solidFill>
+                <a:latin typeface="Calibri"/>
+              </a:rPr>
+              <a:t>Project Record</a:t>
+            </a:r>
+          </a:p>
+        </p:txBody>
+      </p:sp>
+      <p:sp>
+        <p:nvSpPr>
+          <p:cNvPr id="10" name="TextBox 9"/>
+          <p:cNvSpPr txBox="1"/>
+          <p:nvPr/>
+        </p:nvSpPr>
+        <p:spPr>
+          <a:xfrm>
+            <a:off x="548640" y="2651760"/>
+            <a:ext cx="10058400" cy="914400"/>
+          </a:xfrm>
+          <a:prstGeom prst="rect">
+            <a:avLst/>
+          </a:prstGeom>
+          <a:noFill/>
+        </p:spPr>
+        <p:txBody>
+          <a:bodyPr wrap="square">
+            <a:noAutofit/>
+          </a:bodyPr>
+          <a:lstStyle/>
+          <a:p>
+            <a:pPr algn="l"/>
+            <a:r>
+              <a:rPr sz="4400" b="1" i="0">
+                <a:solidFill>
+                  <a:srgbClr val="FFFFFF"/>
+                </a:solidFill>
+                <a:latin typeface="Calibri"/>
+              </a:rPr>
+              <a:t>Santander Business Banking</a:t>
+            </a:r>
+          </a:p>
+        </p:txBody>
+      </p:sp>
+      <p:sp>
+        <p:nvSpPr>
           <p:cNvPr id="11" name="TextBox 10"/>
+          <p:cNvSpPr txBox="1"/>
+          <p:nvPr/>
+        </p:nvSpPr>
+        <p:spPr>
+          <a:xfrm>
+            <a:off x="548640" y="3520440"/>
+            <a:ext cx="10058400" cy="640080"/>
+          </a:xfrm>
+          <a:prstGeom prst="rect">
+            <a:avLst/>
+          </a:prstGeom>
+          <a:noFill/>
+        </p:spPr>
+        <p:txBody>
+          <a:bodyPr wrap="square">
+            <a:noAutofit/>
+          </a:bodyPr>
+          <a:lstStyle/>
+          <a:p>
+            <a:pPr algn="l"/>
+            <a:r>
+              <a:rPr sz="3600" b="0" i="1">
+                <a:solidFill>
+                  <a:srgbClr val="FEF2F2"/>
+                </a:solidFill>
+                <a:latin typeface="Calibri"/>
+              </a:rPr>
+              <a:t>Digital Prototype</a:t>
+            </a:r>
+          </a:p>
+        </p:txBody>
+      </p:sp>
+      <p:sp>
+        <p:nvSpPr>
+          <p:cNvPr id="12" name="Rectangle 11"/>
+          <p:cNvSpPr/>
+          <p:nvPr/>
+        </p:nvSpPr>
+        <p:spPr>
+          <a:xfrm>
+            <a:off x="548640" y="4315968"/>
+            <a:ext cx="4114800" cy="18288"/>
+          </a:xfrm>
+          <a:prstGeom prst="rect">
+            <a:avLst/>
+          </a:prstGeom>
+          <a:solidFill>
+            <a:srgbClr val="C8102E"/>
+          </a:solidFill>
+          <a:ln>
+            <a:noFill/>
+          </a:ln>
+        </p:spPr>
+        <p:style>
+          <a:lnRef idx="1">
+            <a:schemeClr val="accent1"/>
+          </a:lnRef>
+          <a:fillRef idx="3">
+            <a:schemeClr val="accent1"/>
+          </a:fillRef>
+          <a:effectRef idx="2">
+            <a:schemeClr val="accent1"/>
+          </a:effectRef>
+          <a:fontRef idx="minor">
+            <a:schemeClr val="lt1"/>
+          </a:fontRef>
+        </p:style>
+        <p:txBody>
+          <a:bodyPr rtlCol="0" anchor="ctr"/>
+          <a:lstStyle/>
+          <a:p>
+            <a:pPr algn="ctr"/>
+          </a:p>
+        </p:txBody>
+      </p:sp>
+      <p:sp>
+        <p:nvSpPr>
+          <p:cNvPr id="13" name="TextBox 12"/>
           <p:cNvSpPr txBox="1"/>
           <p:nvPr/>
         </p:nvSpPr>
@@ -3553,7 +3631,7 @@
       </p:sp>
       <p:sp>
         <p:nvSpPr>
-          <p:cNvPr id="12" name="Rectangle 11"/>
+          <p:cNvPr id="14" name="Rectangle 13"/>
           <p:cNvSpPr/>
           <p:nvPr/>
         </p:nvSpPr>
@@ -3596,7 +3674,7 @@
       </p:sp>
       <p:sp>
         <p:nvSpPr>
-          <p:cNvPr id="13" name="Rectangle 12"/>
+          <p:cNvPr id="15" name="Rectangle 14"/>
           <p:cNvSpPr/>
           <p:nvPr/>
         </p:nvSpPr>
@@ -3639,7 +3717,7 @@
       </p:sp>
       <p:sp>
         <p:nvSpPr>
-          <p:cNvPr id="14" name="TextBox 13"/>
+          <p:cNvPr id="16" name="TextBox 15"/>
           <p:cNvSpPr txBox="1"/>
           <p:nvPr/>
         </p:nvSpPr>
@@ -3674,7 +3752,7 @@
       </p:sp>
       <p:sp>
         <p:nvSpPr>
-          <p:cNvPr id="15" name="TextBox 14"/>
+          <p:cNvPr id="17" name="TextBox 16"/>
           <p:cNvSpPr txBox="1"/>
           <p:nvPr/>
         </p:nvSpPr>
@@ -3709,7 +3787,7 @@
       </p:sp>
       <p:sp>
         <p:nvSpPr>
-          <p:cNvPr id="16" name="Rectangle 15"/>
+          <p:cNvPr id="18" name="Rectangle 17"/>
           <p:cNvSpPr/>
           <p:nvPr/>
         </p:nvSpPr>
@@ -3752,7 +3830,7 @@
       </p:sp>
       <p:sp>
         <p:nvSpPr>
-          <p:cNvPr id="17" name="Rectangle 16"/>
+          <p:cNvPr id="19" name="Rectangle 18"/>
           <p:cNvSpPr/>
           <p:nvPr/>
         </p:nvSpPr>
@@ -3795,7 +3873,7 @@
       </p:sp>
       <p:sp>
         <p:nvSpPr>
-          <p:cNvPr id="18" name="TextBox 17"/>
+          <p:cNvPr id="20" name="TextBox 19"/>
           <p:cNvSpPr txBox="1"/>
           <p:nvPr/>
         </p:nvSpPr>
@@ -3830,7 +3908,7 @@
       </p:sp>
       <p:sp>
         <p:nvSpPr>
-          <p:cNvPr id="19" name="TextBox 18"/>
+          <p:cNvPr id="21" name="TextBox 20"/>
           <p:cNvSpPr txBox="1"/>
           <p:nvPr/>
         </p:nvSpPr>
@@ -3865,7 +3943,7 @@
       </p:sp>
       <p:sp>
         <p:nvSpPr>
-          <p:cNvPr id="20" name="Rectangle 19"/>
+          <p:cNvPr id="22" name="Rectangle 21"/>
           <p:cNvSpPr/>
           <p:nvPr/>
         </p:nvSpPr>
@@ -3908,7 +3986,7 @@
       </p:sp>
       <p:sp>
         <p:nvSpPr>
-          <p:cNvPr id="21" name="Rectangle 20"/>
+          <p:cNvPr id="23" name="Rectangle 22"/>
           <p:cNvSpPr/>
           <p:nvPr/>
         </p:nvSpPr>
@@ -3951,7 +4029,7 @@
       </p:sp>
       <p:sp>
         <p:nvSpPr>
-          <p:cNvPr id="22" name="TextBox 21"/>
+          <p:cNvPr id="24" name="TextBox 23"/>
           <p:cNvSpPr txBox="1"/>
           <p:nvPr/>
         </p:nvSpPr>
@@ -3986,7 +4064,7 @@
       </p:sp>
       <p:sp>
         <p:nvSpPr>
-          <p:cNvPr id="23" name="TextBox 22"/>
+          <p:cNvPr id="25" name="TextBox 24"/>
           <p:cNvSpPr txBox="1"/>
           <p:nvPr/>
         </p:nvSpPr>
@@ -4021,7 +4099,7 @@
       </p:sp>
       <p:sp>
         <p:nvSpPr>
-          <p:cNvPr id="24" name="Rectangle 23"/>
+          <p:cNvPr id="26" name="Rectangle 25"/>
           <p:cNvSpPr/>
           <p:nvPr/>
         </p:nvSpPr>
@@ -4064,7 +4142,7 @@
       </p:sp>
       <p:sp>
         <p:nvSpPr>
-          <p:cNvPr id="25" name="Rectangle 24"/>
+          <p:cNvPr id="27" name="Rectangle 26"/>
           <p:cNvSpPr/>
           <p:nvPr/>
         </p:nvSpPr>
@@ -4107,7 +4185,7 @@
       </p:sp>
       <p:sp>
         <p:nvSpPr>
-          <p:cNvPr id="26" name="TextBox 25"/>
+          <p:cNvPr id="28" name="TextBox 27"/>
           <p:cNvSpPr txBox="1"/>
           <p:nvPr/>
         </p:nvSpPr>
@@ -4142,7 +4220,7 @@
       </p:sp>
       <p:sp>
         <p:nvSpPr>
-          <p:cNvPr id="27" name="TextBox 26"/>
+          <p:cNvPr id="29" name="TextBox 28"/>
           <p:cNvSpPr txBox="1"/>
           <p:nvPr/>
         </p:nvSpPr>
@@ -4177,7 +4255,7 @@
       </p:sp>
       <p:sp>
         <p:nvSpPr>
-          <p:cNvPr id="28" name="TextBox 27"/>
+          <p:cNvPr id="30" name="TextBox 29"/>
           <p:cNvSpPr txBox="1"/>
           <p:nvPr/>
         </p:nvSpPr>
@@ -6861,20 +6939,55 @@
         <p:spPr>
           <a:xfrm>
             <a:off x="457200" y="6620256"/>
-            <a:ext cx="11274552" cy="201168"/>
-          </a:xfrm>
-          <a:prstGeom prst="rect">
-            <a:avLst/>
-          </a:prstGeom>
-          <a:noFill/>
-        </p:spPr>
-        <p:txBody>
-          <a:bodyPr wrap="square">
-            <a:noAutofit/>
-          </a:bodyPr>
-          <a:lstStyle/>
-          <a:p>
-            <a:pPr algn="ctr"/>
+            <a:ext cx="2743200" cy="201168"/>
+          </a:xfrm>
+          <a:prstGeom prst="rect">
+            <a:avLst/>
+          </a:prstGeom>
+          <a:noFill/>
+        </p:spPr>
+        <p:txBody>
+          <a:bodyPr wrap="square">
+            <a:noAutofit/>
+          </a:bodyPr>
+          <a:lstStyle/>
+          <a:p>
+            <a:pPr algn="l"/>
+            <a:r>
+              <a:rPr sz="800" b="1" i="0">
+                <a:solidFill>
+                  <a:srgbClr val="FEF2F2"/>
+                </a:solidFill>
+                <a:latin typeface="Calibri"/>
+              </a:rPr>
+              <a:t>INTERNAL · CONFIDENTIAL</a:t>
+            </a:r>
+          </a:p>
+        </p:txBody>
+      </p:sp>
+      <p:sp>
+        <p:nvSpPr>
+          <p:cNvPr id="71" name="TextBox 70"/>
+          <p:cNvSpPr txBox="1"/>
+          <p:nvPr/>
+        </p:nvSpPr>
+        <p:spPr>
+          <a:xfrm>
+            <a:off x="3200400" y="6620256"/>
+            <a:ext cx="8531352" cy="201168"/>
+          </a:xfrm>
+          <a:prstGeom prst="rect">
+            <a:avLst/>
+          </a:prstGeom>
+          <a:noFill/>
+        </p:spPr>
+        <p:txBody>
+          <a:bodyPr wrap="square">
+            <a:noAutofit/>
+          </a:bodyPr>
+          <a:lstStyle/>
+          <a:p>
+            <a:pPr algn="r"/>
             <a:r>
               <a:rPr sz="800" b="0" i="0">
                 <a:solidFill>
@@ -6882,14 +6995,14 @@
                 </a:solidFill>
                 <a:latin typeface="Calibri"/>
               </a:rPr>
-              <a:t>Alan Davidson · Business Banking Advisor · Self-initiated · Completed out of hours in own time · June 2026</a:t>
-            </a:r>
-          </a:p>
-        </p:txBody>
-      </p:sp>
-      <p:sp>
-        <p:nvSpPr>
-          <p:cNvPr id="71" name="TextBox 70"/>
+              <a:t>Alan Davidson · Business Banking Advisor · Self-initiated · Own time · June 2026</a:t>
+            </a:r>
+          </a:p>
+        </p:txBody>
+      </p:sp>
+      <p:sp>
+        <p:nvSpPr>
+          <p:cNvPr id="72" name="TextBox 71"/>
           <p:cNvSpPr txBox="1"/>
           <p:nvPr/>
         </p:nvSpPr>
@@ -10236,20 +10349,55 @@
         <p:spPr>
           <a:xfrm>
             <a:off x="457200" y="6620256"/>
-            <a:ext cx="11274552" cy="201168"/>
-          </a:xfrm>
-          <a:prstGeom prst="rect">
-            <a:avLst/>
-          </a:prstGeom>
-          <a:noFill/>
-        </p:spPr>
-        <p:txBody>
-          <a:bodyPr wrap="square">
-            <a:noAutofit/>
-          </a:bodyPr>
-          <a:lstStyle/>
-          <a:p>
-            <a:pPr algn="ctr"/>
+            <a:ext cx="2743200" cy="201168"/>
+          </a:xfrm>
+          <a:prstGeom prst="rect">
+            <a:avLst/>
+          </a:prstGeom>
+          <a:noFill/>
+        </p:spPr>
+        <p:txBody>
+          <a:bodyPr wrap="square">
+            <a:noAutofit/>
+          </a:bodyPr>
+          <a:lstStyle/>
+          <a:p>
+            <a:pPr algn="l"/>
+            <a:r>
+              <a:rPr sz="800" b="1" i="0">
+                <a:solidFill>
+                  <a:srgbClr val="FEF2F2"/>
+                </a:solidFill>
+                <a:latin typeface="Calibri"/>
+              </a:rPr>
+              <a:t>INTERNAL · CONFIDENTIAL</a:t>
+            </a:r>
+          </a:p>
+        </p:txBody>
+      </p:sp>
+      <p:sp>
+        <p:nvSpPr>
+          <p:cNvPr id="86" name="TextBox 85"/>
+          <p:cNvSpPr txBox="1"/>
+          <p:nvPr/>
+        </p:nvSpPr>
+        <p:spPr>
+          <a:xfrm>
+            <a:off x="3200400" y="6620256"/>
+            <a:ext cx="8531352" cy="201168"/>
+          </a:xfrm>
+          <a:prstGeom prst="rect">
+            <a:avLst/>
+          </a:prstGeom>
+          <a:noFill/>
+        </p:spPr>
+        <p:txBody>
+          <a:bodyPr wrap="square">
+            <a:noAutofit/>
+          </a:bodyPr>
+          <a:lstStyle/>
+          <a:p>
+            <a:pPr algn="r"/>
             <a:r>
               <a:rPr sz="800" b="0" i="0">
                 <a:solidFill>
@@ -10257,14 +10405,14 @@
                 </a:solidFill>
                 <a:latin typeface="Calibri"/>
               </a:rPr>
-              <a:t>Alan Davidson · Business Banking Advisor · Self-initiated · Completed out of hours in own time · June 2026</a:t>
-            </a:r>
-          </a:p>
-        </p:txBody>
-      </p:sp>
-      <p:sp>
-        <p:nvSpPr>
-          <p:cNvPr id="86" name="TextBox 85"/>
+              <a:t>Alan Davidson · Business Banking Advisor · Self-initiated · Own time · June 2026</a:t>
+            </a:r>
+          </a:p>
+        </p:txBody>
+      </p:sp>
+      <p:sp>
+        <p:nvSpPr>
+          <p:cNvPr id="87" name="TextBox 86"/>
           <p:cNvSpPr txBox="1"/>
           <p:nvPr/>
         </p:nvSpPr>
@@ -15724,20 +15872,55 @@
         <p:spPr>
           <a:xfrm>
             <a:off x="457200" y="6620256"/>
-            <a:ext cx="11274552" cy="201168"/>
-          </a:xfrm>
-          <a:prstGeom prst="rect">
-            <a:avLst/>
-          </a:prstGeom>
-          <a:noFill/>
-        </p:spPr>
-        <p:txBody>
-          <a:bodyPr wrap="square">
-            <a:noAutofit/>
-          </a:bodyPr>
-          <a:lstStyle/>
-          <a:p>
-            <a:pPr algn="ctr"/>
+            <a:ext cx="2743200" cy="201168"/>
+          </a:xfrm>
+          <a:prstGeom prst="rect">
+            <a:avLst/>
+          </a:prstGeom>
+          <a:noFill/>
+        </p:spPr>
+        <p:txBody>
+          <a:bodyPr wrap="square">
+            <a:noAutofit/>
+          </a:bodyPr>
+          <a:lstStyle/>
+          <a:p>
+            <a:pPr algn="l"/>
+            <a:r>
+              <a:rPr sz="800" b="1" i="0">
+                <a:solidFill>
+                  <a:srgbClr val="FEF2F2"/>
+                </a:solidFill>
+                <a:latin typeface="Calibri"/>
+              </a:rPr>
+              <a:t>INTERNAL · CONFIDENTIAL</a:t>
+            </a:r>
+          </a:p>
+        </p:txBody>
+      </p:sp>
+      <p:sp>
+        <p:nvSpPr>
+          <p:cNvPr id="145" name="TextBox 144"/>
+          <p:cNvSpPr txBox="1"/>
+          <p:nvPr/>
+        </p:nvSpPr>
+        <p:spPr>
+          <a:xfrm>
+            <a:off x="3200400" y="6620256"/>
+            <a:ext cx="8531352" cy="201168"/>
+          </a:xfrm>
+          <a:prstGeom prst="rect">
+            <a:avLst/>
+          </a:prstGeom>
+          <a:noFill/>
+        </p:spPr>
+        <p:txBody>
+          <a:bodyPr wrap="square">
+            <a:noAutofit/>
+          </a:bodyPr>
+          <a:lstStyle/>
+          <a:p>
+            <a:pPr algn="r"/>
             <a:r>
               <a:rPr sz="800" b="0" i="0">
                 <a:solidFill>
@@ -15745,14 +15928,14 @@
                 </a:solidFill>
                 <a:latin typeface="Calibri"/>
               </a:rPr>
-              <a:t>Alan Davidson · Business Banking Advisor · Self-initiated · Completed out of hours in own time · June 2026</a:t>
-            </a:r>
-          </a:p>
-        </p:txBody>
-      </p:sp>
-      <p:sp>
-        <p:nvSpPr>
-          <p:cNvPr id="145" name="TextBox 144"/>
+              <a:t>Alan Davidson · Business Banking Advisor · Self-initiated · Own time · June 2026</a:t>
+            </a:r>
+          </a:p>
+        </p:txBody>
+      </p:sp>
+      <p:sp>
+        <p:nvSpPr>
+          <p:cNvPr id="146" name="TextBox 145"/>
           <p:cNvSpPr txBox="1"/>
           <p:nvPr/>
         </p:nvSpPr>
@@ -17513,20 +17696,55 @@
         <p:spPr>
           <a:xfrm>
             <a:off x="457200" y="6620256"/>
-            <a:ext cx="11274552" cy="201168"/>
-          </a:xfrm>
-          <a:prstGeom prst="rect">
-            <a:avLst/>
-          </a:prstGeom>
-          <a:noFill/>
-        </p:spPr>
-        <p:txBody>
-          <a:bodyPr wrap="square">
-            <a:noAutofit/>
-          </a:bodyPr>
-          <a:lstStyle/>
-          <a:p>
-            <a:pPr algn="ctr"/>
+            <a:ext cx="2743200" cy="201168"/>
+          </a:xfrm>
+          <a:prstGeom prst="rect">
+            <a:avLst/>
+          </a:prstGeom>
+          <a:noFill/>
+        </p:spPr>
+        <p:txBody>
+          <a:bodyPr wrap="square">
+            <a:noAutofit/>
+          </a:bodyPr>
+          <a:lstStyle/>
+          <a:p>
+            <a:pPr algn="l"/>
+            <a:r>
+              <a:rPr sz="800" b="1" i="0">
+                <a:solidFill>
+                  <a:srgbClr val="FEF2F2"/>
+                </a:solidFill>
+                <a:latin typeface="Calibri"/>
+              </a:rPr>
+              <a:t>INTERNAL · CONFIDENTIAL</a:t>
+            </a:r>
+          </a:p>
+        </p:txBody>
+      </p:sp>
+      <p:sp>
+        <p:nvSpPr>
+          <p:cNvPr id="34" name="TextBox 33"/>
+          <p:cNvSpPr txBox="1"/>
+          <p:nvPr/>
+        </p:nvSpPr>
+        <p:spPr>
+          <a:xfrm>
+            <a:off x="3200400" y="6620256"/>
+            <a:ext cx="8531352" cy="201168"/>
+          </a:xfrm>
+          <a:prstGeom prst="rect">
+            <a:avLst/>
+          </a:prstGeom>
+          <a:noFill/>
+        </p:spPr>
+        <p:txBody>
+          <a:bodyPr wrap="square">
+            <a:noAutofit/>
+          </a:bodyPr>
+          <a:lstStyle/>
+          <a:p>
+            <a:pPr algn="r"/>
             <a:r>
               <a:rPr sz="800" b="0" i="0">
                 <a:solidFill>
@@ -17534,14 +17752,14 @@
                 </a:solidFill>
                 <a:latin typeface="Calibri"/>
               </a:rPr>
-              <a:t>Alan Davidson · Business Banking Advisor · Self-initiated · Completed out of hours in own time · June 2026</a:t>
-            </a:r>
-          </a:p>
-        </p:txBody>
-      </p:sp>
-      <p:sp>
-        <p:nvSpPr>
-          <p:cNvPr id="34" name="TextBox 33"/>
+              <a:t>Alan Davidson · Business Banking Advisor · Self-initiated · Own time · June 2026</a:t>
+            </a:r>
+          </a:p>
+        </p:txBody>
+      </p:sp>
+      <p:sp>
+        <p:nvSpPr>
+          <p:cNvPr id="35" name="TextBox 34"/>
           <p:cNvSpPr txBox="1"/>
           <p:nvPr/>
         </p:nvSpPr>
@@ -21435,20 +21653,55 @@
         <p:spPr>
           <a:xfrm>
             <a:off x="457200" y="6620256"/>
-            <a:ext cx="11274552" cy="201168"/>
-          </a:xfrm>
-          <a:prstGeom prst="rect">
-            <a:avLst/>
-          </a:prstGeom>
-          <a:noFill/>
-        </p:spPr>
-        <p:txBody>
-          <a:bodyPr wrap="square">
-            <a:noAutofit/>
-          </a:bodyPr>
-          <a:lstStyle/>
-          <a:p>
-            <a:pPr algn="ctr"/>
+            <a:ext cx="2743200" cy="201168"/>
+          </a:xfrm>
+          <a:prstGeom prst="rect">
+            <a:avLst/>
+          </a:prstGeom>
+          <a:noFill/>
+        </p:spPr>
+        <p:txBody>
+          <a:bodyPr wrap="square">
+            <a:noAutofit/>
+          </a:bodyPr>
+          <a:lstStyle/>
+          <a:p>
+            <a:pPr algn="l"/>
+            <a:r>
+              <a:rPr sz="800" b="1" i="0">
+                <a:solidFill>
+                  <a:srgbClr val="FEF2F2"/>
+                </a:solidFill>
+                <a:latin typeface="Calibri"/>
+              </a:rPr>
+              <a:t>INTERNAL · CONFIDENTIAL</a:t>
+            </a:r>
+          </a:p>
+        </p:txBody>
+      </p:sp>
+      <p:sp>
+        <p:nvSpPr>
+          <p:cNvPr id="41" name="TextBox 40"/>
+          <p:cNvSpPr txBox="1"/>
+          <p:nvPr/>
+        </p:nvSpPr>
+        <p:spPr>
+          <a:xfrm>
+            <a:off x="3200400" y="6620256"/>
+            <a:ext cx="8531352" cy="201168"/>
+          </a:xfrm>
+          <a:prstGeom prst="rect">
+            <a:avLst/>
+          </a:prstGeom>
+          <a:noFill/>
+        </p:spPr>
+        <p:txBody>
+          <a:bodyPr wrap="square">
+            <a:noAutofit/>
+          </a:bodyPr>
+          <a:lstStyle/>
+          <a:p>
+            <a:pPr algn="r"/>
             <a:r>
               <a:rPr sz="800" b="0" i="0">
                 <a:solidFill>
@@ -21456,14 +21709,14 @@
                 </a:solidFill>
                 <a:latin typeface="Calibri"/>
               </a:rPr>
-              <a:t>Alan Davidson · Business Banking Advisor · Self-initiated · Completed out of hours in own time · June 2026</a:t>
-            </a:r>
-          </a:p>
-        </p:txBody>
-      </p:sp>
-      <p:sp>
-        <p:nvSpPr>
-          <p:cNvPr id="41" name="TextBox 40"/>
+              <a:t>Alan Davidson · Business Banking Advisor · Self-initiated · Own time · June 2026</a:t>
+            </a:r>
+          </a:p>
+        </p:txBody>
+      </p:sp>
+      <p:sp>
+        <p:nvSpPr>
+          <p:cNvPr id="42" name="TextBox 41"/>
           <p:cNvSpPr txBox="1"/>
           <p:nvPr/>
         </p:nvSpPr>
@@ -23230,20 +23483,55 @@
         <p:spPr>
           <a:xfrm>
             <a:off x="457200" y="6620256"/>
-            <a:ext cx="11274552" cy="201168"/>
-          </a:xfrm>
-          <a:prstGeom prst="rect">
-            <a:avLst/>
-          </a:prstGeom>
-          <a:noFill/>
-        </p:spPr>
-        <p:txBody>
-          <a:bodyPr wrap="square">
-            <a:noAutofit/>
-          </a:bodyPr>
-          <a:lstStyle/>
-          <a:p>
-            <a:pPr algn="ctr"/>
+            <a:ext cx="2743200" cy="201168"/>
+          </a:xfrm>
+          <a:prstGeom prst="rect">
+            <a:avLst/>
+          </a:prstGeom>
+          <a:noFill/>
+        </p:spPr>
+        <p:txBody>
+          <a:bodyPr wrap="square">
+            <a:noAutofit/>
+          </a:bodyPr>
+          <a:lstStyle/>
+          <a:p>
+            <a:pPr algn="l"/>
+            <a:r>
+              <a:rPr sz="800" b="1" i="0">
+                <a:solidFill>
+                  <a:srgbClr val="FEF2F2"/>
+                </a:solidFill>
+                <a:latin typeface="Calibri"/>
+              </a:rPr>
+              <a:t>INTERNAL · CONFIDENTIAL</a:t>
+            </a:r>
+          </a:p>
+        </p:txBody>
+      </p:sp>
+      <p:sp>
+        <p:nvSpPr>
+          <p:cNvPr id="34" name="TextBox 33"/>
+          <p:cNvSpPr txBox="1"/>
+          <p:nvPr/>
+        </p:nvSpPr>
+        <p:spPr>
+          <a:xfrm>
+            <a:off x="3200400" y="6620256"/>
+            <a:ext cx="8531352" cy="201168"/>
+          </a:xfrm>
+          <a:prstGeom prst="rect">
+            <a:avLst/>
+          </a:prstGeom>
+          <a:noFill/>
+        </p:spPr>
+        <p:txBody>
+          <a:bodyPr wrap="square">
+            <a:noAutofit/>
+          </a:bodyPr>
+          <a:lstStyle/>
+          <a:p>
+            <a:pPr algn="r"/>
             <a:r>
               <a:rPr sz="800" b="0" i="0">
                 <a:solidFill>
@@ -23251,14 +23539,14 @@
                 </a:solidFill>
                 <a:latin typeface="Calibri"/>
               </a:rPr>
-              <a:t>Alan Davidson · Business Banking Advisor · Self-initiated · Completed out of hours in own time · June 2026</a:t>
-            </a:r>
-          </a:p>
-        </p:txBody>
-      </p:sp>
-      <p:sp>
-        <p:nvSpPr>
-          <p:cNvPr id="34" name="TextBox 33"/>
+              <a:t>Alan Davidson · Business Banking Advisor · Self-initiated · Own time · June 2026</a:t>
+            </a:r>
+          </a:p>
+        </p:txBody>
+      </p:sp>
+      <p:sp>
+        <p:nvSpPr>
+          <p:cNvPr id="35" name="TextBox 34"/>
           <p:cNvSpPr txBox="1"/>
           <p:nvPr/>
         </p:nvSpPr>
@@ -25924,20 +26212,55 @@
         <p:spPr>
           <a:xfrm>
             <a:off x="457200" y="6620256"/>
-            <a:ext cx="11274552" cy="201168"/>
-          </a:xfrm>
-          <a:prstGeom prst="rect">
-            <a:avLst/>
-          </a:prstGeom>
-          <a:noFill/>
-        </p:spPr>
-        <p:txBody>
-          <a:bodyPr wrap="square">
-            <a:noAutofit/>
-          </a:bodyPr>
-          <a:lstStyle/>
-          <a:p>
-            <a:pPr algn="ctr"/>
+            <a:ext cx="2743200" cy="201168"/>
+          </a:xfrm>
+          <a:prstGeom prst="rect">
+            <a:avLst/>
+          </a:prstGeom>
+          <a:noFill/>
+        </p:spPr>
+        <p:txBody>
+          <a:bodyPr wrap="square">
+            <a:noAutofit/>
+          </a:bodyPr>
+          <a:lstStyle/>
+          <a:p>
+            <a:pPr algn="l"/>
+            <a:r>
+              <a:rPr sz="800" b="1" i="0">
+                <a:solidFill>
+                  <a:srgbClr val="FEF2F2"/>
+                </a:solidFill>
+                <a:latin typeface="Calibri"/>
+              </a:rPr>
+              <a:t>INTERNAL · CONFIDENTIAL</a:t>
+            </a:r>
+          </a:p>
+        </p:txBody>
+      </p:sp>
+      <p:sp>
+        <p:nvSpPr>
+          <p:cNvPr id="69" name="TextBox 68"/>
+          <p:cNvSpPr txBox="1"/>
+          <p:nvPr/>
+        </p:nvSpPr>
+        <p:spPr>
+          <a:xfrm>
+            <a:off x="3200400" y="6620256"/>
+            <a:ext cx="8531352" cy="201168"/>
+          </a:xfrm>
+          <a:prstGeom prst="rect">
+            <a:avLst/>
+          </a:prstGeom>
+          <a:noFill/>
+        </p:spPr>
+        <p:txBody>
+          <a:bodyPr wrap="square">
+            <a:noAutofit/>
+          </a:bodyPr>
+          <a:lstStyle/>
+          <a:p>
+            <a:pPr algn="r"/>
             <a:r>
               <a:rPr sz="800" b="0" i="0">
                 <a:solidFill>
@@ -25945,14 +26268,14 @@
                 </a:solidFill>
                 <a:latin typeface="Calibri"/>
               </a:rPr>
-              <a:t>Alan Davidson · Business Banking Advisor · Self-initiated · Completed out of hours in own time · June 2026</a:t>
-            </a:r>
-          </a:p>
-        </p:txBody>
-      </p:sp>
-      <p:sp>
-        <p:nvSpPr>
-          <p:cNvPr id="69" name="TextBox 68"/>
+              <a:t>Alan Davidson · Business Banking Advisor · Self-initiated · Own time · June 2026</a:t>
+            </a:r>
+          </a:p>
+        </p:txBody>
+      </p:sp>
+      <p:sp>
+        <p:nvSpPr>
+          <p:cNvPr id="70" name="TextBox 69"/>
           <p:cNvSpPr txBox="1"/>
           <p:nvPr/>
         </p:nvSpPr>
@@ -28432,20 +28755,55 @@
         <p:spPr>
           <a:xfrm>
             <a:off x="457200" y="6620256"/>
-            <a:ext cx="11274552" cy="201168"/>
-          </a:xfrm>
-          <a:prstGeom prst="rect">
-            <a:avLst/>
-          </a:prstGeom>
-          <a:noFill/>
-        </p:spPr>
-        <p:txBody>
-          <a:bodyPr wrap="square">
-            <a:noAutofit/>
-          </a:bodyPr>
-          <a:lstStyle/>
-          <a:p>
-            <a:pPr algn="ctr"/>
+            <a:ext cx="2743200" cy="201168"/>
+          </a:xfrm>
+          <a:prstGeom prst="rect">
+            <a:avLst/>
+          </a:prstGeom>
+          <a:noFill/>
+        </p:spPr>
+        <p:txBody>
+          <a:bodyPr wrap="square">
+            <a:noAutofit/>
+          </a:bodyPr>
+          <a:lstStyle/>
+          <a:p>
+            <a:pPr algn="l"/>
+            <a:r>
+              <a:rPr sz="800" b="1" i="0">
+                <a:solidFill>
+                  <a:srgbClr val="FEF2F2"/>
+                </a:solidFill>
+                <a:latin typeface="Calibri"/>
+              </a:rPr>
+              <a:t>INTERNAL · CONFIDENTIAL</a:t>
+            </a:r>
+          </a:p>
+        </p:txBody>
+      </p:sp>
+      <p:sp>
+        <p:nvSpPr>
+          <p:cNvPr id="69" name="TextBox 68"/>
+          <p:cNvSpPr txBox="1"/>
+          <p:nvPr/>
+        </p:nvSpPr>
+        <p:spPr>
+          <a:xfrm>
+            <a:off x="3200400" y="6620256"/>
+            <a:ext cx="8531352" cy="201168"/>
+          </a:xfrm>
+          <a:prstGeom prst="rect">
+            <a:avLst/>
+          </a:prstGeom>
+          <a:noFill/>
+        </p:spPr>
+        <p:txBody>
+          <a:bodyPr wrap="square">
+            <a:noAutofit/>
+          </a:bodyPr>
+          <a:lstStyle/>
+          <a:p>
+            <a:pPr algn="r"/>
             <a:r>
               <a:rPr sz="800" b="0" i="0">
                 <a:solidFill>
@@ -28453,14 +28811,14 @@
                 </a:solidFill>
                 <a:latin typeface="Calibri"/>
               </a:rPr>
-              <a:t>Alan Davidson · Business Banking Advisor · Self-initiated · Completed out of hours in own time · June 2026</a:t>
-            </a:r>
-          </a:p>
-        </p:txBody>
-      </p:sp>
-      <p:sp>
-        <p:nvSpPr>
-          <p:cNvPr id="69" name="TextBox 68"/>
+              <a:t>Alan Davidson · Business Banking Advisor · Self-initiated · Own time · June 2026</a:t>
+            </a:r>
+          </a:p>
+        </p:txBody>
+      </p:sp>
+      <p:sp>
+        <p:nvSpPr>
+          <p:cNvPr id="70" name="TextBox 69"/>
           <p:cNvSpPr txBox="1"/>
           <p:nvPr/>
         </p:nvSpPr>
@@ -30732,20 +31090,55 @@
         <p:spPr>
           <a:xfrm>
             <a:off x="457200" y="6620256"/>
-            <a:ext cx="11274552" cy="201168"/>
-          </a:xfrm>
-          <a:prstGeom prst="rect">
-            <a:avLst/>
-          </a:prstGeom>
-          <a:noFill/>
-        </p:spPr>
-        <p:txBody>
-          <a:bodyPr wrap="square">
-            <a:noAutofit/>
-          </a:bodyPr>
-          <a:lstStyle/>
-          <a:p>
-            <a:pPr algn="ctr"/>
+            <a:ext cx="2743200" cy="201168"/>
+          </a:xfrm>
+          <a:prstGeom prst="rect">
+            <a:avLst/>
+          </a:prstGeom>
+          <a:noFill/>
+        </p:spPr>
+        <p:txBody>
+          <a:bodyPr wrap="square">
+            <a:noAutofit/>
+          </a:bodyPr>
+          <a:lstStyle/>
+          <a:p>
+            <a:pPr algn="l"/>
+            <a:r>
+              <a:rPr sz="800" b="1" i="0">
+                <a:solidFill>
+                  <a:srgbClr val="FEF2F2"/>
+                </a:solidFill>
+                <a:latin typeface="Calibri"/>
+              </a:rPr>
+              <a:t>INTERNAL · CONFIDENTIAL</a:t>
+            </a:r>
+          </a:p>
+        </p:txBody>
+      </p:sp>
+      <p:sp>
+        <p:nvSpPr>
+          <p:cNvPr id="59" name="TextBox 58"/>
+          <p:cNvSpPr txBox="1"/>
+          <p:nvPr/>
+        </p:nvSpPr>
+        <p:spPr>
+          <a:xfrm>
+            <a:off x="3200400" y="6620256"/>
+            <a:ext cx="8531352" cy="201168"/>
+          </a:xfrm>
+          <a:prstGeom prst="rect">
+            <a:avLst/>
+          </a:prstGeom>
+          <a:noFill/>
+        </p:spPr>
+        <p:txBody>
+          <a:bodyPr wrap="square">
+            <a:noAutofit/>
+          </a:bodyPr>
+          <a:lstStyle/>
+          <a:p>
+            <a:pPr algn="r"/>
             <a:r>
               <a:rPr sz="800" b="0" i="0">
                 <a:solidFill>
@@ -30753,14 +31146,14 @@
                 </a:solidFill>
                 <a:latin typeface="Calibri"/>
               </a:rPr>
-              <a:t>Alan Davidson · Business Banking Advisor · Self-initiated · Completed out of hours in own time · June 2026</a:t>
-            </a:r>
-          </a:p>
-        </p:txBody>
-      </p:sp>
-      <p:sp>
-        <p:nvSpPr>
-          <p:cNvPr id="59" name="TextBox 58"/>
+              <a:t>Alan Davidson · Business Banking Advisor · Self-initiated · Own time · June 2026</a:t>
+            </a:r>
+          </a:p>
+        </p:txBody>
+      </p:sp>
+      <p:sp>
+        <p:nvSpPr>
+          <p:cNvPr id="60" name="TextBox 59"/>
           <p:cNvSpPr txBox="1"/>
           <p:nvPr/>
         </p:nvSpPr>
@@ -32835,20 +33228,55 @@
         <p:spPr>
           <a:xfrm>
             <a:off x="457200" y="6620256"/>
-            <a:ext cx="11274552" cy="201168"/>
-          </a:xfrm>
-          <a:prstGeom prst="rect">
-            <a:avLst/>
-          </a:prstGeom>
-          <a:noFill/>
-        </p:spPr>
-        <p:txBody>
-          <a:bodyPr wrap="square">
-            <a:noAutofit/>
-          </a:bodyPr>
-          <a:lstStyle/>
-          <a:p>
-            <a:pPr algn="ctr"/>
+            <a:ext cx="2743200" cy="201168"/>
+          </a:xfrm>
+          <a:prstGeom prst="rect">
+            <a:avLst/>
+          </a:prstGeom>
+          <a:noFill/>
+        </p:spPr>
+        <p:txBody>
+          <a:bodyPr wrap="square">
+            <a:noAutofit/>
+          </a:bodyPr>
+          <a:lstStyle/>
+          <a:p>
+            <a:pPr algn="l"/>
+            <a:r>
+              <a:rPr sz="800" b="1" i="0">
+                <a:solidFill>
+                  <a:srgbClr val="FEF2F2"/>
+                </a:solidFill>
+                <a:latin typeface="Calibri"/>
+              </a:rPr>
+              <a:t>INTERNAL · CONFIDENTIAL</a:t>
+            </a:r>
+          </a:p>
+        </p:txBody>
+      </p:sp>
+      <p:sp>
+        <p:nvSpPr>
+          <p:cNvPr id="54" name="TextBox 53"/>
+          <p:cNvSpPr txBox="1"/>
+          <p:nvPr/>
+        </p:nvSpPr>
+        <p:spPr>
+          <a:xfrm>
+            <a:off x="3200400" y="6620256"/>
+            <a:ext cx="8531352" cy="201168"/>
+          </a:xfrm>
+          <a:prstGeom prst="rect">
+            <a:avLst/>
+          </a:prstGeom>
+          <a:noFill/>
+        </p:spPr>
+        <p:txBody>
+          <a:bodyPr wrap="square">
+            <a:noAutofit/>
+          </a:bodyPr>
+          <a:lstStyle/>
+          <a:p>
+            <a:pPr algn="r"/>
             <a:r>
               <a:rPr sz="800" b="0" i="0">
                 <a:solidFill>
@@ -32856,14 +33284,14 @@
                 </a:solidFill>
                 <a:latin typeface="Calibri"/>
               </a:rPr>
-              <a:t>Alan Davidson · Business Banking Advisor · Self-initiated · Completed out of hours in own time · June 2026</a:t>
-            </a:r>
-          </a:p>
-        </p:txBody>
-      </p:sp>
-      <p:sp>
-        <p:nvSpPr>
-          <p:cNvPr id="54" name="TextBox 53"/>
+              <a:t>Alan Davidson · Business Banking Advisor · Self-initiated · Own time · June 2026</a:t>
+            </a:r>
+          </a:p>
+        </p:txBody>
+      </p:sp>
+      <p:sp>
+        <p:nvSpPr>
+          <p:cNvPr id="55" name="TextBox 54"/>
           <p:cNvSpPr txBox="1"/>
           <p:nvPr/>
         </p:nvSpPr>
@@ -34461,20 +34889,55 @@
         <p:spPr>
           <a:xfrm>
             <a:off x="457200" y="6620256"/>
-            <a:ext cx="11274552" cy="201168"/>
-          </a:xfrm>
-          <a:prstGeom prst="rect">
-            <a:avLst/>
-          </a:prstGeom>
-          <a:noFill/>
-        </p:spPr>
-        <p:txBody>
-          <a:bodyPr wrap="square">
-            <a:noAutofit/>
-          </a:bodyPr>
-          <a:lstStyle/>
-          <a:p>
-            <a:pPr algn="ctr"/>
+            <a:ext cx="2743200" cy="201168"/>
+          </a:xfrm>
+          <a:prstGeom prst="rect">
+            <a:avLst/>
+          </a:prstGeom>
+          <a:noFill/>
+        </p:spPr>
+        <p:txBody>
+          <a:bodyPr wrap="square">
+            <a:noAutofit/>
+          </a:bodyPr>
+          <a:lstStyle/>
+          <a:p>
+            <a:pPr algn="l"/>
+            <a:r>
+              <a:rPr sz="800" b="1" i="0">
+                <a:solidFill>
+                  <a:srgbClr val="FEF2F2"/>
+                </a:solidFill>
+                <a:latin typeface="Calibri"/>
+              </a:rPr>
+              <a:t>INTERNAL · CONFIDENTIAL</a:t>
+            </a:r>
+          </a:p>
+        </p:txBody>
+      </p:sp>
+      <p:sp>
+        <p:nvSpPr>
+          <p:cNvPr id="41" name="TextBox 40"/>
+          <p:cNvSpPr txBox="1"/>
+          <p:nvPr/>
+        </p:nvSpPr>
+        <p:spPr>
+          <a:xfrm>
+            <a:off x="3200400" y="6620256"/>
+            <a:ext cx="8531352" cy="201168"/>
+          </a:xfrm>
+          <a:prstGeom prst="rect">
+            <a:avLst/>
+          </a:prstGeom>
+          <a:noFill/>
+        </p:spPr>
+        <p:txBody>
+          <a:bodyPr wrap="square">
+            <a:noAutofit/>
+          </a:bodyPr>
+          <a:lstStyle/>
+          <a:p>
+            <a:pPr algn="r"/>
             <a:r>
               <a:rPr sz="800" b="0" i="0">
                 <a:solidFill>
@@ -34482,14 +34945,14 @@
                 </a:solidFill>
                 <a:latin typeface="Calibri"/>
               </a:rPr>
-              <a:t>Alan Davidson · Business Banking Advisor · Self-initiated · Completed out of hours in own time · June 2026</a:t>
-            </a:r>
-          </a:p>
-        </p:txBody>
-      </p:sp>
-      <p:sp>
-        <p:nvSpPr>
-          <p:cNvPr id="41" name="TextBox 40"/>
+              <a:t>Alan Davidson · Business Banking Advisor · Self-initiated · Own time · June 2026</a:t>
+            </a:r>
+          </a:p>
+        </p:txBody>
+      </p:sp>
+      <p:sp>
+        <p:nvSpPr>
+          <p:cNvPr id="42" name="TextBox 41"/>
           <p:cNvSpPr txBox="1"/>
           <p:nvPr/>
         </p:nvSpPr>
@@ -36925,20 +37388,55 @@
         <p:spPr>
           <a:xfrm>
             <a:off x="457200" y="6620256"/>
-            <a:ext cx="11274552" cy="201168"/>
-          </a:xfrm>
-          <a:prstGeom prst="rect">
-            <a:avLst/>
-          </a:prstGeom>
-          <a:noFill/>
-        </p:spPr>
-        <p:txBody>
-          <a:bodyPr wrap="square">
-            <a:noAutofit/>
-          </a:bodyPr>
-          <a:lstStyle/>
-          <a:p>
-            <a:pPr algn="ctr"/>
+            <a:ext cx="2743200" cy="201168"/>
+          </a:xfrm>
+          <a:prstGeom prst="rect">
+            <a:avLst/>
+          </a:prstGeom>
+          <a:noFill/>
+        </p:spPr>
+        <p:txBody>
+          <a:bodyPr wrap="square">
+            <a:noAutofit/>
+          </a:bodyPr>
+          <a:lstStyle/>
+          <a:p>
+            <a:pPr algn="l"/>
+            <a:r>
+              <a:rPr sz="800" b="1" i="0">
+                <a:solidFill>
+                  <a:srgbClr val="FEF2F2"/>
+                </a:solidFill>
+                <a:latin typeface="Calibri"/>
+              </a:rPr>
+              <a:t>INTERNAL · CONFIDENTIAL</a:t>
+            </a:r>
+          </a:p>
+        </p:txBody>
+      </p:sp>
+      <p:sp>
+        <p:nvSpPr>
+          <p:cNvPr id="55" name="TextBox 54"/>
+          <p:cNvSpPr txBox="1"/>
+          <p:nvPr/>
+        </p:nvSpPr>
+        <p:spPr>
+          <a:xfrm>
+            <a:off x="3200400" y="6620256"/>
+            <a:ext cx="8531352" cy="201168"/>
+          </a:xfrm>
+          <a:prstGeom prst="rect">
+            <a:avLst/>
+          </a:prstGeom>
+          <a:noFill/>
+        </p:spPr>
+        <p:txBody>
+          <a:bodyPr wrap="square">
+            <a:noAutofit/>
+          </a:bodyPr>
+          <a:lstStyle/>
+          <a:p>
+            <a:pPr algn="r"/>
             <a:r>
               <a:rPr sz="800" b="0" i="0">
                 <a:solidFill>
@@ -36946,14 +37444,14 @@
                 </a:solidFill>
                 <a:latin typeface="Calibri"/>
               </a:rPr>
-              <a:t>Alan Davidson · Business Banking Advisor · Self-initiated · Completed out of hours in own time · June 2026</a:t>
-            </a:r>
-          </a:p>
-        </p:txBody>
-      </p:sp>
-      <p:sp>
-        <p:nvSpPr>
-          <p:cNvPr id="55" name="TextBox 54"/>
+              <a:t>Alan Davidson · Business Banking Advisor · Self-initiated · Own time · June 2026</a:t>
+            </a:r>
+          </a:p>
+        </p:txBody>
+      </p:sp>
+      <p:sp>
+        <p:nvSpPr>
+          <p:cNvPr id="56" name="TextBox 55"/>
           <p:cNvSpPr txBox="1"/>
           <p:nvPr/>
         </p:nvSpPr>

--- a/Santander_Project_Record.pptx
+++ b/Santander_Project_Record.pptx
@@ -4457,7 +4457,7 @@
                 </a:solidFill>
                 <a:latin typeface="Calibri"/>
               </a:rPr>
-              <a:t>23,112 lines · 93 sections · 102 books &amp; regulatory documents · §91–93 system design, PowerPoint, materials</a:t>
+              <a:t>23,260 lines · 96 sections · 105 books &amp; regulatory documents · §94–96 LibreOffice, KDP, PDF→EPUB</a:t>
             </a:r>
           </a:p>
         </p:txBody>
@@ -4578,7 +4578,7 @@
                 </a:solidFill>
                 <a:latin typeface="Calibri"/>
               </a:rPr>
-              <a:t>23,112</a:t>
+              <a:t>23,260</a:t>
             </a:r>
           </a:p>
         </p:txBody>
@@ -4691,7 +4691,7 @@
                 </a:solidFill>
                 <a:latin typeface="Calibri"/>
               </a:rPr>
-              <a:t>93</a:t>
+              <a:t>96</a:t>
             </a:r>
           </a:p>
         </p:txBody>
@@ -4804,7 +4804,7 @@
                 </a:solidFill>
                 <a:latin typeface="Calibri"/>
               </a:rPr>
-              <a:t>102</a:t>
+              <a:t>105</a:t>
             </a:r>
           </a:p>
         </p:txBody>
@@ -6188,7 +6188,7 @@
                 </a:solidFill>
                 <a:latin typeface="Calibri"/>
               </a:rPr>
-              <a:t>Microsoft Ecosystem</a:t>
+              <a:t>Office, Docs &amp; Publishing</a:t>
             </a:r>
           </a:p>
         </p:txBody>
@@ -6223,7 +6223,7 @@
                 </a:solidFill>
                 <a:latin typeface="Calibri"/>
               </a:rPr>
-              <a:t>§27–33, §64–65, §76, §92</a:t>
+              <a:t>§27–33, §64–65, §76, §92, §94–96</a:t>
             </a:r>
           </a:p>
         </p:txBody>
@@ -6303,7 +6303,7 @@
                 </a:solidFill>
                 <a:latin typeface="Calibri"/>
               </a:rPr>
-              <a:t>Power Teams · Power BI (×2) · PowerPoint (×3 — incl. 365 Pro/Lemmings) · SharePoint · Dynamics 365 BC AL · Azure AI Engineer AI-102</a:t>
+              <a:t>Power Teams · Power BI · PowerPoint (×3) · SharePoint · Dynamics 365 BC AL · Azure AI-102 · LibreOffice Extensions · KDP Formatting · PDF→EPUB (Calibre)</a:t>
             </a:r>
           </a:p>
         </p:txBody>
@@ -15328,7 +15328,7 @@
                 </a:solidFill>
                 <a:latin typeface="Calibri"/>
               </a:rPr>
-              <a:t>Reference library (93 sections · 102 books)</a:t>
+              <a:t>Reference library (96 sections · 105 books)</a:t>
             </a:r>
           </a:p>
         </p:txBody>

--- a/Santander_Project_Record.pptx
+++ b/Santander_Project_Record.pptx
@@ -4457,7 +4457,7 @@
                 </a:solidFill>
                 <a:latin typeface="Calibri"/>
               </a:rPr>
-              <a:t>23,260 lines · 96 sections · 105 books &amp; regulatory documents · §94–96 LibreOffice, KDP, PDF→EPUB</a:t>
+              <a:t>23,427 lines · 98 sections · 107 books &amp; regulatory documents · §97 Senior Managers Regime · §98 Prezi</a:t>
             </a:r>
           </a:p>
         </p:txBody>
@@ -4578,7 +4578,7 @@
                 </a:solidFill>
                 <a:latin typeface="Calibri"/>
               </a:rPr>
-              <a:t>23,260</a:t>
+              <a:t>23,427</a:t>
             </a:r>
           </a:p>
         </p:txBody>
@@ -4691,7 +4691,7 @@
                 </a:solidFill>
                 <a:latin typeface="Calibri"/>
               </a:rPr>
-              <a:t>96</a:t>
+              <a:t>98</a:t>
             </a:r>
           </a:p>
         </p:txBody>
@@ -4804,7 +4804,7 @@
                 </a:solidFill>
                 <a:latin typeface="Calibri"/>
               </a:rPr>
-              <a:t>105</a:t>
+              <a:t>107</a:t>
             </a:r>
           </a:p>
         </p:txBody>
@@ -5644,7 +5644,7 @@
                 </a:solidFill>
                 <a:latin typeface="Calibri"/>
               </a:rPr>
-              <a:t>§36–40, §87–88</a:t>
+              <a:t>§36–40, §87–88, §97</a:t>
             </a:r>
           </a:p>
         </p:txBody>
@@ -5724,7 +5724,7 @@
                 </a:solidFill>
                 <a:latin typeface="Calibri"/>
               </a:rPr>
-              <a:t>PRA/PRC · Basel 3.1 · SS19/13 Resolution Planning · MREL · CNRF · Deposit Aggregators · LEI/SSI · KYC Passporting · Post-Trade Task Force</a:t>
+              <a:t>PRA/PRC · Basel 3.1 · SS19/13 Resolution · MREL · CNRF · Deposit Aggregators · Post-Trade Task Force · Senior Managers Regime (Berman)</a:t>
             </a:r>
           </a:p>
         </p:txBody>
@@ -6223,7 +6223,7 @@
                 </a:solidFill>
                 <a:latin typeface="Calibri"/>
               </a:rPr>
-              <a:t>§27–33, §64–65, §76, §92, §94–96</a:t>
+              <a:t>§27–33, §64–65, §76, §92, §94–96, §98</a:t>
             </a:r>
           </a:p>
         </p:txBody>
@@ -6303,7 +6303,7 @@
                 </a:solidFill>
                 <a:latin typeface="Calibri"/>
               </a:rPr>
-              <a:t>Power Teams · Power BI · PowerPoint (×3) · SharePoint · Dynamics 365 BC AL · Azure AI-102 · LibreOffice Extensions · KDP Formatting · PDF→EPUB (Calibre)</a:t>
+              <a:t>Power Teams · Power BI · PowerPoint (×3) · SharePoint · Dynamics 365 BC AL · Azure AI-102 · LibreOffice · KDP · PDF→EPUB · Mastering Prezi (Anderson-Williams)</a:t>
             </a:r>
           </a:p>
         </p:txBody>
@@ -15328,7 +15328,7 @@
                 </a:solidFill>
                 <a:latin typeface="Calibri"/>
               </a:rPr>
-              <a:t>Reference library (96 sections · 105 books)</a:t>
+              <a:t>Reference library (98 sections · 107 books)</a:t>
             </a:r>
           </a:p>
         </p:txBody>

--- a/Santander_Project_Record.pptx
+++ b/Santander_Project_Record.pptx
@@ -4457,7 +4457,7 @@
                 </a:solidFill>
                 <a:latin typeface="Calibri"/>
               </a:rPr>
-              <a:t>23,427 lines · 98 sections · 107 books &amp; regulatory documents · §97 Senior Managers Regime · §98 Prezi</a:t>
+              <a:t>23,496 lines · 99 sections · 108 books &amp; regulatory documents · §97 SMR · §98 Prezi · §99 WCAG contrast</a:t>
             </a:r>
           </a:p>
         </p:txBody>
@@ -4578,7 +4578,7 @@
                 </a:solidFill>
                 <a:latin typeface="Calibri"/>
               </a:rPr>
-              <a:t>23,427</a:t>
+              <a:t>23,496</a:t>
             </a:r>
           </a:p>
         </p:txBody>
@@ -4691,7 +4691,7 @@
                 </a:solidFill>
                 <a:latin typeface="Calibri"/>
               </a:rPr>
-              <a:t>98</a:t>
+              <a:t>99</a:t>
             </a:r>
           </a:p>
         </p:txBody>
@@ -4804,7 +4804,7 @@
                 </a:solidFill>
                 <a:latin typeface="Calibri"/>
               </a:rPr>
-              <a:t>107</a:t>
+              <a:t>108</a:t>
             </a:r>
           </a:p>
         </p:txBody>
@@ -6381,7 +6381,7 @@
                 </a:solidFill>
                 <a:latin typeface="Calibri"/>
               </a:rPr>
-              <a:t>Employment &amp; Equality Law</a:t>
+              <a:t>Equality &amp; Accessibility</a:t>
             </a:r>
           </a:p>
         </p:txBody>
@@ -6416,7 +6416,7 @@
                 </a:solidFill>
                 <a:latin typeface="Calibri"/>
               </a:rPr>
-              <a:t>§34</a:t>
+              <a:t>§34, §99</a:t>
             </a:r>
           </a:p>
         </p:txBody>
@@ -6496,7 +6496,7 @@
                 </a:solidFill>
                 <a:latin typeface="Calibri"/>
               </a:rPr>
-              <a:t>Equality Act 2010 · Nine protected characteristics · WCAG accessibility legal duty · Reasonable adjustments</a:t>
+              <a:t>Equality Act 2010 · Protected characteristics · Reasonable adjustments · WCAG 2.1 colour contrast (4.5:1) · WebAIM/CCA testing</a:t>
             </a:r>
           </a:p>
         </p:txBody>
@@ -15328,7 +15328,7 @@
                 </a:solidFill>
                 <a:latin typeface="Calibri"/>
               </a:rPr>
-              <a:t>Reference library (98 sections · 107 books)</a:t>
+              <a:t>Reference library (99 sections · 108 books)</a:t>
             </a:r>
           </a:p>
         </p:txBody>

--- a/Santander_Project_Record.pptx
+++ b/Santander_Project_Record.pptx
@@ -4457,7 +4457,7 @@
                 </a:solidFill>
                 <a:latin typeface="Calibri"/>
               </a:rPr>
-              <a:t>23,496 lines · 99 sections · 108 books &amp; regulatory documents · §97 SMR · §98 Prezi · §99 WCAG contrast</a:t>
+              <a:t>23,812 lines · 111 sections · 120 books &amp; regulatory documents · §100–111 UX, Node.js, TypeScript, C++, financial crime</a:t>
             </a:r>
           </a:p>
         </p:txBody>
@@ -4578,7 +4578,7 @@
                 </a:solidFill>
                 <a:latin typeface="Calibri"/>
               </a:rPr>
-              <a:t>23,496</a:t>
+              <a:t>23,812</a:t>
             </a:r>
           </a:p>
         </p:txBody>
@@ -4691,7 +4691,7 @@
                 </a:solidFill>
                 <a:latin typeface="Calibri"/>
               </a:rPr>
-              <a:t>99</a:t>
+              <a:t>111</a:t>
             </a:r>
           </a:p>
         </p:txBody>
@@ -4804,7 +4804,7 @@
                 </a:solidFill>
                 <a:latin typeface="Calibri"/>
               </a:rPr>
-              <a:t>108</a:t>
+              <a:t>120</a:t>
             </a:r>
           </a:p>
         </p:txBody>
@@ -5065,7 +5065,7 @@
                 </a:solidFill>
                 <a:latin typeface="Calibri"/>
               </a:rPr>
-              <a:t>§1–22, §91</a:t>
+              <a:t>§1–22, §91, §104–106, §110</a:t>
             </a:r>
           </a:p>
         </p:txBody>
@@ -5145,7 +5145,7 @@
                 </a:solidFill>
                 <a:latin typeface="Calibri"/>
               </a:rPr>
-              <a:t>Python · SQL · FastAPI · Docker · Git · React/JS · JWT · HTTP · Linux · Security · Pydantic · async · pytest · System Design Interview (King)</a:t>
+              <a:t>Python · SQL · FastAPI · Docker · Git · React/JS · JWT · HTTP · Linux · pytest · System Design (King) · Node.js · TypeScript (Pocock) · A Tour of C++ (Stroustrup)</a:t>
             </a:r>
           </a:p>
         </p:txBody>
@@ -5609,7 +5609,7 @@
                 </a:solidFill>
                 <a:latin typeface="Calibri"/>
               </a:rPr>
-              <a:t>Prudential &amp; Market Regulation</a:t>
+              <a:t>Prudential · Conduct · Financial Crime</a:t>
             </a:r>
           </a:p>
         </p:txBody>
@@ -5644,7 +5644,7 @@
                 </a:solidFill>
                 <a:latin typeface="Calibri"/>
               </a:rPr>
-              <a:t>§36–40, §87–88, §97</a:t>
+              <a:t>§36–40, §87–88, §97, §107–108</a:t>
             </a:r>
           </a:p>
         </p:txBody>
@@ -5724,7 +5724,7 @@
                 </a:solidFill>
                 <a:latin typeface="Calibri"/>
               </a:rPr>
-              <a:t>PRA/PRC · Basel 3.1 · SS19/13 Resolution · MREL · CNRF · Deposit Aggregators · Post-Trade Task Force · Senior Managers Regime (Berman)</a:t>
+              <a:t>PRA/PRC · Basel 3.1 · Resolution · MREL · Senior Managers Regime (Berman) · Financial Shenanigans (Schilit) · Fraud Act 2006 / Corporate Misconduct (Monaghan)</a:t>
             </a:r>
           </a:p>
         </p:txBody>
@@ -6381,7 +6381,7 @@
                 </a:solidFill>
                 <a:latin typeface="Calibri"/>
               </a:rPr>
-              <a:t>Equality &amp; Accessibility</a:t>
+              <a:t>UX · Accessibility · Equality</a:t>
             </a:r>
           </a:p>
         </p:txBody>
@@ -6416,7 +6416,7 @@
                 </a:solidFill>
                 <a:latin typeface="Calibri"/>
               </a:rPr>
-              <a:t>§34, §99</a:t>
+              <a:t>§34, §99–103, §111</a:t>
             </a:r>
           </a:p>
         </p:txBody>
@@ -6496,7 +6496,7 @@
                 </a:solidFill>
                 <a:latin typeface="Calibri"/>
               </a:rPr>
-              <a:t>Equality Act 2010 · Protected characteristics · Reasonable adjustments · WCAG 2.1 colour contrast (4.5:1) · WebAIM/CCA testing</a:t>
+              <a:t>Equality Act 2010 · WCAG 2.1 contrast (4.5:1) · WebAIM/CCA · UX Management (Binder) · Design Thinking (Park) · UX Research (Schmidt) · Pro UX &amp; Accessibility Designer</a:t>
             </a:r>
           </a:p>
         </p:txBody>
@@ -15328,7 +15328,7 @@
                 </a:solidFill>
                 <a:latin typeface="Calibri"/>
               </a:rPr>
-              <a:t>Reference library (99 sections · 108 books)</a:t>
+              <a:t>Reference library (111 sections · 120 books)</a:t>
             </a:r>
           </a:p>
         </p:txBody>

--- a/Santander_Project_Record.pptx
+++ b/Santander_Project_Record.pptx
@@ -4457,7 +4457,7 @@
                 </a:solidFill>
                 <a:latin typeface="Calibri"/>
               </a:rPr>
-              <a:t>23,812 lines · 111 sections · 120 books &amp; regulatory documents · §100–111 UX, Node.js, TypeScript, C++, financial crime</a:t>
+              <a:t>23,846 lines · 112 sections · 121 books &amp; regulatory documents · §100–112 UX, Node.js, TypeScript, C++, financial crime &amp; ML detection</a:t>
             </a:r>
           </a:p>
         </p:txBody>
@@ -4578,7 +4578,7 @@
                 </a:solidFill>
                 <a:latin typeface="Calibri"/>
               </a:rPr>
-              <a:t>23,812</a:t>
+              <a:t>23,846</a:t>
             </a:r>
           </a:p>
         </p:txBody>
@@ -4691,7 +4691,7 @@
                 </a:solidFill>
                 <a:latin typeface="Calibri"/>
               </a:rPr>
-              <a:t>111</a:t>
+              <a:t>112</a:t>
             </a:r>
           </a:p>
         </p:txBody>
@@ -4804,7 +4804,7 @@
                 </a:solidFill>
                 <a:latin typeface="Calibri"/>
               </a:rPr>
-              <a:t>120</a:t>
+              <a:t>121</a:t>
             </a:r>
           </a:p>
         </p:txBody>
@@ -5644,7 +5644,7 @@
                 </a:solidFill>
                 <a:latin typeface="Calibri"/>
               </a:rPr>
-              <a:t>§36–40, §87–88, §97, §107–108</a:t>
+              <a:t>§36–40, §87–88, §97, §107–108, §112</a:t>
             </a:r>
           </a:p>
         </p:txBody>
@@ -5724,7 +5724,7 @@
                 </a:solidFill>
                 <a:latin typeface="Calibri"/>
               </a:rPr>
-              <a:t>PRA/PRC · Basel 3.1 · Resolution · MREL · Senior Managers Regime (Berman) · Financial Shenanigans (Schilit) · Fraud Act 2006 / Corporate Misconduct (Monaghan)</a:t>
+              <a:t>PRA/PRC · Resolution · MREL · Senior Managers Regime (Berman) · Financial Shenanigans (Schilit) · Fraud Act (Monaghan) · ML Fraud Detection (Ma &amp; Wu)</a:t>
             </a:r>
           </a:p>
         </p:txBody>
@@ -15328,7 +15328,7 @@
                 </a:solidFill>
                 <a:latin typeface="Calibri"/>
               </a:rPr>
-              <a:t>Reference library (111 sections · 120 books)</a:t>
+              <a:t>Reference library (112 sections · 121 books)</a:t>
             </a:r>
           </a:p>
         </p:txBody>

--- a/Santander_Project_Record.pptx
+++ b/Santander_Project_Record.pptx
@@ -3901,7 +3901,7 @@
                 </a:solidFill>
                 <a:latin typeface="Calibri"/>
               </a:rPr>
-              <a:t>12</a:t>
+              <a:t>13</a:t>
             </a:r>
           </a:p>
         </p:txBody>
@@ -14650,7 +14650,7 @@
                 </a:solidFill>
                 <a:latin typeface="Calibri"/>
               </a:rPr>
-              <a:t>Twelve workflows</a:t>
+              <a:t>Thirteen workflows</a:t>
             </a:r>
           </a:p>
         </p:txBody>
@@ -20362,7 +20362,7 @@
                 </a:solidFill>
                 <a:latin typeface="Calibri"/>
               </a:rPr>
-              <a:t>12 step-based workflow wizards covering every key banking operation</a:t>
+              <a:t>13 step-based workflow wizards covering every key banking operation</a:t>
             </a:r>
           </a:p>
           <a:p>
@@ -23713,7 +23713,7 @@
                 </a:solidFill>
                 <a:latin typeface="Calibri"/>
               </a:rPr>
-              <a:t>Twelve Workflow Wizards</a:t>
+              <a:t>Thirteen Workflow Wizards</a:t>
             </a:r>
           </a:p>
         </p:txBody>
@@ -23805,7 +23805,7 @@
         <p:spPr>
           <a:xfrm>
             <a:off x="384048" y="1024128"/>
-            <a:ext cx="3566160" cy="1261872"/>
+            <a:ext cx="2697480" cy="1261872"/>
           </a:xfrm>
           <a:prstGeom prst="rect">
             <a:avLst/>
@@ -23892,23 +23892,23 @@
         </p:nvSpPr>
         <p:spPr>
           <a:xfrm>
-            <a:off x="548640" y="1115568"/>
-            <a:ext cx="3310128" cy="256032"/>
-          </a:xfrm>
-          <a:prstGeom prst="rect">
-            <a:avLst/>
-          </a:prstGeom>
-          <a:noFill/>
-        </p:spPr>
-        <p:txBody>
-          <a:bodyPr wrap="square">
-            <a:noAutofit/>
-          </a:bodyPr>
-          <a:lstStyle/>
-          <a:p>
-            <a:pPr algn="l"/>
-            <a:r>
-              <a:rPr sz="950" b="1" i="0">
+            <a:off x="530352" y="1115568"/>
+            <a:ext cx="2478024" cy="365760"/>
+          </a:xfrm>
+          <a:prstGeom prst="rect">
+            <a:avLst/>
+          </a:prstGeom>
+          <a:noFill/>
+        </p:spPr>
+        <p:txBody>
+          <a:bodyPr wrap="square">
+            <a:noAutofit/>
+          </a:bodyPr>
+          <a:lstStyle/>
+          <a:p>
+            <a:pPr algn="l"/>
+            <a:r>
+              <a:rPr sz="900" b="1" i="0">
                 <a:solidFill>
                   <a:srgbClr val="1C1917"/>
                 </a:solidFill>
@@ -23927,23 +23927,23 @@
         </p:nvSpPr>
         <p:spPr>
           <a:xfrm>
-            <a:off x="548640" y="1353312"/>
-            <a:ext cx="1097280" cy="182880"/>
-          </a:xfrm>
-          <a:prstGeom prst="rect">
-            <a:avLst/>
-          </a:prstGeom>
-          <a:noFill/>
-        </p:spPr>
-        <p:txBody>
-          <a:bodyPr wrap="square">
-            <a:noAutofit/>
-          </a:bodyPr>
-          <a:lstStyle/>
-          <a:p>
-            <a:pPr algn="l"/>
-            <a:r>
-              <a:rPr sz="750" b="1" i="0">
+            <a:off x="530352" y="1444752"/>
+            <a:ext cx="2478024" cy="182880"/>
+          </a:xfrm>
+          <a:prstGeom prst="rect">
+            <a:avLst/>
+          </a:prstGeom>
+          <a:noFill/>
+        </p:spPr>
+        <p:txBody>
+          <a:bodyPr wrap="square">
+            <a:noAutofit/>
+          </a:bodyPr>
+          <a:lstStyle/>
+          <a:p>
+            <a:pPr algn="l"/>
+            <a:r>
+              <a:rPr sz="700" b="1" i="0">
                 <a:solidFill>
                   <a:srgbClr val="C8102E"/>
                 </a:solidFill>
@@ -23962,8 +23962,8 @@
         </p:nvSpPr>
         <p:spPr>
           <a:xfrm>
-            <a:off x="548640" y="1527048"/>
-            <a:ext cx="3291840" cy="713232"/>
+            <a:off x="530352" y="1627632"/>
+            <a:ext cx="2441448" cy="603504"/>
           </a:xfrm>
           <a:prstGeom prst="rect">
             <a:avLst/>
@@ -23978,11 +23978,11 @@
           <a:p>
             <a:pPr>
               <a:spcAft>
-                <a:spcPts val="300"/>
+                <a:spcPts val="200"/>
               </a:spcAft>
             </a:pPr>
             <a:r>
-              <a:rPr sz="800">
+              <a:rPr sz="700">
                 <a:solidFill>
                   <a:srgbClr val="78716C"/>
                 </a:solidFill>
@@ -24001,8 +24001,8 @@
         </p:nvSpPr>
         <p:spPr>
           <a:xfrm>
-            <a:off x="4123944" y="1024128"/>
-            <a:ext cx="3566160" cy="1261872"/>
+            <a:off x="3246120" y="1024128"/>
+            <a:ext cx="2697480" cy="1261872"/>
           </a:xfrm>
           <a:prstGeom prst="rect">
             <a:avLst/>
@@ -24046,7 +24046,7 @@
         </p:nvSpPr>
         <p:spPr>
           <a:xfrm>
-            <a:off x="4123944" y="1024128"/>
+            <a:off x="3246120" y="1024128"/>
             <a:ext cx="50292" cy="1261872"/>
           </a:xfrm>
           <a:prstGeom prst="rect">
@@ -24089,23 +24089,23 @@
         </p:nvSpPr>
         <p:spPr>
           <a:xfrm>
-            <a:off x="4288536" y="1115568"/>
-            <a:ext cx="3310128" cy="256032"/>
-          </a:xfrm>
-          <a:prstGeom prst="rect">
-            <a:avLst/>
-          </a:prstGeom>
-          <a:noFill/>
-        </p:spPr>
-        <p:txBody>
-          <a:bodyPr wrap="square">
-            <a:noAutofit/>
-          </a:bodyPr>
-          <a:lstStyle/>
-          <a:p>
-            <a:pPr algn="l"/>
-            <a:r>
-              <a:rPr sz="950" b="1" i="0">
+            <a:off x="3392424" y="1115568"/>
+            <a:ext cx="2478024" cy="365760"/>
+          </a:xfrm>
+          <a:prstGeom prst="rect">
+            <a:avLst/>
+          </a:prstGeom>
+          <a:noFill/>
+        </p:spPr>
+        <p:txBody>
+          <a:bodyPr wrap="square">
+            <a:noAutofit/>
+          </a:bodyPr>
+          <a:lstStyle/>
+          <a:p>
+            <a:pPr algn="l"/>
+            <a:r>
+              <a:rPr sz="900" b="1" i="0">
                 <a:solidFill>
                   <a:srgbClr val="1C1917"/>
                 </a:solidFill>
@@ -24124,23 +24124,23 @@
         </p:nvSpPr>
         <p:spPr>
           <a:xfrm>
-            <a:off x="4288536" y="1353312"/>
-            <a:ext cx="1097280" cy="182880"/>
-          </a:xfrm>
-          <a:prstGeom prst="rect">
-            <a:avLst/>
-          </a:prstGeom>
-          <a:noFill/>
-        </p:spPr>
-        <p:txBody>
-          <a:bodyPr wrap="square">
-            <a:noAutofit/>
-          </a:bodyPr>
-          <a:lstStyle/>
-          <a:p>
-            <a:pPr algn="l"/>
-            <a:r>
-              <a:rPr sz="750" b="1" i="0">
+            <a:off x="3392424" y="1444752"/>
+            <a:ext cx="2478024" cy="182880"/>
+          </a:xfrm>
+          <a:prstGeom prst="rect">
+            <a:avLst/>
+          </a:prstGeom>
+          <a:noFill/>
+        </p:spPr>
+        <p:txBody>
+          <a:bodyPr wrap="square">
+            <a:noAutofit/>
+          </a:bodyPr>
+          <a:lstStyle/>
+          <a:p>
+            <a:pPr algn="l"/>
+            <a:r>
+              <a:rPr sz="700" b="1" i="0">
                 <a:solidFill>
                   <a:srgbClr val="C8102E"/>
                 </a:solidFill>
@@ -24159,8 +24159,8 @@
         </p:nvSpPr>
         <p:spPr>
           <a:xfrm>
-            <a:off x="4288536" y="1527048"/>
-            <a:ext cx="3291840" cy="713232"/>
+            <a:off x="3392424" y="1627632"/>
+            <a:ext cx="2441448" cy="603504"/>
           </a:xfrm>
           <a:prstGeom prst="rect">
             <a:avLst/>
@@ -24175,11 +24175,11 @@
           <a:p>
             <a:pPr>
               <a:spcAft>
-                <a:spcPts val="300"/>
+                <a:spcPts val="200"/>
               </a:spcAft>
             </a:pPr>
             <a:r>
-              <a:rPr sz="800">
+              <a:rPr sz="700">
                 <a:solidFill>
                   <a:srgbClr val="78716C"/>
                 </a:solidFill>
@@ -24198,8 +24198,8 @@
         </p:nvSpPr>
         <p:spPr>
           <a:xfrm>
-            <a:off x="7863840" y="1024128"/>
-            <a:ext cx="3566160" cy="1261872"/>
+            <a:off x="6108192" y="1024128"/>
+            <a:ext cx="2697480" cy="1261872"/>
           </a:xfrm>
           <a:prstGeom prst="rect">
             <a:avLst/>
@@ -24243,7 +24243,7 @@
         </p:nvSpPr>
         <p:spPr>
           <a:xfrm>
-            <a:off x="7863840" y="1024128"/>
+            <a:off x="6108192" y="1024128"/>
             <a:ext cx="50292" cy="1261872"/>
           </a:xfrm>
           <a:prstGeom prst="rect">
@@ -24286,23 +24286,23 @@
         </p:nvSpPr>
         <p:spPr>
           <a:xfrm>
-            <a:off x="8028431" y="1115568"/>
-            <a:ext cx="3310128" cy="256032"/>
-          </a:xfrm>
-          <a:prstGeom prst="rect">
-            <a:avLst/>
-          </a:prstGeom>
-          <a:noFill/>
-        </p:spPr>
-        <p:txBody>
-          <a:bodyPr wrap="square">
-            <a:noAutofit/>
-          </a:bodyPr>
-          <a:lstStyle/>
-          <a:p>
-            <a:pPr algn="l"/>
-            <a:r>
-              <a:rPr sz="950" b="1" i="0">
+            <a:off x="6254496" y="1115568"/>
+            <a:ext cx="2478024" cy="365760"/>
+          </a:xfrm>
+          <a:prstGeom prst="rect">
+            <a:avLst/>
+          </a:prstGeom>
+          <a:noFill/>
+        </p:spPr>
+        <p:txBody>
+          <a:bodyPr wrap="square">
+            <a:noAutofit/>
+          </a:bodyPr>
+          <a:lstStyle/>
+          <a:p>
+            <a:pPr algn="l"/>
+            <a:r>
+              <a:rPr sz="900" b="1" i="0">
                 <a:solidFill>
                   <a:srgbClr val="1C1917"/>
                 </a:solidFill>
@@ -24321,23 +24321,23 @@
         </p:nvSpPr>
         <p:spPr>
           <a:xfrm>
-            <a:off x="8028431" y="1353312"/>
-            <a:ext cx="1097280" cy="182880"/>
-          </a:xfrm>
-          <a:prstGeom prst="rect">
-            <a:avLst/>
-          </a:prstGeom>
-          <a:noFill/>
-        </p:spPr>
-        <p:txBody>
-          <a:bodyPr wrap="square">
-            <a:noAutofit/>
-          </a:bodyPr>
-          <a:lstStyle/>
-          <a:p>
-            <a:pPr algn="l"/>
-            <a:r>
-              <a:rPr sz="750" b="1" i="0">
+            <a:off x="6254496" y="1444752"/>
+            <a:ext cx="2478024" cy="182880"/>
+          </a:xfrm>
+          <a:prstGeom prst="rect">
+            <a:avLst/>
+          </a:prstGeom>
+          <a:noFill/>
+        </p:spPr>
+        <p:txBody>
+          <a:bodyPr wrap="square">
+            <a:noAutofit/>
+          </a:bodyPr>
+          <a:lstStyle/>
+          <a:p>
+            <a:pPr algn="l"/>
+            <a:r>
+              <a:rPr sz="700" b="1" i="0">
                 <a:solidFill>
                   <a:srgbClr val="C8102E"/>
                 </a:solidFill>
@@ -24356,8 +24356,8 @@
         </p:nvSpPr>
         <p:spPr>
           <a:xfrm>
-            <a:off x="8028431" y="1527048"/>
-            <a:ext cx="3291840" cy="713232"/>
+            <a:off x="6254496" y="1627632"/>
+            <a:ext cx="2441448" cy="603504"/>
           </a:xfrm>
           <a:prstGeom prst="rect">
             <a:avLst/>
@@ -24372,11 +24372,11 @@
           <a:p>
             <a:pPr>
               <a:spcAft>
-                <a:spcPts val="300"/>
+                <a:spcPts val="200"/>
               </a:spcAft>
             </a:pPr>
             <a:r>
-              <a:rPr sz="800">
+              <a:rPr sz="700">
                 <a:solidFill>
                   <a:srgbClr val="78716C"/>
                 </a:solidFill>
@@ -24395,8 +24395,8 @@
         </p:nvSpPr>
         <p:spPr>
           <a:xfrm>
-            <a:off x="384048" y="2432304"/>
-            <a:ext cx="3566160" cy="1261872"/>
+            <a:off x="8970264" y="1024128"/>
+            <a:ext cx="2697480" cy="1261872"/>
           </a:xfrm>
           <a:prstGeom prst="rect">
             <a:avLst/>
@@ -24440,7 +24440,7 @@
         </p:nvSpPr>
         <p:spPr>
           <a:xfrm>
-            <a:off x="384048" y="2432304"/>
+            <a:off x="8970264" y="1024128"/>
             <a:ext cx="50292" cy="1261872"/>
           </a:xfrm>
           <a:prstGeom prst="rect">
@@ -24483,23 +24483,23 @@
         </p:nvSpPr>
         <p:spPr>
           <a:xfrm>
-            <a:off x="548640" y="2523744"/>
-            <a:ext cx="3310128" cy="256032"/>
-          </a:xfrm>
-          <a:prstGeom prst="rect">
-            <a:avLst/>
-          </a:prstGeom>
-          <a:noFill/>
-        </p:spPr>
-        <p:txBody>
-          <a:bodyPr wrap="square">
-            <a:noAutofit/>
-          </a:bodyPr>
-          <a:lstStyle/>
-          <a:p>
-            <a:pPr algn="l"/>
-            <a:r>
-              <a:rPr sz="950" b="1" i="0">
+            <a:off x="9116568" y="1115568"/>
+            <a:ext cx="2478024" cy="365760"/>
+          </a:xfrm>
+          <a:prstGeom prst="rect">
+            <a:avLst/>
+          </a:prstGeom>
+          <a:noFill/>
+        </p:spPr>
+        <p:txBody>
+          <a:bodyPr wrap="square">
+            <a:noAutofit/>
+          </a:bodyPr>
+          <a:lstStyle/>
+          <a:p>
+            <a:pPr algn="l"/>
+            <a:r>
+              <a:rPr sz="900" b="1" i="0">
                 <a:solidFill>
                   <a:srgbClr val="1C1917"/>
                 </a:solidFill>
@@ -24518,23 +24518,23 @@
         </p:nvSpPr>
         <p:spPr>
           <a:xfrm>
-            <a:off x="548640" y="2761488"/>
-            <a:ext cx="1097280" cy="182880"/>
-          </a:xfrm>
-          <a:prstGeom prst="rect">
-            <a:avLst/>
-          </a:prstGeom>
-          <a:noFill/>
-        </p:spPr>
-        <p:txBody>
-          <a:bodyPr wrap="square">
-            <a:noAutofit/>
-          </a:bodyPr>
-          <a:lstStyle/>
-          <a:p>
-            <a:pPr algn="l"/>
-            <a:r>
-              <a:rPr sz="750" b="1" i="0">
+            <a:off x="9116568" y="1444752"/>
+            <a:ext cx="2478024" cy="182880"/>
+          </a:xfrm>
+          <a:prstGeom prst="rect">
+            <a:avLst/>
+          </a:prstGeom>
+          <a:noFill/>
+        </p:spPr>
+        <p:txBody>
+          <a:bodyPr wrap="square">
+            <a:noAutofit/>
+          </a:bodyPr>
+          <a:lstStyle/>
+          <a:p>
+            <a:pPr algn="l"/>
+            <a:r>
+              <a:rPr sz="700" b="1" i="0">
                 <a:solidFill>
                   <a:srgbClr val="C8102E"/>
                 </a:solidFill>
@@ -24553,8 +24553,8 @@
         </p:nvSpPr>
         <p:spPr>
           <a:xfrm>
-            <a:off x="548640" y="2935224"/>
-            <a:ext cx="3291840" cy="713232"/>
+            <a:off x="9116568" y="1627632"/>
+            <a:ext cx="2441448" cy="603504"/>
           </a:xfrm>
           <a:prstGeom prst="rect">
             <a:avLst/>
@@ -24569,11 +24569,11 @@
           <a:p>
             <a:pPr>
               <a:spcAft>
-                <a:spcPts val="300"/>
+                <a:spcPts val="200"/>
               </a:spcAft>
             </a:pPr>
             <a:r>
-              <a:rPr sz="800">
+              <a:rPr sz="700">
                 <a:solidFill>
                   <a:srgbClr val="78716C"/>
                 </a:solidFill>
@@ -24592,8 +24592,8 @@
         </p:nvSpPr>
         <p:spPr>
           <a:xfrm>
-            <a:off x="4123944" y="2432304"/>
-            <a:ext cx="3566160" cy="1261872"/>
+            <a:off x="384048" y="2432304"/>
+            <a:ext cx="2697480" cy="1261872"/>
           </a:xfrm>
           <a:prstGeom prst="rect">
             <a:avLst/>
@@ -24637,7 +24637,7 @@
         </p:nvSpPr>
         <p:spPr>
           <a:xfrm>
-            <a:off x="4123944" y="2432304"/>
+            <a:off x="384048" y="2432304"/>
             <a:ext cx="50292" cy="1261872"/>
           </a:xfrm>
           <a:prstGeom prst="rect">
@@ -24680,23 +24680,23 @@
         </p:nvSpPr>
         <p:spPr>
           <a:xfrm>
-            <a:off x="4288536" y="2523744"/>
-            <a:ext cx="3310128" cy="256032"/>
-          </a:xfrm>
-          <a:prstGeom prst="rect">
-            <a:avLst/>
-          </a:prstGeom>
-          <a:noFill/>
-        </p:spPr>
-        <p:txBody>
-          <a:bodyPr wrap="square">
-            <a:noAutofit/>
-          </a:bodyPr>
-          <a:lstStyle/>
-          <a:p>
-            <a:pPr algn="l"/>
-            <a:r>
-              <a:rPr sz="950" b="1" i="0">
+            <a:off x="530352" y="2523744"/>
+            <a:ext cx="2478024" cy="365760"/>
+          </a:xfrm>
+          <a:prstGeom prst="rect">
+            <a:avLst/>
+          </a:prstGeom>
+          <a:noFill/>
+        </p:spPr>
+        <p:txBody>
+          <a:bodyPr wrap="square">
+            <a:noAutofit/>
+          </a:bodyPr>
+          <a:lstStyle/>
+          <a:p>
+            <a:pPr algn="l"/>
+            <a:r>
+              <a:rPr sz="900" b="1" i="0">
                 <a:solidFill>
                   <a:srgbClr val="1C1917"/>
                 </a:solidFill>
@@ -24715,23 +24715,23 @@
         </p:nvSpPr>
         <p:spPr>
           <a:xfrm>
-            <a:off x="4288536" y="2761488"/>
-            <a:ext cx="1097280" cy="182880"/>
-          </a:xfrm>
-          <a:prstGeom prst="rect">
-            <a:avLst/>
-          </a:prstGeom>
-          <a:noFill/>
-        </p:spPr>
-        <p:txBody>
-          <a:bodyPr wrap="square">
-            <a:noAutofit/>
-          </a:bodyPr>
-          <a:lstStyle/>
-          <a:p>
-            <a:pPr algn="l"/>
-            <a:r>
-              <a:rPr sz="750" b="1" i="0">
+            <a:off x="530352" y="2852928"/>
+            <a:ext cx="2478024" cy="182880"/>
+          </a:xfrm>
+          <a:prstGeom prst="rect">
+            <a:avLst/>
+          </a:prstGeom>
+          <a:noFill/>
+        </p:spPr>
+        <p:txBody>
+          <a:bodyPr wrap="square">
+            <a:noAutofit/>
+          </a:bodyPr>
+          <a:lstStyle/>
+          <a:p>
+            <a:pPr algn="l"/>
+            <a:r>
+              <a:rPr sz="700" b="1" i="0">
                 <a:solidFill>
                   <a:srgbClr val="C8102E"/>
                 </a:solidFill>
@@ -24750,8 +24750,8 @@
         </p:nvSpPr>
         <p:spPr>
           <a:xfrm>
-            <a:off x="4288536" y="2935224"/>
-            <a:ext cx="3291840" cy="713232"/>
+            <a:off x="530352" y="3035808"/>
+            <a:ext cx="2441448" cy="603504"/>
           </a:xfrm>
           <a:prstGeom prst="rect">
             <a:avLst/>
@@ -24766,11 +24766,11 @@
           <a:p>
             <a:pPr>
               <a:spcAft>
-                <a:spcPts val="300"/>
+                <a:spcPts val="200"/>
               </a:spcAft>
             </a:pPr>
             <a:r>
-              <a:rPr sz="800">
+              <a:rPr sz="700">
                 <a:solidFill>
                   <a:srgbClr val="78716C"/>
                 </a:solidFill>
@@ -24789,8 +24789,8 @@
         </p:nvSpPr>
         <p:spPr>
           <a:xfrm>
-            <a:off x="7863840" y="2432304"/>
-            <a:ext cx="3566160" cy="1261872"/>
+            <a:off x="3246120" y="2432304"/>
+            <a:ext cx="2697480" cy="1261872"/>
           </a:xfrm>
           <a:prstGeom prst="rect">
             <a:avLst/>
@@ -24834,7 +24834,7 @@
         </p:nvSpPr>
         <p:spPr>
           <a:xfrm>
-            <a:off x="7863840" y="2432304"/>
+            <a:off x="3246120" y="2432304"/>
             <a:ext cx="50292" cy="1261872"/>
           </a:xfrm>
           <a:prstGeom prst="rect">
@@ -24877,23 +24877,23 @@
         </p:nvSpPr>
         <p:spPr>
           <a:xfrm>
-            <a:off x="8028431" y="2523744"/>
-            <a:ext cx="3310128" cy="256032"/>
-          </a:xfrm>
-          <a:prstGeom prst="rect">
-            <a:avLst/>
-          </a:prstGeom>
-          <a:noFill/>
-        </p:spPr>
-        <p:txBody>
-          <a:bodyPr wrap="square">
-            <a:noAutofit/>
-          </a:bodyPr>
-          <a:lstStyle/>
-          <a:p>
-            <a:pPr algn="l"/>
-            <a:r>
-              <a:rPr sz="950" b="1" i="0">
+            <a:off x="3392424" y="2523744"/>
+            <a:ext cx="2478024" cy="365760"/>
+          </a:xfrm>
+          <a:prstGeom prst="rect">
+            <a:avLst/>
+          </a:prstGeom>
+          <a:noFill/>
+        </p:spPr>
+        <p:txBody>
+          <a:bodyPr wrap="square">
+            <a:noAutofit/>
+          </a:bodyPr>
+          <a:lstStyle/>
+          <a:p>
+            <a:pPr algn="l"/>
+            <a:r>
+              <a:rPr sz="900" b="1" i="0">
                 <a:solidFill>
                   <a:srgbClr val="1C1917"/>
                 </a:solidFill>
@@ -24912,23 +24912,23 @@
         </p:nvSpPr>
         <p:spPr>
           <a:xfrm>
-            <a:off x="8028431" y="2761488"/>
-            <a:ext cx="1097280" cy="182880"/>
-          </a:xfrm>
-          <a:prstGeom prst="rect">
-            <a:avLst/>
-          </a:prstGeom>
-          <a:noFill/>
-        </p:spPr>
-        <p:txBody>
-          <a:bodyPr wrap="square">
-            <a:noAutofit/>
-          </a:bodyPr>
-          <a:lstStyle/>
-          <a:p>
-            <a:pPr algn="l"/>
-            <a:r>
-              <a:rPr sz="750" b="1" i="0">
+            <a:off x="3392424" y="2852928"/>
+            <a:ext cx="2478024" cy="182880"/>
+          </a:xfrm>
+          <a:prstGeom prst="rect">
+            <a:avLst/>
+          </a:prstGeom>
+          <a:noFill/>
+        </p:spPr>
+        <p:txBody>
+          <a:bodyPr wrap="square">
+            <a:noAutofit/>
+          </a:bodyPr>
+          <a:lstStyle/>
+          <a:p>
+            <a:pPr algn="l"/>
+            <a:r>
+              <a:rPr sz="700" b="1" i="0">
                 <a:solidFill>
                   <a:srgbClr val="C8102E"/>
                 </a:solidFill>
@@ -24947,8 +24947,8 @@
         </p:nvSpPr>
         <p:spPr>
           <a:xfrm>
-            <a:off x="8028431" y="2935224"/>
-            <a:ext cx="3291840" cy="713232"/>
+            <a:off x="3392424" y="3035808"/>
+            <a:ext cx="2441448" cy="603504"/>
           </a:xfrm>
           <a:prstGeom prst="rect">
             <a:avLst/>
@@ -24963,11 +24963,11 @@
           <a:p>
             <a:pPr>
               <a:spcAft>
-                <a:spcPts val="300"/>
+                <a:spcPts val="200"/>
               </a:spcAft>
             </a:pPr>
             <a:r>
-              <a:rPr sz="800">
+              <a:rPr sz="700">
                 <a:solidFill>
                   <a:srgbClr val="78716C"/>
                 </a:solidFill>
@@ -24986,8 +24986,8 @@
         </p:nvSpPr>
         <p:spPr>
           <a:xfrm>
-            <a:off x="384048" y="3840479"/>
-            <a:ext cx="3566160" cy="1261872"/>
+            <a:off x="6108192" y="2432304"/>
+            <a:ext cx="2697480" cy="1261872"/>
           </a:xfrm>
           <a:prstGeom prst="rect">
             <a:avLst/>
@@ -25031,7 +25031,7 @@
         </p:nvSpPr>
         <p:spPr>
           <a:xfrm>
-            <a:off x="384048" y="3840479"/>
+            <a:off x="6108192" y="2432304"/>
             <a:ext cx="50292" cy="1261872"/>
           </a:xfrm>
           <a:prstGeom prst="rect">
@@ -25074,23 +25074,23 @@
         </p:nvSpPr>
         <p:spPr>
           <a:xfrm>
-            <a:off x="548640" y="3931919"/>
-            <a:ext cx="3310128" cy="256032"/>
-          </a:xfrm>
-          <a:prstGeom prst="rect">
-            <a:avLst/>
-          </a:prstGeom>
-          <a:noFill/>
-        </p:spPr>
-        <p:txBody>
-          <a:bodyPr wrap="square">
-            <a:noAutofit/>
-          </a:bodyPr>
-          <a:lstStyle/>
-          <a:p>
-            <a:pPr algn="l"/>
-            <a:r>
-              <a:rPr sz="950" b="1" i="0">
+            <a:off x="6254496" y="2523744"/>
+            <a:ext cx="2478024" cy="365760"/>
+          </a:xfrm>
+          <a:prstGeom prst="rect">
+            <a:avLst/>
+          </a:prstGeom>
+          <a:noFill/>
+        </p:spPr>
+        <p:txBody>
+          <a:bodyPr wrap="square">
+            <a:noAutofit/>
+          </a:bodyPr>
+          <a:lstStyle/>
+          <a:p>
+            <a:pPr algn="l"/>
+            <a:r>
+              <a:rPr sz="900" b="1" i="0">
                 <a:solidFill>
                   <a:srgbClr val="1C1917"/>
                 </a:solidFill>
@@ -25109,23 +25109,23 @@
         </p:nvSpPr>
         <p:spPr>
           <a:xfrm>
-            <a:off x="548640" y="4169663"/>
-            <a:ext cx="1097280" cy="182880"/>
-          </a:xfrm>
-          <a:prstGeom prst="rect">
-            <a:avLst/>
-          </a:prstGeom>
-          <a:noFill/>
-        </p:spPr>
-        <p:txBody>
-          <a:bodyPr wrap="square">
-            <a:noAutofit/>
-          </a:bodyPr>
-          <a:lstStyle/>
-          <a:p>
-            <a:pPr algn="l"/>
-            <a:r>
-              <a:rPr sz="750" b="1" i="0">
+            <a:off x="6254496" y="2852928"/>
+            <a:ext cx="2478024" cy="182880"/>
+          </a:xfrm>
+          <a:prstGeom prst="rect">
+            <a:avLst/>
+          </a:prstGeom>
+          <a:noFill/>
+        </p:spPr>
+        <p:txBody>
+          <a:bodyPr wrap="square">
+            <a:noAutofit/>
+          </a:bodyPr>
+          <a:lstStyle/>
+          <a:p>
+            <a:pPr algn="l"/>
+            <a:r>
+              <a:rPr sz="700" b="1" i="0">
                 <a:solidFill>
                   <a:srgbClr val="C8102E"/>
                 </a:solidFill>
@@ -25144,8 +25144,8 @@
         </p:nvSpPr>
         <p:spPr>
           <a:xfrm>
-            <a:off x="548640" y="4343399"/>
-            <a:ext cx="3291840" cy="713232"/>
+            <a:off x="6254496" y="3035808"/>
+            <a:ext cx="2441448" cy="603504"/>
           </a:xfrm>
           <a:prstGeom prst="rect">
             <a:avLst/>
@@ -25160,11 +25160,11 @@
           <a:p>
             <a:pPr>
               <a:spcAft>
-                <a:spcPts val="300"/>
+                <a:spcPts val="200"/>
               </a:spcAft>
             </a:pPr>
             <a:r>
-              <a:rPr sz="800">
+              <a:rPr sz="700">
                 <a:solidFill>
                   <a:srgbClr val="78716C"/>
                 </a:solidFill>
@@ -25183,8 +25183,8 @@
         </p:nvSpPr>
         <p:spPr>
           <a:xfrm>
-            <a:off x="4123944" y="3840479"/>
-            <a:ext cx="3566160" cy="1261872"/>
+            <a:off x="8970264" y="2432304"/>
+            <a:ext cx="2697480" cy="1261872"/>
           </a:xfrm>
           <a:prstGeom prst="rect">
             <a:avLst/>
@@ -25228,7 +25228,7 @@
         </p:nvSpPr>
         <p:spPr>
           <a:xfrm>
-            <a:off x="4123944" y="3840479"/>
+            <a:off x="8970264" y="2432304"/>
             <a:ext cx="50292" cy="1261872"/>
           </a:xfrm>
           <a:prstGeom prst="rect">
@@ -25271,23 +25271,23 @@
         </p:nvSpPr>
         <p:spPr>
           <a:xfrm>
-            <a:off x="4288536" y="3931919"/>
-            <a:ext cx="3310128" cy="256032"/>
-          </a:xfrm>
-          <a:prstGeom prst="rect">
-            <a:avLst/>
-          </a:prstGeom>
-          <a:noFill/>
-        </p:spPr>
-        <p:txBody>
-          <a:bodyPr wrap="square">
-            <a:noAutofit/>
-          </a:bodyPr>
-          <a:lstStyle/>
-          <a:p>
-            <a:pPr algn="l"/>
-            <a:r>
-              <a:rPr sz="950" b="1" i="0">
+            <a:off x="9116568" y="2523744"/>
+            <a:ext cx="2478024" cy="365760"/>
+          </a:xfrm>
+          <a:prstGeom prst="rect">
+            <a:avLst/>
+          </a:prstGeom>
+          <a:noFill/>
+        </p:spPr>
+        <p:txBody>
+          <a:bodyPr wrap="square">
+            <a:noAutofit/>
+          </a:bodyPr>
+          <a:lstStyle/>
+          <a:p>
+            <a:pPr algn="l"/>
+            <a:r>
+              <a:rPr sz="900" b="1" i="0">
                 <a:solidFill>
                   <a:srgbClr val="1C1917"/>
                 </a:solidFill>
@@ -25306,23 +25306,23 @@
         </p:nvSpPr>
         <p:spPr>
           <a:xfrm>
-            <a:off x="4288536" y="4169663"/>
-            <a:ext cx="1097280" cy="182880"/>
-          </a:xfrm>
-          <a:prstGeom prst="rect">
-            <a:avLst/>
-          </a:prstGeom>
-          <a:noFill/>
-        </p:spPr>
-        <p:txBody>
-          <a:bodyPr wrap="square">
-            <a:noAutofit/>
-          </a:bodyPr>
-          <a:lstStyle/>
-          <a:p>
-            <a:pPr algn="l"/>
-            <a:r>
-              <a:rPr sz="750" b="1" i="0">
+            <a:off x="9116568" y="2852928"/>
+            <a:ext cx="2478024" cy="182880"/>
+          </a:xfrm>
+          <a:prstGeom prst="rect">
+            <a:avLst/>
+          </a:prstGeom>
+          <a:noFill/>
+        </p:spPr>
+        <p:txBody>
+          <a:bodyPr wrap="square">
+            <a:noAutofit/>
+          </a:bodyPr>
+          <a:lstStyle/>
+          <a:p>
+            <a:pPr algn="l"/>
+            <a:r>
+              <a:rPr sz="700" b="1" i="0">
                 <a:solidFill>
                   <a:srgbClr val="C8102E"/>
                 </a:solidFill>
@@ -25341,8 +25341,8 @@
         </p:nvSpPr>
         <p:spPr>
           <a:xfrm>
-            <a:off x="4288536" y="4343399"/>
-            <a:ext cx="3291840" cy="713232"/>
+            <a:off x="9116568" y="3035808"/>
+            <a:ext cx="2441448" cy="603504"/>
           </a:xfrm>
           <a:prstGeom prst="rect">
             <a:avLst/>
@@ -25357,11 +25357,11 @@
           <a:p>
             <a:pPr>
               <a:spcAft>
-                <a:spcPts val="300"/>
+                <a:spcPts val="200"/>
               </a:spcAft>
             </a:pPr>
             <a:r>
-              <a:rPr sz="800">
+              <a:rPr sz="700">
                 <a:solidFill>
                   <a:srgbClr val="78716C"/>
                 </a:solidFill>
@@ -25380,8 +25380,8 @@
         </p:nvSpPr>
         <p:spPr>
           <a:xfrm>
-            <a:off x="7863840" y="3840479"/>
-            <a:ext cx="3566160" cy="1261872"/>
+            <a:off x="384048" y="3840479"/>
+            <a:ext cx="2697480" cy="1261872"/>
           </a:xfrm>
           <a:prstGeom prst="rect">
             <a:avLst/>
@@ -25425,7 +25425,7 @@
         </p:nvSpPr>
         <p:spPr>
           <a:xfrm>
-            <a:off x="7863840" y="3840479"/>
+            <a:off x="384048" y="3840479"/>
             <a:ext cx="50292" cy="1261872"/>
           </a:xfrm>
           <a:prstGeom prst="rect">
@@ -25468,23 +25468,23 @@
         </p:nvSpPr>
         <p:spPr>
           <a:xfrm>
-            <a:off x="8028431" y="3931919"/>
-            <a:ext cx="3310128" cy="256032"/>
-          </a:xfrm>
-          <a:prstGeom prst="rect">
-            <a:avLst/>
-          </a:prstGeom>
-          <a:noFill/>
-        </p:spPr>
-        <p:txBody>
-          <a:bodyPr wrap="square">
-            <a:noAutofit/>
-          </a:bodyPr>
-          <a:lstStyle/>
-          <a:p>
-            <a:pPr algn="l"/>
-            <a:r>
-              <a:rPr sz="950" b="1" i="0">
+            <a:off x="530352" y="3931919"/>
+            <a:ext cx="2478024" cy="365760"/>
+          </a:xfrm>
+          <a:prstGeom prst="rect">
+            <a:avLst/>
+          </a:prstGeom>
+          <a:noFill/>
+        </p:spPr>
+        <p:txBody>
+          <a:bodyPr wrap="square">
+            <a:noAutofit/>
+          </a:bodyPr>
+          <a:lstStyle/>
+          <a:p>
+            <a:pPr algn="l"/>
+            <a:r>
+              <a:rPr sz="900" b="1" i="0">
                 <a:solidFill>
                   <a:srgbClr val="1C1917"/>
                 </a:solidFill>
@@ -25503,23 +25503,23 @@
         </p:nvSpPr>
         <p:spPr>
           <a:xfrm>
-            <a:off x="8028431" y="4169663"/>
-            <a:ext cx="1097280" cy="182880"/>
-          </a:xfrm>
-          <a:prstGeom prst="rect">
-            <a:avLst/>
-          </a:prstGeom>
-          <a:noFill/>
-        </p:spPr>
-        <p:txBody>
-          <a:bodyPr wrap="square">
-            <a:noAutofit/>
-          </a:bodyPr>
-          <a:lstStyle/>
-          <a:p>
-            <a:pPr algn="l"/>
-            <a:r>
-              <a:rPr sz="750" b="1" i="0">
+            <a:off x="530352" y="4261103"/>
+            <a:ext cx="2478024" cy="182880"/>
+          </a:xfrm>
+          <a:prstGeom prst="rect">
+            <a:avLst/>
+          </a:prstGeom>
+          <a:noFill/>
+        </p:spPr>
+        <p:txBody>
+          <a:bodyPr wrap="square">
+            <a:noAutofit/>
+          </a:bodyPr>
+          <a:lstStyle/>
+          <a:p>
+            <a:pPr algn="l"/>
+            <a:r>
+              <a:rPr sz="700" b="1" i="0">
                 <a:solidFill>
                   <a:srgbClr val="C8102E"/>
                 </a:solidFill>
@@ -25538,8 +25538,8 @@
         </p:nvSpPr>
         <p:spPr>
           <a:xfrm>
-            <a:off x="8028431" y="4343399"/>
-            <a:ext cx="3291840" cy="713232"/>
+            <a:off x="530352" y="4443983"/>
+            <a:ext cx="2441448" cy="603504"/>
           </a:xfrm>
           <a:prstGeom prst="rect">
             <a:avLst/>
@@ -25554,11 +25554,11 @@
           <a:p>
             <a:pPr>
               <a:spcAft>
-                <a:spcPts val="300"/>
+                <a:spcPts val="200"/>
               </a:spcAft>
             </a:pPr>
             <a:r>
-              <a:rPr sz="800">
+              <a:rPr sz="700">
                 <a:solidFill>
                   <a:srgbClr val="78716C"/>
                 </a:solidFill>
@@ -25577,8 +25577,8 @@
         </p:nvSpPr>
         <p:spPr>
           <a:xfrm>
-            <a:off x="384048" y="5248655"/>
-            <a:ext cx="3566160" cy="1261872"/>
+            <a:off x="3246120" y="3840479"/>
+            <a:ext cx="2697480" cy="1261872"/>
           </a:xfrm>
           <a:prstGeom prst="rect">
             <a:avLst/>
@@ -25622,7 +25622,7 @@
         </p:nvSpPr>
         <p:spPr>
           <a:xfrm>
-            <a:off x="384048" y="5248655"/>
+            <a:off x="3246120" y="3840479"/>
             <a:ext cx="50292" cy="1261872"/>
           </a:xfrm>
           <a:prstGeom prst="rect">
@@ -25665,23 +25665,23 @@
         </p:nvSpPr>
         <p:spPr>
           <a:xfrm>
-            <a:off x="548640" y="5340095"/>
-            <a:ext cx="3310128" cy="256032"/>
-          </a:xfrm>
-          <a:prstGeom prst="rect">
-            <a:avLst/>
-          </a:prstGeom>
-          <a:noFill/>
-        </p:spPr>
-        <p:txBody>
-          <a:bodyPr wrap="square">
-            <a:noAutofit/>
-          </a:bodyPr>
-          <a:lstStyle/>
-          <a:p>
-            <a:pPr algn="l"/>
-            <a:r>
-              <a:rPr sz="950" b="1" i="0">
+            <a:off x="3392424" y="3931919"/>
+            <a:ext cx="2478024" cy="365760"/>
+          </a:xfrm>
+          <a:prstGeom prst="rect">
+            <a:avLst/>
+          </a:prstGeom>
+          <a:noFill/>
+        </p:spPr>
+        <p:txBody>
+          <a:bodyPr wrap="square">
+            <a:noAutofit/>
+          </a:bodyPr>
+          <a:lstStyle/>
+          <a:p>
+            <a:pPr algn="l"/>
+            <a:r>
+              <a:rPr sz="900" b="1" i="0">
                 <a:solidFill>
                   <a:srgbClr val="1C1917"/>
                 </a:solidFill>
@@ -25700,23 +25700,23 @@
         </p:nvSpPr>
         <p:spPr>
           <a:xfrm>
-            <a:off x="548640" y="5577840"/>
-            <a:ext cx="1097280" cy="182880"/>
-          </a:xfrm>
-          <a:prstGeom prst="rect">
-            <a:avLst/>
-          </a:prstGeom>
-          <a:noFill/>
-        </p:spPr>
-        <p:txBody>
-          <a:bodyPr wrap="square">
-            <a:noAutofit/>
-          </a:bodyPr>
-          <a:lstStyle/>
-          <a:p>
-            <a:pPr algn="l"/>
-            <a:r>
-              <a:rPr sz="750" b="1" i="0">
+            <a:off x="3392424" y="4261103"/>
+            <a:ext cx="2478024" cy="182880"/>
+          </a:xfrm>
+          <a:prstGeom prst="rect">
+            <a:avLst/>
+          </a:prstGeom>
+          <a:noFill/>
+        </p:spPr>
+        <p:txBody>
+          <a:bodyPr wrap="square">
+            <a:noAutofit/>
+          </a:bodyPr>
+          <a:lstStyle/>
+          <a:p>
+            <a:pPr algn="l"/>
+            <a:r>
+              <a:rPr sz="700" b="1" i="0">
                 <a:solidFill>
                   <a:srgbClr val="C8102E"/>
                 </a:solidFill>
@@ -25735,8 +25735,8 @@
         </p:nvSpPr>
         <p:spPr>
           <a:xfrm>
-            <a:off x="548640" y="5751575"/>
-            <a:ext cx="3291840" cy="713232"/>
+            <a:off x="3392424" y="4443983"/>
+            <a:ext cx="2441448" cy="603504"/>
           </a:xfrm>
           <a:prstGeom prst="rect">
             <a:avLst/>
@@ -25751,11 +25751,11 @@
           <a:p>
             <a:pPr>
               <a:spcAft>
-                <a:spcPts val="300"/>
+                <a:spcPts val="200"/>
               </a:spcAft>
             </a:pPr>
             <a:r>
-              <a:rPr sz="800">
+              <a:rPr sz="700">
                 <a:solidFill>
                   <a:srgbClr val="78716C"/>
                 </a:solidFill>
@@ -25774,8 +25774,8 @@
         </p:nvSpPr>
         <p:spPr>
           <a:xfrm>
-            <a:off x="4123944" y="5248655"/>
-            <a:ext cx="3566160" cy="1261872"/>
+            <a:off x="6108192" y="3840479"/>
+            <a:ext cx="2697480" cy="1261872"/>
           </a:xfrm>
           <a:prstGeom prst="rect">
             <a:avLst/>
@@ -25819,7 +25819,7 @@
         </p:nvSpPr>
         <p:spPr>
           <a:xfrm>
-            <a:off x="4123944" y="5248655"/>
+            <a:off x="6108192" y="3840479"/>
             <a:ext cx="50292" cy="1261872"/>
           </a:xfrm>
           <a:prstGeom prst="rect">
@@ -25862,23 +25862,23 @@
         </p:nvSpPr>
         <p:spPr>
           <a:xfrm>
-            <a:off x="4288536" y="5340095"/>
-            <a:ext cx="3310128" cy="256032"/>
-          </a:xfrm>
-          <a:prstGeom prst="rect">
-            <a:avLst/>
-          </a:prstGeom>
-          <a:noFill/>
-        </p:spPr>
-        <p:txBody>
-          <a:bodyPr wrap="square">
-            <a:noAutofit/>
-          </a:bodyPr>
-          <a:lstStyle/>
-          <a:p>
-            <a:pPr algn="l"/>
-            <a:r>
-              <a:rPr sz="950" b="1" i="0">
+            <a:off x="6254496" y="3931919"/>
+            <a:ext cx="2478024" cy="365760"/>
+          </a:xfrm>
+          <a:prstGeom prst="rect">
+            <a:avLst/>
+          </a:prstGeom>
+          <a:noFill/>
+        </p:spPr>
+        <p:txBody>
+          <a:bodyPr wrap="square">
+            <a:noAutofit/>
+          </a:bodyPr>
+          <a:lstStyle/>
+          <a:p>
+            <a:pPr algn="l"/>
+            <a:r>
+              <a:rPr sz="900" b="1" i="0">
                 <a:solidFill>
                   <a:srgbClr val="1C1917"/>
                 </a:solidFill>
@@ -25897,23 +25897,23 @@
         </p:nvSpPr>
         <p:spPr>
           <a:xfrm>
-            <a:off x="4288536" y="5577840"/>
-            <a:ext cx="1097280" cy="182880"/>
-          </a:xfrm>
-          <a:prstGeom prst="rect">
-            <a:avLst/>
-          </a:prstGeom>
-          <a:noFill/>
-        </p:spPr>
-        <p:txBody>
-          <a:bodyPr wrap="square">
-            <a:noAutofit/>
-          </a:bodyPr>
-          <a:lstStyle/>
-          <a:p>
-            <a:pPr algn="l"/>
-            <a:r>
-              <a:rPr sz="750" b="1" i="0">
+            <a:off x="6254496" y="4261103"/>
+            <a:ext cx="2478024" cy="182880"/>
+          </a:xfrm>
+          <a:prstGeom prst="rect">
+            <a:avLst/>
+          </a:prstGeom>
+          <a:noFill/>
+        </p:spPr>
+        <p:txBody>
+          <a:bodyPr wrap="square">
+            <a:noAutofit/>
+          </a:bodyPr>
+          <a:lstStyle/>
+          <a:p>
+            <a:pPr algn="l"/>
+            <a:r>
+              <a:rPr sz="700" b="1" i="0">
                 <a:solidFill>
                   <a:srgbClr val="C8102E"/>
                 </a:solidFill>
@@ -25932,8 +25932,8 @@
         </p:nvSpPr>
         <p:spPr>
           <a:xfrm>
-            <a:off x="4288536" y="5751575"/>
-            <a:ext cx="3291840" cy="713232"/>
+            <a:off x="6254496" y="4443983"/>
+            <a:ext cx="2441448" cy="603504"/>
           </a:xfrm>
           <a:prstGeom prst="rect">
             <a:avLst/>
@@ -25948,17 +25948,17 @@
           <a:p>
             <a:pPr>
               <a:spcAft>
-                <a:spcPts val="300"/>
+                <a:spcPts val="200"/>
               </a:spcAft>
             </a:pPr>
             <a:r>
-              <a:rPr sz="800">
+              <a:rPr sz="700">
                 <a:solidFill>
                   <a:srgbClr val="78716C"/>
                 </a:solidFill>
                 <a:latin typeface="Calibri"/>
               </a:rPr>
-              <a:t>Amount + currency + IBAN + beneficiary → live rate + FCA fee disclosure (Consumer Rights Act 2015) → biometric confirm. 5 currencies: EUR/USD/CHF/AUD/CAD. MLR 2017 screening flag ≥£50k. SWIFT ref to audit trail.</a:t>
+              <a:t>Amount + currency + IBAN + beneficiary → live rate + FCA fee disclosure → biometric confirm. 5 currencies (EUR/USD/CHF/AUD/CAD). MLR 2017 screening flag ≥£50k. SWIFT ref to audit trail.</a:t>
             </a:r>
           </a:p>
         </p:txBody>
@@ -25971,8 +25971,8 @@
         </p:nvSpPr>
         <p:spPr>
           <a:xfrm>
-            <a:off x="7863840" y="5248655"/>
-            <a:ext cx="3566160" cy="1261872"/>
+            <a:off x="8970264" y="3840479"/>
+            <a:ext cx="2697480" cy="1261872"/>
           </a:xfrm>
           <a:prstGeom prst="rect">
             <a:avLst/>
@@ -26016,7 +26016,7 @@
         </p:nvSpPr>
         <p:spPr>
           <a:xfrm>
-            <a:off x="7863840" y="5248655"/>
+            <a:off x="8970264" y="3840479"/>
             <a:ext cx="50292" cy="1261872"/>
           </a:xfrm>
           <a:prstGeom prst="rect">
@@ -26059,29 +26059,29 @@
         </p:nvSpPr>
         <p:spPr>
           <a:xfrm>
-            <a:off x="8028431" y="5340095"/>
-            <a:ext cx="3310128" cy="256032"/>
-          </a:xfrm>
-          <a:prstGeom prst="rect">
-            <a:avLst/>
-          </a:prstGeom>
-          <a:noFill/>
-        </p:spPr>
-        <p:txBody>
-          <a:bodyPr wrap="square">
-            <a:noAutofit/>
-          </a:bodyPr>
-          <a:lstStyle/>
-          <a:p>
-            <a:pPr algn="l"/>
-            <a:r>
-              <a:rPr sz="950" b="1" i="0">
+            <a:off x="9116568" y="3931919"/>
+            <a:ext cx="2478024" cy="365760"/>
+          </a:xfrm>
+          <a:prstGeom prst="rect">
+            <a:avLst/>
+          </a:prstGeom>
+          <a:noFill/>
+        </p:spPr>
+        <p:txBody>
+          <a:bodyPr wrap="square">
+            <a:noAutofit/>
+          </a:bodyPr>
+          <a:lstStyle/>
+          <a:p>
+            <a:pPr algn="l"/>
+            <a:r>
+              <a:rPr sz="900" b="1" i="0">
                 <a:solidFill>
                   <a:srgbClr val="1C1917"/>
                 </a:solidFill>
                 <a:latin typeface="Calibri"/>
               </a:rPr>
-              <a:t>Complaint Handling</a:t>
+              <a:t>Standing Orders &amp; Direct Debits</a:t>
             </a:r>
           </a:p>
         </p:txBody>
@@ -26094,29 +26094,29 @@
         </p:nvSpPr>
         <p:spPr>
           <a:xfrm>
-            <a:off x="8028431" y="5577840"/>
-            <a:ext cx="1097280" cy="182880"/>
-          </a:xfrm>
-          <a:prstGeom prst="rect">
-            <a:avLst/>
-          </a:prstGeom>
-          <a:noFill/>
-        </p:spPr>
-        <p:txBody>
-          <a:bodyPr wrap="square">
-            <a:noAutofit/>
-          </a:bodyPr>
-          <a:lstStyle/>
-          <a:p>
-            <a:pPr algn="l"/>
-            <a:r>
-              <a:rPr sz="750" b="1" i="0">
+            <a:off x="9116568" y="4261103"/>
+            <a:ext cx="2478024" cy="182880"/>
+          </a:xfrm>
+          <a:prstGeom prst="rect">
+            <a:avLst/>
+          </a:prstGeom>
+          <a:noFill/>
+        </p:spPr>
+        <p:txBody>
+          <a:bodyPr wrap="square">
+            <a:noAutofit/>
+          </a:bodyPr>
+          <a:lstStyle/>
+          <a:p>
+            <a:pPr algn="l"/>
+            <a:r>
+              <a:rPr sz="700" b="1" i="0">
                 <a:solidFill>
                   <a:srgbClr val="C8102E"/>
                 </a:solidFill>
                 <a:latin typeface="Calibri"/>
               </a:rPr>
-              <a:t>4 steps</a:t>
+              <a:t>up to 3 steps</a:t>
             </a:r>
           </a:p>
         </p:txBody>
@@ -26129,8 +26129,8 @@
         </p:nvSpPr>
         <p:spPr>
           <a:xfrm>
-            <a:off x="8028431" y="5751575"/>
-            <a:ext cx="3291840" cy="713232"/>
+            <a:off x="9116568" y="4443983"/>
+            <a:ext cx="2441448" cy="603504"/>
           </a:xfrm>
           <a:prstGeom prst="rect">
             <a:avLst/>
@@ -26145,17 +26145,17 @@
           <a:p>
             <a:pPr>
               <a:spcAft>
-                <a:spcPts val="300"/>
+                <a:spcPts val="200"/>
               </a:spcAft>
             </a:pPr>
             <a:r>
-              <a:rPr sz="800">
+              <a:rPr sz="700">
                 <a:solidFill>
                   <a:srgbClr val="78716C"/>
                 </a:solidFill>
                 <a:latin typeface="Calibri"/>
               </a:rPr>
-              <a:t>Intake → escalation triage → denial → case outcome. FCA DISP-compliant. Eligible complainant check (DISP 2.7), escalation flag selection, denial reason, optional goodwill gesture. Triggers from Home screen Log complaint tile.</a:t>
+              <a:t>Overview of active DDs (Guarantee-protected) and standing orders → set up a standing order (payee + CoP, amount, frequency, start date) or cancel a Direct Debit under the Direct Debit Guarantee.</a:t>
             </a:r>
           </a:p>
         </p:txBody>
@@ -26163,6 +26163,203 @@
       <p:sp>
         <p:nvSpPr>
           <p:cNvPr id="67" name="Rectangle 66"/>
+          <p:cNvSpPr/>
+          <p:nvPr/>
+        </p:nvSpPr>
+        <p:spPr>
+          <a:xfrm>
+            <a:off x="384048" y="5248655"/>
+            <a:ext cx="2697480" cy="1261872"/>
+          </a:xfrm>
+          <a:prstGeom prst="rect">
+            <a:avLst/>
+          </a:prstGeom>
+          <a:solidFill>
+            <a:srgbClr val="FFFFFF"/>
+          </a:solidFill>
+          <a:ln w="9525">
+            <a:solidFill>
+              <a:srgbClr val="E7E5E4"/>
+            </a:solidFill>
+          </a:ln>
+        </p:spPr>
+        <p:style>
+          <a:lnRef idx="1">
+            <a:schemeClr val="accent1"/>
+          </a:lnRef>
+          <a:fillRef idx="3">
+            <a:schemeClr val="accent1"/>
+          </a:fillRef>
+          <a:effectRef idx="2">
+            <a:schemeClr val="accent1"/>
+          </a:effectRef>
+          <a:fontRef idx="minor">
+            <a:schemeClr val="lt1"/>
+          </a:fontRef>
+        </p:style>
+        <p:txBody>
+          <a:bodyPr rtlCol="0" anchor="ctr"/>
+          <a:lstStyle/>
+          <a:p>
+            <a:pPr algn="ctr"/>
+          </a:p>
+        </p:txBody>
+      </p:sp>
+      <p:sp>
+        <p:nvSpPr>
+          <p:cNvPr id="68" name="Rectangle 67"/>
+          <p:cNvSpPr/>
+          <p:nvPr/>
+        </p:nvSpPr>
+        <p:spPr>
+          <a:xfrm>
+            <a:off x="384048" y="5248655"/>
+            <a:ext cx="50292" cy="1261872"/>
+          </a:xfrm>
+          <a:prstGeom prst="rect">
+            <a:avLst/>
+          </a:prstGeom>
+          <a:solidFill>
+            <a:srgbClr val="C8102E"/>
+          </a:solidFill>
+          <a:ln>
+            <a:noFill/>
+          </a:ln>
+        </p:spPr>
+        <p:style>
+          <a:lnRef idx="1">
+            <a:schemeClr val="accent1"/>
+          </a:lnRef>
+          <a:fillRef idx="3">
+            <a:schemeClr val="accent1"/>
+          </a:fillRef>
+          <a:effectRef idx="2">
+            <a:schemeClr val="accent1"/>
+          </a:effectRef>
+          <a:fontRef idx="minor">
+            <a:schemeClr val="lt1"/>
+          </a:fontRef>
+        </p:style>
+        <p:txBody>
+          <a:bodyPr rtlCol="0" anchor="ctr"/>
+          <a:lstStyle/>
+          <a:p>
+            <a:pPr algn="ctr"/>
+          </a:p>
+        </p:txBody>
+      </p:sp>
+      <p:sp>
+        <p:nvSpPr>
+          <p:cNvPr id="69" name="TextBox 68"/>
+          <p:cNvSpPr txBox="1"/>
+          <p:nvPr/>
+        </p:nvSpPr>
+        <p:spPr>
+          <a:xfrm>
+            <a:off x="530352" y="5340095"/>
+            <a:ext cx="2478024" cy="365760"/>
+          </a:xfrm>
+          <a:prstGeom prst="rect">
+            <a:avLst/>
+          </a:prstGeom>
+          <a:noFill/>
+        </p:spPr>
+        <p:txBody>
+          <a:bodyPr wrap="square">
+            <a:noAutofit/>
+          </a:bodyPr>
+          <a:lstStyle/>
+          <a:p>
+            <a:pPr algn="l"/>
+            <a:r>
+              <a:rPr sz="900" b="1" i="0">
+                <a:solidFill>
+                  <a:srgbClr val="1C1917"/>
+                </a:solidFill>
+                <a:latin typeface="Calibri"/>
+              </a:rPr>
+              <a:t>Complaint Handling</a:t>
+            </a:r>
+          </a:p>
+        </p:txBody>
+      </p:sp>
+      <p:sp>
+        <p:nvSpPr>
+          <p:cNvPr id="70" name="TextBox 69"/>
+          <p:cNvSpPr txBox="1"/>
+          <p:nvPr/>
+        </p:nvSpPr>
+        <p:spPr>
+          <a:xfrm>
+            <a:off x="530352" y="5669279"/>
+            <a:ext cx="2478024" cy="182880"/>
+          </a:xfrm>
+          <a:prstGeom prst="rect">
+            <a:avLst/>
+          </a:prstGeom>
+          <a:noFill/>
+        </p:spPr>
+        <p:txBody>
+          <a:bodyPr wrap="square">
+            <a:noAutofit/>
+          </a:bodyPr>
+          <a:lstStyle/>
+          <a:p>
+            <a:pPr algn="l"/>
+            <a:r>
+              <a:rPr sz="700" b="1" i="0">
+                <a:solidFill>
+                  <a:srgbClr val="C8102E"/>
+                </a:solidFill>
+                <a:latin typeface="Calibri"/>
+              </a:rPr>
+              <a:t>4 steps</a:t>
+            </a:r>
+          </a:p>
+        </p:txBody>
+      </p:sp>
+      <p:sp>
+        <p:nvSpPr>
+          <p:cNvPr id="71" name="TextBox 70"/>
+          <p:cNvSpPr txBox="1"/>
+          <p:nvPr/>
+        </p:nvSpPr>
+        <p:spPr>
+          <a:xfrm>
+            <a:off x="530352" y="5852159"/>
+            <a:ext cx="2441448" cy="603504"/>
+          </a:xfrm>
+          <a:prstGeom prst="rect">
+            <a:avLst/>
+          </a:prstGeom>
+          <a:noFill/>
+        </p:spPr>
+        <p:txBody>
+          <a:bodyPr wrap="square">
+            <a:noAutofit/>
+          </a:bodyPr>
+          <a:lstStyle/>
+          <a:p>
+            <a:pPr>
+              <a:spcAft>
+                <a:spcPts val="200"/>
+              </a:spcAft>
+            </a:pPr>
+            <a:r>
+              <a:rPr sz="700">
+                <a:solidFill>
+                  <a:srgbClr val="78716C"/>
+                </a:solidFill>
+                <a:latin typeface="Calibri"/>
+              </a:rPr>
+              <a:t>Intake → escalation triage → denial → case outcome. FCA DISP-compliant. Eligible-complainant check (DISP 2.7), escalation flags, denial reason, optional goodwill. From the Log complaint tile.</a:t>
+            </a:r>
+          </a:p>
+        </p:txBody>
+      </p:sp>
+      <p:sp>
+        <p:nvSpPr>
+          <p:cNvPr id="72" name="Rectangle 71"/>
           <p:cNvSpPr/>
           <p:nvPr/>
         </p:nvSpPr>
@@ -26205,7 +26402,7 @@
       </p:sp>
       <p:sp>
         <p:nvSpPr>
-          <p:cNvPr id="68" name="TextBox 67"/>
+          <p:cNvPr id="73" name="TextBox 72"/>
           <p:cNvSpPr txBox="1"/>
           <p:nvPr/>
         </p:nvSpPr>
@@ -26240,7 +26437,7 @@
       </p:sp>
       <p:sp>
         <p:nvSpPr>
-          <p:cNvPr id="69" name="TextBox 68"/>
+          <p:cNvPr id="74" name="TextBox 73"/>
           <p:cNvSpPr txBox="1"/>
           <p:nvPr/>
         </p:nvSpPr>
@@ -26275,7 +26472,7 @@
       </p:sp>
       <p:sp>
         <p:nvSpPr>
-          <p:cNvPr id="70" name="TextBox 69"/>
+          <p:cNvPr id="75" name="TextBox 74"/>
           <p:cNvSpPr txBox="1"/>
           <p:nvPr/>
         </p:nvSpPr>

--- a/Santander_Project_Record.pptx
+++ b/Santander_Project_Record.pptx
@@ -9965,7 +9965,7 @@
         <p:spPr>
           <a:xfrm>
             <a:off x="566928" y="6620256"/>
-            <a:ext cx="4937760" cy="274320"/>
+            <a:ext cx="4937760" cy="237744"/>
           </a:xfrm>
           <a:prstGeom prst="rect">
             <a:avLst/>

--- a/Santander_Project_Record.pptx
+++ b/Santander_Project_Record.pptx
@@ -3159,7 +3159,7 @@
             <a:avLst/>
           </a:prstGeom>
           <a:solidFill>
-            <a:srgbClr val="C8102E"/>
+            <a:srgbClr val="DA291C"/>
           </a:solidFill>
           <a:ln>
             <a:noFill/>
@@ -3202,7 +3202,7 @@
             <a:avLst/>
           </a:prstGeom>
           <a:solidFill>
-            <a:srgbClr val="C8102E"/>
+            <a:srgbClr val="DA291C"/>
           </a:solidFill>
           <a:ln>
             <a:noFill/>
@@ -3245,7 +3245,7 @@
             <a:avLst/>
           </a:prstGeom>
           <a:solidFill>
-            <a:srgbClr val="C8102E"/>
+            <a:srgbClr val="DA291C"/>
           </a:solidFill>
           <a:ln>
             <a:noFill/>
@@ -3323,7 +3323,7 @@
             <a:avLst/>
           </a:prstGeom>
           <a:solidFill>
-            <a:srgbClr val="C8102E"/>
+            <a:srgbClr val="DA291C"/>
           </a:solidFill>
           <a:ln>
             <a:noFill/>
@@ -3366,7 +3366,7 @@
             <a:avLst/>
           </a:prstGeom>
           <a:solidFill>
-            <a:srgbClr val="C8102E"/>
+            <a:srgbClr val="DA291C"/>
           </a:solidFill>
           <a:ln>
             <a:noFill/>
@@ -3514,7 +3514,7 @@
             <a:avLst/>
           </a:prstGeom>
           <a:solidFill>
-            <a:srgbClr val="C8102E"/>
+            <a:srgbClr val="DA291C"/>
           </a:solidFill>
           <a:ln>
             <a:noFill/>
@@ -3687,7 +3687,7 @@
             <a:avLst/>
           </a:prstGeom>
           <a:solidFill>
-            <a:srgbClr val="C8102E"/>
+            <a:srgbClr val="DA291C"/>
           </a:solidFill>
           <a:ln>
             <a:noFill/>
@@ -3843,7 +3843,7 @@
             <a:avLst/>
           </a:prstGeom>
           <a:solidFill>
-            <a:srgbClr val="C8102E"/>
+            <a:srgbClr val="DA291C"/>
           </a:solidFill>
           <a:ln>
             <a:noFill/>
@@ -3999,7 +3999,7 @@
             <a:avLst/>
           </a:prstGeom>
           <a:solidFill>
-            <a:srgbClr val="C8102E"/>
+            <a:srgbClr val="DA291C"/>
           </a:solidFill>
           <a:ln>
             <a:noFill/>
@@ -4155,7 +4155,7 @@
             <a:avLst/>
           </a:prstGeom>
           <a:solidFill>
-            <a:srgbClr val="C8102E"/>
+            <a:srgbClr val="DA291C"/>
           </a:solidFill>
           <a:ln>
             <a:noFill/>
@@ -4364,7 +4364,7 @@
             <a:avLst/>
           </a:prstGeom>
           <a:solidFill>
-            <a:srgbClr val="C8102E"/>
+            <a:srgbClr val="DA291C"/>
           </a:solidFill>
           <a:ln>
             <a:noFill/>
@@ -4520,7 +4520,7 @@
             <a:avLst/>
           </a:prstGeom>
           <a:solidFill>
-            <a:srgbClr val="C8102E"/>
+            <a:srgbClr val="DA291C"/>
           </a:solidFill>
           <a:ln>
             <a:noFill/>
@@ -4633,7 +4633,7 @@
             <a:avLst/>
           </a:prstGeom>
           <a:solidFill>
-            <a:srgbClr val="C8102E"/>
+            <a:srgbClr val="DA291C"/>
           </a:solidFill>
           <a:ln>
             <a:noFill/>
@@ -4746,7 +4746,7 @@
             <a:avLst/>
           </a:prstGeom>
           <a:solidFill>
-            <a:srgbClr val="C8102E"/>
+            <a:srgbClr val="DA291C"/>
           </a:solidFill>
           <a:ln>
             <a:noFill/>
@@ -4859,7 +4859,7 @@
             <a:avLst/>
           </a:prstGeom>
           <a:solidFill>
-            <a:srgbClr val="C8102E"/>
+            <a:srgbClr val="DA291C"/>
           </a:solidFill>
           <a:ln>
             <a:noFill/>
@@ -4972,7 +4972,7 @@
             <a:avLst/>
           </a:prstGeom>
           <a:solidFill>
-            <a:srgbClr val="C8102E"/>
+            <a:srgbClr val="DA291C"/>
           </a:solidFill>
           <a:ln>
             <a:noFill/>
@@ -5165,7 +5165,7 @@
             <a:avLst/>
           </a:prstGeom>
           <a:solidFill>
-            <a:srgbClr val="C8102E"/>
+            <a:srgbClr val="DA291C"/>
           </a:solidFill>
           <a:ln>
             <a:noFill/>
@@ -5358,7 +5358,7 @@
             <a:avLst/>
           </a:prstGeom>
           <a:solidFill>
-            <a:srgbClr val="C8102E"/>
+            <a:srgbClr val="DA291C"/>
           </a:solidFill>
           <a:ln>
             <a:noFill/>
@@ -5551,7 +5551,7 @@
             <a:avLst/>
           </a:prstGeom>
           <a:solidFill>
-            <a:srgbClr val="C8102E"/>
+            <a:srgbClr val="DA291C"/>
           </a:solidFill>
           <a:ln>
             <a:noFill/>
@@ -5744,7 +5744,7 @@
             <a:avLst/>
           </a:prstGeom>
           <a:solidFill>
-            <a:srgbClr val="C8102E"/>
+            <a:srgbClr val="DA291C"/>
           </a:solidFill>
           <a:ln>
             <a:noFill/>
@@ -7111,7 +7111,7 @@
             <a:avLst/>
           </a:prstGeom>
           <a:solidFill>
-            <a:srgbClr val="C8102E"/>
+            <a:srgbClr val="DA291C"/>
           </a:solidFill>
           <a:ln>
             <a:noFill/>
@@ -7312,7 +7312,7 @@
             <a:avLst/>
           </a:prstGeom>
           <a:solidFill>
-            <a:srgbClr val="C8102E"/>
+            <a:srgbClr val="DA291C"/>
           </a:solidFill>
           <a:ln>
             <a:noFill/>
@@ -7401,7 +7401,7 @@
             <a:r>
               <a:rPr sz="1100" b="0" i="0">
                 <a:solidFill>
-                  <a:srgbClr val="C8102E"/>
+                  <a:srgbClr val="DA291C"/>
                 </a:solidFill>
                 <a:latin typeface="Calibri"/>
               </a:rPr>
@@ -8160,7 +8160,7 @@
             <a:avLst/>
           </a:prstGeom>
           <a:solidFill>
-            <a:srgbClr val="C8102E"/>
+            <a:srgbClr val="DA291C"/>
           </a:solidFill>
           <a:ln>
             <a:noFill/>
@@ -8973,7 +8973,7 @@
             <a:avLst/>
           </a:prstGeom>
           <a:solidFill>
-            <a:srgbClr val="C8102E"/>
+            <a:srgbClr val="DA291C"/>
           </a:solidFill>
           <a:ln>
             <a:noFill/>
@@ -10131,7 +10131,7 @@
             <a:avLst/>
           </a:prstGeom>
           <a:solidFill>
-            <a:srgbClr val="C8102E"/>
+            <a:srgbClr val="DA291C"/>
           </a:solidFill>
           <a:ln>
             <a:noFill/>
@@ -10521,7 +10521,7 @@
             <a:avLst/>
           </a:prstGeom>
           <a:solidFill>
-            <a:srgbClr val="C8102E"/>
+            <a:srgbClr val="DA291C"/>
           </a:solidFill>
           <a:ln>
             <a:noFill/>
@@ -10722,7 +10722,7 @@
             <a:avLst/>
           </a:prstGeom>
           <a:solidFill>
-            <a:srgbClr val="C8102E"/>
+            <a:srgbClr val="DA291C"/>
           </a:solidFill>
           <a:ln>
             <a:noFill/>
@@ -10776,7 +10776,7 @@
             <a:r>
               <a:rPr sz="1000" b="1" i="0">
                 <a:solidFill>
-                  <a:srgbClr val="C8102E"/>
+                  <a:srgbClr val="DA291C"/>
                 </a:solidFill>
                 <a:latin typeface="Calibri"/>
               </a:rPr>
@@ -10932,7 +10932,7 @@
             <a:r>
               <a:rPr sz="750" b="1" i="0">
                 <a:solidFill>
-                  <a:srgbClr val="C8102E"/>
+                  <a:srgbClr val="DA291C"/>
                 </a:solidFill>
                 <a:latin typeface="Calibri"/>
               </a:rPr>
@@ -11045,7 +11045,7 @@
             <a:r>
               <a:rPr sz="750" b="1" i="0">
                 <a:solidFill>
-                  <a:srgbClr val="C8102E"/>
+                  <a:srgbClr val="DA291C"/>
                 </a:solidFill>
                 <a:latin typeface="Calibri"/>
               </a:rPr>
@@ -11158,7 +11158,7 @@
             <a:r>
               <a:rPr sz="750" b="1" i="0">
                 <a:solidFill>
-                  <a:srgbClr val="C8102E"/>
+                  <a:srgbClr val="DA291C"/>
                 </a:solidFill>
                 <a:latin typeface="Calibri"/>
               </a:rPr>
@@ -11271,7 +11271,7 @@
             <a:r>
               <a:rPr sz="750" b="1" i="0">
                 <a:solidFill>
-                  <a:srgbClr val="C8102E"/>
+                  <a:srgbClr val="DA291C"/>
                 </a:solidFill>
                 <a:latin typeface="Calibri"/>
               </a:rPr>
@@ -11384,7 +11384,7 @@
             <a:r>
               <a:rPr sz="750" b="1" i="0">
                 <a:solidFill>
-                  <a:srgbClr val="C8102E"/>
+                  <a:srgbClr val="DA291C"/>
                 </a:solidFill>
                 <a:latin typeface="Calibri"/>
               </a:rPr>
@@ -11497,7 +11497,7 @@
             <a:r>
               <a:rPr sz="750" b="1" i="0">
                 <a:solidFill>
-                  <a:srgbClr val="C8102E"/>
+                  <a:srgbClr val="DA291C"/>
                 </a:solidFill>
                 <a:latin typeface="Calibri"/>
               </a:rPr>
@@ -11610,7 +11610,7 @@
             <a:r>
               <a:rPr sz="750" b="1" i="0">
                 <a:solidFill>
-                  <a:srgbClr val="C8102E"/>
+                  <a:srgbClr val="DA291C"/>
                 </a:solidFill>
                 <a:latin typeface="Calibri"/>
               </a:rPr>
@@ -11723,7 +11723,7 @@
             <a:r>
               <a:rPr sz="750" b="1" i="0">
                 <a:solidFill>
-                  <a:srgbClr val="C8102E"/>
+                  <a:srgbClr val="DA291C"/>
                 </a:solidFill>
                 <a:latin typeface="Calibri"/>
               </a:rPr>
@@ -11836,7 +11836,7 @@
             <a:r>
               <a:rPr sz="750" b="1" i="0">
                 <a:solidFill>
-                  <a:srgbClr val="C8102E"/>
+                  <a:srgbClr val="DA291C"/>
                 </a:solidFill>
                 <a:latin typeface="Calibri"/>
               </a:rPr>
@@ -11949,7 +11949,7 @@
             <a:r>
               <a:rPr sz="750" b="1" i="0">
                 <a:solidFill>
-                  <a:srgbClr val="C8102E"/>
+                  <a:srgbClr val="DA291C"/>
                 </a:solidFill>
                 <a:latin typeface="Calibri"/>
               </a:rPr>
@@ -12062,7 +12062,7 @@
             <a:r>
               <a:rPr sz="750" b="1" i="0">
                 <a:solidFill>
-                  <a:srgbClr val="C8102E"/>
+                  <a:srgbClr val="DA291C"/>
                 </a:solidFill>
                 <a:latin typeface="Calibri"/>
               </a:rPr>
@@ -12175,7 +12175,7 @@
             <a:r>
               <a:rPr sz="750" b="1" i="0">
                 <a:solidFill>
-                  <a:srgbClr val="C8102E"/>
+                  <a:srgbClr val="DA291C"/>
                 </a:solidFill>
                 <a:latin typeface="Calibri"/>
               </a:rPr>
@@ -12288,7 +12288,7 @@
             <a:r>
               <a:rPr sz="750" b="1" i="0">
                 <a:solidFill>
-                  <a:srgbClr val="C8102E"/>
+                  <a:srgbClr val="DA291C"/>
                 </a:solidFill>
                 <a:latin typeface="Calibri"/>
               </a:rPr>
@@ -12401,7 +12401,7 @@
             <a:r>
               <a:rPr sz="750" b="1" i="0">
                 <a:solidFill>
-                  <a:srgbClr val="C8102E"/>
+                  <a:srgbClr val="DA291C"/>
                 </a:solidFill>
                 <a:latin typeface="Calibri"/>
               </a:rPr>
@@ -12514,7 +12514,7 @@
             <a:r>
               <a:rPr sz="750" b="1" i="0">
                 <a:solidFill>
-                  <a:srgbClr val="C8102E"/>
+                  <a:srgbClr val="DA291C"/>
                 </a:solidFill>
                 <a:latin typeface="Calibri"/>
               </a:rPr>
@@ -12627,7 +12627,7 @@
             <a:r>
               <a:rPr sz="750" b="1" i="0">
                 <a:solidFill>
-                  <a:srgbClr val="C8102E"/>
+                  <a:srgbClr val="DA291C"/>
                 </a:solidFill>
                 <a:latin typeface="Calibri"/>
               </a:rPr>
@@ -16044,7 +16044,7 @@
             <a:avLst/>
           </a:prstGeom>
           <a:solidFill>
-            <a:srgbClr val="C8102E"/>
+            <a:srgbClr val="DA291C"/>
           </a:solidFill>
           <a:ln>
             <a:noFill/>
@@ -16245,7 +16245,7 @@
             <a:avLst/>
           </a:prstGeom>
           <a:solidFill>
-            <a:srgbClr val="C8102E"/>
+            <a:srgbClr val="DA291C"/>
           </a:solidFill>
           <a:ln>
             <a:noFill/>
@@ -16299,7 +16299,7 @@
             <a:r>
               <a:rPr sz="1000" b="1" i="0">
                 <a:solidFill>
-                  <a:srgbClr val="C8102E"/>
+                  <a:srgbClr val="DA291C"/>
                 </a:solidFill>
                 <a:latin typeface="Calibri"/>
               </a:rPr>
@@ -17868,7 +17868,7 @@
             <a:avLst/>
           </a:prstGeom>
           <a:solidFill>
-            <a:srgbClr val="C8102E"/>
+            <a:srgbClr val="DA291C"/>
           </a:solidFill>
           <a:ln>
             <a:noFill/>
@@ -17981,7 +17981,7 @@
             <a:avLst/>
           </a:prstGeom>
           <a:solidFill>
-            <a:srgbClr val="C8102E"/>
+            <a:srgbClr val="DA291C"/>
           </a:solidFill>
           <a:ln>
             <a:noFill/>
@@ -18067,7 +18067,7 @@
             <a:avLst/>
           </a:prstGeom>
           <a:solidFill>
-            <a:srgbClr val="C8102E"/>
+            <a:srgbClr val="DA291C"/>
           </a:solidFill>
           <a:ln>
             <a:noFill/>
@@ -18224,7 +18224,7 @@
             <a:avLst/>
           </a:prstGeom>
           <a:solidFill>
-            <a:srgbClr val="C8102E"/>
+            <a:srgbClr val="DA291C"/>
           </a:solidFill>
           <a:ln>
             <a:noFill/>
@@ -18381,7 +18381,7 @@
             <a:avLst/>
           </a:prstGeom>
           <a:solidFill>
-            <a:srgbClr val="C8102E"/>
+            <a:srgbClr val="DA291C"/>
           </a:solidFill>
           <a:ln>
             <a:noFill/>
@@ -18538,7 +18538,7 @@
             <a:avLst/>
           </a:prstGeom>
           <a:solidFill>
-            <a:srgbClr val="C8102E"/>
+            <a:srgbClr val="DA291C"/>
           </a:solidFill>
           <a:ln>
             <a:noFill/>
@@ -18695,7 +18695,7 @@
             <a:avLst/>
           </a:prstGeom>
           <a:solidFill>
-            <a:srgbClr val="C8102E"/>
+            <a:srgbClr val="DA291C"/>
           </a:solidFill>
           <a:ln>
             <a:noFill/>
@@ -18852,7 +18852,7 @@
             <a:avLst/>
           </a:prstGeom>
           <a:solidFill>
-            <a:srgbClr val="C8102E"/>
+            <a:srgbClr val="DA291C"/>
           </a:solidFill>
           <a:ln>
             <a:noFill/>
@@ -19965,7 +19965,7 @@
             <a:r>
               <a:rPr sz="4800" b="1" i="0">
                 <a:solidFill>
-                  <a:srgbClr val="C8102E"/>
+                  <a:srgbClr val="DA291C"/>
                 </a:solidFill>
                 <a:latin typeface="Calibri"/>
               </a:rPr>
@@ -20120,7 +20120,7 @@
             <a:avLst/>
           </a:prstGeom>
           <a:solidFill>
-            <a:srgbClr val="C8102E"/>
+            <a:srgbClr val="DA291C"/>
           </a:solidFill>
           <a:ln>
             <a:noFill/>
@@ -20287,7 +20287,7 @@
             <a:r>
               <a:rPr sz="900" b="1" i="0">
                 <a:solidFill>
-                  <a:srgbClr val="C8102E"/>
+                  <a:srgbClr val="DA291C"/>
                 </a:solidFill>
                 <a:latin typeface="Calibri"/>
               </a:rPr>
@@ -20489,7 +20489,7 @@
             <a:r>
               <a:rPr sz="900" b="1" i="0">
                 <a:solidFill>
-                  <a:srgbClr val="C8102E"/>
+                  <a:srgbClr val="DA291C"/>
                 </a:solidFill>
                 <a:latin typeface="Calibri"/>
               </a:rPr>
@@ -21825,7 +21825,7 @@
             <a:avLst/>
           </a:prstGeom>
           <a:solidFill>
-            <a:srgbClr val="C8102E"/>
+            <a:srgbClr val="DA291C"/>
           </a:solidFill>
           <a:ln>
             <a:noFill/>
@@ -22026,7 +22026,7 @@
             <a:avLst/>
           </a:prstGeom>
           <a:solidFill>
-            <a:srgbClr val="C8102E"/>
+            <a:srgbClr val="DA291C"/>
           </a:solidFill>
           <a:ln>
             <a:noFill/>
@@ -22367,7 +22367,7 @@
             <a:avLst/>
           </a:prstGeom>
           <a:solidFill>
-            <a:srgbClr val="C8102E"/>
+            <a:srgbClr val="DA291C"/>
           </a:solidFill>
           <a:ln>
             <a:noFill/>
@@ -22628,7 +22628,7 @@
             <a:avLst/>
           </a:prstGeom>
           <a:solidFill>
-            <a:srgbClr val="C8102E"/>
+            <a:srgbClr val="DA291C"/>
           </a:solidFill>
           <a:ln>
             <a:noFill/>
@@ -22905,7 +22905,7 @@
             <a:avLst/>
           </a:prstGeom>
           <a:solidFill>
-            <a:srgbClr val="C8102E"/>
+            <a:srgbClr val="DA291C"/>
           </a:solidFill>
           <a:ln>
             <a:noFill/>
@@ -23214,7 +23214,7 @@
             <a:avLst/>
           </a:prstGeom>
           <a:solidFill>
-            <a:srgbClr val="C8102E"/>
+            <a:srgbClr val="DA291C"/>
           </a:solidFill>
           <a:ln>
             <a:noFill/>
@@ -23655,7 +23655,7 @@
             <a:avLst/>
           </a:prstGeom>
           <a:solidFill>
-            <a:srgbClr val="C8102E"/>
+            <a:srgbClr val="DA291C"/>
           </a:solidFill>
           <a:ln>
             <a:noFill/>
@@ -23856,7 +23856,7 @@
             <a:avLst/>
           </a:prstGeom>
           <a:solidFill>
-            <a:srgbClr val="C8102E"/>
+            <a:srgbClr val="DA291C"/>
           </a:solidFill>
           <a:ln>
             <a:noFill/>
@@ -23945,7 +23945,7 @@
             <a:r>
               <a:rPr sz="700" b="1" i="0">
                 <a:solidFill>
-                  <a:srgbClr val="C8102E"/>
+                  <a:srgbClr val="DA291C"/>
                 </a:solidFill>
                 <a:latin typeface="Calibri"/>
               </a:rPr>
@@ -24053,7 +24053,7 @@
             <a:avLst/>
           </a:prstGeom>
           <a:solidFill>
-            <a:srgbClr val="C8102E"/>
+            <a:srgbClr val="DA291C"/>
           </a:solidFill>
           <a:ln>
             <a:noFill/>
@@ -24142,7 +24142,7 @@
             <a:r>
               <a:rPr sz="700" b="1" i="0">
                 <a:solidFill>
-                  <a:srgbClr val="C8102E"/>
+                  <a:srgbClr val="DA291C"/>
                 </a:solidFill>
                 <a:latin typeface="Calibri"/>
               </a:rPr>
@@ -24250,7 +24250,7 @@
             <a:avLst/>
           </a:prstGeom>
           <a:solidFill>
-            <a:srgbClr val="C8102E"/>
+            <a:srgbClr val="DA291C"/>
           </a:solidFill>
           <a:ln>
             <a:noFill/>
@@ -24339,7 +24339,7 @@
             <a:r>
               <a:rPr sz="700" b="1" i="0">
                 <a:solidFill>
-                  <a:srgbClr val="C8102E"/>
+                  <a:srgbClr val="DA291C"/>
                 </a:solidFill>
                 <a:latin typeface="Calibri"/>
               </a:rPr>
@@ -24447,7 +24447,7 @@
             <a:avLst/>
           </a:prstGeom>
           <a:solidFill>
-            <a:srgbClr val="C8102E"/>
+            <a:srgbClr val="DA291C"/>
           </a:solidFill>
           <a:ln>
             <a:noFill/>
@@ -24536,7 +24536,7 @@
             <a:r>
               <a:rPr sz="700" b="1" i="0">
                 <a:solidFill>
-                  <a:srgbClr val="C8102E"/>
+                  <a:srgbClr val="DA291C"/>
                 </a:solidFill>
                 <a:latin typeface="Calibri"/>
               </a:rPr>
@@ -24644,7 +24644,7 @@
             <a:avLst/>
           </a:prstGeom>
           <a:solidFill>
-            <a:srgbClr val="C8102E"/>
+            <a:srgbClr val="DA291C"/>
           </a:solidFill>
           <a:ln>
             <a:noFill/>
@@ -24733,7 +24733,7 @@
             <a:r>
               <a:rPr sz="700" b="1" i="0">
                 <a:solidFill>
-                  <a:srgbClr val="C8102E"/>
+                  <a:srgbClr val="DA291C"/>
                 </a:solidFill>
                 <a:latin typeface="Calibri"/>
               </a:rPr>
@@ -24841,7 +24841,7 @@
             <a:avLst/>
           </a:prstGeom>
           <a:solidFill>
-            <a:srgbClr val="C8102E"/>
+            <a:srgbClr val="DA291C"/>
           </a:solidFill>
           <a:ln>
             <a:noFill/>
@@ -24930,7 +24930,7 @@
             <a:r>
               <a:rPr sz="700" b="1" i="0">
                 <a:solidFill>
-                  <a:srgbClr val="C8102E"/>
+                  <a:srgbClr val="DA291C"/>
                 </a:solidFill>
                 <a:latin typeface="Calibri"/>
               </a:rPr>
@@ -25038,7 +25038,7 @@
             <a:avLst/>
           </a:prstGeom>
           <a:solidFill>
-            <a:srgbClr val="C8102E"/>
+            <a:srgbClr val="DA291C"/>
           </a:solidFill>
           <a:ln>
             <a:noFill/>
@@ -25127,7 +25127,7 @@
             <a:r>
               <a:rPr sz="700" b="1" i="0">
                 <a:solidFill>
-                  <a:srgbClr val="C8102E"/>
+                  <a:srgbClr val="DA291C"/>
                 </a:solidFill>
                 <a:latin typeface="Calibri"/>
               </a:rPr>
@@ -25235,7 +25235,7 @@
             <a:avLst/>
           </a:prstGeom>
           <a:solidFill>
-            <a:srgbClr val="C8102E"/>
+            <a:srgbClr val="DA291C"/>
           </a:solidFill>
           <a:ln>
             <a:noFill/>
@@ -25324,7 +25324,7 @@
             <a:r>
               <a:rPr sz="700" b="1" i="0">
                 <a:solidFill>
-                  <a:srgbClr val="C8102E"/>
+                  <a:srgbClr val="DA291C"/>
                 </a:solidFill>
                 <a:latin typeface="Calibri"/>
               </a:rPr>
@@ -25432,7 +25432,7 @@
             <a:avLst/>
           </a:prstGeom>
           <a:solidFill>
-            <a:srgbClr val="C8102E"/>
+            <a:srgbClr val="DA291C"/>
           </a:solidFill>
           <a:ln>
             <a:noFill/>
@@ -25521,7 +25521,7 @@
             <a:r>
               <a:rPr sz="700" b="1" i="0">
                 <a:solidFill>
-                  <a:srgbClr val="C8102E"/>
+                  <a:srgbClr val="DA291C"/>
                 </a:solidFill>
                 <a:latin typeface="Calibri"/>
               </a:rPr>
@@ -25629,7 +25629,7 @@
             <a:avLst/>
           </a:prstGeom>
           <a:solidFill>
-            <a:srgbClr val="C8102E"/>
+            <a:srgbClr val="DA291C"/>
           </a:solidFill>
           <a:ln>
             <a:noFill/>
@@ -25718,7 +25718,7 @@
             <a:r>
               <a:rPr sz="700" b="1" i="0">
                 <a:solidFill>
-                  <a:srgbClr val="C8102E"/>
+                  <a:srgbClr val="DA291C"/>
                 </a:solidFill>
                 <a:latin typeface="Calibri"/>
               </a:rPr>
@@ -25826,7 +25826,7 @@
             <a:avLst/>
           </a:prstGeom>
           <a:solidFill>
-            <a:srgbClr val="C8102E"/>
+            <a:srgbClr val="DA291C"/>
           </a:solidFill>
           <a:ln>
             <a:noFill/>
@@ -25915,7 +25915,7 @@
             <a:r>
               <a:rPr sz="700" b="1" i="0">
                 <a:solidFill>
-                  <a:srgbClr val="C8102E"/>
+                  <a:srgbClr val="DA291C"/>
                 </a:solidFill>
                 <a:latin typeface="Calibri"/>
               </a:rPr>
@@ -26023,7 +26023,7 @@
             <a:avLst/>
           </a:prstGeom>
           <a:solidFill>
-            <a:srgbClr val="C8102E"/>
+            <a:srgbClr val="DA291C"/>
           </a:solidFill>
           <a:ln>
             <a:noFill/>
@@ -26112,7 +26112,7 @@
             <a:r>
               <a:rPr sz="700" b="1" i="0">
                 <a:solidFill>
-                  <a:srgbClr val="C8102E"/>
+                  <a:srgbClr val="DA291C"/>
                 </a:solidFill>
                 <a:latin typeface="Calibri"/>
               </a:rPr>
@@ -26220,7 +26220,7 @@
             <a:avLst/>
           </a:prstGeom>
           <a:solidFill>
-            <a:srgbClr val="C8102E"/>
+            <a:srgbClr val="DA291C"/>
           </a:solidFill>
           <a:ln>
             <a:noFill/>
@@ -26309,7 +26309,7 @@
             <a:r>
               <a:rPr sz="700" b="1" i="0">
                 <a:solidFill>
-                  <a:srgbClr val="C8102E"/>
+                  <a:srgbClr val="DA291C"/>
                 </a:solidFill>
                 <a:latin typeface="Calibri"/>
               </a:rPr>
@@ -26581,7 +26581,7 @@
             <a:avLst/>
           </a:prstGeom>
           <a:solidFill>
-            <a:srgbClr val="C8102E"/>
+            <a:srgbClr val="DA291C"/>
           </a:solidFill>
           <a:ln>
             <a:noFill/>
@@ -28101,7 +28101,7 @@
             <a:r>
               <a:rPr sz="850" b="1" i="0">
                 <a:solidFill>
-                  <a:srgbClr val="C8102E"/>
+                  <a:srgbClr val="DA291C"/>
                 </a:solidFill>
                 <a:latin typeface="Calibri"/>
               </a:rPr>
@@ -28356,7 +28356,7 @@
             <a:r>
               <a:rPr sz="850" b="1" i="0">
                 <a:solidFill>
-                  <a:srgbClr val="C8102E"/>
+                  <a:srgbClr val="DA291C"/>
                 </a:solidFill>
                 <a:latin typeface="Calibri"/>
               </a:rPr>
@@ -28611,7 +28611,7 @@
             <a:r>
               <a:rPr sz="850" b="1" i="0">
                 <a:solidFill>
-                  <a:srgbClr val="C8102E"/>
+                  <a:srgbClr val="DA291C"/>
                 </a:solidFill>
                 <a:latin typeface="Calibri"/>
               </a:rPr>
@@ -28856,7 +28856,7 @@
             <a:r>
               <a:rPr sz="800" b="0" i="0">
                 <a:solidFill>
-                  <a:srgbClr val="C8102E"/>
+                  <a:srgbClr val="DA291C"/>
                 </a:solidFill>
                 <a:latin typeface="Calibri"/>
               </a:rPr>
@@ -29124,7 +29124,7 @@
             <a:avLst/>
           </a:prstGeom>
           <a:solidFill>
-            <a:srgbClr val="C8102E"/>
+            <a:srgbClr val="DA291C"/>
           </a:solidFill>
           <a:ln>
             <a:noFill/>
@@ -29325,7 +29325,7 @@
             <a:avLst/>
           </a:prstGeom>
           <a:solidFill>
-            <a:srgbClr val="C8102E"/>
+            <a:srgbClr val="DA291C"/>
           </a:solidFill>
           <a:ln>
             <a:noFill/>
@@ -29414,7 +29414,7 @@
             <a:r>
               <a:rPr sz="750" b="1" i="0">
                 <a:solidFill>
-                  <a:srgbClr val="C8102E"/>
+                  <a:srgbClr val="DA291C"/>
                 </a:solidFill>
                 <a:latin typeface="Calibri"/>
               </a:rPr>
@@ -29522,7 +29522,7 @@
             <a:avLst/>
           </a:prstGeom>
           <a:solidFill>
-            <a:srgbClr val="C8102E"/>
+            <a:srgbClr val="DA291C"/>
           </a:solidFill>
           <a:ln>
             <a:noFill/>
@@ -29611,7 +29611,7 @@
             <a:r>
               <a:rPr sz="750" b="1" i="0">
                 <a:solidFill>
-                  <a:srgbClr val="C8102E"/>
+                  <a:srgbClr val="DA291C"/>
                 </a:solidFill>
                 <a:latin typeface="Calibri"/>
               </a:rPr>
@@ -29719,7 +29719,7 @@
             <a:avLst/>
           </a:prstGeom>
           <a:solidFill>
-            <a:srgbClr val="C8102E"/>
+            <a:srgbClr val="DA291C"/>
           </a:solidFill>
           <a:ln>
             <a:noFill/>
@@ -29808,7 +29808,7 @@
             <a:r>
               <a:rPr sz="750" b="1" i="0">
                 <a:solidFill>
-                  <a:srgbClr val="C8102E"/>
+                  <a:srgbClr val="DA291C"/>
                 </a:solidFill>
                 <a:latin typeface="Calibri"/>
               </a:rPr>
@@ -29916,7 +29916,7 @@
             <a:avLst/>
           </a:prstGeom>
           <a:solidFill>
-            <a:srgbClr val="C8102E"/>
+            <a:srgbClr val="DA291C"/>
           </a:solidFill>
           <a:ln>
             <a:noFill/>
@@ -30005,7 +30005,7 @@
             <a:r>
               <a:rPr sz="750" b="1" i="0">
                 <a:solidFill>
-                  <a:srgbClr val="C8102E"/>
+                  <a:srgbClr val="DA291C"/>
                 </a:solidFill>
                 <a:latin typeface="Calibri"/>
               </a:rPr>
@@ -30113,7 +30113,7 @@
             <a:avLst/>
           </a:prstGeom>
           <a:solidFill>
-            <a:srgbClr val="C8102E"/>
+            <a:srgbClr val="DA291C"/>
           </a:solidFill>
           <a:ln>
             <a:noFill/>
@@ -30202,7 +30202,7 @@
             <a:r>
               <a:rPr sz="750" b="1" i="0">
                 <a:solidFill>
-                  <a:srgbClr val="C8102E"/>
+                  <a:srgbClr val="DA291C"/>
                 </a:solidFill>
                 <a:latin typeface="Calibri"/>
               </a:rPr>
@@ -30310,7 +30310,7 @@
             <a:avLst/>
           </a:prstGeom>
           <a:solidFill>
-            <a:srgbClr val="C8102E"/>
+            <a:srgbClr val="DA291C"/>
           </a:solidFill>
           <a:ln>
             <a:noFill/>
@@ -30399,7 +30399,7 @@
             <a:r>
               <a:rPr sz="750" b="1" i="0">
                 <a:solidFill>
-                  <a:srgbClr val="C8102E"/>
+                  <a:srgbClr val="DA291C"/>
                 </a:solidFill>
                 <a:latin typeface="Calibri"/>
               </a:rPr>
@@ -30507,7 +30507,7 @@
             <a:avLst/>
           </a:prstGeom>
           <a:solidFill>
-            <a:srgbClr val="C8102E"/>
+            <a:srgbClr val="DA291C"/>
           </a:solidFill>
           <a:ln>
             <a:noFill/>
@@ -30596,7 +30596,7 @@
             <a:r>
               <a:rPr sz="750" b="1" i="0">
                 <a:solidFill>
-                  <a:srgbClr val="C8102E"/>
+                  <a:srgbClr val="DA291C"/>
                 </a:solidFill>
                 <a:latin typeface="Calibri"/>
               </a:rPr>
@@ -30704,7 +30704,7 @@
             <a:avLst/>
           </a:prstGeom>
           <a:solidFill>
-            <a:srgbClr val="C8102E"/>
+            <a:srgbClr val="DA291C"/>
           </a:solidFill>
           <a:ln>
             <a:noFill/>
@@ -30793,7 +30793,7 @@
             <a:r>
               <a:rPr sz="750" b="1" i="0">
                 <a:solidFill>
-                  <a:srgbClr val="C8102E"/>
+                  <a:srgbClr val="DA291C"/>
                 </a:solidFill>
                 <a:latin typeface="Calibri"/>
               </a:rPr>
@@ -30901,7 +30901,7 @@
             <a:avLst/>
           </a:prstGeom>
           <a:solidFill>
-            <a:srgbClr val="C8102E"/>
+            <a:srgbClr val="DA291C"/>
           </a:solidFill>
           <a:ln>
             <a:noFill/>
@@ -30990,7 +30990,7 @@
             <a:r>
               <a:rPr sz="750" b="1" i="0">
                 <a:solidFill>
-                  <a:srgbClr val="C8102E"/>
+                  <a:srgbClr val="DA291C"/>
                 </a:solidFill>
                 <a:latin typeface="Calibri"/>
               </a:rPr>
@@ -31098,7 +31098,7 @@
             <a:avLst/>
           </a:prstGeom>
           <a:solidFill>
-            <a:srgbClr val="C8102E"/>
+            <a:srgbClr val="DA291C"/>
           </a:solidFill>
           <a:ln>
             <a:noFill/>
@@ -31187,7 +31187,7 @@
             <a:r>
               <a:rPr sz="750" b="1" i="0">
                 <a:solidFill>
-                  <a:srgbClr val="C8102E"/>
+                  <a:srgbClr val="DA291C"/>
                 </a:solidFill>
                 <a:latin typeface="Calibri"/>
               </a:rPr>
@@ -31459,7 +31459,7 @@
             <a:avLst/>
           </a:prstGeom>
           <a:solidFill>
-            <a:srgbClr val="C8102E"/>
+            <a:srgbClr val="DA291C"/>
           </a:solidFill>
           <a:ln>
             <a:noFill/>
@@ -31660,7 +31660,7 @@
             <a:avLst/>
           </a:prstGeom>
           <a:solidFill>
-            <a:srgbClr val="C8102E"/>
+            <a:srgbClr val="DA291C"/>
           </a:solidFill>
           <a:ln>
             <a:noFill/>
@@ -31749,7 +31749,7 @@
             <a:r>
               <a:rPr sz="700" b="1" i="0">
                 <a:solidFill>
-                  <a:srgbClr val="C8102E"/>
+                  <a:srgbClr val="DA291C"/>
                 </a:solidFill>
                 <a:latin typeface="Calibri"/>
               </a:rPr>
@@ -31857,7 +31857,7 @@
             <a:avLst/>
           </a:prstGeom>
           <a:solidFill>
-            <a:srgbClr val="C8102E"/>
+            <a:srgbClr val="DA291C"/>
           </a:solidFill>
           <a:ln>
             <a:noFill/>
@@ -31946,7 +31946,7 @@
             <a:r>
               <a:rPr sz="700" b="1" i="0">
                 <a:solidFill>
-                  <a:srgbClr val="C8102E"/>
+                  <a:srgbClr val="DA291C"/>
                 </a:solidFill>
                 <a:latin typeface="Calibri"/>
               </a:rPr>
@@ -32054,7 +32054,7 @@
             <a:avLst/>
           </a:prstGeom>
           <a:solidFill>
-            <a:srgbClr val="C8102E"/>
+            <a:srgbClr val="DA291C"/>
           </a:solidFill>
           <a:ln>
             <a:noFill/>
@@ -32143,7 +32143,7 @@
             <a:r>
               <a:rPr sz="700" b="1" i="0">
                 <a:solidFill>
-                  <a:srgbClr val="C8102E"/>
+                  <a:srgbClr val="DA291C"/>
                 </a:solidFill>
                 <a:latin typeface="Calibri"/>
               </a:rPr>
@@ -32251,7 +32251,7 @@
             <a:avLst/>
           </a:prstGeom>
           <a:solidFill>
-            <a:srgbClr val="C8102E"/>
+            <a:srgbClr val="DA291C"/>
           </a:solidFill>
           <a:ln>
             <a:noFill/>
@@ -32340,7 +32340,7 @@
             <a:r>
               <a:rPr sz="700" b="1" i="0">
                 <a:solidFill>
-                  <a:srgbClr val="C8102E"/>
+                  <a:srgbClr val="DA291C"/>
                 </a:solidFill>
                 <a:latin typeface="Calibri"/>
               </a:rPr>
@@ -32448,7 +32448,7 @@
             <a:avLst/>
           </a:prstGeom>
           <a:solidFill>
-            <a:srgbClr val="C8102E"/>
+            <a:srgbClr val="DA291C"/>
           </a:solidFill>
           <a:ln>
             <a:noFill/>
@@ -32537,7 +32537,7 @@
             <a:r>
               <a:rPr sz="700" b="1" i="0">
                 <a:solidFill>
-                  <a:srgbClr val="C8102E"/>
+                  <a:srgbClr val="DA291C"/>
                 </a:solidFill>
                 <a:latin typeface="Calibri"/>
               </a:rPr>
@@ -32645,7 +32645,7 @@
             <a:avLst/>
           </a:prstGeom>
           <a:solidFill>
-            <a:srgbClr val="C8102E"/>
+            <a:srgbClr val="DA291C"/>
           </a:solidFill>
           <a:ln>
             <a:noFill/>
@@ -32734,7 +32734,7 @@
             <a:r>
               <a:rPr sz="700" b="1" i="0">
                 <a:solidFill>
-                  <a:srgbClr val="C8102E"/>
+                  <a:srgbClr val="DA291C"/>
                 </a:solidFill>
                 <a:latin typeface="Calibri"/>
               </a:rPr>
@@ -32842,7 +32842,7 @@
             <a:avLst/>
           </a:prstGeom>
           <a:solidFill>
-            <a:srgbClr val="C8102E"/>
+            <a:srgbClr val="DA291C"/>
           </a:solidFill>
           <a:ln>
             <a:noFill/>
@@ -32931,7 +32931,7 @@
             <a:r>
               <a:rPr sz="700" b="1" i="0">
                 <a:solidFill>
-                  <a:srgbClr val="C8102E"/>
+                  <a:srgbClr val="DA291C"/>
                 </a:solidFill>
                 <a:latin typeface="Calibri"/>
               </a:rPr>
@@ -33039,7 +33039,7 @@
             <a:avLst/>
           </a:prstGeom>
           <a:solidFill>
-            <a:srgbClr val="C8102E"/>
+            <a:srgbClr val="DA291C"/>
           </a:solidFill>
           <a:ln>
             <a:noFill/>
@@ -33128,7 +33128,7 @@
             <a:r>
               <a:rPr sz="700" b="1" i="0">
                 <a:solidFill>
-                  <a:srgbClr val="C8102E"/>
+                  <a:srgbClr val="DA291C"/>
                 </a:solidFill>
                 <a:latin typeface="Calibri"/>
               </a:rPr>
@@ -33236,7 +33236,7 @@
             <a:avLst/>
           </a:prstGeom>
           <a:solidFill>
-            <a:srgbClr val="C8102E"/>
+            <a:srgbClr val="DA291C"/>
           </a:solidFill>
           <a:ln>
             <a:noFill/>
@@ -33325,7 +33325,7 @@
             <a:r>
               <a:rPr sz="700" b="1" i="0">
                 <a:solidFill>
-                  <a:srgbClr val="C8102E"/>
+                  <a:srgbClr val="DA291C"/>
                 </a:solidFill>
                 <a:latin typeface="Calibri"/>
               </a:rPr>
@@ -33597,7 +33597,7 @@
             <a:avLst/>
           </a:prstGeom>
           <a:solidFill>
-            <a:srgbClr val="C8102E"/>
+            <a:srgbClr val="DA291C"/>
           </a:solidFill>
           <a:ln>
             <a:noFill/>
@@ -33798,7 +33798,7 @@
             <a:avLst/>
           </a:prstGeom>
           <a:solidFill>
-            <a:srgbClr val="C8102E"/>
+            <a:srgbClr val="DA291C"/>
           </a:solidFill>
           <a:ln>
             <a:noFill/>
@@ -33960,7 +33960,7 @@
             <a:avLst/>
           </a:prstGeom>
           <a:solidFill>
-            <a:srgbClr val="C8102E"/>
+            <a:srgbClr val="DA291C"/>
           </a:solidFill>
           <a:ln>
             <a:noFill/>
@@ -34122,7 +34122,7 @@
             <a:avLst/>
           </a:prstGeom>
           <a:solidFill>
-            <a:srgbClr val="C8102E"/>
+            <a:srgbClr val="DA291C"/>
           </a:solidFill>
           <a:ln>
             <a:noFill/>
@@ -34284,7 +34284,7 @@
             <a:avLst/>
           </a:prstGeom>
           <a:solidFill>
-            <a:srgbClr val="C8102E"/>
+            <a:srgbClr val="DA291C"/>
           </a:solidFill>
           <a:ln>
             <a:noFill/>
@@ -34446,7 +34446,7 @@
             <a:avLst/>
           </a:prstGeom>
           <a:solidFill>
-            <a:srgbClr val="C8102E"/>
+            <a:srgbClr val="DA291C"/>
           </a:solidFill>
           <a:ln>
             <a:noFill/>
@@ -34608,7 +34608,7 @@
             <a:avLst/>
           </a:prstGeom>
           <a:solidFill>
-            <a:srgbClr val="C8102E"/>
+            <a:srgbClr val="DA291C"/>
           </a:solidFill>
           <a:ln>
             <a:noFill/>
@@ -34770,7 +34770,7 @@
             <a:avLst/>
           </a:prstGeom>
           <a:solidFill>
-            <a:srgbClr val="C8102E"/>
+            <a:srgbClr val="DA291C"/>
           </a:solidFill>
           <a:ln>
             <a:noFill/>
@@ -34932,7 +34932,7 @@
             <a:avLst/>
           </a:prstGeom>
           <a:solidFill>
-            <a:srgbClr val="C8102E"/>
+            <a:srgbClr val="DA291C"/>
           </a:solidFill>
           <a:ln>
             <a:noFill/>
@@ -35258,7 +35258,7 @@
             <a:avLst/>
           </a:prstGeom>
           <a:solidFill>
-            <a:srgbClr val="C8102E"/>
+            <a:srgbClr val="DA291C"/>
           </a:solidFill>
           <a:ln>
             <a:noFill/>
@@ -35459,7 +35459,7 @@
             <a:avLst/>
           </a:prstGeom>
           <a:solidFill>
-            <a:srgbClr val="C8102E"/>
+            <a:srgbClr val="DA291C"/>
           </a:solidFill>
           <a:ln>
             <a:noFill/>
@@ -35556,7 +35556,7 @@
             <a:r>
               <a:rPr sz="1800" b="1" i="0">
                 <a:solidFill>
-                  <a:srgbClr val="C8102E"/>
+                  <a:srgbClr val="DA291C"/>
                 </a:solidFill>
                 <a:latin typeface="Calibri"/>
               </a:rPr>

--- a/Santander_Project_Record.pptx
+++ b/Santander_Project_Record.pptx
@@ -3310,14 +3310,119 @@
       </p:sp>
       <p:sp>
         <p:nvSpPr>
-          <p:cNvPr id="7" name="Rectangle 6"/>
+          <p:cNvPr id="9" name="TextBox 8"/>
+          <p:cNvSpPr txBox="1"/>
+          <p:nvPr/>
+        </p:nvSpPr>
+        <p:spPr>
+          <a:xfrm>
+            <a:off x="548640" y="2194560"/>
+            <a:ext cx="9144000" cy="502920"/>
+          </a:xfrm>
+          <a:prstGeom prst="rect">
+            <a:avLst/>
+          </a:prstGeom>
+          <a:noFill/>
+        </p:spPr>
+        <p:txBody>
+          <a:bodyPr wrap="square">
+            <a:noAutofit/>
+          </a:bodyPr>
+          <a:lstStyle/>
+          <a:p>
+            <a:pPr algn="l"/>
+            <a:r>
+              <a:rPr sz="1300" b="0" i="0">
+                <a:solidFill>
+                  <a:srgbClr val="78716C"/>
+                </a:solidFill>
+                <a:latin typeface="Calibri"/>
+              </a:rPr>
+              <a:t>Project Record</a:t>
+            </a:r>
+          </a:p>
+        </p:txBody>
+      </p:sp>
+      <p:sp>
+        <p:nvSpPr>
+          <p:cNvPr id="10" name="TextBox 9"/>
+          <p:cNvSpPr txBox="1"/>
+          <p:nvPr/>
+        </p:nvSpPr>
+        <p:spPr>
+          <a:xfrm>
+            <a:off x="548640" y="2651760"/>
+            <a:ext cx="10058400" cy="914400"/>
+          </a:xfrm>
+          <a:prstGeom prst="rect">
+            <a:avLst/>
+          </a:prstGeom>
+          <a:noFill/>
+        </p:spPr>
+        <p:txBody>
+          <a:bodyPr wrap="square">
+            <a:noAutofit/>
+          </a:bodyPr>
+          <a:lstStyle/>
+          <a:p>
+            <a:pPr algn="l"/>
+            <a:r>
+              <a:rPr sz="4400" b="1" i="0">
+                <a:solidFill>
+                  <a:srgbClr val="FFFFFF"/>
+                </a:solidFill>
+                <a:latin typeface="Calibri"/>
+              </a:rPr>
+              <a:t>Santander Business Banking</a:t>
+            </a:r>
+          </a:p>
+        </p:txBody>
+      </p:sp>
+      <p:sp>
+        <p:nvSpPr>
+          <p:cNvPr id="11" name="TextBox 10"/>
+          <p:cNvSpPr txBox="1"/>
+          <p:nvPr/>
+        </p:nvSpPr>
+        <p:spPr>
+          <a:xfrm>
+            <a:off x="548640" y="3520440"/>
+            <a:ext cx="10058400" cy="640080"/>
+          </a:xfrm>
+          <a:prstGeom prst="rect">
+            <a:avLst/>
+          </a:prstGeom>
+          <a:noFill/>
+        </p:spPr>
+        <p:txBody>
+          <a:bodyPr wrap="square">
+            <a:noAutofit/>
+          </a:bodyPr>
+          <a:lstStyle/>
+          <a:p>
+            <a:pPr algn="l"/>
+            <a:r>
+              <a:rPr sz="3600" b="0" i="1">
+                <a:solidFill>
+                  <a:srgbClr val="FEF2F2"/>
+                </a:solidFill>
+                <a:latin typeface="Calibri"/>
+              </a:rPr>
+              <a:t>Digital Prototype</a:t>
+            </a:r>
+          </a:p>
+        </p:txBody>
+      </p:sp>
+      <p:sp>
+        <p:nvSpPr>
+          <p:cNvPr id="12" name="Rectangle 11"/>
           <p:cNvSpPr/>
           <p:nvPr/>
         </p:nvSpPr>
         <p:spPr>
           <a:xfrm>
-            <a:off x="548640" y="1463040"/>
-            <a:ext cx="502920" cy="502920"/>
+            <a:off x="548640" y="4315968"/>
+            <a:ext cx="4114800" cy="18288"/>
           </a:xfrm>
           <a:prstGeom prst="rect">
             <a:avLst/>
@@ -3353,14 +3458,144 @@
       </p:sp>
       <p:sp>
         <p:nvSpPr>
-          <p:cNvPr id="8" name="Rectangle 7"/>
+          <p:cNvPr id="13" name="TextBox 12"/>
+          <p:cNvSpPr txBox="1"/>
+          <p:nvPr/>
+        </p:nvSpPr>
+        <p:spPr>
+          <a:xfrm>
+            <a:off x="548640" y="4434840"/>
+            <a:ext cx="6400800" cy="914400"/>
+          </a:xfrm>
+          <a:prstGeom prst="rect">
+            <a:avLst/>
+          </a:prstGeom>
+          <a:noFill/>
+        </p:spPr>
+        <p:txBody>
+          <a:bodyPr wrap="square">
+            <a:noAutofit/>
+          </a:bodyPr>
+          <a:lstStyle/>
+          <a:p>
+            <a:pPr>
+              <a:spcAft>
+                <a:spcPts val="600"/>
+              </a:spcAft>
+            </a:pPr>
+            <a:r>
+              <a:rPr sz="1100">
+                <a:solidFill>
+                  <a:srgbClr val="D6D3D1"/>
+                </a:solidFill>
+                <a:latin typeface="Calibri"/>
+              </a:rPr>
+              <a:t>Author: Alan Davidson · Business Banking Advisor</a:t>
+            </a:r>
+          </a:p>
+          <a:p>
+            <a:pPr>
+              <a:spcAft>
+                <a:spcPts val="600"/>
+              </a:spcAft>
+            </a:pPr>
+            <a:r>
+              <a:rPr sz="1100">
+                <a:solidFill>
+                  <a:srgbClr val="D6D3D1"/>
+                </a:solidFill>
+                <a:latin typeface="Calibri"/>
+              </a:rPr>
+              <a:t>Capacity: Self-initiated · Completed entirely out of hours · Own time</a:t>
+            </a:r>
+          </a:p>
+          <a:p>
+            <a:pPr>
+              <a:spcAft>
+                <a:spcPts val="600"/>
+              </a:spcAft>
+            </a:pPr>
+            <a:r>
+              <a:rPr sz="1100">
+                <a:solidFill>
+                  <a:srgbClr val="D6D3D1"/>
+                </a:solidFill>
+                <a:latin typeface="Calibri"/>
+              </a:rPr>
+              <a:t>Prototype: https://imscots-ui.github.io/santander/</a:t>
+            </a:r>
+          </a:p>
+          <a:p>
+            <a:pPr>
+              <a:spcAft>
+                <a:spcPts val="600"/>
+              </a:spcAft>
+            </a:pPr>
+            <a:r>
+              <a:rPr sz="1100">
+                <a:solidFill>
+                  <a:srgbClr val="D6D3D1"/>
+                </a:solidFill>
+                <a:latin typeface="Calibri"/>
+              </a:rPr>
+              <a:t>Date: June 2026</a:t>
+            </a:r>
+          </a:p>
+        </p:txBody>
+      </p:sp>
+      <p:sp>
+        <p:nvSpPr>
+          <p:cNvPr id="14" name="Rectangle 13"/>
           <p:cNvSpPr/>
           <p:nvPr/>
         </p:nvSpPr>
         <p:spPr>
           <a:xfrm>
-            <a:off x="548640" y="1463040"/>
-            <a:ext cx="502920" cy="502920"/>
+            <a:off x="7498079" y="4206240"/>
+            <a:ext cx="1051560" cy="1005840"/>
+          </a:xfrm>
+          <a:prstGeom prst="rect">
+            <a:avLst/>
+          </a:prstGeom>
+          <a:solidFill>
+            <a:srgbClr val="2C2724"/>
+          </a:solidFill>
+          <a:ln>
+            <a:noFill/>
+          </a:ln>
+        </p:spPr>
+        <p:style>
+          <a:lnRef idx="1">
+            <a:schemeClr val="accent1"/>
+          </a:lnRef>
+          <a:fillRef idx="3">
+            <a:schemeClr val="accent1"/>
+          </a:fillRef>
+          <a:effectRef idx="2">
+            <a:schemeClr val="accent1"/>
+          </a:effectRef>
+          <a:fontRef idx="minor">
+            <a:schemeClr val="lt1"/>
+          </a:fontRef>
+        </p:style>
+        <p:txBody>
+          <a:bodyPr rtlCol="0" anchor="ctr"/>
+          <a:lstStyle/>
+          <a:p>
+            <a:pPr algn="ctr"/>
+          </a:p>
+        </p:txBody>
+      </p:sp>
+      <p:sp>
+        <p:nvSpPr>
+          <p:cNvPr id="15" name="Rectangle 14"/>
+          <p:cNvSpPr/>
+          <p:nvPr/>
+        </p:nvSpPr>
+        <p:spPr>
+          <a:xfrm>
+            <a:off x="7498079" y="4206240"/>
+            <a:ext cx="1051560" cy="36576"/>
           </a:xfrm>
           <a:prstGeom prst="rect">
             <a:avLst/>
@@ -3396,119 +3631,127 @@
       </p:sp>
       <p:sp>
         <p:nvSpPr>
-          <p:cNvPr id="9" name="TextBox 8"/>
-          <p:cNvSpPr txBox="1"/>
-          <p:nvPr/>
-        </p:nvSpPr>
-        <p:spPr>
-          <a:xfrm>
-            <a:off x="548640" y="2194560"/>
-            <a:ext cx="9144000" cy="502920"/>
-          </a:xfrm>
-          <a:prstGeom prst="rect">
-            <a:avLst/>
-          </a:prstGeom>
-          <a:noFill/>
-        </p:spPr>
-        <p:txBody>
-          <a:bodyPr wrap="square">
-            <a:noAutofit/>
-          </a:bodyPr>
-          <a:lstStyle/>
-          <a:p>
-            <a:pPr algn="l"/>
-            <a:r>
-              <a:rPr sz="1300" b="0" i="0">
+          <p:cNvPr id="16" name="TextBox 15"/>
+          <p:cNvSpPr txBox="1"/>
+          <p:nvPr/>
+        </p:nvSpPr>
+        <p:spPr>
+          <a:xfrm>
+            <a:off x="7498079" y="4279392"/>
+            <a:ext cx="1051560" cy="502920"/>
+          </a:xfrm>
+          <a:prstGeom prst="rect">
+            <a:avLst/>
+          </a:prstGeom>
+          <a:noFill/>
+        </p:spPr>
+        <p:txBody>
+          <a:bodyPr wrap="square">
+            <a:noAutofit/>
+          </a:bodyPr>
+          <a:lstStyle/>
+          <a:p>
+            <a:pPr algn="ctr"/>
+            <a:r>
+              <a:rPr sz="2800" b="1" i="0">
+                <a:solidFill>
+                  <a:srgbClr val="FFFFFF"/>
+                </a:solidFill>
+                <a:latin typeface="Calibri"/>
+              </a:rPr>
+              <a:t>21</a:t>
+            </a:r>
+          </a:p>
+        </p:txBody>
+      </p:sp>
+      <p:sp>
+        <p:nvSpPr>
+          <p:cNvPr id="17" name="TextBox 16"/>
+          <p:cNvSpPr txBox="1"/>
+          <p:nvPr/>
+        </p:nvSpPr>
+        <p:spPr>
+          <a:xfrm>
+            <a:off x="7498079" y="4754880"/>
+            <a:ext cx="1051560" cy="274320"/>
+          </a:xfrm>
+          <a:prstGeom prst="rect">
+            <a:avLst/>
+          </a:prstGeom>
+          <a:noFill/>
+        </p:spPr>
+        <p:txBody>
+          <a:bodyPr wrap="square">
+            <a:noAutofit/>
+          </a:bodyPr>
+          <a:lstStyle/>
+          <a:p>
+            <a:pPr algn="ctr"/>
+            <a:r>
+              <a:rPr sz="800" b="0" i="0">
                 <a:solidFill>
                   <a:srgbClr val="78716C"/>
                 </a:solidFill>
                 <a:latin typeface="Calibri"/>
               </a:rPr>
-              <a:t>Project Record</a:t>
-            </a:r>
-          </a:p>
-        </p:txBody>
-      </p:sp>
-      <p:sp>
-        <p:nvSpPr>
-          <p:cNvPr id="10" name="TextBox 9"/>
-          <p:cNvSpPr txBox="1"/>
-          <p:nvPr/>
-        </p:nvSpPr>
-        <p:spPr>
-          <a:xfrm>
-            <a:off x="548640" y="2651760"/>
-            <a:ext cx="10058400" cy="914400"/>
-          </a:xfrm>
-          <a:prstGeom prst="rect">
-            <a:avLst/>
-          </a:prstGeom>
-          <a:noFill/>
-        </p:spPr>
-        <p:txBody>
-          <a:bodyPr wrap="square">
-            <a:noAutofit/>
-          </a:bodyPr>
-          <a:lstStyle/>
-          <a:p>
-            <a:pPr algn="l"/>
-            <a:r>
-              <a:rPr sz="4400" b="1" i="0">
-                <a:solidFill>
-                  <a:srgbClr val="FFFFFF"/>
-                </a:solidFill>
-                <a:latin typeface="Calibri"/>
-              </a:rPr>
-              <a:t>Santander Business Banking</a:t>
-            </a:r>
-          </a:p>
-        </p:txBody>
-      </p:sp>
-      <p:sp>
-        <p:nvSpPr>
-          <p:cNvPr id="11" name="TextBox 10"/>
-          <p:cNvSpPr txBox="1"/>
-          <p:nvPr/>
-        </p:nvSpPr>
-        <p:spPr>
-          <a:xfrm>
-            <a:off x="548640" y="3520440"/>
-            <a:ext cx="10058400" cy="640080"/>
-          </a:xfrm>
-          <a:prstGeom prst="rect">
-            <a:avLst/>
-          </a:prstGeom>
-          <a:noFill/>
-        </p:spPr>
-        <p:txBody>
-          <a:bodyPr wrap="square">
-            <a:noAutofit/>
-          </a:bodyPr>
-          <a:lstStyle/>
-          <a:p>
-            <a:pPr algn="l"/>
-            <a:r>
-              <a:rPr sz="3600" b="0" i="1">
-                <a:solidFill>
-                  <a:srgbClr val="FEF2F2"/>
-                </a:solidFill>
-                <a:latin typeface="Calibri"/>
-              </a:rPr>
-              <a:t>Digital Prototype</a:t>
-            </a:r>
-          </a:p>
-        </p:txBody>
-      </p:sp>
-      <p:sp>
-        <p:nvSpPr>
-          <p:cNvPr id="12" name="Rectangle 11"/>
+              <a:t>Features</a:t>
+            </a:r>
+          </a:p>
+        </p:txBody>
+      </p:sp>
+      <p:sp>
+        <p:nvSpPr>
+          <p:cNvPr id="18" name="Rectangle 17"/>
           <p:cNvSpPr/>
           <p:nvPr/>
         </p:nvSpPr>
         <p:spPr>
           <a:xfrm>
-            <a:off x="548640" y="4315968"/>
-            <a:ext cx="4114800" cy="18288"/>
+            <a:off x="8668511" y="4206240"/>
+            <a:ext cx="1051560" cy="1005840"/>
+          </a:xfrm>
+          <a:prstGeom prst="rect">
+            <a:avLst/>
+          </a:prstGeom>
+          <a:solidFill>
+            <a:srgbClr val="2C2724"/>
+          </a:solidFill>
+          <a:ln>
+            <a:noFill/>
+          </a:ln>
+        </p:spPr>
+        <p:style>
+          <a:lnRef idx="1">
+            <a:schemeClr val="accent1"/>
+          </a:lnRef>
+          <a:fillRef idx="3">
+            <a:schemeClr val="accent1"/>
+          </a:fillRef>
+          <a:effectRef idx="2">
+            <a:schemeClr val="accent1"/>
+          </a:effectRef>
+          <a:fontRef idx="minor">
+            <a:schemeClr val="lt1"/>
+          </a:fontRef>
+        </p:style>
+        <p:txBody>
+          <a:bodyPr rtlCol="0" anchor="ctr"/>
+          <a:lstStyle/>
+          <a:p>
+            <a:pPr algn="ctr"/>
+          </a:p>
+        </p:txBody>
+      </p:sp>
+      <p:sp>
+        <p:nvSpPr>
+          <p:cNvPr id="19" name="Rectangle 18"/>
+          <p:cNvSpPr/>
+          <p:nvPr/>
+        </p:nvSpPr>
+        <p:spPr>
+          <a:xfrm>
+            <a:off x="8668511" y="4206240"/>
+            <a:ext cx="1051560" cy="36576"/>
           </a:xfrm>
           <a:prstGeom prst="rect">
             <a:avLst/>
@@ -3544,100 +3787,83 @@
       </p:sp>
       <p:sp>
         <p:nvSpPr>
-          <p:cNvPr id="13" name="TextBox 12"/>
-          <p:cNvSpPr txBox="1"/>
-          <p:nvPr/>
-        </p:nvSpPr>
-        <p:spPr>
-          <a:xfrm>
-            <a:off x="548640" y="4434840"/>
-            <a:ext cx="6400800" cy="914400"/>
-          </a:xfrm>
-          <a:prstGeom prst="rect">
-            <a:avLst/>
-          </a:prstGeom>
-          <a:noFill/>
-        </p:spPr>
-        <p:txBody>
-          <a:bodyPr wrap="square">
-            <a:noAutofit/>
-          </a:bodyPr>
-          <a:lstStyle/>
-          <a:p>
-            <a:pPr>
-              <a:spcAft>
-                <a:spcPts val="600"/>
-              </a:spcAft>
-            </a:pPr>
-            <a:r>
-              <a:rPr sz="1100">
-                <a:solidFill>
-                  <a:srgbClr val="D6D3D1"/>
-                </a:solidFill>
-                <a:latin typeface="Calibri"/>
-              </a:rPr>
-              <a:t>Author: Alan Davidson · Business Banking Advisor</a:t>
-            </a:r>
-          </a:p>
-          <a:p>
-            <a:pPr>
-              <a:spcAft>
-                <a:spcPts val="600"/>
-              </a:spcAft>
-            </a:pPr>
-            <a:r>
-              <a:rPr sz="1100">
-                <a:solidFill>
-                  <a:srgbClr val="D6D3D1"/>
-                </a:solidFill>
-                <a:latin typeface="Calibri"/>
-              </a:rPr>
-              <a:t>Capacity: Self-initiated · Completed entirely out of hours · Own time</a:t>
-            </a:r>
-          </a:p>
-          <a:p>
-            <a:pPr>
-              <a:spcAft>
-                <a:spcPts val="600"/>
-              </a:spcAft>
-            </a:pPr>
-            <a:r>
-              <a:rPr sz="1100">
-                <a:solidFill>
-                  <a:srgbClr val="D6D3D1"/>
-                </a:solidFill>
-                <a:latin typeface="Calibri"/>
-              </a:rPr>
-              <a:t>Prototype: https://imscots-ui.github.io/santander/</a:t>
-            </a:r>
-          </a:p>
-          <a:p>
-            <a:pPr>
-              <a:spcAft>
-                <a:spcPts val="600"/>
-              </a:spcAft>
-            </a:pPr>
-            <a:r>
-              <a:rPr sz="1100">
-                <a:solidFill>
-                  <a:srgbClr val="D6D3D1"/>
-                </a:solidFill>
-                <a:latin typeface="Calibri"/>
-              </a:rPr>
-              <a:t>Date: June 2026</a:t>
-            </a:r>
-          </a:p>
-        </p:txBody>
-      </p:sp>
-      <p:sp>
-        <p:nvSpPr>
-          <p:cNvPr id="14" name="Rectangle 13"/>
+          <p:cNvPr id="20" name="TextBox 19"/>
+          <p:cNvSpPr txBox="1"/>
+          <p:nvPr/>
+        </p:nvSpPr>
+        <p:spPr>
+          <a:xfrm>
+            <a:off x="8668511" y="4279392"/>
+            <a:ext cx="1051560" cy="502920"/>
+          </a:xfrm>
+          <a:prstGeom prst="rect">
+            <a:avLst/>
+          </a:prstGeom>
+          <a:noFill/>
+        </p:spPr>
+        <p:txBody>
+          <a:bodyPr wrap="square">
+            <a:noAutofit/>
+          </a:bodyPr>
+          <a:lstStyle/>
+          <a:p>
+            <a:pPr algn="ctr"/>
+            <a:r>
+              <a:rPr sz="2800" b="1" i="0">
+                <a:solidFill>
+                  <a:srgbClr val="FFFFFF"/>
+                </a:solidFill>
+                <a:latin typeface="Calibri"/>
+              </a:rPr>
+              <a:t>13</a:t>
+            </a:r>
+          </a:p>
+        </p:txBody>
+      </p:sp>
+      <p:sp>
+        <p:nvSpPr>
+          <p:cNvPr id="21" name="TextBox 20"/>
+          <p:cNvSpPr txBox="1"/>
+          <p:nvPr/>
+        </p:nvSpPr>
+        <p:spPr>
+          <a:xfrm>
+            <a:off x="8668511" y="4754880"/>
+            <a:ext cx="1051560" cy="274320"/>
+          </a:xfrm>
+          <a:prstGeom prst="rect">
+            <a:avLst/>
+          </a:prstGeom>
+          <a:noFill/>
+        </p:spPr>
+        <p:txBody>
+          <a:bodyPr wrap="square">
+            <a:noAutofit/>
+          </a:bodyPr>
+          <a:lstStyle/>
+          <a:p>
+            <a:pPr algn="ctr"/>
+            <a:r>
+              <a:rPr sz="800" b="0" i="0">
+                <a:solidFill>
+                  <a:srgbClr val="78716C"/>
+                </a:solidFill>
+                <a:latin typeface="Calibri"/>
+              </a:rPr>
+              <a:t>Workflows</a:t>
+            </a:r>
+          </a:p>
+        </p:txBody>
+      </p:sp>
+      <p:sp>
+        <p:nvSpPr>
+          <p:cNvPr id="22" name="Rectangle 21"/>
           <p:cNvSpPr/>
           <p:nvPr/>
         </p:nvSpPr>
         <p:spPr>
           <a:xfrm>
-            <a:off x="7498079" y="4206240"/>
+            <a:off x="9838944" y="4206240"/>
             <a:ext cx="1051560" cy="1005840"/>
           </a:xfrm>
           <a:prstGeom prst="rect">
@@ -3674,13 +3900,13 @@
       </p:sp>
       <p:sp>
         <p:nvSpPr>
-          <p:cNvPr id="15" name="Rectangle 14"/>
+          <p:cNvPr id="23" name="Rectangle 22"/>
           <p:cNvSpPr/>
           <p:nvPr/>
         </p:nvSpPr>
         <p:spPr>
           <a:xfrm>
-            <a:off x="7498079" y="4206240"/>
+            <a:off x="9838944" y="4206240"/>
             <a:ext cx="1051560" cy="36576"/>
           </a:xfrm>
           <a:prstGeom prst="rect">
@@ -3717,13 +3943,13 @@
       </p:sp>
       <p:sp>
         <p:nvSpPr>
-          <p:cNvPr id="16" name="TextBox 15"/>
-          <p:cNvSpPr txBox="1"/>
-          <p:nvPr/>
-        </p:nvSpPr>
-        <p:spPr>
-          <a:xfrm>
-            <a:off x="7498079" y="4279392"/>
+          <p:cNvPr id="24" name="TextBox 23"/>
+          <p:cNvSpPr txBox="1"/>
+          <p:nvPr/>
+        </p:nvSpPr>
+        <p:spPr>
+          <a:xfrm>
+            <a:off x="9838944" y="4279392"/>
             <a:ext cx="1051560" cy="502920"/>
           </a:xfrm>
           <a:prstGeom prst="rect">
@@ -3745,20 +3971,20 @@
                 </a:solidFill>
                 <a:latin typeface="Calibri"/>
               </a:rPr>
-              <a:t>21</a:t>
-            </a:r>
-          </a:p>
-        </p:txBody>
-      </p:sp>
-      <p:sp>
-        <p:nvSpPr>
-          <p:cNvPr id="17" name="TextBox 16"/>
-          <p:cNvSpPr txBox="1"/>
-          <p:nvPr/>
-        </p:nvSpPr>
-        <p:spPr>
-          <a:xfrm>
-            <a:off x="7498079" y="4754880"/>
+              <a:t>7</a:t>
+            </a:r>
+          </a:p>
+        </p:txBody>
+      </p:sp>
+      <p:sp>
+        <p:nvSpPr>
+          <p:cNvPr id="25" name="TextBox 24"/>
+          <p:cNvSpPr txBox="1"/>
+          <p:nvPr/>
+        </p:nvSpPr>
+        <p:spPr>
+          <a:xfrm>
+            <a:off x="9838944" y="4754880"/>
             <a:ext cx="1051560" cy="274320"/>
           </a:xfrm>
           <a:prstGeom prst="rect">
@@ -3780,20 +4006,20 @@
                 </a:solidFill>
                 <a:latin typeface="Calibri"/>
               </a:rPr>
-              <a:t>Features</a:t>
-            </a:r>
-          </a:p>
-        </p:txBody>
-      </p:sp>
-      <p:sp>
-        <p:nvSpPr>
-          <p:cNvPr id="18" name="Rectangle 17"/>
+              <a:t>Entity types</a:t>
+            </a:r>
+          </a:p>
+        </p:txBody>
+      </p:sp>
+      <p:sp>
+        <p:nvSpPr>
+          <p:cNvPr id="26" name="Rectangle 25"/>
           <p:cNvSpPr/>
           <p:nvPr/>
         </p:nvSpPr>
         <p:spPr>
           <a:xfrm>
-            <a:off x="8668511" y="4206240"/>
+            <a:off x="11009376" y="4206240"/>
             <a:ext cx="1051560" cy="1005840"/>
           </a:xfrm>
           <a:prstGeom prst="rect">
@@ -3830,13 +4056,13 @@
       </p:sp>
       <p:sp>
         <p:nvSpPr>
-          <p:cNvPr id="19" name="Rectangle 18"/>
+          <p:cNvPr id="27" name="Rectangle 26"/>
           <p:cNvSpPr/>
           <p:nvPr/>
         </p:nvSpPr>
         <p:spPr>
           <a:xfrm>
-            <a:off x="8668511" y="4206240"/>
+            <a:off x="11009376" y="4206240"/>
             <a:ext cx="1051560" cy="36576"/>
           </a:xfrm>
           <a:prstGeom prst="rect">
@@ -3873,318 +4099,6 @@
       </p:sp>
       <p:sp>
         <p:nvSpPr>
-          <p:cNvPr id="20" name="TextBox 19"/>
-          <p:cNvSpPr txBox="1"/>
-          <p:nvPr/>
-        </p:nvSpPr>
-        <p:spPr>
-          <a:xfrm>
-            <a:off x="8668511" y="4279392"/>
-            <a:ext cx="1051560" cy="502920"/>
-          </a:xfrm>
-          <a:prstGeom prst="rect">
-            <a:avLst/>
-          </a:prstGeom>
-          <a:noFill/>
-        </p:spPr>
-        <p:txBody>
-          <a:bodyPr wrap="square">
-            <a:noAutofit/>
-          </a:bodyPr>
-          <a:lstStyle/>
-          <a:p>
-            <a:pPr algn="ctr"/>
-            <a:r>
-              <a:rPr sz="2800" b="1" i="0">
-                <a:solidFill>
-                  <a:srgbClr val="FFFFFF"/>
-                </a:solidFill>
-                <a:latin typeface="Calibri"/>
-              </a:rPr>
-              <a:t>13</a:t>
-            </a:r>
-          </a:p>
-        </p:txBody>
-      </p:sp>
-      <p:sp>
-        <p:nvSpPr>
-          <p:cNvPr id="21" name="TextBox 20"/>
-          <p:cNvSpPr txBox="1"/>
-          <p:nvPr/>
-        </p:nvSpPr>
-        <p:spPr>
-          <a:xfrm>
-            <a:off x="8668511" y="4754880"/>
-            <a:ext cx="1051560" cy="274320"/>
-          </a:xfrm>
-          <a:prstGeom prst="rect">
-            <a:avLst/>
-          </a:prstGeom>
-          <a:noFill/>
-        </p:spPr>
-        <p:txBody>
-          <a:bodyPr wrap="square">
-            <a:noAutofit/>
-          </a:bodyPr>
-          <a:lstStyle/>
-          <a:p>
-            <a:pPr algn="ctr"/>
-            <a:r>
-              <a:rPr sz="800" b="0" i="0">
-                <a:solidFill>
-                  <a:srgbClr val="78716C"/>
-                </a:solidFill>
-                <a:latin typeface="Calibri"/>
-              </a:rPr>
-              <a:t>Workflows</a:t>
-            </a:r>
-          </a:p>
-        </p:txBody>
-      </p:sp>
-      <p:sp>
-        <p:nvSpPr>
-          <p:cNvPr id="22" name="Rectangle 21"/>
-          <p:cNvSpPr/>
-          <p:nvPr/>
-        </p:nvSpPr>
-        <p:spPr>
-          <a:xfrm>
-            <a:off x="9838944" y="4206240"/>
-            <a:ext cx="1051560" cy="1005840"/>
-          </a:xfrm>
-          <a:prstGeom prst="rect">
-            <a:avLst/>
-          </a:prstGeom>
-          <a:solidFill>
-            <a:srgbClr val="2C2724"/>
-          </a:solidFill>
-          <a:ln>
-            <a:noFill/>
-          </a:ln>
-        </p:spPr>
-        <p:style>
-          <a:lnRef idx="1">
-            <a:schemeClr val="accent1"/>
-          </a:lnRef>
-          <a:fillRef idx="3">
-            <a:schemeClr val="accent1"/>
-          </a:fillRef>
-          <a:effectRef idx="2">
-            <a:schemeClr val="accent1"/>
-          </a:effectRef>
-          <a:fontRef idx="minor">
-            <a:schemeClr val="lt1"/>
-          </a:fontRef>
-        </p:style>
-        <p:txBody>
-          <a:bodyPr rtlCol="0" anchor="ctr"/>
-          <a:lstStyle/>
-          <a:p>
-            <a:pPr algn="ctr"/>
-          </a:p>
-        </p:txBody>
-      </p:sp>
-      <p:sp>
-        <p:nvSpPr>
-          <p:cNvPr id="23" name="Rectangle 22"/>
-          <p:cNvSpPr/>
-          <p:nvPr/>
-        </p:nvSpPr>
-        <p:spPr>
-          <a:xfrm>
-            <a:off x="9838944" y="4206240"/>
-            <a:ext cx="1051560" cy="36576"/>
-          </a:xfrm>
-          <a:prstGeom prst="rect">
-            <a:avLst/>
-          </a:prstGeom>
-          <a:solidFill>
-            <a:srgbClr val="DA291C"/>
-          </a:solidFill>
-          <a:ln>
-            <a:noFill/>
-          </a:ln>
-        </p:spPr>
-        <p:style>
-          <a:lnRef idx="1">
-            <a:schemeClr val="accent1"/>
-          </a:lnRef>
-          <a:fillRef idx="3">
-            <a:schemeClr val="accent1"/>
-          </a:fillRef>
-          <a:effectRef idx="2">
-            <a:schemeClr val="accent1"/>
-          </a:effectRef>
-          <a:fontRef idx="minor">
-            <a:schemeClr val="lt1"/>
-          </a:fontRef>
-        </p:style>
-        <p:txBody>
-          <a:bodyPr rtlCol="0" anchor="ctr"/>
-          <a:lstStyle/>
-          <a:p>
-            <a:pPr algn="ctr"/>
-          </a:p>
-        </p:txBody>
-      </p:sp>
-      <p:sp>
-        <p:nvSpPr>
-          <p:cNvPr id="24" name="TextBox 23"/>
-          <p:cNvSpPr txBox="1"/>
-          <p:nvPr/>
-        </p:nvSpPr>
-        <p:spPr>
-          <a:xfrm>
-            <a:off x="9838944" y="4279392"/>
-            <a:ext cx="1051560" cy="502920"/>
-          </a:xfrm>
-          <a:prstGeom prst="rect">
-            <a:avLst/>
-          </a:prstGeom>
-          <a:noFill/>
-        </p:spPr>
-        <p:txBody>
-          <a:bodyPr wrap="square">
-            <a:noAutofit/>
-          </a:bodyPr>
-          <a:lstStyle/>
-          <a:p>
-            <a:pPr algn="ctr"/>
-            <a:r>
-              <a:rPr sz="2800" b="1" i="0">
-                <a:solidFill>
-                  <a:srgbClr val="FFFFFF"/>
-                </a:solidFill>
-                <a:latin typeface="Calibri"/>
-              </a:rPr>
-              <a:t>7</a:t>
-            </a:r>
-          </a:p>
-        </p:txBody>
-      </p:sp>
-      <p:sp>
-        <p:nvSpPr>
-          <p:cNvPr id="25" name="TextBox 24"/>
-          <p:cNvSpPr txBox="1"/>
-          <p:nvPr/>
-        </p:nvSpPr>
-        <p:spPr>
-          <a:xfrm>
-            <a:off x="9838944" y="4754880"/>
-            <a:ext cx="1051560" cy="274320"/>
-          </a:xfrm>
-          <a:prstGeom prst="rect">
-            <a:avLst/>
-          </a:prstGeom>
-          <a:noFill/>
-        </p:spPr>
-        <p:txBody>
-          <a:bodyPr wrap="square">
-            <a:noAutofit/>
-          </a:bodyPr>
-          <a:lstStyle/>
-          <a:p>
-            <a:pPr algn="ctr"/>
-            <a:r>
-              <a:rPr sz="800" b="0" i="0">
-                <a:solidFill>
-                  <a:srgbClr val="78716C"/>
-                </a:solidFill>
-                <a:latin typeface="Calibri"/>
-              </a:rPr>
-              <a:t>Entity types</a:t>
-            </a:r>
-          </a:p>
-        </p:txBody>
-      </p:sp>
-      <p:sp>
-        <p:nvSpPr>
-          <p:cNvPr id="26" name="Rectangle 25"/>
-          <p:cNvSpPr/>
-          <p:nvPr/>
-        </p:nvSpPr>
-        <p:spPr>
-          <a:xfrm>
-            <a:off x="11009376" y="4206240"/>
-            <a:ext cx="1051560" cy="1005840"/>
-          </a:xfrm>
-          <a:prstGeom prst="rect">
-            <a:avLst/>
-          </a:prstGeom>
-          <a:solidFill>
-            <a:srgbClr val="2C2724"/>
-          </a:solidFill>
-          <a:ln>
-            <a:noFill/>
-          </a:ln>
-        </p:spPr>
-        <p:style>
-          <a:lnRef idx="1">
-            <a:schemeClr val="accent1"/>
-          </a:lnRef>
-          <a:fillRef idx="3">
-            <a:schemeClr val="accent1"/>
-          </a:fillRef>
-          <a:effectRef idx="2">
-            <a:schemeClr val="accent1"/>
-          </a:effectRef>
-          <a:fontRef idx="minor">
-            <a:schemeClr val="lt1"/>
-          </a:fontRef>
-        </p:style>
-        <p:txBody>
-          <a:bodyPr rtlCol="0" anchor="ctr"/>
-          <a:lstStyle/>
-          <a:p>
-            <a:pPr algn="ctr"/>
-          </a:p>
-        </p:txBody>
-      </p:sp>
-      <p:sp>
-        <p:nvSpPr>
-          <p:cNvPr id="27" name="Rectangle 26"/>
-          <p:cNvSpPr/>
-          <p:nvPr/>
-        </p:nvSpPr>
-        <p:spPr>
-          <a:xfrm>
-            <a:off x="11009376" y="4206240"/>
-            <a:ext cx="1051560" cy="36576"/>
-          </a:xfrm>
-          <a:prstGeom prst="rect">
-            <a:avLst/>
-          </a:prstGeom>
-          <a:solidFill>
-            <a:srgbClr val="DA291C"/>
-          </a:solidFill>
-          <a:ln>
-            <a:noFill/>
-          </a:ln>
-        </p:spPr>
-        <p:style>
-          <a:lnRef idx="1">
-            <a:schemeClr val="accent1"/>
-          </a:lnRef>
-          <a:fillRef idx="3">
-            <a:schemeClr val="accent1"/>
-          </a:fillRef>
-          <a:effectRef idx="2">
-            <a:schemeClr val="accent1"/>
-          </a:effectRef>
-          <a:fontRef idx="minor">
-            <a:schemeClr val="lt1"/>
-          </a:fontRef>
-        </p:style>
-        <p:txBody>
-          <a:bodyPr rtlCol="0" anchor="ctr"/>
-          <a:lstStyle/>
-          <a:p>
-            <a:pPr algn="ctr"/>
-          </a:p>
-        </p:txBody>
-      </p:sp>
-      <p:sp>
-        <p:nvSpPr>
           <p:cNvPr id="28" name="TextBox 27"/>
           <p:cNvSpPr txBox="1"/>
           <p:nvPr/>
@@ -4288,6 +4202,30 @@
           </a:p>
         </p:txBody>
       </p:sp>
+      <p:pic>
+        <p:nvPicPr>
+          <p:cNvPr id="31" name="Santander logo" descr="santander-logo-white.png"/>
+          <p:cNvPicPr>
+            <a:picLocks noChangeAspect="1"/>
+          </p:cNvPicPr>
+          <p:nvPr/>
+        </p:nvPicPr>
+        <p:blipFill>
+          <a:blip r:embed="rId2"/>
+          <a:stretch>
+            <a:fillRect/>
+          </a:stretch>
+        </p:blipFill>
+        <p:spPr>
+          <a:xfrm>
+            <a:off x="502920" y="457200"/>
+            <a:ext cx="2377440" cy="411297"/>
+          </a:xfrm>
+          <a:prstGeom prst="rect">
+            <a:avLst/>
+          </a:prstGeom>
+        </p:spPr>
+      </p:pic>
     </p:spTree>
   </p:cSld>
   <p:clrMapOvr>

--- a/Santander_Project_Record.pptx
+++ b/Santander_Project_Record.pptx
@@ -8983,7 +8983,7 @@
         <p:spPr>
           <a:xfrm>
             <a:off x="566928" y="4425696"/>
-            <a:ext cx="4937760" cy="274320"/>
+            <a:ext cx="4937760" cy="214884"/>
           </a:xfrm>
           <a:prstGeom prst="rect">
             <a:avLst/>
@@ -9027,7 +9027,7 @@
         </p:nvSpPr>
         <p:spPr>
           <a:xfrm>
-            <a:off x="658368" y="4462272"/>
+            <a:off x="658368" y="4453128"/>
             <a:ext cx="1920240" cy="210312"/>
           </a:xfrm>
           <a:prstGeom prst="rect">
@@ -9062,7 +9062,7 @@
         </p:nvSpPr>
         <p:spPr>
           <a:xfrm>
-            <a:off x="2606040" y="4462272"/>
+            <a:off x="2606040" y="4453128"/>
             <a:ext cx="2834640" cy="210312"/>
           </a:xfrm>
           <a:prstGeom prst="rect">
@@ -9097,8 +9097,8 @@
         </p:nvSpPr>
         <p:spPr>
           <a:xfrm>
-            <a:off x="566928" y="4700016"/>
-            <a:ext cx="4937760" cy="274320"/>
+            <a:off x="566928" y="4649724"/>
+            <a:ext cx="4937760" cy="214884"/>
           </a:xfrm>
           <a:prstGeom prst="rect">
             <a:avLst/>
@@ -9142,7 +9142,7 @@
         </p:nvSpPr>
         <p:spPr>
           <a:xfrm>
-            <a:off x="658368" y="4736592"/>
+            <a:off x="658368" y="4677156"/>
             <a:ext cx="1920240" cy="210312"/>
           </a:xfrm>
           <a:prstGeom prst="rect">
@@ -9177,7 +9177,7 @@
         </p:nvSpPr>
         <p:spPr>
           <a:xfrm>
-            <a:off x="2606040" y="4736592"/>
+            <a:off x="2606040" y="4677156"/>
             <a:ext cx="2834640" cy="210312"/>
           </a:xfrm>
           <a:prstGeom prst="rect">
@@ -9212,8 +9212,8 @@
         </p:nvSpPr>
         <p:spPr>
           <a:xfrm>
-            <a:off x="566928" y="4974336"/>
-            <a:ext cx="4937760" cy="274320"/>
+            <a:off x="566928" y="4873752"/>
+            <a:ext cx="4937760" cy="214884"/>
           </a:xfrm>
           <a:prstGeom prst="rect">
             <a:avLst/>
@@ -9257,7 +9257,7 @@
         </p:nvSpPr>
         <p:spPr>
           <a:xfrm>
-            <a:off x="658368" y="5010912"/>
+            <a:off x="658368" y="4901184"/>
             <a:ext cx="1920240" cy="210312"/>
           </a:xfrm>
           <a:prstGeom prst="rect">
@@ -9292,7 +9292,7 @@
         </p:nvSpPr>
         <p:spPr>
           <a:xfrm>
-            <a:off x="2606040" y="5010912"/>
+            <a:off x="2606040" y="4901184"/>
             <a:ext cx="2834640" cy="210312"/>
           </a:xfrm>
           <a:prstGeom prst="rect">
@@ -9327,8 +9327,8 @@
         </p:nvSpPr>
         <p:spPr>
           <a:xfrm>
-            <a:off x="566928" y="5248656"/>
-            <a:ext cx="4937760" cy="274320"/>
+            <a:off x="566928" y="5097780"/>
+            <a:ext cx="4937760" cy="214884"/>
           </a:xfrm>
           <a:prstGeom prst="rect">
             <a:avLst/>
@@ -9372,7 +9372,7 @@
         </p:nvSpPr>
         <p:spPr>
           <a:xfrm>
-            <a:off x="658368" y="5285232"/>
+            <a:off x="658368" y="5125212"/>
             <a:ext cx="1920240" cy="210312"/>
           </a:xfrm>
           <a:prstGeom prst="rect">
@@ -9407,7 +9407,7 @@
         </p:nvSpPr>
         <p:spPr>
           <a:xfrm>
-            <a:off x="2606040" y="5285232"/>
+            <a:off x="2606040" y="5125212"/>
             <a:ext cx="2834640" cy="210312"/>
           </a:xfrm>
           <a:prstGeom prst="rect">
@@ -9442,8 +9442,8 @@
         </p:nvSpPr>
         <p:spPr>
           <a:xfrm>
-            <a:off x="566928" y="5522976"/>
-            <a:ext cx="4937760" cy="274320"/>
+            <a:off x="566928" y="5321808"/>
+            <a:ext cx="4937760" cy="214884"/>
           </a:xfrm>
           <a:prstGeom prst="rect">
             <a:avLst/>
@@ -9487,7 +9487,7 @@
         </p:nvSpPr>
         <p:spPr>
           <a:xfrm>
-            <a:off x="658368" y="5559552"/>
+            <a:off x="658368" y="5349240"/>
             <a:ext cx="1920240" cy="210312"/>
           </a:xfrm>
           <a:prstGeom prst="rect">
@@ -9522,7 +9522,7 @@
         </p:nvSpPr>
         <p:spPr>
           <a:xfrm>
-            <a:off x="2606040" y="5559552"/>
+            <a:off x="2606040" y="5349240"/>
             <a:ext cx="2834640" cy="210312"/>
           </a:xfrm>
           <a:prstGeom prst="rect">
@@ -9557,8 +9557,8 @@
         </p:nvSpPr>
         <p:spPr>
           <a:xfrm>
-            <a:off x="566928" y="5797296"/>
-            <a:ext cx="4937760" cy="274320"/>
+            <a:off x="566928" y="5545836"/>
+            <a:ext cx="4937760" cy="214884"/>
           </a:xfrm>
           <a:prstGeom prst="rect">
             <a:avLst/>
@@ -9602,7 +9602,7 @@
         </p:nvSpPr>
         <p:spPr>
           <a:xfrm>
-            <a:off x="658368" y="5833872"/>
+            <a:off x="658368" y="5573268"/>
             <a:ext cx="1920240" cy="210312"/>
           </a:xfrm>
           <a:prstGeom prst="rect">
@@ -9637,7 +9637,7 @@
         </p:nvSpPr>
         <p:spPr>
           <a:xfrm>
-            <a:off x="2606040" y="5833872"/>
+            <a:off x="2606040" y="5573268"/>
             <a:ext cx="2834640" cy="210312"/>
           </a:xfrm>
           <a:prstGeom prst="rect">
@@ -9672,8 +9672,8 @@
         </p:nvSpPr>
         <p:spPr>
           <a:xfrm>
-            <a:off x="566928" y="6071616"/>
-            <a:ext cx="4937760" cy="274320"/>
+            <a:off x="566928" y="5769864"/>
+            <a:ext cx="4937760" cy="214884"/>
           </a:xfrm>
           <a:prstGeom prst="rect">
             <a:avLst/>
@@ -9717,7 +9717,7 @@
         </p:nvSpPr>
         <p:spPr>
           <a:xfrm>
-            <a:off x="658368" y="6108192"/>
+            <a:off x="658368" y="5797296"/>
             <a:ext cx="1920240" cy="210312"/>
           </a:xfrm>
           <a:prstGeom prst="rect">
@@ -9752,7 +9752,7 @@
         </p:nvSpPr>
         <p:spPr>
           <a:xfrm>
-            <a:off x="2606040" y="6108192"/>
+            <a:off x="2606040" y="5797296"/>
             <a:ext cx="2834640" cy="210312"/>
           </a:xfrm>
           <a:prstGeom prst="rect">
@@ -9787,8 +9787,8 @@
         </p:nvSpPr>
         <p:spPr>
           <a:xfrm>
-            <a:off x="566928" y="6345936"/>
-            <a:ext cx="4937760" cy="274320"/>
+            <a:off x="566928" y="5993892"/>
+            <a:ext cx="4937760" cy="214884"/>
           </a:xfrm>
           <a:prstGeom prst="rect">
             <a:avLst/>
@@ -9832,7 +9832,7 @@
         </p:nvSpPr>
         <p:spPr>
           <a:xfrm>
-            <a:off x="658368" y="6382512"/>
+            <a:off x="658368" y="6021324"/>
             <a:ext cx="1920240" cy="210312"/>
           </a:xfrm>
           <a:prstGeom prst="rect">
@@ -9867,7 +9867,7 @@
         </p:nvSpPr>
         <p:spPr>
           <a:xfrm>
-            <a:off x="2606040" y="6382512"/>
+            <a:off x="2606040" y="6021324"/>
             <a:ext cx="2834640" cy="210312"/>
           </a:xfrm>
           <a:prstGeom prst="rect">
@@ -9902,8 +9902,8 @@
         </p:nvSpPr>
         <p:spPr>
           <a:xfrm>
-            <a:off x="566928" y="6620256"/>
-            <a:ext cx="4937760" cy="237744"/>
+            <a:off x="566928" y="6217920"/>
+            <a:ext cx="4937760" cy="214884"/>
           </a:xfrm>
           <a:prstGeom prst="rect">
             <a:avLst/>
@@ -9947,7 +9947,7 @@
         </p:nvSpPr>
         <p:spPr>
           <a:xfrm>
-            <a:off x="658368" y="6656832"/>
+            <a:off x="658368" y="6245352"/>
             <a:ext cx="1920240" cy="210312"/>
           </a:xfrm>
           <a:prstGeom prst="rect">
@@ -9982,7 +9982,7 @@
         </p:nvSpPr>
         <p:spPr>
           <a:xfrm>
-            <a:off x="2606040" y="6656832"/>
+            <a:off x="2606040" y="6245352"/>
             <a:ext cx="2834640" cy="210312"/>
           </a:xfrm>
           <a:prstGeom prst="rect">
@@ -18898,7 +18898,7 @@
         <p:spPr>
           <a:xfrm>
             <a:off x="457200" y="2633472"/>
-            <a:ext cx="5303520" cy="640080"/>
+            <a:ext cx="5303520" cy="731520"/>
           </a:xfrm>
           <a:prstGeom prst="rect">
             <a:avLst/>
@@ -18975,7 +18975,7 @@
         </p:nvSpPr>
         <p:spPr>
           <a:xfrm>
-            <a:off x="640080" y="2798064"/>
+            <a:off x="640080" y="3017520"/>
             <a:ext cx="960120" cy="274320"/>
           </a:xfrm>
           <a:prstGeom prst="rect">
@@ -19018,7 +19018,7 @@
         </p:nvSpPr>
         <p:spPr>
           <a:xfrm>
-            <a:off x="713232" y="2834640"/>
+            <a:off x="713232" y="3054096"/>
             <a:ext cx="914400" cy="201168"/>
           </a:xfrm>
           <a:prstGeom prst="rect">
@@ -19053,7 +19053,7 @@
         </p:nvSpPr>
         <p:spPr>
           <a:xfrm>
-            <a:off x="1645920" y="2798064"/>
+            <a:off x="1645920" y="3017520"/>
             <a:ext cx="960120" cy="274320"/>
           </a:xfrm>
           <a:prstGeom prst="rect">
@@ -19096,7 +19096,7 @@
         </p:nvSpPr>
         <p:spPr>
           <a:xfrm>
-            <a:off x="1719072" y="2834640"/>
+            <a:off x="1719072" y="3054096"/>
             <a:ext cx="914400" cy="201168"/>
           </a:xfrm>
           <a:prstGeom prst="rect">
@@ -19131,7 +19131,7 @@
         </p:nvSpPr>
         <p:spPr>
           <a:xfrm>
-            <a:off x="2651760" y="2798064"/>
+            <a:off x="2651760" y="3017520"/>
             <a:ext cx="960120" cy="274320"/>
           </a:xfrm>
           <a:prstGeom prst="rect">
@@ -19174,7 +19174,7 @@
         </p:nvSpPr>
         <p:spPr>
           <a:xfrm>
-            <a:off x="2724912" y="2834640"/>
+            <a:off x="2724912" y="3054096"/>
             <a:ext cx="914400" cy="201168"/>
           </a:xfrm>
           <a:prstGeom prst="rect">
@@ -19209,7 +19209,7 @@
         </p:nvSpPr>
         <p:spPr>
           <a:xfrm>
-            <a:off x="3657600" y="2798064"/>
+            <a:off x="3657600" y="3017520"/>
             <a:ext cx="960120" cy="274320"/>
           </a:xfrm>
           <a:prstGeom prst="rect">
@@ -19252,7 +19252,7 @@
         </p:nvSpPr>
         <p:spPr>
           <a:xfrm>
-            <a:off x="3730752" y="2834640"/>
+            <a:off x="3730752" y="3054096"/>
             <a:ext cx="914400" cy="201168"/>
           </a:xfrm>
           <a:prstGeom prst="rect">
@@ -19287,7 +19287,7 @@
         </p:nvSpPr>
         <p:spPr>
           <a:xfrm>
-            <a:off x="4663440" y="2798064"/>
+            <a:off x="4663440" y="3017520"/>
             <a:ext cx="960120" cy="274320"/>
           </a:xfrm>
           <a:prstGeom prst="rect">
@@ -19330,7 +19330,7 @@
         </p:nvSpPr>
         <p:spPr>
           <a:xfrm>
-            <a:off x="4736592" y="2834640"/>
+            <a:off x="4736592" y="3054096"/>
             <a:ext cx="914400" cy="201168"/>
           </a:xfrm>
           <a:prstGeom prst="rect">

--- a/Santander_Project_Record.pptx
+++ b/Santander_Project_Record.pptx
@@ -4975,41 +4975,6 @@
       </p:sp>
       <p:sp>
         <p:nvSpPr>
-          <p:cNvPr id="21" name="TextBox 20"/>
-          <p:cNvSpPr txBox="1"/>
-          <p:nvPr/>
-        </p:nvSpPr>
-        <p:spPr>
-          <a:xfrm>
-            <a:off x="5367528" y="1700784"/>
-            <a:ext cx="530352" cy="182880"/>
-          </a:xfrm>
-          <a:prstGeom prst="rect">
-            <a:avLst/>
-          </a:prstGeom>
-          <a:noFill/>
-        </p:spPr>
-        <p:txBody>
-          <a:bodyPr wrap="square">
-            <a:noAutofit/>
-          </a:bodyPr>
-          <a:lstStyle/>
-          <a:p>
-            <a:pPr algn="r"/>
-            <a:r>
-              <a:rPr sz="700" b="1" i="0">
-                <a:solidFill>
-                  <a:srgbClr val="FEF2F2"/>
-                </a:solidFill>
-                <a:latin typeface="Calibri"/>
-              </a:rPr>
-              <a:t>§1–22, §91, §104–106, §110</a:t>
-            </a:r>
-          </a:p>
-        </p:txBody>
-      </p:sp>
-      <p:sp>
-        <p:nvSpPr>
           <p:cNvPr id="22" name="Rectangle 21"/>
           <p:cNvSpPr/>
           <p:nvPr/>
@@ -5168,41 +5133,6 @@
       </p:sp>
       <p:sp>
         <p:nvSpPr>
-          <p:cNvPr id="26" name="TextBox 25"/>
-          <p:cNvSpPr txBox="1"/>
-          <p:nvPr/>
-        </p:nvSpPr>
-        <p:spPr>
-          <a:xfrm>
-            <a:off x="5367528" y="2596896"/>
-            <a:ext cx="530352" cy="182880"/>
-          </a:xfrm>
-          <a:prstGeom prst="rect">
-            <a:avLst/>
-          </a:prstGeom>
-          <a:noFill/>
-        </p:spPr>
-        <p:txBody>
-          <a:bodyPr wrap="square">
-            <a:noAutofit/>
-          </a:bodyPr>
-          <a:lstStyle/>
-          <a:p>
-            <a:pPr algn="r"/>
-            <a:r>
-              <a:rPr sz="700" b="1" i="0">
-                <a:solidFill>
-                  <a:srgbClr val="FEF2F2"/>
-                </a:solidFill>
-                <a:latin typeface="Calibri"/>
-              </a:rPr>
-              <a:t>§20, §23–25, §58–65, §72–74</a:t>
-            </a:r>
-          </a:p>
-        </p:txBody>
-      </p:sp>
-      <p:sp>
-        <p:nvSpPr>
           <p:cNvPr id="27" name="Rectangle 26"/>
           <p:cNvSpPr/>
           <p:nvPr/>
@@ -5361,41 +5291,6 @@
       </p:sp>
       <p:sp>
         <p:nvSpPr>
-          <p:cNvPr id="31" name="TextBox 30"/>
-          <p:cNvSpPr txBox="1"/>
-          <p:nvPr/>
-        </p:nvSpPr>
-        <p:spPr>
-          <a:xfrm>
-            <a:off x="5367528" y="3493008"/>
-            <a:ext cx="530352" cy="182880"/>
-          </a:xfrm>
-          <a:prstGeom prst="rect">
-            <a:avLst/>
-          </a:prstGeom>
-          <a:noFill/>
-        </p:spPr>
-        <p:txBody>
-          <a:bodyPr wrap="square">
-            <a:noAutofit/>
-          </a:bodyPr>
-          <a:lstStyle/>
-          <a:p>
-            <a:pPr algn="r"/>
-            <a:r>
-              <a:rPr sz="700" b="1" i="0">
-                <a:solidFill>
-                  <a:srgbClr val="FEF2F2"/>
-                </a:solidFill>
-                <a:latin typeface="Calibri"/>
-              </a:rPr>
-              <a:t>§35–41, §66–70, §84, §86–88</a:t>
-            </a:r>
-          </a:p>
-        </p:txBody>
-      </p:sp>
-      <p:sp>
-        <p:nvSpPr>
           <p:cNvPr id="32" name="Rectangle 31"/>
           <p:cNvSpPr/>
           <p:nvPr/>
@@ -5554,41 +5449,6 @@
       </p:sp>
       <p:sp>
         <p:nvSpPr>
-          <p:cNvPr id="36" name="TextBox 35"/>
-          <p:cNvSpPr txBox="1"/>
-          <p:nvPr/>
-        </p:nvSpPr>
-        <p:spPr>
-          <a:xfrm>
-            <a:off x="5367528" y="4389120"/>
-            <a:ext cx="530352" cy="182880"/>
-          </a:xfrm>
-          <a:prstGeom prst="rect">
-            <a:avLst/>
-          </a:prstGeom>
-          <a:noFill/>
-        </p:spPr>
-        <p:txBody>
-          <a:bodyPr wrap="square">
-            <a:noAutofit/>
-          </a:bodyPr>
-          <a:lstStyle/>
-          <a:p>
-            <a:pPr algn="r"/>
-            <a:r>
-              <a:rPr sz="700" b="1" i="0">
-                <a:solidFill>
-                  <a:srgbClr val="FEF2F2"/>
-                </a:solidFill>
-                <a:latin typeface="Calibri"/>
-              </a:rPr>
-              <a:t>§36–40, §87–88, §97, §107–108, §112</a:t>
-            </a:r>
-          </a:p>
-        </p:txBody>
-      </p:sp>
-      <p:sp>
-        <p:nvSpPr>
           <p:cNvPr id="37" name="Rectangle 36"/>
           <p:cNvSpPr/>
           <p:nvPr/>
@@ -5940,41 +5800,6 @@
       </p:sp>
       <p:sp>
         <p:nvSpPr>
-          <p:cNvPr id="46" name="TextBox 45"/>
-          <p:cNvSpPr txBox="1"/>
-          <p:nvPr/>
-        </p:nvSpPr>
-        <p:spPr>
-          <a:xfrm>
-            <a:off x="11091672" y="1700784"/>
-            <a:ext cx="530352" cy="182880"/>
-          </a:xfrm>
-          <a:prstGeom prst="rect">
-            <a:avLst/>
-          </a:prstGeom>
-          <a:noFill/>
-        </p:spPr>
-        <p:txBody>
-          <a:bodyPr wrap="square">
-            <a:noAutofit/>
-          </a:bodyPr>
-          <a:lstStyle/>
-          <a:p>
-            <a:pPr algn="r"/>
-            <a:r>
-              <a:rPr sz="700" b="1" i="0">
-                <a:solidFill>
-                  <a:srgbClr val="FEF2F2"/>
-                </a:solidFill>
-                <a:latin typeface="Calibri"/>
-              </a:rPr>
-              <a:t>§11, §26, §42, §50–56, §78–81</a:t>
-            </a:r>
-          </a:p>
-        </p:txBody>
-      </p:sp>
-      <p:sp>
-        <p:nvSpPr>
           <p:cNvPr id="47" name="Rectangle 46"/>
           <p:cNvSpPr/>
           <p:nvPr/>
@@ -6133,41 +5958,6 @@
       </p:sp>
       <p:sp>
         <p:nvSpPr>
-          <p:cNvPr id="51" name="TextBox 50"/>
-          <p:cNvSpPr txBox="1"/>
-          <p:nvPr/>
-        </p:nvSpPr>
-        <p:spPr>
-          <a:xfrm>
-            <a:off x="11091672" y="2596896"/>
-            <a:ext cx="530352" cy="182880"/>
-          </a:xfrm>
-          <a:prstGeom prst="rect">
-            <a:avLst/>
-          </a:prstGeom>
-          <a:noFill/>
-        </p:spPr>
-        <p:txBody>
-          <a:bodyPr wrap="square">
-            <a:noAutofit/>
-          </a:bodyPr>
-          <a:lstStyle/>
-          <a:p>
-            <a:pPr algn="r"/>
-            <a:r>
-              <a:rPr sz="700" b="1" i="0">
-                <a:solidFill>
-                  <a:srgbClr val="FEF2F2"/>
-                </a:solidFill>
-                <a:latin typeface="Calibri"/>
-              </a:rPr>
-              <a:t>§27–33, §64–65, §76, §92, §94–96, §98</a:t>
-            </a:r>
-          </a:p>
-        </p:txBody>
-      </p:sp>
-      <p:sp>
-        <p:nvSpPr>
           <p:cNvPr id="52" name="Rectangle 51"/>
           <p:cNvSpPr/>
           <p:nvPr/>
@@ -6513,41 +6303,6 @@
                 <a:latin typeface="Calibri"/>
               </a:rPr>
               <a:t>Electronics · Hardware · Engineering Design</a:t>
-            </a:r>
-          </a:p>
-        </p:txBody>
-      </p:sp>
-      <p:sp>
-        <p:nvSpPr>
-          <p:cNvPr id="61" name="TextBox 60"/>
-          <p:cNvSpPr txBox="1"/>
-          <p:nvPr/>
-        </p:nvSpPr>
-        <p:spPr>
-          <a:xfrm>
-            <a:off x="11091672" y="4389120"/>
-            <a:ext cx="530352" cy="182880"/>
-          </a:xfrm>
-          <a:prstGeom prst="rect">
-            <a:avLst/>
-          </a:prstGeom>
-          <a:noFill/>
-        </p:spPr>
-        <p:txBody>
-          <a:bodyPr wrap="square">
-            <a:noAutofit/>
-          </a:bodyPr>
-          <a:lstStyle/>
-          <a:p>
-            <a:pPr algn="r"/>
-            <a:r>
-              <a:rPr sz="700" b="1" i="0">
-                <a:solidFill>
-                  <a:srgbClr val="FEF2F2"/>
-                </a:solidFill>
-                <a:latin typeface="Calibri"/>
-              </a:rPr>
-              <a:t>§43–49, §54, §57, §89, §93</a:t>
             </a:r>
           </a:p>
         </p:txBody>
@@ -10861,7 +10616,7 @@
           <a:noFill/>
         </p:spPr>
         <p:txBody>
-          <a:bodyPr wrap="square">
+          <a:bodyPr wrap="none" lIns="12700" rIns="12700" tIns="0" bIns="0">
             <a:noAutofit/>
           </a:bodyPr>
           <a:lstStyle/>
@@ -10974,7 +10729,7 @@
           <a:noFill/>
         </p:spPr>
         <p:txBody>
-          <a:bodyPr wrap="square">
+          <a:bodyPr wrap="none" lIns="12700" rIns="12700" tIns="0" bIns="0">
             <a:noAutofit/>
           </a:bodyPr>
           <a:lstStyle/>
@@ -11087,7 +10842,7 @@
           <a:noFill/>
         </p:spPr>
         <p:txBody>
-          <a:bodyPr wrap="square">
+          <a:bodyPr wrap="none" lIns="12700" rIns="12700" tIns="0" bIns="0">
             <a:noAutofit/>
           </a:bodyPr>
           <a:lstStyle/>
@@ -11200,7 +10955,7 @@
           <a:noFill/>
         </p:spPr>
         <p:txBody>
-          <a:bodyPr wrap="square">
+          <a:bodyPr wrap="none" lIns="12700" rIns="12700" tIns="0" bIns="0">
             <a:noAutofit/>
           </a:bodyPr>
           <a:lstStyle/>
@@ -11313,7 +11068,7 @@
           <a:noFill/>
         </p:spPr>
         <p:txBody>
-          <a:bodyPr wrap="square">
+          <a:bodyPr wrap="none" lIns="12700" rIns="12700" tIns="0" bIns="0">
             <a:noAutofit/>
           </a:bodyPr>
           <a:lstStyle/>
@@ -11426,7 +11181,7 @@
           <a:noFill/>
         </p:spPr>
         <p:txBody>
-          <a:bodyPr wrap="square">
+          <a:bodyPr wrap="none" lIns="12700" rIns="12700" tIns="0" bIns="0">
             <a:noAutofit/>
           </a:bodyPr>
           <a:lstStyle/>
@@ -11539,7 +11294,7 @@
           <a:noFill/>
         </p:spPr>
         <p:txBody>
-          <a:bodyPr wrap="square">
+          <a:bodyPr wrap="none" lIns="12700" rIns="12700" tIns="0" bIns="0">
             <a:noAutofit/>
           </a:bodyPr>
           <a:lstStyle/>
@@ -11587,7 +11342,7 @@
                 </a:solidFill>
                 <a:latin typeface="Calibri"/>
               </a:rPr>
-              <a:t>Intelligence &amp; security — 7 panels (health score, radar, director, Voice ID, sequencer, voice memo, bell)</a:t>
+              <a:t>Intelligence &amp; security — 7 detail panels</a:t>
             </a:r>
           </a:p>
         </p:txBody>
@@ -11652,7 +11407,7 @@
           <a:noFill/>
         </p:spPr>
         <p:txBody>
-          <a:bodyPr wrap="square">
+          <a:bodyPr wrap="none" lIns="12700" rIns="12700" tIns="0" bIns="0">
             <a:noAutofit/>
           </a:bodyPr>
           <a:lstStyle/>
@@ -11765,7 +11520,7 @@
           <a:noFill/>
         </p:spPr>
         <p:txBody>
-          <a:bodyPr wrap="square">
+          <a:bodyPr wrap="none" lIns="12700" rIns="12700" tIns="0" bIns="0">
             <a:noAutofit/>
           </a:bodyPr>
           <a:lstStyle/>
@@ -11878,7 +11633,7 @@
           <a:noFill/>
         </p:spPr>
         <p:txBody>
-          <a:bodyPr wrap="square">
+          <a:bodyPr wrap="none" lIns="12700" rIns="12700" tIns="0" bIns="0">
             <a:noAutofit/>
           </a:bodyPr>
           <a:lstStyle/>
@@ -11991,7 +11746,7 @@
           <a:noFill/>
         </p:spPr>
         <p:txBody>
-          <a:bodyPr wrap="square">
+          <a:bodyPr wrap="none" lIns="12700" rIns="12700" tIns="0" bIns="0">
             <a:noAutofit/>
           </a:bodyPr>
           <a:lstStyle/>
@@ -12104,7 +11859,7 @@
           <a:noFill/>
         </p:spPr>
         <p:txBody>
-          <a:bodyPr wrap="square">
+          <a:bodyPr wrap="none" lIns="12700" rIns="12700" tIns="0" bIns="0">
             <a:noAutofit/>
           </a:bodyPr>
           <a:lstStyle/>
@@ -12217,7 +11972,7 @@
           <a:noFill/>
         </p:spPr>
         <p:txBody>
-          <a:bodyPr wrap="square">
+          <a:bodyPr wrap="none" lIns="12700" rIns="12700" tIns="0" bIns="0">
             <a:noAutofit/>
           </a:bodyPr>
           <a:lstStyle/>
@@ -12330,7 +12085,7 @@
           <a:noFill/>
         </p:spPr>
         <p:txBody>
-          <a:bodyPr wrap="square">
+          <a:bodyPr wrap="none" lIns="12700" rIns="12700" tIns="0" bIns="0">
             <a:noAutofit/>
           </a:bodyPr>
           <a:lstStyle/>
@@ -12443,7 +12198,7 @@
           <a:noFill/>
         </p:spPr>
         <p:txBody>
-          <a:bodyPr wrap="square">
+          <a:bodyPr wrap="none" lIns="12700" rIns="12700" tIns="0" bIns="0">
             <a:noAutofit/>
           </a:bodyPr>
           <a:lstStyle/>
@@ -12556,7 +12311,7 @@
           <a:noFill/>
         </p:spPr>
         <p:txBody>
-          <a:bodyPr wrap="square">
+          <a:bodyPr wrap="none" lIns="12700" rIns="12700" tIns="0" bIns="0">
             <a:noAutofit/>
           </a:bodyPr>
           <a:lstStyle/>
@@ -12870,7 +12625,7 @@
           <a:noFill/>
         </p:spPr>
         <p:txBody>
-          <a:bodyPr wrap="square">
+          <a:bodyPr wrap="none" lIns="12700" rIns="12700" tIns="0" bIns="0">
             <a:noAutofit/>
           </a:bodyPr>
           <a:lstStyle/>
@@ -12983,7 +12738,7 @@
           <a:noFill/>
         </p:spPr>
         <p:txBody>
-          <a:bodyPr wrap="square">
+          <a:bodyPr wrap="none" lIns="12700" rIns="12700" tIns="0" bIns="0">
             <a:noAutofit/>
           </a:bodyPr>
           <a:lstStyle/>
@@ -13096,7 +12851,7 @@
           <a:noFill/>
         </p:spPr>
         <p:txBody>
-          <a:bodyPr wrap="square">
+          <a:bodyPr wrap="none" lIns="12700" rIns="12700" tIns="0" bIns="0">
             <a:noAutofit/>
           </a:bodyPr>
           <a:lstStyle/>
@@ -13209,7 +12964,7 @@
           <a:noFill/>
         </p:spPr>
         <p:txBody>
-          <a:bodyPr wrap="square">
+          <a:bodyPr wrap="none" lIns="12700" rIns="12700" tIns="0" bIns="0">
             <a:noAutofit/>
           </a:bodyPr>
           <a:lstStyle/>
@@ -13322,7 +13077,7 @@
           <a:noFill/>
         </p:spPr>
         <p:txBody>
-          <a:bodyPr wrap="square">
+          <a:bodyPr wrap="none" lIns="12700" rIns="12700" tIns="0" bIns="0">
             <a:noAutofit/>
           </a:bodyPr>
           <a:lstStyle/>
@@ -13435,7 +13190,7 @@
           <a:noFill/>
         </p:spPr>
         <p:txBody>
-          <a:bodyPr wrap="square">
+          <a:bodyPr wrap="none" lIns="12700" rIns="12700" tIns="0" bIns="0">
             <a:noAutofit/>
           </a:bodyPr>
           <a:lstStyle/>
@@ -13548,7 +13303,7 @@
           <a:noFill/>
         </p:spPr>
         <p:txBody>
-          <a:bodyPr wrap="square">
+          <a:bodyPr wrap="none" lIns="12700" rIns="12700" tIns="0" bIns="0">
             <a:noAutofit/>
           </a:bodyPr>
           <a:lstStyle/>
@@ -13661,7 +13416,7 @@
           <a:noFill/>
         </p:spPr>
         <p:txBody>
-          <a:bodyPr wrap="square">
+          <a:bodyPr wrap="none" lIns="12700" rIns="12700" tIns="0" bIns="0">
             <a:noAutofit/>
           </a:bodyPr>
           <a:lstStyle/>
@@ -13774,7 +13529,7 @@
           <a:noFill/>
         </p:spPr>
         <p:txBody>
-          <a:bodyPr wrap="square">
+          <a:bodyPr wrap="none" lIns="12700" rIns="12700" tIns="0" bIns="0">
             <a:noAutofit/>
           </a:bodyPr>
           <a:lstStyle/>
@@ -13887,7 +13642,7 @@
           <a:noFill/>
         </p:spPr>
         <p:txBody>
-          <a:bodyPr wrap="square">
+          <a:bodyPr wrap="none" lIns="12700" rIns="12700" tIns="0" bIns="0">
             <a:noAutofit/>
           </a:bodyPr>
           <a:lstStyle/>
@@ -14201,7 +13956,7 @@
           <a:noFill/>
         </p:spPr>
         <p:txBody>
-          <a:bodyPr wrap="square">
+          <a:bodyPr wrap="none" lIns="12700" rIns="12700" tIns="0" bIns="0">
             <a:noAutofit/>
           </a:bodyPr>
           <a:lstStyle/>
@@ -14314,7 +14069,7 @@
           <a:noFill/>
         </p:spPr>
         <p:txBody>
-          <a:bodyPr wrap="square">
+          <a:bodyPr wrap="none" lIns="12700" rIns="12700" tIns="0" bIns="0">
             <a:noAutofit/>
           </a:bodyPr>
           <a:lstStyle/>
@@ -14427,7 +14182,7 @@
           <a:noFill/>
         </p:spPr>
         <p:txBody>
-          <a:bodyPr wrap="square">
+          <a:bodyPr wrap="none" lIns="12700" rIns="12700" tIns="0" bIns="0">
             <a:noAutofit/>
           </a:bodyPr>
           <a:lstStyle/>
@@ -14540,7 +14295,7 @@
           <a:noFill/>
         </p:spPr>
         <p:txBody>
-          <a:bodyPr wrap="square">
+          <a:bodyPr wrap="none" lIns="12700" rIns="12700" tIns="0" bIns="0">
             <a:noAutofit/>
           </a:bodyPr>
           <a:lstStyle/>
@@ -14653,7 +14408,7 @@
           <a:noFill/>
         </p:spPr>
         <p:txBody>
-          <a:bodyPr wrap="square">
+          <a:bodyPr wrap="none" lIns="12700" rIns="12700" tIns="0" bIns="0">
             <a:noAutofit/>
           </a:bodyPr>
           <a:lstStyle/>
@@ -14766,7 +14521,7 @@
           <a:noFill/>
         </p:spPr>
         <p:txBody>
-          <a:bodyPr wrap="square">
+          <a:bodyPr wrap="none" lIns="12700" rIns="12700" tIns="0" bIns="0">
             <a:noAutofit/>
           </a:bodyPr>
           <a:lstStyle/>
@@ -14879,7 +14634,7 @@
           <a:noFill/>
         </p:spPr>
         <p:txBody>
-          <a:bodyPr wrap="square">
+          <a:bodyPr wrap="none" lIns="12700" rIns="12700" tIns="0" bIns="0">
             <a:noAutofit/>
           </a:bodyPr>
           <a:lstStyle/>
@@ -14992,7 +14747,7 @@
           <a:noFill/>
         </p:spPr>
         <p:txBody>
-          <a:bodyPr wrap="square">
+          <a:bodyPr wrap="none" lIns="12700" rIns="12700" tIns="0" bIns="0">
             <a:noAutofit/>
           </a:bodyPr>
           <a:lstStyle/>
@@ -15105,7 +14860,7 @@
           <a:noFill/>
         </p:spPr>
         <p:txBody>
-          <a:bodyPr wrap="square">
+          <a:bodyPr wrap="none" lIns="12700" rIns="12700" tIns="0" bIns="0">
             <a:noAutofit/>
           </a:bodyPr>
           <a:lstStyle/>
@@ -15218,7 +14973,7 @@
           <a:noFill/>
         </p:spPr>
         <p:txBody>
-          <a:bodyPr wrap="square">
+          <a:bodyPr wrap="none" lIns="12700" rIns="12700" tIns="0" bIns="0">
             <a:noAutofit/>
           </a:bodyPr>
           <a:lstStyle/>
@@ -15331,7 +15086,7 @@
           <a:noFill/>
         </p:spPr>
         <p:txBody>
-          <a:bodyPr wrap="square">
+          <a:bodyPr wrap="none" lIns="12700" rIns="12700" tIns="0" bIns="0">
             <a:noAutofit/>
           </a:bodyPr>
           <a:lstStyle/>
@@ -15444,7 +15199,7 @@
           <a:noFill/>
         </p:spPr>
         <p:txBody>
-          <a:bodyPr wrap="square">
+          <a:bodyPr wrap="none" lIns="12700" rIns="12700" tIns="0" bIns="0">
             <a:noAutofit/>
           </a:bodyPr>
           <a:lstStyle/>
@@ -15557,7 +15312,7 @@
           <a:noFill/>
         </p:spPr>
         <p:txBody>
-          <a:bodyPr wrap="square">
+          <a:bodyPr wrap="none" lIns="12700" rIns="12700" tIns="0" bIns="0">
             <a:noAutofit/>
           </a:bodyPr>
           <a:lstStyle/>
@@ -15670,7 +15425,7 @@
           <a:noFill/>
         </p:spPr>
         <p:txBody>
-          <a:bodyPr wrap="square">
+          <a:bodyPr wrap="none" lIns="12700" rIns="12700" tIns="0" bIns="0">
             <a:noAutofit/>
           </a:bodyPr>
           <a:lstStyle/>
@@ -18898,7 +18653,7 @@
         <p:spPr>
           <a:xfrm>
             <a:off x="457200" y="2633472"/>
-            <a:ext cx="5303520" cy="731520"/>
+            <a:ext cx="5303520" cy="841248"/>
           </a:xfrm>
           <a:prstGeom prst="rect">
             <a:avLst/>
@@ -18976,7 +18731,7 @@
         <p:spPr>
           <a:xfrm>
             <a:off x="640080" y="3017520"/>
-            <a:ext cx="960120" cy="274320"/>
+            <a:ext cx="960120" cy="402336"/>
           </a:xfrm>
           <a:prstGeom prst="rect">
             <a:avLst/>
@@ -19018,23 +18773,23 @@
         </p:nvSpPr>
         <p:spPr>
           <a:xfrm>
-            <a:off x="713232" y="3054096"/>
-            <a:ext cx="914400" cy="201168"/>
-          </a:xfrm>
-          <a:prstGeom prst="rect">
-            <a:avLst/>
-          </a:prstGeom>
-          <a:noFill/>
-        </p:spPr>
-        <p:txBody>
-          <a:bodyPr wrap="square">
-            <a:noAutofit/>
-          </a:bodyPr>
-          <a:lstStyle/>
-          <a:p>
-            <a:pPr algn="l"/>
-            <a:r>
-              <a:rPr sz="700" b="0" i="0">
+            <a:off x="713232" y="3017520"/>
+            <a:ext cx="914400" cy="402336"/>
+          </a:xfrm>
+          <a:prstGeom prst="rect">
+            <a:avLst/>
+          </a:prstGeom>
+          <a:noFill/>
+        </p:spPr>
+        <p:txBody>
+          <a:bodyPr wrap="square" anchor="ctr" tIns="0" bIns="0" lIns="38100" rIns="25400">
+            <a:noAutofit/>
+          </a:bodyPr>
+          <a:lstStyle/>
+          <a:p>
+            <a:pPr algn="l"/>
+            <a:r>
+              <a:rPr sz="650" b="0" i="0">
                 <a:solidFill>
                   <a:srgbClr val="FEF2F2"/>
                 </a:solidFill>
@@ -19054,7 +18809,7 @@
         <p:spPr>
           <a:xfrm>
             <a:off x="1645920" y="3017520"/>
-            <a:ext cx="960120" cy="274320"/>
+            <a:ext cx="960120" cy="402336"/>
           </a:xfrm>
           <a:prstGeom prst="rect">
             <a:avLst/>
@@ -19096,23 +18851,23 @@
         </p:nvSpPr>
         <p:spPr>
           <a:xfrm>
-            <a:off x="1719072" y="3054096"/>
-            <a:ext cx="914400" cy="201168"/>
-          </a:xfrm>
-          <a:prstGeom prst="rect">
-            <a:avLst/>
-          </a:prstGeom>
-          <a:noFill/>
-        </p:spPr>
-        <p:txBody>
-          <a:bodyPr wrap="square">
-            <a:noAutofit/>
-          </a:bodyPr>
-          <a:lstStyle/>
-          <a:p>
-            <a:pPr algn="l"/>
-            <a:r>
-              <a:rPr sz="700" b="0" i="0">
+            <a:off x="1719072" y="3017520"/>
+            <a:ext cx="914400" cy="402336"/>
+          </a:xfrm>
+          <a:prstGeom prst="rect">
+            <a:avLst/>
+          </a:prstGeom>
+          <a:noFill/>
+        </p:spPr>
+        <p:txBody>
+          <a:bodyPr wrap="square" anchor="ctr" tIns="0" bIns="0" lIns="38100" rIns="25400">
+            <a:noAutofit/>
+          </a:bodyPr>
+          <a:lstStyle/>
+          <a:p>
+            <a:pPr algn="l"/>
+            <a:r>
+              <a:rPr sz="650" b="0" i="0">
                 <a:solidFill>
                   <a:srgbClr val="FEF2F2"/>
                 </a:solidFill>
@@ -19132,7 +18887,7 @@
         <p:spPr>
           <a:xfrm>
             <a:off x="2651760" y="3017520"/>
-            <a:ext cx="960120" cy="274320"/>
+            <a:ext cx="960120" cy="402336"/>
           </a:xfrm>
           <a:prstGeom prst="rect">
             <a:avLst/>
@@ -19174,23 +18929,23 @@
         </p:nvSpPr>
         <p:spPr>
           <a:xfrm>
-            <a:off x="2724912" y="3054096"/>
-            <a:ext cx="914400" cy="201168"/>
-          </a:xfrm>
-          <a:prstGeom prst="rect">
-            <a:avLst/>
-          </a:prstGeom>
-          <a:noFill/>
-        </p:spPr>
-        <p:txBody>
-          <a:bodyPr wrap="square">
-            <a:noAutofit/>
-          </a:bodyPr>
-          <a:lstStyle/>
-          <a:p>
-            <a:pPr algn="l"/>
-            <a:r>
-              <a:rPr sz="700" b="0" i="0">
+            <a:off x="2724912" y="3017520"/>
+            <a:ext cx="914400" cy="402336"/>
+          </a:xfrm>
+          <a:prstGeom prst="rect">
+            <a:avLst/>
+          </a:prstGeom>
+          <a:noFill/>
+        </p:spPr>
+        <p:txBody>
+          <a:bodyPr wrap="square" anchor="ctr" tIns="0" bIns="0" lIns="38100" rIns="25400">
+            <a:noAutofit/>
+          </a:bodyPr>
+          <a:lstStyle/>
+          <a:p>
+            <a:pPr algn="l"/>
+            <a:r>
+              <a:rPr sz="650" b="0" i="0">
                 <a:solidFill>
                   <a:srgbClr val="FEF2F2"/>
                 </a:solidFill>
@@ -19210,7 +18965,7 @@
         <p:spPr>
           <a:xfrm>
             <a:off x="3657600" y="3017520"/>
-            <a:ext cx="960120" cy="274320"/>
+            <a:ext cx="960120" cy="402336"/>
           </a:xfrm>
           <a:prstGeom prst="rect">
             <a:avLst/>
@@ -19252,23 +19007,23 @@
         </p:nvSpPr>
         <p:spPr>
           <a:xfrm>
-            <a:off x="3730752" y="3054096"/>
-            <a:ext cx="914400" cy="201168"/>
-          </a:xfrm>
-          <a:prstGeom prst="rect">
-            <a:avLst/>
-          </a:prstGeom>
-          <a:noFill/>
-        </p:spPr>
-        <p:txBody>
-          <a:bodyPr wrap="square">
-            <a:noAutofit/>
-          </a:bodyPr>
-          <a:lstStyle/>
-          <a:p>
-            <a:pPr algn="l"/>
-            <a:r>
-              <a:rPr sz="700" b="0" i="0">
+            <a:off x="3730752" y="3017520"/>
+            <a:ext cx="914400" cy="402336"/>
+          </a:xfrm>
+          <a:prstGeom prst="rect">
+            <a:avLst/>
+          </a:prstGeom>
+          <a:noFill/>
+        </p:spPr>
+        <p:txBody>
+          <a:bodyPr wrap="square" anchor="ctr" tIns="0" bIns="0" lIns="38100" rIns="25400">
+            <a:noAutofit/>
+          </a:bodyPr>
+          <a:lstStyle/>
+          <a:p>
+            <a:pPr algn="l"/>
+            <a:r>
+              <a:rPr sz="650" b="0" i="0">
                 <a:solidFill>
                   <a:srgbClr val="FEF2F2"/>
                 </a:solidFill>
@@ -19288,7 +19043,7 @@
         <p:spPr>
           <a:xfrm>
             <a:off x="4663440" y="3017520"/>
-            <a:ext cx="960120" cy="274320"/>
+            <a:ext cx="960120" cy="402336"/>
           </a:xfrm>
           <a:prstGeom prst="rect">
             <a:avLst/>
@@ -19330,23 +19085,23 @@
         </p:nvSpPr>
         <p:spPr>
           <a:xfrm>
-            <a:off x="4736592" y="3054096"/>
-            <a:ext cx="914400" cy="201168"/>
-          </a:xfrm>
-          <a:prstGeom prst="rect">
-            <a:avLst/>
-          </a:prstGeom>
-          <a:noFill/>
-        </p:spPr>
-        <p:txBody>
-          <a:bodyPr wrap="square">
-            <a:noAutofit/>
-          </a:bodyPr>
-          <a:lstStyle/>
-          <a:p>
-            <a:pPr algn="l"/>
-            <a:r>
-              <a:rPr sz="700" b="0" i="0">
+            <a:off x="4736592" y="3017520"/>
+            <a:ext cx="914400" cy="402336"/>
+          </a:xfrm>
+          <a:prstGeom prst="rect">
+            <a:avLst/>
+          </a:prstGeom>
+          <a:noFill/>
+        </p:spPr>
+        <p:txBody>
+          <a:bodyPr wrap="square" anchor="ctr" tIns="0" bIns="0" lIns="38100" rIns="25400">
+            <a:noAutofit/>
+          </a:bodyPr>
+          <a:lstStyle/>
+          <a:p>
+            <a:pPr algn="l"/>
+            <a:r>
+              <a:rPr sz="650" b="0" i="0">
                 <a:solidFill>
                   <a:srgbClr val="FEF2F2"/>
                 </a:solidFill>
@@ -19546,7 +19301,7 @@
         </p:nvSpPr>
         <p:spPr>
           <a:xfrm>
-            <a:off x="457200" y="3401568"/>
+            <a:off x="457200" y="3584448"/>
             <a:ext cx="5303520" cy="420624"/>
           </a:xfrm>
           <a:prstGeom prst="rect">
@@ -19589,7 +19344,7 @@
         </p:nvSpPr>
         <p:spPr>
           <a:xfrm>
-            <a:off x="640080" y="3474720"/>
+            <a:off x="640080" y="3657600"/>
             <a:ext cx="2743200" cy="274320"/>
           </a:xfrm>
           <a:prstGeom prst="rect">
@@ -19624,7 +19379,7 @@
         </p:nvSpPr>
         <p:spPr>
           <a:xfrm>
-            <a:off x="3291840" y="3493008"/>
+            <a:off x="3291840" y="3675887"/>
             <a:ext cx="2377440" cy="256032"/>
           </a:xfrm>
           <a:prstGeom prst="rect">
@@ -19659,7 +19414,7 @@
         </p:nvSpPr>
         <p:spPr>
           <a:xfrm>
-            <a:off x="457200" y="3895344"/>
+            <a:off x="457200" y="4078224"/>
             <a:ext cx="5303520" cy="420624"/>
           </a:xfrm>
           <a:prstGeom prst="rect">
@@ -19702,7 +19457,7 @@
         </p:nvSpPr>
         <p:spPr>
           <a:xfrm>
-            <a:off x="640080" y="3968496"/>
+            <a:off x="640080" y="4151376"/>
             <a:ext cx="3474720" cy="274320"/>
           </a:xfrm>
           <a:prstGeom prst="rect">
@@ -19737,7 +19492,7 @@
         </p:nvSpPr>
         <p:spPr>
           <a:xfrm>
-            <a:off x="4023360" y="3986784"/>
+            <a:off x="4023360" y="4169663"/>
             <a:ext cx="1645920" cy="256032"/>
           </a:xfrm>
           <a:prstGeom prst="rect">

--- a/Santander_Project_Record.pptx
+++ b/Santander_Project_Record.pptx
@@ -4360,7 +4360,7 @@
                 </a:solidFill>
                 <a:latin typeface="Calibri"/>
               </a:rPr>
-              <a:t>Reference Library — 1701-uniform/REFERENCE.md</a:t>
+              <a:t>Reference Library — Applied Knowledge Base</a:t>
             </a:r>
           </a:p>
         </p:txBody>
@@ -4395,7 +4395,7 @@
                 </a:solidFill>
                 <a:latin typeface="Calibri"/>
               </a:rPr>
-              <a:t>23,846 lines · 112 sections · 121 books &amp; regulatory documents · §100–112 UX, Node.js, TypeScript, C++, financial crime &amp; ML detection</a:t>
+              <a:t>23,846 lines · 112 sections · 121 books &amp; regulatory documents · development, UX, banking, regulation &amp; financial crime</a:t>
             </a:r>
           </a:p>
         </p:txBody>
@@ -5607,41 +5607,6 @@
       </p:sp>
       <p:sp>
         <p:nvSpPr>
-          <p:cNvPr id="41" name="TextBox 40"/>
-          <p:cNvSpPr txBox="1"/>
-          <p:nvPr/>
-        </p:nvSpPr>
-        <p:spPr>
-          <a:xfrm>
-            <a:off x="5367528" y="5285232"/>
-            <a:ext cx="530352" cy="182880"/>
-          </a:xfrm>
-          <a:prstGeom prst="rect">
-            <a:avLst/>
-          </a:prstGeom>
-          <a:noFill/>
-        </p:spPr>
-        <p:txBody>
-          <a:bodyPr wrap="square">
-            <a:noAutofit/>
-          </a:bodyPr>
-          <a:lstStyle/>
-          <a:p>
-            <a:pPr algn="r"/>
-            <a:r>
-              <a:rPr sz="700" b="1" i="0">
-                <a:solidFill>
-                  <a:srgbClr val="FEF2F2"/>
-                </a:solidFill>
-                <a:latin typeface="Calibri"/>
-              </a:rPr>
-              <a:t>§75, §77</a:t>
-            </a:r>
-          </a:p>
-        </p:txBody>
-      </p:sp>
-      <p:sp>
-        <p:nvSpPr>
           <p:cNvPr id="42" name="Rectangle 41"/>
           <p:cNvSpPr/>
           <p:nvPr/>
@@ -6116,41 +6081,6 @@
       </p:sp>
       <p:sp>
         <p:nvSpPr>
-          <p:cNvPr id="56" name="TextBox 55"/>
-          <p:cNvSpPr txBox="1"/>
-          <p:nvPr/>
-        </p:nvSpPr>
-        <p:spPr>
-          <a:xfrm>
-            <a:off x="11091672" y="3493008"/>
-            <a:ext cx="530352" cy="182880"/>
-          </a:xfrm>
-          <a:prstGeom prst="rect">
-            <a:avLst/>
-          </a:prstGeom>
-          <a:noFill/>
-        </p:spPr>
-        <p:txBody>
-          <a:bodyPr wrap="square">
-            <a:noAutofit/>
-          </a:bodyPr>
-          <a:lstStyle/>
-          <a:p>
-            <a:pPr algn="r"/>
-            <a:r>
-              <a:rPr sz="700" b="1" i="0">
-                <a:solidFill>
-                  <a:srgbClr val="FEF2F2"/>
-                </a:solidFill>
-                <a:latin typeface="Calibri"/>
-              </a:rPr>
-              <a:t>§34, §99–103, §111</a:t>
-            </a:r>
-          </a:p>
-        </p:txBody>
-      </p:sp>
-      <p:sp>
-        <p:nvSpPr>
           <p:cNvPr id="57" name="Rectangle 56"/>
           <p:cNvSpPr/>
           <p:nvPr/>
@@ -6461,41 +6391,6 @@
                 <a:latin typeface="Calibri"/>
               </a:rPr>
               <a:t>Digital Banking Transformation</a:t>
-            </a:r>
-          </a:p>
-        </p:txBody>
-      </p:sp>
-      <p:sp>
-        <p:nvSpPr>
-          <p:cNvPr id="66" name="TextBox 65"/>
-          <p:cNvSpPr txBox="1"/>
-          <p:nvPr/>
-        </p:nvSpPr>
-        <p:spPr>
-          <a:xfrm>
-            <a:off x="11091672" y="5285232"/>
-            <a:ext cx="530352" cy="182880"/>
-          </a:xfrm>
-          <a:prstGeom prst="rect">
-            <a:avLst/>
-          </a:prstGeom>
-          <a:noFill/>
-        </p:spPr>
-        <p:txBody>
-          <a:bodyPr wrap="square">
-            <a:noAutofit/>
-          </a:bodyPr>
-          <a:lstStyle/>
-          <a:p>
-            <a:pPr algn="r"/>
-            <a:r>
-              <a:rPr sz="700" b="1" i="0">
-                <a:solidFill>
-                  <a:srgbClr val="FEF2F2"/>
-                </a:solidFill>
-                <a:latin typeface="Calibri"/>
-              </a:rPr>
-              <a:t>§82, §83, §85</a:t>
             </a:r>
           </a:p>
         </p:txBody>
@@ -14343,7 +14238,7 @@
                 </a:solidFill>
                 <a:latin typeface="Calibri"/>
               </a:rPr>
-              <a:t>Thirteen workflows</a:t>
+              <a:t>Seventeen workflows</a:t>
             </a:r>
           </a:p>
         </p:txBody>
@@ -20023,7 +19918,7 @@
                 </a:solidFill>
                 <a:latin typeface="Calibri"/>
               </a:rPr>
-              <a:t>App.jsx — ~5,300 lines · ~300KB source · Single React component</a:t>
+              <a:t>App.jsx — ~7,400 lines · ~300KB source · Single React component</a:t>
             </a:r>
           </a:p>
           <a:p>
@@ -23406,7 +23301,7 @@
                 </a:solidFill>
                 <a:latin typeface="Calibri"/>
               </a:rPr>
-              <a:t>Thirteen Workflow Wizards</a:t>
+              <a:t>Seventeen Workflow Wizards</a:t>
             </a:r>
           </a:p>
         </p:txBody>
@@ -23498,7 +23393,7 @@
         <p:spPr>
           <a:xfrm>
             <a:off x="384048" y="1024128"/>
-            <a:ext cx="2697480" cy="1261872"/>
+            <a:ext cx="2148840" cy="1261872"/>
           </a:xfrm>
           <a:prstGeom prst="rect">
             <a:avLst/>
@@ -23543,7 +23438,7 @@
         <p:spPr>
           <a:xfrm>
             <a:off x="384048" y="1024128"/>
-            <a:ext cx="50292" cy="1261872"/>
+            <a:ext cx="54864" cy="1261872"/>
           </a:xfrm>
           <a:prstGeom prst="rect">
             <a:avLst/>
@@ -23586,7 +23481,7 @@
         <p:spPr>
           <a:xfrm>
             <a:off x="530352" y="1115568"/>
-            <a:ext cx="2478024" cy="365760"/>
+            <a:ext cx="1929384" cy="365760"/>
           </a:xfrm>
           <a:prstGeom prst="rect">
             <a:avLst/>
@@ -23621,7 +23516,7 @@
         <p:spPr>
           <a:xfrm>
             <a:off x="530352" y="1444752"/>
-            <a:ext cx="2478024" cy="182880"/>
+            <a:ext cx="1929384" cy="182880"/>
           </a:xfrm>
           <a:prstGeom prst="rect">
             <a:avLst/>
@@ -23656,7 +23551,7 @@
         <p:spPr>
           <a:xfrm>
             <a:off x="530352" y="1627632"/>
-            <a:ext cx="2441448" cy="603504"/>
+            <a:ext cx="1892807" cy="603504"/>
           </a:xfrm>
           <a:prstGeom prst="rect">
             <a:avLst/>
@@ -23681,7 +23576,7 @@
                 </a:solidFill>
                 <a:latin typeface="Calibri"/>
               </a:rPr>
-              <a:t>Select accounts → destination CoP check → credit check → sign. 24h cooling-off on Any-1 accounts. Mandate enforcement throughout.</a:t>
+              <a:t>Select accounts → CoP check → credit check → sign. 24h cooling-off on Any-1; mandate-enforced.</a:t>
             </a:r>
           </a:p>
         </p:txBody>
@@ -23694,8 +23589,8 @@
         </p:nvSpPr>
         <p:spPr>
           <a:xfrm>
-            <a:off x="3246120" y="1024128"/>
-            <a:ext cx="2697480" cy="1261872"/>
+            <a:off x="2697480" y="1024128"/>
+            <a:ext cx="2148840" cy="1261872"/>
           </a:xfrm>
           <a:prstGeom prst="rect">
             <a:avLst/>
@@ -23739,8 +23634,8 @@
         </p:nvSpPr>
         <p:spPr>
           <a:xfrm>
-            <a:off x="3246120" y="1024128"/>
-            <a:ext cx="50292" cy="1261872"/>
+            <a:off x="2697480" y="1024128"/>
+            <a:ext cx="54864" cy="1261872"/>
           </a:xfrm>
           <a:prstGeom prst="rect">
             <a:avLst/>
@@ -23782,8 +23677,8 @@
         </p:nvSpPr>
         <p:spPr>
           <a:xfrm>
-            <a:off x="3392424" y="1115568"/>
-            <a:ext cx="2478024" cy="365760"/>
+            <a:off x="2843784" y="1115568"/>
+            <a:ext cx="1929384" cy="365760"/>
           </a:xfrm>
           <a:prstGeom prst="rect">
             <a:avLst/>
@@ -23804,7 +23699,7 @@
                 </a:solidFill>
                 <a:latin typeface="Calibri"/>
               </a:rPr>
-              <a:t>Partner Unreachable Escalation</a:t>
+              <a:t>ID Register (KYB)</a:t>
             </a:r>
           </a:p>
         </p:txBody>
@@ -23817,8 +23712,8 @@
         </p:nvSpPr>
         <p:spPr>
           <a:xfrm>
-            <a:off x="3392424" y="1444752"/>
-            <a:ext cx="2478024" cy="182880"/>
+            <a:off x="2843784" y="1444752"/>
+            <a:ext cx="1929384" cy="182880"/>
           </a:xfrm>
           <a:prstGeom prst="rect">
             <a:avLst/>
@@ -23852,8 +23747,8 @@
         </p:nvSpPr>
         <p:spPr>
           <a:xfrm>
-            <a:off x="3392424" y="1627632"/>
-            <a:ext cx="2441448" cy="603504"/>
+            <a:off x="2843784" y="1627632"/>
+            <a:ext cx="1892807" cy="603504"/>
           </a:xfrm>
           <a:prstGeom prst="rect">
             <a:avLst/>
@@ -23878,7 +23773,7 @@
                 </a:solidFill>
                 <a:latin typeface="Calibri"/>
               </a:rPr>
-              <a:t>4 regulatory branches: health/welfare, no contact, deceased/probate, dispute. Evidence upload, specialist team referral, account restriction. FCA Consumer Duty PS22/9. Case ref SVC-2026-4471.</a:t>
+              <a:t>GOV.UK One Login List 1, address List 2, trading List 3 per signatory. Document upload.</a:t>
             </a:r>
           </a:p>
         </p:txBody>
@@ -23891,8 +23786,8 @@
         </p:nvSpPr>
         <p:spPr>
           <a:xfrm>
-            <a:off x="6108192" y="1024128"/>
-            <a:ext cx="2697480" cy="1261872"/>
+            <a:off x="5010912" y="1024128"/>
+            <a:ext cx="2148840" cy="1261872"/>
           </a:xfrm>
           <a:prstGeom prst="rect">
             <a:avLst/>
@@ -23936,8 +23831,8 @@
         </p:nvSpPr>
         <p:spPr>
           <a:xfrm>
-            <a:off x="6108192" y="1024128"/>
-            <a:ext cx="50292" cy="1261872"/>
+            <a:off x="5010912" y="1024128"/>
+            <a:ext cx="54864" cy="1261872"/>
           </a:xfrm>
           <a:prstGeom prst="rect">
             <a:avLst/>
@@ -23979,8 +23874,8 @@
         </p:nvSpPr>
         <p:spPr>
           <a:xfrm>
-            <a:off x="6254496" y="1115568"/>
-            <a:ext cx="2478024" cy="365760"/>
+            <a:off x="5157216" y="1115568"/>
+            <a:ext cx="1929384" cy="365760"/>
           </a:xfrm>
           <a:prstGeom prst="rect">
             <a:avLst/>
@@ -24014,8 +23909,8 @@
         </p:nvSpPr>
         <p:spPr>
           <a:xfrm>
-            <a:off x="6254496" y="1444752"/>
-            <a:ext cx="2478024" cy="182880"/>
+            <a:off x="5157216" y="1444752"/>
+            <a:ext cx="1929384" cy="182880"/>
           </a:xfrm>
           <a:prstGeom prst="rect">
             <a:avLst/>
@@ -24049,8 +23944,8 @@
         </p:nvSpPr>
         <p:spPr>
           <a:xfrm>
-            <a:off x="6254496" y="1627632"/>
-            <a:ext cx="2441448" cy="603504"/>
+            <a:off x="5157216" y="1627632"/>
+            <a:ext cx="1892807" cy="603504"/>
           </a:xfrm>
           <a:prstGeom prst="rect">
             <a:avLst/>
@@ -24075,7 +23970,7 @@
                 </a:solidFill>
                 <a:latin typeface="Calibri"/>
               </a:rPr>
-              <a:t>Add / remove / update signatories or change signing rule. Full KYC/KYB: GOV.UK One Login List 1, address List 2, trading List 3. Board minutes for clubs/charities. 7 entity type variations.</a:t>
+              <a:t>Add / remove / update signatories or change the signing rule. Full KYC/KYB per signatory.</a:t>
             </a:r>
           </a:p>
         </p:txBody>
@@ -24088,8 +23983,8 @@
         </p:nvSpPr>
         <p:spPr>
           <a:xfrm>
-            <a:off x="8970264" y="1024128"/>
-            <a:ext cx="2697480" cy="1261872"/>
+            <a:off x="7324344" y="1024128"/>
+            <a:ext cx="2148840" cy="1261872"/>
           </a:xfrm>
           <a:prstGeom prst="rect">
             <a:avLst/>
@@ -24133,8 +24028,8 @@
         </p:nvSpPr>
         <p:spPr>
           <a:xfrm>
-            <a:off x="8970264" y="1024128"/>
-            <a:ext cx="50292" cy="1261872"/>
+            <a:off x="7324344" y="1024128"/>
+            <a:ext cx="54864" cy="1261872"/>
           </a:xfrm>
           <a:prstGeom prst="rect">
             <a:avLst/>
@@ -24176,8 +24071,8 @@
         </p:nvSpPr>
         <p:spPr>
           <a:xfrm>
-            <a:off x="9116568" y="1115568"/>
-            <a:ext cx="2478024" cy="365760"/>
+            <a:off x="7470648" y="1115568"/>
+            <a:ext cx="1929384" cy="365760"/>
           </a:xfrm>
           <a:prstGeom prst="rect">
             <a:avLst/>
@@ -24211,8 +24106,8 @@
         </p:nvSpPr>
         <p:spPr>
           <a:xfrm>
-            <a:off x="9116568" y="1444752"/>
-            <a:ext cx="2478024" cy="182880"/>
+            <a:off x="7470648" y="1444752"/>
+            <a:ext cx="1929384" cy="182880"/>
           </a:xfrm>
           <a:prstGeom prst="rect">
             <a:avLst/>
@@ -24246,8 +24141,8 @@
         </p:nvSpPr>
         <p:spPr>
           <a:xfrm>
-            <a:off x="9116568" y="1627632"/>
-            <a:ext cx="2441448" cy="603504"/>
+            <a:off x="7470648" y="1627632"/>
+            <a:ext cx="1892807" cy="603504"/>
           </a:xfrm>
           <a:prstGeom prst="rect">
             <a:avLst/>
@@ -24272,7 +24167,7 @@
                 </a:solidFill>
                 <a:latin typeface="Calibri"/>
               </a:rPr>
-              <a:t>Payee book, CoP verification per payee, CSV import, one-off or monthly scheduling. Mandate enforcement: Any-1/2/All per source account.</a:t>
+              <a:t>Payee book, CoP per payee, CSV import, one-off or monthly. Mandate: Any-1/2/All.</a:t>
             </a:r>
           </a:p>
         </p:txBody>
@@ -24285,8 +24180,8 @@
         </p:nvSpPr>
         <p:spPr>
           <a:xfrm>
-            <a:off x="384048" y="2432304"/>
-            <a:ext cx="2697480" cy="1261872"/>
+            <a:off x="9637776" y="1024128"/>
+            <a:ext cx="2148840" cy="1261872"/>
           </a:xfrm>
           <a:prstGeom prst="rect">
             <a:avLst/>
@@ -24330,8 +24225,8 @@
         </p:nvSpPr>
         <p:spPr>
           <a:xfrm>
-            <a:off x="384048" y="2432304"/>
-            <a:ext cx="50292" cy="1261872"/>
+            <a:off x="9637776" y="1024128"/>
+            <a:ext cx="54864" cy="1261872"/>
           </a:xfrm>
           <a:prstGeom prst="rect">
             <a:avLst/>
@@ -24373,8 +24268,8 @@
         </p:nvSpPr>
         <p:spPr>
           <a:xfrm>
-            <a:off x="530352" y="2523744"/>
-            <a:ext cx="2478024" cy="365760"/>
+            <a:off x="9784080" y="1115568"/>
+            <a:ext cx="1929384" cy="365760"/>
           </a:xfrm>
           <a:prstGeom prst="rect">
             <a:avLst/>
@@ -24408,8 +24303,8 @@
         </p:nvSpPr>
         <p:spPr>
           <a:xfrm>
-            <a:off x="530352" y="2852928"/>
-            <a:ext cx="2478024" cy="182880"/>
+            <a:off x="9784080" y="1444752"/>
+            <a:ext cx="1929384" cy="182880"/>
           </a:xfrm>
           <a:prstGeom prst="rect">
             <a:avLst/>
@@ -24443,8 +24338,8 @@
         </p:nvSpPr>
         <p:spPr>
           <a:xfrm>
-            <a:off x="530352" y="3035808"/>
-            <a:ext cx="2441448" cy="603504"/>
+            <a:off x="9784080" y="1627632"/>
+            <a:ext cx="1892807" cy="603504"/>
           </a:xfrm>
           <a:prstGeom prst="rect">
             <a:avLst/>
@@ -24469,7 +24364,7 @@
                 </a:solidFill>
                 <a:latin typeface="Calibri"/>
               </a:rPr>
-              <a:t>Address, trading name, phone, email. Proof of address upload. Companies House sync notification. RM escalation for partnership renames.</a:t>
+              <a:t>Address, trading name, phone, email. Proof of address. Companies House sync.</a:t>
             </a:r>
           </a:p>
         </p:txBody>
@@ -24482,8 +24377,8 @@
         </p:nvSpPr>
         <p:spPr>
           <a:xfrm>
-            <a:off x="3246120" y="2432304"/>
-            <a:ext cx="2697480" cy="1261872"/>
+            <a:off x="384048" y="2432304"/>
+            <a:ext cx="2148840" cy="1261872"/>
           </a:xfrm>
           <a:prstGeom prst="rect">
             <a:avLst/>
@@ -24527,8 +24422,8 @@
         </p:nvSpPr>
         <p:spPr>
           <a:xfrm>
-            <a:off x="3246120" y="2432304"/>
-            <a:ext cx="50292" cy="1261872"/>
+            <a:off x="384048" y="2432304"/>
+            <a:ext cx="54864" cy="1261872"/>
           </a:xfrm>
           <a:prstGeom prst="rect">
             <a:avLst/>
@@ -24570,8 +24465,8 @@
         </p:nvSpPr>
         <p:spPr>
           <a:xfrm>
-            <a:off x="3392424" y="2523744"/>
-            <a:ext cx="2478024" cy="365760"/>
+            <a:off x="530352" y="2523744"/>
+            <a:ext cx="1929384" cy="365760"/>
           </a:xfrm>
           <a:prstGeom prst="rect">
             <a:avLst/>
@@ -24605,8 +24500,8 @@
         </p:nvSpPr>
         <p:spPr>
           <a:xfrm>
-            <a:off x="3392424" y="2852928"/>
-            <a:ext cx="2478024" cy="182880"/>
+            <a:off x="530352" y="2852928"/>
+            <a:ext cx="1929384" cy="182880"/>
           </a:xfrm>
           <a:prstGeom prst="rect">
             <a:avLst/>
@@ -24640,8 +24535,8 @@
         </p:nvSpPr>
         <p:spPr>
           <a:xfrm>
-            <a:off x="3392424" y="3035808"/>
-            <a:ext cx="2441448" cy="603504"/>
+            <a:off x="530352" y="3035808"/>
+            <a:ext cx="1892807" cy="603504"/>
           </a:xfrm>
           <a:prstGeom prst="rect">
             <a:avLst/>
@@ -24666,7 +24561,7 @@
                 </a:solidFill>
                 <a:latin typeface="Calibri"/>
               </a:rPr>
-              <a:t>Select dormant account and request reactivation. FSCS notice displayed. 12-month inactivity threshold enforced.</a:t>
+              <a:t>Select dormant account and request reactivation. FSCS notice; 12-month threshold.</a:t>
             </a:r>
           </a:p>
         </p:txBody>
@@ -24679,8 +24574,8 @@
         </p:nvSpPr>
         <p:spPr>
           <a:xfrm>
-            <a:off x="6108192" y="2432304"/>
-            <a:ext cx="2697480" cy="1261872"/>
+            <a:off x="2697480" y="2432304"/>
+            <a:ext cx="2148840" cy="1261872"/>
           </a:xfrm>
           <a:prstGeom prst="rect">
             <a:avLst/>
@@ -24724,8 +24619,8 @@
         </p:nvSpPr>
         <p:spPr>
           <a:xfrm>
-            <a:off x="6108192" y="2432304"/>
-            <a:ext cx="50292" cy="1261872"/>
+            <a:off x="2697480" y="2432304"/>
+            <a:ext cx="54864" cy="1261872"/>
           </a:xfrm>
           <a:prstGeom prst="rect">
             <a:avLst/>
@@ -24767,8 +24662,8 @@
         </p:nvSpPr>
         <p:spPr>
           <a:xfrm>
-            <a:off x="6254496" y="2523744"/>
-            <a:ext cx="2478024" cy="365760"/>
+            <a:off x="2843784" y="2523744"/>
+            <a:ext cx="1929384" cy="365760"/>
           </a:xfrm>
           <a:prstGeom prst="rect">
             <a:avLst/>
@@ -24802,8 +24697,8 @@
         </p:nvSpPr>
         <p:spPr>
           <a:xfrm>
-            <a:off x="6254496" y="2852928"/>
-            <a:ext cx="2478024" cy="182880"/>
+            <a:off x="2843784" y="2852928"/>
+            <a:ext cx="1929384" cy="182880"/>
           </a:xfrm>
           <a:prstGeom prst="rect">
             <a:avLst/>
@@ -24837,8 +24732,8 @@
         </p:nvSpPr>
         <p:spPr>
           <a:xfrm>
-            <a:off x="6254496" y="3035808"/>
-            <a:ext cx="2441448" cy="603504"/>
+            <a:off x="2843784" y="3035808"/>
+            <a:ext cx="1892807" cy="603504"/>
           </a:xfrm>
           <a:prstGeom prst="rect">
             <a:avLst/>
@@ -24863,7 +24758,7 @@
                 </a:solidFill>
                 <a:latin typeface="Calibri"/>
               </a:rPr>
-              <a:t>Auto-categorise transactions (confidence score per item) → review VAT100 form → declare accuracy → HMRC API submit. Returns receipt number.</a:t>
+              <a:t>Auto-categorise (confidence score) → review VAT100 → declare → HMRC API submit.</a:t>
             </a:r>
           </a:p>
         </p:txBody>
@@ -24876,8 +24771,8 @@
         </p:nvSpPr>
         <p:spPr>
           <a:xfrm>
-            <a:off x="8970264" y="2432304"/>
-            <a:ext cx="2697480" cy="1261872"/>
+            <a:off x="5010912" y="2432304"/>
+            <a:ext cx="2148840" cy="1261872"/>
           </a:xfrm>
           <a:prstGeom prst="rect">
             <a:avLst/>
@@ -24921,8 +24816,8 @@
         </p:nvSpPr>
         <p:spPr>
           <a:xfrm>
-            <a:off x="8970264" y="2432304"/>
-            <a:ext cx="50292" cy="1261872"/>
+            <a:off x="5010912" y="2432304"/>
+            <a:ext cx="54864" cy="1261872"/>
           </a:xfrm>
           <a:prstGeom prst="rect">
             <a:avLst/>
@@ -24964,8 +24859,8 @@
         </p:nvSpPr>
         <p:spPr>
           <a:xfrm>
-            <a:off x="9116568" y="2523744"/>
-            <a:ext cx="2478024" cy="365760"/>
+            <a:off x="5157216" y="2523744"/>
+            <a:ext cx="1929384" cy="365760"/>
           </a:xfrm>
           <a:prstGeom prst="rect">
             <a:avLst/>
@@ -24999,8 +24894,8 @@
         </p:nvSpPr>
         <p:spPr>
           <a:xfrm>
-            <a:off x="9116568" y="2852928"/>
-            <a:ext cx="2478024" cy="182880"/>
+            <a:off x="5157216" y="2852928"/>
+            <a:ext cx="1929384" cy="182880"/>
           </a:xfrm>
           <a:prstGeom prst="rect">
             <a:avLst/>
@@ -25034,8 +24929,8 @@
         </p:nvSpPr>
         <p:spPr>
           <a:xfrm>
-            <a:off x="9116568" y="3035808"/>
-            <a:ext cx="2441448" cy="603504"/>
+            <a:off x="5157216" y="3035808"/>
+            <a:ext cx="1892807" cy="603504"/>
           </a:xfrm>
           <a:prstGeom prst="rect">
             <a:avLst/>
@@ -25060,7 +24955,7 @@
                 </a:solidFill>
                 <a:latin typeface="Calibri"/>
               </a:rPr>
-              <a:t>Scope confirmation → data separation notice → all-channels toggle (CRM ref REL-2026-0291, 2 working days) + postal toggle → signed declaration. Removes personal data from JSX render tree — not CSS hide.</a:t>
+              <a:t>Scope → data-separation notice → all-channels + postal toggle. CRM ref, 2 working days.</a:t>
             </a:r>
           </a:p>
         </p:txBody>
@@ -25073,8 +24968,8 @@
         </p:nvSpPr>
         <p:spPr>
           <a:xfrm>
-            <a:off x="384048" y="3840479"/>
-            <a:ext cx="2697480" cy="1261872"/>
+            <a:off x="7324344" y="2432304"/>
+            <a:ext cx="2148840" cy="1261872"/>
           </a:xfrm>
           <a:prstGeom prst="rect">
             <a:avLst/>
@@ -25118,8 +25013,8 @@
         </p:nvSpPr>
         <p:spPr>
           <a:xfrm>
-            <a:off x="384048" y="3840479"/>
-            <a:ext cx="50292" cy="1261872"/>
+            <a:off x="7324344" y="2432304"/>
+            <a:ext cx="54864" cy="1261872"/>
           </a:xfrm>
           <a:prstGeom prst="rect">
             <a:avLst/>
@@ -25161,8 +25056,8 @@
         </p:nvSpPr>
         <p:spPr>
           <a:xfrm>
-            <a:off x="530352" y="3931919"/>
-            <a:ext cx="2478024" cy="365760"/>
+            <a:off x="7470648" y="2523744"/>
+            <a:ext cx="1929384" cy="365760"/>
           </a:xfrm>
           <a:prstGeom prst="rect">
             <a:avLst/>
@@ -25196,8 +25091,8 @@
         </p:nvSpPr>
         <p:spPr>
           <a:xfrm>
-            <a:off x="530352" y="4261103"/>
-            <a:ext cx="2478024" cy="182880"/>
+            <a:off x="7470648" y="2852928"/>
+            <a:ext cx="1929384" cy="182880"/>
           </a:xfrm>
           <a:prstGeom prst="rect">
             <a:avLst/>
@@ -25231,8 +25126,8 @@
         </p:nvSpPr>
         <p:spPr>
           <a:xfrm>
-            <a:off x="530352" y="4443983"/>
-            <a:ext cx="2441448" cy="603504"/>
+            <a:off x="7470648" y="3035808"/>
+            <a:ext cx="1892807" cy="603504"/>
           </a:xfrm>
           <a:prstGeom prst="rect">
             <a:avLst/>
@@ -25257,7 +25152,7 @@
                 </a:solidFill>
                 <a:latin typeface="Calibri"/>
               </a:rPr>
-              <a:t>Risk overview with GDPR Art.5(1)(c) legal basis → signed formal instruction. Personal account data permanently excluded from business credit decisioning. State persists across sessions.</a:t>
+              <a:t>GDPR Art.5(1)(c) basis → signed instruction. Personal data excluded from credit decisions.</a:t>
             </a:r>
           </a:p>
         </p:txBody>
@@ -25270,8 +25165,8 @@
         </p:nvSpPr>
         <p:spPr>
           <a:xfrm>
-            <a:off x="3246120" y="3840479"/>
-            <a:ext cx="2697480" cy="1261872"/>
+            <a:off x="9637776" y="2432304"/>
+            <a:ext cx="2148840" cy="1261872"/>
           </a:xfrm>
           <a:prstGeom prst="rect">
             <a:avLst/>
@@ -25315,8 +25210,8 @@
         </p:nvSpPr>
         <p:spPr>
           <a:xfrm>
-            <a:off x="3246120" y="3840479"/>
-            <a:ext cx="50292" cy="1261872"/>
+            <a:off x="9637776" y="2432304"/>
+            <a:ext cx="54864" cy="1261872"/>
           </a:xfrm>
           <a:prstGeom prst="rect">
             <a:avLst/>
@@ -25358,8 +25253,8 @@
         </p:nvSpPr>
         <p:spPr>
           <a:xfrm>
-            <a:off x="3392424" y="3931919"/>
-            <a:ext cx="2478024" cy="365760"/>
+            <a:off x="9784080" y="2523744"/>
+            <a:ext cx="1929384" cy="365760"/>
           </a:xfrm>
           <a:prstGeom prst="rect">
             <a:avLst/>
@@ -25393,8 +25288,8 @@
         </p:nvSpPr>
         <p:spPr>
           <a:xfrm>
-            <a:off x="3392424" y="4261103"/>
-            <a:ext cx="2478024" cy="182880"/>
+            <a:off x="9784080" y="2852928"/>
+            <a:ext cx="1929384" cy="182880"/>
           </a:xfrm>
           <a:prstGeom prst="rect">
             <a:avLst/>
@@ -25428,8 +25323,8 @@
         </p:nvSpPr>
         <p:spPr>
           <a:xfrm>
-            <a:off x="3392424" y="4443983"/>
-            <a:ext cx="2441448" cy="603504"/>
+            <a:off x="9784080" y="3035808"/>
+            <a:ext cx="1892807" cy="603504"/>
           </a:xfrm>
           <a:prstGeom prst="rect">
             <a:avLst/>
@@ -25454,7 +25349,7 @@
                 </a:solidFill>
                 <a:latin typeface="Calibri"/>
               </a:rPr>
-              <a:t>£45,000 offer with live monthly repayment calculator (12/24/36 months) → CCA 1974 terms and 14-day cooling-off rights → biometric confirm and draw-down. lendingCompleted state persists.</a:t>
+              <a:t>£45,000 offer, live repayment calculator (12/24/36m) → CCA 1974 terms, 14-day rights.</a:t>
             </a:r>
           </a:p>
         </p:txBody>
@@ -25467,8 +25362,8 @@
         </p:nvSpPr>
         <p:spPr>
           <a:xfrm>
-            <a:off x="6108192" y="3840479"/>
-            <a:ext cx="2697480" cy="1261872"/>
+            <a:off x="384048" y="3840480"/>
+            <a:ext cx="2148840" cy="1261872"/>
           </a:xfrm>
           <a:prstGeom prst="rect">
             <a:avLst/>
@@ -25512,8 +25407,8 @@
         </p:nvSpPr>
         <p:spPr>
           <a:xfrm>
-            <a:off x="6108192" y="3840479"/>
-            <a:ext cx="50292" cy="1261872"/>
+            <a:off x="384048" y="3840480"/>
+            <a:ext cx="54864" cy="1261872"/>
           </a:xfrm>
           <a:prstGeom prst="rect">
             <a:avLst/>
@@ -25555,8 +25450,8 @@
         </p:nvSpPr>
         <p:spPr>
           <a:xfrm>
-            <a:off x="6254496" y="3931919"/>
-            <a:ext cx="2478024" cy="365760"/>
+            <a:off x="530352" y="3931920"/>
+            <a:ext cx="1929384" cy="365760"/>
           </a:xfrm>
           <a:prstGeom prst="rect">
             <a:avLst/>
@@ -25590,8 +25485,8 @@
         </p:nvSpPr>
         <p:spPr>
           <a:xfrm>
-            <a:off x="6254496" y="4261103"/>
-            <a:ext cx="2478024" cy="182880"/>
+            <a:off x="530352" y="4261104"/>
+            <a:ext cx="1929384" cy="182880"/>
           </a:xfrm>
           <a:prstGeom prst="rect">
             <a:avLst/>
@@ -25625,8 +25520,8 @@
         </p:nvSpPr>
         <p:spPr>
           <a:xfrm>
-            <a:off x="6254496" y="4443983"/>
-            <a:ext cx="2441448" cy="603504"/>
+            <a:off x="530352" y="4443984"/>
+            <a:ext cx="1892807" cy="603504"/>
           </a:xfrm>
           <a:prstGeom prst="rect">
             <a:avLst/>
@@ -25651,7 +25546,7 @@
                 </a:solidFill>
                 <a:latin typeface="Calibri"/>
               </a:rPr>
-              <a:t>Amount + currency + IBAN + beneficiary → live rate + FCA fee disclosure → biometric confirm. 5 currencies (EUR/USD/CHF/AUD/CAD). MLR 2017 screening flag ≥£50k. SWIFT ref to audit trail.</a:t>
+              <a:t>Amount + currency + IBAN → live rate + FCA fee → biometric confirm. 5 currencies.</a:t>
             </a:r>
           </a:p>
         </p:txBody>
@@ -25664,8 +25559,8 @@
         </p:nvSpPr>
         <p:spPr>
           <a:xfrm>
-            <a:off x="8970264" y="3840479"/>
-            <a:ext cx="2697480" cy="1261872"/>
+            <a:off x="2697480" y="3840480"/>
+            <a:ext cx="2148840" cy="1261872"/>
           </a:xfrm>
           <a:prstGeom prst="rect">
             <a:avLst/>
@@ -25709,8 +25604,8 @@
         </p:nvSpPr>
         <p:spPr>
           <a:xfrm>
-            <a:off x="8970264" y="3840479"/>
-            <a:ext cx="50292" cy="1261872"/>
+            <a:off x="2697480" y="3840480"/>
+            <a:ext cx="54864" cy="1261872"/>
           </a:xfrm>
           <a:prstGeom prst="rect">
             <a:avLst/>
@@ -25752,8 +25647,8 @@
         </p:nvSpPr>
         <p:spPr>
           <a:xfrm>
-            <a:off x="9116568" y="3931919"/>
-            <a:ext cx="2478024" cy="365760"/>
+            <a:off x="2843784" y="3931920"/>
+            <a:ext cx="1929384" cy="365760"/>
           </a:xfrm>
           <a:prstGeom prst="rect">
             <a:avLst/>
@@ -25787,8 +25682,8 @@
         </p:nvSpPr>
         <p:spPr>
           <a:xfrm>
-            <a:off x="9116568" y="4261103"/>
-            <a:ext cx="2478024" cy="182880"/>
+            <a:off x="2843784" y="4261104"/>
+            <a:ext cx="1929384" cy="182880"/>
           </a:xfrm>
           <a:prstGeom prst="rect">
             <a:avLst/>
@@ -25822,8 +25717,8 @@
         </p:nvSpPr>
         <p:spPr>
           <a:xfrm>
-            <a:off x="9116568" y="4443983"/>
-            <a:ext cx="2441448" cy="603504"/>
+            <a:off x="2843784" y="4443984"/>
+            <a:ext cx="1892807" cy="603504"/>
           </a:xfrm>
           <a:prstGeom prst="rect">
             <a:avLst/>
@@ -25848,7 +25743,7 @@
                 </a:solidFill>
                 <a:latin typeface="Calibri"/>
               </a:rPr>
-              <a:t>Overview of active DDs (Guarantee-protected) and standing orders → set up a standing order (payee + CoP, amount, frequency, start date) or cancel a Direct Debit under the Direct Debit Guarantee.</a:t>
+              <a:t>Active DDs (Guarantee-protected) + standing orders → set up or cancel. You control push.</a:t>
             </a:r>
           </a:p>
         </p:txBody>
@@ -25861,8 +25756,8 @@
         </p:nvSpPr>
         <p:spPr>
           <a:xfrm>
-            <a:off x="384048" y="5248655"/>
-            <a:ext cx="2697480" cy="1261872"/>
+            <a:off x="5010912" y="3840480"/>
+            <a:ext cx="2148840" cy="1261872"/>
           </a:xfrm>
           <a:prstGeom prst="rect">
             <a:avLst/>
@@ -25906,8 +25801,8 @@
         </p:nvSpPr>
         <p:spPr>
           <a:xfrm>
-            <a:off x="384048" y="5248655"/>
-            <a:ext cx="50292" cy="1261872"/>
+            <a:off x="5010912" y="3840480"/>
+            <a:ext cx="54864" cy="1261872"/>
           </a:xfrm>
           <a:prstGeom prst="rect">
             <a:avLst/>
@@ -25949,8 +25844,8 @@
         </p:nvSpPr>
         <p:spPr>
           <a:xfrm>
-            <a:off x="530352" y="5340095"/>
-            <a:ext cx="2478024" cy="365760"/>
+            <a:off x="5157216" y="3931920"/>
+            <a:ext cx="1929384" cy="365760"/>
           </a:xfrm>
           <a:prstGeom prst="rect">
             <a:avLst/>
@@ -25984,8 +25879,8 @@
         </p:nvSpPr>
         <p:spPr>
           <a:xfrm>
-            <a:off x="530352" y="5669279"/>
-            <a:ext cx="2478024" cy="182880"/>
+            <a:off x="5157216" y="4261104"/>
+            <a:ext cx="1929384" cy="182880"/>
           </a:xfrm>
           <a:prstGeom prst="rect">
             <a:avLst/>
@@ -26019,8 +25914,8 @@
         </p:nvSpPr>
         <p:spPr>
           <a:xfrm>
-            <a:off x="530352" y="5852159"/>
-            <a:ext cx="2441448" cy="603504"/>
+            <a:off x="5157216" y="4443984"/>
+            <a:ext cx="1892807" cy="603504"/>
           </a:xfrm>
           <a:prstGeom prst="rect">
             <a:avLst/>
@@ -26045,7 +25940,7 @@
                 </a:solidFill>
                 <a:latin typeface="Calibri"/>
               </a:rPr>
-              <a:t>Intake → escalation triage → denial → case outcome. FCA DISP-compliant. Eligible-complainant check (DISP 2.7), escalation flags, denial reason, optional goodwill. From the Log complaint tile.</a:t>
+              <a:t>Intake → triage → denial → outcome. FCA DISP-compliant; eligible-complainant check.</a:t>
             </a:r>
           </a:p>
         </p:txBody>
@@ -26194,6 +26089,794 @@
                 <a:latin typeface="Calibri"/>
               </a:rPr>
               <a:t>4</a:t>
+            </a:r>
+          </a:p>
+        </p:txBody>
+      </p:sp>
+      <p:sp>
+        <p:nvSpPr>
+          <p:cNvPr id="7" name="NEW13_bg"/>
+          <p:cNvSpPr/>
+          <p:nvPr/>
+        </p:nvSpPr>
+        <p:spPr>
+          <a:xfrm>
+            <a:off x="7324344" y="3840480"/>
+            <a:ext cx="2148840" cy="1261872"/>
+          </a:xfrm>
+          <a:prstGeom prst="rect">
+            <a:avLst/>
+          </a:prstGeom>
+          <a:solidFill>
+            <a:srgbClr val="FFFFFF"/>
+          </a:solidFill>
+          <a:ln w="9525">
+            <a:solidFill>
+              <a:srgbClr val="E7E5E4"/>
+            </a:solidFill>
+          </a:ln>
+        </p:spPr>
+        <p:style>
+          <a:lnRef idx="1">
+            <a:schemeClr val="accent1"/>
+          </a:lnRef>
+          <a:fillRef idx="3">
+            <a:schemeClr val="accent1"/>
+          </a:fillRef>
+          <a:effectRef idx="2">
+            <a:schemeClr val="accent1"/>
+          </a:effectRef>
+          <a:fontRef idx="minor">
+            <a:schemeClr val="lt1"/>
+          </a:fontRef>
+        </p:style>
+        <p:txBody>
+          <a:bodyPr rtlCol="0" anchor="ctr"/>
+          <a:lstStyle/>
+          <a:p>
+            <a:pPr algn="ctr"/>
+          </a:p>
+        </p:txBody>
+      </p:sp>
+      <p:sp>
+        <p:nvSpPr>
+          <p:cNvPr id="8" name="NEW13_accent"/>
+          <p:cNvSpPr/>
+          <p:nvPr/>
+        </p:nvSpPr>
+        <p:spPr>
+          <a:xfrm>
+            <a:off x="7324344" y="3840480"/>
+            <a:ext cx="54864" cy="1261872"/>
+          </a:xfrm>
+          <a:prstGeom prst="rect">
+            <a:avLst/>
+          </a:prstGeom>
+          <a:solidFill>
+            <a:srgbClr val="DA291C"/>
+          </a:solidFill>
+          <a:ln>
+            <a:noFill/>
+          </a:ln>
+        </p:spPr>
+        <p:style>
+          <a:lnRef idx="1">
+            <a:schemeClr val="accent1"/>
+          </a:lnRef>
+          <a:fillRef idx="3">
+            <a:schemeClr val="accent1"/>
+          </a:fillRef>
+          <a:effectRef idx="2">
+            <a:schemeClr val="accent1"/>
+          </a:effectRef>
+          <a:fontRef idx="minor">
+            <a:schemeClr val="lt1"/>
+          </a:fontRef>
+        </p:style>
+        <p:txBody>
+          <a:bodyPr rtlCol="0" anchor="ctr"/>
+          <a:lstStyle/>
+          <a:p>
+            <a:pPr algn="ctr"/>
+          </a:p>
+        </p:txBody>
+      </p:sp>
+      <p:sp>
+        <p:nvSpPr>
+          <p:cNvPr id="9" name="NEW13_title"/>
+          <p:cNvSpPr txBox="1"/>
+          <p:nvPr/>
+        </p:nvSpPr>
+        <p:spPr>
+          <a:xfrm>
+            <a:off x="7470648" y="3931920"/>
+            <a:ext cx="1929384" cy="365760"/>
+          </a:xfrm>
+          <a:prstGeom prst="rect">
+            <a:avLst/>
+          </a:prstGeom>
+          <a:noFill/>
+        </p:spPr>
+        <p:txBody>
+          <a:bodyPr wrap="square">
+            <a:noAutofit/>
+          </a:bodyPr>
+          <a:lstStyle/>
+          <a:p>
+            <a:pPr algn="l"/>
+            <a:r>
+              <a:rPr sz="900" b="1" i="0">
+                <a:solidFill>
+                  <a:srgbClr val="1C1917"/>
+                </a:solidFill>
+                <a:latin typeface="Calibri"/>
+              </a:rPr>
+              <a:t>Dispute a Payment</a:t>
+            </a:r>
+          </a:p>
+        </p:txBody>
+      </p:sp>
+      <p:sp>
+        <p:nvSpPr>
+          <p:cNvPr id="10" name="NEW13_steps"/>
+          <p:cNvSpPr txBox="1"/>
+          <p:nvPr/>
+        </p:nvSpPr>
+        <p:spPr>
+          <a:xfrm>
+            <a:off x="7470648" y="4261104"/>
+            <a:ext cx="1929384" cy="182880"/>
+          </a:xfrm>
+          <a:prstGeom prst="rect">
+            <a:avLst/>
+          </a:prstGeom>
+          <a:noFill/>
+        </p:spPr>
+        <p:txBody>
+          <a:bodyPr wrap="square">
+            <a:noAutofit/>
+          </a:bodyPr>
+          <a:lstStyle/>
+          <a:p>
+            <a:pPr algn="l"/>
+            <a:r>
+              <a:rPr sz="700" b="1" i="0">
+                <a:solidFill>
+                  <a:srgbClr val="DA291C"/>
+                </a:solidFill>
+                <a:latin typeface="Calibri"/>
+              </a:rPr>
+              <a:t>4 steps</a:t>
+            </a:r>
+          </a:p>
+        </p:txBody>
+      </p:sp>
+      <p:sp>
+        <p:nvSpPr>
+          <p:cNvPr id="11" name="NEW13_desc"/>
+          <p:cNvSpPr txBox="1"/>
+          <p:nvPr/>
+        </p:nvSpPr>
+        <p:spPr>
+          <a:xfrm>
+            <a:off x="7470648" y="4443984"/>
+            <a:ext cx="1892807" cy="603504"/>
+          </a:xfrm>
+          <a:prstGeom prst="rect">
+            <a:avLst/>
+          </a:prstGeom>
+          <a:noFill/>
+        </p:spPr>
+        <p:txBody>
+          <a:bodyPr wrap="square">
+            <a:noAutofit/>
+          </a:bodyPr>
+          <a:lstStyle/>
+          <a:p>
+            <a:pPr>
+              <a:spcAft>
+                <a:spcPts val="200"/>
+              </a:spcAft>
+            </a:pPr>
+            <a:r>
+              <a:rPr sz="700">
+                <a:solidFill>
+                  <a:srgbClr val="78716C"/>
+                </a:solidFill>
+                <a:latin typeface="Calibri"/>
+              </a:rPr>
+              <a:t>Payment → reason (chargeback / fraud / DD Guarantee) → evidence → review. Provisional refund.</a:t>
+            </a:r>
+          </a:p>
+        </p:txBody>
+      </p:sp>
+      <p:sp>
+        <p:nvSpPr>
+          <p:cNvPr id="7" name="NEW14_bg"/>
+          <p:cNvSpPr/>
+          <p:nvPr/>
+        </p:nvSpPr>
+        <p:spPr>
+          <a:xfrm>
+            <a:off x="9637776" y="3840480"/>
+            <a:ext cx="2148840" cy="1261872"/>
+          </a:xfrm>
+          <a:prstGeom prst="rect">
+            <a:avLst/>
+          </a:prstGeom>
+          <a:solidFill>
+            <a:srgbClr val="FFFFFF"/>
+          </a:solidFill>
+          <a:ln w="9525">
+            <a:solidFill>
+              <a:srgbClr val="E7E5E4"/>
+            </a:solidFill>
+          </a:ln>
+        </p:spPr>
+        <p:style>
+          <a:lnRef idx="1">
+            <a:schemeClr val="accent1"/>
+          </a:lnRef>
+          <a:fillRef idx="3">
+            <a:schemeClr val="accent1"/>
+          </a:fillRef>
+          <a:effectRef idx="2">
+            <a:schemeClr val="accent1"/>
+          </a:effectRef>
+          <a:fontRef idx="minor">
+            <a:schemeClr val="lt1"/>
+          </a:fontRef>
+        </p:style>
+        <p:txBody>
+          <a:bodyPr rtlCol="0" anchor="ctr"/>
+          <a:lstStyle/>
+          <a:p>
+            <a:pPr algn="ctr"/>
+          </a:p>
+        </p:txBody>
+      </p:sp>
+      <p:sp>
+        <p:nvSpPr>
+          <p:cNvPr id="8" name="NEW14_accent"/>
+          <p:cNvSpPr/>
+          <p:nvPr/>
+        </p:nvSpPr>
+        <p:spPr>
+          <a:xfrm>
+            <a:off x="9637776" y="3840480"/>
+            <a:ext cx="54864" cy="1261872"/>
+          </a:xfrm>
+          <a:prstGeom prst="rect">
+            <a:avLst/>
+          </a:prstGeom>
+          <a:solidFill>
+            <a:srgbClr val="DA291C"/>
+          </a:solidFill>
+          <a:ln>
+            <a:noFill/>
+          </a:ln>
+        </p:spPr>
+        <p:style>
+          <a:lnRef idx="1">
+            <a:schemeClr val="accent1"/>
+          </a:lnRef>
+          <a:fillRef idx="3">
+            <a:schemeClr val="accent1"/>
+          </a:fillRef>
+          <a:effectRef idx="2">
+            <a:schemeClr val="accent1"/>
+          </a:effectRef>
+          <a:fontRef idx="minor">
+            <a:schemeClr val="lt1"/>
+          </a:fontRef>
+        </p:style>
+        <p:txBody>
+          <a:bodyPr rtlCol="0" anchor="ctr"/>
+          <a:lstStyle/>
+          <a:p>
+            <a:pPr algn="ctr"/>
+          </a:p>
+        </p:txBody>
+      </p:sp>
+      <p:sp>
+        <p:nvSpPr>
+          <p:cNvPr id="9" name="NEW14_title"/>
+          <p:cNvSpPr txBox="1"/>
+          <p:nvPr/>
+        </p:nvSpPr>
+        <p:spPr>
+          <a:xfrm>
+            <a:off x="9784080" y="3931920"/>
+            <a:ext cx="1929384" cy="365760"/>
+          </a:xfrm>
+          <a:prstGeom prst="rect">
+            <a:avLst/>
+          </a:prstGeom>
+          <a:noFill/>
+        </p:spPr>
+        <p:txBody>
+          <a:bodyPr wrap="square">
+            <a:noAutofit/>
+          </a:bodyPr>
+          <a:lstStyle/>
+          <a:p>
+            <a:pPr algn="l"/>
+            <a:r>
+              <a:rPr sz="900" b="1" i="0">
+                <a:solidFill>
+                  <a:srgbClr val="1C1917"/>
+                </a:solidFill>
+                <a:latin typeface="Calibri"/>
+              </a:rPr>
+              <a:t>International Beneficiary</a:t>
+            </a:r>
+          </a:p>
+        </p:txBody>
+      </p:sp>
+      <p:sp>
+        <p:nvSpPr>
+          <p:cNvPr id="10" name="NEW14_steps"/>
+          <p:cNvSpPr txBox="1"/>
+          <p:nvPr/>
+        </p:nvSpPr>
+        <p:spPr>
+          <a:xfrm>
+            <a:off x="9784080" y="4261104"/>
+            <a:ext cx="1929384" cy="182880"/>
+          </a:xfrm>
+          <a:prstGeom prst="rect">
+            <a:avLst/>
+          </a:prstGeom>
+          <a:noFill/>
+        </p:spPr>
+        <p:txBody>
+          <a:bodyPr wrap="square">
+            <a:noAutofit/>
+          </a:bodyPr>
+          <a:lstStyle/>
+          <a:p>
+            <a:pPr algn="l"/>
+            <a:r>
+              <a:rPr sz="700" b="1" i="0">
+                <a:solidFill>
+                  <a:srgbClr val="DA291C"/>
+                </a:solidFill>
+                <a:latin typeface="Calibri"/>
+              </a:rPr>
+              <a:t>4 steps</a:t>
+            </a:r>
+          </a:p>
+        </p:txBody>
+      </p:sp>
+      <p:sp>
+        <p:nvSpPr>
+          <p:cNvPr id="11" name="NEW14_desc"/>
+          <p:cNvSpPr txBox="1"/>
+          <p:nvPr/>
+        </p:nvSpPr>
+        <p:spPr>
+          <a:xfrm>
+            <a:off x="9784080" y="4443984"/>
+            <a:ext cx="1892807" cy="603504"/>
+          </a:xfrm>
+          <a:prstGeom prst="rect">
+            <a:avLst/>
+          </a:prstGeom>
+          <a:noFill/>
+        </p:spPr>
+        <p:txBody>
+          <a:bodyPr wrap="square">
+            <a:noAutofit/>
+          </a:bodyPr>
+          <a:lstStyle/>
+          <a:p>
+            <a:pPr>
+              <a:spcAft>
+                <a:spcPts val="200"/>
+              </a:spcAft>
+            </a:pPr>
+            <a:r>
+              <a:rPr sz="700">
+                <a:solidFill>
+                  <a:srgbClr val="78716C"/>
+                </a:solidFill>
+                <a:latin typeface="Calibri"/>
+              </a:rPr>
+              <a:t>Payee → account (IBAN/SWIFT) → purpose &amp; sanctions screening → review. Audit-logged.</a:t>
+            </a:r>
+          </a:p>
+        </p:txBody>
+      </p:sp>
+      <p:sp>
+        <p:nvSpPr>
+          <p:cNvPr id="7" name="NEW15_bg"/>
+          <p:cNvSpPr/>
+          <p:nvPr/>
+        </p:nvSpPr>
+        <p:spPr>
+          <a:xfrm>
+            <a:off x="384048" y="5248656"/>
+            <a:ext cx="2148840" cy="1261872"/>
+          </a:xfrm>
+          <a:prstGeom prst="rect">
+            <a:avLst/>
+          </a:prstGeom>
+          <a:solidFill>
+            <a:srgbClr val="FFFFFF"/>
+          </a:solidFill>
+          <a:ln w="9525">
+            <a:solidFill>
+              <a:srgbClr val="E7E5E4"/>
+            </a:solidFill>
+          </a:ln>
+        </p:spPr>
+        <p:style>
+          <a:lnRef idx="1">
+            <a:schemeClr val="accent1"/>
+          </a:lnRef>
+          <a:fillRef idx="3">
+            <a:schemeClr val="accent1"/>
+          </a:fillRef>
+          <a:effectRef idx="2">
+            <a:schemeClr val="accent1"/>
+          </a:effectRef>
+          <a:fontRef idx="minor">
+            <a:schemeClr val="lt1"/>
+          </a:fontRef>
+        </p:style>
+        <p:txBody>
+          <a:bodyPr rtlCol="0" anchor="ctr"/>
+          <a:lstStyle/>
+          <a:p>
+            <a:pPr algn="ctr"/>
+          </a:p>
+        </p:txBody>
+      </p:sp>
+      <p:sp>
+        <p:nvSpPr>
+          <p:cNvPr id="8" name="NEW15_accent"/>
+          <p:cNvSpPr/>
+          <p:nvPr/>
+        </p:nvSpPr>
+        <p:spPr>
+          <a:xfrm>
+            <a:off x="384048" y="5248656"/>
+            <a:ext cx="54864" cy="1261872"/>
+          </a:xfrm>
+          <a:prstGeom prst="rect">
+            <a:avLst/>
+          </a:prstGeom>
+          <a:solidFill>
+            <a:srgbClr val="DA291C"/>
+          </a:solidFill>
+          <a:ln>
+            <a:noFill/>
+          </a:ln>
+        </p:spPr>
+        <p:style>
+          <a:lnRef idx="1">
+            <a:schemeClr val="accent1"/>
+          </a:lnRef>
+          <a:fillRef idx="3">
+            <a:schemeClr val="accent1"/>
+          </a:fillRef>
+          <a:effectRef idx="2">
+            <a:schemeClr val="accent1"/>
+          </a:effectRef>
+          <a:fontRef idx="minor">
+            <a:schemeClr val="lt1"/>
+          </a:fontRef>
+        </p:style>
+        <p:txBody>
+          <a:bodyPr rtlCol="0" anchor="ctr"/>
+          <a:lstStyle/>
+          <a:p>
+            <a:pPr algn="ctr"/>
+          </a:p>
+        </p:txBody>
+      </p:sp>
+      <p:sp>
+        <p:nvSpPr>
+          <p:cNvPr id="9" name="NEW15_title"/>
+          <p:cNvSpPr txBox="1"/>
+          <p:nvPr/>
+        </p:nvSpPr>
+        <p:spPr>
+          <a:xfrm>
+            <a:off x="530352" y="5340096"/>
+            <a:ext cx="1929384" cy="365760"/>
+          </a:xfrm>
+          <a:prstGeom prst="rect">
+            <a:avLst/>
+          </a:prstGeom>
+          <a:noFill/>
+        </p:spPr>
+        <p:txBody>
+          <a:bodyPr wrap="square">
+            <a:noAutofit/>
+          </a:bodyPr>
+          <a:lstStyle/>
+          <a:p>
+            <a:pPr algn="l"/>
+            <a:r>
+              <a:rPr sz="900" b="1" i="0">
+                <a:solidFill>
+                  <a:srgbClr val="1C1917"/>
+                </a:solidFill>
+                <a:latin typeface="Calibri"/>
+              </a:rPr>
+              <a:t>Balance Certificate</a:t>
+            </a:r>
+          </a:p>
+        </p:txBody>
+      </p:sp>
+      <p:sp>
+        <p:nvSpPr>
+          <p:cNvPr id="10" name="NEW15_steps"/>
+          <p:cNvSpPr txBox="1"/>
+          <p:nvPr/>
+        </p:nvSpPr>
+        <p:spPr>
+          <a:xfrm>
+            <a:off x="530352" y="5669280"/>
+            <a:ext cx="1929384" cy="182880"/>
+          </a:xfrm>
+          <a:prstGeom prst="rect">
+            <a:avLst/>
+          </a:prstGeom>
+          <a:noFill/>
+        </p:spPr>
+        <p:txBody>
+          <a:bodyPr wrap="square">
+            <a:noAutofit/>
+          </a:bodyPr>
+          <a:lstStyle/>
+          <a:p>
+            <a:pPr algn="l"/>
+            <a:r>
+              <a:rPr sz="700" b="1" i="0">
+                <a:solidFill>
+                  <a:srgbClr val="DA291C"/>
+                </a:solidFill>
+                <a:latin typeface="Calibri"/>
+              </a:rPr>
+              <a:t>4 steps</a:t>
+            </a:r>
+          </a:p>
+        </p:txBody>
+      </p:sp>
+      <p:sp>
+        <p:nvSpPr>
+          <p:cNvPr id="11" name="NEW15_desc"/>
+          <p:cNvSpPr txBox="1"/>
+          <p:nvPr/>
+        </p:nvSpPr>
+        <p:spPr>
+          <a:xfrm>
+            <a:off x="530352" y="5852160"/>
+            <a:ext cx="1892807" cy="603504"/>
+          </a:xfrm>
+          <a:prstGeom prst="rect">
+            <a:avLst/>
+          </a:prstGeom>
+          <a:noFill/>
+        </p:spPr>
+        <p:txBody>
+          <a:bodyPr wrap="square">
+            <a:noAutofit/>
+          </a:bodyPr>
+          <a:lstStyle/>
+          <a:p>
+            <a:pPr>
+              <a:spcAft>
+                <a:spcPts val="200"/>
+              </a:spcAft>
+            </a:pPr>
+            <a:r>
+              <a:rPr sz="700">
+                <a:solidFill>
+                  <a:srgbClr val="78716C"/>
+                </a:solidFill>
+                <a:latin typeface="Calibri"/>
+              </a:rPr>
+              <a:t>Certificate type → accounts &amp; date → purpose &amp; delivery → sealed PDF. No postal wait.</a:t>
+            </a:r>
+          </a:p>
+        </p:txBody>
+      </p:sp>
+      <p:sp>
+        <p:nvSpPr>
+          <p:cNvPr id="7" name="NEW16_bg"/>
+          <p:cNvSpPr/>
+          <p:nvPr/>
+        </p:nvSpPr>
+        <p:spPr>
+          <a:xfrm>
+            <a:off x="2697480" y="5248656"/>
+            <a:ext cx="2148840" cy="1261872"/>
+          </a:xfrm>
+          <a:prstGeom prst="rect">
+            <a:avLst/>
+          </a:prstGeom>
+          <a:solidFill>
+            <a:srgbClr val="FFFFFF"/>
+          </a:solidFill>
+          <a:ln w="9525">
+            <a:solidFill>
+              <a:srgbClr val="E7E5E4"/>
+            </a:solidFill>
+          </a:ln>
+        </p:spPr>
+        <p:style>
+          <a:lnRef idx="1">
+            <a:schemeClr val="accent1"/>
+          </a:lnRef>
+          <a:fillRef idx="3">
+            <a:schemeClr val="accent1"/>
+          </a:fillRef>
+          <a:effectRef idx="2">
+            <a:schemeClr val="accent1"/>
+          </a:effectRef>
+          <a:fontRef idx="minor">
+            <a:schemeClr val="lt1"/>
+          </a:fontRef>
+        </p:style>
+        <p:txBody>
+          <a:bodyPr rtlCol="0" anchor="ctr"/>
+          <a:lstStyle/>
+          <a:p>
+            <a:pPr algn="ctr"/>
+          </a:p>
+        </p:txBody>
+      </p:sp>
+      <p:sp>
+        <p:nvSpPr>
+          <p:cNvPr id="8" name="NEW16_accent"/>
+          <p:cNvSpPr/>
+          <p:nvPr/>
+        </p:nvSpPr>
+        <p:spPr>
+          <a:xfrm>
+            <a:off x="2697480" y="5248656"/>
+            <a:ext cx="54864" cy="1261872"/>
+          </a:xfrm>
+          <a:prstGeom prst="rect">
+            <a:avLst/>
+          </a:prstGeom>
+          <a:solidFill>
+            <a:srgbClr val="DA291C"/>
+          </a:solidFill>
+          <a:ln>
+            <a:noFill/>
+          </a:ln>
+        </p:spPr>
+        <p:style>
+          <a:lnRef idx="1">
+            <a:schemeClr val="accent1"/>
+          </a:lnRef>
+          <a:fillRef idx="3">
+            <a:schemeClr val="accent1"/>
+          </a:fillRef>
+          <a:effectRef idx="2">
+            <a:schemeClr val="accent1"/>
+          </a:effectRef>
+          <a:fontRef idx="minor">
+            <a:schemeClr val="lt1"/>
+          </a:fontRef>
+        </p:style>
+        <p:txBody>
+          <a:bodyPr rtlCol="0" anchor="ctr"/>
+          <a:lstStyle/>
+          <a:p>
+            <a:pPr algn="ctr"/>
+          </a:p>
+        </p:txBody>
+      </p:sp>
+      <p:sp>
+        <p:nvSpPr>
+          <p:cNvPr id="9" name="NEW16_title"/>
+          <p:cNvSpPr txBox="1"/>
+          <p:nvPr/>
+        </p:nvSpPr>
+        <p:spPr>
+          <a:xfrm>
+            <a:off x="2843784" y="5340096"/>
+            <a:ext cx="1929384" cy="365760"/>
+          </a:xfrm>
+          <a:prstGeom prst="rect">
+            <a:avLst/>
+          </a:prstGeom>
+          <a:noFill/>
+        </p:spPr>
+        <p:txBody>
+          <a:bodyPr wrap="square">
+            <a:noAutofit/>
+          </a:bodyPr>
+          <a:lstStyle/>
+          <a:p>
+            <a:pPr algn="l"/>
+            <a:r>
+              <a:rPr sz="900" b="1" i="0">
+                <a:solidFill>
+                  <a:srgbClr val="1C1917"/>
+                </a:solidFill>
+                <a:latin typeface="Calibri"/>
+              </a:rPr>
+              <a:t>Devices &amp; Sessions</a:t>
+            </a:r>
+          </a:p>
+        </p:txBody>
+      </p:sp>
+      <p:sp>
+        <p:nvSpPr>
+          <p:cNvPr id="10" name="NEW16_steps"/>
+          <p:cNvSpPr txBox="1"/>
+          <p:nvPr/>
+        </p:nvSpPr>
+        <p:spPr>
+          <a:xfrm>
+            <a:off x="2843784" y="5669280"/>
+            <a:ext cx="1929384" cy="182880"/>
+          </a:xfrm>
+          <a:prstGeom prst="rect">
+            <a:avLst/>
+          </a:prstGeom>
+          <a:noFill/>
+        </p:spPr>
+        <p:txBody>
+          <a:bodyPr wrap="square">
+            <a:noAutofit/>
+          </a:bodyPr>
+          <a:lstStyle/>
+          <a:p>
+            <a:pPr algn="l"/>
+            <a:r>
+              <a:rPr sz="700" b="1" i="0">
+                <a:solidFill>
+                  <a:srgbClr val="DA291C"/>
+                </a:solidFill>
+                <a:latin typeface="Calibri"/>
+              </a:rPr>
+              <a:t>4 steps</a:t>
+            </a:r>
+          </a:p>
+        </p:txBody>
+      </p:sp>
+      <p:sp>
+        <p:nvSpPr>
+          <p:cNvPr id="11" name="NEW16_desc"/>
+          <p:cNvSpPr txBox="1"/>
+          <p:nvPr/>
+        </p:nvSpPr>
+        <p:spPr>
+          <a:xfrm>
+            <a:off x="2843784" y="5852160"/>
+            <a:ext cx="1892807" cy="603504"/>
+          </a:xfrm>
+          <a:prstGeom prst="rect">
+            <a:avLst/>
+          </a:prstGeom>
+          <a:noFill/>
+        </p:spPr>
+        <p:txBody>
+          <a:bodyPr wrap="square">
+            <a:noAutofit/>
+          </a:bodyPr>
+          <a:lstStyle/>
+          <a:p>
+            <a:pPr>
+              <a:spcAft>
+                <a:spcPts val="200"/>
+              </a:spcAft>
+            </a:pPr>
+            <a:r>
+              <a:rPr sz="700">
+                <a:solidFill>
+                  <a:srgbClr val="78716C"/>
+                </a:solidFill>
+                <a:latin typeface="Calibri"/>
+              </a:rPr>
+              <a:t>Devices &amp; recent sign-ins → security preferences → sign out others. SCA-protected.</a:t>
             </a:r>
           </a:p>
         </p:txBody>

--- a/Santander_Project_Record.pptx
+++ b/Santander_Project_Record.pptx
@@ -10898,7 +10898,7 @@
                 </a:solidFill>
                 <a:latin typeface="Calibri"/>
               </a:rPr>
-              <a:t>What we built — 21 features (4-col grid)</a:t>
+              <a:t>What we built — 36 features (4-col grid)</a:t>
             </a:r>
           </a:p>
         </p:txBody>
@@ -19950,7 +19950,7 @@
                 </a:solidFill>
                 <a:latin typeface="Calibri"/>
               </a:rPr>
-              <a:t>13 step-based workflow wizards covering every key banking operation</a:t>
+              <a:t>17 step-based workflow wizards covering every key banking operation</a:t>
             </a:r>
           </a:p>
           <a:p>
@@ -19966,7 +19966,7 @@
                 </a:solidFill>
                 <a:latin typeface="Calibri"/>
               </a:rPr>
-              <a:t>5 sheet overlays for quick-access tasks (notifications, receipts, PIN, open banking, voice)</a:t>
+              <a:t>16 sheet overlays for quick-access tasks (notifications, receipts, PIN, open banking, voice)</a:t>
             </a:r>
           </a:p>
           <a:p>
@@ -19998,7 +19998,7 @@
                 </a:solidFill>
                 <a:latin typeface="Calibri"/>
               </a:rPr>
-              <a:t>21 features across dashboard intelligence, paperless workflows, security, and compliance</a:t>
+              <a:t>36 features across dashboard intelligence, paperless workflows, security, and compliance</a:t>
             </a:r>
           </a:p>
           <a:p>
@@ -20656,7 +20656,7 @@
                 </a:solidFill>
                 <a:latin typeface="Calibri"/>
               </a:rPr>
-              <a:t>Fraunces (display) · Geist (body) · Geist Mono</a:t>
+              <a:t>Santander Text (Geist fallback) · Geist Mono</a:t>
             </a:r>
           </a:p>
         </p:txBody>

--- a/Santander_Project_Record.pptx
+++ b/Santander_Project_Record.pptx
@@ -3159,7 +3159,7 @@
             <a:avLst/>
           </a:prstGeom>
           <a:solidFill>
-            <a:srgbClr val="DA291C"/>
+            <a:srgbClr val="EC0000"/>
           </a:solidFill>
           <a:ln>
             <a:noFill/>
@@ -3202,7 +3202,7 @@
             <a:avLst/>
           </a:prstGeom>
           <a:solidFill>
-            <a:srgbClr val="DA291C"/>
+            <a:srgbClr val="EC0000"/>
           </a:solidFill>
           <a:ln>
             <a:noFill/>
@@ -3245,7 +3245,7 @@
             <a:avLst/>
           </a:prstGeom>
           <a:solidFill>
-            <a:srgbClr val="DA291C"/>
+            <a:srgbClr val="EC0000"/>
           </a:solidFill>
           <a:ln>
             <a:noFill/>
@@ -3428,7 +3428,7 @@
             <a:avLst/>
           </a:prstGeom>
           <a:solidFill>
-            <a:srgbClr val="DA291C"/>
+            <a:srgbClr val="EC0000"/>
           </a:solidFill>
           <a:ln>
             <a:noFill/>
@@ -3601,7 +3601,7 @@
             <a:avLst/>
           </a:prstGeom>
           <a:solidFill>
-            <a:srgbClr val="DA291C"/>
+            <a:srgbClr val="EC0000"/>
           </a:solidFill>
           <a:ln>
             <a:noFill/>
@@ -3659,7 +3659,7 @@
                 </a:solidFill>
                 <a:latin typeface="Calibri"/>
               </a:rPr>
-              <a:t>21</a:t>
+              <a:t>36</a:t>
             </a:r>
           </a:p>
         </p:txBody>
@@ -3757,7 +3757,7 @@
             <a:avLst/>
           </a:prstGeom>
           <a:solidFill>
-            <a:srgbClr val="DA291C"/>
+            <a:srgbClr val="EC0000"/>
           </a:solidFill>
           <a:ln>
             <a:noFill/>
@@ -3815,7 +3815,7 @@
                 </a:solidFill>
                 <a:latin typeface="Calibri"/>
               </a:rPr>
-              <a:t>13</a:t>
+              <a:t>17</a:t>
             </a:r>
           </a:p>
         </p:txBody>
@@ -3913,7 +3913,7 @@
             <a:avLst/>
           </a:prstGeom>
           <a:solidFill>
-            <a:srgbClr val="DA291C"/>
+            <a:srgbClr val="EC0000"/>
           </a:solidFill>
           <a:ln>
             <a:noFill/>
@@ -4069,7 +4069,7 @@
             <a:avLst/>
           </a:prstGeom>
           <a:solidFill>
-            <a:srgbClr val="DA291C"/>
+            <a:srgbClr val="EC0000"/>
           </a:solidFill>
           <a:ln>
             <a:noFill/>
@@ -4259,7 +4259,7 @@
             <a:avLst/>
           </a:prstGeom>
           <a:solidFill>
-            <a:srgbClr val="FAF6EF"/>
+            <a:srgbClr val="FBF1EA"/>
           </a:solidFill>
           <a:ln>
             <a:noFill/>
@@ -4302,7 +4302,7 @@
             <a:avLst/>
           </a:prstGeom>
           <a:solidFill>
-            <a:srgbClr val="DA291C"/>
+            <a:srgbClr val="EC0000"/>
           </a:solidFill>
           <a:ln>
             <a:noFill/>
@@ -4458,7 +4458,7 @@
             <a:avLst/>
           </a:prstGeom>
           <a:solidFill>
-            <a:srgbClr val="DA291C"/>
+            <a:srgbClr val="EC0000"/>
           </a:solidFill>
           <a:ln>
             <a:noFill/>
@@ -4571,7 +4571,7 @@
             <a:avLst/>
           </a:prstGeom>
           <a:solidFill>
-            <a:srgbClr val="DA291C"/>
+            <a:srgbClr val="EC0000"/>
           </a:solidFill>
           <a:ln>
             <a:noFill/>
@@ -4684,7 +4684,7 @@
             <a:avLst/>
           </a:prstGeom>
           <a:solidFill>
-            <a:srgbClr val="DA291C"/>
+            <a:srgbClr val="EC0000"/>
           </a:solidFill>
           <a:ln>
             <a:noFill/>
@@ -4797,7 +4797,7 @@
             <a:avLst/>
           </a:prstGeom>
           <a:solidFill>
-            <a:srgbClr val="DA291C"/>
+            <a:srgbClr val="EC0000"/>
           </a:solidFill>
           <a:ln>
             <a:noFill/>
@@ -4910,7 +4910,7 @@
             <a:avLst/>
           </a:prstGeom>
           <a:solidFill>
-            <a:srgbClr val="DA291C"/>
+            <a:srgbClr val="EC0000"/>
           </a:solidFill>
           <a:ln>
             <a:noFill/>
@@ -5068,7 +5068,7 @@
             <a:avLst/>
           </a:prstGeom>
           <a:solidFill>
-            <a:srgbClr val="DA291C"/>
+            <a:srgbClr val="EC0000"/>
           </a:solidFill>
           <a:ln>
             <a:noFill/>
@@ -5226,7 +5226,7 @@
             <a:avLst/>
           </a:prstGeom>
           <a:solidFill>
-            <a:srgbClr val="DA291C"/>
+            <a:srgbClr val="EC0000"/>
           </a:solidFill>
           <a:ln>
             <a:noFill/>
@@ -5384,7 +5384,7 @@
             <a:avLst/>
           </a:prstGeom>
           <a:solidFill>
-            <a:srgbClr val="DA291C"/>
+            <a:srgbClr val="EC0000"/>
           </a:solidFill>
           <a:ln>
             <a:noFill/>
@@ -5542,7 +5542,7 @@
             <a:avLst/>
           </a:prstGeom>
           <a:solidFill>
-            <a:srgbClr val="DA291C"/>
+            <a:srgbClr val="EC0000"/>
           </a:solidFill>
           <a:ln>
             <a:noFill/>
@@ -6656,7 +6656,7 @@
             <a:avLst/>
           </a:prstGeom>
           <a:solidFill>
-            <a:srgbClr val="FAF6EF"/>
+            <a:srgbClr val="FBF1EA"/>
           </a:solidFill>
           <a:ln>
             <a:noFill/>
@@ -6699,7 +6699,7 @@
             <a:avLst/>
           </a:prstGeom>
           <a:solidFill>
-            <a:srgbClr val="DA291C"/>
+            <a:srgbClr val="EC0000"/>
           </a:solidFill>
           <a:ln>
             <a:noFill/>
@@ -6900,7 +6900,7 @@
             <a:avLst/>
           </a:prstGeom>
           <a:solidFill>
-            <a:srgbClr val="DA291C"/>
+            <a:srgbClr val="EC0000"/>
           </a:solidFill>
           <a:ln>
             <a:noFill/>
@@ -6989,7 +6989,7 @@
             <a:r>
               <a:rPr sz="1100" b="0" i="0">
                 <a:solidFill>
-                  <a:srgbClr val="DA291C"/>
+                  <a:srgbClr val="EC0000"/>
                 </a:solidFill>
                 <a:latin typeface="Calibri"/>
               </a:rPr>
@@ -7748,7 +7748,7 @@
             <a:avLst/>
           </a:prstGeom>
           <a:solidFill>
-            <a:srgbClr val="DA291C"/>
+            <a:srgbClr val="EC0000"/>
           </a:solidFill>
           <a:ln>
             <a:noFill/>
@@ -8561,7 +8561,7 @@
             <a:avLst/>
           </a:prstGeom>
           <a:solidFill>
-            <a:srgbClr val="DA291C"/>
+            <a:srgbClr val="EC0000"/>
           </a:solidFill>
           <a:ln>
             <a:noFill/>
@@ -9719,7 +9719,7 @@
             <a:avLst/>
           </a:prstGeom>
           <a:solidFill>
-            <a:srgbClr val="DA291C"/>
+            <a:srgbClr val="EC0000"/>
           </a:solidFill>
           <a:ln>
             <a:noFill/>
@@ -10066,7 +10066,7 @@
             <a:avLst/>
           </a:prstGeom>
           <a:solidFill>
-            <a:srgbClr val="FAF6EF"/>
+            <a:srgbClr val="FBF1EA"/>
           </a:solidFill>
           <a:ln>
             <a:noFill/>
@@ -10109,7 +10109,7 @@
             <a:avLst/>
           </a:prstGeom>
           <a:solidFill>
-            <a:srgbClr val="DA291C"/>
+            <a:srgbClr val="EC0000"/>
           </a:solidFill>
           <a:ln>
             <a:noFill/>
@@ -10310,7 +10310,7 @@
             <a:avLst/>
           </a:prstGeom>
           <a:solidFill>
-            <a:srgbClr val="DA291C"/>
+            <a:srgbClr val="EC0000"/>
           </a:solidFill>
           <a:ln>
             <a:noFill/>
@@ -10364,7 +10364,7 @@
             <a:r>
               <a:rPr sz="1000" b="1" i="0">
                 <a:solidFill>
-                  <a:srgbClr val="DA291C"/>
+                  <a:srgbClr val="EC0000"/>
                 </a:solidFill>
                 <a:latin typeface="Calibri"/>
               </a:rPr>
@@ -10520,7 +10520,7 @@
             <a:r>
               <a:rPr sz="750" b="1" i="0">
                 <a:solidFill>
-                  <a:srgbClr val="DA291C"/>
+                  <a:srgbClr val="EC0000"/>
                 </a:solidFill>
                 <a:latin typeface="Calibri"/>
               </a:rPr>
@@ -10633,7 +10633,7 @@
             <a:r>
               <a:rPr sz="750" b="1" i="0">
                 <a:solidFill>
-                  <a:srgbClr val="DA291C"/>
+                  <a:srgbClr val="EC0000"/>
                 </a:solidFill>
                 <a:latin typeface="Calibri"/>
               </a:rPr>
@@ -10746,7 +10746,7 @@
             <a:r>
               <a:rPr sz="750" b="1" i="0">
                 <a:solidFill>
-                  <a:srgbClr val="DA291C"/>
+                  <a:srgbClr val="EC0000"/>
                 </a:solidFill>
                 <a:latin typeface="Calibri"/>
               </a:rPr>
@@ -10859,7 +10859,7 @@
             <a:r>
               <a:rPr sz="750" b="1" i="0">
                 <a:solidFill>
-                  <a:srgbClr val="DA291C"/>
+                  <a:srgbClr val="EC0000"/>
                 </a:solidFill>
                 <a:latin typeface="Calibri"/>
               </a:rPr>
@@ -10972,7 +10972,7 @@
             <a:r>
               <a:rPr sz="750" b="1" i="0">
                 <a:solidFill>
-                  <a:srgbClr val="DA291C"/>
+                  <a:srgbClr val="EC0000"/>
                 </a:solidFill>
                 <a:latin typeface="Calibri"/>
               </a:rPr>
@@ -11085,7 +11085,7 @@
             <a:r>
               <a:rPr sz="750" b="1" i="0">
                 <a:solidFill>
-                  <a:srgbClr val="DA291C"/>
+                  <a:srgbClr val="EC0000"/>
                 </a:solidFill>
                 <a:latin typeface="Calibri"/>
               </a:rPr>
@@ -11198,7 +11198,7 @@
             <a:r>
               <a:rPr sz="750" b="1" i="0">
                 <a:solidFill>
-                  <a:srgbClr val="DA291C"/>
+                  <a:srgbClr val="EC0000"/>
                 </a:solidFill>
                 <a:latin typeface="Calibri"/>
               </a:rPr>
@@ -11311,7 +11311,7 @@
             <a:r>
               <a:rPr sz="750" b="1" i="0">
                 <a:solidFill>
-                  <a:srgbClr val="DA291C"/>
+                  <a:srgbClr val="EC0000"/>
                 </a:solidFill>
                 <a:latin typeface="Calibri"/>
               </a:rPr>
@@ -11424,7 +11424,7 @@
             <a:r>
               <a:rPr sz="750" b="1" i="0">
                 <a:solidFill>
-                  <a:srgbClr val="DA291C"/>
+                  <a:srgbClr val="EC0000"/>
                 </a:solidFill>
                 <a:latin typeface="Calibri"/>
               </a:rPr>
@@ -11537,7 +11537,7 @@
             <a:r>
               <a:rPr sz="750" b="1" i="0">
                 <a:solidFill>
-                  <a:srgbClr val="DA291C"/>
+                  <a:srgbClr val="EC0000"/>
                 </a:solidFill>
                 <a:latin typeface="Calibri"/>
               </a:rPr>
@@ -11650,7 +11650,7 @@
             <a:r>
               <a:rPr sz="750" b="1" i="0">
                 <a:solidFill>
-                  <a:srgbClr val="DA291C"/>
+                  <a:srgbClr val="EC0000"/>
                 </a:solidFill>
                 <a:latin typeface="Calibri"/>
               </a:rPr>
@@ -11763,7 +11763,7 @@
             <a:r>
               <a:rPr sz="750" b="1" i="0">
                 <a:solidFill>
-                  <a:srgbClr val="DA291C"/>
+                  <a:srgbClr val="EC0000"/>
                 </a:solidFill>
                 <a:latin typeface="Calibri"/>
               </a:rPr>
@@ -11876,7 +11876,7 @@
             <a:r>
               <a:rPr sz="750" b="1" i="0">
                 <a:solidFill>
-                  <a:srgbClr val="DA291C"/>
+                  <a:srgbClr val="EC0000"/>
                 </a:solidFill>
                 <a:latin typeface="Calibri"/>
               </a:rPr>
@@ -11989,7 +11989,7 @@
             <a:r>
               <a:rPr sz="750" b="1" i="0">
                 <a:solidFill>
-                  <a:srgbClr val="DA291C"/>
+                  <a:srgbClr val="EC0000"/>
                 </a:solidFill>
                 <a:latin typeface="Calibri"/>
               </a:rPr>
@@ -12102,7 +12102,7 @@
             <a:r>
               <a:rPr sz="750" b="1" i="0">
                 <a:solidFill>
-                  <a:srgbClr val="DA291C"/>
+                  <a:srgbClr val="EC0000"/>
                 </a:solidFill>
                 <a:latin typeface="Calibri"/>
               </a:rPr>
@@ -12215,7 +12215,7 @@
             <a:r>
               <a:rPr sz="750" b="1" i="0">
                 <a:solidFill>
-                  <a:srgbClr val="DA291C"/>
+                  <a:srgbClr val="EC0000"/>
                 </a:solidFill>
                 <a:latin typeface="Calibri"/>
               </a:rPr>
@@ -15589,7 +15589,7 @@
             <a:avLst/>
           </a:prstGeom>
           <a:solidFill>
-            <a:srgbClr val="FAF6EF"/>
+            <a:srgbClr val="FBF1EA"/>
           </a:solidFill>
           <a:ln>
             <a:noFill/>
@@ -15632,7 +15632,7 @@
             <a:avLst/>
           </a:prstGeom>
           <a:solidFill>
-            <a:srgbClr val="DA291C"/>
+            <a:srgbClr val="EC0000"/>
           </a:solidFill>
           <a:ln>
             <a:noFill/>
@@ -15833,7 +15833,7 @@
             <a:avLst/>
           </a:prstGeom>
           <a:solidFill>
-            <a:srgbClr val="DA291C"/>
+            <a:srgbClr val="EC0000"/>
           </a:solidFill>
           <a:ln>
             <a:noFill/>
@@ -15887,7 +15887,7 @@
             <a:r>
               <a:rPr sz="1000" b="1" i="0">
                 <a:solidFill>
-                  <a:srgbClr val="DA291C"/>
+                  <a:srgbClr val="EC0000"/>
                 </a:solidFill>
                 <a:latin typeface="Calibri"/>
               </a:rPr>
@@ -17456,7 +17456,7 @@
             <a:avLst/>
           </a:prstGeom>
           <a:solidFill>
-            <a:srgbClr val="DA291C"/>
+            <a:srgbClr val="EC0000"/>
           </a:solidFill>
           <a:ln>
             <a:noFill/>
@@ -17569,7 +17569,7 @@
             <a:avLst/>
           </a:prstGeom>
           <a:solidFill>
-            <a:srgbClr val="DA291C"/>
+            <a:srgbClr val="EC0000"/>
           </a:solidFill>
           <a:ln>
             <a:noFill/>
@@ -17655,7 +17655,7 @@
             <a:avLst/>
           </a:prstGeom>
           <a:solidFill>
-            <a:srgbClr val="DA291C"/>
+            <a:srgbClr val="EC0000"/>
           </a:solidFill>
           <a:ln>
             <a:noFill/>
@@ -17812,7 +17812,7 @@
             <a:avLst/>
           </a:prstGeom>
           <a:solidFill>
-            <a:srgbClr val="DA291C"/>
+            <a:srgbClr val="EC0000"/>
           </a:solidFill>
           <a:ln>
             <a:noFill/>
@@ -17969,7 +17969,7 @@
             <a:avLst/>
           </a:prstGeom>
           <a:solidFill>
-            <a:srgbClr val="DA291C"/>
+            <a:srgbClr val="EC0000"/>
           </a:solidFill>
           <a:ln>
             <a:noFill/>
@@ -18027,7 +18027,7 @@
                 </a:solidFill>
                 <a:latin typeface="Calibri"/>
               </a:rPr>
-              <a:t>21</a:t>
+              <a:t>36</a:t>
             </a:r>
           </a:p>
         </p:txBody>
@@ -18126,7 +18126,7 @@
             <a:avLst/>
           </a:prstGeom>
           <a:solidFill>
-            <a:srgbClr val="DA291C"/>
+            <a:srgbClr val="EC0000"/>
           </a:solidFill>
           <a:ln>
             <a:noFill/>
@@ -18184,7 +18184,7 @@
                 </a:solidFill>
                 <a:latin typeface="Calibri"/>
               </a:rPr>
-              <a:t>12</a:t>
+              <a:t>17</a:t>
             </a:r>
           </a:p>
         </p:txBody>
@@ -18283,7 +18283,7 @@
             <a:avLst/>
           </a:prstGeom>
           <a:solidFill>
-            <a:srgbClr val="DA291C"/>
+            <a:srgbClr val="EC0000"/>
           </a:solidFill>
           <a:ln>
             <a:noFill/>
@@ -18440,7 +18440,7 @@
             <a:avLst/>
           </a:prstGeom>
           <a:solidFill>
-            <a:srgbClr val="DA291C"/>
+            <a:srgbClr val="EC0000"/>
           </a:solidFill>
           <a:ln>
             <a:noFill/>
@@ -19553,7 +19553,7 @@
             <a:r>
               <a:rPr sz="4800" b="1" i="0">
                 <a:solidFill>
-                  <a:srgbClr val="DA291C"/>
+                  <a:srgbClr val="EC0000"/>
                 </a:solidFill>
                 <a:latin typeface="Calibri"/>
               </a:rPr>
@@ -19665,7 +19665,7 @@
             <a:avLst/>
           </a:prstGeom>
           <a:solidFill>
-            <a:srgbClr val="FAF6EF"/>
+            <a:srgbClr val="FBF1EA"/>
           </a:solidFill>
           <a:ln>
             <a:noFill/>
@@ -19708,7 +19708,7 @@
             <a:avLst/>
           </a:prstGeom>
           <a:solidFill>
-            <a:srgbClr val="DA291C"/>
+            <a:srgbClr val="EC0000"/>
           </a:solidFill>
           <a:ln>
             <a:noFill/>
@@ -19875,7 +19875,7 @@
             <a:r>
               <a:rPr sz="900" b="1" i="0">
                 <a:solidFill>
-                  <a:srgbClr val="DA291C"/>
+                  <a:srgbClr val="EC0000"/>
                 </a:solidFill>
                 <a:latin typeface="Calibri"/>
               </a:rPr>
@@ -20077,7 +20077,7 @@
             <a:r>
               <a:rPr sz="900" b="1" i="0">
                 <a:solidFill>
-                  <a:srgbClr val="DA291C"/>
+                  <a:srgbClr val="EC0000"/>
                 </a:solidFill>
                 <a:latin typeface="Calibri"/>
               </a:rPr>
@@ -21370,7 +21370,7 @@
             <a:avLst/>
           </a:prstGeom>
           <a:solidFill>
-            <a:srgbClr val="FAF6EF"/>
+            <a:srgbClr val="FBF1EA"/>
           </a:solidFill>
           <a:ln>
             <a:noFill/>
@@ -21413,7 +21413,7 @@
             <a:avLst/>
           </a:prstGeom>
           <a:solidFill>
-            <a:srgbClr val="DA291C"/>
+            <a:srgbClr val="EC0000"/>
           </a:solidFill>
           <a:ln>
             <a:noFill/>
@@ -21614,7 +21614,7 @@
             <a:avLst/>
           </a:prstGeom>
           <a:solidFill>
-            <a:srgbClr val="DA291C"/>
+            <a:srgbClr val="EC0000"/>
           </a:solidFill>
           <a:ln>
             <a:noFill/>
@@ -21955,7 +21955,7 @@
             <a:avLst/>
           </a:prstGeom>
           <a:solidFill>
-            <a:srgbClr val="DA291C"/>
+            <a:srgbClr val="EC0000"/>
           </a:solidFill>
           <a:ln>
             <a:noFill/>
@@ -22216,7 +22216,7 @@
             <a:avLst/>
           </a:prstGeom>
           <a:solidFill>
-            <a:srgbClr val="DA291C"/>
+            <a:srgbClr val="EC0000"/>
           </a:solidFill>
           <a:ln>
             <a:noFill/>
@@ -22493,7 +22493,7 @@
             <a:avLst/>
           </a:prstGeom>
           <a:solidFill>
-            <a:srgbClr val="DA291C"/>
+            <a:srgbClr val="EC0000"/>
           </a:solidFill>
           <a:ln>
             <a:noFill/>
@@ -22802,7 +22802,7 @@
             <a:avLst/>
           </a:prstGeom>
           <a:solidFill>
-            <a:srgbClr val="DA291C"/>
+            <a:srgbClr val="EC0000"/>
           </a:solidFill>
           <a:ln>
             <a:noFill/>
@@ -23200,7 +23200,7 @@
             <a:avLst/>
           </a:prstGeom>
           <a:solidFill>
-            <a:srgbClr val="FAF6EF"/>
+            <a:srgbClr val="FBF1EA"/>
           </a:solidFill>
           <a:ln>
             <a:noFill/>
@@ -23243,7 +23243,7 @@
             <a:avLst/>
           </a:prstGeom>
           <a:solidFill>
-            <a:srgbClr val="DA291C"/>
+            <a:srgbClr val="EC0000"/>
           </a:solidFill>
           <a:ln>
             <a:noFill/>
@@ -23444,7 +23444,7 @@
             <a:avLst/>
           </a:prstGeom>
           <a:solidFill>
-            <a:srgbClr val="DA291C"/>
+            <a:srgbClr val="EC0000"/>
           </a:solidFill>
           <a:ln>
             <a:noFill/>
@@ -23533,7 +23533,7 @@
             <a:r>
               <a:rPr sz="700" b="1" i="0">
                 <a:solidFill>
-                  <a:srgbClr val="DA291C"/>
+                  <a:srgbClr val="EC0000"/>
                 </a:solidFill>
                 <a:latin typeface="Calibri"/>
               </a:rPr>
@@ -23641,7 +23641,7 @@
             <a:avLst/>
           </a:prstGeom>
           <a:solidFill>
-            <a:srgbClr val="DA291C"/>
+            <a:srgbClr val="EC0000"/>
           </a:solidFill>
           <a:ln>
             <a:noFill/>
@@ -23730,7 +23730,7 @@
             <a:r>
               <a:rPr sz="700" b="1" i="0">
                 <a:solidFill>
-                  <a:srgbClr val="DA291C"/>
+                  <a:srgbClr val="EC0000"/>
                 </a:solidFill>
                 <a:latin typeface="Calibri"/>
               </a:rPr>
@@ -23838,7 +23838,7 @@
             <a:avLst/>
           </a:prstGeom>
           <a:solidFill>
-            <a:srgbClr val="DA291C"/>
+            <a:srgbClr val="EC0000"/>
           </a:solidFill>
           <a:ln>
             <a:noFill/>
@@ -23927,7 +23927,7 @@
             <a:r>
               <a:rPr sz="700" b="1" i="0">
                 <a:solidFill>
-                  <a:srgbClr val="DA291C"/>
+                  <a:srgbClr val="EC0000"/>
                 </a:solidFill>
                 <a:latin typeface="Calibri"/>
               </a:rPr>
@@ -24035,7 +24035,7 @@
             <a:avLst/>
           </a:prstGeom>
           <a:solidFill>
-            <a:srgbClr val="DA291C"/>
+            <a:srgbClr val="EC0000"/>
           </a:solidFill>
           <a:ln>
             <a:noFill/>
@@ -24124,7 +24124,7 @@
             <a:r>
               <a:rPr sz="700" b="1" i="0">
                 <a:solidFill>
-                  <a:srgbClr val="DA291C"/>
+                  <a:srgbClr val="EC0000"/>
                 </a:solidFill>
                 <a:latin typeface="Calibri"/>
               </a:rPr>
@@ -24232,7 +24232,7 @@
             <a:avLst/>
           </a:prstGeom>
           <a:solidFill>
-            <a:srgbClr val="DA291C"/>
+            <a:srgbClr val="EC0000"/>
           </a:solidFill>
           <a:ln>
             <a:noFill/>
@@ -24321,7 +24321,7 @@
             <a:r>
               <a:rPr sz="700" b="1" i="0">
                 <a:solidFill>
-                  <a:srgbClr val="DA291C"/>
+                  <a:srgbClr val="EC0000"/>
                 </a:solidFill>
                 <a:latin typeface="Calibri"/>
               </a:rPr>
@@ -24429,7 +24429,7 @@
             <a:avLst/>
           </a:prstGeom>
           <a:solidFill>
-            <a:srgbClr val="DA291C"/>
+            <a:srgbClr val="EC0000"/>
           </a:solidFill>
           <a:ln>
             <a:noFill/>
@@ -24518,7 +24518,7 @@
             <a:r>
               <a:rPr sz="700" b="1" i="0">
                 <a:solidFill>
-                  <a:srgbClr val="DA291C"/>
+                  <a:srgbClr val="EC0000"/>
                 </a:solidFill>
                 <a:latin typeface="Calibri"/>
               </a:rPr>
@@ -24626,7 +24626,7 @@
             <a:avLst/>
           </a:prstGeom>
           <a:solidFill>
-            <a:srgbClr val="DA291C"/>
+            <a:srgbClr val="EC0000"/>
           </a:solidFill>
           <a:ln>
             <a:noFill/>
@@ -24715,7 +24715,7 @@
             <a:r>
               <a:rPr sz="700" b="1" i="0">
                 <a:solidFill>
-                  <a:srgbClr val="DA291C"/>
+                  <a:srgbClr val="EC0000"/>
                 </a:solidFill>
                 <a:latin typeface="Calibri"/>
               </a:rPr>
@@ -24823,7 +24823,7 @@
             <a:avLst/>
           </a:prstGeom>
           <a:solidFill>
-            <a:srgbClr val="DA291C"/>
+            <a:srgbClr val="EC0000"/>
           </a:solidFill>
           <a:ln>
             <a:noFill/>
@@ -24912,7 +24912,7 @@
             <a:r>
               <a:rPr sz="700" b="1" i="0">
                 <a:solidFill>
-                  <a:srgbClr val="DA291C"/>
+                  <a:srgbClr val="EC0000"/>
                 </a:solidFill>
                 <a:latin typeface="Calibri"/>
               </a:rPr>
@@ -25020,7 +25020,7 @@
             <a:avLst/>
           </a:prstGeom>
           <a:solidFill>
-            <a:srgbClr val="DA291C"/>
+            <a:srgbClr val="EC0000"/>
           </a:solidFill>
           <a:ln>
             <a:noFill/>
@@ -25109,7 +25109,7 @@
             <a:r>
               <a:rPr sz="700" b="1" i="0">
                 <a:solidFill>
-                  <a:srgbClr val="DA291C"/>
+                  <a:srgbClr val="EC0000"/>
                 </a:solidFill>
                 <a:latin typeface="Calibri"/>
               </a:rPr>
@@ -25217,7 +25217,7 @@
             <a:avLst/>
           </a:prstGeom>
           <a:solidFill>
-            <a:srgbClr val="DA291C"/>
+            <a:srgbClr val="EC0000"/>
           </a:solidFill>
           <a:ln>
             <a:noFill/>
@@ -25306,7 +25306,7 @@
             <a:r>
               <a:rPr sz="700" b="1" i="0">
                 <a:solidFill>
-                  <a:srgbClr val="DA291C"/>
+                  <a:srgbClr val="EC0000"/>
                 </a:solidFill>
                 <a:latin typeface="Calibri"/>
               </a:rPr>
@@ -25414,7 +25414,7 @@
             <a:avLst/>
           </a:prstGeom>
           <a:solidFill>
-            <a:srgbClr val="DA291C"/>
+            <a:srgbClr val="EC0000"/>
           </a:solidFill>
           <a:ln>
             <a:noFill/>
@@ -25503,7 +25503,7 @@
             <a:r>
               <a:rPr sz="700" b="1" i="0">
                 <a:solidFill>
-                  <a:srgbClr val="DA291C"/>
+                  <a:srgbClr val="EC0000"/>
                 </a:solidFill>
                 <a:latin typeface="Calibri"/>
               </a:rPr>
@@ -25611,7 +25611,7 @@
             <a:avLst/>
           </a:prstGeom>
           <a:solidFill>
-            <a:srgbClr val="DA291C"/>
+            <a:srgbClr val="EC0000"/>
           </a:solidFill>
           <a:ln>
             <a:noFill/>
@@ -25700,7 +25700,7 @@
             <a:r>
               <a:rPr sz="700" b="1" i="0">
                 <a:solidFill>
-                  <a:srgbClr val="DA291C"/>
+                  <a:srgbClr val="EC0000"/>
                 </a:solidFill>
                 <a:latin typeface="Calibri"/>
               </a:rPr>
@@ -25808,7 +25808,7 @@
             <a:avLst/>
           </a:prstGeom>
           <a:solidFill>
-            <a:srgbClr val="DA291C"/>
+            <a:srgbClr val="EC0000"/>
           </a:solidFill>
           <a:ln>
             <a:noFill/>
@@ -25897,7 +25897,7 @@
             <a:r>
               <a:rPr sz="700" b="1" i="0">
                 <a:solidFill>
-                  <a:srgbClr val="DA291C"/>
+                  <a:srgbClr val="EC0000"/>
                 </a:solidFill>
                 <a:latin typeface="Calibri"/>
               </a:rPr>
@@ -26153,7 +26153,7 @@
             <a:avLst/>
           </a:prstGeom>
           <a:solidFill>
-            <a:srgbClr val="DA291C"/>
+            <a:srgbClr val="EC0000"/>
           </a:solidFill>
           <a:ln>
             <a:noFill/>
@@ -26242,7 +26242,7 @@
             <a:r>
               <a:rPr sz="700" b="1" i="0">
                 <a:solidFill>
-                  <a:srgbClr val="DA291C"/>
+                  <a:srgbClr val="EC0000"/>
                 </a:solidFill>
                 <a:latin typeface="Calibri"/>
               </a:rPr>
@@ -26350,7 +26350,7 @@
             <a:avLst/>
           </a:prstGeom>
           <a:solidFill>
-            <a:srgbClr val="DA291C"/>
+            <a:srgbClr val="EC0000"/>
           </a:solidFill>
           <a:ln>
             <a:noFill/>
@@ -26439,7 +26439,7 @@
             <a:r>
               <a:rPr sz="700" b="1" i="0">
                 <a:solidFill>
-                  <a:srgbClr val="DA291C"/>
+                  <a:srgbClr val="EC0000"/>
                 </a:solidFill>
                 <a:latin typeface="Calibri"/>
               </a:rPr>
@@ -26547,7 +26547,7 @@
             <a:avLst/>
           </a:prstGeom>
           <a:solidFill>
-            <a:srgbClr val="DA291C"/>
+            <a:srgbClr val="EC0000"/>
           </a:solidFill>
           <a:ln>
             <a:noFill/>
@@ -26636,7 +26636,7 @@
             <a:r>
               <a:rPr sz="700" b="1" i="0">
                 <a:solidFill>
-                  <a:srgbClr val="DA291C"/>
+                  <a:srgbClr val="EC0000"/>
                 </a:solidFill>
                 <a:latin typeface="Calibri"/>
               </a:rPr>
@@ -26744,7 +26744,7 @@
             <a:avLst/>
           </a:prstGeom>
           <a:solidFill>
-            <a:srgbClr val="DA291C"/>
+            <a:srgbClr val="EC0000"/>
           </a:solidFill>
           <a:ln>
             <a:noFill/>
@@ -26833,7 +26833,7 @@
             <a:r>
               <a:rPr sz="700" b="1" i="0">
                 <a:solidFill>
-                  <a:srgbClr val="DA291C"/>
+                  <a:srgbClr val="EC0000"/>
                 </a:solidFill>
                 <a:latin typeface="Calibri"/>
               </a:rPr>
@@ -26914,7 +26914,7 @@
             <a:avLst/>
           </a:prstGeom>
           <a:solidFill>
-            <a:srgbClr val="FAF6EF"/>
+            <a:srgbClr val="FBF1EA"/>
           </a:solidFill>
           <a:ln>
             <a:noFill/>
@@ -26957,7 +26957,7 @@
             <a:avLst/>
           </a:prstGeom>
           <a:solidFill>
-            <a:srgbClr val="DA291C"/>
+            <a:srgbClr val="EC0000"/>
           </a:solidFill>
           <a:ln>
             <a:noFill/>
@@ -28477,7 +28477,7 @@
             <a:r>
               <a:rPr sz="850" b="1" i="0">
                 <a:solidFill>
-                  <a:srgbClr val="DA291C"/>
+                  <a:srgbClr val="EC0000"/>
                 </a:solidFill>
                 <a:latin typeface="Calibri"/>
               </a:rPr>
@@ -28732,7 +28732,7 @@
             <a:r>
               <a:rPr sz="850" b="1" i="0">
                 <a:solidFill>
-                  <a:srgbClr val="DA291C"/>
+                  <a:srgbClr val="EC0000"/>
                 </a:solidFill>
                 <a:latin typeface="Calibri"/>
               </a:rPr>
@@ -28987,7 +28987,7 @@
             <a:r>
               <a:rPr sz="850" b="1" i="0">
                 <a:solidFill>
-                  <a:srgbClr val="DA291C"/>
+                  <a:srgbClr val="EC0000"/>
                 </a:solidFill>
                 <a:latin typeface="Calibri"/>
               </a:rPr>
@@ -29232,7 +29232,7 @@
             <a:r>
               <a:rPr sz="800" b="0" i="0">
                 <a:solidFill>
-                  <a:srgbClr val="DA291C"/>
+                  <a:srgbClr val="EC0000"/>
                 </a:solidFill>
                 <a:latin typeface="Calibri"/>
               </a:rPr>
@@ -29457,7 +29457,7 @@
             <a:avLst/>
           </a:prstGeom>
           <a:solidFill>
-            <a:srgbClr val="FAF6EF"/>
+            <a:srgbClr val="FBF1EA"/>
           </a:solidFill>
           <a:ln>
             <a:noFill/>
@@ -29500,7 +29500,7 @@
             <a:avLst/>
           </a:prstGeom>
           <a:solidFill>
-            <a:srgbClr val="DA291C"/>
+            <a:srgbClr val="EC0000"/>
           </a:solidFill>
           <a:ln>
             <a:noFill/>
@@ -29701,7 +29701,7 @@
             <a:avLst/>
           </a:prstGeom>
           <a:solidFill>
-            <a:srgbClr val="DA291C"/>
+            <a:srgbClr val="EC0000"/>
           </a:solidFill>
           <a:ln>
             <a:noFill/>
@@ -29790,7 +29790,7 @@
             <a:r>
               <a:rPr sz="750" b="1" i="0">
                 <a:solidFill>
-                  <a:srgbClr val="DA291C"/>
+                  <a:srgbClr val="EC0000"/>
                 </a:solidFill>
                 <a:latin typeface="Calibri"/>
               </a:rPr>
@@ -29898,7 +29898,7 @@
             <a:avLst/>
           </a:prstGeom>
           <a:solidFill>
-            <a:srgbClr val="DA291C"/>
+            <a:srgbClr val="EC0000"/>
           </a:solidFill>
           <a:ln>
             <a:noFill/>
@@ -29987,7 +29987,7 @@
             <a:r>
               <a:rPr sz="750" b="1" i="0">
                 <a:solidFill>
-                  <a:srgbClr val="DA291C"/>
+                  <a:srgbClr val="EC0000"/>
                 </a:solidFill>
                 <a:latin typeface="Calibri"/>
               </a:rPr>
@@ -30095,7 +30095,7 @@
             <a:avLst/>
           </a:prstGeom>
           <a:solidFill>
-            <a:srgbClr val="DA291C"/>
+            <a:srgbClr val="EC0000"/>
           </a:solidFill>
           <a:ln>
             <a:noFill/>
@@ -30184,7 +30184,7 @@
             <a:r>
               <a:rPr sz="750" b="1" i="0">
                 <a:solidFill>
-                  <a:srgbClr val="DA291C"/>
+                  <a:srgbClr val="EC0000"/>
                 </a:solidFill>
                 <a:latin typeface="Calibri"/>
               </a:rPr>
@@ -30292,7 +30292,7 @@
             <a:avLst/>
           </a:prstGeom>
           <a:solidFill>
-            <a:srgbClr val="DA291C"/>
+            <a:srgbClr val="EC0000"/>
           </a:solidFill>
           <a:ln>
             <a:noFill/>
@@ -30381,7 +30381,7 @@
             <a:r>
               <a:rPr sz="750" b="1" i="0">
                 <a:solidFill>
-                  <a:srgbClr val="DA291C"/>
+                  <a:srgbClr val="EC0000"/>
                 </a:solidFill>
                 <a:latin typeface="Calibri"/>
               </a:rPr>
@@ -30489,7 +30489,7 @@
             <a:avLst/>
           </a:prstGeom>
           <a:solidFill>
-            <a:srgbClr val="DA291C"/>
+            <a:srgbClr val="EC0000"/>
           </a:solidFill>
           <a:ln>
             <a:noFill/>
@@ -30578,7 +30578,7 @@
             <a:r>
               <a:rPr sz="750" b="1" i="0">
                 <a:solidFill>
-                  <a:srgbClr val="DA291C"/>
+                  <a:srgbClr val="EC0000"/>
                 </a:solidFill>
                 <a:latin typeface="Calibri"/>
               </a:rPr>
@@ -30686,7 +30686,7 @@
             <a:avLst/>
           </a:prstGeom>
           <a:solidFill>
-            <a:srgbClr val="DA291C"/>
+            <a:srgbClr val="EC0000"/>
           </a:solidFill>
           <a:ln>
             <a:noFill/>
@@ -30775,7 +30775,7 @@
             <a:r>
               <a:rPr sz="750" b="1" i="0">
                 <a:solidFill>
-                  <a:srgbClr val="DA291C"/>
+                  <a:srgbClr val="EC0000"/>
                 </a:solidFill>
                 <a:latin typeface="Calibri"/>
               </a:rPr>
@@ -30883,7 +30883,7 @@
             <a:avLst/>
           </a:prstGeom>
           <a:solidFill>
-            <a:srgbClr val="DA291C"/>
+            <a:srgbClr val="EC0000"/>
           </a:solidFill>
           <a:ln>
             <a:noFill/>
@@ -30972,7 +30972,7 @@
             <a:r>
               <a:rPr sz="750" b="1" i="0">
                 <a:solidFill>
-                  <a:srgbClr val="DA291C"/>
+                  <a:srgbClr val="EC0000"/>
                 </a:solidFill>
                 <a:latin typeface="Calibri"/>
               </a:rPr>
@@ -31080,7 +31080,7 @@
             <a:avLst/>
           </a:prstGeom>
           <a:solidFill>
-            <a:srgbClr val="DA291C"/>
+            <a:srgbClr val="EC0000"/>
           </a:solidFill>
           <a:ln>
             <a:noFill/>
@@ -31169,7 +31169,7 @@
             <a:r>
               <a:rPr sz="750" b="1" i="0">
                 <a:solidFill>
-                  <a:srgbClr val="DA291C"/>
+                  <a:srgbClr val="EC0000"/>
                 </a:solidFill>
                 <a:latin typeface="Calibri"/>
               </a:rPr>
@@ -31277,7 +31277,7 @@
             <a:avLst/>
           </a:prstGeom>
           <a:solidFill>
-            <a:srgbClr val="DA291C"/>
+            <a:srgbClr val="EC0000"/>
           </a:solidFill>
           <a:ln>
             <a:noFill/>
@@ -31366,7 +31366,7 @@
             <a:r>
               <a:rPr sz="750" b="1" i="0">
                 <a:solidFill>
-                  <a:srgbClr val="DA291C"/>
+                  <a:srgbClr val="EC0000"/>
                 </a:solidFill>
                 <a:latin typeface="Calibri"/>
               </a:rPr>
@@ -31474,7 +31474,7 @@
             <a:avLst/>
           </a:prstGeom>
           <a:solidFill>
-            <a:srgbClr val="DA291C"/>
+            <a:srgbClr val="EC0000"/>
           </a:solidFill>
           <a:ln>
             <a:noFill/>
@@ -31563,7 +31563,7 @@
             <a:r>
               <a:rPr sz="750" b="1" i="0">
                 <a:solidFill>
-                  <a:srgbClr val="DA291C"/>
+                  <a:srgbClr val="EC0000"/>
                 </a:solidFill>
                 <a:latin typeface="Calibri"/>
               </a:rPr>
@@ -31792,7 +31792,7 @@
             <a:avLst/>
           </a:prstGeom>
           <a:solidFill>
-            <a:srgbClr val="FAF6EF"/>
+            <a:srgbClr val="FBF1EA"/>
           </a:solidFill>
           <a:ln>
             <a:noFill/>
@@ -31835,7 +31835,7 @@
             <a:avLst/>
           </a:prstGeom>
           <a:solidFill>
-            <a:srgbClr val="DA291C"/>
+            <a:srgbClr val="EC0000"/>
           </a:solidFill>
           <a:ln>
             <a:noFill/>
@@ -32036,7 +32036,7 @@
             <a:avLst/>
           </a:prstGeom>
           <a:solidFill>
-            <a:srgbClr val="DA291C"/>
+            <a:srgbClr val="EC0000"/>
           </a:solidFill>
           <a:ln>
             <a:noFill/>
@@ -32125,7 +32125,7 @@
             <a:r>
               <a:rPr sz="700" b="1" i="0">
                 <a:solidFill>
-                  <a:srgbClr val="DA291C"/>
+                  <a:srgbClr val="EC0000"/>
                 </a:solidFill>
                 <a:latin typeface="Calibri"/>
               </a:rPr>
@@ -32233,7 +32233,7 @@
             <a:avLst/>
           </a:prstGeom>
           <a:solidFill>
-            <a:srgbClr val="DA291C"/>
+            <a:srgbClr val="EC0000"/>
           </a:solidFill>
           <a:ln>
             <a:noFill/>
@@ -32322,7 +32322,7 @@
             <a:r>
               <a:rPr sz="700" b="1" i="0">
                 <a:solidFill>
-                  <a:srgbClr val="DA291C"/>
+                  <a:srgbClr val="EC0000"/>
                 </a:solidFill>
                 <a:latin typeface="Calibri"/>
               </a:rPr>
@@ -32430,7 +32430,7 @@
             <a:avLst/>
           </a:prstGeom>
           <a:solidFill>
-            <a:srgbClr val="DA291C"/>
+            <a:srgbClr val="EC0000"/>
           </a:solidFill>
           <a:ln>
             <a:noFill/>
@@ -32519,7 +32519,7 @@
             <a:r>
               <a:rPr sz="700" b="1" i="0">
                 <a:solidFill>
-                  <a:srgbClr val="DA291C"/>
+                  <a:srgbClr val="EC0000"/>
                 </a:solidFill>
                 <a:latin typeface="Calibri"/>
               </a:rPr>
@@ -32627,7 +32627,7 @@
             <a:avLst/>
           </a:prstGeom>
           <a:solidFill>
-            <a:srgbClr val="DA291C"/>
+            <a:srgbClr val="EC0000"/>
           </a:solidFill>
           <a:ln>
             <a:noFill/>
@@ -32716,7 +32716,7 @@
             <a:r>
               <a:rPr sz="700" b="1" i="0">
                 <a:solidFill>
-                  <a:srgbClr val="DA291C"/>
+                  <a:srgbClr val="EC0000"/>
                 </a:solidFill>
                 <a:latin typeface="Calibri"/>
               </a:rPr>
@@ -32824,7 +32824,7 @@
             <a:avLst/>
           </a:prstGeom>
           <a:solidFill>
-            <a:srgbClr val="DA291C"/>
+            <a:srgbClr val="EC0000"/>
           </a:solidFill>
           <a:ln>
             <a:noFill/>
@@ -32913,7 +32913,7 @@
             <a:r>
               <a:rPr sz="700" b="1" i="0">
                 <a:solidFill>
-                  <a:srgbClr val="DA291C"/>
+                  <a:srgbClr val="EC0000"/>
                 </a:solidFill>
                 <a:latin typeface="Calibri"/>
               </a:rPr>
@@ -33021,7 +33021,7 @@
             <a:avLst/>
           </a:prstGeom>
           <a:solidFill>
-            <a:srgbClr val="DA291C"/>
+            <a:srgbClr val="EC0000"/>
           </a:solidFill>
           <a:ln>
             <a:noFill/>
@@ -33110,7 +33110,7 @@
             <a:r>
               <a:rPr sz="700" b="1" i="0">
                 <a:solidFill>
-                  <a:srgbClr val="DA291C"/>
+                  <a:srgbClr val="EC0000"/>
                 </a:solidFill>
                 <a:latin typeface="Calibri"/>
               </a:rPr>
@@ -33218,7 +33218,7 @@
             <a:avLst/>
           </a:prstGeom>
           <a:solidFill>
-            <a:srgbClr val="DA291C"/>
+            <a:srgbClr val="EC0000"/>
           </a:solidFill>
           <a:ln>
             <a:noFill/>
@@ -33307,7 +33307,7 @@
             <a:r>
               <a:rPr sz="700" b="1" i="0">
                 <a:solidFill>
-                  <a:srgbClr val="DA291C"/>
+                  <a:srgbClr val="EC0000"/>
                 </a:solidFill>
                 <a:latin typeface="Calibri"/>
               </a:rPr>
@@ -33415,7 +33415,7 @@
             <a:avLst/>
           </a:prstGeom>
           <a:solidFill>
-            <a:srgbClr val="DA291C"/>
+            <a:srgbClr val="EC0000"/>
           </a:solidFill>
           <a:ln>
             <a:noFill/>
@@ -33504,7 +33504,7 @@
             <a:r>
               <a:rPr sz="700" b="1" i="0">
                 <a:solidFill>
-                  <a:srgbClr val="DA291C"/>
+                  <a:srgbClr val="EC0000"/>
                 </a:solidFill>
                 <a:latin typeface="Calibri"/>
               </a:rPr>
@@ -33612,7 +33612,7 @@
             <a:avLst/>
           </a:prstGeom>
           <a:solidFill>
-            <a:srgbClr val="DA291C"/>
+            <a:srgbClr val="EC0000"/>
           </a:solidFill>
           <a:ln>
             <a:noFill/>
@@ -33701,7 +33701,7 @@
             <a:r>
               <a:rPr sz="700" b="1" i="0">
                 <a:solidFill>
-                  <a:srgbClr val="DA291C"/>
+                  <a:srgbClr val="EC0000"/>
                 </a:solidFill>
                 <a:latin typeface="Calibri"/>
               </a:rPr>
@@ -33930,7 +33930,7 @@
             <a:avLst/>
           </a:prstGeom>
           <a:solidFill>
-            <a:srgbClr val="FAF6EF"/>
+            <a:srgbClr val="FBF1EA"/>
           </a:solidFill>
           <a:ln>
             <a:noFill/>
@@ -33973,7 +33973,7 @@
             <a:avLst/>
           </a:prstGeom>
           <a:solidFill>
-            <a:srgbClr val="DA291C"/>
+            <a:srgbClr val="EC0000"/>
           </a:solidFill>
           <a:ln>
             <a:noFill/>
@@ -34174,7 +34174,7 @@
             <a:avLst/>
           </a:prstGeom>
           <a:solidFill>
-            <a:srgbClr val="DA291C"/>
+            <a:srgbClr val="EC0000"/>
           </a:solidFill>
           <a:ln>
             <a:noFill/>
@@ -34336,7 +34336,7 @@
             <a:avLst/>
           </a:prstGeom>
           <a:solidFill>
-            <a:srgbClr val="DA291C"/>
+            <a:srgbClr val="EC0000"/>
           </a:solidFill>
           <a:ln>
             <a:noFill/>
@@ -34498,7 +34498,7 @@
             <a:avLst/>
           </a:prstGeom>
           <a:solidFill>
-            <a:srgbClr val="DA291C"/>
+            <a:srgbClr val="EC0000"/>
           </a:solidFill>
           <a:ln>
             <a:noFill/>
@@ -34660,7 +34660,7 @@
             <a:avLst/>
           </a:prstGeom>
           <a:solidFill>
-            <a:srgbClr val="DA291C"/>
+            <a:srgbClr val="EC0000"/>
           </a:solidFill>
           <a:ln>
             <a:noFill/>
@@ -34822,7 +34822,7 @@
             <a:avLst/>
           </a:prstGeom>
           <a:solidFill>
-            <a:srgbClr val="DA291C"/>
+            <a:srgbClr val="EC0000"/>
           </a:solidFill>
           <a:ln>
             <a:noFill/>
@@ -34984,7 +34984,7 @@
             <a:avLst/>
           </a:prstGeom>
           <a:solidFill>
-            <a:srgbClr val="DA291C"/>
+            <a:srgbClr val="EC0000"/>
           </a:solidFill>
           <a:ln>
             <a:noFill/>
@@ -35146,7 +35146,7 @@
             <a:avLst/>
           </a:prstGeom>
           <a:solidFill>
-            <a:srgbClr val="DA291C"/>
+            <a:srgbClr val="EC0000"/>
           </a:solidFill>
           <a:ln>
             <a:noFill/>
@@ -35308,7 +35308,7 @@
             <a:avLst/>
           </a:prstGeom>
           <a:solidFill>
-            <a:srgbClr val="DA291C"/>
+            <a:srgbClr val="EC0000"/>
           </a:solidFill>
           <a:ln>
             <a:noFill/>
@@ -35591,7 +35591,7 @@
             <a:avLst/>
           </a:prstGeom>
           <a:solidFill>
-            <a:srgbClr val="FAF6EF"/>
+            <a:srgbClr val="FBF1EA"/>
           </a:solidFill>
           <a:ln>
             <a:noFill/>
@@ -35634,7 +35634,7 @@
             <a:avLst/>
           </a:prstGeom>
           <a:solidFill>
-            <a:srgbClr val="DA291C"/>
+            <a:srgbClr val="EC0000"/>
           </a:solidFill>
           <a:ln>
             <a:noFill/>
@@ -35835,7 +35835,7 @@
             <a:avLst/>
           </a:prstGeom>
           <a:solidFill>
-            <a:srgbClr val="DA291C"/>
+            <a:srgbClr val="EC0000"/>
           </a:solidFill>
           <a:ln>
             <a:noFill/>
@@ -35932,7 +35932,7 @@
             <a:r>
               <a:rPr sz="1800" b="1" i="0">
                 <a:solidFill>
-                  <a:srgbClr val="DA291C"/>
+                  <a:srgbClr val="EC0000"/>
                 </a:solidFill>
                 <a:latin typeface="Calibri"/>
               </a:rPr>

--- a/Santander_Project_Record.pptx
+++ b/Santander_Project_Record.pptx
@@ -3538,7 +3538,7 @@
                 </a:solidFill>
                 <a:latin typeface="Calibri"/>
               </a:rPr>
-              <a:t>Date: June 2026</a:t>
+              <a:t>Date: July 2026</a:t>
             </a:r>
           </a:p>
         </p:txBody>
@@ -6583,7 +6583,7 @@
                 </a:solidFill>
                 <a:latin typeface="Calibri"/>
               </a:rPr>
-              <a:t>Alan Davidson · Business Banking Advisor · Self-initiated · Own time · June 2026</a:t>
+              <a:t>Alan Davidson · Business Banking Advisor · Self-initiated · Own time · July 2026</a:t>
             </a:r>
           </a:p>
         </p:txBody>
@@ -9993,7 +9993,7 @@
                 </a:solidFill>
                 <a:latin typeface="Calibri"/>
               </a:rPr>
-              <a:t>Alan Davidson · Business Banking Advisor · Self-initiated · Own time · June 2026</a:t>
+              <a:t>Alan Davidson · Business Banking Advisor · Self-initiated · Own time · July 2026</a:t>
             </a:r>
           </a:p>
         </p:txBody>
@@ -15516,7 +15516,7 @@
                 </a:solidFill>
                 <a:latin typeface="Calibri"/>
               </a:rPr>
-              <a:t>Alan Davidson · Business Banking Advisor · Self-initiated · Own time · June 2026</a:t>
+              <a:t>Alan Davidson · Business Banking Advisor · Self-initiated · Own time · July 2026</a:t>
             </a:r>
           </a:p>
         </p:txBody>
@@ -17340,7 +17340,7 @@
                 </a:solidFill>
                 <a:latin typeface="Calibri"/>
               </a:rPr>
-              <a:t>Alan Davidson · Business Banking Advisor · Self-initiated · Own time · June 2026</a:t>
+              <a:t>Alan Davidson · Business Banking Advisor · Self-initiated · Own time · July 2026</a:t>
             </a:r>
           </a:p>
         </p:txBody>
@@ -19522,7 +19522,7 @@
                 </a:solidFill>
                 <a:latin typeface="Calibri"/>
               </a:rPr>
-              <a:t>Alan Davidson · Business Banking Advisor · Santander · June 2026</a:t>
+              <a:t>Alan Davidson · Business Banking Advisor · Santander · July 2026</a:t>
             </a:r>
           </a:p>
         </p:txBody>
@@ -21297,7 +21297,7 @@
                 </a:solidFill>
                 <a:latin typeface="Calibri"/>
               </a:rPr>
-              <a:t>Alan Davidson · Business Banking Advisor · Self-initiated · Own time · June 2026</a:t>
+              <a:t>Alan Davidson · Business Banking Advisor · Self-initiated · Own time · July 2026</a:t>
             </a:r>
           </a:p>
         </p:txBody>
@@ -23127,7 +23127,7 @@
                 </a:solidFill>
                 <a:latin typeface="Calibri"/>
               </a:rPr>
-              <a:t>Alan Davidson · Business Banking Advisor · Self-initiated · Own time · June 2026</a:t>
+              <a:t>Alan Davidson · Business Banking Advisor · Self-initiated · Own time · July 2026</a:t>
             </a:r>
           </a:p>
         </p:txBody>
@@ -26053,7 +26053,7 @@
                 </a:solidFill>
                 <a:latin typeface="Calibri"/>
               </a:rPr>
-              <a:t>Alan Davidson · Business Banking Advisor · Self-initiated · Own time · June 2026</a:t>
+              <a:t>Alan Davidson · Business Banking Advisor · Self-initiated · Own time · July 2026</a:t>
             </a:r>
           </a:p>
         </p:txBody>
@@ -29384,7 +29384,7 @@
                 </a:solidFill>
                 <a:latin typeface="Calibri"/>
               </a:rPr>
-              <a:t>Alan Davidson · Business Banking Advisor · Self-initiated · Own time · June 2026</a:t>
+              <a:t>Alan Davidson · Business Banking Advisor · Self-initiated · Own time · July 2026</a:t>
             </a:r>
           </a:p>
         </p:txBody>
@@ -31719,7 +31719,7 @@
                 </a:solidFill>
                 <a:latin typeface="Calibri"/>
               </a:rPr>
-              <a:t>Alan Davidson · Business Banking Advisor · Self-initiated · Own time · June 2026</a:t>
+              <a:t>Alan Davidson · Business Banking Advisor · Self-initiated · Own time · July 2026</a:t>
             </a:r>
           </a:p>
         </p:txBody>
@@ -33857,7 +33857,7 @@
                 </a:solidFill>
                 <a:latin typeface="Calibri"/>
               </a:rPr>
-              <a:t>Alan Davidson · Business Banking Advisor · Self-initiated · Own time · June 2026</a:t>
+              <a:t>Alan Davidson · Business Banking Advisor · Self-initiated · Own time · July 2026</a:t>
             </a:r>
           </a:p>
         </p:txBody>
@@ -35518,7 +35518,7 @@
                 </a:solidFill>
                 <a:latin typeface="Calibri"/>
               </a:rPr>
-              <a:t>Alan Davidson · Business Banking Advisor · Self-initiated · Own time · June 2026</a:t>
+              <a:t>Alan Davidson · Business Banking Advisor · Self-initiated · Own time · July 2026</a:t>
             </a:r>
           </a:p>
         </p:txBody>
@@ -38017,7 +38017,7 @@
                 </a:solidFill>
                 <a:latin typeface="Calibri"/>
               </a:rPr>
-              <a:t>Alan Davidson · Business Banking Advisor · Self-initiated · Own time · June 2026</a:t>
+              <a:t>Alan Davidson · Business Banking Advisor · Self-initiated · Own time · July 2026</a:t>
             </a:r>
           </a:p>
         </p:txBody>
